--- a/lessons/lesson-06/slides.pptx
+++ b/lessons/lesson-06/slides.pptx
@@ -2,34 +2,34 @@
 <file path=ppt/presentation.xml><?xml version="1.0" encoding="utf-8"?>
 <p:presentation xmlns:p="http://schemas.openxmlformats.org/presentationml/2006/main">
   <p:sldMasterIdLst>
-    <p:sldMasterId xmlns:r="http://schemas.openxmlformats.org/officeDocument/2006/relationships" id="2147483648" r:id="R4154afdf763a4031"/>
+    <p:sldMasterId xmlns:r="http://schemas.openxmlformats.org/officeDocument/2006/relationships" id="2147483648" r:id="R1f1996b2df5444e4"/>
   </p:sldMasterIdLst>
   <p:notesMasterIdLst>
-    <p:notesMasterId xmlns:r="http://schemas.openxmlformats.org/officeDocument/2006/relationships" r:id="R93efaa38cff24399"/>
+    <p:notesMasterId xmlns:r="http://schemas.openxmlformats.org/officeDocument/2006/relationships" r:id="R3767fecbeeb14f7e"/>
   </p:notesMasterIdLst>
   <p:sldIdLst>
-    <p:sldId xmlns:r="http://schemas.openxmlformats.org/officeDocument/2006/relationships" id="256" r:id="R31fe9051c84f4c7f"/>
-    <p:sldId xmlns:r="http://schemas.openxmlformats.org/officeDocument/2006/relationships" id="257" r:id="R56dc0ae13c8e4eef"/>
-    <p:sldId xmlns:r="http://schemas.openxmlformats.org/officeDocument/2006/relationships" id="258" r:id="Rc2f21dc986164cd5"/>
-    <p:sldId xmlns:r="http://schemas.openxmlformats.org/officeDocument/2006/relationships" id="259" r:id="Rc8021bc331bf4e37"/>
-    <p:sldId xmlns:r="http://schemas.openxmlformats.org/officeDocument/2006/relationships" id="260" r:id="R6c69ce975d47431d"/>
-    <p:sldId xmlns:r="http://schemas.openxmlformats.org/officeDocument/2006/relationships" id="261" r:id="R871e99c8cfd44164"/>
-    <p:sldId xmlns:r="http://schemas.openxmlformats.org/officeDocument/2006/relationships" id="262" r:id="Raaa3cd008bf2468f"/>
-    <p:sldId xmlns:r="http://schemas.openxmlformats.org/officeDocument/2006/relationships" id="263" r:id="Recfc98b6100c4a27"/>
-    <p:sldId xmlns:r="http://schemas.openxmlformats.org/officeDocument/2006/relationships" id="264" r:id="R36559f38a1c84c9f"/>
-    <p:sldId xmlns:r="http://schemas.openxmlformats.org/officeDocument/2006/relationships" id="265" r:id="Rfd96a2c6c4e74887"/>
-    <p:sldId xmlns:r="http://schemas.openxmlformats.org/officeDocument/2006/relationships" id="266" r:id="R9fbefa3fe6f54805"/>
-    <p:sldId xmlns:r="http://schemas.openxmlformats.org/officeDocument/2006/relationships" id="267" r:id="R153a1ce4f92e40d9"/>
-    <p:sldId xmlns:r="http://schemas.openxmlformats.org/officeDocument/2006/relationships" id="268" r:id="Rbbf9341e30804893"/>
-    <p:sldId xmlns:r="http://schemas.openxmlformats.org/officeDocument/2006/relationships" id="269" r:id="Rea1856a2d5fd40cf"/>
-    <p:sldId xmlns:r="http://schemas.openxmlformats.org/officeDocument/2006/relationships" id="270" r:id="Ree152d488cd3407f"/>
-    <p:sldId xmlns:r="http://schemas.openxmlformats.org/officeDocument/2006/relationships" id="271" r:id="R6aa86859ee804bc0"/>
-    <p:sldId xmlns:r="http://schemas.openxmlformats.org/officeDocument/2006/relationships" id="272" r:id="R07a2e092be154e27"/>
-    <p:sldId xmlns:r="http://schemas.openxmlformats.org/officeDocument/2006/relationships" id="273" r:id="R26ed43855aeb4794"/>
-    <p:sldId xmlns:r="http://schemas.openxmlformats.org/officeDocument/2006/relationships" id="274" r:id="Ref1cbdc17c384281"/>
-    <p:sldId xmlns:r="http://schemas.openxmlformats.org/officeDocument/2006/relationships" id="275" r:id="R2de3a00ee04f4caa"/>
-    <p:sldId xmlns:r="http://schemas.openxmlformats.org/officeDocument/2006/relationships" id="276" r:id="R307c354e5fb44d9f"/>
-    <p:sldId xmlns:r="http://schemas.openxmlformats.org/officeDocument/2006/relationships" id="277" r:id="R04d8d8084c724cd0"/>
+    <p:sldId xmlns:r="http://schemas.openxmlformats.org/officeDocument/2006/relationships" id="256" r:id="R196eb361daa3470a"/>
+    <p:sldId xmlns:r="http://schemas.openxmlformats.org/officeDocument/2006/relationships" id="257" r:id="R2b7af4b30ec942f3"/>
+    <p:sldId xmlns:r="http://schemas.openxmlformats.org/officeDocument/2006/relationships" id="258" r:id="R5f34d1269a0e498b"/>
+    <p:sldId xmlns:r="http://schemas.openxmlformats.org/officeDocument/2006/relationships" id="259" r:id="Rdd73d46da2834aa2"/>
+    <p:sldId xmlns:r="http://schemas.openxmlformats.org/officeDocument/2006/relationships" id="260" r:id="R73279445bbc64fe0"/>
+    <p:sldId xmlns:r="http://schemas.openxmlformats.org/officeDocument/2006/relationships" id="261" r:id="Ra0c769f8952c4af4"/>
+    <p:sldId xmlns:r="http://schemas.openxmlformats.org/officeDocument/2006/relationships" id="262" r:id="Rf554367159e14942"/>
+    <p:sldId xmlns:r="http://schemas.openxmlformats.org/officeDocument/2006/relationships" id="263" r:id="Rd0c13eb34e3a414f"/>
+    <p:sldId xmlns:r="http://schemas.openxmlformats.org/officeDocument/2006/relationships" id="264" r:id="R8d36bfe127494c67"/>
+    <p:sldId xmlns:r="http://schemas.openxmlformats.org/officeDocument/2006/relationships" id="265" r:id="R399eecaec49f4e98"/>
+    <p:sldId xmlns:r="http://schemas.openxmlformats.org/officeDocument/2006/relationships" id="266" r:id="R19218ad1f80d4f07"/>
+    <p:sldId xmlns:r="http://schemas.openxmlformats.org/officeDocument/2006/relationships" id="267" r:id="R529e2a9c31ea4868"/>
+    <p:sldId xmlns:r="http://schemas.openxmlformats.org/officeDocument/2006/relationships" id="268" r:id="R7f19955039d64783"/>
+    <p:sldId xmlns:r="http://schemas.openxmlformats.org/officeDocument/2006/relationships" id="269" r:id="R9590b082cf71437c"/>
+    <p:sldId xmlns:r="http://schemas.openxmlformats.org/officeDocument/2006/relationships" id="270" r:id="R3d4e4b09042a4f5e"/>
+    <p:sldId xmlns:r="http://schemas.openxmlformats.org/officeDocument/2006/relationships" id="271" r:id="R8ccd27b63b204c15"/>
+    <p:sldId xmlns:r="http://schemas.openxmlformats.org/officeDocument/2006/relationships" id="272" r:id="R31cf248374b645cb"/>
+    <p:sldId xmlns:r="http://schemas.openxmlformats.org/officeDocument/2006/relationships" id="273" r:id="R1a3b91c9da3344eb"/>
+    <p:sldId xmlns:r="http://schemas.openxmlformats.org/officeDocument/2006/relationships" id="274" r:id="R5436540deca54bd7"/>
+    <p:sldId xmlns:r="http://schemas.openxmlformats.org/officeDocument/2006/relationships" id="275" r:id="Rd1b18bbf302b4c54"/>
+    <p:sldId xmlns:r="http://schemas.openxmlformats.org/officeDocument/2006/relationships" id="276" r:id="Rc3bab328cf0145fb"/>
+    <p:sldId xmlns:r="http://schemas.openxmlformats.org/officeDocument/2006/relationships" id="277" r:id="R6df83d27f37d40fc"/>
   </p:sldIdLst>
   <p:sldSz cx="12192000" cy="6858000"/>
   <p:notesSz cx="6858000" cy="9144000"/>
@@ -409,7 +409,92 @@
           <a:lstStyle xmlns:a="http://schemas.openxmlformats.org/drawingml/2006/main"/>
           <a:p xmlns:a="http://schemas.openxmlformats.org/drawingml/2006/main">
             <a:r>
-              <a:t>页面标题：第6讲 研究问题、问题定义与第一性原理</a:t>
+              <a:t>页面：P01 第6讲 研究问题、问题定义与第一性原理</a:t>
+            </a:r>
+          </a:p>
+          <a:p xmlns:a="http://schemas.openxmlformats.org/drawingml/2006/main">
+            <a:r>
+              <a:t/>
+            </a:r>
+          </a:p>
+          <a:p xmlns:a="http://schemas.openxmlformats.org/drawingml/2006/main">
+            <a:r>
+              <a:t>讲义位置：本课讲义；见逐页母稿映射表</a:t>
+            </a:r>
+          </a:p>
+          <a:p xmlns:a="http://schemas.openxmlformats.org/drawingml/2006/main">
+            <a:r>
+              <a:t/>
+            </a:r>
+          </a:p>
+          <a:p xmlns:a="http://schemas.openxmlformats.org/drawingml/2006/main">
+            <a:r>
+              <a:t>屏显核对：</a:t>
+            </a:r>
+          </a:p>
+          <a:p xmlns:a="http://schemas.openxmlformats.org/drawingml/2006/main">
+            <a:r>
+              <a:t>第6讲 研究问题、问题定义与第一性原理</a:t>
+            </a:r>
+          </a:p>
+          <a:p xmlns:a="http://schemas.openxmlformats.org/drawingml/2006/main">
+            <a:r>
+              <a:t/>
+            </a:r>
+          </a:p>
+          <a:p xmlns:a="http://schemas.openxmlformats.org/drawingml/2006/main">
+            <a:r>
+              <a:t>教师讲述：</a:t>
+            </a:r>
+          </a:p>
+          <a:p xmlns:a="http://schemas.openxmlformats.org/drawingml/2006/main">
+            <a:r>
+              <a:t>开场放下研究空白清单。第 5 课已经识别了研究空白候选并通过了三步检验，但空白本身还不是研究问题。本课把空白收敛为可检验问题，并完成第一次正式提交——问题门。</a:t>
+            </a:r>
+          </a:p>
+          <a:p xmlns:a="http://schemas.openxmlformats.org/drawingml/2006/main">
+            <a:r>
+              <a:t/>
+            </a:r>
+          </a:p>
+          <a:p xmlns:a="http://schemas.openxmlformats.org/drawingml/2006/main">
+            <a:r>
+              <a:t>学生动作：</a:t>
+            </a:r>
+          </a:p>
+          <a:p xmlns:a="http://schemas.openxmlformats.org/drawingml/2006/main">
+            <a:r>
+              <a:t>不展开课程行政信息，直接进入下一页回扣。</a:t>
+            </a:r>
+          </a:p>
+          <a:p xmlns:a="http://schemas.openxmlformats.org/drawingml/2006/main">
+            <a:r>
+              <a:t/>
+            </a:r>
+          </a:p>
+          <a:p xmlns:a="http://schemas.openxmlformats.org/drawingml/2006/main">
+            <a:r>
+              <a:t>来源与边界：</a:t>
+            </a:r>
+          </a:p>
+          <a:p xmlns:a="http://schemas.openxmlformats.org/drawingml/2006/main">
+            <a:r>
+              <a:t>课程定位以 [syllabus.md](../../course/syllabus.md) 与 [备课规划.md](../备课规划.md) 第 6 课段为准。</a:t>
+            </a:r>
+          </a:p>
+          <a:p xmlns:a="http://schemas.openxmlformats.org/drawingml/2006/main">
+            <a:r>
+              <a:t/>
+            </a:r>
+          </a:p>
+          <a:p xmlns:a="http://schemas.openxmlformats.org/drawingml/2006/main">
+            <a:r>
+              <a:t>---</a:t>
+            </a:r>
+          </a:p>
+          <a:p xmlns:a="http://schemas.openxmlformats.org/drawingml/2006/main">
+            <a:r>
+              <a:t/>
             </a:r>
           </a:p>
           <a:p xmlns:a="http://schemas.openxmlformats.org/drawingml/2006/main">
@@ -419,7 +504,27 @@
           </a:p>
           <a:p xmlns:a="http://schemas.openxmlformats.org/drawingml/2006/main">
             <a:r>
-              <a:t>- 本页仅使用课程内部规则与教学材料。</a:t>
+              <a:t/>
+            </a:r>
+          </a:p>
+          <a:p xmlns:a="http://schemas.openxmlformats.org/drawingml/2006/main">
+            <a:r>
+              <a:t>- 本课 handout.md 与 slides.md</a:t>
+            </a:r>
+          </a:p>
+          <a:p xmlns:a="http://schemas.openxmlformats.org/drawingml/2006/main">
+            <a:r>
+              <a:t/>
+            </a:r>
+          </a:p>
+          <a:p xmlns:a="http://schemas.openxmlformats.org/drawingml/2006/main">
+            <a:r>
+              <a:t>- ../../course/reading-card-case.md</a:t>
+            </a:r>
+          </a:p>
+          <a:p xmlns:a="http://schemas.openxmlformats.org/drawingml/2006/main">
+            <a:r>
+              <a:t/>
             </a:r>
           </a:p>
           <a:p xmlns:a="http://schemas.openxmlformats.org/drawingml/2006/main">
@@ -494,7 +599,102 @@
           <a:lstStyle xmlns:a="http://schemas.openxmlformats.org/drawingml/2006/main"/>
           <a:p xmlns:a="http://schemas.openxmlformats.org/drawingml/2006/main">
             <a:r>
-              <a:t>页面标题：把宽泛主张改写为可证伪命题</a:t>
+              <a:t>页面：P10 怎样的观察会削弱这条命题？</a:t>
+            </a:r>
+          </a:p>
+          <a:p xmlns:a="http://schemas.openxmlformats.org/drawingml/2006/main">
+            <a:r>
+              <a:t/>
+            </a:r>
+          </a:p>
+          <a:p xmlns:a="http://schemas.openxmlformats.org/drawingml/2006/main">
+            <a:r>
+              <a:t>讲义位置：handout.md §三、可证伪命题；五、问题门提交清单</a:t>
+            </a:r>
+          </a:p>
+          <a:p xmlns:a="http://schemas.openxmlformats.org/drawingml/2006/main">
+            <a:r>
+              <a:t/>
+            </a:r>
+          </a:p>
+          <a:p xmlns:a="http://schemas.openxmlformats.org/drawingml/2006/main">
+            <a:r>
+              <a:t>屏显核对：</a:t>
+            </a:r>
+          </a:p>
+          <a:p xmlns:a="http://schemas.openxmlformats.org/drawingml/2006/main">
+            <a:r>
+              <a:t>Q1：在限定材料与任务中，阅读卡降低限定条件遗漏率。</a:t>
+            </a:r>
+          </a:p>
+          <a:p xmlns:a="http://schemas.openxmlformats.org/drawingml/2006/main">
+            <a:r>
+              <a:t/>
+            </a:r>
+          </a:p>
+          <a:p xmlns:a="http://schemas.openxmlformats.org/drawingml/2006/main">
+            <a:r>
+              <a:t>结果检查：差异的方向、大小和不确定性。</a:t>
+            </a:r>
+          </a:p>
+          <a:p xmlns:a="http://schemas.openxmlformats.org/drawingml/2006/main">
+            <a:r>
+              <a:t>机制检查：另找能区分原因的观察。</a:t>
+            </a:r>
+          </a:p>
+          <a:p xmlns:a="http://schemas.openxmlformats.org/drawingml/2006/main">
+            <a:r>
+              <a:t>采用决定：质量代价、时间与资源是否可接受。</a:t>
+            </a:r>
+          </a:p>
+          <a:p xmlns:a="http://schemas.openxmlformats.org/drawingml/2006/main">
+            <a:r>
+              <a:t/>
+            </a:r>
+          </a:p>
+          <a:p xmlns:a="http://schemas.openxmlformats.org/drawingml/2006/main">
+            <a:r>
+              <a:t>教师讲述：</a:t>
+            </a:r>
+          </a:p>
+          <a:p xmlns:a="http://schemas.openxmlformats.org/drawingml/2006/main">
+            <a:r>
+              <a:t>先问“成本高就证明没有降低遗漏吗”。应回答不一定：效果命题可能成立，但不值得采用。反证点须对应命题中的谓词和范围；精度不足时保持未决。这里尚未展示构造结果，不能预告方法有效。</a:t>
+            </a:r>
+          </a:p>
+          <a:p xmlns:a="http://schemas.openxmlformats.org/drawingml/2006/main">
+            <a:r>
+              <a:t/>
+            </a:r>
+          </a:p>
+          <a:p xmlns:a="http://schemas.openxmlformats.org/drawingml/2006/main">
+            <a:r>
+              <a:t>学生动作：</a:t>
+            </a:r>
+          </a:p>
+          <a:p xmlns:a="http://schemas.openxmlformats.org/drawingml/2006/main">
+            <a:r>
+              <a:t>给自己的主张圈出结果谓词，写一项能削弱它的观察。</a:t>
+            </a:r>
+          </a:p>
+          <a:p xmlns:a="http://schemas.openxmlformats.org/drawingml/2006/main">
+            <a:r>
+              <a:t/>
+            </a:r>
+          </a:p>
+          <a:p xmlns:a="http://schemas.openxmlformats.org/drawingml/2006/main">
+            <a:r>
+              <a:t>来源与边界：</a:t>
+            </a:r>
+          </a:p>
+          <a:p xmlns:a="http://schemas.openxmlformats.org/drawingml/2006/main">
+            <a:r>
+              <a:t>./handout.md；课堂示例与构造数据见 ../../course/reading-card-case.md</a:t>
+            </a:r>
+          </a:p>
+          <a:p xmlns:a="http://schemas.openxmlformats.org/drawingml/2006/main">
+            <a:r>
+              <a:t/>
             </a:r>
           </a:p>
           <a:p xmlns:a="http://schemas.openxmlformats.org/drawingml/2006/main">
@@ -504,7 +704,27 @@
           </a:p>
           <a:p xmlns:a="http://schemas.openxmlformats.org/drawingml/2006/main">
             <a:r>
-              <a:t>- 本页仅使用课程内部规则与教学材料。</a:t>
+              <a:t/>
+            </a:r>
+          </a:p>
+          <a:p xmlns:a="http://schemas.openxmlformats.org/drawingml/2006/main">
+            <a:r>
+              <a:t>- 本课 handout.md 与 slides.md</a:t>
+            </a:r>
+          </a:p>
+          <a:p xmlns:a="http://schemas.openxmlformats.org/drawingml/2006/main">
+            <a:r>
+              <a:t/>
+            </a:r>
+          </a:p>
+          <a:p xmlns:a="http://schemas.openxmlformats.org/drawingml/2006/main">
+            <a:r>
+              <a:t>- ../../course/reading-card-case.md</a:t>
+            </a:r>
+          </a:p>
+          <a:p xmlns:a="http://schemas.openxmlformats.org/drawingml/2006/main">
+            <a:r>
+              <a:t/>
             </a:r>
           </a:p>
           <a:p xmlns:a="http://schemas.openxmlformats.org/drawingml/2006/main">
@@ -579,7 +799,117 @@
           <a:lstStyle xmlns:a="http://schemas.openxmlformats.org/drawingml/2006/main"/>
           <a:p xmlns:a="http://schemas.openxmlformats.org/drawingml/2006/main">
             <a:r>
-              <a:t>页面标题：给第 7 课留下替代解释标记</a:t>
+              <a:t>页面：P11 给第 7 课留下替代解释标记</a:t>
+            </a:r>
+          </a:p>
+          <a:p xmlns:a="http://schemas.openxmlformats.org/drawingml/2006/main">
+            <a:r>
+              <a:t/>
+            </a:r>
+          </a:p>
+          <a:p xmlns:a="http://schemas.openxmlformats.org/drawingml/2006/main">
+            <a:r>
+              <a:t>讲义位置：本课讲义；见逐页母稿映射表</a:t>
+            </a:r>
+          </a:p>
+          <a:p xmlns:a="http://schemas.openxmlformats.org/drawingml/2006/main">
+            <a:r>
+              <a:t/>
+            </a:r>
+          </a:p>
+          <a:p xmlns:a="http://schemas.openxmlformats.org/drawingml/2006/main">
+            <a:r>
+              <a:t>屏显核对：</a:t>
+            </a:r>
+          </a:p>
+          <a:p xmlns:a="http://schemas.openxmlformats.org/drawingml/2006/main">
+            <a:r>
+              <a:t>同一个结果可能有多种解释。</a:t>
+            </a:r>
+          </a:p>
+          <a:p xmlns:a="http://schemas.openxmlformats.org/drawingml/2006/main">
+            <a:r>
+              <a:t/>
+            </a:r>
+          </a:p>
+          <a:p xmlns:a="http://schemas.openxmlformats.org/drawingml/2006/main">
+            <a:r>
+              <a:t>H1 候选：生成时显式列出限定条件，促使输出保留更多。</a:t>
+            </a:r>
+          </a:p>
+          <a:p xmlns:a="http://schemas.openxmlformats.org/drawingml/2006/main">
+            <a:r>
+              <a:t>A2 候选：评分者看到字段提示，更容易给出保留分。</a:t>
+            </a:r>
+          </a:p>
+          <a:p xmlns:a="http://schemas.openxmlformats.org/drawingml/2006/main">
+            <a:r>
+              <a:t/>
+            </a:r>
+          </a:p>
+          <a:p xmlns:a="http://schemas.openxmlformats.org/drawingml/2006/main">
+            <a:r>
+              <a:t>第 7 课把候选解释变成可区分的观察。</a:t>
+            </a:r>
+          </a:p>
+          <a:p xmlns:a="http://schemas.openxmlformats.org/drawingml/2006/main">
+            <a:r>
+              <a:t/>
+            </a:r>
+          </a:p>
+          <a:p xmlns:a="http://schemas.openxmlformats.org/drawingml/2006/main">
+            <a:r>
+              <a:t>教师讲述：</a:t>
+            </a:r>
+          </a:p>
+          <a:p xmlns:a="http://schemas.openxmlformats.org/drawingml/2006/main">
+            <a:r>
+              <a:t>本页只建立跨课接口。让学生意识到当前解释并不唯一，并把最可能的替代解释写在问题定义旁。不要在此展开组别、控制变量或完整区分实验；这些进入第 7 课正式设计。</a:t>
+            </a:r>
+          </a:p>
+          <a:p xmlns:a="http://schemas.openxmlformats.org/drawingml/2006/main">
+            <a:r>
+              <a:t/>
+            </a:r>
+          </a:p>
+          <a:p xmlns:a="http://schemas.openxmlformats.org/drawingml/2006/main">
+            <a:r>
+              <a:t>学生动作：</a:t>
+            </a:r>
+          </a:p>
+          <a:p xmlns:a="http://schemas.openxmlformats.org/drawingml/2006/main">
+            <a:r>
+              <a:t>让学生写出一个会削弱当前主张的替代解释。</a:t>
+            </a:r>
+          </a:p>
+          <a:p xmlns:a="http://schemas.openxmlformats.org/drawingml/2006/main">
+            <a:r>
+              <a:t/>
+            </a:r>
+          </a:p>
+          <a:p xmlns:a="http://schemas.openxmlformats.org/drawingml/2006/main">
+            <a:r>
+              <a:t>来源与边界：</a:t>
+            </a:r>
+          </a:p>
+          <a:p xmlns:a="http://schemas.openxmlformats.org/drawingml/2006/main">
+            <a:r>
+              <a:t>讲义 §三·3 给第 7 课留下替代解释标记；Platt, "Strong Inference."（同 P09 来源）。</a:t>
+            </a:r>
+          </a:p>
+          <a:p xmlns:a="http://schemas.openxmlformats.org/drawingml/2006/main">
+            <a:r>
+              <a:t/>
+            </a:r>
+          </a:p>
+          <a:p xmlns:a="http://schemas.openxmlformats.org/drawingml/2006/main">
+            <a:r>
+              <a:t>---</a:t>
+            </a:r>
+          </a:p>
+          <a:p xmlns:a="http://schemas.openxmlformats.org/drawingml/2006/main">
+            <a:r>
+              <a:t/>
             </a:r>
           </a:p>
           <a:p xmlns:a="http://schemas.openxmlformats.org/drawingml/2006/main">
@@ -589,7 +919,27 @@
           </a:p>
           <a:p xmlns:a="http://schemas.openxmlformats.org/drawingml/2006/main">
             <a:r>
-              <a:t>- 本页仅使用课程内部规则与教学材料。</a:t>
+              <a:t/>
+            </a:r>
+          </a:p>
+          <a:p xmlns:a="http://schemas.openxmlformats.org/drawingml/2006/main">
+            <a:r>
+              <a:t>- 本课 handout.md 与 slides.md</a:t>
+            </a:r>
+          </a:p>
+          <a:p xmlns:a="http://schemas.openxmlformats.org/drawingml/2006/main">
+            <a:r>
+              <a:t/>
+            </a:r>
+          </a:p>
+          <a:p xmlns:a="http://schemas.openxmlformats.org/drawingml/2006/main">
+            <a:r>
+              <a:t>- ../../course/reading-card-case.md</a:t>
+            </a:r>
+          </a:p>
+          <a:p xmlns:a="http://schemas.openxmlformats.org/drawingml/2006/main">
+            <a:r>
+              <a:t/>
             </a:r>
           </a:p>
           <a:p xmlns:a="http://schemas.openxmlformats.org/drawingml/2006/main">
@@ -664,7 +1014,137 @@
           <a:lstStyle xmlns:a="http://schemas.openxmlformats.org/drawingml/2006/main"/>
           <a:p xmlns:a="http://schemas.openxmlformats.org/drawingml/2006/main">
             <a:r>
-              <a:t>页面标题：第一性原理不是脱离证据的捷径</a:t>
+              <a:t>页面：P12 第一性原理不是脱离证据的捷径</a:t>
+            </a:r>
+          </a:p>
+          <a:p xmlns:a="http://schemas.openxmlformats.org/drawingml/2006/main">
+            <a:r>
+              <a:t/>
+            </a:r>
+          </a:p>
+          <a:p xmlns:a="http://schemas.openxmlformats.org/drawingml/2006/main">
+            <a:r>
+              <a:t>讲义位置：本课讲义；见逐页母稿映射表</a:t>
+            </a:r>
+          </a:p>
+          <a:p xmlns:a="http://schemas.openxmlformats.org/drawingml/2006/main">
+            <a:r>
+              <a:t/>
+            </a:r>
+          </a:p>
+          <a:p xmlns:a="http://schemas.openxmlformats.org/drawingml/2006/main">
+            <a:r>
+              <a:t>屏显核对：</a:t>
+            </a:r>
+          </a:p>
+          <a:p xmlns:a="http://schemas.openxmlformats.org/drawingml/2006/main">
+            <a:r>
+              <a:t>**第一性原理分析**：</a:t>
+            </a:r>
+          </a:p>
+          <a:p xmlns:a="http://schemas.openxmlformats.org/drawingml/2006/main">
+            <a:r>
+              <a:t>识别问题的基本约束、作用机制和不可违背条件，并由此推导待验证前提。</a:t>
+            </a:r>
+          </a:p>
+          <a:p xmlns:a="http://schemas.openxmlformats.org/drawingml/2006/main">
+            <a:r>
+              <a:t/>
+            </a:r>
+          </a:p>
+          <a:p xmlns:a="http://schemas.openxmlformats.org/drawingml/2006/main">
+            <a:r>
+              <a:t>**适用边界**：</a:t>
+            </a:r>
+          </a:p>
+          <a:p xmlns:a="http://schemas.openxmlformats.org/drawingml/2006/main">
+            <a:r>
+              <a:t>- 不替代文献检索：推导出的前提必须回到证据地图中检验</a:t>
+            </a:r>
+          </a:p>
+          <a:p xmlns:a="http://schemas.openxmlformats.org/drawingml/2006/main">
+            <a:r>
+              <a:t>- 不脱离既有工作：在已有证据基础上深入，不是从零发明问题</a:t>
+            </a:r>
+          </a:p>
+          <a:p xmlns:a="http://schemas.openxmlformats.org/drawingml/2006/main">
+            <a:r>
+              <a:t>- 不自动成立：推导结果只是"如果这些条件成立，那么……"</a:t>
+            </a:r>
+          </a:p>
+          <a:p xmlns:a="http://schemas.openxmlformats.org/drawingml/2006/main">
+            <a:r>
+              <a:t>- 不追求穷举：只推导与当前问题直接相关的必要条件</a:t>
+            </a:r>
+          </a:p>
+          <a:p xmlns:a="http://schemas.openxmlformats.org/drawingml/2006/main">
+            <a:r>
+              <a:t/>
+            </a:r>
+          </a:p>
+          <a:p xmlns:a="http://schemas.openxmlformats.org/drawingml/2006/main">
+            <a:r>
+              <a:t>&gt; 推导结果必须继续接受外部证据检验。它不是脱离文献的通用捷径。</a:t>
+            </a:r>
+          </a:p>
+          <a:p xmlns:a="http://schemas.openxmlformats.org/drawingml/2006/main">
+            <a:r>
+              <a:t/>
+            </a:r>
+          </a:p>
+          <a:p xmlns:a="http://schemas.openxmlformats.org/drawingml/2006/main">
+            <a:r>
+              <a:t>教师讲述：</a:t>
+            </a:r>
+          </a:p>
+          <a:p xmlns:a="http://schemas.openxmlformats.org/drawingml/2006/main">
+            <a:r>
+              <a:t>第一性原理分析在本课程中有明确适用边界。它不是通用思维方法，而是从基本约束推导待验证前提。推导结果只是假设性前提，不等于已经证明。推导出的前提进入第 7 课的机制假设，再进入第 9 课的实验规格接受检验。备课规划执行原则 9 明确了这一边界。</a:t>
+            </a:r>
+          </a:p>
+          <a:p xmlns:a="http://schemas.openxmlformats.org/drawingml/2006/main">
+            <a:r>
+              <a:t/>
+            </a:r>
+          </a:p>
+          <a:p xmlns:a="http://schemas.openxmlformats.org/drawingml/2006/main">
+            <a:r>
+              <a:t>学生动作：</a:t>
+            </a:r>
+          </a:p>
+          <a:p xmlns:a="http://schemas.openxmlformats.org/drawingml/2006/main">
+            <a:r>
+              <a:t>无。直接进入推导步骤。</a:t>
+            </a:r>
+          </a:p>
+          <a:p xmlns:a="http://schemas.openxmlformats.org/drawingml/2006/main">
+            <a:r>
+              <a:t/>
+            </a:r>
+          </a:p>
+          <a:p xmlns:a="http://schemas.openxmlformats.org/drawingml/2006/main">
+            <a:r>
+              <a:t>来源与边界：</a:t>
+            </a:r>
+          </a:p>
+          <a:p xmlns:a="http://schemas.openxmlformats.org/drawingml/2006/main">
+            <a:r>
+              <a:t>讲义 §四·1 什么是第一性原理分析；§四·3 适用边界；[备课规划.md](../备课规划.md) 执行原则 9；[AGENTS.md](../../AGENTS.md) 证据标准。</a:t>
+            </a:r>
+          </a:p>
+          <a:p xmlns:a="http://schemas.openxmlformats.org/drawingml/2006/main">
+            <a:r>
+              <a:t/>
+            </a:r>
+          </a:p>
+          <a:p xmlns:a="http://schemas.openxmlformats.org/drawingml/2006/main">
+            <a:r>
+              <a:t>---</a:t>
+            </a:r>
+          </a:p>
+          <a:p xmlns:a="http://schemas.openxmlformats.org/drawingml/2006/main">
+            <a:r>
+              <a:t/>
             </a:r>
           </a:p>
           <a:p xmlns:a="http://schemas.openxmlformats.org/drawingml/2006/main">
@@ -674,7 +1154,27 @@
           </a:p>
           <a:p xmlns:a="http://schemas.openxmlformats.org/drawingml/2006/main">
             <a:r>
-              <a:t>- 本页仅使用课程内部规则与教学材料。</a:t>
+              <a:t/>
+            </a:r>
+          </a:p>
+          <a:p xmlns:a="http://schemas.openxmlformats.org/drawingml/2006/main">
+            <a:r>
+              <a:t>- 本课 handout.md 与 slides.md</a:t>
+            </a:r>
+          </a:p>
+          <a:p xmlns:a="http://schemas.openxmlformats.org/drawingml/2006/main">
+            <a:r>
+              <a:t/>
+            </a:r>
+          </a:p>
+          <a:p xmlns:a="http://schemas.openxmlformats.org/drawingml/2006/main">
+            <a:r>
+              <a:t>- ../../course/reading-card-case.md</a:t>
+            </a:r>
+          </a:p>
+          <a:p xmlns:a="http://schemas.openxmlformats.org/drawingml/2006/main">
+            <a:r>
+              <a:t/>
             </a:r>
           </a:p>
           <a:p xmlns:a="http://schemas.openxmlformats.org/drawingml/2006/main">
@@ -749,7 +1249,137 @@
           <a:lstStyle xmlns:a="http://schemas.openxmlformats.org/drawingml/2006/main"/>
           <a:p xmlns:a="http://schemas.openxmlformats.org/drawingml/2006/main">
             <a:r>
-              <a:t>页面标题：第一性原理四步推导</a:t>
+              <a:t>页面：P13 第一性原理四步推导</a:t>
+            </a:r>
+          </a:p>
+          <a:p xmlns:a="http://schemas.openxmlformats.org/drawingml/2006/main">
+            <a:r>
+              <a:t/>
+            </a:r>
+          </a:p>
+          <a:p xmlns:a="http://schemas.openxmlformats.org/drawingml/2006/main">
+            <a:r>
+              <a:t>讲义位置：本课讲义；见逐页母稿映射表</a:t>
+            </a:r>
+          </a:p>
+          <a:p xmlns:a="http://schemas.openxmlformats.org/drawingml/2006/main">
+            <a:r>
+              <a:t/>
+            </a:r>
+          </a:p>
+          <a:p xmlns:a="http://schemas.openxmlformats.org/drawingml/2006/main">
+            <a:r>
+              <a:t>屏显核对：</a:t>
+            </a:r>
+          </a:p>
+          <a:p xmlns:a="http://schemas.openxmlformats.org/drawingml/2006/main">
+            <a:r>
+              <a:t>四步推导：</a:t>
+            </a:r>
+          </a:p>
+          <a:p xmlns:a="http://schemas.openxmlformats.org/drawingml/2006/main">
+            <a:r>
+              <a:t/>
+            </a:r>
+          </a:p>
+          <a:p xmlns:a="http://schemas.openxmlformats.org/drawingml/2006/main">
+            <a:r>
+              <a:t>1. **识别基本约束**：如果主张成立，哪些条件必须满足？（来自任务本身，不是当前工具）</a:t>
+            </a:r>
+          </a:p>
+          <a:p xmlns:a="http://schemas.openxmlformats.org/drawingml/2006/main">
+            <a:r>
+              <a:t>2. **识别作用机制**：干预通过什么过程产生预期结果？</a:t>
+            </a:r>
+          </a:p>
+          <a:p xmlns:a="http://schemas.openxmlformats.org/drawingml/2006/main">
+            <a:r>
+              <a:t>3. **识别不可违背条件**：哪些变量必须一致，比较才公平？哪个反例足以推翻？</a:t>
+            </a:r>
+          </a:p>
+          <a:p xmlns:a="http://schemas.openxmlformats.org/drawingml/2006/main">
+            <a:r>
+              <a:t>4. **推导待验证前提**：从前三步推出可以检验的具体前提</a:t>
+            </a:r>
+          </a:p>
+          <a:p xmlns:a="http://schemas.openxmlformats.org/drawingml/2006/main">
+            <a:r>
+              <a:t/>
+            </a:r>
+          </a:p>
+          <a:p xmlns:a="http://schemas.openxmlformats.org/drawingml/2006/main">
+            <a:r>
+              <a:t>输出：必要条件、关键约束和可检验前提清单</a:t>
+            </a:r>
+          </a:p>
+          <a:p xmlns:a="http://schemas.openxmlformats.org/drawingml/2006/main">
+            <a:r>
+              <a:t/>
+            </a:r>
+          </a:p>
+          <a:p xmlns:a="http://schemas.openxmlformats.org/drawingml/2006/main">
+            <a:r>
+              <a:t>&gt; 工具可以替换，但如果来源无法定位或评价标准在实验中变化，结论不成立。</a:t>
+            </a:r>
+          </a:p>
+          <a:p xmlns:a="http://schemas.openxmlformats.org/drawingml/2006/main">
+            <a:r>
+              <a:t/>
+            </a:r>
+          </a:p>
+          <a:p xmlns:a="http://schemas.openxmlformats.org/drawingml/2006/main">
+            <a:r>
+              <a:t>教师讲述：</a:t>
+            </a:r>
+          </a:p>
+          <a:p xmlns:a="http://schemas.openxmlformats.org/drawingml/2006/main">
+            <a:r>
+              <a:t>四步推导的关键是区分"来自任务本身的约束"和"来自当前工具的约束"。基本约束是问题成立的必要条件，作用机制指向中间过程而非最终指标，不可违背条件是比较公平性的底线。推导出的待验证前提应该是可以检验的具体陈述，不是泛泛的原则。</a:t>
+            </a:r>
+          </a:p>
+          <a:p xmlns:a="http://schemas.openxmlformats.org/drawingml/2006/main">
+            <a:r>
+              <a:t/>
+            </a:r>
+          </a:p>
+          <a:p xmlns:a="http://schemas.openxmlformats.org/drawingml/2006/main">
+            <a:r>
+              <a:t>学生动作：</a:t>
+            </a:r>
+          </a:p>
+          <a:p xmlns:a="http://schemas.openxmlformats.org/drawingml/2006/main">
+            <a:r>
+              <a:t>让学生为自己的研究问题，口头尝试回答第一步："如果主张成立，哪些条件必须满足？"</a:t>
+            </a:r>
+          </a:p>
+          <a:p xmlns:a="http://schemas.openxmlformats.org/drawingml/2006/main">
+            <a:r>
+              <a:t/>
+            </a:r>
+          </a:p>
+          <a:p xmlns:a="http://schemas.openxmlformats.org/drawingml/2006/main">
+            <a:r>
+              <a:t>来源与边界：</a:t>
+            </a:r>
+          </a:p>
+          <a:p xmlns:a="http://schemas.openxmlformats.org/drawingml/2006/main">
+            <a:r>
+              <a:t>讲义 §四·2 推导步骤。</a:t>
+            </a:r>
+          </a:p>
+          <a:p xmlns:a="http://schemas.openxmlformats.org/drawingml/2006/main">
+            <a:r>
+              <a:t/>
+            </a:r>
+          </a:p>
+          <a:p xmlns:a="http://schemas.openxmlformats.org/drawingml/2006/main">
+            <a:r>
+              <a:t>---</a:t>
+            </a:r>
+          </a:p>
+          <a:p xmlns:a="http://schemas.openxmlformats.org/drawingml/2006/main">
+            <a:r>
+              <a:t/>
             </a:r>
           </a:p>
           <a:p xmlns:a="http://schemas.openxmlformats.org/drawingml/2006/main">
@@ -759,7 +1389,27 @@
           </a:p>
           <a:p xmlns:a="http://schemas.openxmlformats.org/drawingml/2006/main">
             <a:r>
-              <a:t>- 本页仅使用课程内部规则与教学材料。</a:t>
+              <a:t/>
+            </a:r>
+          </a:p>
+          <a:p xmlns:a="http://schemas.openxmlformats.org/drawingml/2006/main">
+            <a:r>
+              <a:t>- 本课 handout.md 与 slides.md</a:t>
+            </a:r>
+          </a:p>
+          <a:p xmlns:a="http://schemas.openxmlformats.org/drawingml/2006/main">
+            <a:r>
+              <a:t/>
+            </a:r>
+          </a:p>
+          <a:p xmlns:a="http://schemas.openxmlformats.org/drawingml/2006/main">
+            <a:r>
+              <a:t>- ../../course/reading-card-case.md</a:t>
+            </a:r>
+          </a:p>
+          <a:p xmlns:a="http://schemas.openxmlformats.org/drawingml/2006/main">
+            <a:r>
+              <a:t/>
             </a:r>
           </a:p>
           <a:p xmlns:a="http://schemas.openxmlformats.org/drawingml/2006/main">
@@ -834,7 +1484,122 @@
           <a:lstStyle xmlns:a="http://schemas.openxmlformats.org/drawingml/2006/main"/>
           <a:p xmlns:a="http://schemas.openxmlformats.org/drawingml/2006/main">
             <a:r>
-              <a:t>页面标题：贯穿案例：把前提移交给第 7–9 课</a:t>
+              <a:t>页面：P14 贯穿案例：把前提移交给第 7–9 课</a:t>
+            </a:r>
+          </a:p>
+          <a:p xmlns:a="http://schemas.openxmlformats.org/drawingml/2006/main">
+            <a:r>
+              <a:t/>
+            </a:r>
+          </a:p>
+          <a:p xmlns:a="http://schemas.openxmlformats.org/drawingml/2006/main">
+            <a:r>
+              <a:t>讲义位置：本课讲义；见逐页母稿映射表</a:t>
+            </a:r>
+          </a:p>
+          <a:p xmlns:a="http://schemas.openxmlformats.org/drawingml/2006/main">
+            <a:r>
+              <a:t/>
+            </a:r>
+          </a:p>
+          <a:p xmlns:a="http://schemas.openxmlformats.org/drawingml/2006/main">
+            <a:r>
+              <a:t>屏显核对：</a:t>
+            </a:r>
+          </a:p>
+          <a:p xmlns:a="http://schemas.openxmlformats.org/drawingml/2006/main">
+            <a:r>
+              <a:t>问题：阅读卡是否降低限定条件遗漏率？</a:t>
+            </a:r>
+          </a:p>
+          <a:p xmlns:a="http://schemas.openxmlformats.org/drawingml/2006/main">
+            <a:r>
+              <a:t/>
+            </a:r>
+          </a:p>
+          <a:p xmlns:a="http://schemas.openxmlformats.org/drawingml/2006/main">
+            <a:r>
+              <a:t>条件：同一材料分别进入阅读卡与自由摘要。</a:t>
+            </a:r>
+          </a:p>
+          <a:p xmlns:a="http://schemas.openxmlformats.org/drawingml/2006/main">
+            <a:r>
+              <a:t>指标：相对人工复核基准，计算缺失条件比例。</a:t>
+            </a:r>
+          </a:p>
+          <a:p xmlns:a="http://schemas.openxmlformats.org/drawingml/2006/main">
+            <a:r>
+              <a:t>未决：输出确实保留更多，还是评分提示改变得分？</a:t>
+            </a:r>
+          </a:p>
+          <a:p xmlns:a="http://schemas.openxmlformats.org/drawingml/2006/main">
+            <a:r>
+              <a:t/>
+            </a:r>
+          </a:p>
+          <a:p xmlns:a="http://schemas.openxmlformats.org/drawingml/2006/main">
+            <a:r>
+              <a:t>质量代价与材料范围另列检查。</a:t>
+            </a:r>
+          </a:p>
+          <a:p xmlns:a="http://schemas.openxmlformats.org/drawingml/2006/main">
+            <a:r>
+              <a:t/>
+            </a:r>
+          </a:p>
+          <a:p xmlns:a="http://schemas.openxmlformats.org/drawingml/2006/main">
+            <a:r>
+              <a:t>教师讲述：</a:t>
+            </a:r>
+          </a:p>
+          <a:p xmlns:a="http://schemas.openxmlformats.org/drawingml/2006/main">
+            <a:r>
+              <a:t>延续 P05 的同一问题，不再切换案例。本页只说明第 6 课输出什么：一条问题、一个待验证前提和一个替代解释标记。Q1、H1/A2 与 A1/A3 检查 的完整区分留给第 7 课，3 份源文本、两个条件各 1 份预制输出和 6 份构造输出等完整工程规格留给第 9 课。</a:t>
+            </a:r>
+          </a:p>
+          <a:p xmlns:a="http://schemas.openxmlformats.org/drawingml/2006/main">
+            <a:r>
+              <a:t/>
+            </a:r>
+          </a:p>
+          <a:p xmlns:a="http://schemas.openxmlformats.org/drawingml/2006/main">
+            <a:r>
+              <a:t>学生动作：</a:t>
+            </a:r>
+          </a:p>
+          <a:p xmlns:a="http://schemas.openxmlformats.org/drawingml/2006/main">
+            <a:r>
+              <a:t>让学生指出：当前替代解释标记更接近任务转移、标注提示还是文档结构？</a:t>
+            </a:r>
+          </a:p>
+          <a:p xmlns:a="http://schemas.openxmlformats.org/drawingml/2006/main">
+            <a:r>
+              <a:t/>
+            </a:r>
+          </a:p>
+          <a:p xmlns:a="http://schemas.openxmlformats.org/drawingml/2006/main">
+            <a:r>
+              <a:t>来源与边界：</a:t>
+            </a:r>
+          </a:p>
+          <a:p xmlns:a="http://schemas.openxmlformats.org/drawingml/2006/main">
+            <a:r>
+              <a:t>讲义 §三·3、§四与§七；本页案例为课程虚构教学样例，不表示实验已经运行。</a:t>
+            </a:r>
+          </a:p>
+          <a:p xmlns:a="http://schemas.openxmlformats.org/drawingml/2006/main">
+            <a:r>
+              <a:t/>
+            </a:r>
+          </a:p>
+          <a:p xmlns:a="http://schemas.openxmlformats.org/drawingml/2006/main">
+            <a:r>
+              <a:t>---</a:t>
+            </a:r>
+          </a:p>
+          <a:p xmlns:a="http://schemas.openxmlformats.org/drawingml/2006/main">
+            <a:r>
+              <a:t/>
             </a:r>
           </a:p>
           <a:p xmlns:a="http://schemas.openxmlformats.org/drawingml/2006/main">
@@ -844,7 +1609,27 @@
           </a:p>
           <a:p xmlns:a="http://schemas.openxmlformats.org/drawingml/2006/main">
             <a:r>
-              <a:t>- 本页仅使用课程内部规则与教学材料。</a:t>
+              <a:t/>
+            </a:r>
+          </a:p>
+          <a:p xmlns:a="http://schemas.openxmlformats.org/drawingml/2006/main">
+            <a:r>
+              <a:t>- 本课 handout.md 与 slides.md</a:t>
+            </a:r>
+          </a:p>
+          <a:p xmlns:a="http://schemas.openxmlformats.org/drawingml/2006/main">
+            <a:r>
+              <a:t/>
+            </a:r>
+          </a:p>
+          <a:p xmlns:a="http://schemas.openxmlformats.org/drawingml/2006/main">
+            <a:r>
+              <a:t>- ../../course/reading-card-case.md</a:t>
+            </a:r>
+          </a:p>
+          <a:p xmlns:a="http://schemas.openxmlformats.org/drawingml/2006/main">
+            <a:r>
+              <a:t/>
             </a:r>
           </a:p>
           <a:p xmlns:a="http://schemas.openxmlformats.org/drawingml/2006/main">
@@ -919,7 +1704,162 @@
           <a:lstStyle xmlns:a="http://schemas.openxmlformats.org/drawingml/2006/main"/>
           <a:p xmlns:a="http://schemas.openxmlformats.org/drawingml/2006/main">
             <a:r>
-              <a:t>页面标题：问题门九项条件自查</a:t>
+              <a:t>页面：P15 问题门九项条件自查</a:t>
+            </a:r>
+          </a:p>
+          <a:p xmlns:a="http://schemas.openxmlformats.org/drawingml/2006/main">
+            <a:r>
+              <a:t/>
+            </a:r>
+          </a:p>
+          <a:p xmlns:a="http://schemas.openxmlformats.org/drawingml/2006/main">
+            <a:r>
+              <a:t>讲义位置：本课讲义；见逐页母稿映射表</a:t>
+            </a:r>
+          </a:p>
+          <a:p xmlns:a="http://schemas.openxmlformats.org/drawingml/2006/main">
+            <a:r>
+              <a:t/>
+            </a:r>
+          </a:p>
+          <a:p xmlns:a="http://schemas.openxmlformats.org/drawingml/2006/main">
+            <a:r>
+              <a:t>屏显核对：</a:t>
+            </a:r>
+          </a:p>
+          <a:p xmlns:a="http://schemas.openxmlformats.org/drawingml/2006/main">
+            <a:r>
+              <a:t>9 项门条件（与 [assignments.md](../../course/assignments.md) Checkpoint 1 一致）：</a:t>
+            </a:r>
+          </a:p>
+          <a:p xmlns:a="http://schemas.openxmlformats.org/drawingml/2006/main">
+            <a:r>
+              <a:t/>
+            </a:r>
+          </a:p>
+          <a:p xmlns:a="http://schemas.openxmlformats.org/drawingml/2006/main">
+            <a:r>
+              <a:t>| # | 门条件 | 自查 |</a:t>
+            </a:r>
+          </a:p>
+          <a:p xmlns:a="http://schemas.openxmlformats.org/drawingml/2006/main">
+            <a:r>
+              <a:t>| --- | --- | --- |</a:t>
+            </a:r>
+          </a:p>
+          <a:p xmlns:a="http://schemas.openxmlformats.org/drawingml/2006/main">
+            <a:r>
+              <a:t>| 1 | ≥10 篇候选文献，标注证据角色 | □ |</a:t>
+            </a:r>
+          </a:p>
+          <a:p xmlns:a="http://schemas.openxmlformats.org/drawingml/2006/main">
+            <a:r>
+              <a:t>| 2 | ≥3 篇核心材料完整精读卡 | □ |</a:t>
+            </a:r>
+          </a:p>
+          <a:p xmlns:a="http://schemas.openxmlformats.org/drawingml/2006/main">
+            <a:r>
+              <a:t>| 3 | 精读卡含 AI 初始地图、≥2 原文核验位置、AI 错误/过度概括/遗漏或已检查风险、人工判断 | □ |</a:t>
+            </a:r>
+          </a:p>
+          <a:p xmlns:a="http://schemas.openxmlformats.org/drawingml/2006/main">
+            <a:r>
+              <a:t>| 4 | 证据地图初版（直接证据/补充证据/冲突/空白） | □ |</a:t>
+            </a:r>
+          </a:p>
+          <a:p xmlns:a="http://schemas.openxmlformats.org/drawingml/2006/main">
+            <a:r>
+              <a:t>| 5 | 研究问题含范围、非例、≥1 可证伪命题 | □ |</a:t>
+            </a:r>
+          </a:p>
+          <a:p xmlns:a="http://schemas.openxmlformats.org/drawingml/2006/main">
+            <a:r>
+              <a:t>| 6 | 第一性原理推导（必要条件、关键约束、可检验前提） | □ |</a:t>
+            </a:r>
+          </a:p>
+          <a:p xmlns:a="http://schemas.openxmlformats.org/drawingml/2006/main">
+            <a:r>
+              <a:t>| 7 | 问题重要性 + 课程周期可行性 | □ |</a:t>
+            </a:r>
+          </a:p>
+          <a:p xmlns:a="http://schemas.openxmlformats.org/drawingml/2006/main">
+            <a:r>
+              <a:t>| 8 | ≥1 条真实失败/死路：原因 + 处理 + 回写位置 | □ |</a:t>
+            </a:r>
+          </a:p>
+          <a:p xmlns:a="http://schemas.openxmlformats.org/drawingml/2006/main">
+            <a:r>
+              <a:t>| 9 | AI 辅助检索/阅读/改写已记录来源与核验方式 | □ |</a:t>
+            </a:r>
+          </a:p>
+          <a:p xmlns:a="http://schemas.openxmlformats.org/drawingml/2006/main">
+            <a:r>
+              <a:t/>
+            </a:r>
+          </a:p>
+          <a:p xmlns:a="http://schemas.openxmlformats.org/drawingml/2006/main">
+            <a:r>
+              <a:t>&gt; 第 1-5 课工件持续累计；本课重点补全第 5-8 项并继续回写第 9 项。</a:t>
+            </a:r>
+          </a:p>
+          <a:p xmlns:a="http://schemas.openxmlformats.org/drawingml/2006/main">
+            <a:r>
+              <a:t/>
+            </a:r>
+          </a:p>
+          <a:p xmlns:a="http://schemas.openxmlformats.org/drawingml/2006/main">
+            <a:r>
+              <a:t>教师讲述：</a:t>
+            </a:r>
+          </a:p>
+          <a:p xmlns:a="http://schemas.openxmlformats.org/drawingml/2006/main">
+            <a:r>
+              <a:t>逐条讲清 9 项门条件。第 8 项检查真实发生的无结果检索、被排除方向或被放弃问题版本，前瞻性的“如果失败就重试”不满足；第 9 项是 AI 使用与来源核验。问题门检查当前项目版本，不重新制作材料。</a:t>
+            </a:r>
+          </a:p>
+          <a:p xmlns:a="http://schemas.openxmlformats.org/drawingml/2006/main">
+            <a:r>
+              <a:t/>
+            </a:r>
+          </a:p>
+          <a:p xmlns:a="http://schemas.openxmlformats.org/drawingml/2006/main">
+            <a:r>
+              <a:t>学生动作：</a:t>
+            </a:r>
+          </a:p>
+          <a:p xmlns:a="http://schemas.openxmlformats.org/drawingml/2006/main">
+            <a:r>
+              <a:t>让学生对照清单，标注当前项目哪些已满足、哪些待补全。</a:t>
+            </a:r>
+          </a:p>
+          <a:p xmlns:a="http://schemas.openxmlformats.org/drawingml/2006/main">
+            <a:r>
+              <a:t/>
+            </a:r>
+          </a:p>
+          <a:p xmlns:a="http://schemas.openxmlformats.org/drawingml/2006/main">
+            <a:r>
+              <a:t>来源与边界：</a:t>
+            </a:r>
+          </a:p>
+          <a:p xmlns:a="http://schemas.openxmlformats.org/drawingml/2006/main">
+            <a:r>
+              <a:t>[assignments.md](../../course/assignments.md) Checkpoint 1 问题门条件（权威来源）；[starter-template.md](../../course/starter-template.md) §3 问题定义字段模板。</a:t>
+            </a:r>
+          </a:p>
+          <a:p xmlns:a="http://schemas.openxmlformats.org/drawingml/2006/main">
+            <a:r>
+              <a:t/>
+            </a:r>
+          </a:p>
+          <a:p xmlns:a="http://schemas.openxmlformats.org/drawingml/2006/main">
+            <a:r>
+              <a:t>---</a:t>
+            </a:r>
+          </a:p>
+          <a:p xmlns:a="http://schemas.openxmlformats.org/drawingml/2006/main">
+            <a:r>
+              <a:t/>
             </a:r>
           </a:p>
           <a:p xmlns:a="http://schemas.openxmlformats.org/drawingml/2006/main">
@@ -929,7 +1869,27 @@
           </a:p>
           <a:p xmlns:a="http://schemas.openxmlformats.org/drawingml/2006/main">
             <a:r>
-              <a:t>- 本页仅使用课程内部规则与教学材料。</a:t>
+              <a:t/>
+            </a:r>
+          </a:p>
+          <a:p xmlns:a="http://schemas.openxmlformats.org/drawingml/2006/main">
+            <a:r>
+              <a:t>- 本课 handout.md 与 slides.md</a:t>
+            </a:r>
+          </a:p>
+          <a:p xmlns:a="http://schemas.openxmlformats.org/drawingml/2006/main">
+            <a:r>
+              <a:t/>
+            </a:r>
+          </a:p>
+          <a:p xmlns:a="http://schemas.openxmlformats.org/drawingml/2006/main">
+            <a:r>
+              <a:t>- ../../course/reading-card-case.md</a:t>
+            </a:r>
+          </a:p>
+          <a:p xmlns:a="http://schemas.openxmlformats.org/drawingml/2006/main">
+            <a:r>
+              <a:t/>
             </a:r>
           </a:p>
           <a:p xmlns:a="http://schemas.openxmlformats.org/drawingml/2006/main">
@@ -1004,7 +1964,97 @@
           <a:lstStyle xmlns:a="http://schemas.openxmlformats.org/drawingml/2006/main"/>
           <a:p xmlns:a="http://schemas.openxmlformats.org/drawingml/2006/main">
             <a:r>
-              <a:t>页面标题：门条件自查：失败记录也要回写</a:t>
+              <a:t>页面：P16 门条件检查的是本人项目</a:t>
+            </a:r>
+          </a:p>
+          <a:p xmlns:a="http://schemas.openxmlformats.org/drawingml/2006/main">
+            <a:r>
+              <a:t/>
+            </a:r>
+          </a:p>
+          <a:p xmlns:a="http://schemas.openxmlformats.org/drawingml/2006/main">
+            <a:r>
+              <a:t>讲义位置：handout.md §三、可证伪命题；五、问题门提交清单</a:t>
+            </a:r>
+          </a:p>
+          <a:p xmlns:a="http://schemas.openxmlformats.org/drawingml/2006/main">
+            <a:r>
+              <a:t/>
+            </a:r>
+          </a:p>
+          <a:p xmlns:a="http://schemas.openxmlformats.org/drawingml/2006/main">
+            <a:r>
+              <a:t>屏显核对：</a:t>
+            </a:r>
+          </a:p>
+          <a:p xmlns:a="http://schemas.openxmlformats.org/drawingml/2006/main">
+            <a:r>
+              <a:t>课堂构造案例：练习问题、证据与反证的对应。</a:t>
+            </a:r>
+          </a:p>
+          <a:p xmlns:a="http://schemas.openxmlformats.org/drawingml/2006/main">
+            <a:r>
+              <a:t>本人项目：仍须说明来源、可行性、约束与失败预案。</a:t>
+            </a:r>
+          </a:p>
+          <a:p xmlns:a="http://schemas.openxmlformats.org/drawingml/2006/main">
+            <a:r>
+              <a:t/>
+            </a:r>
+          </a:p>
+          <a:p xmlns:a="http://schemas.openxmlformats.org/drawingml/2006/main">
+            <a:r>
+              <a:t>一项局限记录可以帮助修订问题，不能替代完整问题门材料。</a:t>
+            </a:r>
+          </a:p>
+          <a:p xmlns:a="http://schemas.openxmlformats.org/drawingml/2006/main">
+            <a:r>
+              <a:t/>
+            </a:r>
+          </a:p>
+          <a:p xmlns:a="http://schemas.openxmlformats.org/drawingml/2006/main">
+            <a:r>
+              <a:t>教师讲述：</a:t>
+            </a:r>
+          </a:p>
+          <a:p xmlns:a="http://schemas.openxmlformats.org/drawingml/2006/main">
+            <a:r>
+              <a:t>回收本课的个人问题定义。若学生只完成教师示例，记录“方法已练习、本人项目证据未补”。不要把某篇文献没有测量的能力直接说成被反驳。</a:t>
+            </a:r>
+          </a:p>
+          <a:p xmlns:a="http://schemas.openxmlformats.org/drawingml/2006/main">
+            <a:r>
+              <a:t/>
+            </a:r>
+          </a:p>
+          <a:p xmlns:a="http://schemas.openxmlformats.org/drawingml/2006/main">
+            <a:r>
+              <a:t>学生动作：</a:t>
+            </a:r>
+          </a:p>
+          <a:p xmlns:a="http://schemas.openxmlformats.org/drawingml/2006/main">
+            <a:r>
+              <a:t>写下本人问题门最缺的一项材料及补齐位置。</a:t>
+            </a:r>
+          </a:p>
+          <a:p xmlns:a="http://schemas.openxmlformats.org/drawingml/2006/main">
+            <a:r>
+              <a:t/>
+            </a:r>
+          </a:p>
+          <a:p xmlns:a="http://schemas.openxmlformats.org/drawingml/2006/main">
+            <a:r>
+              <a:t>来源与边界：</a:t>
+            </a:r>
+          </a:p>
+          <a:p xmlns:a="http://schemas.openxmlformats.org/drawingml/2006/main">
+            <a:r>
+              <a:t>./handout.md；课堂示例与构造数据见 ../../course/reading-card-case.md</a:t>
+            </a:r>
+          </a:p>
+          <a:p xmlns:a="http://schemas.openxmlformats.org/drawingml/2006/main">
+            <a:r>
+              <a:t/>
             </a:r>
           </a:p>
           <a:p xmlns:a="http://schemas.openxmlformats.org/drawingml/2006/main">
@@ -1014,7 +2064,27 @@
           </a:p>
           <a:p xmlns:a="http://schemas.openxmlformats.org/drawingml/2006/main">
             <a:r>
-              <a:t>- 本页仅使用课程内部规则与教学材料。</a:t>
+              <a:t/>
+            </a:r>
+          </a:p>
+          <a:p xmlns:a="http://schemas.openxmlformats.org/drawingml/2006/main">
+            <a:r>
+              <a:t>- 本课 handout.md 与 slides.md</a:t>
+            </a:r>
+          </a:p>
+          <a:p xmlns:a="http://schemas.openxmlformats.org/drawingml/2006/main">
+            <a:r>
+              <a:t/>
+            </a:r>
+          </a:p>
+          <a:p xmlns:a="http://schemas.openxmlformats.org/drawingml/2006/main">
+            <a:r>
+              <a:t>- ../../course/reading-card-case.md</a:t>
+            </a:r>
+          </a:p>
+          <a:p xmlns:a="http://schemas.openxmlformats.org/drawingml/2006/main">
+            <a:r>
+              <a:t/>
             </a:r>
           </a:p>
           <a:p xmlns:a="http://schemas.openxmlformats.org/drawingml/2006/main">
@@ -1089,7 +2159,147 @@
           <a:lstStyle xmlns:a="http://schemas.openxmlformats.org/drawingml/2006/main"/>
           <a:p xmlns:a="http://schemas.openxmlformats.org/drawingml/2006/main">
             <a:r>
-              <a:t>页面标题：个人实践：选题、边界与一个待验证前提</a:t>
+              <a:t>页面：P17 个人实践：选题、边界与一个待验证前提</a:t>
+            </a:r>
+          </a:p>
+          <a:p xmlns:a="http://schemas.openxmlformats.org/drawingml/2006/main">
+            <a:r>
+              <a:t/>
+            </a:r>
+          </a:p>
+          <a:p xmlns:a="http://schemas.openxmlformats.org/drawingml/2006/main">
+            <a:r>
+              <a:t>讲义位置：本课讲义；见逐页母稿映射表</a:t>
+            </a:r>
+          </a:p>
+          <a:p xmlns:a="http://schemas.openxmlformats.org/drawingml/2006/main">
+            <a:r>
+              <a:t/>
+            </a:r>
+          </a:p>
+          <a:p xmlns:a="http://schemas.openxmlformats.org/drawingml/2006/main">
+            <a:r>
+              <a:t>屏显核对：</a:t>
+            </a:r>
+          </a:p>
+          <a:p xmlns:a="http://schemas.openxmlformats.org/drawingml/2006/main">
+            <a:r>
+              <a:t>本轮完成课堂最低闭环：</a:t>
+            </a:r>
+          </a:p>
+          <a:p xmlns:a="http://schemas.openxmlformats.org/drawingml/2006/main">
+            <a:r>
+              <a:t/>
+            </a:r>
+          </a:p>
+          <a:p xmlns:a="http://schemas.openxmlformats.org/drawingml/2006/main">
+            <a:r>
+              <a:t>1. 候选题池比较：对 ≥3 候选题做来源交叉检查与四维比较，记录选定理由（沿用第 5 课题池；不足 3 个先补一个异常/痛点候选）</a:t>
+            </a:r>
+          </a:p>
+          <a:p xmlns:a="http://schemas.openxmlformats.org/drawingml/2006/main">
+            <a:r>
+              <a:t>2. 把选定的研究空白候选改写为结构性问题（补充条件、对象、干预、结果、比较）</a:t>
+            </a:r>
+          </a:p>
+          <a:p xmlns:a="http://schemas.openxmlformats.org/drawingml/2006/main">
+            <a:r>
+              <a:t>3. 写出至少一个非例（说明为什么不算）</a:t>
+            </a:r>
+          </a:p>
+          <a:p xmlns:a="http://schemas.openxmlformats.org/drawingml/2006/main">
+            <a:r>
+              <a:t>4. 写出至少一个可证伪命题（含五要素和推翻条件）</a:t>
+            </a:r>
+          </a:p>
+          <a:p xmlns:a="http://schemas.openxmlformats.org/drawingml/2006/main">
+            <a:r>
+              <a:t>5. 从第一性原理推导中收敛一个待验证前提，并写一个替代解释标记</a:t>
+            </a:r>
+          </a:p>
+          <a:p xmlns:a="http://schemas.openxmlformats.org/drawingml/2006/main">
+            <a:r>
+              <a:t>6. 对照 9 项门条件标注已满足、待补全和未满足</a:t>
+            </a:r>
+          </a:p>
+          <a:p xmlns:a="http://schemas.openxmlformats.org/drawingml/2006/main">
+            <a:r>
+              <a:t/>
+            </a:r>
+          </a:p>
+          <a:p xmlns:a="http://schemas.openxmlformats.org/drawingml/2006/main">
+            <a:r>
+              <a:t>选择顺序：本人真实问题 → 导师组公开问题 → 课程贯穿案例 G1</a:t>
+            </a:r>
+          </a:p>
+          <a:p xmlns:a="http://schemas.openxmlformats.org/drawingml/2006/main">
+            <a:r>
+              <a:t/>
+            </a:r>
+          </a:p>
+          <a:p xmlns:a="http://schemas.openxmlformats.org/drawingml/2006/main">
+            <a:r>
+              <a:t>写入位置：`problem-definition.md`</a:t>
+            </a:r>
+          </a:p>
+          <a:p xmlns:a="http://schemas.openxmlformats.org/drawingml/2006/main">
+            <a:r>
+              <a:t/>
+            </a:r>
+          </a:p>
+          <a:p xmlns:a="http://schemas.openxmlformats.org/drawingml/2006/main">
+            <a:r>
+              <a:t>教师讲述：</a:t>
+            </a:r>
+          </a:p>
+          <a:p xmlns:a="http://schemas.openxmlformats.org/drawingml/2006/main">
+            <a:r>
+              <a:t>没有真实课题的学生沿用贯穿案例 G1（含虚构题池 G1/C2/C3），但不得把样例状态写成真实证据。课堂只要求选题、正负边界、一个可证伪命题、一个待验证前提和一个替代解释标记；完整竞争假设设计留给第 7 课。教师巡视只处理共同卡点，不逐台排障。</a:t>
+            </a:r>
+          </a:p>
+          <a:p xmlns:a="http://schemas.openxmlformats.org/drawingml/2006/main">
+            <a:r>
+              <a:t/>
+            </a:r>
+          </a:p>
+          <a:p xmlns:a="http://schemas.openxmlformats.org/drawingml/2006/main">
+            <a:r>
+              <a:t>学生动作：</a:t>
+            </a:r>
+          </a:p>
+          <a:p xmlns:a="http://schemas.openxmlformats.org/drawingml/2006/main">
+            <a:r>
+              <a:t>听清写入位置，打开个人项目并开始第一段实践。</a:t>
+            </a:r>
+          </a:p>
+          <a:p xmlns:a="http://schemas.openxmlformats.org/drawingml/2006/main">
+            <a:r>
+              <a:t/>
+            </a:r>
+          </a:p>
+          <a:p xmlns:a="http://schemas.openxmlformats.org/drawingml/2006/main">
+            <a:r>
+              <a:t>来源与边界：</a:t>
+            </a:r>
+          </a:p>
+          <a:p xmlns:a="http://schemas.openxmlformats.org/drawingml/2006/main">
+            <a:r>
+              <a:t>[starter-template.md](../../course/starter-template.md) §3 问题定义字段模板；第 3-5 课项目工件。</a:t>
+            </a:r>
+          </a:p>
+          <a:p xmlns:a="http://schemas.openxmlformats.org/drawingml/2006/main">
+            <a:r>
+              <a:t/>
+            </a:r>
+          </a:p>
+          <a:p xmlns:a="http://schemas.openxmlformats.org/drawingml/2006/main">
+            <a:r>
+              <a:t>---</a:t>
+            </a:r>
+          </a:p>
+          <a:p xmlns:a="http://schemas.openxmlformats.org/drawingml/2006/main">
+            <a:r>
+              <a:t/>
             </a:r>
           </a:p>
           <a:p xmlns:a="http://schemas.openxmlformats.org/drawingml/2006/main">
@@ -1099,7 +2309,27 @@
           </a:p>
           <a:p xmlns:a="http://schemas.openxmlformats.org/drawingml/2006/main">
             <a:r>
-              <a:t>- 本页仅使用课程内部规则与教学材料。</a:t>
+              <a:t/>
+            </a:r>
+          </a:p>
+          <a:p xmlns:a="http://schemas.openxmlformats.org/drawingml/2006/main">
+            <a:r>
+              <a:t>- 本课 handout.md 与 slides.md</a:t>
+            </a:r>
+          </a:p>
+          <a:p xmlns:a="http://schemas.openxmlformats.org/drawingml/2006/main">
+            <a:r>
+              <a:t/>
+            </a:r>
+          </a:p>
+          <a:p xmlns:a="http://schemas.openxmlformats.org/drawingml/2006/main">
+            <a:r>
+              <a:t>- ../../course/reading-card-case.md</a:t>
+            </a:r>
+          </a:p>
+          <a:p xmlns:a="http://schemas.openxmlformats.org/drawingml/2006/main">
+            <a:r>
+              <a:t/>
             </a:r>
           </a:p>
           <a:p xmlns:a="http://schemas.openxmlformats.org/drawingml/2006/main">
@@ -1174,7 +2404,267 @@
           <a:lstStyle xmlns:a="http://schemas.openxmlformats.org/drawingml/2006/main"/>
           <a:p xmlns:a="http://schemas.openxmlformats.org/drawingml/2006/main">
             <a:r>
-              <a:t>页面标题：实践停留页：问题定义与推导最小闭环</a:t>
+              <a:t>页面：P18 实践停留页：问题定义与推导最小闭环</a:t>
+            </a:r>
+          </a:p>
+          <a:p xmlns:a="http://schemas.openxmlformats.org/drawingml/2006/main">
+            <a:r>
+              <a:t/>
+            </a:r>
+          </a:p>
+          <a:p xmlns:a="http://schemas.openxmlformats.org/drawingml/2006/main">
+            <a:r>
+              <a:t>讲义位置：本课讲义；见逐页母稿映射表</a:t>
+            </a:r>
+          </a:p>
+          <a:p xmlns:a="http://schemas.openxmlformats.org/drawingml/2006/main">
+            <a:r>
+              <a:t/>
+            </a:r>
+          </a:p>
+          <a:p xmlns:a="http://schemas.openxmlformats.org/drawingml/2006/main">
+            <a:r>
+              <a:t>屏显核对：</a:t>
+            </a:r>
+          </a:p>
+          <a:p xmlns:a="http://schemas.openxmlformats.org/drawingml/2006/main">
+            <a:r>
+              <a:t>`problem-definition.md` 模板：</a:t>
+            </a:r>
+          </a:p>
+          <a:p xmlns:a="http://schemas.openxmlformats.org/drawingml/2006/main">
+            <a:r>
+              <a:t/>
+            </a:r>
+          </a:p>
+          <a:p xmlns:a="http://schemas.openxmlformats.org/drawingml/2006/main">
+            <a:r>
+              <a:t>```text</a:t>
+            </a:r>
+          </a:p>
+          <a:p xmlns:a="http://schemas.openxmlformats.org/drawingml/2006/main">
+            <a:r>
+              <a:t>一句话研究问题：</a:t>
+            </a:r>
+          </a:p>
+          <a:p xmlns:a="http://schemas.openxmlformats.org/drawingml/2006/main">
+            <a:r>
+              <a:t>&gt; 我们研究在 ______ 条件下，______ 方法/机制是否能改善/解释 ______。</a:t>
+            </a:r>
+          </a:p>
+          <a:p xmlns:a="http://schemas.openxmlformats.org/drawingml/2006/main">
+            <a:r>
+              <a:t/>
+            </a:r>
+          </a:p>
+          <a:p xmlns:a="http://schemas.openxmlformats.org/drawingml/2006/main">
+            <a:r>
+              <a:t>研究范围：</a:t>
+            </a:r>
+          </a:p>
+          <a:p xmlns:a="http://schemas.openxmlformats.org/drawingml/2006/main">
+            <a:r>
+              <a:t>- 包含什么：</a:t>
+            </a:r>
+          </a:p>
+          <a:p xmlns:a="http://schemas.openxmlformats.org/drawingml/2006/main">
+            <a:r>
+              <a:t>- 暂不包含什么：</a:t>
+            </a:r>
+          </a:p>
+          <a:p xmlns:a="http://schemas.openxmlformats.org/drawingml/2006/main">
+            <a:r>
+              <a:t>- 一个明确非例：</a:t>
+            </a:r>
+          </a:p>
+          <a:p xmlns:a="http://schemas.openxmlformats.org/drawingml/2006/main">
+            <a:r>
+              <a:t>- 一个可证伪命题：</a:t>
+            </a:r>
+          </a:p>
+          <a:p xmlns:a="http://schemas.openxmlformats.org/drawingml/2006/main">
+            <a:r>
+              <a:t/>
+            </a:r>
+          </a:p>
+          <a:p xmlns:a="http://schemas.openxmlformats.org/drawingml/2006/main">
+            <a:r>
+              <a:t>第一性原理推导：</a:t>
+            </a:r>
+          </a:p>
+          <a:p xmlns:a="http://schemas.openxmlformats.org/drawingml/2006/main">
+            <a:r>
+              <a:t>- 基本约束：</a:t>
+            </a:r>
+          </a:p>
+          <a:p xmlns:a="http://schemas.openxmlformats.org/drawingml/2006/main">
+            <a:r>
+              <a:t>- 作用机制：</a:t>
+            </a:r>
+          </a:p>
+          <a:p xmlns:a="http://schemas.openxmlformats.org/drawingml/2006/main">
+            <a:r>
+              <a:t>- 不可违背条件：</a:t>
+            </a:r>
+          </a:p>
+          <a:p xmlns:a="http://schemas.openxmlformats.org/drawingml/2006/main">
+            <a:r>
+              <a:t>- 待验证前提：</a:t>
+            </a:r>
+          </a:p>
+          <a:p xmlns:a="http://schemas.openxmlformats.org/drawingml/2006/main">
+            <a:r>
+              <a:t/>
+            </a:r>
+          </a:p>
+          <a:p xmlns:a="http://schemas.openxmlformats.org/drawingml/2006/main">
+            <a:r>
+              <a:t>问题重要性：</a:t>
+            </a:r>
+          </a:p>
+          <a:p xmlns:a="http://schemas.openxmlformats.org/drawingml/2006/main">
+            <a:r>
+              <a:t>- 知识后果（So what?）：</a:t>
+            </a:r>
+          </a:p>
+          <a:p xmlns:a="http://schemas.openxmlformats.org/drawingml/2006/main">
+            <a:r>
+              <a:t>- 实际后果（Who cares?）：</a:t>
+            </a:r>
+          </a:p>
+          <a:p xmlns:a="http://schemas.openxmlformats.org/drawingml/2006/main">
+            <a:r>
+              <a:t>- 课程周期可行性：</a:t>
+            </a:r>
+          </a:p>
+          <a:p xmlns:a="http://schemas.openxmlformats.org/drawingml/2006/main">
+            <a:r>
+              <a:t/>
+            </a:r>
+          </a:p>
+          <a:p xmlns:a="http://schemas.openxmlformats.org/drawingml/2006/main">
+            <a:r>
+              <a:t>候选题池与选题理由（课程扩展）：</a:t>
+            </a:r>
+          </a:p>
+          <a:p xmlns:a="http://schemas.openxmlformats.org/drawingml/2006/main">
+            <a:r>
+              <a:t>- 候选题 ≥3 个：表述 + 生成路径标签 + 当前证据</a:t>
+            </a:r>
+          </a:p>
+          <a:p xmlns:a="http://schemas.openxmlformats.org/drawingml/2006/main">
+            <a:r>
+              <a:t>- 四维比较（意义/新颖性/可行性/兴趣）与选定理由</a:t>
+            </a:r>
+          </a:p>
+          <a:p xmlns:a="http://schemas.openxmlformats.org/drawingml/2006/main">
+            <a:r>
+              <a:t>- 新颖性线索（如有依据）：问题新 / 视角新 / 方法新 + 待核验状态</a:t>
+            </a:r>
+          </a:p>
+          <a:p xmlns:a="http://schemas.openxmlformats.org/drawingml/2006/main">
+            <a:r>
+              <a:t>- 来源交叉检查：纯文献空白来源时回答"没有这个空白还值得回答吗"</a:t>
+            </a:r>
+          </a:p>
+          <a:p xmlns:a="http://schemas.openxmlformats.org/drawingml/2006/main">
+            <a:r>
+              <a:t/>
+            </a:r>
+          </a:p>
+          <a:p xmlns:a="http://schemas.openxmlformats.org/drawingml/2006/main">
+            <a:r>
+              <a:t>第 7 课接口：</a:t>
+            </a:r>
+          </a:p>
+          <a:p xmlns:a="http://schemas.openxmlformats.org/drawingml/2006/main">
+            <a:r>
+              <a:t>- 一个会削弱当前主张的替代解释：</a:t>
+            </a:r>
+          </a:p>
+          <a:p xmlns:a="http://schemas.openxmlformats.org/drawingml/2006/main">
+            <a:r>
+              <a:t>```</a:t>
+            </a:r>
+          </a:p>
+          <a:p xmlns:a="http://schemas.openxmlformats.org/drawingml/2006/main">
+            <a:r>
+              <a:t/>
+            </a:r>
+          </a:p>
+          <a:p xmlns:a="http://schemas.openxmlformats.org/drawingml/2006/main">
+            <a:r>
+              <a:t>门条件自查（9 项，见 P15）</a:t>
+            </a:r>
+          </a:p>
+          <a:p xmlns:a="http://schemas.openxmlformats.org/drawingml/2006/main">
+            <a:r>
+              <a:t/>
+            </a:r>
+          </a:p>
+          <a:p xmlns:a="http://schemas.openxmlformats.org/drawingml/2006/main">
+            <a:r>
+              <a:t>AI 使用记录最小字段：工具/模型｜用途｜Context｜输出用途｜人工核验方式｜问题</a:t>
+            </a:r>
+          </a:p>
+          <a:p xmlns:a="http://schemas.openxmlformats.org/drawingml/2006/main">
+            <a:r>
+              <a:t/>
+            </a:r>
+          </a:p>
+          <a:p xmlns:a="http://schemas.openxmlformats.org/drawingml/2006/main">
+            <a:r>
+              <a:t>教师讲述：</a:t>
+            </a:r>
+          </a:p>
+          <a:p xmlns:a="http://schemas.openxmlformats.org/drawingml/2006/main">
+            <a:r>
+              <a:t>模板投屏。第一段个人实践先完成候选题取舍、边界和可证伪命题；教师中点点评全班最常见的一处边界或推翻条件问题；第二段再写一个待验证前提和替代解释标记。九项门条件只标状态，课后按缺口补全并提交问题门材料包。</a:t>
+            </a:r>
+          </a:p>
+          <a:p xmlns:a="http://schemas.openxmlformats.org/drawingml/2006/main">
+            <a:r>
+              <a:t/>
+            </a:r>
+          </a:p>
+          <a:p xmlns:a="http://schemas.openxmlformats.org/drawingml/2006/main">
+            <a:r>
+              <a:t>学生动作：</a:t>
+            </a:r>
+          </a:p>
+          <a:p xmlns:a="http://schemas.openxmlformats.org/drawingml/2006/main">
+            <a:r>
+              <a:t>个人实践 12 分钟 → 教师中点点评 5 分钟 → 个人实践 8 分钟。</a:t>
+            </a:r>
+          </a:p>
+          <a:p xmlns:a="http://schemas.openxmlformats.org/drawingml/2006/main">
+            <a:r>
+              <a:t/>
+            </a:r>
+          </a:p>
+          <a:p xmlns:a="http://schemas.openxmlformats.org/drawingml/2006/main">
+            <a:r>
+              <a:t>来源与边界：</a:t>
+            </a:r>
+          </a:p>
+          <a:p xmlns:a="http://schemas.openxmlformats.org/drawingml/2006/main">
+            <a:r>
+              <a:t>讲义 §五·3 问题定义文件字段；[starter-template.md](../../course/starter-template.md) §3；[assignments.md](../../course/assignments.md) Checkpoint 1。</a:t>
+            </a:r>
+          </a:p>
+          <a:p xmlns:a="http://schemas.openxmlformats.org/drawingml/2006/main">
+            <a:r>
+              <a:t/>
+            </a:r>
+          </a:p>
+          <a:p xmlns:a="http://schemas.openxmlformats.org/drawingml/2006/main">
+            <a:r>
+              <a:t>---</a:t>
+            </a:r>
+          </a:p>
+          <a:p xmlns:a="http://schemas.openxmlformats.org/drawingml/2006/main">
+            <a:r>
+              <a:t/>
             </a:r>
           </a:p>
           <a:p xmlns:a="http://schemas.openxmlformats.org/drawingml/2006/main">
@@ -1184,7 +2674,27 @@
           </a:p>
           <a:p xmlns:a="http://schemas.openxmlformats.org/drawingml/2006/main">
             <a:r>
-              <a:t>- 本页仅使用课程内部规则与教学材料。</a:t>
+              <a:t/>
+            </a:r>
+          </a:p>
+          <a:p xmlns:a="http://schemas.openxmlformats.org/drawingml/2006/main">
+            <a:r>
+              <a:t>- 本课 handout.md 与 slides.md</a:t>
+            </a:r>
+          </a:p>
+          <a:p xmlns:a="http://schemas.openxmlformats.org/drawingml/2006/main">
+            <a:r>
+              <a:t/>
+            </a:r>
+          </a:p>
+          <a:p xmlns:a="http://schemas.openxmlformats.org/drawingml/2006/main">
+            <a:r>
+              <a:t>- ../../course/reading-card-case.md</a:t>
+            </a:r>
+          </a:p>
+          <a:p xmlns:a="http://schemas.openxmlformats.org/drawingml/2006/main">
+            <a:r>
+              <a:t/>
             </a:r>
           </a:p>
           <a:p xmlns:a="http://schemas.openxmlformats.org/drawingml/2006/main">
@@ -1259,7 +2769,147 @@
           <a:lstStyle xmlns:a="http://schemas.openxmlformats.org/drawingml/2006/main"/>
           <a:p xmlns:a="http://schemas.openxmlformats.org/drawingml/2006/main">
             <a:r>
-              <a:t>页面标题：同伴互查：只提问题，由作者决定</a:t>
+              <a:t>页面：P19 同伴互查：只提问题，由作者决定</a:t>
+            </a:r>
+          </a:p>
+          <a:p xmlns:a="http://schemas.openxmlformats.org/drawingml/2006/main">
+            <a:r>
+              <a:t/>
+            </a:r>
+          </a:p>
+          <a:p xmlns:a="http://schemas.openxmlformats.org/drawingml/2006/main">
+            <a:r>
+              <a:t>讲义位置：本课讲义；见逐页母稿映射表</a:t>
+            </a:r>
+          </a:p>
+          <a:p xmlns:a="http://schemas.openxmlformats.org/drawingml/2006/main">
+            <a:r>
+              <a:t/>
+            </a:r>
+          </a:p>
+          <a:p xmlns:a="http://schemas.openxmlformats.org/drawingml/2006/main">
+            <a:r>
+              <a:t>屏显核对：</a:t>
+            </a:r>
+          </a:p>
+          <a:p xmlns:a="http://schemas.openxmlformats.org/drawingml/2006/main">
+            <a:r>
+              <a:t>2-3 人互查，按 9 项门条件逐项检查：</a:t>
+            </a:r>
+          </a:p>
+          <a:p xmlns:a="http://schemas.openxmlformats.org/drawingml/2006/main">
+            <a:r>
+              <a:t/>
+            </a:r>
+          </a:p>
+          <a:p xmlns:a="http://schemas.openxmlformats.org/drawingml/2006/main">
+            <a:r>
+              <a:t>1. 研究问题是结构性问题还是主题词？</a:t>
+            </a:r>
+          </a:p>
+          <a:p xmlns:a="http://schemas.openxmlformats.org/drawingml/2006/main">
+            <a:r>
+              <a:t>2. 非例有实质约束吗？是否过宽或过窄？</a:t>
+            </a:r>
+          </a:p>
+          <a:p xmlns:a="http://schemas.openxmlformats.org/drawingml/2006/main">
+            <a:r>
+              <a:t>3. 可证伪命题能被推翻吗？有没有对照和推翻条件？</a:t>
+            </a:r>
+          </a:p>
+          <a:p xmlns:a="http://schemas.openxmlformats.org/drawingml/2006/main">
+            <a:r>
+              <a:t>4. 第一性原理推导基于证据地图吗？还是凭空构造？</a:t>
+            </a:r>
+          </a:p>
+          <a:p xmlns:a="http://schemas.openxmlformats.org/drawingml/2006/main">
+            <a:r>
+              <a:t>5. 重要性经过"So what?"检查了吗？</a:t>
+            </a:r>
+          </a:p>
+          <a:p xmlns:a="http://schemas.openxmlformats.org/drawingml/2006/main">
+            <a:r>
+              <a:t>6. 课程周期内能完成最小验证吗？</a:t>
+            </a:r>
+          </a:p>
+          <a:p xmlns:a="http://schemas.openxmlformats.org/drawingml/2006/main">
+            <a:r>
+              <a:t/>
+            </a:r>
+          </a:p>
+          <a:p xmlns:a="http://schemas.openxmlformats.org/drawingml/2006/main">
+            <a:r>
+              <a:t>作者记录：采纳／暂不采纳／待核验</a:t>
+            </a:r>
+          </a:p>
+          <a:p xmlns:a="http://schemas.openxmlformats.org/drawingml/2006/main">
+            <a:r>
+              <a:t/>
+            </a:r>
+          </a:p>
+          <a:p xmlns:a="http://schemas.openxmlformats.org/drawingml/2006/main">
+            <a:r>
+              <a:t>&gt; 同伴只提问题，不替作者决定。</a:t>
+            </a:r>
+          </a:p>
+          <a:p xmlns:a="http://schemas.openxmlformats.org/drawingml/2006/main">
+            <a:r>
+              <a:t/>
+            </a:r>
+          </a:p>
+          <a:p xmlns:a="http://schemas.openxmlformats.org/drawingml/2006/main">
+            <a:r>
+              <a:t>教师讲述：</a:t>
+            </a:r>
+          </a:p>
+          <a:p xmlns:a="http://schemas.openxmlformats.org/drawingml/2006/main">
+            <a:r>
+              <a:t>每人约 3-5 分钟：一人用 45 秒说明问题、非例和可证伪命题；同伴按门条件逐项检查。反馈不要求立即改写。反馈者不替代作者修改，不形成共同提交。人数为奇数时组成三人组，每人缩短说明时间。重点检查第 5-7 项（本课产出），第 1-4 项只确认已存在。</a:t>
+            </a:r>
+          </a:p>
+          <a:p xmlns:a="http://schemas.openxmlformats.org/drawingml/2006/main">
+            <a:r>
+              <a:t/>
+            </a:r>
+          </a:p>
+          <a:p xmlns:a="http://schemas.openxmlformats.org/drawingml/2006/main">
+            <a:r>
+              <a:t>学生动作：</a:t>
+            </a:r>
+          </a:p>
+          <a:p xmlns:a="http://schemas.openxmlformats.org/drawingml/2006/main">
+            <a:r>
+              <a:t>每人说明一个问题边界与推翻条件；同伴只提问题，作者记录处理方式。</a:t>
+            </a:r>
+          </a:p>
+          <a:p xmlns:a="http://schemas.openxmlformats.org/drawingml/2006/main">
+            <a:r>
+              <a:t/>
+            </a:r>
+          </a:p>
+          <a:p xmlns:a="http://schemas.openxmlformats.org/drawingml/2006/main">
+            <a:r>
+              <a:t>来源与边界：</a:t>
+            </a:r>
+          </a:p>
+          <a:p xmlns:a="http://schemas.openxmlformats.org/drawingml/2006/main">
+            <a:r>
+              <a:t>同伴反馈为形成性活动，不单独计分，不共同提交（[assignments.md](../../course/assignments.md)）。</a:t>
+            </a:r>
+          </a:p>
+          <a:p xmlns:a="http://schemas.openxmlformats.org/drawingml/2006/main">
+            <a:r>
+              <a:t/>
+            </a:r>
+          </a:p>
+          <a:p xmlns:a="http://schemas.openxmlformats.org/drawingml/2006/main">
+            <a:r>
+              <a:t>---</a:t>
+            </a:r>
+          </a:p>
+          <a:p xmlns:a="http://schemas.openxmlformats.org/drawingml/2006/main">
+            <a:r>
+              <a:t/>
             </a:r>
           </a:p>
           <a:p xmlns:a="http://schemas.openxmlformats.org/drawingml/2006/main">
@@ -1269,7 +2919,27 @@
           </a:p>
           <a:p xmlns:a="http://schemas.openxmlformats.org/drawingml/2006/main">
             <a:r>
-              <a:t>- 本页仅使用课程内部规则与教学材料。</a:t>
+              <a:t/>
+            </a:r>
+          </a:p>
+          <a:p xmlns:a="http://schemas.openxmlformats.org/drawingml/2006/main">
+            <a:r>
+              <a:t>- 本课 handout.md 与 slides.md</a:t>
+            </a:r>
+          </a:p>
+          <a:p xmlns:a="http://schemas.openxmlformats.org/drawingml/2006/main">
+            <a:r>
+              <a:t/>
+            </a:r>
+          </a:p>
+          <a:p xmlns:a="http://schemas.openxmlformats.org/drawingml/2006/main">
+            <a:r>
+              <a:t>- ../../course/reading-card-case.md</a:t>
+            </a:r>
+          </a:p>
+          <a:p xmlns:a="http://schemas.openxmlformats.org/drawingml/2006/main">
+            <a:r>
+              <a:t/>
             </a:r>
           </a:p>
           <a:p xmlns:a="http://schemas.openxmlformats.org/drawingml/2006/main">
@@ -1344,7 +3014,197 @@
           <a:lstStyle xmlns:a="http://schemas.openxmlformats.org/drawingml/2006/main"/>
           <a:p xmlns:a="http://schemas.openxmlformats.org/drawingml/2006/main">
             <a:r>
-              <a:t>页面标题：第 5 课之后，研究空白候选如何变成问题</a:t>
+              <a:t>页面：P02 第 5 课之后，研究空白候选如何变成问题</a:t>
+            </a:r>
+          </a:p>
+          <a:p xmlns:a="http://schemas.openxmlformats.org/drawingml/2006/main">
+            <a:r>
+              <a:t/>
+            </a:r>
+          </a:p>
+          <a:p xmlns:a="http://schemas.openxmlformats.org/drawingml/2006/main">
+            <a:r>
+              <a:t>讲义位置：本课讲义；见逐页母稿映射表</a:t>
+            </a:r>
+          </a:p>
+          <a:p xmlns:a="http://schemas.openxmlformats.org/drawingml/2006/main">
+            <a:r>
+              <a:t/>
+            </a:r>
+          </a:p>
+          <a:p xmlns:a="http://schemas.openxmlformats.org/drawingml/2006/main">
+            <a:r>
+              <a:t>屏显核对：</a:t>
+            </a:r>
+          </a:p>
+          <a:p xmlns:a="http://schemas.openxmlformats.org/drawingml/2006/main">
+            <a:r>
+              <a:t>第 5 课已建立：</a:t>
+            </a:r>
+          </a:p>
+          <a:p xmlns:a="http://schemas.openxmlformats.org/drawingml/2006/main">
+            <a:r>
+              <a:t>- 证据地图初版（直接证据/补充证据/冲突/空白）</a:t>
+            </a:r>
+          </a:p>
+          <a:p xmlns:a="http://schemas.openxmlformats.org/drawingml/2006/main">
+            <a:r>
+              <a:t>- 研究空白候选（经三步检验：真实性、重要性、可行性）</a:t>
+            </a:r>
+          </a:p>
+          <a:p xmlns:a="http://schemas.openxmlformats.org/drawingml/2006/main">
+            <a:r>
+              <a:t/>
+            </a:r>
+          </a:p>
+          <a:p xmlns:a="http://schemas.openxmlformats.org/drawingml/2006/main">
+            <a:r>
+              <a:t>仍未解决：</a:t>
+            </a:r>
+          </a:p>
+          <a:p xmlns:a="http://schemas.openxmlformats.org/drawingml/2006/main">
+            <a:r>
+              <a:t>- 空白如何改写为包含条件、对象、干预、结果的问题？</a:t>
+            </a:r>
+          </a:p>
+          <a:p xmlns:a="http://schemas.openxmlformats.org/drawingml/2006/main">
+            <a:r>
+              <a:t>- 什么不算本问题（非例）？</a:t>
+            </a:r>
+          </a:p>
+          <a:p xmlns:a="http://schemas.openxmlformats.org/drawingml/2006/main">
+            <a:r>
+              <a:t>- 什么观察会推翻当前主张（可证伪命题）？</a:t>
+            </a:r>
+          </a:p>
+          <a:p xmlns:a="http://schemas.openxmlformats.org/drawingml/2006/main">
+            <a:r>
+              <a:t>- 从基本约束能推出什么待验证前提？</a:t>
+            </a:r>
+          </a:p>
+          <a:p xmlns:a="http://schemas.openxmlformats.org/drawingml/2006/main">
+            <a:r>
+              <a:t/>
+            </a:r>
+          </a:p>
+          <a:p xmlns:a="http://schemas.openxmlformats.org/drawingml/2006/main">
+            <a:r>
+              <a:t>&gt; 研究空白描述"缺什么"，本课回答"问什么"。</a:t>
+            </a:r>
+          </a:p>
+          <a:p xmlns:a="http://schemas.openxmlformats.org/drawingml/2006/main">
+            <a:r>
+              <a:t/>
+            </a:r>
+          </a:p>
+          <a:p xmlns:a="http://schemas.openxmlformats.org/drawingml/2006/main">
+            <a:r>
+              <a:t>教师讲述：</a:t>
+            </a:r>
+          </a:p>
+          <a:p xmlns:a="http://schemas.openxmlformats.org/drawingml/2006/main">
+            <a:r>
+              <a:t>回扣第 5 课：证据地图和研究空白候选让"缺什么"变得可见，但没有回答"问什么"。本课进入阶段一和阶段二，把空白收敛为可检验问题。</a:t>
+            </a:r>
+          </a:p>
+          <a:p xmlns:a="http://schemas.openxmlformats.org/drawingml/2006/main">
+            <a:r>
+              <a:t/>
+            </a:r>
+          </a:p>
+          <a:p xmlns:a="http://schemas.openxmlformats.org/drawingml/2006/main">
+            <a:r>
+              <a:t>学生动作：</a:t>
+            </a:r>
+          </a:p>
+          <a:p xmlns:a="http://schemas.openxmlformats.org/drawingml/2006/main">
+            <a:r>
+              <a:t>快问：你目前的研究空白候选是什么？它是一个空格描述，还是一个包含条件和机制的问题？只听回答，不评价。</a:t>
+            </a:r>
+          </a:p>
+          <a:p xmlns:a="http://schemas.openxmlformats.org/drawingml/2006/main">
+            <a:r>
+              <a:t/>
+            </a:r>
+          </a:p>
+          <a:p xmlns:a="http://schemas.openxmlformats.org/drawingml/2006/main">
+            <a:r>
+              <a:t>本课板书、诊断与串词：</a:t>
+            </a:r>
+          </a:p>
+          <a:p xmlns:a="http://schemas.openxmlformats.org/drawingml/2006/main">
+            <a:r>
+              <a:t>本节替换同类口头提示，不增加既有时段。开场诊断嵌入现有开场/回顾，后续再沿原实践时段操作。</a:t>
+            </a:r>
+          </a:p>
+          <a:p xmlns:a="http://schemas.openxmlformats.org/drawingml/2006/main">
+            <a:r>
+              <a:t/>
+            </a:r>
+          </a:p>
+          <a:p xmlns:a="http://schemas.openxmlformats.org/drawingml/2006/main">
+            <a:r>
+              <a:t>- **板书主线**：问题谓词 → 反证观察；效果 / 成本 / 采用分开。</a:t>
+            </a:r>
+          </a:p>
+          <a:p xmlns:a="http://schemas.openxmlformats.org/drawingml/2006/main">
+            <a:r>
+              <a:t>- **诊断问题**：效果较好但成本高，究竟推翻了哪条命题？</a:t>
+            </a:r>
+          </a:p>
+          <a:p xmlns:a="http://schemas.openxmlformats.org/drawingml/2006/main">
+            <a:r>
+              <a:t>- **预期回答**：可能影响采用决定，不能直接推翻效果命题。</a:t>
+            </a:r>
+          </a:p>
+          <a:p xmlns:a="http://schemas.openxmlformats.org/drawingml/2006/main">
+            <a:r>
+              <a:t>- **常见误答后的追问**：要求对准命题的范围、结果谓词和不确定性。</a:t>
+            </a:r>
+          </a:p>
+          <a:p xmlns:a="http://schemas.openxmlformats.org/drawingml/2006/main">
+            <a:r>
+              <a:t>- **过渡串词**：“下一课为这个结果命题补机制，并找能区分的观察。”</a:t>
+            </a:r>
+          </a:p>
+          <a:p xmlns:a="http://schemas.openxmlformats.org/drawingml/2006/main">
+            <a:r>
+              <a:t>- **当堂最小产出**：一条可检验问题及一项本人问题门缺口。</a:t>
+            </a:r>
+          </a:p>
+          <a:p xmlns:a="http://schemas.openxmlformats.org/drawingml/2006/main">
+            <a:r>
+              <a:t>- **退出记录**：写“已完成的动作、本人项目仍缺的证据/工件、下次补齐位置”。使用教师包时标明课堂方法练习，不能据此宣称本人研究门通过；正式提交课次仍为第 6、9、13、16 课。</a:t>
+            </a:r>
+          </a:p>
+          <a:p xmlns:a="http://schemas.openxmlformats.org/drawingml/2006/main">
+            <a:r>
+              <a:t/>
+            </a:r>
+          </a:p>
+          <a:p xmlns:a="http://schemas.openxmlformats.org/drawingml/2006/main">
+            <a:r>
+              <a:t>来源与边界：</a:t>
+            </a:r>
+          </a:p>
+          <a:p xmlns:a="http://schemas.openxmlformats.org/drawingml/2006/main">
+            <a:r>
+              <a:t>回扣第 5 课讲义与 [AGENTS.md](../../AGENTS.md) 证据标准。</a:t>
+            </a:r>
+          </a:p>
+          <a:p xmlns:a="http://schemas.openxmlformats.org/drawingml/2006/main">
+            <a:r>
+              <a:t/>
+            </a:r>
+          </a:p>
+          <a:p xmlns:a="http://schemas.openxmlformats.org/drawingml/2006/main">
+            <a:r>
+              <a:t>---</a:t>
+            </a:r>
+          </a:p>
+          <a:p xmlns:a="http://schemas.openxmlformats.org/drawingml/2006/main">
+            <a:r>
+              <a:t/>
             </a:r>
           </a:p>
           <a:p xmlns:a="http://schemas.openxmlformats.org/drawingml/2006/main">
@@ -1354,7 +3214,27 @@
           </a:p>
           <a:p xmlns:a="http://schemas.openxmlformats.org/drawingml/2006/main">
             <a:r>
-              <a:t>- 本页仅使用课程内部规则与教学材料。</a:t>
+              <a:t/>
+            </a:r>
+          </a:p>
+          <a:p xmlns:a="http://schemas.openxmlformats.org/drawingml/2006/main">
+            <a:r>
+              <a:t>- 本课 handout.md 与 slides.md</a:t>
+            </a:r>
+          </a:p>
+          <a:p xmlns:a="http://schemas.openxmlformats.org/drawingml/2006/main">
+            <a:r>
+              <a:t/>
+            </a:r>
+          </a:p>
+          <a:p xmlns:a="http://schemas.openxmlformats.org/drawingml/2006/main">
+            <a:r>
+              <a:t>- ../../course/reading-card-case.md</a:t>
+            </a:r>
+          </a:p>
+          <a:p xmlns:a="http://schemas.openxmlformats.org/drawingml/2006/main">
+            <a:r>
+              <a:t/>
             </a:r>
           </a:p>
           <a:p xmlns:a="http://schemas.openxmlformats.org/drawingml/2006/main">
@@ -1429,7 +3309,127 @@
           <a:lstStyle xmlns:a="http://schemas.openxmlformats.org/drawingml/2006/main"/>
           <a:p xmlns:a="http://schemas.openxmlformats.org/drawingml/2006/main">
             <a:r>
-              <a:t>页面标题：本讲知识点总结</a:t>
+              <a:t>页面：P20 本讲知识点总结</a:t>
+            </a:r>
+          </a:p>
+          <a:p xmlns:a="http://schemas.openxmlformats.org/drawingml/2006/main">
+            <a:r>
+              <a:t/>
+            </a:r>
+          </a:p>
+          <a:p xmlns:a="http://schemas.openxmlformats.org/drawingml/2006/main">
+            <a:r>
+              <a:t>讲义位置：本课讲义；见逐页母稿映射表</a:t>
+            </a:r>
+          </a:p>
+          <a:p xmlns:a="http://schemas.openxmlformats.org/drawingml/2006/main">
+            <a:r>
+              <a:t/>
+            </a:r>
+          </a:p>
+          <a:p xmlns:a="http://schemas.openxmlformats.org/drawingml/2006/main">
+            <a:r>
+              <a:t>屏显核对：</a:t>
+            </a:r>
+          </a:p>
+          <a:p xmlns:a="http://schemas.openxmlformats.org/drawingml/2006/main">
+            <a:r>
+              <a:t>结构性问题 → 可证伪命题 → 第一性原理推导 → 问题门自查</a:t>
+            </a:r>
+          </a:p>
+          <a:p xmlns:a="http://schemas.openxmlformats.org/drawingml/2006/main">
+            <a:r>
+              <a:t/>
+            </a:r>
+          </a:p>
+          <a:p xmlns:a="http://schemas.openxmlformats.org/drawingml/2006/main">
+            <a:r>
+              <a:t>1. **结构性问题**：写清条件、对象、干预和结果，不停在主题词或空白描述。</a:t>
+            </a:r>
+          </a:p>
+          <a:p xmlns:a="http://schemas.openxmlformats.org/drawingml/2006/main">
+            <a:r>
+              <a:t>2. **可证伪命题**：明确对照、指标与推翻条件。</a:t>
+            </a:r>
+          </a:p>
+          <a:p xmlns:a="http://schemas.openxmlformats.org/drawingml/2006/main">
+            <a:r>
+              <a:t>3. **第一性原理推导**：由基本约束推导待验证前提，并继续接受外部证据检验。</a:t>
+            </a:r>
+          </a:p>
+          <a:p xmlns:a="http://schemas.openxmlformats.org/drawingml/2006/main">
+            <a:r>
+              <a:t>4. **问题门自查**：核对九项条件以及一条已回写的真实失败或死路记录。</a:t>
+            </a:r>
+          </a:p>
+          <a:p xmlns:a="http://schemas.openxmlformats.org/drawingml/2006/main">
+            <a:r>
+              <a:t/>
+            </a:r>
+          </a:p>
+          <a:p xmlns:a="http://schemas.openxmlformats.org/drawingml/2006/main">
+            <a:r>
+              <a:t>&gt; 关键边界：第一性原理推导得到的是待验证前提，不是结论；问题门检查当前项目是否具备继续研究的条件。</a:t>
+            </a:r>
+          </a:p>
+          <a:p xmlns:a="http://schemas.openxmlformats.org/drawingml/2006/main">
+            <a:r>
+              <a:t/>
+            </a:r>
+          </a:p>
+          <a:p xmlns:a="http://schemas.openxmlformats.org/drawingml/2006/main">
+            <a:r>
+              <a:t>教师讲述：</a:t>
+            </a:r>
+          </a:p>
+          <a:p xmlns:a="http://schemas.openxmlformats.org/drawingml/2006/main">
+            <a:r>
+              <a:t>回收本讲主链：从结构性问题出发，写出可证伪命题，再用基本约束推导待验证前提，最后按九项问题门条件核对。总结不替代下一页的提交说明。</a:t>
+            </a:r>
+          </a:p>
+          <a:p xmlns:a="http://schemas.openxmlformats.org/drawingml/2006/main">
+            <a:r>
+              <a:t/>
+            </a:r>
+          </a:p>
+          <a:p xmlns:a="http://schemas.openxmlformats.org/drawingml/2006/main">
+            <a:r>
+              <a:t>学生动作：</a:t>
+            </a:r>
+          </a:p>
+          <a:p xmlns:a="http://schemas.openxmlformats.org/drawingml/2006/main">
+            <a:r>
+              <a:t>学生用一句话说出自己当前最需要补的是问题表述、推翻条件、推导依据还是门条件记录。</a:t>
+            </a:r>
+          </a:p>
+          <a:p xmlns:a="http://schemas.openxmlformats.org/drawingml/2006/main">
+            <a:r>
+              <a:t/>
+            </a:r>
+          </a:p>
+          <a:p xmlns:a="http://schemas.openxmlformats.org/drawingml/2006/main">
+            <a:r>
+              <a:t>来源与边界：</a:t>
+            </a:r>
+          </a:p>
+          <a:p xmlns:a="http://schemas.openxmlformats.org/drawingml/2006/main">
+            <a:r>
+              <a:t>讲义 §一-§五；[assignments.md](../../course/assignments.md) Checkpoint 1。</a:t>
+            </a:r>
+          </a:p>
+          <a:p xmlns:a="http://schemas.openxmlformats.org/drawingml/2006/main">
+            <a:r>
+              <a:t/>
+            </a:r>
+          </a:p>
+          <a:p xmlns:a="http://schemas.openxmlformats.org/drawingml/2006/main">
+            <a:r>
+              <a:t>---</a:t>
+            </a:r>
+          </a:p>
+          <a:p xmlns:a="http://schemas.openxmlformats.org/drawingml/2006/main">
+            <a:r>
+              <a:t/>
             </a:r>
           </a:p>
           <a:p xmlns:a="http://schemas.openxmlformats.org/drawingml/2006/main">
@@ -1439,7 +3439,27 @@
           </a:p>
           <a:p xmlns:a="http://schemas.openxmlformats.org/drawingml/2006/main">
             <a:r>
-              <a:t>- 本页仅使用课程内部规则与教学材料。</a:t>
+              <a:t/>
+            </a:r>
+          </a:p>
+          <a:p xmlns:a="http://schemas.openxmlformats.org/drawingml/2006/main">
+            <a:r>
+              <a:t>- 本课 handout.md 与 slides.md</a:t>
+            </a:r>
+          </a:p>
+          <a:p xmlns:a="http://schemas.openxmlformats.org/drawingml/2006/main">
+            <a:r>
+              <a:t/>
+            </a:r>
+          </a:p>
+          <a:p xmlns:a="http://schemas.openxmlformats.org/drawingml/2006/main">
+            <a:r>
+              <a:t>- ../../course/reading-card-case.md</a:t>
+            </a:r>
+          </a:p>
+          <a:p xmlns:a="http://schemas.openxmlformats.org/drawingml/2006/main">
+            <a:r>
+              <a:t/>
             </a:r>
           </a:p>
           <a:p xmlns:a="http://schemas.openxmlformats.org/drawingml/2006/main">
@@ -1514,7 +3534,172 @@
           <a:lstStyle xmlns:a="http://schemas.openxmlformats.org/drawingml/2006/main"/>
           <a:p xmlns:a="http://schemas.openxmlformats.org/drawingml/2006/main">
             <a:r>
-              <a:t>页面标题：问题门提交与失败回退路径</a:t>
+              <a:t>页面：P21 问题门提交与失败回退路径</a:t>
+            </a:r>
+          </a:p>
+          <a:p xmlns:a="http://schemas.openxmlformats.org/drawingml/2006/main">
+            <a:r>
+              <a:t/>
+            </a:r>
+          </a:p>
+          <a:p xmlns:a="http://schemas.openxmlformats.org/drawingml/2006/main">
+            <a:r>
+              <a:t>讲义位置：本课讲义；见逐页母稿映射表</a:t>
+            </a:r>
+          </a:p>
+          <a:p xmlns:a="http://schemas.openxmlformats.org/drawingml/2006/main">
+            <a:r>
+              <a:t/>
+            </a:r>
+          </a:p>
+          <a:p xmlns:a="http://schemas.openxmlformats.org/drawingml/2006/main">
+            <a:r>
+              <a:t>屏显核对：</a:t>
+            </a:r>
+          </a:p>
+          <a:p xmlns:a="http://schemas.openxmlformats.org/drawingml/2006/main">
+            <a:r>
+              <a:t>**提交方式**：</a:t>
+            </a:r>
+          </a:p>
+          <a:p xmlns:a="http://schemas.openxmlformats.org/drawingml/2006/main">
+            <a:r>
+              <a:t>提交指向当前个人项目版本的链接、tag 或压缩包。不重复制作与项目仓库分离的汇报文档。</a:t>
+            </a:r>
+          </a:p>
+          <a:p xmlns:a="http://schemas.openxmlformats.org/drawingml/2006/main">
+            <a:r>
+              <a:t/>
+            </a:r>
+          </a:p>
+          <a:p xmlns:a="http://schemas.openxmlformats.org/drawingml/2006/main">
+            <a:r>
+              <a:t>**未通过时**：</a:t>
+            </a:r>
+          </a:p>
+          <a:p xmlns:a="http://schemas.openxmlformats.org/drawingml/2006/main">
+            <a:r>
+              <a:t>回到文献、证据或问题定义环节修改，一周内重新检查。第一次未通过不直接扣重分，但未按期修订影响评分维度。</a:t>
+            </a:r>
+          </a:p>
+          <a:p xmlns:a="http://schemas.openxmlformats.org/drawingml/2006/main">
+            <a:r>
+              <a:t/>
+            </a:r>
+          </a:p>
+          <a:p xmlns:a="http://schemas.openxmlformats.org/drawingml/2006/main">
+            <a:r>
+              <a:t>**根因定位**：</a:t>
+            </a:r>
+          </a:p>
+          <a:p xmlns:a="http://schemas.openxmlformats.org/drawingml/2006/main">
+            <a:r>
+              <a:t>- 缺少直接证据 → 回到第 3-4 课检索和精读</a:t>
+            </a:r>
+          </a:p>
+          <a:p xmlns:a="http://schemas.openxmlformats.org/drawingml/2006/main">
+            <a:r>
+              <a:t>- 问题过大 → 回到本课问题重写和非例</a:t>
+            </a:r>
+          </a:p>
+          <a:p xmlns:a="http://schemas.openxmlformats.org/drawingml/2006/main">
+            <a:r>
+              <a:t>- 非例与可证伪命题矛盾 → 回到本课非例写法检查</a:t>
+            </a:r>
+          </a:p>
+          <a:p xmlns:a="http://schemas.openxmlformats.org/drawingml/2006/main">
+            <a:r>
+              <a:t>- 第一性原理脱离文献 → 回到第 5 课证据地图</a:t>
+            </a:r>
+          </a:p>
+          <a:p xmlns:a="http://schemas.openxmlformats.org/drawingml/2006/main">
+            <a:r>
+              <a:t>- 选题理由缺失 → 回到本课候选题池四维比较（P07）</a:t>
+            </a:r>
+          </a:p>
+          <a:p xmlns:a="http://schemas.openxmlformats.org/drawingml/2006/main">
+            <a:r>
+              <a:t>- 失败记录只有预案 → 回到真实检索/阅读/问题迭代，补原因、处理和回写位置</a:t>
+            </a:r>
+          </a:p>
+          <a:p xmlns:a="http://schemas.openxmlformats.org/drawingml/2006/main">
+            <a:r>
+              <a:t/>
+            </a:r>
+          </a:p>
+          <a:p xmlns:a="http://schemas.openxmlformats.org/drawingml/2006/main">
+            <a:r>
+              <a:t>提交核对：problem-definition.md、failure-log.md 与回写工件是否一致</a:t>
+            </a:r>
+          </a:p>
+          <a:p xmlns:a="http://schemas.openxmlformats.org/drawingml/2006/main">
+            <a:r>
+              <a:t/>
+            </a:r>
+          </a:p>
+          <a:p xmlns:a="http://schemas.openxmlformats.org/drawingml/2006/main">
+            <a:r>
+              <a:t>&gt; 门未通过时聚焦修复缺失条件，无关材料不必重复提交。</a:t>
+            </a:r>
+          </a:p>
+          <a:p xmlns:a="http://schemas.openxmlformats.org/drawingml/2006/main">
+            <a:r>
+              <a:t/>
+            </a:r>
+          </a:p>
+          <a:p xmlns:a="http://schemas.openxmlformats.org/drawingml/2006/main">
+            <a:r>
+              <a:t>教师讲述：</a:t>
+            </a:r>
+          </a:p>
+          <a:p xmlns:a="http://schemas.openxmlformats.org/drawingml/2006/main">
+            <a:r>
+              <a:t>明确提交方式和回退路径。问题门检查当前项目版本，不重新制作材料。未通过时回到根因所在环节修复，不是重新写一份报告。第一次未通过不扣重分，但需在一周内修订。根因定位帮助学生知道不通过时回到哪个环节。</a:t>
+            </a:r>
+          </a:p>
+          <a:p xmlns:a="http://schemas.openxmlformats.org/drawingml/2006/main">
+            <a:r>
+              <a:t/>
+            </a:r>
+          </a:p>
+          <a:p xmlns:a="http://schemas.openxmlformats.org/drawingml/2006/main">
+            <a:r>
+              <a:t>学生动作：</a:t>
+            </a:r>
+          </a:p>
+          <a:p xmlns:a="http://schemas.openxmlformats.org/drawingml/2006/main">
+            <a:r>
+              <a:t>让学生检查：如果当前提交，9 项中哪一项最可能不通过？</a:t>
+            </a:r>
+          </a:p>
+          <a:p xmlns:a="http://schemas.openxmlformats.org/drawingml/2006/main">
+            <a:r>
+              <a:t/>
+            </a:r>
+          </a:p>
+          <a:p xmlns:a="http://schemas.openxmlformats.org/drawingml/2006/main">
+            <a:r>
+              <a:t>来源与边界：</a:t>
+            </a:r>
+          </a:p>
+          <a:p xmlns:a="http://schemas.openxmlformats.org/drawingml/2006/main">
+            <a:r>
+              <a:t>[assignments.md](../../course/assignments.md) Checkpoint 1 提交方式与未通过处理；[assessment.md](../../course/assessment.md) "文献与问题定位"维度（25%）。</a:t>
+            </a:r>
+          </a:p>
+          <a:p xmlns:a="http://schemas.openxmlformats.org/drawingml/2006/main">
+            <a:r>
+              <a:t/>
+            </a:r>
+          </a:p>
+          <a:p xmlns:a="http://schemas.openxmlformats.org/drawingml/2006/main">
+            <a:r>
+              <a:t>---</a:t>
+            </a:r>
+          </a:p>
+          <a:p xmlns:a="http://schemas.openxmlformats.org/drawingml/2006/main">
+            <a:r>
+              <a:t/>
             </a:r>
           </a:p>
           <a:p xmlns:a="http://schemas.openxmlformats.org/drawingml/2006/main">
@@ -1524,7 +3709,27 @@
           </a:p>
           <a:p xmlns:a="http://schemas.openxmlformats.org/drawingml/2006/main">
             <a:r>
-              <a:t>- 本页仅使用课程内部规则与教学材料。</a:t>
+              <a:t/>
+            </a:r>
+          </a:p>
+          <a:p xmlns:a="http://schemas.openxmlformats.org/drawingml/2006/main">
+            <a:r>
+              <a:t>- 本课 handout.md 与 slides.md</a:t>
+            </a:r>
+          </a:p>
+          <a:p xmlns:a="http://schemas.openxmlformats.org/drawingml/2006/main">
+            <a:r>
+              <a:t/>
+            </a:r>
+          </a:p>
+          <a:p xmlns:a="http://schemas.openxmlformats.org/drawingml/2006/main">
+            <a:r>
+              <a:t>- ../../course/reading-card-case.md</a:t>
+            </a:r>
+          </a:p>
+          <a:p xmlns:a="http://schemas.openxmlformats.org/drawingml/2006/main">
+            <a:r>
+              <a:t/>
             </a:r>
           </a:p>
           <a:p xmlns:a="http://schemas.openxmlformats.org/drawingml/2006/main">
@@ -1599,7 +3804,197 @@
           <a:lstStyle xmlns:a="http://schemas.openxmlformats.org/drawingml/2006/main"/>
           <a:p xmlns:a="http://schemas.openxmlformats.org/drawingml/2006/main">
             <a:r>
-              <a:t>页面标题：退出卡与第 7 课预告</a:t>
+              <a:t>页面：P22 退出卡与第 7 课预告</a:t>
+            </a:r>
+          </a:p>
+          <a:p xmlns:a="http://schemas.openxmlformats.org/drawingml/2006/main">
+            <a:r>
+              <a:t/>
+            </a:r>
+          </a:p>
+          <a:p xmlns:a="http://schemas.openxmlformats.org/drawingml/2006/main">
+            <a:r>
+              <a:t>讲义位置：本课讲义；见逐页母稿映射表</a:t>
+            </a:r>
+          </a:p>
+          <a:p xmlns:a="http://schemas.openxmlformats.org/drawingml/2006/main">
+            <a:r>
+              <a:t/>
+            </a:r>
+          </a:p>
+          <a:p xmlns:a="http://schemas.openxmlformats.org/drawingml/2006/main">
+            <a:r>
+              <a:t>屏显核对：</a:t>
+            </a:r>
+          </a:p>
+          <a:p xmlns:a="http://schemas.openxmlformats.org/drawingml/2006/main">
+            <a:r>
+              <a:t>退出卡：</a:t>
+            </a:r>
+          </a:p>
+          <a:p xmlns:a="http://schemas.openxmlformats.org/drawingml/2006/main">
+            <a:r>
+              <a:t/>
+            </a:r>
+          </a:p>
+          <a:p xmlns:a="http://schemas.openxmlformats.org/drawingml/2006/main">
+            <a:r>
+              <a:t>1. 当前问题属于主题、问题，还是待验证主张？</a:t>
+            </a:r>
+          </a:p>
+          <a:p xmlns:a="http://schemas.openxmlformats.org/drawingml/2006/main">
+            <a:r>
+              <a:t>2. 哪项观察可能推翻主张？</a:t>
+            </a:r>
+          </a:p>
+          <a:p xmlns:a="http://schemas.openxmlformats.org/drawingml/2006/main">
+            <a:r>
+              <a:t>3. 九项问题门条件中，最需要补哪一项？</a:t>
+            </a:r>
+          </a:p>
+          <a:p xmlns:a="http://schemas.openxmlformats.org/drawingml/2006/main">
+            <a:r>
+              <a:t/>
+            </a:r>
+          </a:p>
+          <a:p xmlns:a="http://schemas.openxmlformats.org/drawingml/2006/main">
+            <a:r>
+              <a:t>课后提交问题门材料包，包含至少 3 张相关完整精读卡。</a:t>
+            </a:r>
+          </a:p>
+          <a:p xmlns:a="http://schemas.openxmlformats.org/drawingml/2006/main">
+            <a:r>
+              <a:t>第 7 课：机制假设、研究判断与实验设计。</a:t>
+            </a:r>
+          </a:p>
+          <a:p xmlns:a="http://schemas.openxmlformats.org/drawingml/2006/main">
+            <a:r>
+              <a:t/>
+            </a:r>
+          </a:p>
+          <a:p xmlns:a="http://schemas.openxmlformats.org/drawingml/2006/main">
+            <a:r>
+              <a:t>教师讲述：</a:t>
+            </a:r>
+          </a:p>
+          <a:p xmlns:a="http://schemas.openxmlformats.org/drawingml/2006/main">
+            <a:r>
+              <a:t>课后阅读提示保留在此处；屏显只收束三个核心自检问题。</a:t>
+            </a:r>
+          </a:p>
+          <a:p xmlns:a="http://schemas.openxmlformats.org/drawingml/2006/main">
+            <a:r>
+              <a:t/>
+            </a:r>
+          </a:p>
+          <a:p xmlns:a="http://schemas.openxmlformats.org/drawingml/2006/main">
+            <a:r>
+              <a:t>课后引导阅读（采用 AI 导航→原文核验→AI 质疑→偏差审计→人工定稿流程）：</a:t>
+            </a:r>
+          </a:p>
+          <a:p xmlns:a="http://schemas.openxmlformats.org/drawingml/2006/main">
+            <a:r>
+              <a:t>- Booth et al. *The Craft of Research*, 5th ed., Chapter 1-2，核心阅读；</a:t>
+            </a:r>
+          </a:p>
+          <a:p xmlns:a="http://schemas.openxmlformats.org/drawingml/2006/main">
+            <a:r>
+              <a:t>- Platt, "Strong Inference."，任选；</a:t>
+            </a:r>
+          </a:p>
+          <a:p xmlns:a="http://schemas.openxmlformats.org/drawingml/2006/main">
+            <a:r>
+              <a:t>- Hamming, "You and Your Research."，任选；</a:t>
+            </a:r>
+          </a:p>
+          <a:p xmlns:a="http://schemas.openxmlformats.org/drawingml/2006/main">
+            <a:r>
+              <a:t>- 霍强《创新研究到底怎么做？》，任选。</a:t>
+            </a:r>
+          </a:p>
+          <a:p xmlns:a="http://schemas.openxmlformats.org/drawingml/2006/main">
+            <a:r>
+              <a:t/>
+            </a:r>
+          </a:p>
+          <a:p xmlns:a="http://schemas.openxmlformats.org/drawingml/2006/main">
+            <a:r>
+              <a:t>精读卡持续保存在个人项目 `notes/`，不逐周正式提交。问题门统一检查至少 3 张与个人项目直接相关的完整精读卡。</a:t>
+            </a:r>
+          </a:p>
+          <a:p xmlns:a="http://schemas.openxmlformats.org/drawingml/2006/main">
+            <a:r>
+              <a:t/>
+            </a:r>
+          </a:p>
+          <a:p xmlns:a="http://schemas.openxmlformats.org/drawingml/2006/main">
+            <a:r>
+              <a:t/>
+            </a:r>
+          </a:p>
+          <a:p xmlns:a="http://schemas.openxmlformats.org/drawingml/2006/main">
+            <a:r>
+              <a:t/>
+            </a:r>
+          </a:p>
+          <a:p xmlns:a="http://schemas.openxmlformats.org/drawingml/2006/main">
+            <a:r>
+              <a:t/>
+            </a:r>
+          </a:p>
+          <a:p xmlns:a="http://schemas.openxmlformats.org/drawingml/2006/main">
+            <a:r>
+              <a:t>回扣本课目标：学生不需要在 90 分钟内完成全部门条件自查，只要 problem-definition.md 更新版包含研究问题、非例、可证伪命题、重要性说明和候选题池与选题理由，第一性原理推导完成四步，就已经形成可提交的起点。课后完成自查和补全后提交问题门材料包。第 7 课将在这些问题上建立机制假设和实验设计——第一性原理推导的待验证前提将成为第 7 课机制假设的直接输入。</a:t>
+            </a:r>
+          </a:p>
+          <a:p xmlns:a="http://schemas.openxmlformats.org/drawingml/2006/main">
+            <a:r>
+              <a:t/>
+            </a:r>
+          </a:p>
+          <a:p xmlns:a="http://schemas.openxmlformats.org/drawingml/2006/main">
+            <a:r>
+              <a:t>学生动作：</a:t>
+            </a:r>
+          </a:p>
+          <a:p xmlns:a="http://schemas.openxmlformats.org/drawingml/2006/main">
+            <a:r>
+              <a:t>学生提交退出卡或保存在个人项目。教师收集共性问题，用于第 7 课前调整。</a:t>
+            </a:r>
+          </a:p>
+          <a:p xmlns:a="http://schemas.openxmlformats.org/drawingml/2006/main">
+            <a:r>
+              <a:t/>
+            </a:r>
+          </a:p>
+          <a:p xmlns:a="http://schemas.openxmlformats.org/drawingml/2006/main">
+            <a:r>
+              <a:t>来源与边界：</a:t>
+            </a:r>
+          </a:p>
+          <a:p xmlns:a="http://schemas.openxmlformats.org/drawingml/2006/main">
+            <a:r>
+              <a:t>- Booth, W. C. et al. *The Craft of Research*, 5th ed. [出版社页面](https://press.uchicago.edu/ucp/books/book/chicago/C/bo215874008)。</a:t>
+            </a:r>
+          </a:p>
+          <a:p xmlns:a="http://schemas.openxmlformats.org/drawingml/2006/main">
+            <a:r>
+              <a:t>- Platt, J. R. *Science* 146(3642), 347-353 (1964). DOI: [10.1126/science.146.3642.347](https://pubmed.ncbi.nlm.nih.gov/17739513/)。</a:t>
+            </a:r>
+          </a:p>
+          <a:p xmlns:a="http://schemas.openxmlformats.org/drawingml/2006/main">
+            <a:r>
+              <a:t>- Hamming, R. W. *The Art of Doing Science and Engineering*. [出版社页面](https://press.stripe.com/the-art-of-doing-science-and-engineering)。</a:t>
+            </a:r>
+          </a:p>
+          <a:p xmlns:a="http://schemas.openxmlformats.org/drawingml/2006/main">
+            <a:r>
+              <a:t>- 阅读规则见 [reading-list.md](../../course/reading-list.md)。</a:t>
+            </a:r>
+          </a:p>
+          <a:p xmlns:a="http://schemas.openxmlformats.org/drawingml/2006/main">
+            <a:r>
+              <a:t/>
             </a:r>
           </a:p>
           <a:p xmlns:a="http://schemas.openxmlformats.org/drawingml/2006/main">
@@ -1609,7 +4004,27 @@
           </a:p>
           <a:p xmlns:a="http://schemas.openxmlformats.org/drawingml/2006/main">
             <a:r>
-              <a:t>- 本页仅使用课程内部规则与教学材料。</a:t>
+              <a:t/>
+            </a:r>
+          </a:p>
+          <a:p xmlns:a="http://schemas.openxmlformats.org/drawingml/2006/main">
+            <a:r>
+              <a:t>- 本课 handout.md 与 slides.md</a:t>
+            </a:r>
+          </a:p>
+          <a:p xmlns:a="http://schemas.openxmlformats.org/drawingml/2006/main">
+            <a:r>
+              <a:t/>
+            </a:r>
+          </a:p>
+          <a:p xmlns:a="http://schemas.openxmlformats.org/drawingml/2006/main">
+            <a:r>
+              <a:t>- ../../course/reading-card-case.md</a:t>
+            </a:r>
+          </a:p>
+          <a:p xmlns:a="http://schemas.openxmlformats.org/drawingml/2006/main">
+            <a:r>
+              <a:t/>
             </a:r>
           </a:p>
           <a:p xmlns:a="http://schemas.openxmlformats.org/drawingml/2006/main">
@@ -1684,7 +4099,147 @@
           <a:lstStyle xmlns:a="http://schemas.openxmlformats.org/drawingml/2006/main"/>
           <a:p xmlns:a="http://schemas.openxmlformats.org/drawingml/2006/main">
             <a:r>
-              <a:t>页面标题：本课目标与课堂产出</a:t>
+              <a:t>页面：P03 本课目标与课堂产出</a:t>
+            </a:r>
+          </a:p>
+          <a:p xmlns:a="http://schemas.openxmlformats.org/drawingml/2006/main">
+            <a:r>
+              <a:t/>
+            </a:r>
+          </a:p>
+          <a:p xmlns:a="http://schemas.openxmlformats.org/drawingml/2006/main">
+            <a:r>
+              <a:t>讲义位置：本课讲义；见逐页母稿映射表</a:t>
+            </a:r>
+          </a:p>
+          <a:p xmlns:a="http://schemas.openxmlformats.org/drawingml/2006/main">
+            <a:r>
+              <a:t/>
+            </a:r>
+          </a:p>
+          <a:p xmlns:a="http://schemas.openxmlformats.org/drawingml/2006/main">
+            <a:r>
+              <a:t>屏显核对：</a:t>
+            </a:r>
+          </a:p>
+          <a:p xmlns:a="http://schemas.openxmlformats.org/drawingml/2006/main">
+            <a:r>
+              <a:t>完成本课后，你能：</a:t>
+            </a:r>
+          </a:p>
+          <a:p xmlns:a="http://schemas.openxmlformats.org/drawingml/2006/main">
+            <a:r>
+              <a:t/>
+            </a:r>
+          </a:p>
+          <a:p xmlns:a="http://schemas.openxmlformats.org/drawingml/2006/main">
+            <a:r>
+              <a:t>1. 把宽泛兴趣改写为范围清楚、可证伪、周期可完成的研究问题；</a:t>
+            </a:r>
+          </a:p>
+          <a:p xmlns:a="http://schemas.openxmlformats.org/drawingml/2006/main">
+            <a:r>
+              <a:t>2. 用非例界定问题边界；</a:t>
+            </a:r>
+          </a:p>
+          <a:p xmlns:a="http://schemas.openxmlformats.org/drawingml/2006/main">
+            <a:r>
+              <a:t>3. 写出至少一个可证伪命题；</a:t>
+            </a:r>
+          </a:p>
+          <a:p xmlns:a="http://schemas.openxmlformats.org/drawingml/2006/main">
+            <a:r>
+              <a:t>4. 从基本约束推导待验证前提，并说明适用边界；</a:t>
+            </a:r>
+          </a:p>
+          <a:p xmlns:a="http://schemas.openxmlformats.org/drawingml/2006/main">
+            <a:r>
+              <a:t>5. 用"So what?"和"Who cares?"检查重要性；</a:t>
+            </a:r>
+          </a:p>
+          <a:p xmlns:a="http://schemas.openxmlformats.org/drawingml/2006/main">
+            <a:r>
+              <a:t>6. 对照问题门条件完成提交前自查。</a:t>
+            </a:r>
+          </a:p>
+          <a:p xmlns:a="http://schemas.openxmlformats.org/drawingml/2006/main">
+            <a:r>
+              <a:t/>
+            </a:r>
+          </a:p>
+          <a:p xmlns:a="http://schemas.openxmlformats.org/drawingml/2006/main">
+            <a:r>
+              <a:t>课堂产出：问题门材料初版（problem-definition.md + 第一性原理推导）</a:t>
+            </a:r>
+          </a:p>
+          <a:p xmlns:a="http://schemas.openxmlformats.org/drawingml/2006/main">
+            <a:r>
+              <a:t/>
+            </a:r>
+          </a:p>
+          <a:p xmlns:a="http://schemas.openxmlformats.org/drawingml/2006/main">
+            <a:r>
+              <a:t>&gt; 课后提交问题门材料包，具体条件以 assignments.md 为准。</a:t>
+            </a:r>
+          </a:p>
+          <a:p xmlns:a="http://schemas.openxmlformats.org/drawingml/2006/main">
+            <a:r>
+              <a:t/>
+            </a:r>
+          </a:p>
+          <a:p xmlns:a="http://schemas.openxmlformats.org/drawingml/2006/main">
+            <a:r>
+              <a:t>教师讲述：</a:t>
+            </a:r>
+          </a:p>
+          <a:p xmlns:a="http://schemas.openxmlformats.org/drawingml/2006/main">
+            <a:r>
+              <a:t>明确边界：本课目标是完成问题门材料的初版，不要求课堂内全部自查通过。问题门条件以 [assignments.md](../../course/assignments.md) Checkpoint 1 为权威来源，本课自查清单与之一一对应。第 1-5 课的文献、精读卡和证据地图已是项目的一部分，本课只补充研究问题、非例、可证伪命题和第一性原理推导。</a:t>
+            </a:r>
+          </a:p>
+          <a:p xmlns:a="http://schemas.openxmlformats.org/drawingml/2006/main">
+            <a:r>
+              <a:t/>
+            </a:r>
+          </a:p>
+          <a:p xmlns:a="http://schemas.openxmlformats.org/drawingml/2006/main">
+            <a:r>
+              <a:t>学生动作：</a:t>
+            </a:r>
+          </a:p>
+          <a:p xmlns:a="http://schemas.openxmlformats.org/drawingml/2006/main">
+            <a:r>
+              <a:t>无。</a:t>
+            </a:r>
+          </a:p>
+          <a:p xmlns:a="http://schemas.openxmlformats.org/drawingml/2006/main">
+            <a:r>
+              <a:t/>
+            </a:r>
+          </a:p>
+          <a:p xmlns:a="http://schemas.openxmlformats.org/drawingml/2006/main">
+            <a:r>
+              <a:t>来源与边界：</a:t>
+            </a:r>
+          </a:p>
+          <a:p xmlns:a="http://schemas.openxmlformats.org/drawingml/2006/main">
+            <a:r>
+              <a:t>[备课规划.md](../备课规划.md) 第 6 课目标段；[assignments.md](../../course/assignments.md) Checkpoint 1 问题门条件。</a:t>
+            </a:r>
+          </a:p>
+          <a:p xmlns:a="http://schemas.openxmlformats.org/drawingml/2006/main">
+            <a:r>
+              <a:t/>
+            </a:r>
+          </a:p>
+          <a:p xmlns:a="http://schemas.openxmlformats.org/drawingml/2006/main">
+            <a:r>
+              <a:t>---</a:t>
+            </a:r>
+          </a:p>
+          <a:p xmlns:a="http://schemas.openxmlformats.org/drawingml/2006/main">
+            <a:r>
+              <a:t/>
             </a:r>
           </a:p>
           <a:p xmlns:a="http://schemas.openxmlformats.org/drawingml/2006/main">
@@ -1694,7 +4249,27 @@
           </a:p>
           <a:p xmlns:a="http://schemas.openxmlformats.org/drawingml/2006/main">
             <a:r>
-              <a:t>- 本页仅使用课程内部规则与教学材料。</a:t>
+              <a:t/>
+            </a:r>
+          </a:p>
+          <a:p xmlns:a="http://schemas.openxmlformats.org/drawingml/2006/main">
+            <a:r>
+              <a:t>- 本课 handout.md 与 slides.md</a:t>
+            </a:r>
+          </a:p>
+          <a:p xmlns:a="http://schemas.openxmlformats.org/drawingml/2006/main">
+            <a:r>
+              <a:t/>
+            </a:r>
+          </a:p>
+          <a:p xmlns:a="http://schemas.openxmlformats.org/drawingml/2006/main">
+            <a:r>
+              <a:t>- ../../course/reading-card-case.md</a:t>
+            </a:r>
+          </a:p>
+          <a:p xmlns:a="http://schemas.openxmlformats.org/drawingml/2006/main">
+            <a:r>
+              <a:t/>
             </a:r>
           </a:p>
           <a:p xmlns:a="http://schemas.openxmlformats.org/drawingml/2006/main">
@@ -1769,7 +4344,122 @@
           <a:lstStyle xmlns:a="http://schemas.openxmlformats.org/drawingml/2006/main"/>
           <a:p xmlns:a="http://schemas.openxmlformats.org/drawingml/2006/main">
             <a:r>
-              <a:t>页面标题：主题、研究问题还是待验证主张</a:t>
+              <a:t>页面：P04 主题、研究问题还是待验证主张</a:t>
+            </a:r>
+          </a:p>
+          <a:p xmlns:a="http://schemas.openxmlformats.org/drawingml/2006/main">
+            <a:r>
+              <a:t/>
+            </a:r>
+          </a:p>
+          <a:p xmlns:a="http://schemas.openxmlformats.org/drawingml/2006/main">
+            <a:r>
+              <a:t>讲义位置：本课讲义；见逐页母稿映射表</a:t>
+            </a:r>
+          </a:p>
+          <a:p xmlns:a="http://schemas.openxmlformats.org/drawingml/2006/main">
+            <a:r>
+              <a:t/>
+            </a:r>
+          </a:p>
+          <a:p xmlns:a="http://schemas.openxmlformats.org/drawingml/2006/main">
+            <a:r>
+              <a:t>屏显核对：</a:t>
+            </a:r>
+          </a:p>
+          <a:p xmlns:a="http://schemas.openxmlformats.org/drawingml/2006/main">
+            <a:r>
+              <a:t>| 层次 | 典型表述 | 还需回答 |</a:t>
+            </a:r>
+          </a:p>
+          <a:p xmlns:a="http://schemas.openxmlformats.org/drawingml/2006/main">
+            <a:r>
+              <a:t>| --- | --- | --- |</a:t>
+            </a:r>
+          </a:p>
+          <a:p xmlns:a="http://schemas.openxmlformats.org/drawingml/2006/main">
+            <a:r>
+              <a:t>| 主题 | AI 辅助论文阅读 | 对象、任务与比较 |</a:t>
+            </a:r>
+          </a:p>
+          <a:p xmlns:a="http://schemas.openxmlformats.org/drawingml/2006/main">
+            <a:r>
+              <a:t>| 问题 | 在限定材料中，阅读卡是否比自由摘要少遗漏条件？ | 可检验的候选答案 |</a:t>
+            </a:r>
+          </a:p>
+          <a:p xmlns:a="http://schemas.openxmlformats.org/drawingml/2006/main">
+            <a:r>
+              <a:t>| 待验证主张 | 阅读卡组的限定条件遗漏率更低。 | 同口径结果与适用边界 |</a:t>
+            </a:r>
+          </a:p>
+          <a:p xmlns:a="http://schemas.openxmlformats.org/drawingml/2006/main">
+            <a:r>
+              <a:t/>
+            </a:r>
+          </a:p>
+          <a:p xmlns:a="http://schemas.openxmlformats.org/drawingml/2006/main">
+            <a:r>
+              <a:t>结果命题可检验，机制解释另需区分观察。</a:t>
+            </a:r>
+          </a:p>
+          <a:p xmlns:a="http://schemas.openxmlformats.org/drawingml/2006/main">
+            <a:r>
+              <a:t/>
+            </a:r>
+          </a:p>
+          <a:p xmlns:a="http://schemas.openxmlformats.org/drawingml/2006/main">
+            <a:r>
+              <a:t>教师讲述：</a:t>
+            </a:r>
+          </a:p>
+          <a:p xmlns:a="http://schemas.openxmlformats.org/drawingml/2006/main">
+            <a:r>
+              <a:t>让学生先判断自己当前的问题表述属于哪一层。常见错误是停在主题层，缺少条件、对象和比较。研究问题需要指明在什么条件下、对什么对象、什么干预、什么结果、与什么比较。缺少任何一项，综述和实验都无法定位。</a:t>
+            </a:r>
+          </a:p>
+          <a:p xmlns:a="http://schemas.openxmlformats.org/drawingml/2006/main">
+            <a:r>
+              <a:t/>
+            </a:r>
+          </a:p>
+          <a:p xmlns:a="http://schemas.openxmlformats.org/drawingml/2006/main">
+            <a:r>
+              <a:t>学生动作：</a:t>
+            </a:r>
+          </a:p>
+          <a:p xmlns:a="http://schemas.openxmlformats.org/drawingml/2006/main">
+            <a:r>
+              <a:t>请学生举手：你当前的 problem-definition.md 里的问题表述属于哪一层？只统计，不点名。</a:t>
+            </a:r>
+          </a:p>
+          <a:p xmlns:a="http://schemas.openxmlformats.org/drawingml/2006/main">
+            <a:r>
+              <a:t/>
+            </a:r>
+          </a:p>
+          <a:p xmlns:a="http://schemas.openxmlformats.org/drawingml/2006/main">
+            <a:r>
+              <a:t>来源与边界：</a:t>
+            </a:r>
+          </a:p>
+          <a:p xmlns:a="http://schemas.openxmlformats.org/drawingml/2006/main">
+            <a:r>
+              <a:t>讲义 §一·1 主题、问题与主张；Booth et al. *The Craft of Research*, 5th ed., Chapter 1 "From Topics to Questions"（[reading-list.md](../../course/reading-list.md) 第 6 课）。</a:t>
+            </a:r>
+          </a:p>
+          <a:p xmlns:a="http://schemas.openxmlformats.org/drawingml/2006/main">
+            <a:r>
+              <a:t/>
+            </a:r>
+          </a:p>
+          <a:p xmlns:a="http://schemas.openxmlformats.org/drawingml/2006/main">
+            <a:r>
+              <a:t>---</a:t>
+            </a:r>
+          </a:p>
+          <a:p xmlns:a="http://schemas.openxmlformats.org/drawingml/2006/main">
+            <a:r>
+              <a:t/>
             </a:r>
           </a:p>
           <a:p xmlns:a="http://schemas.openxmlformats.org/drawingml/2006/main">
@@ -1779,7 +4469,27 @@
           </a:p>
           <a:p xmlns:a="http://schemas.openxmlformats.org/drawingml/2006/main">
             <a:r>
-              <a:t>- 本页仅使用课程内部规则与教学材料。</a:t>
+              <a:t/>
+            </a:r>
+          </a:p>
+          <a:p xmlns:a="http://schemas.openxmlformats.org/drawingml/2006/main">
+            <a:r>
+              <a:t>- 本课 handout.md 与 slides.md</a:t>
+            </a:r>
+          </a:p>
+          <a:p xmlns:a="http://schemas.openxmlformats.org/drawingml/2006/main">
+            <a:r>
+              <a:t/>
+            </a:r>
+          </a:p>
+          <a:p xmlns:a="http://schemas.openxmlformats.org/drawingml/2006/main">
+            <a:r>
+              <a:t>- ../../course/reading-card-case.md</a:t>
+            </a:r>
+          </a:p>
+          <a:p xmlns:a="http://schemas.openxmlformats.org/drawingml/2006/main">
+            <a:r>
+              <a:t/>
             </a:r>
           </a:p>
           <a:p xmlns:a="http://schemas.openxmlformats.org/drawingml/2006/main">
@@ -1854,7 +4564,167 @@
           <a:lstStyle xmlns:a="http://schemas.openxmlformats.org/drawingml/2006/main"/>
           <a:p xmlns:a="http://schemas.openxmlformats.org/drawingml/2006/main">
             <a:r>
-              <a:t>页面标题：从研究空白到结构性问题</a:t>
+              <a:t>页面：P05 从研究空白到结构性问题</a:t>
+            </a:r>
+          </a:p>
+          <a:p xmlns:a="http://schemas.openxmlformats.org/drawingml/2006/main">
+            <a:r>
+              <a:t/>
+            </a:r>
+          </a:p>
+          <a:p xmlns:a="http://schemas.openxmlformats.org/drawingml/2006/main">
+            <a:r>
+              <a:t>讲义位置：本课讲义；见逐页母稿映射表</a:t>
+            </a:r>
+          </a:p>
+          <a:p xmlns:a="http://schemas.openxmlformats.org/drawingml/2006/main">
+            <a:r>
+              <a:t/>
+            </a:r>
+          </a:p>
+          <a:p xmlns:a="http://schemas.openxmlformats.org/drawingml/2006/main">
+            <a:r>
+              <a:t>屏显核对：</a:t>
+            </a:r>
+          </a:p>
+          <a:p xmlns:a="http://schemas.openxmlformats.org/drawingml/2006/main">
+            <a:r>
+              <a:t>虚构教学样例｜非真实论文、检索或实证证据</a:t>
+            </a:r>
+          </a:p>
+          <a:p xmlns:a="http://schemas.openxmlformats.org/drawingml/2006/main">
+            <a:r>
+              <a:t/>
+            </a:r>
+          </a:p>
+          <a:p xmlns:a="http://schemas.openxmlformats.org/drawingml/2006/main">
+            <a:r>
+              <a:t>第 5 课空白候选 G1（缺角空白）：</a:t>
+            </a:r>
+          </a:p>
+          <a:p xmlns:a="http://schemas.openxmlformats.org/drawingml/2006/main">
+            <a:r>
+              <a:t>&gt; 阅读卡是否强制定位原文→降低遗漏</a:t>
+            </a:r>
+          </a:p>
+          <a:p xmlns:a="http://schemas.openxmlformats.org/drawingml/2006/main">
+            <a:r>
+              <a:t/>
+            </a:r>
+          </a:p>
+          <a:p xmlns:a="http://schemas.openxmlformats.org/drawingml/2006/main">
+            <a:r>
+              <a:t>本课改写为结构性问题：</a:t>
+            </a:r>
+          </a:p>
+          <a:p xmlns:a="http://schemas.openxmlformats.org/drawingml/2006/main">
+            <a:r>
+              <a:t>&gt; 在需要逐条核验引用的计算机论文阅读任务中，结构化阅读卡是否降低 AI 摘要的限定条件遗漏率？</a:t>
+            </a:r>
+          </a:p>
+          <a:p xmlns:a="http://schemas.openxmlformats.org/drawingml/2006/main">
+            <a:r>
+              <a:t/>
+            </a:r>
+          </a:p>
+          <a:p xmlns:a="http://schemas.openxmlformats.org/drawingml/2006/main">
+            <a:r>
+              <a:t>改写中明确了：</a:t>
+            </a:r>
+          </a:p>
+          <a:p xmlns:a="http://schemas.openxmlformats.org/drawingml/2006/main">
+            <a:r>
+              <a:t>- 条件：需要逐条核验引用的 CS 论文阅读任务</a:t>
+            </a:r>
+          </a:p>
+          <a:p xmlns:a="http://schemas.openxmlformats.org/drawingml/2006/main">
+            <a:r>
+              <a:t>- 对象：AI 生成摘要</a:t>
+            </a:r>
+          </a:p>
+          <a:p xmlns:a="http://schemas.openxmlformats.org/drawingml/2006/main">
+            <a:r>
+              <a:t>- 干预：结构化阅读卡</a:t>
+            </a:r>
+          </a:p>
+          <a:p xmlns:a="http://schemas.openxmlformats.org/drawingml/2006/main">
+            <a:r>
+              <a:t>- 结果：限定条件遗漏率</a:t>
+            </a:r>
+          </a:p>
+          <a:p xmlns:a="http://schemas.openxmlformats.org/drawingml/2006/main">
+            <a:r>
+              <a:t>- 比较对象：与自由摘要对照</a:t>
+            </a:r>
+          </a:p>
+          <a:p xmlns:a="http://schemas.openxmlformats.org/drawingml/2006/main">
+            <a:r>
+              <a:t/>
+            </a:r>
+          </a:p>
+          <a:p xmlns:a="http://schemas.openxmlformats.org/drawingml/2006/main">
+            <a:r>
+              <a:t>&gt; 从空格描述到可操作的结构，需要补全条件、对象、干预、结果和比较。</a:t>
+            </a:r>
+          </a:p>
+          <a:p xmlns:a="http://schemas.openxmlformats.org/drawingml/2006/main">
+            <a:r>
+              <a:t/>
+            </a:r>
+          </a:p>
+          <a:p xmlns:a="http://schemas.openxmlformats.org/drawingml/2006/main">
+            <a:r>
+              <a:t>教师讲述：</a:t>
+            </a:r>
+          </a:p>
+          <a:p xmlns:a="http://schemas.openxmlformats.org/drawingml/2006/main">
+            <a:r>
+              <a:t>以虚构教学样例 G1 展示从空白到问题的转换。改写的关键是补充条件、对象、干预、结果和比较对象。空白候选只是一个空格描述，问题是一个可操作的结构；样例真实性仍待真实窄检索，不作为实证结论。让学生用自己的空白候选尝试同样的改写。</a:t>
+            </a:r>
+          </a:p>
+          <a:p xmlns:a="http://schemas.openxmlformats.org/drawingml/2006/main">
+            <a:r>
+              <a:t/>
+            </a:r>
+          </a:p>
+          <a:p xmlns:a="http://schemas.openxmlformats.org/drawingml/2006/main">
+            <a:r>
+              <a:t>学生动作：</a:t>
+            </a:r>
+          </a:p>
+          <a:p xmlns:a="http://schemas.openxmlformats.org/drawingml/2006/main">
+            <a:r>
+              <a:t>让学生用自己的研究空白候选，口头尝试补充条件、对象、干预和结果。</a:t>
+            </a:r>
+          </a:p>
+          <a:p xmlns:a="http://schemas.openxmlformats.org/drawingml/2006/main">
+            <a:r>
+              <a:t/>
+            </a:r>
+          </a:p>
+          <a:p xmlns:a="http://schemas.openxmlformats.org/drawingml/2006/main">
+            <a:r>
+              <a:t>来源与边界：</a:t>
+            </a:r>
+          </a:p>
+          <a:p xmlns:a="http://schemas.openxmlformats.org/drawingml/2006/main">
+            <a:r>
+              <a:t>讲义 §一·2 从研究空白到问题的转换；贯穿案例承接第 5 课 G1。</a:t>
+            </a:r>
+          </a:p>
+          <a:p xmlns:a="http://schemas.openxmlformats.org/drawingml/2006/main">
+            <a:r>
+              <a:t/>
+            </a:r>
+          </a:p>
+          <a:p xmlns:a="http://schemas.openxmlformats.org/drawingml/2006/main">
+            <a:r>
+              <a:t>---</a:t>
+            </a:r>
+          </a:p>
+          <a:p xmlns:a="http://schemas.openxmlformats.org/drawingml/2006/main">
+            <a:r>
+              <a:t/>
             </a:r>
           </a:p>
           <a:p xmlns:a="http://schemas.openxmlformats.org/drawingml/2006/main">
@@ -1864,7 +4734,27 @@
           </a:p>
           <a:p xmlns:a="http://schemas.openxmlformats.org/drawingml/2006/main">
             <a:r>
-              <a:t>- 本页仅使用课程内部规则与教学材料。</a:t>
+              <a:t/>
+            </a:r>
+          </a:p>
+          <a:p xmlns:a="http://schemas.openxmlformats.org/drawingml/2006/main">
+            <a:r>
+              <a:t>- 本课 handout.md 与 slides.md</a:t>
+            </a:r>
+          </a:p>
+          <a:p xmlns:a="http://schemas.openxmlformats.org/drawingml/2006/main">
+            <a:r>
+              <a:t/>
+            </a:r>
+          </a:p>
+          <a:p xmlns:a="http://schemas.openxmlformats.org/drawingml/2006/main">
+            <a:r>
+              <a:t>- ../../course/reading-card-case.md</a:t>
+            </a:r>
+          </a:p>
+          <a:p xmlns:a="http://schemas.openxmlformats.org/drawingml/2006/main">
+            <a:r>
+              <a:t/>
             </a:r>
           </a:p>
           <a:p xmlns:a="http://schemas.openxmlformats.org/drawingml/2006/main">
@@ -1939,7 +4829,152 @@
           <a:lstStyle xmlns:a="http://schemas.openxmlformats.org/drawingml/2006/main"/>
           <a:p xmlns:a="http://schemas.openxmlformats.org/drawingml/2006/main">
             <a:r>
-              <a:t>页面标题：用 So what? / Who cares? 检查重要性</a:t>
+              <a:t>页面：P06 用 So what? / Who cares? 检查重要性</a:t>
+            </a:r>
+          </a:p>
+          <a:p xmlns:a="http://schemas.openxmlformats.org/drawingml/2006/main">
+            <a:r>
+              <a:t/>
+            </a:r>
+          </a:p>
+          <a:p xmlns:a="http://schemas.openxmlformats.org/drawingml/2006/main">
+            <a:r>
+              <a:t>讲义位置：本课讲义；见逐页母稿映射表</a:t>
+            </a:r>
+          </a:p>
+          <a:p xmlns:a="http://schemas.openxmlformats.org/drawingml/2006/main">
+            <a:r>
+              <a:t/>
+            </a:r>
+          </a:p>
+          <a:p xmlns:a="http://schemas.openxmlformats.org/drawingml/2006/main">
+            <a:r>
+              <a:t>屏显核对：</a:t>
+            </a:r>
+          </a:p>
+          <a:p xmlns:a="http://schemas.openxmlformats.org/drawingml/2006/main">
+            <a:r>
+              <a:t>问题不止要清楚，还要重要。</a:t>
+            </a:r>
+          </a:p>
+          <a:p xmlns:a="http://schemas.openxmlformats.org/drawingml/2006/main">
+            <a:r>
+              <a:t/>
+            </a:r>
+          </a:p>
+          <a:p xmlns:a="http://schemas.openxmlformats.org/drawingml/2006/main">
+            <a:r>
+              <a:t>**So what?（知识后果）**</a:t>
+            </a:r>
+          </a:p>
+          <a:p xmlns:a="http://schemas.openxmlformats.org/drawingml/2006/main">
+            <a:r>
+              <a:t>如果不回答这个问题，当前证据地图的哪条主张无法成立？哪个机制假设无法被检验？</a:t>
+            </a:r>
+          </a:p>
+          <a:p xmlns:a="http://schemas.openxmlformats.org/drawingml/2006/main">
+            <a:r>
+              <a:t/>
+            </a:r>
+          </a:p>
+          <a:p xmlns:a="http://schemas.openxmlformats.org/drawingml/2006/main">
+            <a:r>
+              <a:t>**Who cares?（实际后果）**</a:t>
+            </a:r>
+          </a:p>
+          <a:p xmlns:a="http://schemas.openxmlformats.org/drawingml/2006/main">
+            <a:r>
+              <a:t>谁会从答案中受益？是研究者、实践者还是决策者？受益的形式是什么？</a:t>
+            </a:r>
+          </a:p>
+          <a:p xmlns:a="http://schemas.openxmlformats.org/drawingml/2006/main">
+            <a:r>
+              <a:t/>
+            </a:r>
+          </a:p>
+          <a:p xmlns:a="http://schemas.openxmlformats.org/drawingml/2006/main">
+            <a:r>
+              <a:t>贯穿案例：</a:t>
+            </a:r>
+          </a:p>
+          <a:p xmlns:a="http://schemas.openxmlformats.org/drawingml/2006/main">
+            <a:r>
+              <a:t>- So what?：缺角空白 G1 位于"阅读卡强制定位→降低遗漏"论证链的关键位置，不回答则机制假设无法直接检验</a:t>
+            </a:r>
+          </a:p>
+          <a:p xmlns:a="http://schemas.openxmlformats.org/drawingml/2006/main">
+            <a:r>
+              <a:t>- Who cares?：需要用 AI 辅助文献综述的研究者可判断是否引入阅读卡结构</a:t>
+            </a:r>
+          </a:p>
+          <a:p xmlns:a="http://schemas.openxmlformats.org/drawingml/2006/main">
+            <a:r>
+              <a:t/>
+            </a:r>
+          </a:p>
+          <a:p xmlns:a="http://schemas.openxmlformats.org/drawingml/2006/main">
+            <a:r>
+              <a:t>&gt; 重要性来自问题在论证链上的位置。</a:t>
+            </a:r>
+          </a:p>
+          <a:p xmlns:a="http://schemas.openxmlformats.org/drawingml/2006/main">
+            <a:r>
+              <a:t/>
+            </a:r>
+          </a:p>
+          <a:p xmlns:a="http://schemas.openxmlformats.org/drawingml/2006/main">
+            <a:r>
+              <a:t>教师讲述：</a:t>
+            </a:r>
+          </a:p>
+          <a:p xmlns:a="http://schemas.openxmlformats.org/drawingml/2006/main">
+            <a:r>
+              <a:t>第 5 课三步检验已经做过一次重要性检查，这里从空白候选升级为问题后需要再确认一次。重要性看问题在论证链上的位置——如果不回答它，哪些后续判断无法成立？</a:t>
+            </a:r>
+          </a:p>
+          <a:p xmlns:a="http://schemas.openxmlformats.org/drawingml/2006/main">
+            <a:r>
+              <a:t/>
+            </a:r>
+          </a:p>
+          <a:p xmlns:a="http://schemas.openxmlformats.org/drawingml/2006/main">
+            <a:r>
+              <a:t>学生动作：</a:t>
+            </a:r>
+          </a:p>
+          <a:p xmlns:a="http://schemas.openxmlformats.org/drawingml/2006/main">
+            <a:r>
+              <a:t>让学生对自己的问题口头回答"So what?"：如果不回答它，哪条论证链断掉？</a:t>
+            </a:r>
+          </a:p>
+          <a:p xmlns:a="http://schemas.openxmlformats.org/drawingml/2006/main">
+            <a:r>
+              <a:t/>
+            </a:r>
+          </a:p>
+          <a:p xmlns:a="http://schemas.openxmlformats.org/drawingml/2006/main">
+            <a:r>
+              <a:t>来源与边界：</a:t>
+            </a:r>
+          </a:p>
+          <a:p xmlns:a="http://schemas.openxmlformats.org/drawingml/2006/main">
+            <a:r>
+              <a:t>讲义 §一·3 "So what?" 和 "Who cares?"；Booth et al. *The Craft of Research*, 5th ed., Chapter 2 "From Questions to a Problem"；Hamming, "You and Your Research"（[reading-list.md](../../course/reading-list.md) 第 6 课）。</a:t>
+            </a:r>
+          </a:p>
+          <a:p xmlns:a="http://schemas.openxmlformats.org/drawingml/2006/main">
+            <a:r>
+              <a:t/>
+            </a:r>
+          </a:p>
+          <a:p xmlns:a="http://schemas.openxmlformats.org/drawingml/2006/main">
+            <a:r>
+              <a:t>---</a:t>
+            </a:r>
+          </a:p>
+          <a:p xmlns:a="http://schemas.openxmlformats.org/drawingml/2006/main">
+            <a:r>
+              <a:t/>
             </a:r>
           </a:p>
           <a:p xmlns:a="http://schemas.openxmlformats.org/drawingml/2006/main">
@@ -1949,7 +4984,27 @@
           </a:p>
           <a:p xmlns:a="http://schemas.openxmlformats.org/drawingml/2006/main">
             <a:r>
-              <a:t>- 本页仅使用课程内部规则与教学材料。</a:t>
+              <a:t/>
+            </a:r>
+          </a:p>
+          <a:p xmlns:a="http://schemas.openxmlformats.org/drawingml/2006/main">
+            <a:r>
+              <a:t>- 本课 handout.md 与 slides.md</a:t>
+            </a:r>
+          </a:p>
+          <a:p xmlns:a="http://schemas.openxmlformats.org/drawingml/2006/main">
+            <a:r>
+              <a:t/>
+            </a:r>
+          </a:p>
+          <a:p xmlns:a="http://schemas.openxmlformats.org/drawingml/2006/main">
+            <a:r>
+              <a:t>- ../../course/reading-card-case.md</a:t>
+            </a:r>
+          </a:p>
+          <a:p xmlns:a="http://schemas.openxmlformats.org/drawingml/2006/main">
+            <a:r>
+              <a:t/>
             </a:r>
           </a:p>
           <a:p xmlns:a="http://schemas.openxmlformats.org/drawingml/2006/main">
@@ -2024,7 +5079,177 @@
           <a:lstStyle xmlns:a="http://schemas.openxmlformats.org/drawingml/2006/main"/>
           <a:p xmlns:a="http://schemas.openxmlformats.org/drawingml/2006/main">
             <a:r>
-              <a:t>页面标题：问题来源交叉检查与四维选题标准卡</a:t>
+              <a:t>页面：P07 问题来源交叉检查与四维选题标准卡</a:t>
+            </a:r>
+          </a:p>
+          <a:p xmlns:a="http://schemas.openxmlformats.org/drawingml/2006/main">
+            <a:r>
+              <a:t/>
+            </a:r>
+          </a:p>
+          <a:p xmlns:a="http://schemas.openxmlformats.org/drawingml/2006/main">
+            <a:r>
+              <a:t>讲义位置：本课讲义；见逐页母稿映射表</a:t>
+            </a:r>
+          </a:p>
+          <a:p xmlns:a="http://schemas.openxmlformats.org/drawingml/2006/main">
+            <a:r>
+              <a:t/>
+            </a:r>
+          </a:p>
+          <a:p xmlns:a="http://schemas.openxmlformats.org/drawingml/2006/main">
+            <a:r>
+              <a:t>屏显核对：</a:t>
+            </a:r>
+          </a:p>
+          <a:p xmlns:a="http://schemas.openxmlformats.org/drawingml/2006/main">
+            <a:r>
+              <a:t>先问来源：你的候选题从哪条生成路径来？（第 5 课六条路径）</a:t>
+            </a:r>
+          </a:p>
+          <a:p xmlns:a="http://schemas.openxmlformats.org/drawingml/2006/main">
+            <a:r>
+              <a:t/>
+            </a:r>
+          </a:p>
+          <a:p xmlns:a="http://schemas.openxmlformats.org/drawingml/2006/main">
+            <a:r>
+              <a:t>若只来自文献空白，必须回答：</a:t>
+            </a:r>
+          </a:p>
+          <a:p xmlns:a="http://schemas.openxmlformats.org/drawingml/2006/main">
+            <a:r>
+              <a:t>&gt; 如果文献里没有这个空白，这个问题还值得回答吗？</a:t>
+            </a:r>
+          </a:p>
+          <a:p xmlns:a="http://schemas.openxmlformats.org/drawingml/2006/main">
+            <a:r>
+              <a:t/>
+            </a:r>
+          </a:p>
+          <a:p xmlns:a="http://schemas.openxmlformats.org/drawingml/2006/main">
+            <a:r>
+              <a:t>- 答得出 → 背后有更基本的观察或约束，空白只是入口</a:t>
+            </a:r>
+          </a:p>
+          <a:p xmlns:a="http://schemas.openxmlformats.org/drawingml/2006/main">
+            <a:r>
+              <a:t>- 答不出 → 可能只是填格子：重推问题，或明示重要性只在论证链内</a:t>
+            </a:r>
+          </a:p>
+          <a:p xmlns:a="http://schemas.openxmlformats.org/drawingml/2006/main">
+            <a:r>
+              <a:t/>
+            </a:r>
+          </a:p>
+          <a:p xmlns:a="http://schemas.openxmlformats.org/drawingml/2006/main">
+            <a:r>
+              <a:t>四维选题标准卡（候选题池 ≥3 个逐一比较）：</a:t>
+            </a:r>
+          </a:p>
+          <a:p xmlns:a="http://schemas.openxmlformats.org/drawingml/2006/main">
+            <a:r>
+              <a:t/>
+            </a:r>
+          </a:p>
+          <a:p xmlns:a="http://schemas.openxmlformats.org/drawingml/2006/main">
+            <a:r>
+              <a:t>| 维度 | 检查问题 |</a:t>
+            </a:r>
+          </a:p>
+          <a:p xmlns:a="http://schemas.openxmlformats.org/drawingml/2006/main">
+            <a:r>
+              <a:t>| --- | --- |</a:t>
+            </a:r>
+          </a:p>
+          <a:p xmlns:a="http://schemas.openxmlformats.org/drawingml/2006/main">
+            <a:r>
+              <a:t>| 意义 | 不回答它，哪条论证链断掉？谁受益？ |</a:t>
+            </a:r>
+          </a:p>
+          <a:p xmlns:a="http://schemas.openxmlformats.org/drawingml/2006/main">
+            <a:r>
+              <a:t>| 新颖性 | 问题新 / 视角新 / 方法新，新在哪一类？ |</a:t>
+            </a:r>
+          </a:p>
+          <a:p xmlns:a="http://schemas.openxmlformats.org/drawingml/2006/main">
+            <a:r>
+              <a:t>| 可行性 | 课程周期内能否最小验证？ |</a:t>
+            </a:r>
+          </a:p>
+          <a:p xmlns:a="http://schemas.openxmlformats.org/drawingml/2006/main">
+            <a:r>
+              <a:t>| 兴趣 | 课程之外还愿意投入吗？判据是什么？ |</a:t>
+            </a:r>
+          </a:p>
+          <a:p xmlns:a="http://schemas.openxmlformats.org/drawingml/2006/main">
+            <a:r>
+              <a:t/>
+            </a:r>
+          </a:p>
+          <a:p xmlns:a="http://schemas.openxmlformats.org/drawingml/2006/main">
+            <a:r>
+              <a:t>&gt; “新”不等于“没人做过”；意义优先于新颖性。</a:t>
+            </a:r>
+          </a:p>
+          <a:p xmlns:a="http://schemas.openxmlformats.org/drawingml/2006/main">
+            <a:r>
+              <a:t/>
+            </a:r>
+          </a:p>
+          <a:p xmlns:a="http://schemas.openxmlformats.org/drawingml/2006/main">
+            <a:r>
+              <a:t>教师讲述：</a:t>
+            </a:r>
+          </a:p>
+          <a:p xmlns:a="http://schemas.openxmlformats.org/drawingml/2006/main">
+            <a:r>
+              <a:t>这是防止"关键词 → 论文 → 空白"单线选题的收束页：候选题池里的候选先交叉检查来源，纯文献空白来源的候选要回答"没有这个空白还值得回答吗"。然后用四维标准卡比较 ≥3 个候选题，以意义和可行性完成取舍；新颖性只在有依据时记录类别和待核验状态，不作为淘汰硬门。比较示范用贯穿案例的虚构题池（G1 + C2 + C3，见讲义 §七第一步）。</a:t>
+            </a:r>
+          </a:p>
+          <a:p xmlns:a="http://schemas.openxmlformats.org/drawingml/2006/main">
+            <a:r>
+              <a:t/>
+            </a:r>
+          </a:p>
+          <a:p xmlns:a="http://schemas.openxmlformats.org/drawingml/2006/main">
+            <a:r>
+              <a:t>学生动作：</a:t>
+            </a:r>
+          </a:p>
+          <a:p xmlns:a="http://schemas.openxmlformats.org/drawingml/2006/main">
+            <a:r>
+              <a:t>让学生对自己的候选题回答来源交叉检查问句；答不出的记下"待重推或明示重要性边界"。</a:t>
+            </a:r>
+          </a:p>
+          <a:p xmlns:a="http://schemas.openxmlformats.org/drawingml/2006/main">
+            <a:r>
+              <a:t/>
+            </a:r>
+          </a:p>
+          <a:p xmlns:a="http://schemas.openxmlformats.org/drawingml/2006/main">
+            <a:r>
+              <a:t>来源与边界：</a:t>
+            </a:r>
+          </a:p>
+          <a:p xmlns:a="http://schemas.openxmlformats.org/drawingml/2006/main">
+            <a:r>
+              <a:t>讲义 §一·4；Booth et al. *The Craft of Research*（意义维度）；Hamming, "You and Your Research"（重要问题与品味）；霍强《创新研究到底怎么做？》Passion/Excellence/Impact（兴趣与意义参照，课堂案例）；第 5 课 §四·1 生成路径。</a:t>
+            </a:r>
+          </a:p>
+          <a:p xmlns:a="http://schemas.openxmlformats.org/drawingml/2006/main">
+            <a:r>
+              <a:t/>
+            </a:r>
+          </a:p>
+          <a:p xmlns:a="http://schemas.openxmlformats.org/drawingml/2006/main">
+            <a:r>
+              <a:t>---</a:t>
+            </a:r>
+          </a:p>
+          <a:p xmlns:a="http://schemas.openxmlformats.org/drawingml/2006/main">
+            <a:r>
+              <a:t/>
             </a:r>
           </a:p>
           <a:p xmlns:a="http://schemas.openxmlformats.org/drawingml/2006/main">
@@ -2034,7 +5259,27 @@
           </a:p>
           <a:p xmlns:a="http://schemas.openxmlformats.org/drawingml/2006/main">
             <a:r>
-              <a:t>- 本页仅使用课程内部规则与教学材料。</a:t>
+              <a:t/>
+            </a:r>
+          </a:p>
+          <a:p xmlns:a="http://schemas.openxmlformats.org/drawingml/2006/main">
+            <a:r>
+              <a:t>- 本课 handout.md 与 slides.md</a:t>
+            </a:r>
+          </a:p>
+          <a:p xmlns:a="http://schemas.openxmlformats.org/drawingml/2006/main">
+            <a:r>
+              <a:t/>
+            </a:r>
+          </a:p>
+          <a:p xmlns:a="http://schemas.openxmlformats.org/drawingml/2006/main">
+            <a:r>
+              <a:t>- ../../course/reading-card-case.md</a:t>
+            </a:r>
+          </a:p>
+          <a:p xmlns:a="http://schemas.openxmlformats.org/drawingml/2006/main">
+            <a:r>
+              <a:t/>
             </a:r>
           </a:p>
           <a:p xmlns:a="http://schemas.openxmlformats.org/drawingml/2006/main">
@@ -2109,7 +5354,162 @@
           <a:lstStyle xmlns:a="http://schemas.openxmlformats.org/drawingml/2006/main"/>
           <a:p xmlns:a="http://schemas.openxmlformats.org/drawingml/2006/main">
             <a:r>
-              <a:t>页面标题：用非例界定问题边界</a:t>
+              <a:t>页面：P08 用非例界定问题边界</a:t>
+            </a:r>
+          </a:p>
+          <a:p xmlns:a="http://schemas.openxmlformats.org/drawingml/2006/main">
+            <a:r>
+              <a:t/>
+            </a:r>
+          </a:p>
+          <a:p xmlns:a="http://schemas.openxmlformats.org/drawingml/2006/main">
+            <a:r>
+              <a:t>讲义位置：本课讲义；见逐页母稿映射表</a:t>
+            </a:r>
+          </a:p>
+          <a:p xmlns:a="http://schemas.openxmlformats.org/drawingml/2006/main">
+            <a:r>
+              <a:t/>
+            </a:r>
+          </a:p>
+          <a:p xmlns:a="http://schemas.openxmlformats.org/drawingml/2006/main">
+            <a:r>
+              <a:t>屏显核对：</a:t>
+            </a:r>
+          </a:p>
+          <a:p xmlns:a="http://schemas.openxmlformats.org/drawingml/2006/main">
+            <a:r>
+              <a:t>非例说明"什么不算本问题"。</a:t>
+            </a:r>
+          </a:p>
+          <a:p xmlns:a="http://schemas.openxmlformats.org/drawingml/2006/main">
+            <a:r>
+              <a:t/>
+            </a:r>
+          </a:p>
+          <a:p xmlns:a="http://schemas.openxmlformats.org/drawingml/2006/main">
+            <a:r>
+              <a:t>它和包含范围一起构成正负边界。</a:t>
+            </a:r>
+          </a:p>
+          <a:p xmlns:a="http://schemas.openxmlformats.org/drawingml/2006/main">
+            <a:r>
+              <a:t/>
+            </a:r>
+          </a:p>
+          <a:p xmlns:a="http://schemas.openxmlformats.org/drawingml/2006/main">
+            <a:r>
+              <a:t>**非例的三种类型**：</a:t>
+            </a:r>
+          </a:p>
+          <a:p xmlns:a="http://schemas.openxmlformats.org/drawingml/2006/main">
+            <a:r>
+              <a:t>- 不可比的例子（不同任务设置）</a:t>
+            </a:r>
+          </a:p>
+          <a:p xmlns:a="http://schemas.openxmlformats.org/drawingml/2006/main">
+            <a:r>
+              <a:t>- 不同层面的例子（通用写作质量 vs. 限定条件准确性）</a:t>
+            </a:r>
+          </a:p>
+          <a:p xmlns:a="http://schemas.openxmlformats.org/drawingml/2006/main">
+            <a:r>
+              <a:t>- 超出周期的例子（需要专业实验设备）</a:t>
+            </a:r>
+          </a:p>
+          <a:p xmlns:a="http://schemas.openxmlformats.org/drawingml/2006/main">
+            <a:r>
+              <a:t/>
+            </a:r>
+          </a:p>
+          <a:p xmlns:a="http://schemas.openxmlformats.org/drawingml/2006/main">
+            <a:r>
+              <a:t>贯穿案例非例：</a:t>
+            </a:r>
+          </a:p>
+          <a:p xmlns:a="http://schemas.openxmlformats.org/drawingml/2006/main">
+            <a:r>
+              <a:t>&gt; - 不比较不同大模型的通用写作质量（不同层面）</a:t>
+            </a:r>
+          </a:p>
+          <a:p xmlns:a="http://schemas.openxmlformats.org/drawingml/2006/main">
+            <a:r>
+              <a:t>&gt; - 不评价综述是否具有语言美感（不同指标）</a:t>
+            </a:r>
+          </a:p>
+          <a:p xmlns:a="http://schemas.openxmlformats.org/drawingml/2006/main">
+            <a:r>
+              <a:t>&gt; - 不处理需要专业实验设备的学科（超出周期与范围）</a:t>
+            </a:r>
+          </a:p>
+          <a:p xmlns:a="http://schemas.openxmlformats.org/drawingml/2006/main">
+            <a:r>
+              <a:t/>
+            </a:r>
+          </a:p>
+          <a:p xmlns:a="http://schemas.openxmlformats.org/drawingml/2006/main">
+            <a:r>
+              <a:t>&gt; 如果无法写出非例，通常说明问题仍然过宽。</a:t>
+            </a:r>
+          </a:p>
+          <a:p xmlns:a="http://schemas.openxmlformats.org/drawingml/2006/main">
+            <a:r>
+              <a:t/>
+            </a:r>
+          </a:p>
+          <a:p xmlns:a="http://schemas.openxmlformats.org/drawingml/2006/main">
+            <a:r>
+              <a:t>教师讲述：</a:t>
+            </a:r>
+          </a:p>
+          <a:p xmlns:a="http://schemas.openxmlformats.org/drawingml/2006/main">
+            <a:r>
+              <a:t>非例的价值在于防止项目随检索膨胀。当你在搜索中看到一篇"似乎相关"的论文时，非例帮你判断它到底在不在范围内。第 1 课已经给出基本概念，本课把它系统化为三种类型。非例不只是"不做 X"，还要说明为什么不算。</a:t>
+            </a:r>
+          </a:p>
+          <a:p xmlns:a="http://schemas.openxmlformats.org/drawingml/2006/main">
+            <a:r>
+              <a:t/>
+            </a:r>
+          </a:p>
+          <a:p xmlns:a="http://schemas.openxmlformats.org/drawingml/2006/main">
+            <a:r>
+              <a:t>学生动作：</a:t>
+            </a:r>
+          </a:p>
+          <a:p xmlns:a="http://schemas.openxmlformats.org/drawingml/2006/main">
+            <a:r>
+              <a:t>让学生为自己的问题写一个非例，并说明为什么不算。</a:t>
+            </a:r>
+          </a:p>
+          <a:p xmlns:a="http://schemas.openxmlformats.org/drawingml/2006/main">
+            <a:r>
+              <a:t/>
+            </a:r>
+          </a:p>
+          <a:p xmlns:a="http://schemas.openxmlformats.org/drawingml/2006/main">
+            <a:r>
+              <a:t>来源与边界：</a:t>
+            </a:r>
+          </a:p>
+          <a:p xmlns:a="http://schemas.openxmlformats.org/drawingml/2006/main">
+            <a:r>
+              <a:t>讲义 §二·1 什么是非例；§二·2 非例的写法。</a:t>
+            </a:r>
+          </a:p>
+          <a:p xmlns:a="http://schemas.openxmlformats.org/drawingml/2006/main">
+            <a:r>
+              <a:t/>
+            </a:r>
+          </a:p>
+          <a:p xmlns:a="http://schemas.openxmlformats.org/drawingml/2006/main">
+            <a:r>
+              <a:t>---</a:t>
+            </a:r>
+          </a:p>
+          <a:p xmlns:a="http://schemas.openxmlformats.org/drawingml/2006/main">
+            <a:r>
+              <a:t/>
             </a:r>
           </a:p>
           <a:p xmlns:a="http://schemas.openxmlformats.org/drawingml/2006/main">
@@ -2119,7 +5519,27 @@
           </a:p>
           <a:p xmlns:a="http://schemas.openxmlformats.org/drawingml/2006/main">
             <a:r>
-              <a:t>- 本页仅使用课程内部规则与教学材料。</a:t>
+              <a:t/>
+            </a:r>
+          </a:p>
+          <a:p xmlns:a="http://schemas.openxmlformats.org/drawingml/2006/main">
+            <a:r>
+              <a:t>- 本课 handout.md 与 slides.md</a:t>
+            </a:r>
+          </a:p>
+          <a:p xmlns:a="http://schemas.openxmlformats.org/drawingml/2006/main">
+            <a:r>
+              <a:t/>
+            </a:r>
+          </a:p>
+          <a:p xmlns:a="http://schemas.openxmlformats.org/drawingml/2006/main">
+            <a:r>
+              <a:t>- ../../course/reading-card-case.md</a:t>
+            </a:r>
+          </a:p>
+          <a:p xmlns:a="http://schemas.openxmlformats.org/drawingml/2006/main">
+            <a:r>
+              <a:t/>
             </a:r>
           </a:p>
           <a:p xmlns:a="http://schemas.openxmlformats.org/drawingml/2006/main">
@@ -2194,7 +5614,127 @@
           <a:lstStyle xmlns:a="http://schemas.openxmlformats.org/drawingml/2006/main"/>
           <a:p xmlns:a="http://schemas.openxmlformats.org/drawingml/2006/main">
             <a:r>
-              <a:t>页面标题：非例的三种常见错误</a:t>
+              <a:t>页面：P09 非例的三种常见错误</a:t>
+            </a:r>
+          </a:p>
+          <a:p xmlns:a="http://schemas.openxmlformats.org/drawingml/2006/main">
+            <a:r>
+              <a:t/>
+            </a:r>
+          </a:p>
+          <a:p xmlns:a="http://schemas.openxmlformats.org/drawingml/2006/main">
+            <a:r>
+              <a:t>讲义位置：本课讲义；见逐页母稿映射表</a:t>
+            </a:r>
+          </a:p>
+          <a:p xmlns:a="http://schemas.openxmlformats.org/drawingml/2006/main">
+            <a:r>
+              <a:t/>
+            </a:r>
+          </a:p>
+          <a:p xmlns:a="http://schemas.openxmlformats.org/drawingml/2006/main">
+            <a:r>
+              <a:t>屏显核对：</a:t>
+            </a:r>
+          </a:p>
+          <a:p xmlns:a="http://schemas.openxmlformats.org/drawingml/2006/main">
+            <a:r>
+              <a:t>| 错误类型 | 表现 | 后果 |</a:t>
+            </a:r>
+          </a:p>
+          <a:p xmlns:a="http://schemas.openxmlformats.org/drawingml/2006/main">
+            <a:r>
+              <a:t>| --- | --- | --- |</a:t>
+            </a:r>
+          </a:p>
+          <a:p xmlns:a="http://schemas.openxmlformats.org/drawingml/2006/main">
+            <a:r>
+              <a:t>| 非例过宽 | "不做与本课题无关的研究" | 没有实质约束 |</a:t>
+            </a:r>
+          </a:p>
+          <a:p xmlns:a="http://schemas.openxmlformats.org/drawingml/2006/main">
+            <a:r>
+              <a:t>| 非例过窄 | "不使用数据集 X" | 等同排除某个数据集 |</a:t>
+            </a:r>
+          </a:p>
+          <a:p xmlns:a="http://schemas.openxmlformats.org/drawingml/2006/main">
+            <a:r>
+              <a:t>| 非例与可证伪命题矛盾 | 非例排除了检验条件 | 命题无法成立 |</a:t>
+            </a:r>
+          </a:p>
+          <a:p xmlns:a="http://schemas.openxmlformats.org/drawingml/2006/main">
+            <a:r>
+              <a:t>| 非例只是否定清单 | "不评价文风、不比较模型" | 否定了但没说清为什么 |</a:t>
+            </a:r>
+          </a:p>
+          <a:p xmlns:a="http://schemas.openxmlformats.org/drawingml/2006/main">
+            <a:r>
+              <a:t/>
+            </a:r>
+          </a:p>
+          <a:p xmlns:a="http://schemas.openxmlformats.org/drawingml/2006/main">
+            <a:r>
+              <a:t>&gt; 胡晓峰：把背景、意义或"怎么做"误写成科学问题——非例的作用之一就是挡住这些。</a:t>
+            </a:r>
+          </a:p>
+          <a:p xmlns:a="http://schemas.openxmlformats.org/drawingml/2006/main">
+            <a:r>
+              <a:t/>
+            </a:r>
+          </a:p>
+          <a:p xmlns:a="http://schemas.openxmlformats.org/drawingml/2006/main">
+            <a:r>
+              <a:t>教师讲述：</a:t>
+            </a:r>
+          </a:p>
+          <a:p xmlns:a="http://schemas.openxmlformats.org/drawingml/2006/main">
+            <a:r>
+              <a:t>胡晓峰在《浅谈科研课题中的"科学问题"》中指出一种常见错误：把背景、意义或"怎么做"误写成科学问题。非例的作用之一就是把这些"看起来是问题但实际不是"的表述挡在问题定义之外。非例过宽等于没有约束，过窄等于排除数据集而非界定边界。</a:t>
+            </a:r>
+          </a:p>
+          <a:p xmlns:a="http://schemas.openxmlformats.org/drawingml/2006/main">
+            <a:r>
+              <a:t/>
+            </a:r>
+          </a:p>
+          <a:p xmlns:a="http://schemas.openxmlformats.org/drawingml/2006/main">
+            <a:r>
+              <a:t>学生动作：</a:t>
+            </a:r>
+          </a:p>
+          <a:p xmlns:a="http://schemas.openxmlformats.org/drawingml/2006/main">
+            <a:r>
+              <a:t>让学生检查自己的非例属于哪种类型，或是否避免了这四种错误。</a:t>
+            </a:r>
+          </a:p>
+          <a:p xmlns:a="http://schemas.openxmlformats.org/drawingml/2006/main">
+            <a:r>
+              <a:t/>
+            </a:r>
+          </a:p>
+          <a:p xmlns:a="http://schemas.openxmlformats.org/drawingml/2006/main">
+            <a:r>
+              <a:t>来源与边界：</a:t>
+            </a:r>
+          </a:p>
+          <a:p xmlns:a="http://schemas.openxmlformats.org/drawingml/2006/main">
+            <a:r>
+              <a:t>讲义 §二·3 非例的常见错误；胡晓峰《浅谈科研课题中的"科学问题"》（[reading-list.md](../../course/reading-list.md) 第 6 课课堂案例）。</a:t>
+            </a:r>
+          </a:p>
+          <a:p xmlns:a="http://schemas.openxmlformats.org/drawingml/2006/main">
+            <a:r>
+              <a:t/>
+            </a:r>
+          </a:p>
+          <a:p xmlns:a="http://schemas.openxmlformats.org/drawingml/2006/main">
+            <a:r>
+              <a:t>---</a:t>
+            </a:r>
+          </a:p>
+          <a:p xmlns:a="http://schemas.openxmlformats.org/drawingml/2006/main">
+            <a:r>
+              <a:t/>
             </a:r>
           </a:p>
           <a:p xmlns:a="http://schemas.openxmlformats.org/drawingml/2006/main">
@@ -2204,7 +5744,27 @@
           </a:p>
           <a:p xmlns:a="http://schemas.openxmlformats.org/drawingml/2006/main">
             <a:r>
-              <a:t>- 本页仅使用课程内部规则与教学材料。</a:t>
+              <a:t/>
+            </a:r>
+          </a:p>
+          <a:p xmlns:a="http://schemas.openxmlformats.org/drawingml/2006/main">
+            <a:r>
+              <a:t>- 本课 handout.md 与 slides.md</a:t>
+            </a:r>
+          </a:p>
+          <a:p xmlns:a="http://schemas.openxmlformats.org/drawingml/2006/main">
+            <a:r>
+              <a:t/>
+            </a:r>
+          </a:p>
+          <a:p xmlns:a="http://schemas.openxmlformats.org/drawingml/2006/main">
+            <a:r>
+              <a:t>- ../../course/reading-card-case.md</a:t>
+            </a:r>
+          </a:p>
+          <a:p xmlns:a="http://schemas.openxmlformats.org/drawingml/2006/main">
+            <a:r>
+              <a:t/>
             </a:r>
           </a:p>
           <a:p xmlns:a="http://schemas.openxmlformats.org/drawingml/2006/main">
@@ -2260,7 +5820,7 @@
           <p:nvPr/>
         </p:nvPicPr>
         <p:blipFill>
-          <a:blip xmlns:r="http://schemas.openxmlformats.org/officeDocument/2006/relationships" xmlns:a="http://schemas.openxmlformats.org/drawingml/2006/main" r:embed="R3dfb1fe6c3ce460a">
+          <a:blip xmlns:r="http://schemas.openxmlformats.org/officeDocument/2006/relationships" xmlns:a="http://schemas.openxmlformats.org/drawingml/2006/main" r:embed="R15a0f2b819e7468d">
             <a:duotone>
               <a:prstClr val="black"/>
               <a:schemeClr val="accent1">
@@ -2438,7 +5998,7 @@
           <p:nvPr/>
         </p:nvPicPr>
         <p:blipFill rotWithShape="1">
-          <a:blip xmlns:r="http://schemas.openxmlformats.org/officeDocument/2006/relationships" xmlns:a="http://schemas.openxmlformats.org/drawingml/2006/main" r:embed="R696b542d6ccf4c9d"/>
+          <a:blip xmlns:r="http://schemas.openxmlformats.org/officeDocument/2006/relationships" xmlns:a="http://schemas.openxmlformats.org/drawingml/2006/main" r:embed="Rb6b7de890c3f4b3b"/>
           <a:srcRect xmlns:a="http://schemas.openxmlformats.org/drawingml/2006/main" l="74359" t="0" r="1346" b="0"/>
           <a:stretch xmlns:a="http://schemas.openxmlformats.org/drawingml/2006/main"/>
         </p:blipFill>
@@ -2461,7 +6021,7 @@
           <p:nvPr/>
         </p:nvPicPr>
         <p:blipFill rotWithShape="1">
-          <a:blip xmlns:r="http://schemas.openxmlformats.org/officeDocument/2006/relationships" xmlns:a="http://schemas.openxmlformats.org/drawingml/2006/main" r:embed="Rd92c3e7c09f34c5b">
+          <a:blip xmlns:r="http://schemas.openxmlformats.org/officeDocument/2006/relationships" xmlns:a="http://schemas.openxmlformats.org/drawingml/2006/main" r:embed="Ra037cc9b6fe541c5">
             <a:alphaModFix amt="35000"/>
           </a:blip>
           <a:srcRect xmlns:a="http://schemas.openxmlformats.org/drawingml/2006/main" l="0" t="9831" r="0" b="36385"/>
@@ -2723,7 +6283,7 @@
           <p:nvPr/>
         </p:nvPicPr>
         <p:blipFill>
-          <a:blip xmlns:r="http://schemas.openxmlformats.org/officeDocument/2006/relationships" xmlns:a="http://schemas.openxmlformats.org/drawingml/2006/main" r:embed="Ra4944a3968e04435"/>
+          <a:blip xmlns:r="http://schemas.openxmlformats.org/officeDocument/2006/relationships" xmlns:a="http://schemas.openxmlformats.org/drawingml/2006/main" r:embed="R939b3ce61f2f48da"/>
           <a:srcRect xmlns:a="http://schemas.openxmlformats.org/drawingml/2006/main" l="0" t="0" r="54251" b="0"/>
           <a:stretch xmlns:a="http://schemas.openxmlformats.org/drawingml/2006/main"/>
         </p:blipFill>
@@ -2980,7 +6540,7 @@
           <p:nvPr/>
         </p:nvPicPr>
         <p:blipFill rotWithShape="1">
-          <a:blip xmlns:r="http://schemas.openxmlformats.org/officeDocument/2006/relationships" xmlns:a="http://schemas.openxmlformats.org/drawingml/2006/main" r:embed="Rd1129db7bea344b5"/>
+          <a:blip xmlns:r="http://schemas.openxmlformats.org/officeDocument/2006/relationships" xmlns:a="http://schemas.openxmlformats.org/drawingml/2006/main" r:embed="Rc5b20669a6c641e0"/>
           <a:srcRect xmlns:a="http://schemas.openxmlformats.org/drawingml/2006/main" l="0" t="0" r="1346" b="0"/>
           <a:stretch xmlns:a="http://schemas.openxmlformats.org/drawingml/2006/main"/>
         </p:blipFill>
@@ -3163,7 +6723,7 @@
           <p:nvPr/>
         </p:nvPicPr>
         <p:blipFill>
-          <a:blip xmlns:r="http://schemas.openxmlformats.org/officeDocument/2006/relationships" xmlns:a="http://schemas.openxmlformats.org/drawingml/2006/main" r:embed="R2dc3fbcead3449fe"/>
+          <a:blip xmlns:r="http://schemas.openxmlformats.org/officeDocument/2006/relationships" xmlns:a="http://schemas.openxmlformats.org/drawingml/2006/main" r:embed="Rfaa81d0cb1e643c1"/>
           <a:stretch xmlns:a="http://schemas.openxmlformats.org/drawingml/2006/main">
             <a:fillRect l="0" t="0" r="0" b="0"/>
           </a:stretch>
@@ -3259,7 +6819,7 @@
           <p:nvPr/>
         </p:nvPicPr>
         <p:blipFill>
-          <a:blip xmlns:r="http://schemas.openxmlformats.org/officeDocument/2006/relationships" xmlns:a="http://schemas.openxmlformats.org/drawingml/2006/main" r:embed="R07bbf48d01b44f2b">
+          <a:blip xmlns:r="http://schemas.openxmlformats.org/officeDocument/2006/relationships" xmlns:a="http://schemas.openxmlformats.org/drawingml/2006/main" r:embed="R4aa0867f29404cf3">
             <a:duotone>
               <a:prstClr val="black"/>
               <a:schemeClr val="accent1">
@@ -3426,7 +6986,7 @@
           <p:nvPr/>
         </p:nvPicPr>
         <p:blipFill rotWithShape="1">
-          <a:blip xmlns:r="http://schemas.openxmlformats.org/officeDocument/2006/relationships" xmlns:a="http://schemas.openxmlformats.org/drawingml/2006/main" r:embed="R3ee947f2113c452e">
+          <a:blip xmlns:r="http://schemas.openxmlformats.org/officeDocument/2006/relationships" xmlns:a="http://schemas.openxmlformats.org/drawingml/2006/main" r:embed="R2e62e76fd7ce4db8">
             <a:alphaModFix amt="20000"/>
             <a:duotone>
               <a:schemeClr val="accent4">
@@ -3524,10 +7084,10 @@
   </p:cSld>
   <p:clrMap bg1="lt1" tx1="dk1" bg2="lt2" tx2="dk2" accent1="accent1" accent2="accent2" accent3="accent3" accent4="accent4" accent5="accent5" accent6="accent6" hlink="hlink" folHlink="folHlink"/>
   <p:sldLayoutIdLst>
-    <p:sldLayoutId xmlns:r="http://schemas.openxmlformats.org/officeDocument/2006/relationships" id="2147483649" r:id="R02bb6bae05b44f95"/>
-    <p:sldLayoutId xmlns:r="http://schemas.openxmlformats.org/officeDocument/2006/relationships" id="2147483650" r:id="R01f1d322e1004373"/>
-    <p:sldLayoutId xmlns:r="http://schemas.openxmlformats.org/officeDocument/2006/relationships" id="2147483651" r:id="Rb9c1f2b8110f48f2"/>
-    <p:sldLayoutId xmlns:r="http://schemas.openxmlformats.org/officeDocument/2006/relationships" id="2147483652" r:id="R3022b0717d34471e"/>
+    <p:sldLayoutId xmlns:r="http://schemas.openxmlformats.org/officeDocument/2006/relationships" id="2147483649" r:id="R07a2991f02374449"/>
+    <p:sldLayoutId xmlns:r="http://schemas.openxmlformats.org/officeDocument/2006/relationships" id="2147483650" r:id="R7a5749cdbc4f4d8a"/>
+    <p:sldLayoutId xmlns:r="http://schemas.openxmlformats.org/officeDocument/2006/relationships" id="2147483651" r:id="R8289e3270046423c"/>
+    <p:sldLayoutId xmlns:r="http://schemas.openxmlformats.org/officeDocument/2006/relationships" id="2147483652" r:id="Rc9dfde77a4164f49"/>
   </p:sldLayoutIdLst>
   <p:hf hdr="0" ftr="0" dt="0"/>
   <p:txStyles>
@@ -4155,8 +7715,8 @@
         </p:nvSpPr>
         <p:spPr>
           <a:xfrm xmlns:a="http://schemas.openxmlformats.org/drawingml/2006/main">
-            <a:off x="1028700" y="28575"/>
-            <a:ext cx="10668000" cy="628650"/>
+            <a:off x="1028700" y="57150"/>
+            <a:ext cx="10668000" cy="571500"/>
           </a:xfrm>
         </p:spPr>
         <p:txBody>
@@ -4166,6 +7726,9 @@
           <a:lstStyle xmlns:a="http://schemas.openxmlformats.org/drawingml/2006/main"/>
           <a:p xmlns:a="http://schemas.openxmlformats.org/drawingml/2006/main">
             <a:pPr algn="l">
+              <a:lnSpc>
+                <a:spcPct val="118000"/>
+              </a:lnSpc>
               <a:buNone/>
             </a:pPr>
             <a:r>
@@ -4177,7 +7740,7 @@
                 <a:ea typeface="微软雅黑"/>
                 <a:cs typeface="微软雅黑"/>
               </a:rPr>
-              <a:t>把宽泛主张改写为可证伪命题</a:t>
+              <a:t>怎样的观察会削弱这条命题？</a:t>
             </a:r>
             <a:endParaRPr/>
           </a:p>
@@ -4213,10 +7776,10 @@
       </p:sp>
       <p:sp>
         <p:nvSpPr>
-          <p:cNvPr id="6" name="visual-10-0-p09-bad">
-            <a:extLst xmlns:a="http://schemas.openxmlformats.org/drawingml/2006/main">
-              <a:ext uri="{FF2B5EF4-FFF2-40B4-BE49-F238E27FC236}">
-                <a16:creationId xmlns:a16="http://schemas.microsoft.com/office/drawing/2014/main" id="{91064A0C-10F0-47D7-94A5-DF4877564A74}"/>
+          <p:cNvPr id="6" name="content-22">
+            <a:extLst xmlns:a="http://schemas.openxmlformats.org/drawingml/2006/main">
+              <a:ext uri="{FF2B5EF4-FFF2-40B4-BE49-F238E27FC236}">
+                <a16:creationId xmlns:a16="http://schemas.microsoft.com/office/drawing/2014/main" id="{20F8A9B7-978B-4647-BE8D-50F792DB4D68}"/>
               </a:ext>
             </a:extLst>
           </p:cNvPr>
@@ -4227,8 +7790,8 @@
         </p:nvSpPr>
         <p:spPr>
           <a:xfrm xmlns:a="http://schemas.openxmlformats.org/drawingml/2006/main">
-            <a:off x="666750" y="1285875"/>
-            <a:ext cx="3714750" cy="1381125"/>
+            <a:off x="609600" y="1581150"/>
+            <a:ext cx="2333625" cy="609600"/>
           </a:xfrm>
           <a:prstGeom xmlns:a="http://schemas.openxmlformats.org/drawingml/2006/main" prst="rect">
             <a:avLst/>
@@ -4239,72 +7802,43 @@
           </a:ln>
         </p:spPr>
         <p:txBody>
-          <a:bodyPr xmlns:a="http://schemas.openxmlformats.org/drawingml/2006/main" lIns="0" tIns="0" rIns="0" bIns="0" anchor="t">
-            <a:noAutofit/>
-          </a:bodyPr>
+          <a:bodyPr xmlns:a="http://schemas.openxmlformats.org/drawingml/2006/main" lIns="0" tIns="0" rIns="0" bIns="0" anchor="t"/>
           <a:lstStyle xmlns:a="http://schemas.openxmlformats.org/drawingml/2006/main"/>
           <a:p xmlns:a="http://schemas.openxmlformats.org/drawingml/2006/main">
             <a:pPr algn="l">
               <a:lnSpc>
-                <a:spcPct val="114000"/>
-              </a:lnSpc>
-              <a:buNone/>
-              <a:defRPr sz="2400" b="0">
-                <a:solidFill>
-                  <a:srgbClr val="27333D"/>
-                </a:solidFill>
-                <a:latin typeface="微软雅黑"/>
-                <a:ea typeface="微软雅黑"/>
-                <a:cs typeface="微软雅黑"/>
-              </a:defRPr>
-            </a:pPr>
-            <a:r>
-              <a:rPr sz="2400" b="0">
-                <a:solidFill>
-                  <a:srgbClr val="27333D"/>
-                </a:solidFill>
-                <a:latin typeface="微软雅黑"/>
-                <a:ea typeface="微软雅黑"/>
-                <a:cs typeface="微软雅黑"/>
-              </a:rPr>
-              <a:t>不可证伪</a:t>
-            </a:r>
-          </a:p>
-          <a:p xmlns:a="http://schemas.openxmlformats.org/drawingml/2006/main">
-            <a:pPr algn="l">
-              <a:lnSpc>
-                <a:spcPct val="114000"/>
-              </a:lnSpc>
-              <a:buNone/>
-              <a:defRPr sz="2400" b="0">
-                <a:solidFill>
-                  <a:srgbClr val="27333D"/>
-                </a:solidFill>
-                <a:latin typeface="微软雅黑"/>
-                <a:ea typeface="微软雅黑"/>
-                <a:cs typeface="微软雅黑"/>
-              </a:defRPr>
-            </a:pPr>
-            <a:r>
-              <a:rPr sz="2400" b="0">
-                <a:solidFill>
-                  <a:srgbClr val="27333D"/>
-                </a:solidFill>
-                <a:latin typeface="微软雅黑"/>
-                <a:ea typeface="微软雅黑"/>
-                <a:cs typeface="微软雅黑"/>
-              </a:rPr>
-              <a:t>“结构化阅读卡是有用的”</a:t>
-            </a:r>
-          </a:p>
-        </p:txBody>
-      </p:sp>
-      <p:sp>
-        <p:nvSpPr>
-          <p:cNvPr id="7" name="visual-10-1-p09-a">
-            <a:extLst xmlns:a="http://schemas.openxmlformats.org/drawingml/2006/main">
-              <a:ext uri="{FF2B5EF4-FFF2-40B4-BE49-F238E27FC236}">
-                <a16:creationId xmlns:a16="http://schemas.microsoft.com/office/drawing/2014/main" id="{A2F2A9BC-E0E8-48D2-8B59-811FD7AFFA7A}"/>
+                <a:spcPct val="118000"/>
+              </a:lnSpc>
+              <a:buNone/>
+              <a:defRPr sz="2400" b="1">
+                <a:solidFill>
+                  <a:srgbClr val="1F4D78"/>
+                </a:solidFill>
+                <a:latin typeface="微软雅黑"/>
+                <a:ea typeface="微软雅黑"/>
+                <a:cs typeface="微软雅黑"/>
+              </a:defRPr>
+            </a:pPr>
+            <a:r>
+              <a:rPr sz="2400" b="1">
+                <a:solidFill>
+                  <a:srgbClr val="1F4D78"/>
+                </a:solidFill>
+                <a:latin typeface="微软雅黑"/>
+                <a:ea typeface="微软雅黑"/>
+                <a:cs typeface="微软雅黑"/>
+              </a:rPr>
+              <a:t>Q1</a:t>
+            </a:r>
+          </a:p>
+        </p:txBody>
+      </p:sp>
+      <p:sp>
+        <p:nvSpPr>
+          <p:cNvPr id="7" name="content-23">
+            <a:extLst xmlns:a="http://schemas.openxmlformats.org/drawingml/2006/main">
+              <a:ext uri="{FF2B5EF4-FFF2-40B4-BE49-F238E27FC236}">
+                <a16:creationId xmlns:a16="http://schemas.microsoft.com/office/drawing/2014/main" id="{1F30035E-CFD2-4595-9A2E-4618A09F16F3}"/>
               </a:ext>
             </a:extLst>
           </p:cNvPr>
@@ -4315,8 +7849,8 @@
         </p:nvSpPr>
         <p:spPr>
           <a:xfrm xmlns:a="http://schemas.openxmlformats.org/drawingml/2006/main">
-            <a:off x="4762500" y="1762125"/>
-            <a:ext cx="666750" cy="381000"/>
+            <a:off x="3181350" y="1581150"/>
+            <a:ext cx="8286750" cy="666750"/>
           </a:xfrm>
           <a:prstGeom xmlns:a="http://schemas.openxmlformats.org/drawingml/2006/main" prst="rect">
             <a:avLst/>
@@ -4327,45 +7861,43 @@
           </a:ln>
         </p:spPr>
         <p:txBody>
-          <a:bodyPr xmlns:a="http://schemas.openxmlformats.org/drawingml/2006/main" lIns="0" tIns="0" rIns="0" bIns="0" anchor="ctr">
-            <a:noAutofit/>
-          </a:bodyPr>
-          <a:lstStyle xmlns:a="http://schemas.openxmlformats.org/drawingml/2006/main"/>
-          <a:p xmlns:a="http://schemas.openxmlformats.org/drawingml/2006/main">
-            <a:pPr algn="ctr">
-              <a:lnSpc>
-                <a:spcPct val="114000"/>
-              </a:lnSpc>
-              <a:buNone/>
-              <a:defRPr sz="2200" b="1">
-                <a:solidFill>
-                  <a:srgbClr val="1F4D78"/>
-                </a:solidFill>
-                <a:latin typeface="微软雅黑"/>
-                <a:ea typeface="微软雅黑"/>
-                <a:cs typeface="微软雅黑"/>
-              </a:defRPr>
-            </a:pPr>
-            <a:r>
-              <a:rPr sz="2200" b="1">
-                <a:solidFill>
-                  <a:srgbClr val="1F4D78"/>
-                </a:solidFill>
-                <a:latin typeface="微软雅黑"/>
-                <a:ea typeface="微软雅黑"/>
-                <a:cs typeface="微软雅黑"/>
-              </a:rPr>
-              <a:t>→</a:t>
-            </a:r>
-          </a:p>
-        </p:txBody>
-      </p:sp>
-      <p:sp>
-        <p:nvSpPr>
-          <p:cNvPr id="8" name="visual-10-2-p09-good">
-            <a:extLst xmlns:a="http://schemas.openxmlformats.org/drawingml/2006/main">
-              <a:ext uri="{FF2B5EF4-FFF2-40B4-BE49-F238E27FC236}">
-                <a16:creationId xmlns:a16="http://schemas.microsoft.com/office/drawing/2014/main" id="{AFC87E4A-2ECD-42B5-98E0-A07A50F20636}"/>
+          <a:bodyPr xmlns:a="http://schemas.openxmlformats.org/drawingml/2006/main" lIns="0" tIns="0" rIns="0" bIns="0" anchor="t"/>
+          <a:lstStyle xmlns:a="http://schemas.openxmlformats.org/drawingml/2006/main"/>
+          <a:p xmlns:a="http://schemas.openxmlformats.org/drawingml/2006/main">
+            <a:pPr algn="l">
+              <a:lnSpc>
+                <a:spcPct val="118000"/>
+              </a:lnSpc>
+              <a:buNone/>
+              <a:defRPr sz="2300" b="0">
+                <a:solidFill>
+                  <a:srgbClr val="27333D"/>
+                </a:solidFill>
+                <a:latin typeface="微软雅黑"/>
+                <a:ea typeface="微软雅黑"/>
+                <a:cs typeface="微软雅黑"/>
+              </a:defRPr>
+            </a:pPr>
+            <a:r>
+              <a:rPr sz="2300" b="0">
+                <a:solidFill>
+                  <a:srgbClr val="27333D"/>
+                </a:solidFill>
+                <a:latin typeface="微软雅黑"/>
+                <a:ea typeface="微软雅黑"/>
+                <a:cs typeface="微软雅黑"/>
+              </a:rPr>
+              <a:t>在限定材料与任务中，阅读卡降低限定条件遗漏率。</a:t>
+            </a:r>
+          </a:p>
+        </p:txBody>
+      </p:sp>
+      <p:sp>
+        <p:nvSpPr>
+          <p:cNvPr id="8" name="rule-24">
+            <a:extLst xmlns:a="http://schemas.openxmlformats.org/drawingml/2006/main">
+              <a:ext uri="{FF2B5EF4-FFF2-40B4-BE49-F238E27FC236}">
+                <a16:creationId xmlns:a16="http://schemas.microsoft.com/office/drawing/2014/main" id="{A07E7585-9962-4BE5-8724-654E86317829}"/>
               </a:ext>
             </a:extLst>
           </p:cNvPr>
@@ -4376,8 +7908,38 @@
         </p:nvSpPr>
         <p:spPr>
           <a:xfrm xmlns:a="http://schemas.openxmlformats.org/drawingml/2006/main">
-            <a:off x="5810250" y="1066800"/>
-            <a:ext cx="5619750" cy="1809750"/>
+            <a:off x="609600" y="2343150"/>
+            <a:ext cx="10858500" cy="14288"/>
+          </a:xfrm>
+          <a:prstGeom xmlns:a="http://schemas.openxmlformats.org/drawingml/2006/main" prst="rect">
+            <a:avLst/>
+          </a:prstGeom>
+          <a:solidFill xmlns:a="http://schemas.openxmlformats.org/drawingml/2006/main">
+            <a:srgbClr val="CDD5DB"/>
+          </a:solidFill>
+          <a:ln xmlns:a="http://schemas.openxmlformats.org/drawingml/2006/main" w="0">
+            <a:noFill/>
+          </a:ln>
+        </p:spPr>
+      </p:sp>
+      <p:sp>
+        <p:nvSpPr>
+          <p:cNvPr id="9" name="content-25">
+            <a:extLst xmlns:a="http://schemas.openxmlformats.org/drawingml/2006/main">
+              <a:ext uri="{FF2B5EF4-FFF2-40B4-BE49-F238E27FC236}">
+                <a16:creationId xmlns:a16="http://schemas.microsoft.com/office/drawing/2014/main" id="{A60975A1-AFE4-40AB-AD7E-F02D49FEA4D0}"/>
+              </a:ext>
+            </a:extLst>
+          </p:cNvPr>
+          <p:cNvSpPr>
+            <a:spLocks xmlns:a="http://schemas.openxmlformats.org/drawingml/2006/main" noGrp="1"/>
+          </p:cNvSpPr>
+          <p:nvPr/>
+        </p:nvSpPr>
+        <p:spPr>
+          <a:xfrm xmlns:a="http://schemas.openxmlformats.org/drawingml/2006/main">
+            <a:off x="609600" y="2609850"/>
+            <a:ext cx="2333625" cy="609600"/>
           </a:xfrm>
           <a:prstGeom xmlns:a="http://schemas.openxmlformats.org/drawingml/2006/main" prst="rect">
             <a:avLst/>
@@ -4388,126 +7950,43 @@
           </a:ln>
         </p:spPr>
         <p:txBody>
-          <a:bodyPr xmlns:a="http://schemas.openxmlformats.org/drawingml/2006/main" lIns="0" tIns="0" rIns="0" bIns="0" anchor="t">
-            <a:noAutofit/>
-          </a:bodyPr>
+          <a:bodyPr xmlns:a="http://schemas.openxmlformats.org/drawingml/2006/main" lIns="0" tIns="0" rIns="0" bIns="0" anchor="t"/>
           <a:lstStyle xmlns:a="http://schemas.openxmlformats.org/drawingml/2006/main"/>
           <a:p xmlns:a="http://schemas.openxmlformats.org/drawingml/2006/main">
             <a:pPr algn="l">
               <a:lnSpc>
-                <a:spcPct val="108000"/>
-              </a:lnSpc>
-              <a:buNone/>
-              <a:defRPr sz="2200" b="0">
-                <a:solidFill>
-                  <a:srgbClr val="27333D"/>
-                </a:solidFill>
-                <a:latin typeface="微软雅黑"/>
-                <a:ea typeface="微软雅黑"/>
-                <a:cs typeface="微软雅黑"/>
-              </a:defRPr>
-            </a:pPr>
-            <a:r>
-              <a:rPr sz="2000" b="0">
-                <a:solidFill>
-                  <a:srgbClr val="27333D"/>
-                </a:solidFill>
-                <a:latin typeface="微软雅黑"/>
-                <a:ea typeface="微软雅黑"/>
-                <a:cs typeface="微软雅黑"/>
-              </a:rPr>
-              <a:t>可证伪</a:t>
-            </a:r>
-          </a:p>
-          <a:p xmlns:a="http://schemas.openxmlformats.org/drawingml/2006/main">
-            <a:pPr algn="l">
-              <a:lnSpc>
-                <a:spcPct val="108000"/>
-              </a:lnSpc>
-              <a:buNone/>
-              <a:defRPr sz="2200" b="0">
-                <a:solidFill>
-                  <a:srgbClr val="27333D"/>
-                </a:solidFill>
-                <a:latin typeface="微软雅黑"/>
-                <a:ea typeface="微软雅黑"/>
-                <a:cs typeface="微软雅黑"/>
-              </a:defRPr>
-            </a:pPr>
-            <a:r>
-              <a:rPr sz="2000" b="0">
-                <a:solidFill>
-                  <a:srgbClr val="27333D"/>
-                </a:solidFill>
-                <a:latin typeface="微软雅黑"/>
-                <a:ea typeface="微软雅黑"/>
-                <a:cs typeface="微软雅黑"/>
-              </a:rPr>
-              <a:t>在固定任务与评价标准下，</a:t>
-            </a:r>
-          </a:p>
-          <a:p xmlns:a="http://schemas.openxmlformats.org/drawingml/2006/main">
-            <a:pPr algn="l">
-              <a:lnSpc>
-                <a:spcPct val="108000"/>
-              </a:lnSpc>
-              <a:buNone/>
-              <a:defRPr sz="2200" b="0">
-                <a:solidFill>
-                  <a:srgbClr val="27333D"/>
-                </a:solidFill>
-                <a:latin typeface="微软雅黑"/>
-                <a:ea typeface="微软雅黑"/>
-                <a:cs typeface="微软雅黑"/>
-              </a:defRPr>
-            </a:pPr>
-            <a:r>
-              <a:rPr sz="2000" b="0">
-                <a:solidFill>
-                  <a:srgbClr val="27333D"/>
-                </a:solidFill>
-                <a:latin typeface="微软雅黑"/>
-                <a:ea typeface="微软雅黑"/>
-                <a:cs typeface="微软雅黑"/>
-              </a:rPr>
-              <a:t>阅读卡组相较自由摘要组的遗漏率更低；</a:t>
-            </a:r>
-          </a:p>
-          <a:p xmlns:a="http://schemas.openxmlformats.org/drawingml/2006/main">
-            <a:pPr algn="l">
-              <a:lnSpc>
-                <a:spcPct val="108000"/>
-              </a:lnSpc>
-              <a:buNone/>
-              <a:defRPr sz="2200" b="0">
-                <a:solidFill>
-                  <a:srgbClr val="27333D"/>
-                </a:solidFill>
-                <a:latin typeface="微软雅黑"/>
-                <a:ea typeface="微软雅黑"/>
-                <a:cs typeface="微软雅黑"/>
-              </a:defRPr>
-            </a:pPr>
-            <a:r>
-              <a:rPr sz="2000" b="0">
-                <a:solidFill>
-                  <a:srgbClr val="27333D"/>
-                </a:solidFill>
-                <a:latin typeface="微软雅黑"/>
-                <a:ea typeface="微软雅黑"/>
-                <a:cs typeface="微软雅黑"/>
-              </a:rPr>
-              <a:t>若未下降，主张不成立。</a:t>
-            </a:r>
-          </a:p>
-        </p:txBody>
-      </p:sp>
-      <p:sp>
-        <p:nvSpPr>
-          <p:cNvPr id="9" name="visual-10-3-p09-e0">
-            <a:extLst xmlns:a="http://schemas.openxmlformats.org/drawingml/2006/main">
-              <a:ext uri="{FF2B5EF4-FFF2-40B4-BE49-F238E27FC236}">
-                <a16:creationId xmlns:a16="http://schemas.microsoft.com/office/drawing/2014/main" id="{FD2B2D5C-FF9A-4285-9FCD-9539BE7F17C1}"/>
+                <a:spcPct val="118000"/>
+              </a:lnSpc>
+              <a:buNone/>
+              <a:defRPr sz="2400" b="1">
+                <a:solidFill>
+                  <a:srgbClr val="1F4D78"/>
+                </a:solidFill>
+                <a:latin typeface="微软雅黑"/>
+                <a:ea typeface="微软雅黑"/>
+                <a:cs typeface="微软雅黑"/>
+              </a:defRPr>
+            </a:pPr>
+            <a:r>
+              <a:rPr sz="2400" b="1">
+                <a:solidFill>
+                  <a:srgbClr val="1F4D78"/>
+                </a:solidFill>
+                <a:latin typeface="微软雅黑"/>
+                <a:ea typeface="微软雅黑"/>
+                <a:cs typeface="微软雅黑"/>
+              </a:rPr>
+              <a:t>结果检查</a:t>
+            </a:r>
+          </a:p>
+        </p:txBody>
+      </p:sp>
+      <p:sp>
+        <p:nvSpPr>
+          <p:cNvPr id="10" name="content-26">
+            <a:extLst xmlns:a="http://schemas.openxmlformats.org/drawingml/2006/main">
+              <a:ext uri="{FF2B5EF4-FFF2-40B4-BE49-F238E27FC236}">
+                <a16:creationId xmlns:a16="http://schemas.microsoft.com/office/drawing/2014/main" id="{8EAAC0B2-35D8-469D-9AF0-FD982B7DF772}"/>
               </a:ext>
             </a:extLst>
           </p:cNvPr>
@@ -4518,8 +7997,8 @@
         </p:nvSpPr>
         <p:spPr>
           <a:xfrm xmlns:a="http://schemas.openxmlformats.org/drawingml/2006/main">
-            <a:off x="857250" y="3524250"/>
-            <a:ext cx="1809750" cy="552450"/>
+            <a:off x="3181350" y="2609850"/>
+            <a:ext cx="8286750" cy="666750"/>
           </a:xfrm>
           <a:prstGeom xmlns:a="http://schemas.openxmlformats.org/drawingml/2006/main" prst="rect">
             <a:avLst/>
@@ -4530,45 +8009,43 @@
           </a:ln>
         </p:spPr>
         <p:txBody>
-          <a:bodyPr xmlns:a="http://schemas.openxmlformats.org/drawingml/2006/main" lIns="0" tIns="0" rIns="0" bIns="0" anchor="ctr">
-            <a:noAutofit/>
-          </a:bodyPr>
+          <a:bodyPr xmlns:a="http://schemas.openxmlformats.org/drawingml/2006/main" lIns="0" tIns="0" rIns="0" bIns="0" anchor="t"/>
           <a:lstStyle xmlns:a="http://schemas.openxmlformats.org/drawingml/2006/main"/>
           <a:p xmlns:a="http://schemas.openxmlformats.org/drawingml/2006/main">
             <a:pPr algn="l">
               <a:lnSpc>
-                <a:spcPct val="114000"/>
-              </a:lnSpc>
-              <a:buNone/>
-              <a:defRPr sz="2200" b="1">
-                <a:solidFill>
-                  <a:srgbClr val="1F4D78"/>
-                </a:solidFill>
-                <a:latin typeface="微软雅黑"/>
-                <a:ea typeface="微软雅黑"/>
-                <a:cs typeface="微软雅黑"/>
-              </a:defRPr>
-            </a:pPr>
-            <a:r>
-              <a:rPr sz="2200" b="1">
-                <a:solidFill>
-                  <a:srgbClr val="1F4D78"/>
-                </a:solidFill>
-                <a:latin typeface="微软雅黑"/>
-                <a:ea typeface="微软雅黑"/>
-                <a:cs typeface="微软雅黑"/>
-              </a:rPr>
-              <a:t>条件</a:t>
-            </a:r>
-          </a:p>
-        </p:txBody>
-      </p:sp>
-      <p:sp>
-        <p:nvSpPr>
-          <p:cNvPr id="10" name="visual-10-4-p09-e1">
-            <a:extLst xmlns:a="http://schemas.openxmlformats.org/drawingml/2006/main">
-              <a:ext uri="{FF2B5EF4-FFF2-40B4-BE49-F238E27FC236}">
-                <a16:creationId xmlns:a16="http://schemas.microsoft.com/office/drawing/2014/main" id="{BB375F3E-4086-4C17-8B5B-59289EE7B5D7}"/>
+                <a:spcPct val="118000"/>
+              </a:lnSpc>
+              <a:buNone/>
+              <a:defRPr sz="2300" b="0">
+                <a:solidFill>
+                  <a:srgbClr val="27333D"/>
+                </a:solidFill>
+                <a:latin typeface="微软雅黑"/>
+                <a:ea typeface="微软雅黑"/>
+                <a:cs typeface="微软雅黑"/>
+              </a:defRPr>
+            </a:pPr>
+            <a:r>
+              <a:rPr sz="2300" b="0">
+                <a:solidFill>
+                  <a:srgbClr val="27333D"/>
+                </a:solidFill>
+                <a:latin typeface="微软雅黑"/>
+                <a:ea typeface="微软雅黑"/>
+                <a:cs typeface="微软雅黑"/>
+              </a:rPr>
+              <a:t>差异的方向、大小和不确定性。</a:t>
+            </a:r>
+          </a:p>
+        </p:txBody>
+      </p:sp>
+      <p:sp>
+        <p:nvSpPr>
+          <p:cNvPr id="11" name="rule-27">
+            <a:extLst xmlns:a="http://schemas.openxmlformats.org/drawingml/2006/main">
+              <a:ext uri="{FF2B5EF4-FFF2-40B4-BE49-F238E27FC236}">
+                <a16:creationId xmlns:a16="http://schemas.microsoft.com/office/drawing/2014/main" id="{6DF3AB57-43DA-4BBC-A01D-B83969FFB20F}"/>
               </a:ext>
             </a:extLst>
           </p:cNvPr>
@@ -4579,8 +8056,38 @@
         </p:nvSpPr>
         <p:spPr>
           <a:xfrm xmlns:a="http://schemas.openxmlformats.org/drawingml/2006/main">
-            <a:off x="3048000" y="3524250"/>
-            <a:ext cx="1809750" cy="552450"/>
+            <a:off x="609600" y="3371850"/>
+            <a:ext cx="10858500" cy="14288"/>
+          </a:xfrm>
+          <a:prstGeom xmlns:a="http://schemas.openxmlformats.org/drawingml/2006/main" prst="rect">
+            <a:avLst/>
+          </a:prstGeom>
+          <a:solidFill xmlns:a="http://schemas.openxmlformats.org/drawingml/2006/main">
+            <a:srgbClr val="CDD5DB"/>
+          </a:solidFill>
+          <a:ln xmlns:a="http://schemas.openxmlformats.org/drawingml/2006/main" w="0">
+            <a:noFill/>
+          </a:ln>
+        </p:spPr>
+      </p:sp>
+      <p:sp>
+        <p:nvSpPr>
+          <p:cNvPr id="12" name="content-28">
+            <a:extLst xmlns:a="http://schemas.openxmlformats.org/drawingml/2006/main">
+              <a:ext uri="{FF2B5EF4-FFF2-40B4-BE49-F238E27FC236}">
+                <a16:creationId xmlns:a16="http://schemas.microsoft.com/office/drawing/2014/main" id="{69C525EC-D1F8-4BEE-BF6D-1B23B68D97EC}"/>
+              </a:ext>
+            </a:extLst>
+          </p:cNvPr>
+          <p:cNvSpPr>
+            <a:spLocks xmlns:a="http://schemas.openxmlformats.org/drawingml/2006/main" noGrp="1"/>
+          </p:cNvSpPr>
+          <p:nvPr/>
+        </p:nvSpPr>
+        <p:spPr>
+          <a:xfrm xmlns:a="http://schemas.openxmlformats.org/drawingml/2006/main">
+            <a:off x="609600" y="3638550"/>
+            <a:ext cx="2333625" cy="609600"/>
           </a:xfrm>
           <a:prstGeom xmlns:a="http://schemas.openxmlformats.org/drawingml/2006/main" prst="rect">
             <a:avLst/>
@@ -4591,17 +8098,15 @@
           </a:ln>
         </p:spPr>
         <p:txBody>
-          <a:bodyPr xmlns:a="http://schemas.openxmlformats.org/drawingml/2006/main" lIns="0" tIns="0" rIns="0" bIns="0" anchor="ctr">
-            <a:noAutofit/>
-          </a:bodyPr>
+          <a:bodyPr xmlns:a="http://schemas.openxmlformats.org/drawingml/2006/main" lIns="0" tIns="0" rIns="0" bIns="0" anchor="t"/>
           <a:lstStyle xmlns:a="http://schemas.openxmlformats.org/drawingml/2006/main"/>
           <a:p xmlns:a="http://schemas.openxmlformats.org/drawingml/2006/main">
             <a:pPr algn="l">
               <a:lnSpc>
-                <a:spcPct val="114000"/>
-              </a:lnSpc>
-              <a:buNone/>
-              <a:defRPr sz="2200" b="1">
+                <a:spcPct val="118000"/>
+              </a:lnSpc>
+              <a:buNone/>
+              <a:defRPr sz="2400" b="1">
                 <a:solidFill>
                   <a:srgbClr val="1F4D78"/>
                 </a:solidFill>
@@ -4611,7 +8116,7 @@
               </a:defRPr>
             </a:pPr>
             <a:r>
-              <a:rPr sz="2200" b="1">
+              <a:rPr sz="2400" b="1">
                 <a:solidFill>
                   <a:srgbClr val="1F4D78"/>
                 </a:solidFill>
@@ -4619,17 +8124,17 @@
                 <a:ea typeface="微软雅黑"/>
                 <a:cs typeface="微软雅黑"/>
               </a:rPr>
-              <a:t>干预</a:t>
-            </a:r>
-          </a:p>
-        </p:txBody>
-      </p:sp>
-      <p:sp>
-        <p:nvSpPr>
-          <p:cNvPr id="11" name="visual-10-5-p09-e2">
-            <a:extLst xmlns:a="http://schemas.openxmlformats.org/drawingml/2006/main">
-              <a:ext uri="{FF2B5EF4-FFF2-40B4-BE49-F238E27FC236}">
-                <a16:creationId xmlns:a16="http://schemas.microsoft.com/office/drawing/2014/main" id="{A2D4195C-EBA9-4B05-A558-0C0849134772}"/>
+              <a:t>机制检查</a:t>
+            </a:r>
+          </a:p>
+        </p:txBody>
+      </p:sp>
+      <p:sp>
+        <p:nvSpPr>
+          <p:cNvPr id="13" name="content-29">
+            <a:extLst xmlns:a="http://schemas.openxmlformats.org/drawingml/2006/main">
+              <a:ext uri="{FF2B5EF4-FFF2-40B4-BE49-F238E27FC236}">
+                <a16:creationId xmlns:a16="http://schemas.microsoft.com/office/drawing/2014/main" id="{ACCAA0CC-7C6A-407B-8D50-959EAC8D2C7A}"/>
               </a:ext>
             </a:extLst>
           </p:cNvPr>
@@ -4640,8 +8145,8 @@
         </p:nvSpPr>
         <p:spPr>
           <a:xfrm xmlns:a="http://schemas.openxmlformats.org/drawingml/2006/main">
-            <a:off x="5238750" y="3524250"/>
-            <a:ext cx="1809750" cy="552450"/>
+            <a:off x="3181350" y="3638550"/>
+            <a:ext cx="8286750" cy="666750"/>
           </a:xfrm>
           <a:prstGeom xmlns:a="http://schemas.openxmlformats.org/drawingml/2006/main" prst="rect">
             <a:avLst/>
@@ -4652,45 +8157,43 @@
           </a:ln>
         </p:spPr>
         <p:txBody>
-          <a:bodyPr xmlns:a="http://schemas.openxmlformats.org/drawingml/2006/main" lIns="0" tIns="0" rIns="0" bIns="0" anchor="ctr">
-            <a:noAutofit/>
-          </a:bodyPr>
+          <a:bodyPr xmlns:a="http://schemas.openxmlformats.org/drawingml/2006/main" lIns="0" tIns="0" rIns="0" bIns="0" anchor="t"/>
           <a:lstStyle xmlns:a="http://schemas.openxmlformats.org/drawingml/2006/main"/>
           <a:p xmlns:a="http://schemas.openxmlformats.org/drawingml/2006/main">
             <a:pPr algn="l">
               <a:lnSpc>
-                <a:spcPct val="114000"/>
-              </a:lnSpc>
-              <a:buNone/>
-              <a:defRPr sz="2200" b="1">
-                <a:solidFill>
-                  <a:srgbClr val="1F4D78"/>
-                </a:solidFill>
-                <a:latin typeface="微软雅黑"/>
-                <a:ea typeface="微软雅黑"/>
-                <a:cs typeface="微软雅黑"/>
-              </a:defRPr>
-            </a:pPr>
-            <a:r>
-              <a:rPr sz="2200" b="1">
-                <a:solidFill>
-                  <a:srgbClr val="1F4D78"/>
-                </a:solidFill>
-                <a:latin typeface="微软雅黑"/>
-                <a:ea typeface="微软雅黑"/>
-                <a:cs typeface="微软雅黑"/>
-              </a:rPr>
-              <a:t>结果</a:t>
-            </a:r>
-          </a:p>
-        </p:txBody>
-      </p:sp>
-      <p:sp>
-        <p:nvSpPr>
-          <p:cNvPr id="12" name="visual-10-6-p09-e3">
-            <a:extLst xmlns:a="http://schemas.openxmlformats.org/drawingml/2006/main">
-              <a:ext uri="{FF2B5EF4-FFF2-40B4-BE49-F238E27FC236}">
-                <a16:creationId xmlns:a16="http://schemas.microsoft.com/office/drawing/2014/main" id="{F55FCF93-8AAF-48B5-8547-9E8D02DA3CD3}"/>
+                <a:spcPct val="118000"/>
+              </a:lnSpc>
+              <a:buNone/>
+              <a:defRPr sz="2300" b="0">
+                <a:solidFill>
+                  <a:srgbClr val="27333D"/>
+                </a:solidFill>
+                <a:latin typeface="微软雅黑"/>
+                <a:ea typeface="微软雅黑"/>
+                <a:cs typeface="微软雅黑"/>
+              </a:defRPr>
+            </a:pPr>
+            <a:r>
+              <a:rPr sz="2300" b="0">
+                <a:solidFill>
+                  <a:srgbClr val="27333D"/>
+                </a:solidFill>
+                <a:latin typeface="微软雅黑"/>
+                <a:ea typeface="微软雅黑"/>
+                <a:cs typeface="微软雅黑"/>
+              </a:rPr>
+              <a:t>另找能区分原因的观察。</a:t>
+            </a:r>
+          </a:p>
+        </p:txBody>
+      </p:sp>
+      <p:sp>
+        <p:nvSpPr>
+          <p:cNvPr id="14" name="rule-30">
+            <a:extLst xmlns:a="http://schemas.openxmlformats.org/drawingml/2006/main">
+              <a:ext uri="{FF2B5EF4-FFF2-40B4-BE49-F238E27FC236}">
+                <a16:creationId xmlns:a16="http://schemas.microsoft.com/office/drawing/2014/main" id="{8983FC60-56BD-49F3-B9E2-A1FD5DC22D1B}"/>
               </a:ext>
             </a:extLst>
           </p:cNvPr>
@@ -4701,8 +8204,38 @@
         </p:nvSpPr>
         <p:spPr>
           <a:xfrm xmlns:a="http://schemas.openxmlformats.org/drawingml/2006/main">
-            <a:off x="7429500" y="3524250"/>
-            <a:ext cx="1809750" cy="552450"/>
+            <a:off x="609600" y="4400550"/>
+            <a:ext cx="10858500" cy="14288"/>
+          </a:xfrm>
+          <a:prstGeom xmlns:a="http://schemas.openxmlformats.org/drawingml/2006/main" prst="rect">
+            <a:avLst/>
+          </a:prstGeom>
+          <a:solidFill xmlns:a="http://schemas.openxmlformats.org/drawingml/2006/main">
+            <a:srgbClr val="CDD5DB"/>
+          </a:solidFill>
+          <a:ln xmlns:a="http://schemas.openxmlformats.org/drawingml/2006/main" w="0">
+            <a:noFill/>
+          </a:ln>
+        </p:spPr>
+      </p:sp>
+      <p:sp>
+        <p:nvSpPr>
+          <p:cNvPr id="15" name="content-31">
+            <a:extLst xmlns:a="http://schemas.openxmlformats.org/drawingml/2006/main">
+              <a:ext uri="{FF2B5EF4-FFF2-40B4-BE49-F238E27FC236}">
+                <a16:creationId xmlns:a16="http://schemas.microsoft.com/office/drawing/2014/main" id="{6ED648AF-DF03-4171-8514-F865E71D8456}"/>
+              </a:ext>
+            </a:extLst>
+          </p:cNvPr>
+          <p:cNvSpPr>
+            <a:spLocks xmlns:a="http://schemas.openxmlformats.org/drawingml/2006/main" noGrp="1"/>
+          </p:cNvSpPr>
+          <p:nvPr/>
+        </p:nvSpPr>
+        <p:spPr>
+          <a:xfrm xmlns:a="http://schemas.openxmlformats.org/drawingml/2006/main">
+            <a:off x="609600" y="4667250"/>
+            <a:ext cx="2333625" cy="609600"/>
           </a:xfrm>
           <a:prstGeom xmlns:a="http://schemas.openxmlformats.org/drawingml/2006/main" prst="rect">
             <a:avLst/>
@@ -4713,17 +8246,15 @@
           </a:ln>
         </p:spPr>
         <p:txBody>
-          <a:bodyPr xmlns:a="http://schemas.openxmlformats.org/drawingml/2006/main" lIns="0" tIns="0" rIns="0" bIns="0" anchor="ctr">
-            <a:noAutofit/>
-          </a:bodyPr>
+          <a:bodyPr xmlns:a="http://schemas.openxmlformats.org/drawingml/2006/main" lIns="0" tIns="0" rIns="0" bIns="0" anchor="t"/>
           <a:lstStyle xmlns:a="http://schemas.openxmlformats.org/drawingml/2006/main"/>
           <a:p xmlns:a="http://schemas.openxmlformats.org/drawingml/2006/main">
             <a:pPr algn="l">
               <a:lnSpc>
-                <a:spcPct val="114000"/>
-              </a:lnSpc>
-              <a:buNone/>
-              <a:defRPr sz="2200" b="1">
+                <a:spcPct val="118000"/>
+              </a:lnSpc>
+              <a:buNone/>
+              <a:defRPr sz="2400" b="1">
                 <a:solidFill>
                   <a:srgbClr val="1F4D78"/>
                 </a:solidFill>
@@ -4733,7 +8264,7 @@
               </a:defRPr>
             </a:pPr>
             <a:r>
-              <a:rPr sz="2200" b="1">
+              <a:rPr sz="2400" b="1">
                 <a:solidFill>
                   <a:srgbClr val="1F4D78"/>
                 </a:solidFill>
@@ -4741,17 +8272,17 @@
                 <a:ea typeface="微软雅黑"/>
                 <a:cs typeface="微软雅黑"/>
               </a:rPr>
-              <a:t>对照</a:t>
-            </a:r>
-          </a:p>
-        </p:txBody>
-      </p:sp>
-      <p:sp>
-        <p:nvSpPr>
-          <p:cNvPr id="13" name="visual-10-7-p09-e4">
-            <a:extLst xmlns:a="http://schemas.openxmlformats.org/drawingml/2006/main">
-              <a:ext uri="{FF2B5EF4-FFF2-40B4-BE49-F238E27FC236}">
-                <a16:creationId xmlns:a16="http://schemas.microsoft.com/office/drawing/2014/main" id="{86AD32BE-49E6-4852-A487-2235DA35FAB8}"/>
+              <a:t>采用决定</a:t>
+            </a:r>
+          </a:p>
+        </p:txBody>
+      </p:sp>
+      <p:sp>
+        <p:nvSpPr>
+          <p:cNvPr id="16" name="content-32">
+            <a:extLst xmlns:a="http://schemas.openxmlformats.org/drawingml/2006/main">
+              <a:ext uri="{FF2B5EF4-FFF2-40B4-BE49-F238E27FC236}">
+                <a16:creationId xmlns:a16="http://schemas.microsoft.com/office/drawing/2014/main" id="{2F062F10-A5BE-4A6B-9B8A-4D388D793497}"/>
               </a:ext>
             </a:extLst>
           </p:cNvPr>
@@ -4762,8 +8293,8 @@
         </p:nvSpPr>
         <p:spPr>
           <a:xfrm xmlns:a="http://schemas.openxmlformats.org/drawingml/2006/main">
-            <a:off x="9620250" y="3524250"/>
-            <a:ext cx="1809750" cy="552450"/>
+            <a:off x="3181350" y="4667250"/>
+            <a:ext cx="8286750" cy="666750"/>
           </a:xfrm>
           <a:prstGeom xmlns:a="http://schemas.openxmlformats.org/drawingml/2006/main" prst="rect">
             <a:avLst/>
@@ -4774,45 +8305,43 @@
           </a:ln>
         </p:spPr>
         <p:txBody>
-          <a:bodyPr xmlns:a="http://schemas.openxmlformats.org/drawingml/2006/main" lIns="0" tIns="0" rIns="0" bIns="0" anchor="ctr">
-            <a:noAutofit/>
-          </a:bodyPr>
+          <a:bodyPr xmlns:a="http://schemas.openxmlformats.org/drawingml/2006/main" lIns="0" tIns="0" rIns="0" bIns="0" anchor="t"/>
           <a:lstStyle xmlns:a="http://schemas.openxmlformats.org/drawingml/2006/main"/>
           <a:p xmlns:a="http://schemas.openxmlformats.org/drawingml/2006/main">
             <a:pPr algn="l">
               <a:lnSpc>
-                <a:spcPct val="114000"/>
-              </a:lnSpc>
-              <a:buNone/>
-              <a:defRPr sz="2200" b="1">
-                <a:solidFill>
-                  <a:srgbClr val="1F4D78"/>
-                </a:solidFill>
-                <a:latin typeface="微软雅黑"/>
-                <a:ea typeface="微软雅黑"/>
-                <a:cs typeface="微软雅黑"/>
-              </a:defRPr>
-            </a:pPr>
-            <a:r>
-              <a:rPr sz="2200" b="1">
-                <a:solidFill>
-                  <a:srgbClr val="1F4D78"/>
-                </a:solidFill>
-                <a:latin typeface="微软雅黑"/>
-                <a:ea typeface="微软雅黑"/>
-                <a:cs typeface="微软雅黑"/>
-              </a:rPr>
-              <a:t>推翻条件</a:t>
-            </a:r>
-          </a:p>
-        </p:txBody>
-      </p:sp>
-      <p:sp>
-        <p:nvSpPr>
-          <p:cNvPr id="14" name="visual-10-8-p09-bottom">
-            <a:extLst xmlns:a="http://schemas.openxmlformats.org/drawingml/2006/main">
-              <a:ext uri="{FF2B5EF4-FFF2-40B4-BE49-F238E27FC236}">
-                <a16:creationId xmlns:a16="http://schemas.microsoft.com/office/drawing/2014/main" id="{250121C6-9BAF-4D65-AA41-59DBE3050FF0}"/>
+                <a:spcPct val="118000"/>
+              </a:lnSpc>
+              <a:buNone/>
+              <a:defRPr sz="2300" b="0">
+                <a:solidFill>
+                  <a:srgbClr val="27333D"/>
+                </a:solidFill>
+                <a:latin typeface="微软雅黑"/>
+                <a:ea typeface="微软雅黑"/>
+                <a:cs typeface="微软雅黑"/>
+              </a:defRPr>
+            </a:pPr>
+            <a:r>
+              <a:rPr sz="2300" b="0">
+                <a:solidFill>
+                  <a:srgbClr val="27333D"/>
+                </a:solidFill>
+                <a:latin typeface="微软雅黑"/>
+                <a:ea typeface="微软雅黑"/>
+                <a:cs typeface="微软雅黑"/>
+              </a:rPr>
+              <a:t>质量代价、时间与资源是否可接受。</a:t>
+            </a:r>
+          </a:p>
+        </p:txBody>
+      </p:sp>
+      <p:sp>
+        <p:nvSpPr>
+          <p:cNvPr id="17" name="rule-33">
+            <a:extLst xmlns:a="http://schemas.openxmlformats.org/drawingml/2006/main">
+              <a:ext uri="{FF2B5EF4-FFF2-40B4-BE49-F238E27FC236}">
+                <a16:creationId xmlns:a16="http://schemas.microsoft.com/office/drawing/2014/main" id="{B63BA312-5CA4-4DF1-9DBA-66AEE1F12D70}"/>
               </a:ext>
             </a:extLst>
           </p:cNvPr>
@@ -4823,50 +8352,19 @@
         </p:nvSpPr>
         <p:spPr>
           <a:xfrm xmlns:a="http://schemas.openxmlformats.org/drawingml/2006/main">
-            <a:off x="2000250" y="4762500"/>
-            <a:ext cx="8191500" cy="514350"/>
-          </a:xfrm>
-          <a:prstGeom xmlns:a="http://schemas.openxmlformats.org/drawingml/2006/main" prst="rect">
-            <a:avLst/>
-          </a:prstGeom>
-          <a:noFill xmlns:a="http://schemas.openxmlformats.org/drawingml/2006/main"/>
+            <a:off x="609600" y="5429250"/>
+            <a:ext cx="10858500" cy="14288"/>
+          </a:xfrm>
+          <a:prstGeom xmlns:a="http://schemas.openxmlformats.org/drawingml/2006/main" prst="rect">
+            <a:avLst/>
+          </a:prstGeom>
+          <a:solidFill xmlns:a="http://schemas.openxmlformats.org/drawingml/2006/main">
+            <a:srgbClr val="CDD5DB"/>
+          </a:solidFill>
           <a:ln xmlns:a="http://schemas.openxmlformats.org/drawingml/2006/main" w="0">
             <a:noFill/>
           </a:ln>
         </p:spPr>
-        <p:txBody>
-          <a:bodyPr xmlns:a="http://schemas.openxmlformats.org/drawingml/2006/main" lIns="0" tIns="0" rIns="0" bIns="0" anchor="ctr">
-            <a:noAutofit/>
-          </a:bodyPr>
-          <a:lstStyle xmlns:a="http://schemas.openxmlformats.org/drawingml/2006/main"/>
-          <a:p xmlns:a="http://schemas.openxmlformats.org/drawingml/2006/main">
-            <a:pPr algn="l">
-              <a:lnSpc>
-                <a:spcPct val="114000"/>
-              </a:lnSpc>
-              <a:buNone/>
-              <a:defRPr sz="2400" b="0">
-                <a:solidFill>
-                  <a:srgbClr val="27333D"/>
-                </a:solidFill>
-                <a:latin typeface="微软雅黑"/>
-                <a:ea typeface="微软雅黑"/>
-                <a:cs typeface="微软雅黑"/>
-              </a:defRPr>
-            </a:pPr>
-            <a:r>
-              <a:rPr sz="2400" b="0">
-                <a:solidFill>
-                  <a:srgbClr val="27333D"/>
-                </a:solidFill>
-                <a:latin typeface="微软雅黑"/>
-                <a:ea typeface="微软雅黑"/>
-                <a:cs typeface="微软雅黑"/>
-              </a:rPr>
-              <a:t>能指出什么观察会使主张不成立，才进入可检验状态。</a:t>
-            </a:r>
-          </a:p>
-        </p:txBody>
       </p:sp>
     </p:spTree>
     <p:extLst>
@@ -4908,8 +8406,8 @@
         </p:nvSpPr>
         <p:spPr>
           <a:xfrm xmlns:a="http://schemas.openxmlformats.org/drawingml/2006/main">
-            <a:off x="1028700" y="28575"/>
-            <a:ext cx="10668000" cy="628650"/>
+            <a:off x="1028700" y="57150"/>
+            <a:ext cx="10668000" cy="571500"/>
           </a:xfrm>
         </p:spPr>
         <p:txBody>
@@ -4919,6 +8417,9 @@
           <a:lstStyle xmlns:a="http://schemas.openxmlformats.org/drawingml/2006/main"/>
           <a:p xmlns:a="http://schemas.openxmlformats.org/drawingml/2006/main">
             <a:pPr algn="l">
+              <a:lnSpc>
+                <a:spcPct val="118000"/>
+              </a:lnSpc>
               <a:buNone/>
             </a:pPr>
             <a:r>
@@ -4966,10 +8467,10 @@
       </p:sp>
       <p:sp>
         <p:nvSpPr>
-          <p:cNvPr id="6" name="visual-11-0-method">
-            <a:extLst xmlns:a="http://schemas.openxmlformats.org/drawingml/2006/main">
-              <a:ext uri="{FF2B5EF4-FFF2-40B4-BE49-F238E27FC236}">
-                <a16:creationId xmlns:a16="http://schemas.microsoft.com/office/drawing/2014/main" id="{928310D0-4A90-4E25-99A1-C80292445018}"/>
+          <p:cNvPr id="6" name="content-34">
+            <a:extLst xmlns:a="http://schemas.openxmlformats.org/drawingml/2006/main">
+              <a:ext uri="{FF2B5EF4-FFF2-40B4-BE49-F238E27FC236}">
+                <a16:creationId xmlns:a16="http://schemas.microsoft.com/office/drawing/2014/main" id="{A1A7B870-C9CC-499E-8868-0380D1A22BFE}"/>
               </a:ext>
             </a:extLst>
           </p:cNvPr>
@@ -4980,8 +8481,8 @@
         </p:nvSpPr>
         <p:spPr>
           <a:xfrm xmlns:a="http://schemas.openxmlformats.org/drawingml/2006/main">
-            <a:off x="952500" y="876300"/>
-            <a:ext cx="10287000" cy="552450"/>
+            <a:off x="609600" y="1571625"/>
+            <a:ext cx="10972800" cy="432435"/>
           </a:xfrm>
           <a:prstGeom xmlns:a="http://schemas.openxmlformats.org/drawingml/2006/main" prst="rect">
             <a:avLst/>
@@ -4992,14 +8493,12 @@
           </a:ln>
         </p:spPr>
         <p:txBody>
-          <a:bodyPr xmlns:a="http://schemas.openxmlformats.org/drawingml/2006/main" lIns="0" tIns="0" rIns="0" bIns="0" anchor="ctr">
-            <a:noAutofit/>
-          </a:bodyPr>
+          <a:bodyPr xmlns:a="http://schemas.openxmlformats.org/drawingml/2006/main" lIns="0" tIns="0" rIns="0" bIns="0" anchor="t"/>
           <a:lstStyle xmlns:a="http://schemas.openxmlformats.org/drawingml/2006/main"/>
           <a:p xmlns:a="http://schemas.openxmlformats.org/drawingml/2006/main">
             <a:pPr algn="l">
               <a:lnSpc>
-                <a:spcPct val="114000"/>
+                <a:spcPct val="118000"/>
               </a:lnSpc>
               <a:buNone/>
               <a:defRPr sz="2400" b="0">
@@ -5020,17 +8519,17 @@
                 <a:ea typeface="微软雅黑"/>
                 <a:cs typeface="微软雅黑"/>
               </a:rPr>
-              <a:t>Platt 的强推断提醒：同一结果可能有多种解释，需要可区分的检验</a:t>
-            </a:r>
-          </a:p>
-        </p:txBody>
-      </p:sp>
-      <p:sp>
-        <p:nvSpPr>
-          <p:cNvPr id="7" name="visual-11-1-current">
-            <a:extLst xmlns:a="http://schemas.openxmlformats.org/drawingml/2006/main">
-              <a:ext uri="{FF2B5EF4-FFF2-40B4-BE49-F238E27FC236}">
-                <a16:creationId xmlns:a16="http://schemas.microsoft.com/office/drawing/2014/main" id="{9830A17E-8E7C-4366-9A7A-6D08EB003261}"/>
+              <a:t>同一个结果可能有多种解释。</a:t>
+            </a:r>
+          </a:p>
+        </p:txBody>
+      </p:sp>
+      <p:sp>
+        <p:nvSpPr>
+          <p:cNvPr id="7" name="content-35">
+            <a:extLst xmlns:a="http://schemas.openxmlformats.org/drawingml/2006/main">
+              <a:ext uri="{FF2B5EF4-FFF2-40B4-BE49-F238E27FC236}">
+                <a16:creationId xmlns:a16="http://schemas.microsoft.com/office/drawing/2014/main" id="{0B7F5C3E-8456-4AD7-91FC-B7AEE6AEB871}"/>
               </a:ext>
             </a:extLst>
           </p:cNvPr>
@@ -5041,8 +8540,8 @@
         </p:nvSpPr>
         <p:spPr>
           <a:xfrm xmlns:a="http://schemas.openxmlformats.org/drawingml/2006/main">
-            <a:off x="762000" y="1762125"/>
-            <a:ext cx="4953000" cy="2238375"/>
+            <a:off x="609600" y="2261235"/>
+            <a:ext cx="10972800" cy="432435"/>
           </a:xfrm>
           <a:prstGeom xmlns:a="http://schemas.openxmlformats.org/drawingml/2006/main" prst="rect">
             <a:avLst/>
@@ -5053,14 +8552,12 @@
           </a:ln>
         </p:spPr>
         <p:txBody>
-          <a:bodyPr xmlns:a="http://schemas.openxmlformats.org/drawingml/2006/main" lIns="0" tIns="0" rIns="0" bIns="0" anchor="t">
-            <a:noAutofit/>
-          </a:bodyPr>
+          <a:bodyPr xmlns:a="http://schemas.openxmlformats.org/drawingml/2006/main" lIns="0" tIns="0" rIns="0" bIns="0" anchor="t"/>
           <a:lstStyle xmlns:a="http://schemas.openxmlformats.org/drawingml/2006/main"/>
           <a:p xmlns:a="http://schemas.openxmlformats.org/drawingml/2006/main">
             <a:pPr algn="l">
               <a:lnSpc>
-                <a:spcPct val="114000"/>
+                <a:spcPct val="118000"/>
               </a:lnSpc>
               <a:buNone/>
               <a:defRPr sz="2400" b="0">
@@ -5081,76 +8578,17 @@
                 <a:ea typeface="微软雅黑"/>
                 <a:cs typeface="微软雅黑"/>
               </a:rPr>
-              <a:t>当前解释</a:t>
-            </a:r>
-          </a:p>
-          <a:p xmlns:a="http://schemas.openxmlformats.org/drawingml/2006/main">
-            <a:r>
-              <a:t/>
-            </a:r>
-          </a:p>
-          <a:p xmlns:a="http://schemas.openxmlformats.org/drawingml/2006/main">
-            <a:pPr algn="l">
-              <a:lnSpc>
-                <a:spcPct val="114000"/>
-              </a:lnSpc>
-              <a:buNone/>
-              <a:defRPr sz="2400" b="0">
-                <a:solidFill>
-                  <a:srgbClr val="27333D"/>
-                </a:solidFill>
-                <a:latin typeface="微软雅黑"/>
-                <a:ea typeface="微软雅黑"/>
-                <a:cs typeface="微软雅黑"/>
-              </a:defRPr>
-            </a:pPr>
-            <a:r>
-              <a:rPr sz="2400" b="0">
-                <a:solidFill>
-                  <a:srgbClr val="27333D"/>
-                </a:solidFill>
-                <a:latin typeface="微软雅黑"/>
-                <a:ea typeface="微软雅黑"/>
-                <a:cs typeface="微软雅黑"/>
-              </a:rPr>
-              <a:t>阅读卡强制定位原文</a:t>
-            </a:r>
-          </a:p>
-          <a:p xmlns:a="http://schemas.openxmlformats.org/drawingml/2006/main">
-            <a:pPr algn="l">
-              <a:lnSpc>
-                <a:spcPct val="114000"/>
-              </a:lnSpc>
-              <a:buNone/>
-              <a:defRPr sz="2400" b="0">
-                <a:solidFill>
-                  <a:srgbClr val="27333D"/>
-                </a:solidFill>
-                <a:latin typeface="微软雅黑"/>
-                <a:ea typeface="微软雅黑"/>
-                <a:cs typeface="微软雅黑"/>
-              </a:defRPr>
-            </a:pPr>
-            <a:r>
-              <a:rPr sz="2400" b="0">
-                <a:solidFill>
-                  <a:srgbClr val="27333D"/>
-                </a:solidFill>
-                <a:latin typeface="微软雅黑"/>
-                <a:ea typeface="微软雅黑"/>
-                <a:cs typeface="微软雅黑"/>
-              </a:rPr>
-              <a:t>限定条件遗漏因此下降</a:t>
-            </a:r>
-          </a:p>
-        </p:txBody>
-      </p:sp>
-      <p:sp>
-        <p:nvSpPr>
-          <p:cNvPr id="8" name="visual-11-2-alternative">
-            <a:extLst xmlns:a="http://schemas.openxmlformats.org/drawingml/2006/main">
-              <a:ext uri="{FF2B5EF4-FFF2-40B4-BE49-F238E27FC236}">
-                <a16:creationId xmlns:a16="http://schemas.microsoft.com/office/drawing/2014/main" id="{A0C1E509-0643-49AF-8028-B1B382D23261}"/>
+              <a:t>H1 候选：生成时显式列出限定条件，促使输出保留更多。</a:t>
+            </a:r>
+          </a:p>
+        </p:txBody>
+      </p:sp>
+      <p:sp>
+        <p:nvSpPr>
+          <p:cNvPr id="8" name="content-36">
+            <a:extLst xmlns:a="http://schemas.openxmlformats.org/drawingml/2006/main">
+              <a:ext uri="{FF2B5EF4-FFF2-40B4-BE49-F238E27FC236}">
+                <a16:creationId xmlns:a16="http://schemas.microsoft.com/office/drawing/2014/main" id="{56739287-7C3C-43B9-81AD-8763782DBB1A}"/>
               </a:ext>
             </a:extLst>
           </p:cNvPr>
@@ -5161,8 +8599,8 @@
         </p:nvSpPr>
         <p:spPr>
           <a:xfrm xmlns:a="http://schemas.openxmlformats.org/drawingml/2006/main">
-            <a:off x="6477000" y="1762125"/>
-            <a:ext cx="4953000" cy="2238375"/>
+            <a:off x="609600" y="2950845"/>
+            <a:ext cx="10972800" cy="432435"/>
           </a:xfrm>
           <a:prstGeom xmlns:a="http://schemas.openxmlformats.org/drawingml/2006/main" prst="rect">
             <a:avLst/>
@@ -5173,14 +8611,12 @@
           </a:ln>
         </p:spPr>
         <p:txBody>
-          <a:bodyPr xmlns:a="http://schemas.openxmlformats.org/drawingml/2006/main" lIns="0" tIns="0" rIns="0" bIns="0" anchor="t">
-            <a:noAutofit/>
-          </a:bodyPr>
+          <a:bodyPr xmlns:a="http://schemas.openxmlformats.org/drawingml/2006/main" lIns="0" tIns="0" rIns="0" bIns="0" anchor="t"/>
           <a:lstStyle xmlns:a="http://schemas.openxmlformats.org/drawingml/2006/main"/>
           <a:p xmlns:a="http://schemas.openxmlformats.org/drawingml/2006/main">
             <a:pPr algn="l">
               <a:lnSpc>
-                <a:spcPct val="114000"/>
+                <a:spcPct val="118000"/>
               </a:lnSpc>
               <a:buNone/>
               <a:defRPr sz="2400" b="0">
@@ -5201,76 +8637,17 @@
                 <a:ea typeface="微软雅黑"/>
                 <a:cs typeface="微软雅黑"/>
               </a:rPr>
-              <a:t>替代解释标记</a:t>
-            </a:r>
-          </a:p>
-          <a:p xmlns:a="http://schemas.openxmlformats.org/drawingml/2006/main">
-            <a:r>
-              <a:t/>
-            </a:r>
-          </a:p>
-          <a:p xmlns:a="http://schemas.openxmlformats.org/drawingml/2006/main">
-            <a:pPr algn="l">
-              <a:lnSpc>
-                <a:spcPct val="114000"/>
-              </a:lnSpc>
-              <a:buNone/>
-              <a:defRPr sz="2400" b="0">
-                <a:solidFill>
-                  <a:srgbClr val="27333D"/>
-                </a:solidFill>
-                <a:latin typeface="微软雅黑"/>
-                <a:ea typeface="微软雅黑"/>
-                <a:cs typeface="微软雅黑"/>
-              </a:defRPr>
-            </a:pPr>
-            <a:r>
-              <a:rPr sz="2400" b="0">
-                <a:solidFill>
-                  <a:srgbClr val="27333D"/>
-                </a:solidFill>
-                <a:latin typeface="微软雅黑"/>
-                <a:ea typeface="微软雅黑"/>
-                <a:cs typeface="微软雅黑"/>
-              </a:rPr>
-              <a:t>评价者看到字段提示后更容易标注限定条件</a:t>
-            </a:r>
-          </a:p>
-          <a:p xmlns:a="http://schemas.openxmlformats.org/drawingml/2006/main">
-            <a:pPr algn="l">
-              <a:lnSpc>
-                <a:spcPct val="114000"/>
-              </a:lnSpc>
-              <a:buNone/>
-              <a:defRPr sz="2400" b="0">
-                <a:solidFill>
-                  <a:srgbClr val="27333D"/>
-                </a:solidFill>
-                <a:latin typeface="微软雅黑"/>
-                <a:ea typeface="微软雅黑"/>
-                <a:cs typeface="微软雅黑"/>
-              </a:defRPr>
-            </a:pPr>
-            <a:r>
-              <a:rPr sz="2400" b="0">
-                <a:solidFill>
-                  <a:srgbClr val="27333D"/>
-                </a:solidFill>
-                <a:latin typeface="微软雅黑"/>
-                <a:ea typeface="微软雅黑"/>
-                <a:cs typeface="微软雅黑"/>
-              </a:rPr>
-              <a:t>差异可能来自评价提示，而非摘要本身</a:t>
-            </a:r>
-          </a:p>
-        </p:txBody>
-      </p:sp>
-      <p:sp>
-        <p:nvSpPr>
-          <p:cNvPr id="9" name="visual-11-3-handoff">
-            <a:extLst xmlns:a="http://schemas.openxmlformats.org/drawingml/2006/main">
-              <a:ext uri="{FF2B5EF4-FFF2-40B4-BE49-F238E27FC236}">
-                <a16:creationId xmlns:a16="http://schemas.microsoft.com/office/drawing/2014/main" id="{A1F35FD2-58E0-48D2-9E4C-002AB52812C8}"/>
+              <a:t>A2 候选：评分者看到字段提示，更容易给出保留分。</a:t>
+            </a:r>
+          </a:p>
+        </p:txBody>
+      </p:sp>
+      <p:sp>
+        <p:nvSpPr>
+          <p:cNvPr id="9" name="content-37">
+            <a:extLst xmlns:a="http://schemas.openxmlformats.org/drawingml/2006/main">
+              <a:ext uri="{FF2B5EF4-FFF2-40B4-BE49-F238E27FC236}">
+                <a16:creationId xmlns:a16="http://schemas.microsoft.com/office/drawing/2014/main" id="{E15E34A6-FFD3-471A-9A20-CCC40E6B61B6}"/>
               </a:ext>
             </a:extLst>
           </p:cNvPr>
@@ -5281,8 +8658,8 @@
         </p:nvSpPr>
         <p:spPr>
           <a:xfrm xmlns:a="http://schemas.openxmlformats.org/drawingml/2006/main">
-            <a:off x="1190625" y="4476750"/>
-            <a:ext cx="9810750" cy="666750"/>
+            <a:off x="609600" y="3640455"/>
+            <a:ext cx="10972800" cy="432435"/>
           </a:xfrm>
           <a:prstGeom xmlns:a="http://schemas.openxmlformats.org/drawingml/2006/main" prst="rect">
             <a:avLst/>
@@ -5293,19 +8670,17 @@
           </a:ln>
         </p:spPr>
         <p:txBody>
-          <a:bodyPr xmlns:a="http://schemas.openxmlformats.org/drawingml/2006/main" lIns="0" tIns="0" rIns="0" bIns="0" anchor="t">
-            <a:noAutofit/>
-          </a:bodyPr>
+          <a:bodyPr xmlns:a="http://schemas.openxmlformats.org/drawingml/2006/main" lIns="0" tIns="0" rIns="0" bIns="0" anchor="t"/>
           <a:lstStyle xmlns:a="http://schemas.openxmlformats.org/drawingml/2006/main"/>
           <a:p xmlns:a="http://schemas.openxmlformats.org/drawingml/2006/main">
             <a:pPr algn="l">
               <a:lnSpc>
-                <a:spcPct val="114000"/>
+                <a:spcPct val="118000"/>
               </a:lnSpc>
               <a:buNone/>
               <a:defRPr sz="2400" b="0">
                 <a:solidFill>
-                  <a:srgbClr val="27333D"/>
+                  <a:srgbClr val="1F4D78"/>
                 </a:solidFill>
                 <a:latin typeface="微软雅黑"/>
                 <a:ea typeface="微软雅黑"/>
@@ -5315,74 +8690,13 @@
             <a:r>
               <a:rPr sz="2400" b="0">
                 <a:solidFill>
-                  <a:srgbClr val="27333D"/>
-                </a:solidFill>
-                <a:latin typeface="微软雅黑"/>
-                <a:ea typeface="微软雅黑"/>
-                <a:cs typeface="微软雅黑"/>
-              </a:rPr>
-              <a:t>本课只留下标记｜第 7 课再编号 H1/A1/A2/A3，并设计可区分结果</a:t>
-            </a:r>
-          </a:p>
-        </p:txBody>
-      </p:sp>
-      <p:sp>
-        <p:nvSpPr>
-          <p:cNvPr id="10" name="visual-11-4-source">
-            <a:extLst xmlns:a="http://schemas.openxmlformats.org/drawingml/2006/main">
-              <a:ext uri="{FF2B5EF4-FFF2-40B4-BE49-F238E27FC236}">
-                <a16:creationId xmlns:a16="http://schemas.microsoft.com/office/drawing/2014/main" id="{2BB8AD49-D13E-4F1A-B16E-677AB57CF1D3}"/>
-              </a:ext>
-            </a:extLst>
-          </p:cNvPr>
-          <p:cNvSpPr>
-            <a:spLocks xmlns:a="http://schemas.openxmlformats.org/drawingml/2006/main" noGrp="1"/>
-          </p:cNvSpPr>
-          <p:nvPr/>
-        </p:nvSpPr>
-        <p:spPr>
-          <a:xfrm xmlns:a="http://schemas.openxmlformats.org/drawingml/2006/main">
-            <a:off x="1619250" y="5334000"/>
-            <a:ext cx="8953500" cy="361950"/>
-          </a:xfrm>
-          <a:prstGeom xmlns:a="http://schemas.openxmlformats.org/drawingml/2006/main" prst="rect">
-            <a:avLst/>
-          </a:prstGeom>
-          <a:noFill xmlns:a="http://schemas.openxmlformats.org/drawingml/2006/main"/>
-          <a:ln xmlns:a="http://schemas.openxmlformats.org/drawingml/2006/main" w="0">
-            <a:noFill/>
-          </a:ln>
-        </p:spPr>
-        <p:txBody>
-          <a:bodyPr xmlns:a="http://schemas.openxmlformats.org/drawingml/2006/main" lIns="0" tIns="0" rIns="0" bIns="0" anchor="ctr">
-            <a:noAutofit/>
-          </a:bodyPr>
-          <a:lstStyle xmlns:a="http://schemas.openxmlformats.org/drawingml/2006/main"/>
-          <a:p xmlns:a="http://schemas.openxmlformats.org/drawingml/2006/main">
-            <a:pPr algn="l">
-              <a:lnSpc>
-                <a:spcPct val="114000"/>
-              </a:lnSpc>
-              <a:buNone/>
-              <a:defRPr sz="1100" b="0">
-                <a:solidFill>
-                  <a:srgbClr val="66727D"/>
-                </a:solidFill>
-                <a:latin typeface="微软雅黑"/>
-                <a:ea typeface="微软雅黑"/>
-                <a:cs typeface="微软雅黑"/>
-              </a:defRPr>
-            </a:pPr>
-            <a:r>
-              <a:rPr sz="1100" b="0">
-                <a:solidFill>
-                  <a:srgbClr val="66727D"/>
-                </a:solidFill>
-                <a:latin typeface="微软雅黑"/>
-                <a:ea typeface="微软雅黑"/>
-                <a:cs typeface="微软雅黑"/>
-              </a:rPr>
-              <a:t>来源：第 6 课讲义 §三·3｜Platt, Strong Inference</a:t>
+                  <a:srgbClr val="1F4D78"/>
+                </a:solidFill>
+                <a:latin typeface="微软雅黑"/>
+                <a:ea typeface="微软雅黑"/>
+                <a:cs typeface="微软雅黑"/>
+              </a:rPr>
+              <a:t>第 7 课把候选解释变成可区分的观察。</a:t>
             </a:r>
           </a:p>
         </p:txBody>
@@ -6961,8 +10275,8 @@
         </p:nvSpPr>
         <p:spPr>
           <a:xfrm xmlns:a="http://schemas.openxmlformats.org/drawingml/2006/main">
-            <a:off x="1028700" y="28575"/>
-            <a:ext cx="10668000" cy="628650"/>
+            <a:off x="1028700" y="57150"/>
+            <a:ext cx="10668000" cy="571500"/>
           </a:xfrm>
         </p:spPr>
         <p:txBody>
@@ -6972,6 +10286,9 @@
           <a:lstStyle xmlns:a="http://schemas.openxmlformats.org/drawingml/2006/main"/>
           <a:p xmlns:a="http://schemas.openxmlformats.org/drawingml/2006/main">
             <a:pPr algn="l">
+              <a:lnSpc>
+                <a:spcPct val="118000"/>
+              </a:lnSpc>
               <a:buNone/>
             </a:pPr>
             <a:r>
@@ -7019,10 +10336,10 @@
       </p:sp>
       <p:sp>
         <p:nvSpPr>
-          <p:cNvPr id="6" name="fiction">
-            <a:extLst xmlns:a="http://schemas.openxmlformats.org/drawingml/2006/main">
-              <a:ext uri="{FF2B5EF4-FFF2-40B4-BE49-F238E27FC236}">
-                <a16:creationId xmlns:a16="http://schemas.microsoft.com/office/drawing/2014/main" id="{AD0166E1-BC37-4290-B364-CC8B83CF8720}"/>
+          <p:cNvPr id="6" name="content-38">
+            <a:extLst xmlns:a="http://schemas.openxmlformats.org/drawingml/2006/main">
+              <a:ext uri="{FF2B5EF4-FFF2-40B4-BE49-F238E27FC236}">
+                <a16:creationId xmlns:a16="http://schemas.microsoft.com/office/drawing/2014/main" id="{276B7BEB-1B89-4887-A33C-E193E5580B58}"/>
               </a:ext>
             </a:extLst>
           </p:cNvPr>
@@ -7033,8 +10350,8 @@
         </p:nvSpPr>
         <p:spPr>
           <a:xfrm xmlns:a="http://schemas.openxmlformats.org/drawingml/2006/main">
-            <a:off x="609600" y="885825"/>
-            <a:ext cx="10572750" cy="314325"/>
+            <a:off x="609600" y="1571625"/>
+            <a:ext cx="10972800" cy="432435"/>
           </a:xfrm>
           <a:prstGeom xmlns:a="http://schemas.openxmlformats.org/drawingml/2006/main" prst="rect">
             <a:avLst/>
@@ -7053,35 +10370,35 @@
                 <a:spcPct val="118000"/>
               </a:lnSpc>
               <a:buNone/>
-              <a:defRPr sz="1800" b="0">
-                <a:solidFill>
-                  <a:srgbClr val="A96510"/>
-                </a:solidFill>
-                <a:latin typeface="微软雅黑"/>
-                <a:ea typeface="微软雅黑"/>
-                <a:cs typeface="微软雅黑"/>
-              </a:defRPr>
-            </a:pPr>
-            <a:r>
-              <a:rPr sz="1800" b="0">
-                <a:solidFill>
-                  <a:srgbClr val="A96510"/>
-                </a:solidFill>
-                <a:latin typeface="微软雅黑"/>
-                <a:ea typeface="微软雅黑"/>
-                <a:cs typeface="微软雅黑"/>
-              </a:rPr>
-              <a:t>虚构教学案例｜实验尚未运行</a:t>
-            </a:r>
-          </a:p>
-        </p:txBody>
-      </p:sp>
-      <p:sp>
-        <p:nvSpPr>
-          <p:cNvPr id="7" name="p14-question">
-            <a:extLst xmlns:a="http://schemas.openxmlformats.org/drawingml/2006/main">
-              <a:ext uri="{FF2B5EF4-FFF2-40B4-BE49-F238E27FC236}">
-                <a16:creationId xmlns:a16="http://schemas.microsoft.com/office/drawing/2014/main" id="{DD197298-B616-481C-A322-C1AF7B31D0EF}"/>
+              <a:defRPr sz="2400" b="0">
+                <a:solidFill>
+                  <a:srgbClr val="27333D"/>
+                </a:solidFill>
+                <a:latin typeface="微软雅黑"/>
+                <a:ea typeface="微软雅黑"/>
+                <a:cs typeface="微软雅黑"/>
+              </a:defRPr>
+            </a:pPr>
+            <a:r>
+              <a:rPr sz="2400" b="0">
+                <a:solidFill>
+                  <a:srgbClr val="27333D"/>
+                </a:solidFill>
+                <a:latin typeface="微软雅黑"/>
+                <a:ea typeface="微软雅黑"/>
+                <a:cs typeface="微软雅黑"/>
+              </a:rPr>
+              <a:t>问题：阅读卡是否降低限定条件遗漏率？</a:t>
+            </a:r>
+          </a:p>
+        </p:txBody>
+      </p:sp>
+      <p:sp>
+        <p:nvSpPr>
+          <p:cNvPr id="7" name="content-39">
+            <a:extLst xmlns:a="http://schemas.openxmlformats.org/drawingml/2006/main">
+              <a:ext uri="{FF2B5EF4-FFF2-40B4-BE49-F238E27FC236}">
+                <a16:creationId xmlns:a16="http://schemas.microsoft.com/office/drawing/2014/main" id="{75C4DFB7-12A8-4238-9BCE-2080E71E0771}"/>
               </a:ext>
             </a:extLst>
           </p:cNvPr>
@@ -7092,8 +10409,8 @@
         </p:nvSpPr>
         <p:spPr>
           <a:xfrm xmlns:a="http://schemas.openxmlformats.org/drawingml/2006/main">
-            <a:off x="609600" y="1438275"/>
-            <a:ext cx="10668000" cy="1000125"/>
+            <a:off x="609600" y="2261235"/>
+            <a:ext cx="10972800" cy="432435"/>
           </a:xfrm>
           <a:prstGeom xmlns:a="http://schemas.openxmlformats.org/drawingml/2006/main" prst="rect">
             <a:avLst/>
@@ -7107,67 +10424,40 @@
           <a:bodyPr xmlns:a="http://schemas.openxmlformats.org/drawingml/2006/main" lIns="0" tIns="0" rIns="0" bIns="0" anchor="t"/>
           <a:lstStyle xmlns:a="http://schemas.openxmlformats.org/drawingml/2006/main"/>
           <a:p xmlns:a="http://schemas.openxmlformats.org/drawingml/2006/main">
-            <a:pPr algn="ctr">
+            <a:pPr algn="l">
               <a:lnSpc>
                 <a:spcPct val="118000"/>
               </a:lnSpc>
               <a:buNone/>
-              <a:defRPr sz="3000" b="1">
-                <a:solidFill>
-                  <a:srgbClr val="1F4D78"/>
-                </a:solidFill>
-                <a:latin typeface="微软雅黑"/>
-                <a:ea typeface="微软雅黑"/>
-                <a:cs typeface="微软雅黑"/>
-              </a:defRPr>
-            </a:pPr>
-            <a:r>
-              <a:rPr sz="3000" b="1">
-                <a:solidFill>
-                  <a:srgbClr val="1F4D78"/>
-                </a:solidFill>
-                <a:latin typeface="微软雅黑"/>
-                <a:ea typeface="微软雅黑"/>
-                <a:cs typeface="微软雅黑"/>
-              </a:rPr>
-              <a:t>结构化阅读卡是否降低 AI 摘要的</a:t>
-            </a:r>
-          </a:p>
-          <a:p xmlns:a="http://schemas.openxmlformats.org/drawingml/2006/main">
-            <a:pPr algn="ctr">
-              <a:lnSpc>
-                <a:spcPct val="118000"/>
-              </a:lnSpc>
-              <a:buNone/>
-              <a:defRPr sz="3000" b="1">
-                <a:solidFill>
-                  <a:srgbClr val="1F4D78"/>
-                </a:solidFill>
-                <a:latin typeface="微软雅黑"/>
-                <a:ea typeface="微软雅黑"/>
-                <a:cs typeface="微软雅黑"/>
-              </a:defRPr>
-            </a:pPr>
-            <a:r>
-              <a:rPr sz="3000" b="1">
-                <a:solidFill>
-                  <a:srgbClr val="1F4D78"/>
-                </a:solidFill>
-                <a:latin typeface="微软雅黑"/>
-                <a:ea typeface="微软雅黑"/>
-                <a:cs typeface="微软雅黑"/>
-              </a:rPr>
-              <a:t>限定条件遗漏率？</a:t>
-            </a:r>
-          </a:p>
-        </p:txBody>
-      </p:sp>
-      <p:sp>
-        <p:nvSpPr>
-          <p:cNvPr id="8" name="p14-q-rule">
-            <a:extLst xmlns:a="http://schemas.openxmlformats.org/drawingml/2006/main">
-              <a:ext uri="{FF2B5EF4-FFF2-40B4-BE49-F238E27FC236}">
-                <a16:creationId xmlns:a16="http://schemas.microsoft.com/office/drawing/2014/main" id="{515618DB-09F3-41EE-B457-124D4F706B54}"/>
+              <a:defRPr sz="2400" b="0">
+                <a:solidFill>
+                  <a:srgbClr val="27333D"/>
+                </a:solidFill>
+                <a:latin typeface="微软雅黑"/>
+                <a:ea typeface="微软雅黑"/>
+                <a:cs typeface="微软雅黑"/>
+              </a:defRPr>
+            </a:pPr>
+            <a:r>
+              <a:rPr sz="2400" b="0">
+                <a:solidFill>
+                  <a:srgbClr val="27333D"/>
+                </a:solidFill>
+                <a:latin typeface="微软雅黑"/>
+                <a:ea typeface="微软雅黑"/>
+                <a:cs typeface="微软雅黑"/>
+              </a:rPr>
+              <a:t>条件：同一材料分别进入阅读卡与自由摘要。</a:t>
+            </a:r>
+          </a:p>
+        </p:txBody>
+      </p:sp>
+      <p:sp>
+        <p:nvSpPr>
+          <p:cNvPr id="8" name="content-40">
+            <a:extLst xmlns:a="http://schemas.openxmlformats.org/drawingml/2006/main">
+              <a:ext uri="{FF2B5EF4-FFF2-40B4-BE49-F238E27FC236}">
+                <a16:creationId xmlns:a16="http://schemas.microsoft.com/office/drawing/2014/main" id="{F915D4E2-386C-41C6-A15D-1733118CB227}"/>
               </a:ext>
             </a:extLst>
           </p:cNvPr>
@@ -7178,38 +10468,8 @@
         </p:nvSpPr>
         <p:spPr>
           <a:xfrm xmlns:a="http://schemas.openxmlformats.org/drawingml/2006/main">
-            <a:off x="1714500" y="2619375"/>
-            <a:ext cx="8763000" cy="14288"/>
-          </a:xfrm>
-          <a:prstGeom xmlns:a="http://schemas.openxmlformats.org/drawingml/2006/main" prst="rect">
-            <a:avLst/>
-          </a:prstGeom>
-          <a:solidFill xmlns:a="http://schemas.openxmlformats.org/drawingml/2006/main">
-            <a:srgbClr val="1F4D78"/>
-          </a:solidFill>
-          <a:ln xmlns:a="http://schemas.openxmlformats.org/drawingml/2006/main" w="0">
-            <a:noFill/>
-          </a:ln>
-        </p:spPr>
-      </p:sp>
-      <p:sp>
-        <p:nvSpPr>
-          <p:cNvPr id="9" name="p14-label-0">
-            <a:extLst xmlns:a="http://schemas.openxmlformats.org/drawingml/2006/main">
-              <a:ext uri="{FF2B5EF4-FFF2-40B4-BE49-F238E27FC236}">
-                <a16:creationId xmlns:a16="http://schemas.microsoft.com/office/drawing/2014/main" id="{11E7ACFD-1E2D-460B-948C-729498706EBC}"/>
-              </a:ext>
-            </a:extLst>
-          </p:cNvPr>
-          <p:cNvSpPr>
-            <a:spLocks xmlns:a="http://schemas.openxmlformats.org/drawingml/2006/main" noGrp="1"/>
-          </p:cNvSpPr>
-          <p:nvPr/>
-        </p:nvSpPr>
-        <p:spPr>
-          <a:xfrm xmlns:a="http://schemas.openxmlformats.org/drawingml/2006/main">
-            <a:off x="609600" y="2981325"/>
-            <a:ext cx="3095625" cy="361950"/>
+            <a:off x="609600" y="2950845"/>
+            <a:ext cx="10972800" cy="432435"/>
           </a:xfrm>
           <a:prstGeom xmlns:a="http://schemas.openxmlformats.org/drawingml/2006/main" prst="rect">
             <a:avLst/>
@@ -7228,35 +10488,35 @@
                 <a:spcPct val="118000"/>
               </a:lnSpc>
               <a:buNone/>
-              <a:defRPr sz="2000" b="1">
-                <a:solidFill>
-                  <a:srgbClr val="1F4D78"/>
-                </a:solidFill>
-                <a:latin typeface="微软雅黑"/>
-                <a:ea typeface="微软雅黑"/>
-                <a:cs typeface="微软雅黑"/>
-              </a:defRPr>
-            </a:pPr>
-            <a:r>
-              <a:rPr sz="2000" b="1">
-                <a:solidFill>
-                  <a:srgbClr val="1F4D78"/>
-                </a:solidFill>
-                <a:latin typeface="微软雅黑"/>
-                <a:ea typeface="微软雅黑"/>
-                <a:cs typeface="微软雅黑"/>
-              </a:rPr>
-              <a:t>条件</a:t>
-            </a:r>
-          </a:p>
-        </p:txBody>
-      </p:sp>
-      <p:sp>
-        <p:nvSpPr>
-          <p:cNvPr id="10" name="p14-value-0">
-            <a:extLst xmlns:a="http://schemas.openxmlformats.org/drawingml/2006/main">
-              <a:ext uri="{FF2B5EF4-FFF2-40B4-BE49-F238E27FC236}">
-                <a16:creationId xmlns:a16="http://schemas.microsoft.com/office/drawing/2014/main" id="{48BC6A2C-E837-4B0B-9ED0-391D750DC25F}"/>
+              <a:defRPr sz="2400" b="0">
+                <a:solidFill>
+                  <a:srgbClr val="27333D"/>
+                </a:solidFill>
+                <a:latin typeface="微软雅黑"/>
+                <a:ea typeface="微软雅黑"/>
+                <a:cs typeface="微软雅黑"/>
+              </a:defRPr>
+            </a:pPr>
+            <a:r>
+              <a:rPr sz="2400" b="0">
+                <a:solidFill>
+                  <a:srgbClr val="27333D"/>
+                </a:solidFill>
+                <a:latin typeface="微软雅黑"/>
+                <a:ea typeface="微软雅黑"/>
+                <a:cs typeface="微软雅黑"/>
+              </a:rPr>
+              <a:t>指标：相对人工复核基准，计算缺失条件比例。</a:t>
+            </a:r>
+          </a:p>
+        </p:txBody>
+      </p:sp>
+      <p:sp>
+        <p:nvSpPr>
+          <p:cNvPr id="9" name="content-41">
+            <a:extLst xmlns:a="http://schemas.openxmlformats.org/drawingml/2006/main">
+              <a:ext uri="{FF2B5EF4-FFF2-40B4-BE49-F238E27FC236}">
+                <a16:creationId xmlns:a16="http://schemas.microsoft.com/office/drawing/2014/main" id="{FA00598B-938B-4A00-BDC3-253B7311B094}"/>
               </a:ext>
             </a:extLst>
           </p:cNvPr>
@@ -7267,8 +10527,8 @@
         </p:nvSpPr>
         <p:spPr>
           <a:xfrm xmlns:a="http://schemas.openxmlformats.org/drawingml/2006/main">
-            <a:off x="609600" y="3495675"/>
-            <a:ext cx="3095625" cy="952500"/>
+            <a:off x="609600" y="3640455"/>
+            <a:ext cx="10972800" cy="432435"/>
           </a:xfrm>
           <a:prstGeom xmlns:a="http://schemas.openxmlformats.org/drawingml/2006/main" prst="rect">
             <a:avLst/>
@@ -7287,7 +10547,7 @@
                 <a:spcPct val="118000"/>
               </a:lnSpc>
               <a:buNone/>
-              <a:defRPr sz="2200" b="0">
+              <a:defRPr sz="2400" b="0">
                 <a:solidFill>
                   <a:srgbClr val="27333D"/>
                 </a:solidFill>
@@ -7297,7 +10557,7 @@
               </a:defRPr>
             </a:pPr>
             <a:r>
-              <a:rPr sz="2200" b="0">
+              <a:rPr sz="2400" b="0">
                 <a:solidFill>
                   <a:srgbClr val="27333D"/>
                 </a:solidFill>
@@ -7305,17 +10565,17 @@
                 <a:ea typeface="微软雅黑"/>
                 <a:cs typeface="微软雅黑"/>
               </a:rPr>
-              <a:t>同一批论文分别进入阅读卡与自由摘要</a:t>
-            </a:r>
-          </a:p>
-        </p:txBody>
-      </p:sp>
-      <p:sp>
-        <p:nvSpPr>
-          <p:cNvPr id="11" name="p14-label-1">
-            <a:extLst xmlns:a="http://schemas.openxmlformats.org/drawingml/2006/main">
-              <a:ext uri="{FF2B5EF4-FFF2-40B4-BE49-F238E27FC236}">
-                <a16:creationId xmlns:a16="http://schemas.microsoft.com/office/drawing/2014/main" id="{0F7DA84C-F0C1-4713-B78B-51E7551C2723}"/>
+              <a:t>未决：输出确实保留更多，还是评分提示改变得分？</a:t>
+            </a:r>
+          </a:p>
+        </p:txBody>
+      </p:sp>
+      <p:sp>
+        <p:nvSpPr>
+          <p:cNvPr id="10" name="content-42">
+            <a:extLst xmlns:a="http://schemas.openxmlformats.org/drawingml/2006/main">
+              <a:ext uri="{FF2B5EF4-FFF2-40B4-BE49-F238E27FC236}">
+                <a16:creationId xmlns:a16="http://schemas.microsoft.com/office/drawing/2014/main" id="{E718AA39-C1AF-4B64-B4AA-B17950CD73B4}"/>
               </a:ext>
             </a:extLst>
           </p:cNvPr>
@@ -7326,8 +10586,8 @@
         </p:nvSpPr>
         <p:spPr>
           <a:xfrm xmlns:a="http://schemas.openxmlformats.org/drawingml/2006/main">
-            <a:off x="4324350" y="2981325"/>
-            <a:ext cx="3095625" cy="361950"/>
+            <a:off x="609600" y="4330065"/>
+            <a:ext cx="10972800" cy="432435"/>
           </a:xfrm>
           <a:prstGeom xmlns:a="http://schemas.openxmlformats.org/drawingml/2006/main" prst="rect">
             <a:avLst/>
@@ -7346,7 +10606,7 @@
                 <a:spcPct val="118000"/>
               </a:lnSpc>
               <a:buNone/>
-              <a:defRPr sz="2000" b="1">
+              <a:defRPr sz="2400" b="0">
                 <a:solidFill>
                   <a:srgbClr val="1F4D78"/>
                 </a:solidFill>
@@ -7356,7 +10616,7 @@
               </a:defRPr>
             </a:pPr>
             <a:r>
-              <a:rPr sz="2000" b="1">
+              <a:rPr sz="2400" b="0">
                 <a:solidFill>
                   <a:srgbClr val="1F4D78"/>
                 </a:solidFill>
@@ -7364,302 +10624,7 @@
                 <a:ea typeface="微软雅黑"/>
                 <a:cs typeface="微软雅黑"/>
               </a:rPr>
-              <a:t>指标</a:t>
-            </a:r>
-          </a:p>
-        </p:txBody>
-      </p:sp>
-      <p:sp>
-        <p:nvSpPr>
-          <p:cNvPr id="12" name="p14-value-1">
-            <a:extLst xmlns:a="http://schemas.openxmlformats.org/drawingml/2006/main">
-              <a:ext uri="{FF2B5EF4-FFF2-40B4-BE49-F238E27FC236}">
-                <a16:creationId xmlns:a16="http://schemas.microsoft.com/office/drawing/2014/main" id="{291AB164-09B9-458F-9BB6-6D26C33BBA35}"/>
-              </a:ext>
-            </a:extLst>
-          </p:cNvPr>
-          <p:cNvSpPr>
-            <a:spLocks xmlns:a="http://schemas.openxmlformats.org/drawingml/2006/main" noGrp="1"/>
-          </p:cNvSpPr>
-          <p:nvPr/>
-        </p:nvSpPr>
-        <p:spPr>
-          <a:xfrm xmlns:a="http://schemas.openxmlformats.org/drawingml/2006/main">
-            <a:off x="4324350" y="3495675"/>
-            <a:ext cx="3095625" cy="952500"/>
-          </a:xfrm>
-          <a:prstGeom xmlns:a="http://schemas.openxmlformats.org/drawingml/2006/main" prst="rect">
-            <a:avLst/>
-          </a:prstGeom>
-          <a:noFill xmlns:a="http://schemas.openxmlformats.org/drawingml/2006/main"/>
-          <a:ln xmlns:a="http://schemas.openxmlformats.org/drawingml/2006/main" w="0">
-            <a:noFill/>
-          </a:ln>
-        </p:spPr>
-        <p:txBody>
-          <a:bodyPr xmlns:a="http://schemas.openxmlformats.org/drawingml/2006/main" lIns="0" tIns="0" rIns="0" bIns="0" anchor="t"/>
-          <a:lstStyle xmlns:a="http://schemas.openxmlformats.org/drawingml/2006/main"/>
-          <a:p xmlns:a="http://schemas.openxmlformats.org/drawingml/2006/main">
-            <a:pPr algn="l">
-              <a:lnSpc>
-                <a:spcPct val="118000"/>
-              </a:lnSpc>
-              <a:buNone/>
-              <a:defRPr sz="2200" b="0">
-                <a:solidFill>
-                  <a:srgbClr val="27333D"/>
-                </a:solidFill>
-                <a:latin typeface="微软雅黑"/>
-                <a:ea typeface="微软雅黑"/>
-                <a:cs typeface="微软雅黑"/>
-              </a:defRPr>
-            </a:pPr>
-            <a:r>
-              <a:rPr sz="2200" b="0">
-                <a:solidFill>
-                  <a:srgbClr val="27333D"/>
-                </a:solidFill>
-                <a:latin typeface="微软雅黑"/>
-                <a:ea typeface="微软雅黑"/>
-                <a:cs typeface="微软雅黑"/>
-              </a:rPr>
-              <a:t>依据人工建立并复核的限定条件基准计算遗漏率</a:t>
-            </a:r>
-          </a:p>
-        </p:txBody>
-      </p:sp>
-      <p:sp>
-        <p:nvSpPr>
-          <p:cNvPr id="13" name="p14-label-2">
-            <a:extLst xmlns:a="http://schemas.openxmlformats.org/drawingml/2006/main">
-              <a:ext uri="{FF2B5EF4-FFF2-40B4-BE49-F238E27FC236}">
-                <a16:creationId xmlns:a16="http://schemas.microsoft.com/office/drawing/2014/main" id="{717F903D-FADF-4B5C-BA7D-9252C252AAAA}"/>
-              </a:ext>
-            </a:extLst>
-          </p:cNvPr>
-          <p:cNvSpPr>
-            <a:spLocks xmlns:a="http://schemas.openxmlformats.org/drawingml/2006/main" noGrp="1"/>
-          </p:cNvSpPr>
-          <p:nvPr/>
-        </p:nvSpPr>
-        <p:spPr>
-          <a:xfrm xmlns:a="http://schemas.openxmlformats.org/drawingml/2006/main">
-            <a:off x="8039100" y="2981325"/>
-            <a:ext cx="3095625" cy="361950"/>
-          </a:xfrm>
-          <a:prstGeom xmlns:a="http://schemas.openxmlformats.org/drawingml/2006/main" prst="rect">
-            <a:avLst/>
-          </a:prstGeom>
-          <a:noFill xmlns:a="http://schemas.openxmlformats.org/drawingml/2006/main"/>
-          <a:ln xmlns:a="http://schemas.openxmlformats.org/drawingml/2006/main" w="0">
-            <a:noFill/>
-          </a:ln>
-        </p:spPr>
-        <p:txBody>
-          <a:bodyPr xmlns:a="http://schemas.openxmlformats.org/drawingml/2006/main" lIns="0" tIns="0" rIns="0" bIns="0" anchor="t"/>
-          <a:lstStyle xmlns:a="http://schemas.openxmlformats.org/drawingml/2006/main"/>
-          <a:p xmlns:a="http://schemas.openxmlformats.org/drawingml/2006/main">
-            <a:pPr algn="l">
-              <a:lnSpc>
-                <a:spcPct val="118000"/>
-              </a:lnSpc>
-              <a:buNone/>
-              <a:defRPr sz="2000" b="1">
-                <a:solidFill>
-                  <a:srgbClr val="A96510"/>
-                </a:solidFill>
-                <a:latin typeface="微软雅黑"/>
-                <a:ea typeface="微软雅黑"/>
-                <a:cs typeface="微软雅黑"/>
-              </a:defRPr>
-            </a:pPr>
-            <a:r>
-              <a:rPr sz="2000" b="1">
-                <a:solidFill>
-                  <a:srgbClr val="A96510"/>
-                </a:solidFill>
-                <a:latin typeface="微软雅黑"/>
-                <a:ea typeface="微软雅黑"/>
-                <a:cs typeface="微软雅黑"/>
-              </a:rPr>
-              <a:t>未决解释</a:t>
-            </a:r>
-          </a:p>
-        </p:txBody>
-      </p:sp>
-      <p:sp>
-        <p:nvSpPr>
-          <p:cNvPr id="14" name="p14-value-2">
-            <a:extLst xmlns:a="http://schemas.openxmlformats.org/drawingml/2006/main">
-              <a:ext uri="{FF2B5EF4-FFF2-40B4-BE49-F238E27FC236}">
-                <a16:creationId xmlns:a16="http://schemas.microsoft.com/office/drawing/2014/main" id="{21640B29-DBC9-4413-A58A-320CD3BE853B}"/>
-              </a:ext>
-            </a:extLst>
-          </p:cNvPr>
-          <p:cNvSpPr>
-            <a:spLocks xmlns:a="http://schemas.openxmlformats.org/drawingml/2006/main" noGrp="1"/>
-          </p:cNvSpPr>
-          <p:nvPr/>
-        </p:nvSpPr>
-        <p:spPr>
-          <a:xfrm xmlns:a="http://schemas.openxmlformats.org/drawingml/2006/main">
-            <a:off x="8039100" y="3495675"/>
-            <a:ext cx="3095625" cy="952500"/>
-          </a:xfrm>
-          <a:prstGeom xmlns:a="http://schemas.openxmlformats.org/drawingml/2006/main" prst="rect">
-            <a:avLst/>
-          </a:prstGeom>
-          <a:noFill xmlns:a="http://schemas.openxmlformats.org/drawingml/2006/main"/>
-          <a:ln xmlns:a="http://schemas.openxmlformats.org/drawingml/2006/main" w="0">
-            <a:noFill/>
-          </a:ln>
-        </p:spPr>
-        <p:txBody>
-          <a:bodyPr xmlns:a="http://schemas.openxmlformats.org/drawingml/2006/main" lIns="0" tIns="0" rIns="0" bIns="0" anchor="t"/>
-          <a:lstStyle xmlns:a="http://schemas.openxmlformats.org/drawingml/2006/main"/>
-          <a:p xmlns:a="http://schemas.openxmlformats.org/drawingml/2006/main">
-            <a:pPr algn="l">
-              <a:lnSpc>
-                <a:spcPct val="118000"/>
-              </a:lnSpc>
-              <a:buNone/>
-              <a:defRPr sz="2200" b="0">
-                <a:solidFill>
-                  <a:srgbClr val="27333D"/>
-                </a:solidFill>
-                <a:latin typeface="微软雅黑"/>
-                <a:ea typeface="微软雅黑"/>
-                <a:cs typeface="微软雅黑"/>
-              </a:defRPr>
-            </a:pPr>
-            <a:r>
-              <a:rPr sz="2200" b="0">
-                <a:solidFill>
-                  <a:srgbClr val="27333D"/>
-                </a:solidFill>
-                <a:latin typeface="微软雅黑"/>
-                <a:ea typeface="微软雅黑"/>
-                <a:cs typeface="微软雅黑"/>
-              </a:rPr>
-              <a:t>任务转移、标注提示或文档结构</a:t>
-            </a:r>
-          </a:p>
-        </p:txBody>
-      </p:sp>
-      <p:sp>
-        <p:nvSpPr>
-          <p:cNvPr id="15" name="p14-handoff">
-            <a:extLst xmlns:a="http://schemas.openxmlformats.org/drawingml/2006/main">
-              <a:ext uri="{FF2B5EF4-FFF2-40B4-BE49-F238E27FC236}">
-                <a16:creationId xmlns:a16="http://schemas.microsoft.com/office/drawing/2014/main" id="{A6397D4E-BB5D-4B38-9728-A7B4EE7AF3F1}"/>
-              </a:ext>
-            </a:extLst>
-          </p:cNvPr>
-          <p:cNvSpPr>
-            <a:spLocks xmlns:a="http://schemas.openxmlformats.org/drawingml/2006/main" noGrp="1"/>
-          </p:cNvSpPr>
-          <p:nvPr/>
-        </p:nvSpPr>
-        <p:spPr>
-          <a:xfrm xmlns:a="http://schemas.openxmlformats.org/drawingml/2006/main">
-            <a:off x="609600" y="4933950"/>
-            <a:ext cx="10668000" cy="533400"/>
-          </a:xfrm>
-          <a:prstGeom xmlns:a="http://schemas.openxmlformats.org/drawingml/2006/main" prst="rect">
-            <a:avLst/>
-          </a:prstGeom>
-          <a:noFill xmlns:a="http://schemas.openxmlformats.org/drawingml/2006/main"/>
-          <a:ln xmlns:a="http://schemas.openxmlformats.org/drawingml/2006/main" w="0">
-            <a:noFill/>
-          </a:ln>
-        </p:spPr>
-        <p:txBody>
-          <a:bodyPr xmlns:a="http://schemas.openxmlformats.org/drawingml/2006/main" lIns="0" tIns="0" rIns="0" bIns="0" anchor="t"/>
-          <a:lstStyle xmlns:a="http://schemas.openxmlformats.org/drawingml/2006/main"/>
-          <a:p xmlns:a="http://schemas.openxmlformats.org/drawingml/2006/main">
-            <a:pPr algn="ctr">
-              <a:lnSpc>
-                <a:spcPct val="118000"/>
-              </a:lnSpc>
-              <a:buNone/>
-              <a:defRPr sz="2200" b="0">
-                <a:solidFill>
-                  <a:srgbClr val="C8161E"/>
-                </a:solidFill>
-                <a:latin typeface="微软雅黑"/>
-                <a:ea typeface="微软雅黑"/>
-                <a:cs typeface="微软雅黑"/>
-              </a:defRPr>
-            </a:pPr>
-            <a:r>
-              <a:rPr sz="2200" b="0">
-                <a:solidFill>
-                  <a:srgbClr val="C8161E"/>
-                </a:solidFill>
-                <a:latin typeface="微软雅黑"/>
-                <a:ea typeface="微软雅黑"/>
-                <a:cs typeface="微软雅黑"/>
-              </a:rPr>
-              <a:t>第 7 课区分 H1/A1/A2/A3   →   第 9 课锁定样本、重复次数与完整规格</a:t>
-            </a:r>
-          </a:p>
-        </p:txBody>
-      </p:sp>
-      <p:sp>
-        <p:nvSpPr>
-          <p:cNvPr id="16" name="source">
-            <a:extLst xmlns:a="http://schemas.openxmlformats.org/drawingml/2006/main">
-              <a:ext uri="{FF2B5EF4-FFF2-40B4-BE49-F238E27FC236}">
-                <a16:creationId xmlns:a16="http://schemas.microsoft.com/office/drawing/2014/main" id="{6B498893-CFE2-465B-830D-35FBF6C1A880}"/>
-              </a:ext>
-            </a:extLst>
-          </p:cNvPr>
-          <p:cNvSpPr>
-            <a:spLocks xmlns:a="http://schemas.openxmlformats.org/drawingml/2006/main" noGrp="1"/>
-          </p:cNvSpPr>
-          <p:nvPr/>
-        </p:nvSpPr>
-        <p:spPr>
-          <a:xfrm xmlns:a="http://schemas.openxmlformats.org/drawingml/2006/main">
-            <a:off x="609600" y="6067425"/>
-            <a:ext cx="10763250" cy="209550"/>
-          </a:xfrm>
-          <a:prstGeom xmlns:a="http://schemas.openxmlformats.org/drawingml/2006/main" prst="rect">
-            <a:avLst/>
-          </a:prstGeom>
-          <a:noFill xmlns:a="http://schemas.openxmlformats.org/drawingml/2006/main"/>
-          <a:ln xmlns:a="http://schemas.openxmlformats.org/drawingml/2006/main" w="0">
-            <a:noFill/>
-          </a:ln>
-        </p:spPr>
-        <p:txBody>
-          <a:bodyPr xmlns:a="http://schemas.openxmlformats.org/drawingml/2006/main" lIns="0" tIns="0" rIns="0" bIns="0" anchor="t"/>
-          <a:lstStyle xmlns:a="http://schemas.openxmlformats.org/drawingml/2006/main"/>
-          <a:p xmlns:a="http://schemas.openxmlformats.org/drawingml/2006/main">
-            <a:pPr algn="l">
-              <a:lnSpc>
-                <a:spcPct val="118000"/>
-              </a:lnSpc>
-              <a:buNone/>
-              <a:defRPr sz="1100" b="0">
-                <a:solidFill>
-                  <a:srgbClr val="66727D"/>
-                </a:solidFill>
-                <a:latin typeface="微软雅黑"/>
-                <a:ea typeface="微软雅黑"/>
-                <a:cs typeface="微软雅黑"/>
-              </a:defRPr>
-            </a:pPr>
-            <a:r>
-              <a:rPr sz="1100" b="0">
-                <a:solidFill>
-                  <a:srgbClr val="66727D"/>
-                </a:solidFill>
-                <a:latin typeface="微软雅黑"/>
-                <a:ea typeface="微软雅黑"/>
-                <a:cs typeface="微软雅黑"/>
-              </a:rPr>
-              <a:t>课程虚构教学案例 · 本页只移交问题、一个待验证前提和替代解释标记</a:t>
+              <a:t>质量代价与材料范围另列检查。</a:t>
             </a:r>
           </a:p>
         </p:txBody>
@@ -8959,8 +11924,8 @@
         </p:nvSpPr>
         <p:spPr>
           <a:xfrm xmlns:a="http://schemas.openxmlformats.org/drawingml/2006/main">
-            <a:off x="1028700" y="28575"/>
-            <a:ext cx="10668000" cy="628650"/>
+            <a:off x="1028700" y="57150"/>
+            <a:ext cx="10668000" cy="571500"/>
           </a:xfrm>
         </p:spPr>
         <p:txBody>
@@ -8970,6 +11935,9 @@
           <a:lstStyle xmlns:a="http://schemas.openxmlformats.org/drawingml/2006/main"/>
           <a:p xmlns:a="http://schemas.openxmlformats.org/drawingml/2006/main">
             <a:pPr algn="l">
+              <a:lnSpc>
+                <a:spcPct val="118000"/>
+              </a:lnSpc>
               <a:buNone/>
             </a:pPr>
             <a:r>
@@ -8981,7 +11949,7 @@
                 <a:ea typeface="微软雅黑"/>
                 <a:cs typeface="微软雅黑"/>
               </a:rPr>
-              <a:t>门条件自查：累计工件与当前缺口</a:t>
+              <a:t>门条件检查的是本人项目</a:t>
             </a:r>
             <a:endParaRPr/>
           </a:p>
@@ -9017,10 +11985,10 @@
       </p:sp>
       <p:sp>
         <p:nvSpPr>
-          <p:cNvPr id="6" name="visual-16-0-p15-virtual">
-            <a:extLst xmlns:a="http://schemas.openxmlformats.org/drawingml/2006/main">
-              <a:ext uri="{FF2B5EF4-FFF2-40B4-BE49-F238E27FC236}">
-                <a16:creationId xmlns:a16="http://schemas.microsoft.com/office/drawing/2014/main" id="{136A1AA1-4DE6-4998-A2DE-18C4139B8E5E}"/>
+          <p:cNvPr id="6" name="content-43">
+            <a:extLst xmlns:a="http://schemas.openxmlformats.org/drawingml/2006/main">
+              <a:ext uri="{FF2B5EF4-FFF2-40B4-BE49-F238E27FC236}">
+                <a16:creationId xmlns:a16="http://schemas.microsoft.com/office/drawing/2014/main" id="{EE1FC775-6267-4CEF-9599-D50B79DB5732}"/>
               </a:ext>
             </a:extLst>
           </p:cNvPr>
@@ -9031,8 +11999,8 @@
         </p:nvSpPr>
         <p:spPr>
           <a:xfrm xmlns:a="http://schemas.openxmlformats.org/drawingml/2006/main">
-            <a:off x="2381250" y="876300"/>
-            <a:ext cx="7429500" cy="361950"/>
+            <a:off x="609600" y="1571625"/>
+            <a:ext cx="10972800" cy="432435"/>
           </a:xfrm>
           <a:prstGeom xmlns:a="http://schemas.openxmlformats.org/drawingml/2006/main" prst="rect">
             <a:avLst/>
@@ -9043,45 +12011,43 @@
           </a:ln>
         </p:spPr>
         <p:txBody>
-          <a:bodyPr xmlns:a="http://schemas.openxmlformats.org/drawingml/2006/main" lIns="0" tIns="0" rIns="0" bIns="0" anchor="ctr">
-            <a:noAutofit/>
-          </a:bodyPr>
+          <a:bodyPr xmlns:a="http://schemas.openxmlformats.org/drawingml/2006/main" lIns="0" tIns="0" rIns="0" bIns="0" anchor="t"/>
           <a:lstStyle xmlns:a="http://schemas.openxmlformats.org/drawingml/2006/main"/>
           <a:p xmlns:a="http://schemas.openxmlformats.org/drawingml/2006/main">
             <a:pPr algn="l">
               <a:lnSpc>
-                <a:spcPct val="114000"/>
-              </a:lnSpc>
-              <a:buNone/>
-              <a:defRPr sz="1800" b="0">
-                <a:solidFill>
-                  <a:srgbClr val="A96510"/>
-                </a:solidFill>
-                <a:latin typeface="微软雅黑"/>
-                <a:ea typeface="微软雅黑"/>
-                <a:cs typeface="微软雅黑"/>
-              </a:defRPr>
-            </a:pPr>
-            <a:r>
-              <a:rPr sz="1800" b="0">
-                <a:solidFill>
-                  <a:srgbClr val="A96510"/>
-                </a:solidFill>
-                <a:latin typeface="微软雅黑"/>
-                <a:ea typeface="微软雅黑"/>
-                <a:cs typeface="微软雅黑"/>
-              </a:rPr>
-              <a:t>虚构教学样例｜门条件状态仅演示核对方法</a:t>
-            </a:r>
-          </a:p>
-        </p:txBody>
-      </p:sp>
-      <p:sp>
-        <p:nvSpPr>
-          <p:cNvPr id="7" name="visual-16-1-p15-h0">
-            <a:extLst xmlns:a="http://schemas.openxmlformats.org/drawingml/2006/main">
-              <a:ext uri="{FF2B5EF4-FFF2-40B4-BE49-F238E27FC236}">
-                <a16:creationId xmlns:a16="http://schemas.microsoft.com/office/drawing/2014/main" id="{052F83A9-D3BB-447E-963B-75132F308FF7}"/>
+                <a:spcPct val="118000"/>
+              </a:lnSpc>
+              <a:buNone/>
+              <a:defRPr sz="2400" b="0">
+                <a:solidFill>
+                  <a:srgbClr val="27333D"/>
+                </a:solidFill>
+                <a:latin typeface="微软雅黑"/>
+                <a:ea typeface="微软雅黑"/>
+                <a:cs typeface="微软雅黑"/>
+              </a:defRPr>
+            </a:pPr>
+            <a:r>
+              <a:rPr sz="2400" b="0">
+                <a:solidFill>
+                  <a:srgbClr val="27333D"/>
+                </a:solidFill>
+                <a:latin typeface="微软雅黑"/>
+                <a:ea typeface="微软雅黑"/>
+                <a:cs typeface="微软雅黑"/>
+              </a:rPr>
+              <a:t>课堂构造案例：练习问题、证据与反证的对应。</a:t>
+            </a:r>
+          </a:p>
+        </p:txBody>
+      </p:sp>
+      <p:sp>
+        <p:nvSpPr>
+          <p:cNvPr id="7" name="content-44">
+            <a:extLst xmlns:a="http://schemas.openxmlformats.org/drawingml/2006/main">
+              <a:ext uri="{FF2B5EF4-FFF2-40B4-BE49-F238E27FC236}">
+                <a16:creationId xmlns:a16="http://schemas.microsoft.com/office/drawing/2014/main" id="{6A203B43-BEB9-440A-96BB-B3DE8D4FA1FF}"/>
               </a:ext>
             </a:extLst>
           </p:cNvPr>
@@ -9092,8 +12058,8 @@
         </p:nvSpPr>
         <p:spPr>
           <a:xfrm xmlns:a="http://schemas.openxmlformats.org/drawingml/2006/main">
-            <a:off x="762000" y="1428750"/>
-            <a:ext cx="2095500" cy="400050"/>
+            <a:off x="609600" y="2261235"/>
+            <a:ext cx="10972800" cy="432435"/>
           </a:xfrm>
           <a:prstGeom xmlns:a="http://schemas.openxmlformats.org/drawingml/2006/main" prst="rect">
             <a:avLst/>
@@ -9104,45 +12070,43 @@
           </a:ln>
         </p:spPr>
         <p:txBody>
-          <a:bodyPr xmlns:a="http://schemas.openxmlformats.org/drawingml/2006/main" lIns="0" tIns="0" rIns="0" bIns="0" anchor="ctr">
-            <a:noAutofit/>
-          </a:bodyPr>
+          <a:bodyPr xmlns:a="http://schemas.openxmlformats.org/drawingml/2006/main" lIns="0" tIns="0" rIns="0" bIns="0" anchor="t"/>
           <a:lstStyle xmlns:a="http://schemas.openxmlformats.org/drawingml/2006/main"/>
           <a:p xmlns:a="http://schemas.openxmlformats.org/drawingml/2006/main">
             <a:pPr algn="l">
               <a:lnSpc>
-                <a:spcPct val="114000"/>
-              </a:lnSpc>
-              <a:buNone/>
-              <a:defRPr sz="2200" b="1">
-                <a:solidFill>
-                  <a:srgbClr val="1F4D78"/>
-                </a:solidFill>
-                <a:latin typeface="微软雅黑"/>
-                <a:ea typeface="微软雅黑"/>
-                <a:cs typeface="微软雅黑"/>
-              </a:defRPr>
-            </a:pPr>
-            <a:r>
-              <a:rPr sz="2200" b="1">
-                <a:solidFill>
-                  <a:srgbClr val="1F4D78"/>
-                </a:solidFill>
-                <a:latin typeface="微软雅黑"/>
-                <a:ea typeface="微软雅黑"/>
-                <a:cs typeface="微软雅黑"/>
-              </a:rPr>
-              <a:t>条件</a:t>
-            </a:r>
-          </a:p>
-        </p:txBody>
-      </p:sp>
-      <p:sp>
-        <p:nvSpPr>
-          <p:cNvPr id="8" name="visual-16-2-p15-h1">
-            <a:extLst xmlns:a="http://schemas.openxmlformats.org/drawingml/2006/main">
-              <a:ext uri="{FF2B5EF4-FFF2-40B4-BE49-F238E27FC236}">
-                <a16:creationId xmlns:a16="http://schemas.microsoft.com/office/drawing/2014/main" id="{1DD1B6E3-9E6E-41F7-BB00-7BF8EC2F42E6}"/>
+                <a:spcPct val="118000"/>
+              </a:lnSpc>
+              <a:buNone/>
+              <a:defRPr sz="2400" b="0">
+                <a:solidFill>
+                  <a:srgbClr val="27333D"/>
+                </a:solidFill>
+                <a:latin typeface="微软雅黑"/>
+                <a:ea typeface="微软雅黑"/>
+                <a:cs typeface="微软雅黑"/>
+              </a:defRPr>
+            </a:pPr>
+            <a:r>
+              <a:rPr sz="2400" b="0">
+                <a:solidFill>
+                  <a:srgbClr val="27333D"/>
+                </a:solidFill>
+                <a:latin typeface="微软雅黑"/>
+                <a:ea typeface="微软雅黑"/>
+                <a:cs typeface="微软雅黑"/>
+              </a:rPr>
+              <a:t>本人项目：仍须说明来源、可行性、约束与失败预案。</a:t>
+            </a:r>
+          </a:p>
+        </p:txBody>
+      </p:sp>
+      <p:sp>
+        <p:nvSpPr>
+          <p:cNvPr id="8" name="content-45">
+            <a:extLst xmlns:a="http://schemas.openxmlformats.org/drawingml/2006/main">
+              <a:ext uri="{FF2B5EF4-FFF2-40B4-BE49-F238E27FC236}">
+                <a16:creationId xmlns:a16="http://schemas.microsoft.com/office/drawing/2014/main" id="{5EEE4E90-6013-4D74-B60F-B03CE6E35C99}"/>
               </a:ext>
             </a:extLst>
           </p:cNvPr>
@@ -9153,8 +12117,8 @@
         </p:nvSpPr>
         <p:spPr>
           <a:xfrm xmlns:a="http://schemas.openxmlformats.org/drawingml/2006/main">
-            <a:off x="2857500" y="1428750"/>
-            <a:ext cx="3619500" cy="400050"/>
+            <a:off x="609600" y="2950845"/>
+            <a:ext cx="10972800" cy="432435"/>
           </a:xfrm>
           <a:prstGeom xmlns:a="http://schemas.openxmlformats.org/drawingml/2006/main" prst="rect">
             <a:avLst/>
@@ -9165,17 +12129,15 @@
           </a:ln>
         </p:spPr>
         <p:txBody>
-          <a:bodyPr xmlns:a="http://schemas.openxmlformats.org/drawingml/2006/main" lIns="0" tIns="0" rIns="0" bIns="0" anchor="ctr">
-            <a:noAutofit/>
-          </a:bodyPr>
+          <a:bodyPr xmlns:a="http://schemas.openxmlformats.org/drawingml/2006/main" lIns="0" tIns="0" rIns="0" bIns="0" anchor="t"/>
           <a:lstStyle xmlns:a="http://schemas.openxmlformats.org/drawingml/2006/main"/>
           <a:p xmlns:a="http://schemas.openxmlformats.org/drawingml/2006/main">
             <a:pPr algn="l">
               <a:lnSpc>
-                <a:spcPct val="114000"/>
-              </a:lnSpc>
-              <a:buNone/>
-              <a:defRPr sz="2200" b="1">
+                <a:spcPct val="118000"/>
+              </a:lnSpc>
+              <a:buNone/>
+              <a:defRPr sz="2400" b="0">
                 <a:solidFill>
                   <a:srgbClr val="1F4D78"/>
                 </a:solidFill>
@@ -9185,7 +12147,7 @@
               </a:defRPr>
             </a:pPr>
             <a:r>
-              <a:rPr sz="2200" b="1">
+              <a:rPr sz="2400" b="0">
                 <a:solidFill>
                   <a:srgbClr val="1F4D78"/>
                 </a:solidFill>
@@ -9193,1166 +12155,7 @@
                 <a:ea typeface="微软雅黑"/>
                 <a:cs typeface="微软雅黑"/>
               </a:rPr>
-              <a:t>累计来源</a:t>
-            </a:r>
-          </a:p>
-        </p:txBody>
-      </p:sp>
-      <p:sp>
-        <p:nvSpPr>
-          <p:cNvPr id="9" name="visual-16-3-p15-h2">
-            <a:extLst xmlns:a="http://schemas.openxmlformats.org/drawingml/2006/main">
-              <a:ext uri="{FF2B5EF4-FFF2-40B4-BE49-F238E27FC236}">
-                <a16:creationId xmlns:a16="http://schemas.microsoft.com/office/drawing/2014/main" id="{657616B3-3D5F-4DFB-A4C3-9F5F7745EAEC}"/>
-              </a:ext>
-            </a:extLst>
-          </p:cNvPr>
-          <p:cNvSpPr>
-            <a:spLocks xmlns:a="http://schemas.openxmlformats.org/drawingml/2006/main" noGrp="1"/>
-          </p:cNvSpPr>
-          <p:nvPr/>
-        </p:nvSpPr>
-        <p:spPr>
-          <a:xfrm xmlns:a="http://schemas.openxmlformats.org/drawingml/2006/main">
-            <a:off x="6477000" y="1428750"/>
-            <a:ext cx="4953000" cy="400050"/>
-          </a:xfrm>
-          <a:prstGeom xmlns:a="http://schemas.openxmlformats.org/drawingml/2006/main" prst="rect">
-            <a:avLst/>
-          </a:prstGeom>
-          <a:noFill xmlns:a="http://schemas.openxmlformats.org/drawingml/2006/main"/>
-          <a:ln xmlns:a="http://schemas.openxmlformats.org/drawingml/2006/main" w="0">
-            <a:noFill/>
-          </a:ln>
-        </p:spPr>
-        <p:txBody>
-          <a:bodyPr xmlns:a="http://schemas.openxmlformats.org/drawingml/2006/main" lIns="0" tIns="0" rIns="0" bIns="0" anchor="ctr">
-            <a:noAutofit/>
-          </a:bodyPr>
-          <a:lstStyle xmlns:a="http://schemas.openxmlformats.org/drawingml/2006/main"/>
-          <a:p xmlns:a="http://schemas.openxmlformats.org/drawingml/2006/main">
-            <a:pPr algn="l">
-              <a:lnSpc>
-                <a:spcPct val="114000"/>
-              </a:lnSpc>
-              <a:buNone/>
-              <a:defRPr sz="2200" b="1">
-                <a:solidFill>
-                  <a:srgbClr val="1F4D78"/>
-                </a:solidFill>
-                <a:latin typeface="微软雅黑"/>
-                <a:ea typeface="微软雅黑"/>
-                <a:cs typeface="微软雅黑"/>
-              </a:defRPr>
-            </a:pPr>
-            <a:r>
-              <a:rPr sz="2200" b="1">
-                <a:solidFill>
-                  <a:srgbClr val="1F4D78"/>
-                </a:solidFill>
-                <a:latin typeface="微软雅黑"/>
-                <a:ea typeface="微软雅黑"/>
-                <a:cs typeface="微软雅黑"/>
-              </a:rPr>
-              <a:t>当下要核对</a:t>
-            </a:r>
-          </a:p>
-        </p:txBody>
-      </p:sp>
-      <p:sp>
-        <p:nvSpPr>
-          <p:cNvPr id="10" name="visual-16-4-p15-r0-0">
-            <a:extLst xmlns:a="http://schemas.openxmlformats.org/drawingml/2006/main">
-              <a:ext uri="{FF2B5EF4-FFF2-40B4-BE49-F238E27FC236}">
-                <a16:creationId xmlns:a16="http://schemas.microsoft.com/office/drawing/2014/main" id="{E64F5A8F-90E8-49BE-A545-2FC40664441B}"/>
-              </a:ext>
-            </a:extLst>
-          </p:cNvPr>
-          <p:cNvSpPr>
-            <a:spLocks xmlns:a="http://schemas.openxmlformats.org/drawingml/2006/main" noGrp="1"/>
-          </p:cNvSpPr>
-          <p:nvPr/>
-        </p:nvSpPr>
-        <p:spPr>
-          <a:xfrm xmlns:a="http://schemas.openxmlformats.org/drawingml/2006/main">
-            <a:off x="762000" y="1828800"/>
-            <a:ext cx="2095500" cy="590550"/>
-          </a:xfrm>
-          <a:prstGeom xmlns:a="http://schemas.openxmlformats.org/drawingml/2006/main" prst="rect">
-            <a:avLst/>
-          </a:prstGeom>
-          <a:noFill xmlns:a="http://schemas.openxmlformats.org/drawingml/2006/main"/>
-          <a:ln xmlns:a="http://schemas.openxmlformats.org/drawingml/2006/main" w="0">
-            <a:noFill/>
-          </a:ln>
-        </p:spPr>
-        <p:txBody>
-          <a:bodyPr xmlns:a="http://schemas.openxmlformats.org/drawingml/2006/main" lIns="0" tIns="0" rIns="0" bIns="0" anchor="t">
-            <a:noAutofit/>
-          </a:bodyPr>
-          <a:lstStyle xmlns:a="http://schemas.openxmlformats.org/drawingml/2006/main"/>
-          <a:p xmlns:a="http://schemas.openxmlformats.org/drawingml/2006/main">
-            <a:pPr algn="l">
-              <a:lnSpc>
-                <a:spcPct val="114000"/>
-              </a:lnSpc>
-              <a:buNone/>
-              <a:defRPr sz="2200" b="1">
-                <a:solidFill>
-                  <a:srgbClr val="1F4D78"/>
-                </a:solidFill>
-                <a:latin typeface="微软雅黑"/>
-                <a:ea typeface="微软雅黑"/>
-                <a:cs typeface="微软雅黑"/>
-              </a:defRPr>
-            </a:pPr>
-            <a:r>
-              <a:rPr sz="2200" b="1">
-                <a:solidFill>
-                  <a:srgbClr val="1F4D78"/>
-                </a:solidFill>
-                <a:latin typeface="微软雅黑"/>
-                <a:ea typeface="微软雅黑"/>
-                <a:cs typeface="微软雅黑"/>
-              </a:rPr>
-              <a:t>≥10 候选</a:t>
-            </a:r>
-          </a:p>
-        </p:txBody>
-      </p:sp>
-      <p:sp>
-        <p:nvSpPr>
-          <p:cNvPr id="11" name="visual-16-5-p15-r0-1">
-            <a:extLst xmlns:a="http://schemas.openxmlformats.org/drawingml/2006/main">
-              <a:ext uri="{FF2B5EF4-FFF2-40B4-BE49-F238E27FC236}">
-                <a16:creationId xmlns:a16="http://schemas.microsoft.com/office/drawing/2014/main" id="{90963C65-9036-4BEF-AFD3-18E0F397A33C}"/>
-              </a:ext>
-            </a:extLst>
-          </p:cNvPr>
-          <p:cNvSpPr>
-            <a:spLocks xmlns:a="http://schemas.openxmlformats.org/drawingml/2006/main" noGrp="1"/>
-          </p:cNvSpPr>
-          <p:nvPr/>
-        </p:nvSpPr>
-        <p:spPr>
-          <a:xfrm xmlns:a="http://schemas.openxmlformats.org/drawingml/2006/main">
-            <a:off x="2857500" y="1828800"/>
-            <a:ext cx="3619500" cy="590550"/>
-          </a:xfrm>
-          <a:prstGeom xmlns:a="http://schemas.openxmlformats.org/drawingml/2006/main" prst="rect">
-            <a:avLst/>
-          </a:prstGeom>
-          <a:noFill xmlns:a="http://schemas.openxmlformats.org/drawingml/2006/main"/>
-          <a:ln xmlns:a="http://schemas.openxmlformats.org/drawingml/2006/main" w="0">
-            <a:noFill/>
-          </a:ln>
-        </p:spPr>
-        <p:txBody>
-          <a:bodyPr xmlns:a="http://schemas.openxmlformats.org/drawingml/2006/main" lIns="0" tIns="0" rIns="0" bIns="0" anchor="t">
-            <a:noAutofit/>
-          </a:bodyPr>
-          <a:lstStyle xmlns:a="http://schemas.openxmlformats.org/drawingml/2006/main"/>
-          <a:p xmlns:a="http://schemas.openxmlformats.org/drawingml/2006/main">
-            <a:pPr algn="l">
-              <a:lnSpc>
-                <a:spcPct val="114000"/>
-              </a:lnSpc>
-              <a:buNone/>
-              <a:defRPr sz="2200" b="1">
-                <a:solidFill>
-                  <a:srgbClr val="1F4D78"/>
-                </a:solidFill>
-                <a:latin typeface="微软雅黑"/>
-                <a:ea typeface="微软雅黑"/>
-                <a:cs typeface="微软雅黑"/>
-              </a:defRPr>
-            </a:pPr>
-            <a:r>
-              <a:rPr sz="2200" b="1">
-                <a:solidFill>
-                  <a:srgbClr val="1F4D78"/>
-                </a:solidFill>
-                <a:latin typeface="微软雅黑"/>
-                <a:ea typeface="微软雅黑"/>
-                <a:cs typeface="微软雅黑"/>
-              </a:rPr>
-              <a:t>第 3-5 课累计</a:t>
-            </a:r>
-          </a:p>
-        </p:txBody>
-      </p:sp>
-      <p:sp>
-        <p:nvSpPr>
-          <p:cNvPr id="12" name="visual-16-6-p15-r0-2">
-            <a:extLst xmlns:a="http://schemas.openxmlformats.org/drawingml/2006/main">
-              <a:ext uri="{FF2B5EF4-FFF2-40B4-BE49-F238E27FC236}">
-                <a16:creationId xmlns:a16="http://schemas.microsoft.com/office/drawing/2014/main" id="{BD41FCF3-C69D-49E4-B232-7C4B0CDD2606}"/>
-              </a:ext>
-            </a:extLst>
-          </p:cNvPr>
-          <p:cNvSpPr>
-            <a:spLocks xmlns:a="http://schemas.openxmlformats.org/drawingml/2006/main" noGrp="1"/>
-          </p:cNvSpPr>
-          <p:nvPr/>
-        </p:nvSpPr>
-        <p:spPr>
-          <a:xfrm xmlns:a="http://schemas.openxmlformats.org/drawingml/2006/main">
-            <a:off x="6477000" y="1828800"/>
-            <a:ext cx="4953000" cy="590550"/>
-          </a:xfrm>
-          <a:prstGeom xmlns:a="http://schemas.openxmlformats.org/drawingml/2006/main" prst="rect">
-            <a:avLst/>
-          </a:prstGeom>
-          <a:noFill xmlns:a="http://schemas.openxmlformats.org/drawingml/2006/main"/>
-          <a:ln xmlns:a="http://schemas.openxmlformats.org/drawingml/2006/main" w="0">
-            <a:noFill/>
-          </a:ln>
-        </p:spPr>
-        <p:txBody>
-          <a:bodyPr xmlns:a="http://schemas.openxmlformats.org/drawingml/2006/main" lIns="0" tIns="0" rIns="0" bIns="0" anchor="t">
-            <a:noAutofit/>
-          </a:bodyPr>
-          <a:lstStyle xmlns:a="http://schemas.openxmlformats.org/drawingml/2006/main"/>
-          <a:p xmlns:a="http://schemas.openxmlformats.org/drawingml/2006/main">
-            <a:pPr algn="l">
-              <a:lnSpc>
-                <a:spcPct val="114000"/>
-              </a:lnSpc>
-              <a:buNone/>
-              <a:defRPr sz="2000" b="1">
-                <a:solidFill>
-                  <a:srgbClr val="1F4D78"/>
-                </a:solidFill>
-                <a:latin typeface="微软雅黑"/>
-                <a:ea typeface="微软雅黑"/>
-                <a:cs typeface="微软雅黑"/>
-              </a:defRPr>
-            </a:pPr>
-            <a:r>
-              <a:rPr sz="2000" b="1">
-                <a:solidFill>
-                  <a:srgbClr val="1F4D78"/>
-                </a:solidFill>
-                <a:latin typeface="微软雅黑"/>
-                <a:ea typeface="微软雅黑"/>
-                <a:cs typeface="微软雅黑"/>
-              </a:rPr>
-              <a:t>数量 / 角色 / 状态</a:t>
-            </a:r>
-          </a:p>
-        </p:txBody>
-      </p:sp>
-      <p:sp>
-        <p:nvSpPr>
-          <p:cNvPr id="13" name="visual-16-7-p15-r1-0">
-            <a:extLst xmlns:a="http://schemas.openxmlformats.org/drawingml/2006/main">
-              <a:ext uri="{FF2B5EF4-FFF2-40B4-BE49-F238E27FC236}">
-                <a16:creationId xmlns:a16="http://schemas.microsoft.com/office/drawing/2014/main" id="{15E25C00-A602-492C-A832-63D5FD1C91A5}"/>
-              </a:ext>
-            </a:extLst>
-          </p:cNvPr>
-          <p:cNvSpPr>
-            <a:spLocks xmlns:a="http://schemas.openxmlformats.org/drawingml/2006/main" noGrp="1"/>
-          </p:cNvSpPr>
-          <p:nvPr/>
-        </p:nvSpPr>
-        <p:spPr>
-          <a:xfrm xmlns:a="http://schemas.openxmlformats.org/drawingml/2006/main">
-            <a:off x="762000" y="2419350"/>
-            <a:ext cx="2095500" cy="590550"/>
-          </a:xfrm>
-          <a:prstGeom xmlns:a="http://schemas.openxmlformats.org/drawingml/2006/main" prst="rect">
-            <a:avLst/>
-          </a:prstGeom>
-          <a:noFill xmlns:a="http://schemas.openxmlformats.org/drawingml/2006/main"/>
-          <a:ln xmlns:a="http://schemas.openxmlformats.org/drawingml/2006/main" w="0">
-            <a:noFill/>
-          </a:ln>
-        </p:spPr>
-        <p:txBody>
-          <a:bodyPr xmlns:a="http://schemas.openxmlformats.org/drawingml/2006/main" lIns="0" tIns="0" rIns="0" bIns="0" anchor="t">
-            <a:noAutofit/>
-          </a:bodyPr>
-          <a:lstStyle xmlns:a="http://schemas.openxmlformats.org/drawingml/2006/main"/>
-          <a:p xmlns:a="http://schemas.openxmlformats.org/drawingml/2006/main">
-            <a:pPr algn="l">
-              <a:lnSpc>
-                <a:spcPct val="114000"/>
-              </a:lnSpc>
-              <a:buNone/>
-              <a:defRPr sz="2200" b="1">
-                <a:solidFill>
-                  <a:srgbClr val="1F4D78"/>
-                </a:solidFill>
-                <a:latin typeface="微软雅黑"/>
-                <a:ea typeface="微软雅黑"/>
-                <a:cs typeface="微软雅黑"/>
-              </a:defRPr>
-            </a:pPr>
-            <a:r>
-              <a:rPr sz="2200" b="1">
-                <a:solidFill>
-                  <a:srgbClr val="1F4D78"/>
-                </a:solidFill>
-                <a:latin typeface="微软雅黑"/>
-                <a:ea typeface="微软雅黑"/>
-                <a:cs typeface="微软雅黑"/>
-              </a:rPr>
-              <a:t>≥3 精读卡</a:t>
-            </a:r>
-          </a:p>
-        </p:txBody>
-      </p:sp>
-      <p:sp>
-        <p:nvSpPr>
-          <p:cNvPr id="14" name="visual-16-8-p15-r1-1">
-            <a:extLst xmlns:a="http://schemas.openxmlformats.org/drawingml/2006/main">
-              <a:ext uri="{FF2B5EF4-FFF2-40B4-BE49-F238E27FC236}">
-                <a16:creationId xmlns:a16="http://schemas.microsoft.com/office/drawing/2014/main" id="{E23F250F-7E30-4F57-932C-F3A3C0FB7794}"/>
-              </a:ext>
-            </a:extLst>
-          </p:cNvPr>
-          <p:cNvSpPr>
-            <a:spLocks xmlns:a="http://schemas.openxmlformats.org/drawingml/2006/main" noGrp="1"/>
-          </p:cNvSpPr>
-          <p:nvPr/>
-        </p:nvSpPr>
-        <p:spPr>
-          <a:xfrm xmlns:a="http://schemas.openxmlformats.org/drawingml/2006/main">
-            <a:off x="2857500" y="2419350"/>
-            <a:ext cx="3619500" cy="590550"/>
-          </a:xfrm>
-          <a:prstGeom xmlns:a="http://schemas.openxmlformats.org/drawingml/2006/main" prst="rect">
-            <a:avLst/>
-          </a:prstGeom>
-          <a:noFill xmlns:a="http://schemas.openxmlformats.org/drawingml/2006/main"/>
-          <a:ln xmlns:a="http://schemas.openxmlformats.org/drawingml/2006/main" w="0">
-            <a:noFill/>
-          </a:ln>
-        </p:spPr>
-        <p:txBody>
-          <a:bodyPr xmlns:a="http://schemas.openxmlformats.org/drawingml/2006/main" lIns="0" tIns="0" rIns="0" bIns="0" anchor="t">
-            <a:noAutofit/>
-          </a:bodyPr>
-          <a:lstStyle xmlns:a="http://schemas.openxmlformats.org/drawingml/2006/main"/>
-          <a:p xmlns:a="http://schemas.openxmlformats.org/drawingml/2006/main">
-            <a:pPr algn="l">
-              <a:lnSpc>
-                <a:spcPct val="114000"/>
-              </a:lnSpc>
-              <a:buNone/>
-              <a:defRPr sz="2200" b="1">
-                <a:solidFill>
-                  <a:srgbClr val="1F4D78"/>
-                </a:solidFill>
-                <a:latin typeface="微软雅黑"/>
-                <a:ea typeface="微软雅黑"/>
-                <a:cs typeface="微软雅黑"/>
-              </a:defRPr>
-            </a:pPr>
-            <a:r>
-              <a:rPr sz="2200" b="1">
-                <a:solidFill>
-                  <a:srgbClr val="1F4D78"/>
-                </a:solidFill>
-                <a:latin typeface="微软雅黑"/>
-                <a:ea typeface="微软雅黑"/>
-                <a:cs typeface="微软雅黑"/>
-              </a:rPr>
-              <a:t>第 4-5 课累计</a:t>
-            </a:r>
-          </a:p>
-        </p:txBody>
-      </p:sp>
-      <p:sp>
-        <p:nvSpPr>
-          <p:cNvPr id="15" name="visual-16-9-p15-r1-2">
-            <a:extLst xmlns:a="http://schemas.openxmlformats.org/drawingml/2006/main">
-              <a:ext uri="{FF2B5EF4-FFF2-40B4-BE49-F238E27FC236}">
-                <a16:creationId xmlns:a16="http://schemas.microsoft.com/office/drawing/2014/main" id="{32E7F10E-8A81-4ECC-9138-25530AFC4162}"/>
-              </a:ext>
-            </a:extLst>
-          </p:cNvPr>
-          <p:cNvSpPr>
-            <a:spLocks xmlns:a="http://schemas.openxmlformats.org/drawingml/2006/main" noGrp="1"/>
-          </p:cNvSpPr>
-          <p:nvPr/>
-        </p:nvSpPr>
-        <p:spPr>
-          <a:xfrm xmlns:a="http://schemas.openxmlformats.org/drawingml/2006/main">
-            <a:off x="6477000" y="2419350"/>
-            <a:ext cx="4953000" cy="590550"/>
-          </a:xfrm>
-          <a:prstGeom xmlns:a="http://schemas.openxmlformats.org/drawingml/2006/main" prst="rect">
-            <a:avLst/>
-          </a:prstGeom>
-          <a:noFill xmlns:a="http://schemas.openxmlformats.org/drawingml/2006/main"/>
-          <a:ln xmlns:a="http://schemas.openxmlformats.org/drawingml/2006/main" w="0">
-            <a:noFill/>
-          </a:ln>
-        </p:spPr>
-        <p:txBody>
-          <a:bodyPr xmlns:a="http://schemas.openxmlformats.org/drawingml/2006/main" lIns="0" tIns="0" rIns="0" bIns="0" anchor="t">
-            <a:noAutofit/>
-          </a:bodyPr>
-          <a:lstStyle xmlns:a="http://schemas.openxmlformats.org/drawingml/2006/main"/>
-          <a:p xmlns:a="http://schemas.openxmlformats.org/drawingml/2006/main">
-            <a:pPr algn="l">
-              <a:lnSpc>
-                <a:spcPct val="114000"/>
-              </a:lnSpc>
-              <a:buNone/>
-              <a:defRPr sz="2000" b="0">
-                <a:solidFill>
-                  <a:srgbClr val="1F4D78"/>
-                </a:solidFill>
-                <a:latin typeface="微软雅黑"/>
-                <a:ea typeface="微软雅黑"/>
-                <a:cs typeface="微软雅黑"/>
-              </a:defRPr>
-            </a:pPr>
-            <a:r>
-              <a:rPr sz="2000" b="0">
-                <a:solidFill>
-                  <a:srgbClr val="1F4D78"/>
-                </a:solidFill>
-                <a:latin typeface="微软雅黑"/>
-                <a:ea typeface="微软雅黑"/>
-                <a:cs typeface="微软雅黑"/>
-              </a:rPr>
-              <a:t>完整字段 / 原文位置</a:t>
-            </a:r>
-          </a:p>
-        </p:txBody>
-      </p:sp>
-      <p:sp>
-        <p:nvSpPr>
-          <p:cNvPr id="16" name="visual-16-10-p15-r2-0">
-            <a:extLst xmlns:a="http://schemas.openxmlformats.org/drawingml/2006/main">
-              <a:ext uri="{FF2B5EF4-FFF2-40B4-BE49-F238E27FC236}">
-                <a16:creationId xmlns:a16="http://schemas.microsoft.com/office/drawing/2014/main" id="{DFD2031E-930E-457E-AF8D-5631065ABD1E}"/>
-              </a:ext>
-            </a:extLst>
-          </p:cNvPr>
-          <p:cNvSpPr>
-            <a:spLocks xmlns:a="http://schemas.openxmlformats.org/drawingml/2006/main" noGrp="1"/>
-          </p:cNvSpPr>
-          <p:nvPr/>
-        </p:nvSpPr>
-        <p:spPr>
-          <a:xfrm xmlns:a="http://schemas.openxmlformats.org/drawingml/2006/main">
-            <a:off x="762000" y="3009900"/>
-            <a:ext cx="2095500" cy="590550"/>
-          </a:xfrm>
-          <a:prstGeom xmlns:a="http://schemas.openxmlformats.org/drawingml/2006/main" prst="rect">
-            <a:avLst/>
-          </a:prstGeom>
-          <a:noFill xmlns:a="http://schemas.openxmlformats.org/drawingml/2006/main"/>
-          <a:ln xmlns:a="http://schemas.openxmlformats.org/drawingml/2006/main" w="0">
-            <a:noFill/>
-          </a:ln>
-        </p:spPr>
-        <p:txBody>
-          <a:bodyPr xmlns:a="http://schemas.openxmlformats.org/drawingml/2006/main" lIns="0" tIns="0" rIns="0" bIns="0" anchor="t">
-            <a:noAutofit/>
-          </a:bodyPr>
-          <a:lstStyle xmlns:a="http://schemas.openxmlformats.org/drawingml/2006/main"/>
-          <a:p xmlns:a="http://schemas.openxmlformats.org/drawingml/2006/main">
-            <a:pPr algn="l">
-              <a:lnSpc>
-                <a:spcPct val="114000"/>
-              </a:lnSpc>
-              <a:buNone/>
-              <a:defRPr sz="2200" b="1">
-                <a:solidFill>
-                  <a:srgbClr val="1F4D78"/>
-                </a:solidFill>
-                <a:latin typeface="微软雅黑"/>
-                <a:ea typeface="微软雅黑"/>
-                <a:cs typeface="微软雅黑"/>
-              </a:defRPr>
-            </a:pPr>
-            <a:r>
-              <a:rPr sz="2200" b="1">
-                <a:solidFill>
-                  <a:srgbClr val="1F4D78"/>
-                </a:solidFill>
-                <a:latin typeface="微软雅黑"/>
-                <a:ea typeface="微软雅黑"/>
-                <a:cs typeface="微软雅黑"/>
-              </a:rPr>
-              <a:t>AI 精读字段</a:t>
-            </a:r>
-          </a:p>
-        </p:txBody>
-      </p:sp>
-      <p:sp>
-        <p:nvSpPr>
-          <p:cNvPr id="17" name="visual-16-11-p15-r2-1">
-            <a:extLst xmlns:a="http://schemas.openxmlformats.org/drawingml/2006/main">
-              <a:ext uri="{FF2B5EF4-FFF2-40B4-BE49-F238E27FC236}">
-                <a16:creationId xmlns:a16="http://schemas.microsoft.com/office/drawing/2014/main" id="{15E2503C-5144-4287-BFEE-43FF7321F01E}"/>
-              </a:ext>
-            </a:extLst>
-          </p:cNvPr>
-          <p:cNvSpPr>
-            <a:spLocks xmlns:a="http://schemas.openxmlformats.org/drawingml/2006/main" noGrp="1"/>
-          </p:cNvSpPr>
-          <p:nvPr/>
-        </p:nvSpPr>
-        <p:spPr>
-          <a:xfrm xmlns:a="http://schemas.openxmlformats.org/drawingml/2006/main">
-            <a:off x="2857500" y="3009900"/>
-            <a:ext cx="3619500" cy="590550"/>
-          </a:xfrm>
-          <a:prstGeom xmlns:a="http://schemas.openxmlformats.org/drawingml/2006/main" prst="rect">
-            <a:avLst/>
-          </a:prstGeom>
-          <a:noFill xmlns:a="http://schemas.openxmlformats.org/drawingml/2006/main"/>
-          <a:ln xmlns:a="http://schemas.openxmlformats.org/drawingml/2006/main" w="0">
-            <a:noFill/>
-          </a:ln>
-        </p:spPr>
-        <p:txBody>
-          <a:bodyPr xmlns:a="http://schemas.openxmlformats.org/drawingml/2006/main" lIns="0" tIns="0" rIns="0" bIns="0" anchor="t">
-            <a:noAutofit/>
-          </a:bodyPr>
-          <a:lstStyle xmlns:a="http://schemas.openxmlformats.org/drawingml/2006/main"/>
-          <a:p xmlns:a="http://schemas.openxmlformats.org/drawingml/2006/main">
-            <a:pPr algn="l">
-              <a:lnSpc>
-                <a:spcPct val="114000"/>
-              </a:lnSpc>
-              <a:buNone/>
-              <a:defRPr sz="2200" b="1">
-                <a:solidFill>
-                  <a:srgbClr val="1F4D78"/>
-                </a:solidFill>
-                <a:latin typeface="微软雅黑"/>
-                <a:ea typeface="微软雅黑"/>
-                <a:cs typeface="微软雅黑"/>
-              </a:defRPr>
-            </a:pPr>
-            <a:r>
-              <a:rPr sz="2200" b="1">
-                <a:solidFill>
-                  <a:srgbClr val="1F4D78"/>
-                </a:solidFill>
-                <a:latin typeface="微软雅黑"/>
-                <a:ea typeface="微软雅黑"/>
-                <a:cs typeface="微软雅黑"/>
-              </a:rPr>
-              <a:t>逐卡累计</a:t>
-            </a:r>
-          </a:p>
-        </p:txBody>
-      </p:sp>
-      <p:sp>
-        <p:nvSpPr>
-          <p:cNvPr id="18" name="visual-16-12-p15-r2-2">
-            <a:extLst xmlns:a="http://schemas.openxmlformats.org/drawingml/2006/main">
-              <a:ext uri="{FF2B5EF4-FFF2-40B4-BE49-F238E27FC236}">
-                <a16:creationId xmlns:a16="http://schemas.microsoft.com/office/drawing/2014/main" id="{69E28272-574C-499A-AC68-D1BB98B9FBCC}"/>
-              </a:ext>
-            </a:extLst>
-          </p:cNvPr>
-          <p:cNvSpPr>
-            <a:spLocks xmlns:a="http://schemas.openxmlformats.org/drawingml/2006/main" noGrp="1"/>
-          </p:cNvSpPr>
-          <p:nvPr/>
-        </p:nvSpPr>
-        <p:spPr>
-          <a:xfrm xmlns:a="http://schemas.openxmlformats.org/drawingml/2006/main">
-            <a:off x="6477000" y="3009900"/>
-            <a:ext cx="4953000" cy="590550"/>
-          </a:xfrm>
-          <a:prstGeom xmlns:a="http://schemas.openxmlformats.org/drawingml/2006/main" prst="rect">
-            <a:avLst/>
-          </a:prstGeom>
-          <a:noFill xmlns:a="http://schemas.openxmlformats.org/drawingml/2006/main"/>
-          <a:ln xmlns:a="http://schemas.openxmlformats.org/drawingml/2006/main" w="0">
-            <a:noFill/>
-          </a:ln>
-        </p:spPr>
-        <p:txBody>
-          <a:bodyPr xmlns:a="http://schemas.openxmlformats.org/drawingml/2006/main" lIns="0" tIns="0" rIns="0" bIns="0" anchor="t">
-            <a:noAutofit/>
-          </a:bodyPr>
-          <a:lstStyle xmlns:a="http://schemas.openxmlformats.org/drawingml/2006/main"/>
-          <a:p xmlns:a="http://schemas.openxmlformats.org/drawingml/2006/main">
-            <a:pPr algn="l">
-              <a:lnSpc>
-                <a:spcPct val="114000"/>
-              </a:lnSpc>
-              <a:buNone/>
-              <a:defRPr sz="2000" b="1">
-                <a:solidFill>
-                  <a:srgbClr val="1F4D78"/>
-                </a:solidFill>
-                <a:latin typeface="微软雅黑"/>
-                <a:ea typeface="微软雅黑"/>
-                <a:cs typeface="微软雅黑"/>
-              </a:defRPr>
-            </a:pPr>
-            <a:r>
-              <a:rPr sz="2000" b="1">
-                <a:solidFill>
-                  <a:srgbClr val="1F4D78"/>
-                </a:solidFill>
-                <a:latin typeface="微软雅黑"/>
-                <a:ea typeface="微软雅黑"/>
-                <a:cs typeface="微软雅黑"/>
-              </a:rPr>
-              <a:t>偏差或已检查风险</a:t>
-            </a:r>
-          </a:p>
-        </p:txBody>
-      </p:sp>
-      <p:sp>
-        <p:nvSpPr>
-          <p:cNvPr id="19" name="visual-16-13-p15-r3-0">
-            <a:extLst xmlns:a="http://schemas.openxmlformats.org/drawingml/2006/main">
-              <a:ext uri="{FF2B5EF4-FFF2-40B4-BE49-F238E27FC236}">
-                <a16:creationId xmlns:a16="http://schemas.microsoft.com/office/drawing/2014/main" id="{67133D0B-F29D-4F82-920C-EEA9BC06E407}"/>
-              </a:ext>
-            </a:extLst>
-          </p:cNvPr>
-          <p:cNvSpPr>
-            <a:spLocks xmlns:a="http://schemas.openxmlformats.org/drawingml/2006/main" noGrp="1"/>
-          </p:cNvSpPr>
-          <p:nvPr/>
-        </p:nvSpPr>
-        <p:spPr>
-          <a:xfrm xmlns:a="http://schemas.openxmlformats.org/drawingml/2006/main">
-            <a:off x="762000" y="3600450"/>
-            <a:ext cx="2095500" cy="590550"/>
-          </a:xfrm>
-          <a:prstGeom xmlns:a="http://schemas.openxmlformats.org/drawingml/2006/main" prst="rect">
-            <a:avLst/>
-          </a:prstGeom>
-          <a:noFill xmlns:a="http://schemas.openxmlformats.org/drawingml/2006/main"/>
-          <a:ln xmlns:a="http://schemas.openxmlformats.org/drawingml/2006/main" w="0">
-            <a:noFill/>
-          </a:ln>
-        </p:spPr>
-        <p:txBody>
-          <a:bodyPr xmlns:a="http://schemas.openxmlformats.org/drawingml/2006/main" lIns="0" tIns="0" rIns="0" bIns="0" anchor="t">
-            <a:noAutofit/>
-          </a:bodyPr>
-          <a:lstStyle xmlns:a="http://schemas.openxmlformats.org/drawingml/2006/main"/>
-          <a:p xmlns:a="http://schemas.openxmlformats.org/drawingml/2006/main">
-            <a:pPr algn="l">
-              <a:lnSpc>
-                <a:spcPct val="114000"/>
-              </a:lnSpc>
-              <a:buNone/>
-              <a:defRPr sz="2200" b="1">
-                <a:solidFill>
-                  <a:srgbClr val="1F4D78"/>
-                </a:solidFill>
-                <a:latin typeface="微软雅黑"/>
-                <a:ea typeface="微软雅黑"/>
-                <a:cs typeface="微软雅黑"/>
-              </a:defRPr>
-            </a:pPr>
-            <a:r>
-              <a:rPr sz="2200" b="1">
-                <a:solidFill>
-                  <a:srgbClr val="1F4D78"/>
-                </a:solidFill>
-                <a:latin typeface="微软雅黑"/>
-                <a:ea typeface="微软雅黑"/>
-                <a:cs typeface="微软雅黑"/>
-              </a:rPr>
-              <a:t>证据地图</a:t>
-            </a:r>
-          </a:p>
-        </p:txBody>
-      </p:sp>
-      <p:sp>
-        <p:nvSpPr>
-          <p:cNvPr id="20" name="visual-16-14-p15-r3-1">
-            <a:extLst xmlns:a="http://schemas.openxmlformats.org/drawingml/2006/main">
-              <a:ext uri="{FF2B5EF4-FFF2-40B4-BE49-F238E27FC236}">
-                <a16:creationId xmlns:a16="http://schemas.microsoft.com/office/drawing/2014/main" id="{0E9E33FA-096C-49AA-A74F-988A0B44F04D}"/>
-              </a:ext>
-            </a:extLst>
-          </p:cNvPr>
-          <p:cNvSpPr>
-            <a:spLocks xmlns:a="http://schemas.openxmlformats.org/drawingml/2006/main" noGrp="1"/>
-          </p:cNvSpPr>
-          <p:nvPr/>
-        </p:nvSpPr>
-        <p:spPr>
-          <a:xfrm xmlns:a="http://schemas.openxmlformats.org/drawingml/2006/main">
-            <a:off x="2857500" y="3600450"/>
-            <a:ext cx="3619500" cy="590550"/>
-          </a:xfrm>
-          <a:prstGeom xmlns:a="http://schemas.openxmlformats.org/drawingml/2006/main" prst="rect">
-            <a:avLst/>
-          </a:prstGeom>
-          <a:noFill xmlns:a="http://schemas.openxmlformats.org/drawingml/2006/main"/>
-          <a:ln xmlns:a="http://schemas.openxmlformats.org/drawingml/2006/main" w="0">
-            <a:noFill/>
-          </a:ln>
-        </p:spPr>
-        <p:txBody>
-          <a:bodyPr xmlns:a="http://schemas.openxmlformats.org/drawingml/2006/main" lIns="0" tIns="0" rIns="0" bIns="0" anchor="t">
-            <a:noAutofit/>
-          </a:bodyPr>
-          <a:lstStyle xmlns:a="http://schemas.openxmlformats.org/drawingml/2006/main"/>
-          <a:p xmlns:a="http://schemas.openxmlformats.org/drawingml/2006/main">
-            <a:pPr algn="l">
-              <a:lnSpc>
-                <a:spcPct val="114000"/>
-              </a:lnSpc>
-              <a:buNone/>
-              <a:defRPr sz="2200" b="1">
-                <a:solidFill>
-                  <a:srgbClr val="1F4D78"/>
-                </a:solidFill>
-                <a:latin typeface="微软雅黑"/>
-                <a:ea typeface="微软雅黑"/>
-                <a:cs typeface="微软雅黑"/>
-              </a:defRPr>
-            </a:pPr>
-            <a:r>
-              <a:rPr sz="2200" b="1">
-                <a:solidFill>
-                  <a:srgbClr val="1F4D78"/>
-                </a:solidFill>
-                <a:latin typeface="微软雅黑"/>
-                <a:ea typeface="微软雅黑"/>
-                <a:cs typeface="微软雅黑"/>
-              </a:rPr>
-              <a:t>第 5 课初版</a:t>
-            </a:r>
-          </a:p>
-        </p:txBody>
-      </p:sp>
-      <p:sp>
-        <p:nvSpPr>
-          <p:cNvPr id="21" name="visual-16-15-p15-r3-2">
-            <a:extLst xmlns:a="http://schemas.openxmlformats.org/drawingml/2006/main">
-              <a:ext uri="{FF2B5EF4-FFF2-40B4-BE49-F238E27FC236}">
-                <a16:creationId xmlns:a16="http://schemas.microsoft.com/office/drawing/2014/main" id="{467A3564-9B66-47D1-BCA4-43A4D1AFC770}"/>
-              </a:ext>
-            </a:extLst>
-          </p:cNvPr>
-          <p:cNvSpPr>
-            <a:spLocks xmlns:a="http://schemas.openxmlformats.org/drawingml/2006/main" noGrp="1"/>
-          </p:cNvSpPr>
-          <p:nvPr/>
-        </p:nvSpPr>
-        <p:spPr>
-          <a:xfrm xmlns:a="http://schemas.openxmlformats.org/drawingml/2006/main">
-            <a:off x="6477000" y="3600450"/>
-            <a:ext cx="4953000" cy="590550"/>
-          </a:xfrm>
-          <a:prstGeom xmlns:a="http://schemas.openxmlformats.org/drawingml/2006/main" prst="rect">
-            <a:avLst/>
-          </a:prstGeom>
-          <a:noFill xmlns:a="http://schemas.openxmlformats.org/drawingml/2006/main"/>
-          <a:ln xmlns:a="http://schemas.openxmlformats.org/drawingml/2006/main" w="0">
-            <a:noFill/>
-          </a:ln>
-        </p:spPr>
-        <p:txBody>
-          <a:bodyPr xmlns:a="http://schemas.openxmlformats.org/drawingml/2006/main" lIns="0" tIns="0" rIns="0" bIns="0" anchor="t">
-            <a:noAutofit/>
-          </a:bodyPr>
-          <a:lstStyle xmlns:a="http://schemas.openxmlformats.org/drawingml/2006/main"/>
-          <a:p xmlns:a="http://schemas.openxmlformats.org/drawingml/2006/main">
-            <a:pPr algn="l">
-              <a:lnSpc>
-                <a:spcPct val="114000"/>
-              </a:lnSpc>
-              <a:buNone/>
-              <a:defRPr sz="2000" b="0">
-                <a:solidFill>
-                  <a:srgbClr val="1F4D78"/>
-                </a:solidFill>
-                <a:latin typeface="微软雅黑"/>
-                <a:ea typeface="微软雅黑"/>
-                <a:cs typeface="微软雅黑"/>
-              </a:defRPr>
-            </a:pPr>
-            <a:r>
-              <a:rPr sz="2000" b="0">
-                <a:solidFill>
-                  <a:srgbClr val="1F4D78"/>
-                </a:solidFill>
-                <a:latin typeface="微软雅黑"/>
-                <a:ea typeface="微软雅黑"/>
-                <a:cs typeface="微软雅黑"/>
-              </a:rPr>
-              <a:t>直接 / 补充 / 冲突 / 空白</a:t>
-            </a:r>
-          </a:p>
-        </p:txBody>
-      </p:sp>
-      <p:sp>
-        <p:nvSpPr>
-          <p:cNvPr id="22" name="visual-16-16-p15-now0">
-            <a:extLst xmlns:a="http://schemas.openxmlformats.org/drawingml/2006/main">
-              <a:ext uri="{FF2B5EF4-FFF2-40B4-BE49-F238E27FC236}">
-                <a16:creationId xmlns:a16="http://schemas.microsoft.com/office/drawing/2014/main" id="{138B37F5-E96C-4198-9273-B0ABE5972487}"/>
-              </a:ext>
-            </a:extLst>
-          </p:cNvPr>
-          <p:cNvSpPr>
-            <a:spLocks xmlns:a="http://schemas.openxmlformats.org/drawingml/2006/main" noGrp="1"/>
-          </p:cNvSpPr>
-          <p:nvPr/>
-        </p:nvSpPr>
-        <p:spPr>
-          <a:xfrm xmlns:a="http://schemas.openxmlformats.org/drawingml/2006/main">
-            <a:off x="857250" y="4305300"/>
-            <a:ext cx="3333750" cy="476250"/>
-          </a:xfrm>
-          <a:prstGeom xmlns:a="http://schemas.openxmlformats.org/drawingml/2006/main" prst="rect">
-            <a:avLst/>
-          </a:prstGeom>
-          <a:noFill xmlns:a="http://schemas.openxmlformats.org/drawingml/2006/main"/>
-          <a:ln xmlns:a="http://schemas.openxmlformats.org/drawingml/2006/main" w="0">
-            <a:noFill/>
-          </a:ln>
-        </p:spPr>
-        <p:txBody>
-          <a:bodyPr xmlns:a="http://schemas.openxmlformats.org/drawingml/2006/main" lIns="0" tIns="0" rIns="0" bIns="0" anchor="ctr">
-            <a:noAutofit/>
-          </a:bodyPr>
-          <a:lstStyle xmlns:a="http://schemas.openxmlformats.org/drawingml/2006/main"/>
-          <a:p xmlns:a="http://schemas.openxmlformats.org/drawingml/2006/main">
-            <a:pPr algn="l">
-              <a:lnSpc>
-                <a:spcPct val="114000"/>
-              </a:lnSpc>
-              <a:buNone/>
-              <a:defRPr sz="2000" b="0">
-                <a:solidFill>
-                  <a:srgbClr val="1F4D78"/>
-                </a:solidFill>
-                <a:latin typeface="微软雅黑"/>
-                <a:ea typeface="微软雅黑"/>
-                <a:cs typeface="微软雅黑"/>
-              </a:defRPr>
-            </a:pPr>
-            <a:r>
-              <a:rPr sz="2000" b="0">
-                <a:solidFill>
-                  <a:srgbClr val="1F4D78"/>
-                </a:solidFill>
-                <a:latin typeface="微软雅黑"/>
-                <a:ea typeface="微软雅黑"/>
-                <a:cs typeface="微软雅黑"/>
-              </a:rPr>
-              <a:t>5  问题 + 非例 + 命题</a:t>
-            </a:r>
-          </a:p>
-        </p:txBody>
-      </p:sp>
-      <p:sp>
-        <p:nvSpPr>
-          <p:cNvPr id="23" name="visual-16-17-p15-now1">
-            <a:extLst xmlns:a="http://schemas.openxmlformats.org/drawingml/2006/main">
-              <a:ext uri="{FF2B5EF4-FFF2-40B4-BE49-F238E27FC236}">
-                <a16:creationId xmlns:a16="http://schemas.microsoft.com/office/drawing/2014/main" id="{C57F30E5-C28D-4F2D-AAED-4C2DA125FDD5}"/>
-              </a:ext>
-            </a:extLst>
-          </p:cNvPr>
-          <p:cNvSpPr>
-            <a:spLocks xmlns:a="http://schemas.openxmlformats.org/drawingml/2006/main" noGrp="1"/>
-          </p:cNvSpPr>
-          <p:nvPr/>
-        </p:nvSpPr>
-        <p:spPr>
-          <a:xfrm xmlns:a="http://schemas.openxmlformats.org/drawingml/2006/main">
-            <a:off x="4429125" y="4305300"/>
-            <a:ext cx="3333750" cy="476250"/>
-          </a:xfrm>
-          <a:prstGeom xmlns:a="http://schemas.openxmlformats.org/drawingml/2006/main" prst="rect">
-            <a:avLst/>
-          </a:prstGeom>
-          <a:noFill xmlns:a="http://schemas.openxmlformats.org/drawingml/2006/main"/>
-          <a:ln xmlns:a="http://schemas.openxmlformats.org/drawingml/2006/main" w="0">
-            <a:noFill/>
-          </a:ln>
-        </p:spPr>
-        <p:txBody>
-          <a:bodyPr xmlns:a="http://schemas.openxmlformats.org/drawingml/2006/main" lIns="0" tIns="0" rIns="0" bIns="0" anchor="ctr">
-            <a:noAutofit/>
-          </a:bodyPr>
-          <a:lstStyle xmlns:a="http://schemas.openxmlformats.org/drawingml/2006/main"/>
-          <a:p xmlns:a="http://schemas.openxmlformats.org/drawingml/2006/main">
-            <a:pPr algn="l">
-              <a:lnSpc>
-                <a:spcPct val="114000"/>
-              </a:lnSpc>
-              <a:buNone/>
-              <a:defRPr sz="2000" b="1">
-                <a:solidFill>
-                  <a:srgbClr val="1F4D78"/>
-                </a:solidFill>
-                <a:latin typeface="微软雅黑"/>
-                <a:ea typeface="微软雅黑"/>
-                <a:cs typeface="微软雅黑"/>
-              </a:defRPr>
-            </a:pPr>
-            <a:r>
-              <a:rPr sz="2000" b="1">
-                <a:solidFill>
-                  <a:srgbClr val="1F4D78"/>
-                </a:solidFill>
-                <a:latin typeface="微软雅黑"/>
-                <a:ea typeface="微软雅黑"/>
-                <a:cs typeface="微软雅黑"/>
-              </a:rPr>
-              <a:t>6  第一性原理推导</a:t>
-            </a:r>
-          </a:p>
-        </p:txBody>
-      </p:sp>
-      <p:sp>
-        <p:nvSpPr>
-          <p:cNvPr id="24" name="visual-16-18-p15-now2">
-            <a:extLst xmlns:a="http://schemas.openxmlformats.org/drawingml/2006/main">
-              <a:ext uri="{FF2B5EF4-FFF2-40B4-BE49-F238E27FC236}">
-                <a16:creationId xmlns:a16="http://schemas.microsoft.com/office/drawing/2014/main" id="{AA4BD853-A8FC-487A-86DF-D8A4ACABEC68}"/>
-              </a:ext>
-            </a:extLst>
-          </p:cNvPr>
-          <p:cNvSpPr>
-            <a:spLocks xmlns:a="http://schemas.openxmlformats.org/drawingml/2006/main" noGrp="1"/>
-          </p:cNvSpPr>
-          <p:nvPr/>
-        </p:nvSpPr>
-        <p:spPr>
-          <a:xfrm xmlns:a="http://schemas.openxmlformats.org/drawingml/2006/main">
-            <a:off x="8001000" y="4305300"/>
-            <a:ext cx="3333750" cy="476250"/>
-          </a:xfrm>
-          <a:prstGeom xmlns:a="http://schemas.openxmlformats.org/drawingml/2006/main" prst="rect">
-            <a:avLst/>
-          </a:prstGeom>
-          <a:noFill xmlns:a="http://schemas.openxmlformats.org/drawingml/2006/main"/>
-          <a:ln xmlns:a="http://schemas.openxmlformats.org/drawingml/2006/main" w="0">
-            <a:noFill/>
-          </a:ln>
-        </p:spPr>
-        <p:txBody>
-          <a:bodyPr xmlns:a="http://schemas.openxmlformats.org/drawingml/2006/main" lIns="0" tIns="0" rIns="0" bIns="0" anchor="ctr">
-            <a:noAutofit/>
-          </a:bodyPr>
-          <a:lstStyle xmlns:a="http://schemas.openxmlformats.org/drawingml/2006/main"/>
-          <a:p xmlns:a="http://schemas.openxmlformats.org/drawingml/2006/main">
-            <a:pPr algn="l">
-              <a:lnSpc>
-                <a:spcPct val="114000"/>
-              </a:lnSpc>
-              <a:buNone/>
-              <a:defRPr sz="2200" b="1">
-                <a:solidFill>
-                  <a:srgbClr val="1F4D78"/>
-                </a:solidFill>
-                <a:latin typeface="微软雅黑"/>
-                <a:ea typeface="微软雅黑"/>
-                <a:cs typeface="微软雅黑"/>
-              </a:defRPr>
-            </a:pPr>
-            <a:r>
-              <a:rPr sz="2200" b="1">
-                <a:solidFill>
-                  <a:srgbClr val="1F4D78"/>
-                </a:solidFill>
-                <a:latin typeface="微软雅黑"/>
-                <a:ea typeface="微软雅黑"/>
-                <a:cs typeface="微软雅黑"/>
-              </a:rPr>
-              <a:t>7  重要性 + 周期</a:t>
-            </a:r>
-          </a:p>
-        </p:txBody>
-      </p:sp>
-      <p:sp>
-        <p:nvSpPr>
-          <p:cNvPr id="25" name="visual-16-19-p15-now3">
-            <a:extLst xmlns:a="http://schemas.openxmlformats.org/drawingml/2006/main">
-              <a:ext uri="{FF2B5EF4-FFF2-40B4-BE49-F238E27FC236}">
-                <a16:creationId xmlns:a16="http://schemas.microsoft.com/office/drawing/2014/main" id="{F282CFD0-9396-45C8-8D00-9BCCA59B7BA0}"/>
-              </a:ext>
-            </a:extLst>
-          </p:cNvPr>
-          <p:cNvSpPr>
-            <a:spLocks xmlns:a="http://schemas.openxmlformats.org/drawingml/2006/main" noGrp="1"/>
-          </p:cNvSpPr>
-          <p:nvPr/>
-        </p:nvSpPr>
-        <p:spPr>
-          <a:xfrm xmlns:a="http://schemas.openxmlformats.org/drawingml/2006/main">
-            <a:off x="2619375" y="4933950"/>
-            <a:ext cx="3333750" cy="476250"/>
-          </a:xfrm>
-          <a:prstGeom xmlns:a="http://schemas.openxmlformats.org/drawingml/2006/main" prst="rect">
-            <a:avLst/>
-          </a:prstGeom>
-          <a:noFill xmlns:a="http://schemas.openxmlformats.org/drawingml/2006/main"/>
-          <a:ln xmlns:a="http://schemas.openxmlformats.org/drawingml/2006/main" w="0">
-            <a:noFill/>
-          </a:ln>
-        </p:spPr>
-        <p:txBody>
-          <a:bodyPr xmlns:a="http://schemas.openxmlformats.org/drawingml/2006/main" lIns="0" tIns="0" rIns="0" bIns="0" anchor="ctr">
-            <a:noAutofit/>
-          </a:bodyPr>
-          <a:lstStyle xmlns:a="http://schemas.openxmlformats.org/drawingml/2006/main"/>
-          <a:p xmlns:a="http://schemas.openxmlformats.org/drawingml/2006/main">
-            <a:pPr algn="l">
-              <a:lnSpc>
-                <a:spcPct val="114000"/>
-              </a:lnSpc>
-              <a:buNone/>
-              <a:defRPr sz="2200" b="1">
-                <a:solidFill>
-                  <a:srgbClr val="1F4D78"/>
-                </a:solidFill>
-                <a:latin typeface="微软雅黑"/>
-                <a:ea typeface="微软雅黑"/>
-                <a:cs typeface="微软雅黑"/>
-              </a:defRPr>
-            </a:pPr>
-            <a:r>
-              <a:rPr sz="2200" b="1">
-                <a:solidFill>
-                  <a:srgbClr val="1F4D78"/>
-                </a:solidFill>
-                <a:latin typeface="微软雅黑"/>
-                <a:ea typeface="微软雅黑"/>
-                <a:cs typeface="微软雅黑"/>
-              </a:rPr>
-              <a:t>8  真实失败记录</a:t>
-            </a:r>
-          </a:p>
-        </p:txBody>
-      </p:sp>
-      <p:sp>
-        <p:nvSpPr>
-          <p:cNvPr id="26" name="visual-16-20-p15-now4">
-            <a:extLst xmlns:a="http://schemas.openxmlformats.org/drawingml/2006/main">
-              <a:ext uri="{FF2B5EF4-FFF2-40B4-BE49-F238E27FC236}">
-                <a16:creationId xmlns:a16="http://schemas.microsoft.com/office/drawing/2014/main" id="{E277BF8B-7753-4A85-8558-1632E93A7430}"/>
-              </a:ext>
-            </a:extLst>
-          </p:cNvPr>
-          <p:cNvSpPr>
-            <a:spLocks xmlns:a="http://schemas.openxmlformats.org/drawingml/2006/main" noGrp="1"/>
-          </p:cNvSpPr>
-          <p:nvPr/>
-        </p:nvSpPr>
-        <p:spPr>
-          <a:xfrm xmlns:a="http://schemas.openxmlformats.org/drawingml/2006/main">
-            <a:off x="6191250" y="4933950"/>
-            <a:ext cx="3333750" cy="476250"/>
-          </a:xfrm>
-          <a:prstGeom xmlns:a="http://schemas.openxmlformats.org/drawingml/2006/main" prst="rect">
-            <a:avLst/>
-          </a:prstGeom>
-          <a:noFill xmlns:a="http://schemas.openxmlformats.org/drawingml/2006/main"/>
-          <a:ln xmlns:a="http://schemas.openxmlformats.org/drawingml/2006/main" w="0">
-            <a:noFill/>
-          </a:ln>
-        </p:spPr>
-        <p:txBody>
-          <a:bodyPr xmlns:a="http://schemas.openxmlformats.org/drawingml/2006/main" lIns="0" tIns="0" rIns="0" bIns="0" anchor="ctr">
-            <a:noAutofit/>
-          </a:bodyPr>
-          <a:lstStyle xmlns:a="http://schemas.openxmlformats.org/drawingml/2006/main"/>
-          <a:p xmlns:a="http://schemas.openxmlformats.org/drawingml/2006/main">
-            <a:pPr algn="l">
-              <a:lnSpc>
-                <a:spcPct val="114000"/>
-              </a:lnSpc>
-              <a:buNone/>
-              <a:defRPr sz="2200" b="1">
-                <a:solidFill>
-                  <a:srgbClr val="1F4D78"/>
-                </a:solidFill>
-                <a:latin typeface="微软雅黑"/>
-                <a:ea typeface="微软雅黑"/>
-                <a:cs typeface="微软雅黑"/>
-              </a:defRPr>
-            </a:pPr>
-            <a:r>
-              <a:rPr sz="2200" b="1">
-                <a:solidFill>
-                  <a:srgbClr val="1F4D78"/>
-                </a:solidFill>
-                <a:latin typeface="微软雅黑"/>
-                <a:ea typeface="微软雅黑"/>
-                <a:cs typeface="微软雅黑"/>
-              </a:rPr>
-              <a:t>9  AI 记录</a:t>
-            </a:r>
-          </a:p>
-        </p:txBody>
-      </p:sp>
-      <p:sp>
-        <p:nvSpPr>
-          <p:cNvPr id="27" name="visual-16-21-p15-bottom">
-            <a:extLst xmlns:a="http://schemas.openxmlformats.org/drawingml/2006/main">
-              <a:ext uri="{FF2B5EF4-FFF2-40B4-BE49-F238E27FC236}">
-                <a16:creationId xmlns:a16="http://schemas.microsoft.com/office/drawing/2014/main" id="{D19A2C43-BFDD-4602-B884-DDDB5EAB905B}"/>
-              </a:ext>
-            </a:extLst>
-          </p:cNvPr>
-          <p:cNvSpPr>
-            <a:spLocks xmlns:a="http://schemas.openxmlformats.org/drawingml/2006/main" noGrp="1"/>
-          </p:cNvSpPr>
-          <p:nvPr/>
-        </p:nvSpPr>
-        <p:spPr>
-          <a:xfrm xmlns:a="http://schemas.openxmlformats.org/drawingml/2006/main">
-            <a:off x="1666875" y="5486400"/>
-            <a:ext cx="8858250" cy="304800"/>
-          </a:xfrm>
-          <a:prstGeom xmlns:a="http://schemas.openxmlformats.org/drawingml/2006/main" prst="rect">
-            <a:avLst/>
-          </a:prstGeom>
-          <a:noFill xmlns:a="http://schemas.openxmlformats.org/drawingml/2006/main"/>
-          <a:ln xmlns:a="http://schemas.openxmlformats.org/drawingml/2006/main" w="0">
-            <a:noFill/>
-          </a:ln>
-        </p:spPr>
-        <p:txBody>
-          <a:bodyPr xmlns:a="http://schemas.openxmlformats.org/drawingml/2006/main" lIns="0" tIns="0" rIns="0" bIns="0" anchor="ctr">
-            <a:noAutofit/>
-          </a:bodyPr>
-          <a:lstStyle xmlns:a="http://schemas.openxmlformats.org/drawingml/2006/main"/>
-          <a:p xmlns:a="http://schemas.openxmlformats.org/drawingml/2006/main">
-            <a:pPr algn="l">
-              <a:lnSpc>
-                <a:spcPct val="114000"/>
-              </a:lnSpc>
-              <a:buNone/>
-              <a:defRPr sz="2000" b="0">
-                <a:solidFill>
-                  <a:srgbClr val="1F4D78"/>
-                </a:solidFill>
-                <a:latin typeface="微软雅黑"/>
-                <a:ea typeface="微软雅黑"/>
-                <a:cs typeface="微软雅黑"/>
-              </a:defRPr>
-            </a:pPr>
-            <a:r>
-              <a:rPr sz="2000" b="0">
-                <a:solidFill>
-                  <a:srgbClr val="1F4D78"/>
-                </a:solidFill>
-                <a:latin typeface="微软雅黑"/>
-                <a:ea typeface="微软雅黑"/>
-                <a:cs typeface="微软雅黑"/>
-              </a:rPr>
-              <a:t>自查要诚实标记已满足 / 待补全 / 未满足；失败记录不能预先编造。</a:t>
+              <a:t>一项局限记录可以帮助修订问题，不能替代完整问题门材料。</a:t>
             </a:r>
           </a:p>
         </p:txBody>
@@ -16320,8 +18123,8 @@
         </p:nvSpPr>
         <p:spPr>
           <a:xfrm xmlns:a="http://schemas.openxmlformats.org/drawingml/2006/main">
-            <a:off x="1028700" y="28575"/>
-            <a:ext cx="10668000" cy="628650"/>
+            <a:off x="1028700" y="57150"/>
+            <a:ext cx="10668000" cy="571500"/>
           </a:xfrm>
         </p:spPr>
         <p:txBody>
@@ -16331,6 +18134,9 @@
           <a:lstStyle xmlns:a="http://schemas.openxmlformats.org/drawingml/2006/main"/>
           <a:p xmlns:a="http://schemas.openxmlformats.org/drawingml/2006/main">
             <a:pPr algn="l">
+              <a:lnSpc>
+                <a:spcPct val="118000"/>
+              </a:lnSpc>
               <a:buNone/>
             </a:pPr>
             <a:r>
@@ -16378,10 +18184,10 @@
       </p:sp>
       <p:sp>
         <p:nvSpPr>
-          <p:cNvPr id="6" name="visual-22-0-p20-f0">
-            <a:extLst xmlns:a="http://schemas.openxmlformats.org/drawingml/2006/main">
-              <a:ext uri="{FF2B5EF4-FFF2-40B4-BE49-F238E27FC236}">
-                <a16:creationId xmlns:a16="http://schemas.microsoft.com/office/drawing/2014/main" id="{D6A53507-C025-457C-9DB2-FAECB9B0272B}"/>
+          <p:cNvPr id="6" name="content-46">
+            <a:extLst xmlns:a="http://schemas.openxmlformats.org/drawingml/2006/main">
+              <a:ext uri="{FF2B5EF4-FFF2-40B4-BE49-F238E27FC236}">
+                <a16:creationId xmlns:a16="http://schemas.microsoft.com/office/drawing/2014/main" id="{FA4F28BA-3ECE-4A16-BFB1-BFE69B724028}"/>
               </a:ext>
             </a:extLst>
           </p:cNvPr>
@@ -16392,8 +18198,8 @@
         </p:nvSpPr>
         <p:spPr>
           <a:xfrm xmlns:a="http://schemas.openxmlformats.org/drawingml/2006/main">
-            <a:off x="619125" y="1381125"/>
-            <a:ext cx="2190750" cy="876300"/>
+            <a:off x="609600" y="1571625"/>
+            <a:ext cx="10972800" cy="432435"/>
           </a:xfrm>
           <a:prstGeom xmlns:a="http://schemas.openxmlformats.org/drawingml/2006/main" prst="rect">
             <a:avLst/>
@@ -16404,45 +18210,43 @@
           </a:ln>
         </p:spPr>
         <p:txBody>
-          <a:bodyPr xmlns:a="http://schemas.openxmlformats.org/drawingml/2006/main" lIns="0" tIns="0" rIns="0" bIns="0" anchor="t">
-            <a:noAutofit/>
-          </a:bodyPr>
+          <a:bodyPr xmlns:a="http://schemas.openxmlformats.org/drawingml/2006/main" lIns="0" tIns="0" rIns="0" bIns="0" anchor="t"/>
           <a:lstStyle xmlns:a="http://schemas.openxmlformats.org/drawingml/2006/main"/>
           <a:p xmlns:a="http://schemas.openxmlformats.org/drawingml/2006/main">
             <a:pPr algn="l">
               <a:lnSpc>
-                <a:spcPct val="114000"/>
-              </a:lnSpc>
-              <a:buNone/>
-              <a:defRPr sz="2200" b="1">
-                <a:solidFill>
-                  <a:srgbClr val="1F4D78"/>
-                </a:solidFill>
-                <a:latin typeface="微软雅黑"/>
-                <a:ea typeface="微软雅黑"/>
-                <a:cs typeface="微软雅黑"/>
-              </a:defRPr>
-            </a:pPr>
-            <a:r>
-              <a:rPr sz="2200" b="1">
-                <a:solidFill>
-                  <a:srgbClr val="1F4D78"/>
-                </a:solidFill>
-                <a:latin typeface="微软雅黑"/>
-                <a:ea typeface="微软雅黑"/>
-                <a:cs typeface="微软雅黑"/>
-              </a:rPr>
-              <a:t>问题门</a:t>
-            </a:r>
-          </a:p>
-        </p:txBody>
-      </p:sp>
-      <p:sp>
-        <p:nvSpPr>
-          <p:cNvPr id="7" name="visual-22-1-p20-a0">
-            <a:extLst xmlns:a="http://schemas.openxmlformats.org/drawingml/2006/main">
-              <a:ext uri="{FF2B5EF4-FFF2-40B4-BE49-F238E27FC236}">
-                <a16:creationId xmlns:a16="http://schemas.microsoft.com/office/drawing/2014/main" id="{C2C45EE0-590F-41E6-B839-CA06AD33B6AE}"/>
+                <a:spcPct val="118000"/>
+              </a:lnSpc>
+              <a:buNone/>
+              <a:defRPr sz="2400" b="0">
+                <a:solidFill>
+                  <a:srgbClr val="27333D"/>
+                </a:solidFill>
+                <a:latin typeface="微软雅黑"/>
+                <a:ea typeface="微软雅黑"/>
+                <a:cs typeface="微软雅黑"/>
+              </a:defRPr>
+            </a:pPr>
+            <a:r>
+              <a:rPr sz="2400" b="0">
+                <a:solidFill>
+                  <a:srgbClr val="27333D"/>
+                </a:solidFill>
+                <a:latin typeface="微软雅黑"/>
+                <a:ea typeface="微软雅黑"/>
+                <a:cs typeface="微软雅黑"/>
+              </a:rPr>
+              <a:t>退出卡：</a:t>
+            </a:r>
+          </a:p>
+        </p:txBody>
+      </p:sp>
+      <p:sp>
+        <p:nvSpPr>
+          <p:cNvPr id="7" name="content-47">
+            <a:extLst xmlns:a="http://schemas.openxmlformats.org/drawingml/2006/main">
+              <a:ext uri="{FF2B5EF4-FFF2-40B4-BE49-F238E27FC236}">
+                <a16:creationId xmlns:a16="http://schemas.microsoft.com/office/drawing/2014/main" id="{B34BC4CC-1DC7-458B-8E7C-EE304E3CE33C}"/>
               </a:ext>
             </a:extLst>
           </p:cNvPr>
@@ -16453,8 +18257,8 @@
         </p:nvSpPr>
         <p:spPr>
           <a:xfrm xmlns:a="http://schemas.openxmlformats.org/drawingml/2006/main">
-            <a:off x="2857500" y="1619250"/>
-            <a:ext cx="476250" cy="381000"/>
+            <a:off x="609600" y="2261235"/>
+            <a:ext cx="10972800" cy="432435"/>
           </a:xfrm>
           <a:prstGeom xmlns:a="http://schemas.openxmlformats.org/drawingml/2006/main" prst="rect">
             <a:avLst/>
@@ -16465,45 +18269,43 @@
           </a:ln>
         </p:spPr>
         <p:txBody>
-          <a:bodyPr xmlns:a="http://schemas.openxmlformats.org/drawingml/2006/main" lIns="0" tIns="0" rIns="0" bIns="0" anchor="ctr">
-            <a:noAutofit/>
-          </a:bodyPr>
-          <a:lstStyle xmlns:a="http://schemas.openxmlformats.org/drawingml/2006/main"/>
-          <a:p xmlns:a="http://schemas.openxmlformats.org/drawingml/2006/main">
-            <a:pPr algn="ctr">
-              <a:lnSpc>
-                <a:spcPct val="114000"/>
-              </a:lnSpc>
-              <a:buNone/>
-              <a:defRPr sz="2200" b="1">
-                <a:solidFill>
-                  <a:srgbClr val="1F4D78"/>
-                </a:solidFill>
-                <a:latin typeface="微软雅黑"/>
-                <a:ea typeface="微软雅黑"/>
-                <a:cs typeface="微软雅黑"/>
-              </a:defRPr>
-            </a:pPr>
-            <a:r>
-              <a:rPr sz="2200" b="1">
-                <a:solidFill>
-                  <a:srgbClr val="1F4D78"/>
-                </a:solidFill>
-                <a:latin typeface="微软雅黑"/>
-                <a:ea typeface="微软雅黑"/>
-                <a:cs typeface="微软雅黑"/>
-              </a:rPr>
-              <a:t>→</a:t>
-            </a:r>
-          </a:p>
-        </p:txBody>
-      </p:sp>
-      <p:sp>
-        <p:nvSpPr>
-          <p:cNvPr id="8" name="visual-22-2-p20-f1">
-            <a:extLst xmlns:a="http://schemas.openxmlformats.org/drawingml/2006/main">
-              <a:ext uri="{FF2B5EF4-FFF2-40B4-BE49-F238E27FC236}">
-                <a16:creationId xmlns:a16="http://schemas.microsoft.com/office/drawing/2014/main" id="{F390271E-D58F-4684-B1B7-6D47D71995B1}"/>
+          <a:bodyPr xmlns:a="http://schemas.openxmlformats.org/drawingml/2006/main" lIns="0" tIns="0" rIns="0" bIns="0" anchor="t"/>
+          <a:lstStyle xmlns:a="http://schemas.openxmlformats.org/drawingml/2006/main"/>
+          <a:p xmlns:a="http://schemas.openxmlformats.org/drawingml/2006/main">
+            <a:pPr algn="l">
+              <a:lnSpc>
+                <a:spcPct val="118000"/>
+              </a:lnSpc>
+              <a:buNone/>
+              <a:defRPr sz="2400" b="0">
+                <a:solidFill>
+                  <a:srgbClr val="27333D"/>
+                </a:solidFill>
+                <a:latin typeface="微软雅黑"/>
+                <a:ea typeface="微软雅黑"/>
+                <a:cs typeface="微软雅黑"/>
+              </a:defRPr>
+            </a:pPr>
+            <a:r>
+              <a:rPr sz="2400" b="0">
+                <a:solidFill>
+                  <a:srgbClr val="27333D"/>
+                </a:solidFill>
+                <a:latin typeface="微软雅黑"/>
+                <a:ea typeface="微软雅黑"/>
+                <a:cs typeface="微软雅黑"/>
+              </a:rPr>
+              <a:t>当前问题属于主题、问题，还是待验证主张？</a:t>
+            </a:r>
+          </a:p>
+        </p:txBody>
+      </p:sp>
+      <p:sp>
+        <p:nvSpPr>
+          <p:cNvPr id="8" name="content-48">
+            <a:extLst xmlns:a="http://schemas.openxmlformats.org/drawingml/2006/main">
+              <a:ext uri="{FF2B5EF4-FFF2-40B4-BE49-F238E27FC236}">
+                <a16:creationId xmlns:a16="http://schemas.microsoft.com/office/drawing/2014/main" id="{5A90122F-75D3-402C-A718-50C5A20BD99B}"/>
               </a:ext>
             </a:extLst>
           </p:cNvPr>
@@ -16514,8 +18316,8 @@
         </p:nvSpPr>
         <p:spPr>
           <a:xfrm xmlns:a="http://schemas.openxmlformats.org/drawingml/2006/main">
-            <a:off x="3429000" y="1381125"/>
-            <a:ext cx="2190750" cy="876300"/>
+            <a:off x="609600" y="2950845"/>
+            <a:ext cx="10972800" cy="432435"/>
           </a:xfrm>
           <a:prstGeom xmlns:a="http://schemas.openxmlformats.org/drawingml/2006/main" prst="rect">
             <a:avLst/>
@@ -16526,45 +18328,43 @@
           </a:ln>
         </p:spPr>
         <p:txBody>
-          <a:bodyPr xmlns:a="http://schemas.openxmlformats.org/drawingml/2006/main" lIns="0" tIns="0" rIns="0" bIns="0" anchor="t">
-            <a:noAutofit/>
-          </a:bodyPr>
+          <a:bodyPr xmlns:a="http://schemas.openxmlformats.org/drawingml/2006/main" lIns="0" tIns="0" rIns="0" bIns="0" anchor="t"/>
           <a:lstStyle xmlns:a="http://schemas.openxmlformats.org/drawingml/2006/main"/>
           <a:p xmlns:a="http://schemas.openxmlformats.org/drawingml/2006/main">
             <a:pPr algn="l">
               <a:lnSpc>
-                <a:spcPct val="114000"/>
-              </a:lnSpc>
-              <a:buNone/>
-              <a:defRPr sz="2200" b="1">
-                <a:solidFill>
-                  <a:srgbClr val="1F4D78"/>
-                </a:solidFill>
-                <a:latin typeface="微软雅黑"/>
-                <a:ea typeface="微软雅黑"/>
-                <a:cs typeface="微软雅黑"/>
-              </a:defRPr>
-            </a:pPr>
-            <a:r>
-              <a:rPr sz="2200" b="1">
-                <a:solidFill>
-                  <a:srgbClr val="1F4D78"/>
-                </a:solidFill>
-                <a:latin typeface="微软雅黑"/>
-                <a:ea typeface="微软雅黑"/>
-                <a:cs typeface="微软雅黑"/>
-              </a:rPr>
-              <a:t>待验证前提</a:t>
-            </a:r>
-          </a:p>
-        </p:txBody>
-      </p:sp>
-      <p:sp>
-        <p:nvSpPr>
-          <p:cNvPr id="9" name="visual-22-3-p20-a1">
-            <a:extLst xmlns:a="http://schemas.openxmlformats.org/drawingml/2006/main">
-              <a:ext uri="{FF2B5EF4-FFF2-40B4-BE49-F238E27FC236}">
-                <a16:creationId xmlns:a16="http://schemas.microsoft.com/office/drawing/2014/main" id="{24471705-2670-4D36-B88E-0FB4D366E776}"/>
+                <a:spcPct val="118000"/>
+              </a:lnSpc>
+              <a:buNone/>
+              <a:defRPr sz="2400" b="0">
+                <a:solidFill>
+                  <a:srgbClr val="27333D"/>
+                </a:solidFill>
+                <a:latin typeface="微软雅黑"/>
+                <a:ea typeface="微软雅黑"/>
+                <a:cs typeface="微软雅黑"/>
+              </a:defRPr>
+            </a:pPr>
+            <a:r>
+              <a:rPr sz="2400" b="0">
+                <a:solidFill>
+                  <a:srgbClr val="27333D"/>
+                </a:solidFill>
+                <a:latin typeface="微软雅黑"/>
+                <a:ea typeface="微软雅黑"/>
+                <a:cs typeface="微软雅黑"/>
+              </a:rPr>
+              <a:t>哪项观察可能推翻主张？</a:t>
+            </a:r>
+          </a:p>
+        </p:txBody>
+      </p:sp>
+      <p:sp>
+        <p:nvSpPr>
+          <p:cNvPr id="9" name="content-49">
+            <a:extLst xmlns:a="http://schemas.openxmlformats.org/drawingml/2006/main">
+              <a:ext uri="{FF2B5EF4-FFF2-40B4-BE49-F238E27FC236}">
+                <a16:creationId xmlns:a16="http://schemas.microsoft.com/office/drawing/2014/main" id="{6216A49C-F99C-4D1C-B0D0-B9DFDAE69014}"/>
               </a:ext>
             </a:extLst>
           </p:cNvPr>
@@ -16575,8 +18375,8 @@
         </p:nvSpPr>
         <p:spPr>
           <a:xfrm xmlns:a="http://schemas.openxmlformats.org/drawingml/2006/main">
-            <a:off x="5667375" y="1619250"/>
-            <a:ext cx="476250" cy="381000"/>
+            <a:off x="609600" y="3640455"/>
+            <a:ext cx="10972800" cy="432435"/>
           </a:xfrm>
           <a:prstGeom xmlns:a="http://schemas.openxmlformats.org/drawingml/2006/main" prst="rect">
             <a:avLst/>
@@ -16587,45 +18387,43 @@
           </a:ln>
         </p:spPr>
         <p:txBody>
-          <a:bodyPr xmlns:a="http://schemas.openxmlformats.org/drawingml/2006/main" lIns="0" tIns="0" rIns="0" bIns="0" anchor="ctr">
-            <a:noAutofit/>
-          </a:bodyPr>
-          <a:lstStyle xmlns:a="http://schemas.openxmlformats.org/drawingml/2006/main"/>
-          <a:p xmlns:a="http://schemas.openxmlformats.org/drawingml/2006/main">
-            <a:pPr algn="ctr">
-              <a:lnSpc>
-                <a:spcPct val="114000"/>
-              </a:lnSpc>
-              <a:buNone/>
-              <a:defRPr sz="2200" b="1">
-                <a:solidFill>
-                  <a:srgbClr val="1F4D78"/>
-                </a:solidFill>
-                <a:latin typeface="微软雅黑"/>
-                <a:ea typeface="微软雅黑"/>
-                <a:cs typeface="微软雅黑"/>
-              </a:defRPr>
-            </a:pPr>
-            <a:r>
-              <a:rPr sz="2200" b="1">
-                <a:solidFill>
-                  <a:srgbClr val="1F4D78"/>
-                </a:solidFill>
-                <a:latin typeface="微软雅黑"/>
-                <a:ea typeface="微软雅黑"/>
-                <a:cs typeface="微软雅黑"/>
-              </a:rPr>
-              <a:t>→</a:t>
-            </a:r>
-          </a:p>
-        </p:txBody>
-      </p:sp>
-      <p:sp>
-        <p:nvSpPr>
-          <p:cNvPr id="10" name="visual-22-4-p20-f2">
-            <a:extLst xmlns:a="http://schemas.openxmlformats.org/drawingml/2006/main">
-              <a:ext uri="{FF2B5EF4-FFF2-40B4-BE49-F238E27FC236}">
-                <a16:creationId xmlns:a16="http://schemas.microsoft.com/office/drawing/2014/main" id="{CACDA569-8180-49E5-A693-89EC8AE01176}"/>
+          <a:bodyPr xmlns:a="http://schemas.openxmlformats.org/drawingml/2006/main" lIns="0" tIns="0" rIns="0" bIns="0" anchor="t"/>
+          <a:lstStyle xmlns:a="http://schemas.openxmlformats.org/drawingml/2006/main"/>
+          <a:p xmlns:a="http://schemas.openxmlformats.org/drawingml/2006/main">
+            <a:pPr algn="l">
+              <a:lnSpc>
+                <a:spcPct val="118000"/>
+              </a:lnSpc>
+              <a:buNone/>
+              <a:defRPr sz="2400" b="0">
+                <a:solidFill>
+                  <a:srgbClr val="27333D"/>
+                </a:solidFill>
+                <a:latin typeface="微软雅黑"/>
+                <a:ea typeface="微软雅黑"/>
+                <a:cs typeface="微软雅黑"/>
+              </a:defRPr>
+            </a:pPr>
+            <a:r>
+              <a:rPr sz="2400" b="0">
+                <a:solidFill>
+                  <a:srgbClr val="27333D"/>
+                </a:solidFill>
+                <a:latin typeface="微软雅黑"/>
+                <a:ea typeface="微软雅黑"/>
+                <a:cs typeface="微软雅黑"/>
+              </a:rPr>
+              <a:t>九项问题门条件中，最需要补哪一项？</a:t>
+            </a:r>
+          </a:p>
+        </p:txBody>
+      </p:sp>
+      <p:sp>
+        <p:nvSpPr>
+          <p:cNvPr id="10" name="content-50">
+            <a:extLst xmlns:a="http://schemas.openxmlformats.org/drawingml/2006/main">
+              <a:ext uri="{FF2B5EF4-FFF2-40B4-BE49-F238E27FC236}">
+                <a16:creationId xmlns:a16="http://schemas.microsoft.com/office/drawing/2014/main" id="{6F2AE119-F49E-4448-BFC8-94D452117F3C}"/>
               </a:ext>
             </a:extLst>
           </p:cNvPr>
@@ -16636,8 +18434,8 @@
         </p:nvSpPr>
         <p:spPr>
           <a:xfrm xmlns:a="http://schemas.openxmlformats.org/drawingml/2006/main">
-            <a:off x="6238875" y="1381125"/>
-            <a:ext cx="2190750" cy="876300"/>
+            <a:off x="609600" y="4330065"/>
+            <a:ext cx="10972800" cy="432435"/>
           </a:xfrm>
           <a:prstGeom xmlns:a="http://schemas.openxmlformats.org/drawingml/2006/main" prst="rect">
             <a:avLst/>
@@ -16648,72 +18446,43 @@
           </a:ln>
         </p:spPr>
         <p:txBody>
-          <a:bodyPr xmlns:a="http://schemas.openxmlformats.org/drawingml/2006/main" lIns="0" tIns="0" rIns="0" bIns="0" anchor="t">
-            <a:noAutofit/>
-          </a:bodyPr>
+          <a:bodyPr xmlns:a="http://schemas.openxmlformats.org/drawingml/2006/main" lIns="0" tIns="0" rIns="0" bIns="0" anchor="t"/>
           <a:lstStyle xmlns:a="http://schemas.openxmlformats.org/drawingml/2006/main"/>
           <a:p xmlns:a="http://schemas.openxmlformats.org/drawingml/2006/main">
             <a:pPr algn="l">
               <a:lnSpc>
-                <a:spcPct val="114000"/>
-              </a:lnSpc>
-              <a:buNone/>
-              <a:defRPr sz="2200" b="1">
-                <a:solidFill>
-                  <a:srgbClr val="1F4D78"/>
-                </a:solidFill>
-                <a:latin typeface="微软雅黑"/>
-                <a:ea typeface="微软雅黑"/>
-                <a:cs typeface="微软雅黑"/>
-              </a:defRPr>
-            </a:pPr>
-            <a:r>
-              <a:rPr sz="2200" b="1">
-                <a:solidFill>
-                  <a:srgbClr val="1F4D78"/>
-                </a:solidFill>
-                <a:latin typeface="微软雅黑"/>
-                <a:ea typeface="微软雅黑"/>
-                <a:cs typeface="微软雅黑"/>
-              </a:rPr>
-              <a:t>第 7 课</a:t>
-            </a:r>
-          </a:p>
-          <a:p xmlns:a="http://schemas.openxmlformats.org/drawingml/2006/main">
-            <a:pPr algn="l">
-              <a:lnSpc>
-                <a:spcPct val="114000"/>
-              </a:lnSpc>
-              <a:buNone/>
-              <a:defRPr sz="2200" b="1">
-                <a:solidFill>
-                  <a:srgbClr val="1F4D78"/>
-                </a:solidFill>
-                <a:latin typeface="微软雅黑"/>
-                <a:ea typeface="微软雅黑"/>
-                <a:cs typeface="微软雅黑"/>
-              </a:defRPr>
-            </a:pPr>
-            <a:r>
-              <a:rPr sz="2200" b="1">
-                <a:solidFill>
-                  <a:srgbClr val="1F4D78"/>
-                </a:solidFill>
-                <a:latin typeface="微软雅黑"/>
-                <a:ea typeface="微软雅黑"/>
-                <a:cs typeface="微软雅黑"/>
-              </a:rPr>
-              <a:t>机制假设</a:t>
-            </a:r>
-          </a:p>
-        </p:txBody>
-      </p:sp>
-      <p:sp>
-        <p:nvSpPr>
-          <p:cNvPr id="11" name="visual-22-5-p20-a2">
-            <a:extLst xmlns:a="http://schemas.openxmlformats.org/drawingml/2006/main">
-              <a:ext uri="{FF2B5EF4-FFF2-40B4-BE49-F238E27FC236}">
-                <a16:creationId xmlns:a16="http://schemas.microsoft.com/office/drawing/2014/main" id="{FAE1DB63-586A-4C3E-9CDF-54C917EA8011}"/>
+                <a:spcPct val="118000"/>
+              </a:lnSpc>
+              <a:buNone/>
+              <a:defRPr sz="2400" b="0">
+                <a:solidFill>
+                  <a:srgbClr val="27333D"/>
+                </a:solidFill>
+                <a:latin typeface="微软雅黑"/>
+                <a:ea typeface="微软雅黑"/>
+                <a:cs typeface="微软雅黑"/>
+              </a:defRPr>
+            </a:pPr>
+            <a:r>
+              <a:rPr sz="2400" b="0">
+                <a:solidFill>
+                  <a:srgbClr val="27333D"/>
+                </a:solidFill>
+                <a:latin typeface="微软雅黑"/>
+                <a:ea typeface="微软雅黑"/>
+                <a:cs typeface="微软雅黑"/>
+              </a:rPr>
+              <a:t>课后提交问题门材料包，包含至少 3 张相关完整精读卡。</a:t>
+            </a:r>
+          </a:p>
+        </p:txBody>
+      </p:sp>
+      <p:sp>
+        <p:nvSpPr>
+          <p:cNvPr id="11" name="content-51">
+            <a:extLst xmlns:a="http://schemas.openxmlformats.org/drawingml/2006/main">
+              <a:ext uri="{FF2B5EF4-FFF2-40B4-BE49-F238E27FC236}">
+                <a16:creationId xmlns:a16="http://schemas.microsoft.com/office/drawing/2014/main" id="{7B25087A-5C5C-45FA-A72D-87E9C61AF013}"/>
               </a:ext>
             </a:extLst>
           </p:cNvPr>
@@ -16724,8 +18493,8 @@
         </p:nvSpPr>
         <p:spPr>
           <a:xfrm xmlns:a="http://schemas.openxmlformats.org/drawingml/2006/main">
-            <a:off x="8477250" y="1619250"/>
-            <a:ext cx="476250" cy="381000"/>
+            <a:off x="609600" y="5019675"/>
+            <a:ext cx="10972800" cy="432435"/>
           </a:xfrm>
           <a:prstGeom xmlns:a="http://schemas.openxmlformats.org/drawingml/2006/main" prst="rect">
             <a:avLst/>
@@ -16736,17 +18505,15 @@
           </a:ln>
         </p:spPr>
         <p:txBody>
-          <a:bodyPr xmlns:a="http://schemas.openxmlformats.org/drawingml/2006/main" lIns="0" tIns="0" rIns="0" bIns="0" anchor="ctr">
-            <a:noAutofit/>
-          </a:bodyPr>
-          <a:lstStyle xmlns:a="http://schemas.openxmlformats.org/drawingml/2006/main"/>
-          <a:p xmlns:a="http://schemas.openxmlformats.org/drawingml/2006/main">
-            <a:pPr algn="ctr">
-              <a:lnSpc>
-                <a:spcPct val="114000"/>
-              </a:lnSpc>
-              <a:buNone/>
-              <a:defRPr sz="2200" b="1">
+          <a:bodyPr xmlns:a="http://schemas.openxmlformats.org/drawingml/2006/main" lIns="0" tIns="0" rIns="0" bIns="0" anchor="t"/>
+          <a:lstStyle xmlns:a="http://schemas.openxmlformats.org/drawingml/2006/main"/>
+          <a:p xmlns:a="http://schemas.openxmlformats.org/drawingml/2006/main">
+            <a:pPr algn="l">
+              <a:lnSpc>
+                <a:spcPct val="118000"/>
+              </a:lnSpc>
+              <a:buNone/>
+              <a:defRPr sz="2400" b="0">
                 <a:solidFill>
                   <a:srgbClr val="1F4D78"/>
                 </a:solidFill>
@@ -16756,7 +18523,7 @@
               </a:defRPr>
             </a:pPr>
             <a:r>
-              <a:rPr sz="2200" b="1">
+              <a:rPr sz="2400" b="0">
                 <a:solidFill>
                   <a:srgbClr val="1F4D78"/>
                 </a:solidFill>
@@ -16764,400 +18531,7 @@
                 <a:ea typeface="微软雅黑"/>
                 <a:cs typeface="微软雅黑"/>
               </a:rPr>
-              <a:t>→</a:t>
-            </a:r>
-          </a:p>
-        </p:txBody>
-      </p:sp>
-      <p:sp>
-        <p:nvSpPr>
-          <p:cNvPr id="12" name="visual-22-6-p20-f3">
-            <a:extLst xmlns:a="http://schemas.openxmlformats.org/drawingml/2006/main">
-              <a:ext uri="{FF2B5EF4-FFF2-40B4-BE49-F238E27FC236}">
-                <a16:creationId xmlns:a16="http://schemas.microsoft.com/office/drawing/2014/main" id="{834CF385-BB97-4DBE-8EC9-F6F0A0656AF1}"/>
-              </a:ext>
-            </a:extLst>
-          </p:cNvPr>
-          <p:cNvSpPr>
-            <a:spLocks xmlns:a="http://schemas.openxmlformats.org/drawingml/2006/main" noGrp="1"/>
-          </p:cNvSpPr>
-          <p:nvPr/>
-        </p:nvSpPr>
-        <p:spPr>
-          <a:xfrm xmlns:a="http://schemas.openxmlformats.org/drawingml/2006/main">
-            <a:off x="9048750" y="1381125"/>
-            <a:ext cx="2190750" cy="876300"/>
-          </a:xfrm>
-          <a:prstGeom xmlns:a="http://schemas.openxmlformats.org/drawingml/2006/main" prst="rect">
-            <a:avLst/>
-          </a:prstGeom>
-          <a:noFill xmlns:a="http://schemas.openxmlformats.org/drawingml/2006/main"/>
-          <a:ln xmlns:a="http://schemas.openxmlformats.org/drawingml/2006/main" w="0">
-            <a:noFill/>
-          </a:ln>
-        </p:spPr>
-        <p:txBody>
-          <a:bodyPr xmlns:a="http://schemas.openxmlformats.org/drawingml/2006/main" lIns="0" tIns="0" rIns="0" bIns="0" anchor="t">
-            <a:noAutofit/>
-          </a:bodyPr>
-          <a:lstStyle xmlns:a="http://schemas.openxmlformats.org/drawingml/2006/main"/>
-          <a:p xmlns:a="http://schemas.openxmlformats.org/drawingml/2006/main">
-            <a:pPr algn="l">
-              <a:lnSpc>
-                <a:spcPct val="114000"/>
-              </a:lnSpc>
-              <a:buNone/>
-              <a:defRPr sz="2200" b="1">
-                <a:solidFill>
-                  <a:srgbClr val="1F4D78"/>
-                </a:solidFill>
-                <a:latin typeface="微软雅黑"/>
-                <a:ea typeface="微软雅黑"/>
-                <a:cs typeface="微软雅黑"/>
-              </a:defRPr>
-            </a:pPr>
-            <a:r>
-              <a:rPr sz="2200" b="1">
-                <a:solidFill>
-                  <a:srgbClr val="1F4D78"/>
-                </a:solidFill>
-                <a:latin typeface="微软雅黑"/>
-                <a:ea typeface="微软雅黑"/>
-                <a:cs typeface="微软雅黑"/>
-              </a:rPr>
-              <a:t>第 9 课</a:t>
-            </a:r>
-          </a:p>
-          <a:p xmlns:a="http://schemas.openxmlformats.org/drawingml/2006/main">
-            <a:pPr algn="l">
-              <a:lnSpc>
-                <a:spcPct val="114000"/>
-              </a:lnSpc>
-              <a:buNone/>
-              <a:defRPr sz="2200" b="1">
-                <a:solidFill>
-                  <a:srgbClr val="1F4D78"/>
-                </a:solidFill>
-                <a:latin typeface="微软雅黑"/>
-                <a:ea typeface="微软雅黑"/>
-                <a:cs typeface="微软雅黑"/>
-              </a:defRPr>
-            </a:pPr>
-            <a:r>
-              <a:rPr sz="2200" b="1">
-                <a:solidFill>
-                  <a:srgbClr val="1F4D78"/>
-                </a:solidFill>
-                <a:latin typeface="微软雅黑"/>
-                <a:ea typeface="微软雅黑"/>
-                <a:cs typeface="微软雅黑"/>
-              </a:rPr>
-              <a:t>实验规格</a:t>
-            </a:r>
-          </a:p>
-        </p:txBody>
-      </p:sp>
-      <p:sp>
-        <p:nvSpPr>
-          <p:cNvPr id="13" name="visual-22-7-p20-exit">
-            <a:extLst xmlns:a="http://schemas.openxmlformats.org/drawingml/2006/main">
-              <a:ext uri="{FF2B5EF4-FFF2-40B4-BE49-F238E27FC236}">
-                <a16:creationId xmlns:a16="http://schemas.microsoft.com/office/drawing/2014/main" id="{72AE4613-D67C-4942-896B-12CEABFF3F5A}"/>
-              </a:ext>
-            </a:extLst>
-          </p:cNvPr>
-          <p:cNvSpPr>
-            <a:spLocks xmlns:a="http://schemas.openxmlformats.org/drawingml/2006/main" noGrp="1"/>
-          </p:cNvSpPr>
-          <p:nvPr/>
-        </p:nvSpPr>
-        <p:spPr>
-          <a:xfrm xmlns:a="http://schemas.openxmlformats.org/drawingml/2006/main">
-            <a:off x="619125" y="3048000"/>
-            <a:ext cx="1714500" cy="476250"/>
-          </a:xfrm>
-          <a:prstGeom xmlns:a="http://schemas.openxmlformats.org/drawingml/2006/main" prst="rect">
-            <a:avLst/>
-          </a:prstGeom>
-          <a:noFill xmlns:a="http://schemas.openxmlformats.org/drawingml/2006/main"/>
-          <a:ln xmlns:a="http://schemas.openxmlformats.org/drawingml/2006/main" w="0">
-            <a:noFill/>
-          </a:ln>
-        </p:spPr>
-        <p:txBody>
-          <a:bodyPr xmlns:a="http://schemas.openxmlformats.org/drawingml/2006/main" lIns="0" tIns="0" rIns="0" bIns="0" anchor="ctr">
-            <a:noAutofit/>
-          </a:bodyPr>
-          <a:lstStyle xmlns:a="http://schemas.openxmlformats.org/drawingml/2006/main"/>
-          <a:p xmlns:a="http://schemas.openxmlformats.org/drawingml/2006/main">
-            <a:pPr algn="l">
-              <a:lnSpc>
-                <a:spcPct val="114000"/>
-              </a:lnSpc>
-              <a:buNone/>
-              <a:defRPr sz="2200" b="1">
-                <a:solidFill>
-                  <a:srgbClr val="1F4D78"/>
-                </a:solidFill>
-                <a:latin typeface="微软雅黑"/>
-                <a:ea typeface="微软雅黑"/>
-                <a:cs typeface="微软雅黑"/>
-              </a:defRPr>
-            </a:pPr>
-            <a:r>
-              <a:rPr sz="2200" b="1">
-                <a:solidFill>
-                  <a:srgbClr val="1F4D78"/>
-                </a:solidFill>
-                <a:latin typeface="微软雅黑"/>
-                <a:ea typeface="微软雅黑"/>
-                <a:cs typeface="微软雅黑"/>
-              </a:rPr>
-              <a:t>退出卡</a:t>
-            </a:r>
-          </a:p>
-        </p:txBody>
-      </p:sp>
-      <p:sp>
-        <p:nvSpPr>
-          <p:cNvPr id="14" name="visual-22-8-p20-q0">
-            <a:extLst xmlns:a="http://schemas.openxmlformats.org/drawingml/2006/main">
-              <a:ext uri="{FF2B5EF4-FFF2-40B4-BE49-F238E27FC236}">
-                <a16:creationId xmlns:a16="http://schemas.microsoft.com/office/drawing/2014/main" id="{79026E0D-2BDB-4957-9ABD-C8CD34044DE5}"/>
-              </a:ext>
-            </a:extLst>
-          </p:cNvPr>
-          <p:cNvSpPr>
-            <a:spLocks xmlns:a="http://schemas.openxmlformats.org/drawingml/2006/main" noGrp="1"/>
-          </p:cNvSpPr>
-          <p:nvPr/>
-        </p:nvSpPr>
-        <p:spPr>
-          <a:xfrm xmlns:a="http://schemas.openxmlformats.org/drawingml/2006/main">
-            <a:off x="2667000" y="2857500"/>
-            <a:ext cx="8096250" cy="552450"/>
-          </a:xfrm>
-          <a:prstGeom xmlns:a="http://schemas.openxmlformats.org/drawingml/2006/main" prst="rect">
-            <a:avLst/>
-          </a:prstGeom>
-          <a:noFill xmlns:a="http://schemas.openxmlformats.org/drawingml/2006/main"/>
-          <a:ln xmlns:a="http://schemas.openxmlformats.org/drawingml/2006/main" w="0">
-            <a:noFill/>
-          </a:ln>
-        </p:spPr>
-        <p:txBody>
-          <a:bodyPr xmlns:a="http://schemas.openxmlformats.org/drawingml/2006/main" lIns="0" tIns="0" rIns="0" bIns="0" anchor="ctr">
-            <a:noAutofit/>
-          </a:bodyPr>
-          <a:lstStyle xmlns:a="http://schemas.openxmlformats.org/drawingml/2006/main"/>
-          <a:p xmlns:a="http://schemas.openxmlformats.org/drawingml/2006/main">
-            <a:pPr algn="l">
-              <a:lnSpc>
-                <a:spcPct val="114000"/>
-              </a:lnSpc>
-              <a:buNone/>
-              <a:defRPr sz="2000" b="0">
-                <a:solidFill>
-                  <a:srgbClr val="1F4D78"/>
-                </a:solidFill>
-                <a:latin typeface="微软雅黑"/>
-                <a:ea typeface="微软雅黑"/>
-                <a:cs typeface="微软雅黑"/>
-              </a:defRPr>
-            </a:pPr>
-            <a:r>
-              <a:rPr sz="2000" b="0">
-                <a:solidFill>
-                  <a:srgbClr val="1F4D78"/>
-                </a:solidFill>
-                <a:latin typeface="微软雅黑"/>
-                <a:ea typeface="微软雅黑"/>
-                <a:cs typeface="微软雅黑"/>
-              </a:rPr>
-              <a:t>你最可能缺哪一项门条件？</a:t>
-            </a:r>
-          </a:p>
-        </p:txBody>
-      </p:sp>
-      <p:sp>
-        <p:nvSpPr>
-          <p:cNvPr id="15" name="visual-22-9-p20-q1">
-            <a:extLst xmlns:a="http://schemas.openxmlformats.org/drawingml/2006/main">
-              <a:ext uri="{FF2B5EF4-FFF2-40B4-BE49-F238E27FC236}">
-                <a16:creationId xmlns:a16="http://schemas.microsoft.com/office/drawing/2014/main" id="{3B88629D-DC76-47E3-8C33-913D5E081D0C}"/>
-              </a:ext>
-            </a:extLst>
-          </p:cNvPr>
-          <p:cNvSpPr>
-            <a:spLocks xmlns:a="http://schemas.openxmlformats.org/drawingml/2006/main" noGrp="1"/>
-          </p:cNvSpPr>
-          <p:nvPr/>
-        </p:nvSpPr>
-        <p:spPr>
-          <a:xfrm xmlns:a="http://schemas.openxmlformats.org/drawingml/2006/main">
-            <a:off x="2667000" y="3638550"/>
-            <a:ext cx="8096250" cy="552450"/>
-          </a:xfrm>
-          <a:prstGeom xmlns:a="http://schemas.openxmlformats.org/drawingml/2006/main" prst="rect">
-            <a:avLst/>
-          </a:prstGeom>
-          <a:noFill xmlns:a="http://schemas.openxmlformats.org/drawingml/2006/main"/>
-          <a:ln xmlns:a="http://schemas.openxmlformats.org/drawingml/2006/main" w="0">
-            <a:noFill/>
-          </a:ln>
-        </p:spPr>
-        <p:txBody>
-          <a:bodyPr xmlns:a="http://schemas.openxmlformats.org/drawingml/2006/main" lIns="0" tIns="0" rIns="0" bIns="0" anchor="ctr">
-            <a:noAutofit/>
-          </a:bodyPr>
-          <a:lstStyle xmlns:a="http://schemas.openxmlformats.org/drawingml/2006/main"/>
-          <a:p xmlns:a="http://schemas.openxmlformats.org/drawingml/2006/main">
-            <a:pPr algn="l">
-              <a:lnSpc>
-                <a:spcPct val="114000"/>
-              </a:lnSpc>
-              <a:buNone/>
-              <a:defRPr sz="2400" b="0">
-                <a:solidFill>
-                  <a:srgbClr val="27333D"/>
-                </a:solidFill>
-                <a:latin typeface="微软雅黑"/>
-                <a:ea typeface="微软雅黑"/>
-                <a:cs typeface="微软雅黑"/>
-              </a:defRPr>
-            </a:pPr>
-            <a:r>
-              <a:rPr sz="2400" b="0">
-                <a:solidFill>
-                  <a:srgbClr val="27333D"/>
-                </a:solidFill>
-                <a:latin typeface="微软雅黑"/>
-                <a:ea typeface="微软雅黑"/>
-                <a:cs typeface="微软雅黑"/>
-              </a:rPr>
-              <a:t>选题理由能否用四维比较说清？</a:t>
-            </a:r>
-          </a:p>
-        </p:txBody>
-      </p:sp>
-      <p:sp>
-        <p:nvSpPr>
-          <p:cNvPr id="16" name="visual-22-10-p20-q2">
-            <a:extLst xmlns:a="http://schemas.openxmlformats.org/drawingml/2006/main">
-              <a:ext uri="{FF2B5EF4-FFF2-40B4-BE49-F238E27FC236}">
-                <a16:creationId xmlns:a16="http://schemas.microsoft.com/office/drawing/2014/main" id="{74A37F8E-13C4-4428-91BD-DA3A56A5EFD1}"/>
-              </a:ext>
-            </a:extLst>
-          </p:cNvPr>
-          <p:cNvSpPr>
-            <a:spLocks xmlns:a="http://schemas.openxmlformats.org/drawingml/2006/main" noGrp="1"/>
-          </p:cNvSpPr>
-          <p:nvPr/>
-        </p:nvSpPr>
-        <p:spPr>
-          <a:xfrm xmlns:a="http://schemas.openxmlformats.org/drawingml/2006/main">
-            <a:off x="2667000" y="4419600"/>
-            <a:ext cx="8096250" cy="552450"/>
-          </a:xfrm>
-          <a:prstGeom xmlns:a="http://schemas.openxmlformats.org/drawingml/2006/main" prst="rect">
-            <a:avLst/>
-          </a:prstGeom>
-          <a:noFill xmlns:a="http://schemas.openxmlformats.org/drawingml/2006/main"/>
-          <a:ln xmlns:a="http://schemas.openxmlformats.org/drawingml/2006/main" w="0">
-            <a:noFill/>
-          </a:ln>
-        </p:spPr>
-        <p:txBody>
-          <a:bodyPr xmlns:a="http://schemas.openxmlformats.org/drawingml/2006/main" lIns="0" tIns="0" rIns="0" bIns="0" anchor="ctr">
-            <a:noAutofit/>
-          </a:bodyPr>
-          <a:lstStyle xmlns:a="http://schemas.openxmlformats.org/drawingml/2006/main"/>
-          <a:p xmlns:a="http://schemas.openxmlformats.org/drawingml/2006/main">
-            <a:pPr algn="l">
-              <a:lnSpc>
-                <a:spcPct val="114000"/>
-              </a:lnSpc>
-              <a:buNone/>
-              <a:defRPr sz="2400" b="0">
-                <a:solidFill>
-                  <a:srgbClr val="27333D"/>
-                </a:solidFill>
-                <a:latin typeface="微软雅黑"/>
-                <a:ea typeface="微软雅黑"/>
-                <a:cs typeface="微软雅黑"/>
-              </a:defRPr>
-            </a:pPr>
-            <a:r>
-              <a:rPr sz="2400" b="0">
-                <a:solidFill>
-                  <a:srgbClr val="27333D"/>
-                </a:solidFill>
-                <a:latin typeface="微软雅黑"/>
-                <a:ea typeface="微软雅黑"/>
-                <a:cs typeface="微软雅黑"/>
-              </a:rPr>
-              <a:t>哪条待验证前提将进入机制假设？</a:t>
-            </a:r>
-          </a:p>
-        </p:txBody>
-      </p:sp>
-      <p:sp>
-        <p:nvSpPr>
-          <p:cNvPr id="17" name="visual-22-11-p20-bottom">
-            <a:extLst xmlns:a="http://schemas.openxmlformats.org/drawingml/2006/main">
-              <a:ext uri="{FF2B5EF4-FFF2-40B4-BE49-F238E27FC236}">
-                <a16:creationId xmlns:a16="http://schemas.microsoft.com/office/drawing/2014/main" id="{259A3E4C-CAE2-414D-A76C-651C0F70D5AC}"/>
-              </a:ext>
-            </a:extLst>
-          </p:cNvPr>
-          <p:cNvSpPr>
-            <a:spLocks xmlns:a="http://schemas.openxmlformats.org/drawingml/2006/main" noGrp="1"/>
-          </p:cNvSpPr>
-          <p:nvPr/>
-        </p:nvSpPr>
-        <p:spPr>
-          <a:xfrm xmlns:a="http://schemas.openxmlformats.org/drawingml/2006/main">
-            <a:off x="1428750" y="5381625"/>
-            <a:ext cx="9334500" cy="361950"/>
-          </a:xfrm>
-          <a:prstGeom xmlns:a="http://schemas.openxmlformats.org/drawingml/2006/main" prst="rect">
-            <a:avLst/>
-          </a:prstGeom>
-          <a:noFill xmlns:a="http://schemas.openxmlformats.org/drawingml/2006/main"/>
-          <a:ln xmlns:a="http://schemas.openxmlformats.org/drawingml/2006/main" w="0">
-            <a:noFill/>
-          </a:ln>
-        </p:spPr>
-        <p:txBody>
-          <a:bodyPr xmlns:a="http://schemas.openxmlformats.org/drawingml/2006/main" lIns="0" tIns="0" rIns="0" bIns="0" anchor="ctr">
-            <a:noAutofit/>
-          </a:bodyPr>
-          <a:lstStyle xmlns:a="http://schemas.openxmlformats.org/drawingml/2006/main"/>
-          <a:p xmlns:a="http://schemas.openxmlformats.org/drawingml/2006/main">
-            <a:pPr algn="l">
-              <a:lnSpc>
-                <a:spcPct val="114000"/>
-              </a:lnSpc>
-              <a:buNone/>
-              <a:defRPr sz="2000" b="0">
-                <a:solidFill>
-                  <a:srgbClr val="1F4D78"/>
-                </a:solidFill>
-                <a:latin typeface="微软雅黑"/>
-                <a:ea typeface="微软雅黑"/>
-                <a:cs typeface="微软雅黑"/>
-              </a:defRPr>
-            </a:pPr>
-            <a:r>
-              <a:rPr sz="2000" b="0">
-                <a:solidFill>
-                  <a:srgbClr val="1F4D78"/>
-                </a:solidFill>
-                <a:latin typeface="微软雅黑"/>
-                <a:ea typeface="微软雅黑"/>
-                <a:cs typeface="微软雅黑"/>
-              </a:rPr>
-              <a:t>保存当前项目版本；第 7 课从待验证前提出发，不跳过问题门直接做实验。</a:t>
+              <a:t>第 7 课：机制假设、研究判断与实验设计。</a:t>
             </a:r>
           </a:p>
         </p:txBody>
@@ -18233,8 +19607,8 @@
         </p:nvSpPr>
         <p:spPr>
           <a:xfrm xmlns:a="http://schemas.openxmlformats.org/drawingml/2006/main">
-            <a:off x="1028700" y="28575"/>
-            <a:ext cx="10668000" cy="628650"/>
+            <a:off x="1028700" y="57150"/>
+            <a:ext cx="10668000" cy="571500"/>
           </a:xfrm>
         </p:spPr>
         <p:txBody>
@@ -18244,6 +19618,9 @@
           <a:lstStyle xmlns:a="http://schemas.openxmlformats.org/drawingml/2006/main"/>
           <a:p xmlns:a="http://schemas.openxmlformats.org/drawingml/2006/main">
             <a:pPr algn="l">
+              <a:lnSpc>
+                <a:spcPct val="118000"/>
+              </a:lnSpc>
               <a:buNone/>
             </a:pPr>
             <a:r>
@@ -18289,24 +19666,343 @@
           </a:p>
         </p:txBody>
       </p:sp>
-      <p:sp>
-        <p:nvSpPr>
-          <p:cNvPr id="6" name="visual-4-0-p04-h0">
-            <a:extLst xmlns:a="http://schemas.openxmlformats.org/drawingml/2006/main">
-              <a:ext uri="{FF2B5EF4-FFF2-40B4-BE49-F238E27FC236}">
-                <a16:creationId xmlns:a16="http://schemas.microsoft.com/office/drawing/2014/main" id="{09CB8D2F-51AA-4DC1-A3C5-46F015747ECE}"/>
-              </a:ext>
-            </a:extLst>
-          </p:cNvPr>
-          <p:cNvSpPr>
-            <a:spLocks xmlns:a="http://schemas.openxmlformats.org/drawingml/2006/main" noGrp="1"/>
-          </p:cNvSpPr>
+      <p:graphicFrame>
+        <p:nvGraphicFramePr>
+          <p:cNvPr id="10" name="native-table-20"/>
+          <p:cNvGraphicFramePr/>
           <p:nvPr/>
-        </p:nvSpPr>
-        <p:spPr>
-          <a:xfrm xmlns:a="http://schemas.openxmlformats.org/drawingml/2006/main">
-            <a:off x="619125" y="1238250"/>
-            <a:ext cx="1619250" cy="428625"/>
+        </p:nvGraphicFramePr>
+        <p:xfrm>
+          <a:off xmlns:a="http://schemas.openxmlformats.org/drawingml/2006/main" x="609600" y="1476375"/>
+          <a:ext xmlns:a="http://schemas.openxmlformats.org/drawingml/2006/main" cx="10972800" cy="2476500"/>
+        </p:xfrm>
+        <a:graphic xmlns:a="http://schemas.openxmlformats.org/drawingml/2006/main">
+          <a:graphicData uri="http://schemas.openxmlformats.org/drawingml/2006/table">
+            <a:tbl>
+              <a:tblPr/>
+              <a:tblGrid>
+                <a:gridCol w="1981200"/>
+                <a:gridCol w="5715000"/>
+                <a:gridCol w="3276600"/>
+              </a:tblGrid>
+              <a:tr h="542925">
+                <a:tc>
+                  <a:txBody>
+                    <a:bodyPr/>
+                    <a:lstStyle/>
+                    <a:p>
+                      <a:r>
+                        <a:rPr sz="2000" b="1">
+                          <a:solidFill>
+                            <a:srgbClr val="1F4D78"/>
+                          </a:solidFill>
+                          <a:latin typeface="微软雅黑"/>
+                          <a:ea typeface="微软雅黑"/>
+                          <a:cs typeface="微软雅黑"/>
+                        </a:rPr>
+                        <a:t>层次</a:t>
+                      </a:r>
+                    </a:p>
+                  </a:txBody>
+                  <a:tcPr marL="123825" marR="123825" marT="85725" marB="85725" anchor="ctr">
+                    <a:solidFill>
+                      <a:srgbClr val="F4F6F8"/>
+                    </a:solidFill>
+                  </a:tcPr>
+                </a:tc>
+                <a:tc>
+                  <a:txBody>
+                    <a:bodyPr/>
+                    <a:lstStyle/>
+                    <a:p>
+                      <a:r>
+                        <a:rPr sz="2000" b="1">
+                          <a:solidFill>
+                            <a:srgbClr val="1F4D78"/>
+                          </a:solidFill>
+                          <a:latin typeface="微软雅黑"/>
+                          <a:ea typeface="微软雅黑"/>
+                          <a:cs typeface="微软雅黑"/>
+                        </a:rPr>
+                        <a:t>典型表述</a:t>
+                      </a:r>
+                    </a:p>
+                  </a:txBody>
+                  <a:tcPr marL="123825" marR="123825" marT="85725" marB="85725" anchor="ctr">
+                    <a:solidFill>
+                      <a:srgbClr val="F4F6F8"/>
+                    </a:solidFill>
+                  </a:tcPr>
+                </a:tc>
+                <a:tc>
+                  <a:txBody>
+                    <a:bodyPr/>
+                    <a:lstStyle/>
+                    <a:p>
+                      <a:r>
+                        <a:rPr sz="2000" b="1">
+                          <a:solidFill>
+                            <a:srgbClr val="1F4D78"/>
+                          </a:solidFill>
+                          <a:latin typeface="微软雅黑"/>
+                          <a:ea typeface="微软雅黑"/>
+                          <a:cs typeface="微软雅黑"/>
+                        </a:rPr>
+                        <a:t>还需回答</a:t>
+                      </a:r>
+                    </a:p>
+                  </a:txBody>
+                  <a:tcPr marL="123825" marR="123825" marT="85725" marB="85725" anchor="ctr">
+                    <a:solidFill>
+                      <a:srgbClr val="F4F6F8"/>
+                    </a:solidFill>
+                  </a:tcPr>
+                </a:tc>
+              </a:tr>
+              <a:tr h="542925">
+                <a:tc>
+                  <a:txBody>
+                    <a:bodyPr/>
+                    <a:lstStyle/>
+                    <a:p>
+                      <a:r>
+                        <a:rPr sz="2000">
+                          <a:solidFill>
+                            <a:srgbClr val="27333D"/>
+                          </a:solidFill>
+                          <a:latin typeface="微软雅黑"/>
+                          <a:ea typeface="微软雅黑"/>
+                          <a:cs typeface="微软雅黑"/>
+                        </a:rPr>
+                        <a:t>主题</a:t>
+                      </a:r>
+                    </a:p>
+                  </a:txBody>
+                  <a:tcPr marL="123825" marR="123825" marT="85725" marB="85725" anchor="ctr">
+                    <a:solidFill>
+                      <a:srgbClr val="FFFFFF"/>
+                    </a:solidFill>
+                  </a:tcPr>
+                </a:tc>
+                <a:tc>
+                  <a:txBody>
+                    <a:bodyPr/>
+                    <a:lstStyle/>
+                    <a:p>
+                      <a:r>
+                        <a:rPr sz="2000">
+                          <a:solidFill>
+                            <a:srgbClr val="27333D"/>
+                          </a:solidFill>
+                          <a:latin typeface="微软雅黑"/>
+                          <a:ea typeface="微软雅黑"/>
+                          <a:cs typeface="微软雅黑"/>
+                        </a:rPr>
+                        <a:t>AI 辅助论文阅读</a:t>
+                      </a:r>
+                    </a:p>
+                  </a:txBody>
+                  <a:tcPr marL="123825" marR="123825" marT="85725" marB="85725" anchor="ctr">
+                    <a:solidFill>
+                      <a:srgbClr val="FFFFFF"/>
+                    </a:solidFill>
+                  </a:tcPr>
+                </a:tc>
+                <a:tc>
+                  <a:txBody>
+                    <a:bodyPr/>
+                    <a:lstStyle/>
+                    <a:p>
+                      <a:r>
+                        <a:rPr sz="2000">
+                          <a:solidFill>
+                            <a:srgbClr val="27333D"/>
+                          </a:solidFill>
+                          <a:latin typeface="微软雅黑"/>
+                          <a:ea typeface="微软雅黑"/>
+                          <a:cs typeface="微软雅黑"/>
+                        </a:rPr>
+                        <a:t>对象、任务与比较</a:t>
+                      </a:r>
+                    </a:p>
+                  </a:txBody>
+                  <a:tcPr marL="123825" marR="123825" marT="85725" marB="85725" anchor="ctr">
+                    <a:solidFill>
+                      <a:srgbClr val="FFFFFF"/>
+                    </a:solidFill>
+                  </a:tcPr>
+                </a:tc>
+              </a:tr>
+              <a:tr h="847725">
+                <a:tc>
+                  <a:txBody>
+                    <a:bodyPr/>
+                    <a:lstStyle/>
+                    <a:p>
+                      <a:r>
+                        <a:rPr sz="2000">
+                          <a:solidFill>
+                            <a:srgbClr val="27333D"/>
+                          </a:solidFill>
+                          <a:latin typeface="微软雅黑"/>
+                          <a:ea typeface="微软雅黑"/>
+                          <a:cs typeface="微软雅黑"/>
+                        </a:rPr>
+                        <a:t>问题</a:t>
+                      </a:r>
+                    </a:p>
+                  </a:txBody>
+                  <a:tcPr marL="123825" marR="123825" marT="85725" marB="85725" anchor="ctr">
+                    <a:solidFill>
+                      <a:srgbClr val="FFFFFF"/>
+                    </a:solidFill>
+                  </a:tcPr>
+                </a:tc>
+                <a:tc>
+                  <a:txBody>
+                    <a:bodyPr/>
+                    <a:lstStyle/>
+                    <a:p>
+                      <a:r>
+                        <a:rPr sz="2000">
+                          <a:solidFill>
+                            <a:srgbClr val="27333D"/>
+                          </a:solidFill>
+                          <a:latin typeface="微软雅黑"/>
+                          <a:ea typeface="微软雅黑"/>
+                          <a:cs typeface="微软雅黑"/>
+                        </a:rPr>
+                        <a:t>在限定材料中，阅读卡是否比自由摘要少遗漏条件？</a:t>
+                      </a:r>
+                    </a:p>
+                  </a:txBody>
+                  <a:tcPr marL="123825" marR="123825" marT="85725" marB="85725" anchor="ctr">
+                    <a:solidFill>
+                      <a:srgbClr val="FFFFFF"/>
+                    </a:solidFill>
+                  </a:tcPr>
+                </a:tc>
+                <a:tc>
+                  <a:txBody>
+                    <a:bodyPr/>
+                    <a:lstStyle/>
+                    <a:p>
+                      <a:r>
+                        <a:rPr sz="2000">
+                          <a:solidFill>
+                            <a:srgbClr val="27333D"/>
+                          </a:solidFill>
+                          <a:latin typeface="微软雅黑"/>
+                          <a:ea typeface="微软雅黑"/>
+                          <a:cs typeface="微软雅黑"/>
+                        </a:rPr>
+                        <a:t>可检验的候选答案</a:t>
+                      </a:r>
+                    </a:p>
+                  </a:txBody>
+                  <a:tcPr marL="123825" marR="123825" marT="85725" marB="85725" anchor="ctr">
+                    <a:solidFill>
+                      <a:srgbClr val="FFFFFF"/>
+                    </a:solidFill>
+                  </a:tcPr>
+                </a:tc>
+              </a:tr>
+              <a:tr h="542925">
+                <a:tc>
+                  <a:txBody>
+                    <a:bodyPr/>
+                    <a:lstStyle/>
+                    <a:p>
+                      <a:r>
+                        <a:rPr sz="2000">
+                          <a:solidFill>
+                            <a:srgbClr val="27333D"/>
+                          </a:solidFill>
+                          <a:latin typeface="微软雅黑"/>
+                          <a:ea typeface="微软雅黑"/>
+                          <a:cs typeface="微软雅黑"/>
+                        </a:rPr>
+                        <a:t>待验证主张</a:t>
+                      </a:r>
+                    </a:p>
+                  </a:txBody>
+                  <a:tcPr marL="123825" marR="123825" marT="85725" marB="85725" anchor="ctr">
+                    <a:solidFill>
+                      <a:srgbClr val="FFFFFF"/>
+                    </a:solidFill>
+                  </a:tcPr>
+                </a:tc>
+                <a:tc>
+                  <a:txBody>
+                    <a:bodyPr/>
+                    <a:lstStyle/>
+                    <a:p>
+                      <a:r>
+                        <a:rPr sz="2000">
+                          <a:solidFill>
+                            <a:srgbClr val="27333D"/>
+                          </a:solidFill>
+                          <a:latin typeface="微软雅黑"/>
+                          <a:ea typeface="微软雅黑"/>
+                          <a:cs typeface="微软雅黑"/>
+                        </a:rPr>
+                        <a:t>阅读卡组的限定条件遗漏率更低。</a:t>
+                      </a:r>
+                    </a:p>
+                  </a:txBody>
+                  <a:tcPr marL="123825" marR="123825" marT="85725" marB="85725" anchor="ctr">
+                    <a:solidFill>
+                      <a:srgbClr val="FFFFFF"/>
+                    </a:solidFill>
+                  </a:tcPr>
+                </a:tc>
+                <a:tc>
+                  <a:txBody>
+                    <a:bodyPr/>
+                    <a:lstStyle/>
+                    <a:p>
+                      <a:r>
+                        <a:rPr sz="2000">
+                          <a:solidFill>
+                            <a:srgbClr val="27333D"/>
+                          </a:solidFill>
+                          <a:latin typeface="微软雅黑"/>
+                          <a:ea typeface="微软雅黑"/>
+                          <a:cs typeface="微软雅黑"/>
+                        </a:rPr>
+                        <a:t>同口径结果与适用边界</a:t>
+                      </a:r>
+                    </a:p>
+                  </a:txBody>
+                  <a:tcPr marL="123825" marR="123825" marT="85725" marB="85725" anchor="ctr">
+                    <a:solidFill>
+                      <a:srgbClr val="FFFFFF"/>
+                    </a:solidFill>
+                  </a:tcPr>
+                </a:tc>
+              </a:tr>
+            </a:tbl>
+          </a:graphicData>
+        </a:graphic>
+      </p:graphicFrame>
+      <p:sp>
+        <p:nvSpPr>
+          <p:cNvPr id="7" name="content-21">
+            <a:extLst xmlns:a="http://schemas.openxmlformats.org/drawingml/2006/main">
+              <a:ext uri="{FF2B5EF4-FFF2-40B4-BE49-F238E27FC236}">
+                <a16:creationId xmlns:a16="http://schemas.microsoft.com/office/drawing/2014/main" id="{110429CC-A062-4EA9-9EA7-3CB373B65FB8}"/>
+              </a:ext>
+            </a:extLst>
+          </p:cNvPr>
+          <p:cNvSpPr>
+            <a:spLocks xmlns:a="http://schemas.openxmlformats.org/drawingml/2006/main" noGrp="1"/>
+          </p:cNvSpPr>
+          <p:nvPr/>
+        </p:nvSpPr>
+        <p:spPr>
+          <a:xfrm xmlns:a="http://schemas.openxmlformats.org/drawingml/2006/main">
+            <a:off x="609600" y="4238625"/>
+            <a:ext cx="10972800" cy="386715"/>
           </a:xfrm>
           <a:prstGeom xmlns:a="http://schemas.openxmlformats.org/drawingml/2006/main" prst="rect">
             <a:avLst/>
@@ -18317,444 +20013,15 @@
           </a:ln>
         </p:spPr>
         <p:txBody>
-          <a:bodyPr xmlns:a="http://schemas.openxmlformats.org/drawingml/2006/main" lIns="0" tIns="0" rIns="0" bIns="0" anchor="ctr">
-            <a:noAutofit/>
-          </a:bodyPr>
+          <a:bodyPr xmlns:a="http://schemas.openxmlformats.org/drawingml/2006/main" lIns="0" tIns="0" rIns="0" bIns="0" anchor="t"/>
           <a:lstStyle xmlns:a="http://schemas.openxmlformats.org/drawingml/2006/main"/>
           <a:p xmlns:a="http://schemas.openxmlformats.org/drawingml/2006/main">
             <a:pPr algn="l">
               <a:lnSpc>
-                <a:spcPct val="114000"/>
-              </a:lnSpc>
-              <a:buNone/>
-              <a:defRPr sz="2200" b="1">
-                <a:solidFill>
-                  <a:srgbClr val="1F4D78"/>
-                </a:solidFill>
-                <a:latin typeface="微软雅黑"/>
-                <a:ea typeface="微软雅黑"/>
-                <a:cs typeface="微软雅黑"/>
-              </a:defRPr>
-            </a:pPr>
-            <a:r>
-              <a:rPr sz="2200" b="1">
-                <a:solidFill>
-                  <a:srgbClr val="1F4D78"/>
-                </a:solidFill>
-                <a:latin typeface="微软雅黑"/>
-                <a:ea typeface="微软雅黑"/>
-                <a:cs typeface="微软雅黑"/>
-              </a:rPr>
-              <a:t>层次</a:t>
-            </a:r>
-          </a:p>
-        </p:txBody>
-      </p:sp>
-      <p:sp>
-        <p:nvSpPr>
-          <p:cNvPr id="7" name="visual-4-1-p04-h1">
-            <a:extLst xmlns:a="http://schemas.openxmlformats.org/drawingml/2006/main">
-              <a:ext uri="{FF2B5EF4-FFF2-40B4-BE49-F238E27FC236}">
-                <a16:creationId xmlns:a16="http://schemas.microsoft.com/office/drawing/2014/main" id="{94F779DE-B60B-49B9-8DA9-5507F2364E6E}"/>
-              </a:ext>
-            </a:extLst>
-          </p:cNvPr>
-          <p:cNvSpPr>
-            <a:spLocks xmlns:a="http://schemas.openxmlformats.org/drawingml/2006/main" noGrp="1"/>
-          </p:cNvSpPr>
-          <p:nvPr/>
-        </p:nvSpPr>
-        <p:spPr>
-          <a:xfrm xmlns:a="http://schemas.openxmlformats.org/drawingml/2006/main">
-            <a:off x="2238375" y="1238250"/>
-            <a:ext cx="6191250" cy="428625"/>
-          </a:xfrm>
-          <a:prstGeom xmlns:a="http://schemas.openxmlformats.org/drawingml/2006/main" prst="rect">
-            <a:avLst/>
-          </a:prstGeom>
-          <a:noFill xmlns:a="http://schemas.openxmlformats.org/drawingml/2006/main"/>
-          <a:ln xmlns:a="http://schemas.openxmlformats.org/drawingml/2006/main" w="0">
-            <a:noFill/>
-          </a:ln>
-        </p:spPr>
-        <p:txBody>
-          <a:bodyPr xmlns:a="http://schemas.openxmlformats.org/drawingml/2006/main" lIns="0" tIns="0" rIns="0" bIns="0" anchor="ctr">
-            <a:noAutofit/>
-          </a:bodyPr>
-          <a:lstStyle xmlns:a="http://schemas.openxmlformats.org/drawingml/2006/main"/>
-          <a:p xmlns:a="http://schemas.openxmlformats.org/drawingml/2006/main">
-            <a:pPr algn="l">
-              <a:lnSpc>
-                <a:spcPct val="114000"/>
-              </a:lnSpc>
-              <a:buNone/>
-              <a:defRPr sz="2200" b="1">
-                <a:solidFill>
-                  <a:srgbClr val="1F4D78"/>
-                </a:solidFill>
-                <a:latin typeface="微软雅黑"/>
-                <a:ea typeface="微软雅黑"/>
-                <a:cs typeface="微软雅黑"/>
-              </a:defRPr>
-            </a:pPr>
-            <a:r>
-              <a:rPr sz="2200" b="1">
-                <a:solidFill>
-                  <a:srgbClr val="1F4D78"/>
-                </a:solidFill>
-                <a:latin typeface="微软雅黑"/>
-                <a:ea typeface="微软雅黑"/>
-                <a:cs typeface="微软雅黑"/>
-              </a:rPr>
-              <a:t>典型表述</a:t>
-            </a:r>
-          </a:p>
-        </p:txBody>
-      </p:sp>
-      <p:sp>
-        <p:nvSpPr>
-          <p:cNvPr id="8" name="visual-4-2-p04-h2">
-            <a:extLst xmlns:a="http://schemas.openxmlformats.org/drawingml/2006/main">
-              <a:ext uri="{FF2B5EF4-FFF2-40B4-BE49-F238E27FC236}">
-                <a16:creationId xmlns:a16="http://schemas.microsoft.com/office/drawing/2014/main" id="{5D74E568-A952-44BD-AE51-0D489EFB527A}"/>
-              </a:ext>
-            </a:extLst>
-          </p:cNvPr>
-          <p:cNvSpPr>
-            <a:spLocks xmlns:a="http://schemas.openxmlformats.org/drawingml/2006/main" noGrp="1"/>
-          </p:cNvSpPr>
-          <p:nvPr/>
-        </p:nvSpPr>
-        <p:spPr>
-          <a:xfrm xmlns:a="http://schemas.openxmlformats.org/drawingml/2006/main">
-            <a:off x="8429625" y="1238250"/>
-            <a:ext cx="3143250" cy="428625"/>
-          </a:xfrm>
-          <a:prstGeom xmlns:a="http://schemas.openxmlformats.org/drawingml/2006/main" prst="rect">
-            <a:avLst/>
-          </a:prstGeom>
-          <a:noFill xmlns:a="http://schemas.openxmlformats.org/drawingml/2006/main"/>
-          <a:ln xmlns:a="http://schemas.openxmlformats.org/drawingml/2006/main" w="0">
-            <a:noFill/>
-          </a:ln>
-        </p:spPr>
-        <p:txBody>
-          <a:bodyPr xmlns:a="http://schemas.openxmlformats.org/drawingml/2006/main" lIns="0" tIns="0" rIns="0" bIns="0" anchor="ctr">
-            <a:noAutofit/>
-          </a:bodyPr>
-          <a:lstStyle xmlns:a="http://schemas.openxmlformats.org/drawingml/2006/main"/>
-          <a:p xmlns:a="http://schemas.openxmlformats.org/drawingml/2006/main">
-            <a:pPr algn="l">
-              <a:lnSpc>
-                <a:spcPct val="114000"/>
-              </a:lnSpc>
-              <a:buNone/>
-              <a:defRPr sz="2200" b="1">
-                <a:solidFill>
-                  <a:srgbClr val="1F4D78"/>
-                </a:solidFill>
-                <a:latin typeface="微软雅黑"/>
-                <a:ea typeface="微软雅黑"/>
-                <a:cs typeface="微软雅黑"/>
-              </a:defRPr>
-            </a:pPr>
-            <a:r>
-              <a:rPr sz="2200" b="1">
-                <a:solidFill>
-                  <a:srgbClr val="1F4D78"/>
-                </a:solidFill>
-                <a:latin typeface="微软雅黑"/>
-                <a:ea typeface="微软雅黑"/>
-                <a:cs typeface="微软雅黑"/>
-              </a:rPr>
-              <a:t>仍缺什么</a:t>
-            </a:r>
-          </a:p>
-        </p:txBody>
-      </p:sp>
-      <p:sp>
-        <p:nvSpPr>
-          <p:cNvPr id="9" name="visual-4-3-p04-r0-0">
-            <a:extLst xmlns:a="http://schemas.openxmlformats.org/drawingml/2006/main">
-              <a:ext uri="{FF2B5EF4-FFF2-40B4-BE49-F238E27FC236}">
-                <a16:creationId xmlns:a16="http://schemas.microsoft.com/office/drawing/2014/main" id="{37CAC32C-E1EC-46E3-A977-ED8A2D14BC7A}"/>
-              </a:ext>
-            </a:extLst>
-          </p:cNvPr>
-          <p:cNvSpPr>
-            <a:spLocks xmlns:a="http://schemas.openxmlformats.org/drawingml/2006/main" noGrp="1"/>
-          </p:cNvSpPr>
-          <p:nvPr/>
-        </p:nvSpPr>
-        <p:spPr>
-          <a:xfrm xmlns:a="http://schemas.openxmlformats.org/drawingml/2006/main">
-            <a:off x="619125" y="1666875"/>
-            <a:ext cx="1619250" cy="904875"/>
-          </a:xfrm>
-          <a:prstGeom xmlns:a="http://schemas.openxmlformats.org/drawingml/2006/main" prst="rect">
-            <a:avLst/>
-          </a:prstGeom>
-          <a:noFill xmlns:a="http://schemas.openxmlformats.org/drawingml/2006/main"/>
-          <a:ln xmlns:a="http://schemas.openxmlformats.org/drawingml/2006/main" w="0">
-            <a:noFill/>
-          </a:ln>
-        </p:spPr>
-        <p:txBody>
-          <a:bodyPr xmlns:a="http://schemas.openxmlformats.org/drawingml/2006/main" lIns="0" tIns="0" rIns="0" bIns="0" anchor="t">
-            <a:noAutofit/>
-          </a:bodyPr>
-          <a:lstStyle xmlns:a="http://schemas.openxmlformats.org/drawingml/2006/main"/>
-          <a:p xmlns:a="http://schemas.openxmlformats.org/drawingml/2006/main">
-            <a:pPr algn="l">
-              <a:lnSpc>
-                <a:spcPct val="114000"/>
-              </a:lnSpc>
-              <a:buNone/>
-              <a:defRPr sz="2200" b="1">
-                <a:solidFill>
-                  <a:srgbClr val="1F4D78"/>
-                </a:solidFill>
-                <a:latin typeface="微软雅黑"/>
-                <a:ea typeface="微软雅黑"/>
-                <a:cs typeface="微软雅黑"/>
-              </a:defRPr>
-            </a:pPr>
-            <a:r>
-              <a:rPr sz="2200" b="1">
-                <a:solidFill>
-                  <a:srgbClr val="1F4D78"/>
-                </a:solidFill>
-                <a:latin typeface="微软雅黑"/>
-                <a:ea typeface="微软雅黑"/>
-                <a:cs typeface="微软雅黑"/>
-              </a:rPr>
-              <a:t>主题</a:t>
-            </a:r>
-          </a:p>
-        </p:txBody>
-      </p:sp>
-      <p:sp>
-        <p:nvSpPr>
-          <p:cNvPr id="10" name="visual-4-4-p04-r0-1">
-            <a:extLst xmlns:a="http://schemas.openxmlformats.org/drawingml/2006/main">
-              <a:ext uri="{FF2B5EF4-FFF2-40B4-BE49-F238E27FC236}">
-                <a16:creationId xmlns:a16="http://schemas.microsoft.com/office/drawing/2014/main" id="{75C18C70-937D-4EB8-9C46-0D1536BC3AAC}"/>
-              </a:ext>
-            </a:extLst>
-          </p:cNvPr>
-          <p:cNvSpPr>
-            <a:spLocks xmlns:a="http://schemas.openxmlformats.org/drawingml/2006/main" noGrp="1"/>
-          </p:cNvSpPr>
-          <p:nvPr/>
-        </p:nvSpPr>
-        <p:spPr>
-          <a:xfrm xmlns:a="http://schemas.openxmlformats.org/drawingml/2006/main">
-            <a:off x="2238375" y="1666875"/>
-            <a:ext cx="6191250" cy="904875"/>
-          </a:xfrm>
-          <a:prstGeom xmlns:a="http://schemas.openxmlformats.org/drawingml/2006/main" prst="rect">
-            <a:avLst/>
-          </a:prstGeom>
-          <a:noFill xmlns:a="http://schemas.openxmlformats.org/drawingml/2006/main"/>
-          <a:ln xmlns:a="http://schemas.openxmlformats.org/drawingml/2006/main" w="0">
-            <a:noFill/>
-          </a:ln>
-        </p:spPr>
-        <p:txBody>
-          <a:bodyPr xmlns:a="http://schemas.openxmlformats.org/drawingml/2006/main" lIns="0" tIns="0" rIns="0" bIns="0" anchor="t">
-            <a:noAutofit/>
-          </a:bodyPr>
-          <a:lstStyle xmlns:a="http://schemas.openxmlformats.org/drawingml/2006/main"/>
-          <a:p xmlns:a="http://schemas.openxmlformats.org/drawingml/2006/main">
-            <a:pPr algn="l">
-              <a:lnSpc>
-                <a:spcPct val="114000"/>
-              </a:lnSpc>
-              <a:buNone/>
-              <a:defRPr sz="2000" b="1">
-                <a:solidFill>
-                  <a:srgbClr val="1F4D78"/>
-                </a:solidFill>
-                <a:latin typeface="微软雅黑"/>
-                <a:ea typeface="微软雅黑"/>
-                <a:cs typeface="微软雅黑"/>
-              </a:defRPr>
-            </a:pPr>
-            <a:r>
-              <a:rPr sz="2000" b="1">
-                <a:solidFill>
-                  <a:srgbClr val="1F4D78"/>
-                </a:solidFill>
-                <a:latin typeface="微软雅黑"/>
-                <a:ea typeface="微软雅黑"/>
-                <a:cs typeface="微软雅黑"/>
-              </a:rPr>
-              <a:t>AI 辅助论文阅读</a:t>
-            </a:r>
-          </a:p>
-        </p:txBody>
-      </p:sp>
-      <p:sp>
-        <p:nvSpPr>
-          <p:cNvPr id="11" name="visual-4-5-p04-r0-2">
-            <a:extLst xmlns:a="http://schemas.openxmlformats.org/drawingml/2006/main">
-              <a:ext uri="{FF2B5EF4-FFF2-40B4-BE49-F238E27FC236}">
-                <a16:creationId xmlns:a16="http://schemas.microsoft.com/office/drawing/2014/main" id="{30728CB2-329A-40C5-8ABC-AF6499A33741}"/>
-              </a:ext>
-            </a:extLst>
-          </p:cNvPr>
-          <p:cNvSpPr>
-            <a:spLocks xmlns:a="http://schemas.openxmlformats.org/drawingml/2006/main" noGrp="1"/>
-          </p:cNvSpPr>
-          <p:nvPr/>
-        </p:nvSpPr>
-        <p:spPr>
-          <a:xfrm xmlns:a="http://schemas.openxmlformats.org/drawingml/2006/main">
-            <a:off x="8429625" y="1666875"/>
-            <a:ext cx="3143250" cy="904875"/>
-          </a:xfrm>
-          <a:prstGeom xmlns:a="http://schemas.openxmlformats.org/drawingml/2006/main" prst="rect">
-            <a:avLst/>
-          </a:prstGeom>
-          <a:noFill xmlns:a="http://schemas.openxmlformats.org/drawingml/2006/main"/>
-          <a:ln xmlns:a="http://schemas.openxmlformats.org/drawingml/2006/main" w="0">
-            <a:noFill/>
-          </a:ln>
-        </p:spPr>
-        <p:txBody>
-          <a:bodyPr xmlns:a="http://schemas.openxmlformats.org/drawingml/2006/main" lIns="0" tIns="0" rIns="0" bIns="0" anchor="t">
-            <a:noAutofit/>
-          </a:bodyPr>
-          <a:lstStyle xmlns:a="http://schemas.openxmlformats.org/drawingml/2006/main"/>
-          <a:p xmlns:a="http://schemas.openxmlformats.org/drawingml/2006/main">
-            <a:pPr algn="l">
-              <a:lnSpc>
-                <a:spcPct val="114000"/>
-              </a:lnSpc>
-              <a:buNone/>
-              <a:defRPr sz="2000" b="0">
-                <a:solidFill>
-                  <a:srgbClr val="1F4D78"/>
-                </a:solidFill>
-                <a:latin typeface="微软雅黑"/>
-                <a:ea typeface="微软雅黑"/>
-                <a:cs typeface="微软雅黑"/>
-              </a:defRPr>
-            </a:pPr>
-            <a:r>
-              <a:rPr sz="2000" b="0">
-                <a:solidFill>
-                  <a:srgbClr val="1F4D78"/>
-                </a:solidFill>
-                <a:latin typeface="微软雅黑"/>
-                <a:ea typeface="微软雅黑"/>
-                <a:cs typeface="微软雅黑"/>
-              </a:rPr>
-              <a:t>范围、条件、可比对象</a:t>
-            </a:r>
-          </a:p>
-        </p:txBody>
-      </p:sp>
-      <p:sp>
-        <p:nvSpPr>
-          <p:cNvPr id="12" name="visual-4-6-p04-r1-0">
-            <a:extLst xmlns:a="http://schemas.openxmlformats.org/drawingml/2006/main">
-              <a:ext uri="{FF2B5EF4-FFF2-40B4-BE49-F238E27FC236}">
-                <a16:creationId xmlns:a16="http://schemas.microsoft.com/office/drawing/2014/main" id="{BCE00E78-EEC0-4C21-BF18-1A4DCC0A872C}"/>
-              </a:ext>
-            </a:extLst>
-          </p:cNvPr>
-          <p:cNvSpPr>
-            <a:spLocks xmlns:a="http://schemas.openxmlformats.org/drawingml/2006/main" noGrp="1"/>
-          </p:cNvSpPr>
-          <p:nvPr/>
-        </p:nvSpPr>
-        <p:spPr>
-          <a:xfrm xmlns:a="http://schemas.openxmlformats.org/drawingml/2006/main">
-            <a:off x="619125" y="2571750"/>
-            <a:ext cx="1619250" cy="904875"/>
-          </a:xfrm>
-          <a:prstGeom xmlns:a="http://schemas.openxmlformats.org/drawingml/2006/main" prst="rect">
-            <a:avLst/>
-          </a:prstGeom>
-          <a:noFill xmlns:a="http://schemas.openxmlformats.org/drawingml/2006/main"/>
-          <a:ln xmlns:a="http://schemas.openxmlformats.org/drawingml/2006/main" w="0">
-            <a:noFill/>
-          </a:ln>
-        </p:spPr>
-        <p:txBody>
-          <a:bodyPr xmlns:a="http://schemas.openxmlformats.org/drawingml/2006/main" lIns="0" tIns="0" rIns="0" bIns="0" anchor="t">
-            <a:noAutofit/>
-          </a:bodyPr>
-          <a:lstStyle xmlns:a="http://schemas.openxmlformats.org/drawingml/2006/main"/>
-          <a:p xmlns:a="http://schemas.openxmlformats.org/drawingml/2006/main">
-            <a:pPr algn="l">
-              <a:lnSpc>
-                <a:spcPct val="114000"/>
-              </a:lnSpc>
-              <a:buNone/>
-              <a:defRPr sz="2200" b="1">
-                <a:solidFill>
-                  <a:srgbClr val="1F4D78"/>
-                </a:solidFill>
-                <a:latin typeface="微软雅黑"/>
-                <a:ea typeface="微软雅黑"/>
-                <a:cs typeface="微软雅黑"/>
-              </a:defRPr>
-            </a:pPr>
-            <a:r>
-              <a:rPr sz="2200" b="1">
-                <a:solidFill>
-                  <a:srgbClr val="1F4D78"/>
-                </a:solidFill>
-                <a:latin typeface="微软雅黑"/>
-                <a:ea typeface="微软雅黑"/>
-                <a:cs typeface="微软雅黑"/>
-              </a:rPr>
-              <a:t>研究问题</a:t>
-            </a:r>
-          </a:p>
-        </p:txBody>
-      </p:sp>
-      <p:sp>
-        <p:nvSpPr>
-          <p:cNvPr id="13" name="visual-4-7-p04-r1-1">
-            <a:extLst xmlns:a="http://schemas.openxmlformats.org/drawingml/2006/main">
-              <a:ext uri="{FF2B5EF4-FFF2-40B4-BE49-F238E27FC236}">
-                <a16:creationId xmlns:a16="http://schemas.microsoft.com/office/drawing/2014/main" id="{FB504DF2-BB43-4C6F-8E49-8E305558D2AB}"/>
-              </a:ext>
-            </a:extLst>
-          </p:cNvPr>
-          <p:cNvSpPr>
-            <a:spLocks xmlns:a="http://schemas.openxmlformats.org/drawingml/2006/main" noGrp="1"/>
-          </p:cNvSpPr>
-          <p:nvPr/>
-        </p:nvSpPr>
-        <p:spPr>
-          <a:xfrm xmlns:a="http://schemas.openxmlformats.org/drawingml/2006/main">
-            <a:off x="2238375" y="2571750"/>
-            <a:ext cx="6191250" cy="904875"/>
-          </a:xfrm>
-          <a:prstGeom xmlns:a="http://schemas.openxmlformats.org/drawingml/2006/main" prst="rect">
-            <a:avLst/>
-          </a:prstGeom>
-          <a:noFill xmlns:a="http://schemas.openxmlformats.org/drawingml/2006/main"/>
-          <a:ln xmlns:a="http://schemas.openxmlformats.org/drawingml/2006/main" w="0">
-            <a:noFill/>
-          </a:ln>
-        </p:spPr>
-        <p:txBody>
-          <a:bodyPr xmlns:a="http://schemas.openxmlformats.org/drawingml/2006/main" lIns="0" tIns="0" rIns="0" bIns="0" anchor="t">
-            <a:noAutofit/>
-          </a:bodyPr>
-          <a:lstStyle xmlns:a="http://schemas.openxmlformats.org/drawingml/2006/main"/>
-          <a:p xmlns:a="http://schemas.openxmlformats.org/drawingml/2006/main">
-            <a:pPr algn="l">
-              <a:lnSpc>
-                <a:spcPct val="114000"/>
-              </a:lnSpc>
-              <a:buNone/>
-              <a:defRPr sz="2400" b="0">
+                <a:spcPct val="118000"/>
+              </a:lnSpc>
+              <a:buNone/>
+              <a:defRPr sz="2100" b="0">
                 <a:solidFill>
                   <a:srgbClr val="27333D"/>
                 </a:solidFill>
@@ -18764,7 +20031,7 @@
               </a:defRPr>
             </a:pPr>
             <a:r>
-              <a:rPr sz="2400" b="0">
+              <a:rPr sz="2100" b="0">
                 <a:solidFill>
                   <a:srgbClr val="27333D"/>
                 </a:solidFill>
@@ -18772,312 +20039,7 @@
                 <a:ea typeface="微软雅黑"/>
                 <a:cs typeface="微软雅黑"/>
               </a:rPr>
-              <a:t>在逐条核验引用的 CS 阅读中，阅读卡是否降低遗漏率？</a:t>
-            </a:r>
-          </a:p>
-        </p:txBody>
-      </p:sp>
-      <p:sp>
-        <p:nvSpPr>
-          <p:cNvPr id="14" name="visual-4-8-p04-r1-2">
-            <a:extLst xmlns:a="http://schemas.openxmlformats.org/drawingml/2006/main">
-              <a:ext uri="{FF2B5EF4-FFF2-40B4-BE49-F238E27FC236}">
-                <a16:creationId xmlns:a16="http://schemas.microsoft.com/office/drawing/2014/main" id="{043344F4-324A-40AB-BC25-F706D73A9705}"/>
-              </a:ext>
-            </a:extLst>
-          </p:cNvPr>
-          <p:cNvSpPr>
-            <a:spLocks xmlns:a="http://schemas.openxmlformats.org/drawingml/2006/main" noGrp="1"/>
-          </p:cNvSpPr>
-          <p:nvPr/>
-        </p:nvSpPr>
-        <p:spPr>
-          <a:xfrm xmlns:a="http://schemas.openxmlformats.org/drawingml/2006/main">
-            <a:off x="8429625" y="2571750"/>
-            <a:ext cx="3143250" cy="904875"/>
-          </a:xfrm>
-          <a:prstGeom xmlns:a="http://schemas.openxmlformats.org/drawingml/2006/main" prst="rect">
-            <a:avLst/>
-          </a:prstGeom>
-          <a:noFill xmlns:a="http://schemas.openxmlformats.org/drawingml/2006/main"/>
-          <a:ln xmlns:a="http://schemas.openxmlformats.org/drawingml/2006/main" w="0">
-            <a:noFill/>
-          </a:ln>
-        </p:spPr>
-        <p:txBody>
-          <a:bodyPr xmlns:a="http://schemas.openxmlformats.org/drawingml/2006/main" lIns="0" tIns="0" rIns="0" bIns="0" anchor="t">
-            <a:noAutofit/>
-          </a:bodyPr>
-          <a:lstStyle xmlns:a="http://schemas.openxmlformats.org/drawingml/2006/main"/>
-          <a:p xmlns:a="http://schemas.openxmlformats.org/drawingml/2006/main">
-            <a:pPr algn="l">
-              <a:lnSpc>
-                <a:spcPct val="114000"/>
-              </a:lnSpc>
-              <a:buNone/>
-              <a:defRPr sz="2000" b="0">
-                <a:solidFill>
-                  <a:srgbClr val="1F4D78"/>
-                </a:solidFill>
-                <a:latin typeface="微软雅黑"/>
-                <a:ea typeface="微软雅黑"/>
-                <a:cs typeface="微软雅黑"/>
-              </a:defRPr>
-            </a:pPr>
-            <a:r>
-              <a:rPr sz="2000" b="0">
-                <a:solidFill>
-                  <a:srgbClr val="1F4D78"/>
-                </a:solidFill>
-                <a:latin typeface="微软雅黑"/>
-                <a:ea typeface="微软雅黑"/>
-                <a:cs typeface="微软雅黑"/>
-              </a:rPr>
-              <a:t>候选答案、可证伪性</a:t>
-            </a:r>
-          </a:p>
-        </p:txBody>
-      </p:sp>
-      <p:sp>
-        <p:nvSpPr>
-          <p:cNvPr id="15" name="visual-4-9-p04-r2-0">
-            <a:extLst xmlns:a="http://schemas.openxmlformats.org/drawingml/2006/main">
-              <a:ext uri="{FF2B5EF4-FFF2-40B4-BE49-F238E27FC236}">
-                <a16:creationId xmlns:a16="http://schemas.microsoft.com/office/drawing/2014/main" id="{2315DC20-30E9-45E5-94D1-DBFEFF8627AE}"/>
-              </a:ext>
-            </a:extLst>
-          </p:cNvPr>
-          <p:cNvSpPr>
-            <a:spLocks xmlns:a="http://schemas.openxmlformats.org/drawingml/2006/main" noGrp="1"/>
-          </p:cNvSpPr>
-          <p:nvPr/>
-        </p:nvSpPr>
-        <p:spPr>
-          <a:xfrm xmlns:a="http://schemas.openxmlformats.org/drawingml/2006/main">
-            <a:off x="619125" y="3476625"/>
-            <a:ext cx="1619250" cy="904875"/>
-          </a:xfrm>
-          <a:prstGeom xmlns:a="http://schemas.openxmlformats.org/drawingml/2006/main" prst="rect">
-            <a:avLst/>
-          </a:prstGeom>
-          <a:noFill xmlns:a="http://schemas.openxmlformats.org/drawingml/2006/main"/>
-          <a:ln xmlns:a="http://schemas.openxmlformats.org/drawingml/2006/main" w="0">
-            <a:noFill/>
-          </a:ln>
-        </p:spPr>
-        <p:txBody>
-          <a:bodyPr xmlns:a="http://schemas.openxmlformats.org/drawingml/2006/main" lIns="0" tIns="0" rIns="0" bIns="0" anchor="t">
-            <a:noAutofit/>
-          </a:bodyPr>
-          <a:lstStyle xmlns:a="http://schemas.openxmlformats.org/drawingml/2006/main"/>
-          <a:p xmlns:a="http://schemas.openxmlformats.org/drawingml/2006/main">
-            <a:pPr algn="l">
-              <a:lnSpc>
-                <a:spcPct val="114000"/>
-              </a:lnSpc>
-              <a:buNone/>
-              <a:defRPr sz="2200" b="1">
-                <a:solidFill>
-                  <a:srgbClr val="1F4D78"/>
-                </a:solidFill>
-                <a:latin typeface="微软雅黑"/>
-                <a:ea typeface="微软雅黑"/>
-                <a:cs typeface="微软雅黑"/>
-              </a:defRPr>
-            </a:pPr>
-            <a:r>
-              <a:rPr sz="2200" b="1">
-                <a:solidFill>
-                  <a:srgbClr val="1F4D78"/>
-                </a:solidFill>
-                <a:latin typeface="微软雅黑"/>
-                <a:ea typeface="微软雅黑"/>
-                <a:cs typeface="微软雅黑"/>
-              </a:rPr>
-              <a:t>待验证主张</a:t>
-            </a:r>
-          </a:p>
-        </p:txBody>
-      </p:sp>
-      <p:sp>
-        <p:nvSpPr>
-          <p:cNvPr id="16" name="visual-4-10-p04-r2-1">
-            <a:extLst xmlns:a="http://schemas.openxmlformats.org/drawingml/2006/main">
-              <a:ext uri="{FF2B5EF4-FFF2-40B4-BE49-F238E27FC236}">
-                <a16:creationId xmlns:a16="http://schemas.microsoft.com/office/drawing/2014/main" id="{3FE5D742-A394-497F-9BC6-98D03A1FDD0D}"/>
-              </a:ext>
-            </a:extLst>
-          </p:cNvPr>
-          <p:cNvSpPr>
-            <a:spLocks xmlns:a="http://schemas.openxmlformats.org/drawingml/2006/main" noGrp="1"/>
-          </p:cNvSpPr>
-          <p:nvPr/>
-        </p:nvSpPr>
-        <p:spPr>
-          <a:xfrm xmlns:a="http://schemas.openxmlformats.org/drawingml/2006/main">
-            <a:off x="2238375" y="3476625"/>
-            <a:ext cx="6191250" cy="904875"/>
-          </a:xfrm>
-          <a:prstGeom xmlns:a="http://schemas.openxmlformats.org/drawingml/2006/main" prst="rect">
-            <a:avLst/>
-          </a:prstGeom>
-          <a:noFill xmlns:a="http://schemas.openxmlformats.org/drawingml/2006/main"/>
-          <a:ln xmlns:a="http://schemas.openxmlformats.org/drawingml/2006/main" w="0">
-            <a:noFill/>
-          </a:ln>
-        </p:spPr>
-        <p:txBody>
-          <a:bodyPr xmlns:a="http://schemas.openxmlformats.org/drawingml/2006/main" lIns="0" tIns="0" rIns="0" bIns="0" anchor="t">
-            <a:noAutofit/>
-          </a:bodyPr>
-          <a:lstStyle xmlns:a="http://schemas.openxmlformats.org/drawingml/2006/main"/>
-          <a:p xmlns:a="http://schemas.openxmlformats.org/drawingml/2006/main">
-            <a:pPr algn="l">
-              <a:lnSpc>
-                <a:spcPct val="114000"/>
-              </a:lnSpc>
-              <a:buNone/>
-              <a:defRPr sz="2400" b="0">
-                <a:solidFill>
-                  <a:srgbClr val="27333D"/>
-                </a:solidFill>
-                <a:latin typeface="微软雅黑"/>
-                <a:ea typeface="微软雅黑"/>
-                <a:cs typeface="微软雅黑"/>
-              </a:defRPr>
-            </a:pPr>
-            <a:r>
-              <a:rPr sz="2400" b="0">
-                <a:solidFill>
-                  <a:srgbClr val="27333D"/>
-                </a:solidFill>
-                <a:latin typeface="微软雅黑"/>
-                <a:ea typeface="微软雅黑"/>
-                <a:cs typeface="微软雅黑"/>
-              </a:rPr>
-              <a:t>若强制定位原文且评价标准固定，则差异可归因于阅读卡结构</a:t>
-            </a:r>
-          </a:p>
-        </p:txBody>
-      </p:sp>
-      <p:sp>
-        <p:nvSpPr>
-          <p:cNvPr id="17" name="visual-4-11-p04-r2-2">
-            <a:extLst xmlns:a="http://schemas.openxmlformats.org/drawingml/2006/main">
-              <a:ext uri="{FF2B5EF4-FFF2-40B4-BE49-F238E27FC236}">
-                <a16:creationId xmlns:a16="http://schemas.microsoft.com/office/drawing/2014/main" id="{18DDED4C-D62B-4316-9E9F-4AA4D36B0CA6}"/>
-              </a:ext>
-            </a:extLst>
-          </p:cNvPr>
-          <p:cNvSpPr>
-            <a:spLocks xmlns:a="http://schemas.openxmlformats.org/drawingml/2006/main" noGrp="1"/>
-          </p:cNvSpPr>
-          <p:nvPr/>
-        </p:nvSpPr>
-        <p:spPr>
-          <a:xfrm xmlns:a="http://schemas.openxmlformats.org/drawingml/2006/main">
-            <a:off x="8429625" y="3476625"/>
-            <a:ext cx="3143250" cy="904875"/>
-          </a:xfrm>
-          <a:prstGeom xmlns:a="http://schemas.openxmlformats.org/drawingml/2006/main" prst="rect">
-            <a:avLst/>
-          </a:prstGeom>
-          <a:noFill xmlns:a="http://schemas.openxmlformats.org/drawingml/2006/main"/>
-          <a:ln xmlns:a="http://schemas.openxmlformats.org/drawingml/2006/main" w="0">
-            <a:noFill/>
-          </a:ln>
-        </p:spPr>
-        <p:txBody>
-          <a:bodyPr xmlns:a="http://schemas.openxmlformats.org/drawingml/2006/main" lIns="0" tIns="0" rIns="0" bIns="0" anchor="t">
-            <a:noAutofit/>
-          </a:bodyPr>
-          <a:lstStyle xmlns:a="http://schemas.openxmlformats.org/drawingml/2006/main"/>
-          <a:p xmlns:a="http://schemas.openxmlformats.org/drawingml/2006/main">
-            <a:pPr algn="l">
-              <a:lnSpc>
-                <a:spcPct val="114000"/>
-              </a:lnSpc>
-              <a:buNone/>
-              <a:defRPr sz="2000" b="0">
-                <a:solidFill>
-                  <a:srgbClr val="1F4D78"/>
-                </a:solidFill>
-                <a:latin typeface="微软雅黑"/>
-                <a:ea typeface="微软雅黑"/>
-                <a:cs typeface="微软雅黑"/>
-              </a:defRPr>
-            </a:pPr>
-            <a:r>
-              <a:rPr sz="2000" b="0">
-                <a:solidFill>
-                  <a:srgbClr val="1F4D78"/>
-                </a:solidFill>
-                <a:latin typeface="微软雅黑"/>
-                <a:ea typeface="微软雅黑"/>
-                <a:cs typeface="微软雅黑"/>
-              </a:rPr>
-              <a:t>实验、竞争假设排除</a:t>
-            </a:r>
-          </a:p>
-        </p:txBody>
-      </p:sp>
-      <p:sp>
-        <p:nvSpPr>
-          <p:cNvPr id="18" name="visual-4-12-p04-bottom">
-            <a:extLst xmlns:a="http://schemas.openxmlformats.org/drawingml/2006/main">
-              <a:ext uri="{FF2B5EF4-FFF2-40B4-BE49-F238E27FC236}">
-                <a16:creationId xmlns:a16="http://schemas.microsoft.com/office/drawing/2014/main" id="{0FE46B97-DBDB-496A-920C-5027AF35DA92}"/>
-              </a:ext>
-            </a:extLst>
-          </p:cNvPr>
-          <p:cNvSpPr>
-            <a:spLocks xmlns:a="http://schemas.openxmlformats.org/drawingml/2006/main" noGrp="1"/>
-          </p:cNvSpPr>
-          <p:nvPr/>
-        </p:nvSpPr>
-        <p:spPr>
-          <a:xfrm xmlns:a="http://schemas.openxmlformats.org/drawingml/2006/main">
-            <a:off x="1381125" y="4905375"/>
-            <a:ext cx="9429750" cy="552450"/>
-          </a:xfrm>
-          <a:prstGeom xmlns:a="http://schemas.openxmlformats.org/drawingml/2006/main" prst="rect">
-            <a:avLst/>
-          </a:prstGeom>
-          <a:noFill xmlns:a="http://schemas.openxmlformats.org/drawingml/2006/main"/>
-          <a:ln xmlns:a="http://schemas.openxmlformats.org/drawingml/2006/main" w="0">
-            <a:noFill/>
-          </a:ln>
-        </p:spPr>
-        <p:txBody>
-          <a:bodyPr xmlns:a="http://schemas.openxmlformats.org/drawingml/2006/main" lIns="0" tIns="0" rIns="0" bIns="0" anchor="ctr">
-            <a:noAutofit/>
-          </a:bodyPr>
-          <a:lstStyle xmlns:a="http://schemas.openxmlformats.org/drawingml/2006/main"/>
-          <a:p xmlns:a="http://schemas.openxmlformats.org/drawingml/2006/main">
-            <a:pPr algn="l">
-              <a:lnSpc>
-                <a:spcPct val="114000"/>
-              </a:lnSpc>
-              <a:buNone/>
-              <a:defRPr sz="2200" b="0">
-                <a:solidFill>
-                  <a:srgbClr val="27333D"/>
-                </a:solidFill>
-                <a:latin typeface="微软雅黑"/>
-                <a:ea typeface="微软雅黑"/>
-                <a:cs typeface="微软雅黑"/>
-              </a:defRPr>
-            </a:pPr>
-            <a:r>
-              <a:rPr sz="2200" b="0">
-                <a:solidFill>
-                  <a:srgbClr val="27333D"/>
-                </a:solidFill>
-                <a:latin typeface="微软雅黑"/>
-                <a:ea typeface="微软雅黑"/>
-                <a:cs typeface="微软雅黑"/>
-              </a:rPr>
-              <a:t>研究问题不是把主题缩小一点，而是补全条件—对象—干预—结果—比较。</a:t>
+              <a:t>结果命题可检验，机制解释另需区分观察。</a:t>
             </a:r>
           </a:p>
         </p:txBody>

--- a/lessons/lesson-06/slides.pptx
+++ b/lessons/lesson-06/slides.pptx
@@ -419,7 +419,12 @@
           </a:p>
           <a:p xmlns:a="http://schemas.openxmlformats.org/drawingml/2006/main">
             <a:r>
-              <a:t>讲义位置：本课讲义；见逐页母稿映射表</a:t>
+              <a:t>讲述与校准：</a:t>
+            </a:r>
+          </a:p>
+          <a:p xmlns:a="http://schemas.openxmlformats.org/drawingml/2006/main">
+            <a:r>
+              <a:t>开场放下研究空白清单。第 5 课已经识别了研究空白候选并通过了三步检验，但空白本身还不是研究问题。本课把空白收敛为可检验问题，并完成第一次正式提交——问题门。</a:t>
             </a:r>
           </a:p>
           <a:p xmlns:a="http://schemas.openxmlformats.org/drawingml/2006/main">
@@ -429,12 +434,12 @@
           </a:p>
           <a:p xmlns:a="http://schemas.openxmlformats.org/drawingml/2006/main">
             <a:r>
-              <a:t>屏显核对：</a:t>
-            </a:r>
-          </a:p>
-          <a:p xmlns:a="http://schemas.openxmlformats.org/drawingml/2006/main">
-            <a:r>
-              <a:t>第6讲 研究问题、问题定义与第一性原理</a:t>
+              <a:t>学生动作：</a:t>
+            </a:r>
+          </a:p>
+          <a:p xmlns:a="http://schemas.openxmlformats.org/drawingml/2006/main">
+            <a:r>
+              <a:t>不展开课程行政信息，直接进入下一页回扣。</a:t>
             </a:r>
           </a:p>
           <a:p xmlns:a="http://schemas.openxmlformats.org/drawingml/2006/main">
@@ -444,12 +449,7 @@
           </a:p>
           <a:p xmlns:a="http://schemas.openxmlformats.org/drawingml/2006/main">
             <a:r>
-              <a:t>教师讲述：</a:t>
-            </a:r>
-          </a:p>
-          <a:p xmlns:a="http://schemas.openxmlformats.org/drawingml/2006/main">
-            <a:r>
-              <a:t>开场放下研究空白清单。第 5 课已经识别了研究空白候选并通过了三步检验，但空白本身还不是研究问题。本课把空白收敛为可检验问题，并完成第一次正式提交——问题门。</a:t>
+              <a:t>课堂安排：按本稿下方 90 分钟教学路由安排；此页不另占独立时段。</a:t>
             </a:r>
           </a:p>
           <a:p xmlns:a="http://schemas.openxmlformats.org/drawingml/2006/main">
@@ -459,12 +459,12 @@
           </a:p>
           <a:p xmlns:a="http://schemas.openxmlformats.org/drawingml/2006/main">
             <a:r>
-              <a:t>学生动作：</a:t>
-            </a:r>
-          </a:p>
-          <a:p xmlns:a="http://schemas.openxmlformats.org/drawingml/2006/main">
-            <a:r>
-              <a:t>不展开课程行政信息，直接进入下一页回扣。</a:t>
+              <a:t>[Sources]</a:t>
+            </a:r>
+          </a:p>
+          <a:p xmlns:a="http://schemas.openxmlformats.org/drawingml/2006/main">
+            <a:r>
+              <a:t>课程定位以 [syllabus.md](../../course/syllabus.md) 与 [备课规划.md](../备课规划.md) 第 6 课段为准。</a:t>
             </a:r>
           </a:p>
           <a:p xmlns:a="http://schemas.openxmlformats.org/drawingml/2006/main">
@@ -474,57 +474,7 @@
           </a:p>
           <a:p xmlns:a="http://schemas.openxmlformats.org/drawingml/2006/main">
             <a:r>
-              <a:t>来源与边界：</a:t>
-            </a:r>
-          </a:p>
-          <a:p xmlns:a="http://schemas.openxmlformats.org/drawingml/2006/main">
-            <a:r>
-              <a:t>课程定位以 [syllabus.md](../../course/syllabus.md) 与 [备课规划.md](../备课规划.md) 第 6 课段为准。</a:t>
-            </a:r>
-          </a:p>
-          <a:p xmlns:a="http://schemas.openxmlformats.org/drawingml/2006/main">
-            <a:r>
-              <a:t/>
-            </a:r>
-          </a:p>
-          <a:p xmlns:a="http://schemas.openxmlformats.org/drawingml/2006/main">
-            <a:r>
-              <a:t>---</a:t>
-            </a:r>
-          </a:p>
-          <a:p xmlns:a="http://schemas.openxmlformats.org/drawingml/2006/main">
-            <a:r>
-              <a:t/>
-            </a:r>
-          </a:p>
-          <a:p xmlns:a="http://schemas.openxmlformats.org/drawingml/2006/main">
-            <a:r>
-              <a:t>[Sources]</a:t>
-            </a:r>
-          </a:p>
-          <a:p xmlns:a="http://schemas.openxmlformats.org/drawingml/2006/main">
-            <a:r>
-              <a:t/>
-            </a:r>
-          </a:p>
-          <a:p xmlns:a="http://schemas.openxmlformats.org/drawingml/2006/main">
-            <a:r>
-              <a:t>- 本课 handout.md 与 slides.md</a:t>
-            </a:r>
-          </a:p>
-          <a:p xmlns:a="http://schemas.openxmlformats.org/drawingml/2006/main">
-            <a:r>
-              <a:t/>
-            </a:r>
-          </a:p>
-          <a:p xmlns:a="http://schemas.openxmlformats.org/drawingml/2006/main">
-            <a:r>
-              <a:t>- ../../course/reading-card-case.md</a:t>
-            </a:r>
-          </a:p>
-          <a:p xmlns:a="http://schemas.openxmlformats.org/drawingml/2006/main">
-            <a:r>
-              <a:t/>
+              <a:t>本课 handout.md、judgment-task.md；../../course/judgment-path.md。</a:t>
             </a:r>
           </a:p>
           <a:p xmlns:a="http://schemas.openxmlformats.org/drawingml/2006/main">
@@ -609,7 +559,12 @@
           </a:p>
           <a:p xmlns:a="http://schemas.openxmlformats.org/drawingml/2006/main">
             <a:r>
-              <a:t>讲义位置：handout.md §三、可证伪命题；五、问题门提交清单</a:t>
+              <a:t>讲述与校准：</a:t>
+            </a:r>
+          </a:p>
+          <a:p xmlns:a="http://schemas.openxmlformats.org/drawingml/2006/main">
+            <a:r>
+              <a:t>先问“成本高就证明没有降低遗漏吗”。应回答不一定：效果命题可能成立，但不值得采用。反证点须对应命题中的谓词和范围；精度不足时保持未决。这里尚未展示构造结果，不能预告方法有效。</a:t>
             </a:r>
           </a:p>
           <a:p xmlns:a="http://schemas.openxmlformats.org/drawingml/2006/main">
@@ -619,12 +574,12 @@
           </a:p>
           <a:p xmlns:a="http://schemas.openxmlformats.org/drawingml/2006/main">
             <a:r>
-              <a:t>屏显核对：</a:t>
-            </a:r>
-          </a:p>
-          <a:p xmlns:a="http://schemas.openxmlformats.org/drawingml/2006/main">
-            <a:r>
-              <a:t>Q1：在限定材料与任务中，阅读卡降低限定条件遗漏率。</a:t>
+              <a:t>学生动作：</a:t>
+            </a:r>
+          </a:p>
+          <a:p xmlns:a="http://schemas.openxmlformats.org/drawingml/2006/main">
+            <a:r>
+              <a:t>给自己的主张圈出结果谓词，写一项能削弱它的观察。</a:t>
             </a:r>
           </a:p>
           <a:p xmlns:a="http://schemas.openxmlformats.org/drawingml/2006/main">
@@ -634,17 +589,7 @@
           </a:p>
           <a:p xmlns:a="http://schemas.openxmlformats.org/drawingml/2006/main">
             <a:r>
-              <a:t>结果检查：差异的方向、大小和不确定性。</a:t>
-            </a:r>
-          </a:p>
-          <a:p xmlns:a="http://schemas.openxmlformats.org/drawingml/2006/main">
-            <a:r>
-              <a:t>机制检查：另找能区分原因的观察。</a:t>
-            </a:r>
-          </a:p>
-          <a:p xmlns:a="http://schemas.openxmlformats.org/drawingml/2006/main">
-            <a:r>
-              <a:t>采用决定：质量代价、时间与资源是否可接受。</a:t>
+              <a:t>课堂安排：按本稿下方 90 分钟教学路由安排；此页不另占独立时段。</a:t>
             </a:r>
           </a:p>
           <a:p xmlns:a="http://schemas.openxmlformats.org/drawingml/2006/main">
@@ -654,12 +599,12 @@
           </a:p>
           <a:p xmlns:a="http://schemas.openxmlformats.org/drawingml/2006/main">
             <a:r>
-              <a:t>教师讲述：</a:t>
-            </a:r>
-          </a:p>
-          <a:p xmlns:a="http://schemas.openxmlformats.org/drawingml/2006/main">
-            <a:r>
-              <a:t>先问“成本高就证明没有降低遗漏吗”。应回答不一定：效果命题可能成立，但不值得采用。反证点须对应命题中的谓词和范围；精度不足时保持未决。这里尚未展示构造结果，不能预告方法有效。</a:t>
+              <a:t>[Sources]</a:t>
+            </a:r>
+          </a:p>
+          <a:p xmlns:a="http://schemas.openxmlformats.org/drawingml/2006/main">
+            <a:r>
+              <a:t>./handout.md；课堂示例与构造数据见 ../../course/reading-card-case.md</a:t>
             </a:r>
           </a:p>
           <a:p xmlns:a="http://schemas.openxmlformats.org/drawingml/2006/main">
@@ -669,62 +614,7 @@
           </a:p>
           <a:p xmlns:a="http://schemas.openxmlformats.org/drawingml/2006/main">
             <a:r>
-              <a:t>学生动作：</a:t>
-            </a:r>
-          </a:p>
-          <a:p xmlns:a="http://schemas.openxmlformats.org/drawingml/2006/main">
-            <a:r>
-              <a:t>给自己的主张圈出结果谓词，写一项能削弱它的观察。</a:t>
-            </a:r>
-          </a:p>
-          <a:p xmlns:a="http://schemas.openxmlformats.org/drawingml/2006/main">
-            <a:r>
-              <a:t/>
-            </a:r>
-          </a:p>
-          <a:p xmlns:a="http://schemas.openxmlformats.org/drawingml/2006/main">
-            <a:r>
-              <a:t>来源与边界：</a:t>
-            </a:r>
-          </a:p>
-          <a:p xmlns:a="http://schemas.openxmlformats.org/drawingml/2006/main">
-            <a:r>
-              <a:t>./handout.md；课堂示例与构造数据见 ../../course/reading-card-case.md</a:t>
-            </a:r>
-          </a:p>
-          <a:p xmlns:a="http://schemas.openxmlformats.org/drawingml/2006/main">
-            <a:r>
-              <a:t/>
-            </a:r>
-          </a:p>
-          <a:p xmlns:a="http://schemas.openxmlformats.org/drawingml/2006/main">
-            <a:r>
-              <a:t>[Sources]</a:t>
-            </a:r>
-          </a:p>
-          <a:p xmlns:a="http://schemas.openxmlformats.org/drawingml/2006/main">
-            <a:r>
-              <a:t/>
-            </a:r>
-          </a:p>
-          <a:p xmlns:a="http://schemas.openxmlformats.org/drawingml/2006/main">
-            <a:r>
-              <a:t>- 本课 handout.md 与 slides.md</a:t>
-            </a:r>
-          </a:p>
-          <a:p xmlns:a="http://schemas.openxmlformats.org/drawingml/2006/main">
-            <a:r>
-              <a:t/>
-            </a:r>
-          </a:p>
-          <a:p xmlns:a="http://schemas.openxmlformats.org/drawingml/2006/main">
-            <a:r>
-              <a:t>- ../../course/reading-card-case.md</a:t>
-            </a:r>
-          </a:p>
-          <a:p xmlns:a="http://schemas.openxmlformats.org/drawingml/2006/main">
-            <a:r>
-              <a:t/>
+              <a:t>本课 handout.md、judgment-task.md；../../course/judgment-path.md。</a:t>
             </a:r>
           </a:p>
           <a:p xmlns:a="http://schemas.openxmlformats.org/drawingml/2006/main">
@@ -809,7 +699,12 @@
           </a:p>
           <a:p xmlns:a="http://schemas.openxmlformats.org/drawingml/2006/main">
             <a:r>
-              <a:t>讲义位置：本课讲义；见逐页母稿映射表</a:t>
+              <a:t>讲述与校准：</a:t>
+            </a:r>
+          </a:p>
+          <a:p xmlns:a="http://schemas.openxmlformats.org/drawingml/2006/main">
+            <a:r>
+              <a:t>本页只建立跨课接口。让学生意识到当前解释并不唯一，并把最可能的替代解释写在问题定义旁。不要在此展开组别、控制变量或完整区分实验；这些进入第 7 课正式设计。</a:t>
             </a:r>
           </a:p>
           <a:p xmlns:a="http://schemas.openxmlformats.org/drawingml/2006/main">
@@ -819,12 +714,12 @@
           </a:p>
           <a:p xmlns:a="http://schemas.openxmlformats.org/drawingml/2006/main">
             <a:r>
-              <a:t>屏显核对：</a:t>
-            </a:r>
-          </a:p>
-          <a:p xmlns:a="http://schemas.openxmlformats.org/drawingml/2006/main">
-            <a:r>
-              <a:t>同一个结果可能有多种解释。</a:t>
+              <a:t>学生动作：</a:t>
+            </a:r>
+          </a:p>
+          <a:p xmlns:a="http://schemas.openxmlformats.org/drawingml/2006/main">
+            <a:r>
+              <a:t>让学生写出一个会削弱当前主张的替代解释。</a:t>
             </a:r>
           </a:p>
           <a:p xmlns:a="http://schemas.openxmlformats.org/drawingml/2006/main">
@@ -834,12 +729,7 @@
           </a:p>
           <a:p xmlns:a="http://schemas.openxmlformats.org/drawingml/2006/main">
             <a:r>
-              <a:t>H1 候选：生成时显式列出限定条件，促使输出保留更多。</a:t>
-            </a:r>
-          </a:p>
-          <a:p xmlns:a="http://schemas.openxmlformats.org/drawingml/2006/main">
-            <a:r>
-              <a:t>A2 候选：评分者看到字段提示，更容易给出保留分。</a:t>
+              <a:t>课堂安排：按本稿下方 90 分钟教学路由安排；此页不另占独立时段。</a:t>
             </a:r>
           </a:p>
           <a:p xmlns:a="http://schemas.openxmlformats.org/drawingml/2006/main">
@@ -849,7 +739,12 @@
           </a:p>
           <a:p xmlns:a="http://schemas.openxmlformats.org/drawingml/2006/main">
             <a:r>
-              <a:t>第 7 课把候选解释变成可区分的观察。</a:t>
+              <a:t>[Sources]</a:t>
+            </a:r>
+          </a:p>
+          <a:p xmlns:a="http://schemas.openxmlformats.org/drawingml/2006/main">
+            <a:r>
+              <a:t>讲义 §三·3 给第 7 课留下替代解释标记；Platt, "Strong Inference."（同 P09 来源）。</a:t>
             </a:r>
           </a:p>
           <a:p xmlns:a="http://schemas.openxmlformats.org/drawingml/2006/main">
@@ -859,87 +754,7 @@
           </a:p>
           <a:p xmlns:a="http://schemas.openxmlformats.org/drawingml/2006/main">
             <a:r>
-              <a:t>教师讲述：</a:t>
-            </a:r>
-          </a:p>
-          <a:p xmlns:a="http://schemas.openxmlformats.org/drawingml/2006/main">
-            <a:r>
-              <a:t>本页只建立跨课接口。让学生意识到当前解释并不唯一，并把最可能的替代解释写在问题定义旁。不要在此展开组别、控制变量或完整区分实验；这些进入第 7 课正式设计。</a:t>
-            </a:r>
-          </a:p>
-          <a:p xmlns:a="http://schemas.openxmlformats.org/drawingml/2006/main">
-            <a:r>
-              <a:t/>
-            </a:r>
-          </a:p>
-          <a:p xmlns:a="http://schemas.openxmlformats.org/drawingml/2006/main">
-            <a:r>
-              <a:t>学生动作：</a:t>
-            </a:r>
-          </a:p>
-          <a:p xmlns:a="http://schemas.openxmlformats.org/drawingml/2006/main">
-            <a:r>
-              <a:t>让学生写出一个会削弱当前主张的替代解释。</a:t>
-            </a:r>
-          </a:p>
-          <a:p xmlns:a="http://schemas.openxmlformats.org/drawingml/2006/main">
-            <a:r>
-              <a:t/>
-            </a:r>
-          </a:p>
-          <a:p xmlns:a="http://schemas.openxmlformats.org/drawingml/2006/main">
-            <a:r>
-              <a:t>来源与边界：</a:t>
-            </a:r>
-          </a:p>
-          <a:p xmlns:a="http://schemas.openxmlformats.org/drawingml/2006/main">
-            <a:r>
-              <a:t>讲义 §三·3 给第 7 课留下替代解释标记；Platt, "Strong Inference."（同 P09 来源）。</a:t>
-            </a:r>
-          </a:p>
-          <a:p xmlns:a="http://schemas.openxmlformats.org/drawingml/2006/main">
-            <a:r>
-              <a:t/>
-            </a:r>
-          </a:p>
-          <a:p xmlns:a="http://schemas.openxmlformats.org/drawingml/2006/main">
-            <a:r>
-              <a:t>---</a:t>
-            </a:r>
-          </a:p>
-          <a:p xmlns:a="http://schemas.openxmlformats.org/drawingml/2006/main">
-            <a:r>
-              <a:t/>
-            </a:r>
-          </a:p>
-          <a:p xmlns:a="http://schemas.openxmlformats.org/drawingml/2006/main">
-            <a:r>
-              <a:t>[Sources]</a:t>
-            </a:r>
-          </a:p>
-          <a:p xmlns:a="http://schemas.openxmlformats.org/drawingml/2006/main">
-            <a:r>
-              <a:t/>
-            </a:r>
-          </a:p>
-          <a:p xmlns:a="http://schemas.openxmlformats.org/drawingml/2006/main">
-            <a:r>
-              <a:t>- 本课 handout.md 与 slides.md</a:t>
-            </a:r>
-          </a:p>
-          <a:p xmlns:a="http://schemas.openxmlformats.org/drawingml/2006/main">
-            <a:r>
-              <a:t/>
-            </a:r>
-          </a:p>
-          <a:p xmlns:a="http://schemas.openxmlformats.org/drawingml/2006/main">
-            <a:r>
-              <a:t>- ../../course/reading-card-case.md</a:t>
-            </a:r>
-          </a:p>
-          <a:p xmlns:a="http://schemas.openxmlformats.org/drawingml/2006/main">
-            <a:r>
-              <a:t/>
+              <a:t>本课 handout.md、judgment-task.md；../../course/judgment-path.md。</a:t>
             </a:r>
           </a:p>
           <a:p xmlns:a="http://schemas.openxmlformats.org/drawingml/2006/main">
@@ -1024,7 +839,12 @@
           </a:p>
           <a:p xmlns:a="http://schemas.openxmlformats.org/drawingml/2006/main">
             <a:r>
-              <a:t>讲义位置：本课讲义；见逐页母稿映射表</a:t>
+              <a:t>讲述与校准：</a:t>
+            </a:r>
+          </a:p>
+          <a:p xmlns:a="http://schemas.openxmlformats.org/drawingml/2006/main">
+            <a:r>
+              <a:t>第一性原理分析在本课程中有明确适用边界。它不是通用思维方法，而是从基本约束推导待验证前提。推导结果只是假设性前提，不等于已经证明。推导出的前提进入第 7 课的机制假设，再进入第 9 课的实验规格接受检验。备课规划执行原则 9 明确了这一边界。</a:t>
             </a:r>
           </a:p>
           <a:p xmlns:a="http://schemas.openxmlformats.org/drawingml/2006/main">
@@ -1034,17 +854,12 @@
           </a:p>
           <a:p xmlns:a="http://schemas.openxmlformats.org/drawingml/2006/main">
             <a:r>
-              <a:t>屏显核对：</a:t>
-            </a:r>
-          </a:p>
-          <a:p xmlns:a="http://schemas.openxmlformats.org/drawingml/2006/main">
-            <a:r>
-              <a:t>**第一性原理分析**：</a:t>
-            </a:r>
-          </a:p>
-          <a:p xmlns:a="http://schemas.openxmlformats.org/drawingml/2006/main">
-            <a:r>
-              <a:t>识别问题的基本约束、作用机制和不可违背条件，并由此推导待验证前提。</a:t>
+              <a:t>学生动作：</a:t>
+            </a:r>
+          </a:p>
+          <a:p xmlns:a="http://schemas.openxmlformats.org/drawingml/2006/main">
+            <a:r>
+              <a:t>无。直接进入推导步骤。</a:t>
             </a:r>
           </a:p>
           <a:p xmlns:a="http://schemas.openxmlformats.org/drawingml/2006/main">
@@ -1054,27 +869,7 @@
           </a:p>
           <a:p xmlns:a="http://schemas.openxmlformats.org/drawingml/2006/main">
             <a:r>
-              <a:t>**适用边界**：</a:t>
-            </a:r>
-          </a:p>
-          <a:p xmlns:a="http://schemas.openxmlformats.org/drawingml/2006/main">
-            <a:r>
-              <a:t>- 不替代文献检索：推导出的前提必须回到证据地图中检验</a:t>
-            </a:r>
-          </a:p>
-          <a:p xmlns:a="http://schemas.openxmlformats.org/drawingml/2006/main">
-            <a:r>
-              <a:t>- 不脱离既有工作：在已有证据基础上深入，不是从零发明问题</a:t>
-            </a:r>
-          </a:p>
-          <a:p xmlns:a="http://schemas.openxmlformats.org/drawingml/2006/main">
-            <a:r>
-              <a:t>- 不自动成立：推导结果只是"如果这些条件成立，那么……"</a:t>
-            </a:r>
-          </a:p>
-          <a:p xmlns:a="http://schemas.openxmlformats.org/drawingml/2006/main">
-            <a:r>
-              <a:t>- 不追求穷举：只推导与当前问题直接相关的必要条件</a:t>
+              <a:t>课堂安排：按本稿下方 90 分钟教学路由安排；此页不另占独立时段。</a:t>
             </a:r>
           </a:p>
           <a:p xmlns:a="http://schemas.openxmlformats.org/drawingml/2006/main">
@@ -1084,7 +879,12 @@
           </a:p>
           <a:p xmlns:a="http://schemas.openxmlformats.org/drawingml/2006/main">
             <a:r>
-              <a:t>&gt; 推导结果必须继续接受外部证据检验。它不是脱离文献的通用捷径。</a:t>
+              <a:t>[Sources]</a:t>
+            </a:r>
+          </a:p>
+          <a:p xmlns:a="http://schemas.openxmlformats.org/drawingml/2006/main">
+            <a:r>
+              <a:t>讲义 §四·1 什么是第一性原理分析；§四·3 适用边界；[备课规划.md](../备课规划.md) 执行原则 9；[AGENTS.md](../../AGENTS.md) 证据标准。</a:t>
             </a:r>
           </a:p>
           <a:p xmlns:a="http://schemas.openxmlformats.org/drawingml/2006/main">
@@ -1094,87 +894,7 @@
           </a:p>
           <a:p xmlns:a="http://schemas.openxmlformats.org/drawingml/2006/main">
             <a:r>
-              <a:t>教师讲述：</a:t>
-            </a:r>
-          </a:p>
-          <a:p xmlns:a="http://schemas.openxmlformats.org/drawingml/2006/main">
-            <a:r>
-              <a:t>第一性原理分析在本课程中有明确适用边界。它不是通用思维方法，而是从基本约束推导待验证前提。推导结果只是假设性前提，不等于已经证明。推导出的前提进入第 7 课的机制假设，再进入第 9 课的实验规格接受检验。备课规划执行原则 9 明确了这一边界。</a:t>
-            </a:r>
-          </a:p>
-          <a:p xmlns:a="http://schemas.openxmlformats.org/drawingml/2006/main">
-            <a:r>
-              <a:t/>
-            </a:r>
-          </a:p>
-          <a:p xmlns:a="http://schemas.openxmlformats.org/drawingml/2006/main">
-            <a:r>
-              <a:t>学生动作：</a:t>
-            </a:r>
-          </a:p>
-          <a:p xmlns:a="http://schemas.openxmlformats.org/drawingml/2006/main">
-            <a:r>
-              <a:t>无。直接进入推导步骤。</a:t>
-            </a:r>
-          </a:p>
-          <a:p xmlns:a="http://schemas.openxmlformats.org/drawingml/2006/main">
-            <a:r>
-              <a:t/>
-            </a:r>
-          </a:p>
-          <a:p xmlns:a="http://schemas.openxmlformats.org/drawingml/2006/main">
-            <a:r>
-              <a:t>来源与边界：</a:t>
-            </a:r>
-          </a:p>
-          <a:p xmlns:a="http://schemas.openxmlformats.org/drawingml/2006/main">
-            <a:r>
-              <a:t>讲义 §四·1 什么是第一性原理分析；§四·3 适用边界；[备课规划.md](../备课规划.md) 执行原则 9；[AGENTS.md](../../AGENTS.md) 证据标准。</a:t>
-            </a:r>
-          </a:p>
-          <a:p xmlns:a="http://schemas.openxmlformats.org/drawingml/2006/main">
-            <a:r>
-              <a:t/>
-            </a:r>
-          </a:p>
-          <a:p xmlns:a="http://schemas.openxmlformats.org/drawingml/2006/main">
-            <a:r>
-              <a:t>---</a:t>
-            </a:r>
-          </a:p>
-          <a:p xmlns:a="http://schemas.openxmlformats.org/drawingml/2006/main">
-            <a:r>
-              <a:t/>
-            </a:r>
-          </a:p>
-          <a:p xmlns:a="http://schemas.openxmlformats.org/drawingml/2006/main">
-            <a:r>
-              <a:t>[Sources]</a:t>
-            </a:r>
-          </a:p>
-          <a:p xmlns:a="http://schemas.openxmlformats.org/drawingml/2006/main">
-            <a:r>
-              <a:t/>
-            </a:r>
-          </a:p>
-          <a:p xmlns:a="http://schemas.openxmlformats.org/drawingml/2006/main">
-            <a:r>
-              <a:t>- 本课 handout.md 与 slides.md</a:t>
-            </a:r>
-          </a:p>
-          <a:p xmlns:a="http://schemas.openxmlformats.org/drawingml/2006/main">
-            <a:r>
-              <a:t/>
-            </a:r>
-          </a:p>
-          <a:p xmlns:a="http://schemas.openxmlformats.org/drawingml/2006/main">
-            <a:r>
-              <a:t>- ../../course/reading-card-case.md</a:t>
-            </a:r>
-          </a:p>
-          <a:p xmlns:a="http://schemas.openxmlformats.org/drawingml/2006/main">
-            <a:r>
-              <a:t/>
+              <a:t>本课 handout.md、judgment-task.md；../../course/judgment-path.md。</a:t>
             </a:r>
           </a:p>
           <a:p xmlns:a="http://schemas.openxmlformats.org/drawingml/2006/main">
@@ -1259,7 +979,12 @@
           </a:p>
           <a:p xmlns:a="http://schemas.openxmlformats.org/drawingml/2006/main">
             <a:r>
-              <a:t>讲义位置：本课讲义；见逐页母稿映射表</a:t>
+              <a:t>讲述与校准：</a:t>
+            </a:r>
+          </a:p>
+          <a:p xmlns:a="http://schemas.openxmlformats.org/drawingml/2006/main">
+            <a:r>
+              <a:t>四步推导的关键是区分"来自任务本身的约束"和"来自当前工具的约束"。基本约束是问题成立的必要条件，作用机制指向中间过程而非最终指标，不可违背条件是比较公平性的底线。推导出的待验证前提应该是可以检验的具体陈述，不是泛泛的原则。</a:t>
             </a:r>
           </a:p>
           <a:p xmlns:a="http://schemas.openxmlformats.org/drawingml/2006/main">
@@ -1269,12 +994,12 @@
           </a:p>
           <a:p xmlns:a="http://schemas.openxmlformats.org/drawingml/2006/main">
             <a:r>
-              <a:t>屏显核对：</a:t>
-            </a:r>
-          </a:p>
-          <a:p xmlns:a="http://schemas.openxmlformats.org/drawingml/2006/main">
-            <a:r>
-              <a:t>四步推导：</a:t>
+              <a:t>学生动作：</a:t>
+            </a:r>
+          </a:p>
+          <a:p xmlns:a="http://schemas.openxmlformats.org/drawingml/2006/main">
+            <a:r>
+              <a:t>让学生为自己的研究问题，口头尝试回答第一步："如果主张成立，哪些条件必须满足？"</a:t>
             </a:r>
           </a:p>
           <a:p xmlns:a="http://schemas.openxmlformats.org/drawingml/2006/main">
@@ -1284,22 +1009,7 @@
           </a:p>
           <a:p xmlns:a="http://schemas.openxmlformats.org/drawingml/2006/main">
             <a:r>
-              <a:t>1. **识别基本约束**：如果主张成立，哪些条件必须满足？（来自任务本身，不是当前工具）</a:t>
-            </a:r>
-          </a:p>
-          <a:p xmlns:a="http://schemas.openxmlformats.org/drawingml/2006/main">
-            <a:r>
-              <a:t>2. **识别作用机制**：干预通过什么过程产生预期结果？</a:t>
-            </a:r>
-          </a:p>
-          <a:p xmlns:a="http://schemas.openxmlformats.org/drawingml/2006/main">
-            <a:r>
-              <a:t>3. **识别不可违背条件**：哪些变量必须一致，比较才公平？哪个反例足以推翻？</a:t>
-            </a:r>
-          </a:p>
-          <a:p xmlns:a="http://schemas.openxmlformats.org/drawingml/2006/main">
-            <a:r>
-              <a:t>4. **推导待验证前提**：从前三步推出可以检验的具体前提</a:t>
+              <a:t>课堂安排：按本稿下方 90 分钟教学路由安排；此页不另占独立时段。</a:t>
             </a:r>
           </a:p>
           <a:p xmlns:a="http://schemas.openxmlformats.org/drawingml/2006/main">
@@ -1309,7 +1019,12 @@
           </a:p>
           <a:p xmlns:a="http://schemas.openxmlformats.org/drawingml/2006/main">
             <a:r>
-              <a:t>输出：必要条件、关键约束和可检验前提清单</a:t>
+              <a:t>[Sources]</a:t>
+            </a:r>
+          </a:p>
+          <a:p xmlns:a="http://schemas.openxmlformats.org/drawingml/2006/main">
+            <a:r>
+              <a:t>讲义 §四·2 推导步骤。</a:t>
             </a:r>
           </a:p>
           <a:p xmlns:a="http://schemas.openxmlformats.org/drawingml/2006/main">
@@ -1319,97 +1034,7 @@
           </a:p>
           <a:p xmlns:a="http://schemas.openxmlformats.org/drawingml/2006/main">
             <a:r>
-              <a:t>&gt; 工具可以替换，但如果来源无法定位或评价标准在实验中变化，结论不成立。</a:t>
-            </a:r>
-          </a:p>
-          <a:p xmlns:a="http://schemas.openxmlformats.org/drawingml/2006/main">
-            <a:r>
-              <a:t/>
-            </a:r>
-          </a:p>
-          <a:p xmlns:a="http://schemas.openxmlformats.org/drawingml/2006/main">
-            <a:r>
-              <a:t>教师讲述：</a:t>
-            </a:r>
-          </a:p>
-          <a:p xmlns:a="http://schemas.openxmlformats.org/drawingml/2006/main">
-            <a:r>
-              <a:t>四步推导的关键是区分"来自任务本身的约束"和"来自当前工具的约束"。基本约束是问题成立的必要条件，作用机制指向中间过程而非最终指标，不可违背条件是比较公平性的底线。推导出的待验证前提应该是可以检验的具体陈述，不是泛泛的原则。</a:t>
-            </a:r>
-          </a:p>
-          <a:p xmlns:a="http://schemas.openxmlformats.org/drawingml/2006/main">
-            <a:r>
-              <a:t/>
-            </a:r>
-          </a:p>
-          <a:p xmlns:a="http://schemas.openxmlformats.org/drawingml/2006/main">
-            <a:r>
-              <a:t>学生动作：</a:t>
-            </a:r>
-          </a:p>
-          <a:p xmlns:a="http://schemas.openxmlformats.org/drawingml/2006/main">
-            <a:r>
-              <a:t>让学生为自己的研究问题，口头尝试回答第一步："如果主张成立，哪些条件必须满足？"</a:t>
-            </a:r>
-          </a:p>
-          <a:p xmlns:a="http://schemas.openxmlformats.org/drawingml/2006/main">
-            <a:r>
-              <a:t/>
-            </a:r>
-          </a:p>
-          <a:p xmlns:a="http://schemas.openxmlformats.org/drawingml/2006/main">
-            <a:r>
-              <a:t>来源与边界：</a:t>
-            </a:r>
-          </a:p>
-          <a:p xmlns:a="http://schemas.openxmlformats.org/drawingml/2006/main">
-            <a:r>
-              <a:t>讲义 §四·2 推导步骤。</a:t>
-            </a:r>
-          </a:p>
-          <a:p xmlns:a="http://schemas.openxmlformats.org/drawingml/2006/main">
-            <a:r>
-              <a:t/>
-            </a:r>
-          </a:p>
-          <a:p xmlns:a="http://schemas.openxmlformats.org/drawingml/2006/main">
-            <a:r>
-              <a:t>---</a:t>
-            </a:r>
-          </a:p>
-          <a:p xmlns:a="http://schemas.openxmlformats.org/drawingml/2006/main">
-            <a:r>
-              <a:t/>
-            </a:r>
-          </a:p>
-          <a:p xmlns:a="http://schemas.openxmlformats.org/drawingml/2006/main">
-            <a:r>
-              <a:t>[Sources]</a:t>
-            </a:r>
-          </a:p>
-          <a:p xmlns:a="http://schemas.openxmlformats.org/drawingml/2006/main">
-            <a:r>
-              <a:t/>
-            </a:r>
-          </a:p>
-          <a:p xmlns:a="http://schemas.openxmlformats.org/drawingml/2006/main">
-            <a:r>
-              <a:t>- 本课 handout.md 与 slides.md</a:t>
-            </a:r>
-          </a:p>
-          <a:p xmlns:a="http://schemas.openxmlformats.org/drawingml/2006/main">
-            <a:r>
-              <a:t/>
-            </a:r>
-          </a:p>
-          <a:p xmlns:a="http://schemas.openxmlformats.org/drawingml/2006/main">
-            <a:r>
-              <a:t>- ../../course/reading-card-case.md</a:t>
-            </a:r>
-          </a:p>
-          <a:p xmlns:a="http://schemas.openxmlformats.org/drawingml/2006/main">
-            <a:r>
-              <a:t/>
+              <a:t>本课 handout.md、judgment-task.md；../../course/judgment-path.md。</a:t>
             </a:r>
           </a:p>
           <a:p xmlns:a="http://schemas.openxmlformats.org/drawingml/2006/main">
@@ -1494,7 +1119,12 @@
           </a:p>
           <a:p xmlns:a="http://schemas.openxmlformats.org/drawingml/2006/main">
             <a:r>
-              <a:t>讲义位置：本课讲义；见逐页母稿映射表</a:t>
+              <a:t>讲述与校准：</a:t>
+            </a:r>
+          </a:p>
+          <a:p xmlns:a="http://schemas.openxmlformats.org/drawingml/2006/main">
+            <a:r>
+              <a:t>延续 P05 的同一问题，不再切换案例。本页只说明第 6 课输出什么：一条问题、一个待验证前提和一个替代解释标记。Q1、H1/A2 与 A1/A3 检查 的完整区分留给第 7 课，3 份源文本、两个条件各 1 份预制输出和 6 份构造输出等完整工程规格留给第 9 课。</a:t>
             </a:r>
           </a:p>
           <a:p xmlns:a="http://schemas.openxmlformats.org/drawingml/2006/main">
@@ -1504,12 +1134,12 @@
           </a:p>
           <a:p xmlns:a="http://schemas.openxmlformats.org/drawingml/2006/main">
             <a:r>
-              <a:t>屏显核对：</a:t>
-            </a:r>
-          </a:p>
-          <a:p xmlns:a="http://schemas.openxmlformats.org/drawingml/2006/main">
-            <a:r>
-              <a:t>问题：阅读卡是否降低限定条件遗漏率？</a:t>
+              <a:t>学生动作：</a:t>
+            </a:r>
+          </a:p>
+          <a:p xmlns:a="http://schemas.openxmlformats.org/drawingml/2006/main">
+            <a:r>
+              <a:t>让学生指出：当前替代解释标记更接近任务转移、标注提示还是文档结构？</a:t>
             </a:r>
           </a:p>
           <a:p xmlns:a="http://schemas.openxmlformats.org/drawingml/2006/main">
@@ -1519,17 +1149,7 @@
           </a:p>
           <a:p xmlns:a="http://schemas.openxmlformats.org/drawingml/2006/main">
             <a:r>
-              <a:t>条件：同一材料分别进入阅读卡与自由摘要。</a:t>
-            </a:r>
-          </a:p>
-          <a:p xmlns:a="http://schemas.openxmlformats.org/drawingml/2006/main">
-            <a:r>
-              <a:t>指标：相对人工复核基准，计算缺失条件比例。</a:t>
-            </a:r>
-          </a:p>
-          <a:p xmlns:a="http://schemas.openxmlformats.org/drawingml/2006/main">
-            <a:r>
-              <a:t>未决：输出确实保留更多，还是评分提示改变得分？</a:t>
+              <a:t>课堂安排：按本稿下方 90 分钟教学路由安排；此页不另占独立时段。</a:t>
             </a:r>
           </a:p>
           <a:p xmlns:a="http://schemas.openxmlformats.org/drawingml/2006/main">
@@ -1539,7 +1159,12 @@
           </a:p>
           <a:p xmlns:a="http://schemas.openxmlformats.org/drawingml/2006/main">
             <a:r>
-              <a:t>质量代价与材料范围另列检查。</a:t>
+              <a:t>[Sources]</a:t>
+            </a:r>
+          </a:p>
+          <a:p xmlns:a="http://schemas.openxmlformats.org/drawingml/2006/main">
+            <a:r>
+              <a:t>讲义 §三·3、§四与§七；本页案例为课程虚构教学样例，不表示实验已经运行。</a:t>
             </a:r>
           </a:p>
           <a:p xmlns:a="http://schemas.openxmlformats.org/drawingml/2006/main">
@@ -1549,87 +1174,7 @@
           </a:p>
           <a:p xmlns:a="http://schemas.openxmlformats.org/drawingml/2006/main">
             <a:r>
-              <a:t>教师讲述：</a:t>
-            </a:r>
-          </a:p>
-          <a:p xmlns:a="http://schemas.openxmlformats.org/drawingml/2006/main">
-            <a:r>
-              <a:t>延续 P05 的同一问题，不再切换案例。本页只说明第 6 课输出什么：一条问题、一个待验证前提和一个替代解释标记。Q1、H1/A2 与 A1/A3 检查 的完整区分留给第 7 课，3 份源文本、两个条件各 1 份预制输出和 6 份构造输出等完整工程规格留给第 9 课。</a:t>
-            </a:r>
-          </a:p>
-          <a:p xmlns:a="http://schemas.openxmlformats.org/drawingml/2006/main">
-            <a:r>
-              <a:t/>
-            </a:r>
-          </a:p>
-          <a:p xmlns:a="http://schemas.openxmlformats.org/drawingml/2006/main">
-            <a:r>
-              <a:t>学生动作：</a:t>
-            </a:r>
-          </a:p>
-          <a:p xmlns:a="http://schemas.openxmlformats.org/drawingml/2006/main">
-            <a:r>
-              <a:t>让学生指出：当前替代解释标记更接近任务转移、标注提示还是文档结构？</a:t>
-            </a:r>
-          </a:p>
-          <a:p xmlns:a="http://schemas.openxmlformats.org/drawingml/2006/main">
-            <a:r>
-              <a:t/>
-            </a:r>
-          </a:p>
-          <a:p xmlns:a="http://schemas.openxmlformats.org/drawingml/2006/main">
-            <a:r>
-              <a:t>来源与边界：</a:t>
-            </a:r>
-          </a:p>
-          <a:p xmlns:a="http://schemas.openxmlformats.org/drawingml/2006/main">
-            <a:r>
-              <a:t>讲义 §三·3、§四与§七；本页案例为课程虚构教学样例，不表示实验已经运行。</a:t>
-            </a:r>
-          </a:p>
-          <a:p xmlns:a="http://schemas.openxmlformats.org/drawingml/2006/main">
-            <a:r>
-              <a:t/>
-            </a:r>
-          </a:p>
-          <a:p xmlns:a="http://schemas.openxmlformats.org/drawingml/2006/main">
-            <a:r>
-              <a:t>---</a:t>
-            </a:r>
-          </a:p>
-          <a:p xmlns:a="http://schemas.openxmlformats.org/drawingml/2006/main">
-            <a:r>
-              <a:t/>
-            </a:r>
-          </a:p>
-          <a:p xmlns:a="http://schemas.openxmlformats.org/drawingml/2006/main">
-            <a:r>
-              <a:t>[Sources]</a:t>
-            </a:r>
-          </a:p>
-          <a:p xmlns:a="http://schemas.openxmlformats.org/drawingml/2006/main">
-            <a:r>
-              <a:t/>
-            </a:r>
-          </a:p>
-          <a:p xmlns:a="http://schemas.openxmlformats.org/drawingml/2006/main">
-            <a:r>
-              <a:t>- 本课 handout.md 与 slides.md</a:t>
-            </a:r>
-          </a:p>
-          <a:p xmlns:a="http://schemas.openxmlformats.org/drawingml/2006/main">
-            <a:r>
-              <a:t/>
-            </a:r>
-          </a:p>
-          <a:p xmlns:a="http://schemas.openxmlformats.org/drawingml/2006/main">
-            <a:r>
-              <a:t>- ../../course/reading-card-case.md</a:t>
-            </a:r>
-          </a:p>
-          <a:p xmlns:a="http://schemas.openxmlformats.org/drawingml/2006/main">
-            <a:r>
-              <a:t/>
+              <a:t>本课 handout.md、judgment-task.md；../../course/judgment-path.md。</a:t>
             </a:r>
           </a:p>
           <a:p xmlns:a="http://schemas.openxmlformats.org/drawingml/2006/main">
@@ -1714,7 +1259,12 @@
           </a:p>
           <a:p xmlns:a="http://schemas.openxmlformats.org/drawingml/2006/main">
             <a:r>
-              <a:t>讲义位置：本课讲义；见逐页母稿映射表</a:t>
+              <a:t>讲述与校准：</a:t>
+            </a:r>
+          </a:p>
+          <a:p xmlns:a="http://schemas.openxmlformats.org/drawingml/2006/main">
+            <a:r>
+              <a:t>逐条讲清 9 项门条件。第 8 项检查真实发生的无结果检索、被排除方向或被放弃问题版本，前瞻性的“如果失败就重试”不满足；第 9 项是 AI 使用与来源核验。问题门检查当前项目版本，不重新制作材料。</a:t>
             </a:r>
           </a:p>
           <a:p xmlns:a="http://schemas.openxmlformats.org/drawingml/2006/main">
@@ -1724,12 +1274,12 @@
           </a:p>
           <a:p xmlns:a="http://schemas.openxmlformats.org/drawingml/2006/main">
             <a:r>
-              <a:t>屏显核对：</a:t>
-            </a:r>
-          </a:p>
-          <a:p xmlns:a="http://schemas.openxmlformats.org/drawingml/2006/main">
-            <a:r>
-              <a:t>9 项门条件（与 [assignments.md](../../course/assignments.md) Checkpoint 1 一致）：</a:t>
+              <a:t>学生动作：</a:t>
+            </a:r>
+          </a:p>
+          <a:p xmlns:a="http://schemas.openxmlformats.org/drawingml/2006/main">
+            <a:r>
+              <a:t>让学生对照清单，标注当前项目哪些已满足、哪些待补全。</a:t>
             </a:r>
           </a:p>
           <a:p xmlns:a="http://schemas.openxmlformats.org/drawingml/2006/main">
@@ -1739,57 +1289,7 @@
           </a:p>
           <a:p xmlns:a="http://schemas.openxmlformats.org/drawingml/2006/main">
             <a:r>
-              <a:t>| # | 门条件 | 自查 |</a:t>
-            </a:r>
-          </a:p>
-          <a:p xmlns:a="http://schemas.openxmlformats.org/drawingml/2006/main">
-            <a:r>
-              <a:t>| --- | --- | --- |</a:t>
-            </a:r>
-          </a:p>
-          <a:p xmlns:a="http://schemas.openxmlformats.org/drawingml/2006/main">
-            <a:r>
-              <a:t>| 1 | ≥10 篇候选文献，标注证据角色 | □ |</a:t>
-            </a:r>
-          </a:p>
-          <a:p xmlns:a="http://schemas.openxmlformats.org/drawingml/2006/main">
-            <a:r>
-              <a:t>| 2 | ≥3 篇核心材料完整精读卡 | □ |</a:t>
-            </a:r>
-          </a:p>
-          <a:p xmlns:a="http://schemas.openxmlformats.org/drawingml/2006/main">
-            <a:r>
-              <a:t>| 3 | 精读卡含 AI 初始地图、≥2 原文核验位置、AI 错误/过度概括/遗漏或已检查风险、人工判断 | □ |</a:t>
-            </a:r>
-          </a:p>
-          <a:p xmlns:a="http://schemas.openxmlformats.org/drawingml/2006/main">
-            <a:r>
-              <a:t>| 4 | 证据地图初版（直接证据/补充证据/冲突/空白） | □ |</a:t>
-            </a:r>
-          </a:p>
-          <a:p xmlns:a="http://schemas.openxmlformats.org/drawingml/2006/main">
-            <a:r>
-              <a:t>| 5 | 研究问题含范围、非例、≥1 可证伪命题 | □ |</a:t>
-            </a:r>
-          </a:p>
-          <a:p xmlns:a="http://schemas.openxmlformats.org/drawingml/2006/main">
-            <a:r>
-              <a:t>| 6 | 第一性原理推导（必要条件、关键约束、可检验前提） | □ |</a:t>
-            </a:r>
-          </a:p>
-          <a:p xmlns:a="http://schemas.openxmlformats.org/drawingml/2006/main">
-            <a:r>
-              <a:t>| 7 | 问题重要性 + 课程周期可行性 | □ |</a:t>
-            </a:r>
-          </a:p>
-          <a:p xmlns:a="http://schemas.openxmlformats.org/drawingml/2006/main">
-            <a:r>
-              <a:t>| 8 | ≥1 条真实失败/死路：原因 + 处理 + 回写位置 | □ |</a:t>
-            </a:r>
-          </a:p>
-          <a:p xmlns:a="http://schemas.openxmlformats.org/drawingml/2006/main">
-            <a:r>
-              <a:t>| 9 | AI 辅助检索/阅读/改写已记录来源与核验方式 | □ |</a:t>
+              <a:t>课堂安排：按本稿下方 90 分钟教学路由安排；此页不另占独立时段。</a:t>
             </a:r>
           </a:p>
           <a:p xmlns:a="http://schemas.openxmlformats.org/drawingml/2006/main">
@@ -1799,7 +1299,12 @@
           </a:p>
           <a:p xmlns:a="http://schemas.openxmlformats.org/drawingml/2006/main">
             <a:r>
-              <a:t>&gt; 第 1-5 课工件持续累计；本课重点补全第 5-8 项并继续回写第 9 项。</a:t>
+              <a:t>[Sources]</a:t>
+            </a:r>
+          </a:p>
+          <a:p xmlns:a="http://schemas.openxmlformats.org/drawingml/2006/main">
+            <a:r>
+              <a:t>[assignments.md](../../course/assignments.md) Checkpoint 1 问题门条件（权威来源）；[starter-template.md](../../course/starter-template.md) §3 问题定义字段模板。</a:t>
             </a:r>
           </a:p>
           <a:p xmlns:a="http://schemas.openxmlformats.org/drawingml/2006/main">
@@ -1809,87 +1314,7 @@
           </a:p>
           <a:p xmlns:a="http://schemas.openxmlformats.org/drawingml/2006/main">
             <a:r>
-              <a:t>教师讲述：</a:t>
-            </a:r>
-          </a:p>
-          <a:p xmlns:a="http://schemas.openxmlformats.org/drawingml/2006/main">
-            <a:r>
-              <a:t>逐条讲清 9 项门条件。第 8 项检查真实发生的无结果检索、被排除方向或被放弃问题版本，前瞻性的“如果失败就重试”不满足；第 9 项是 AI 使用与来源核验。问题门检查当前项目版本，不重新制作材料。</a:t>
-            </a:r>
-          </a:p>
-          <a:p xmlns:a="http://schemas.openxmlformats.org/drawingml/2006/main">
-            <a:r>
-              <a:t/>
-            </a:r>
-          </a:p>
-          <a:p xmlns:a="http://schemas.openxmlformats.org/drawingml/2006/main">
-            <a:r>
-              <a:t>学生动作：</a:t>
-            </a:r>
-          </a:p>
-          <a:p xmlns:a="http://schemas.openxmlformats.org/drawingml/2006/main">
-            <a:r>
-              <a:t>让学生对照清单，标注当前项目哪些已满足、哪些待补全。</a:t>
-            </a:r>
-          </a:p>
-          <a:p xmlns:a="http://schemas.openxmlformats.org/drawingml/2006/main">
-            <a:r>
-              <a:t/>
-            </a:r>
-          </a:p>
-          <a:p xmlns:a="http://schemas.openxmlformats.org/drawingml/2006/main">
-            <a:r>
-              <a:t>来源与边界：</a:t>
-            </a:r>
-          </a:p>
-          <a:p xmlns:a="http://schemas.openxmlformats.org/drawingml/2006/main">
-            <a:r>
-              <a:t>[assignments.md](../../course/assignments.md) Checkpoint 1 问题门条件（权威来源）；[starter-template.md](../../course/starter-template.md) §3 问题定义字段模板。</a:t>
-            </a:r>
-          </a:p>
-          <a:p xmlns:a="http://schemas.openxmlformats.org/drawingml/2006/main">
-            <a:r>
-              <a:t/>
-            </a:r>
-          </a:p>
-          <a:p xmlns:a="http://schemas.openxmlformats.org/drawingml/2006/main">
-            <a:r>
-              <a:t>---</a:t>
-            </a:r>
-          </a:p>
-          <a:p xmlns:a="http://schemas.openxmlformats.org/drawingml/2006/main">
-            <a:r>
-              <a:t/>
-            </a:r>
-          </a:p>
-          <a:p xmlns:a="http://schemas.openxmlformats.org/drawingml/2006/main">
-            <a:r>
-              <a:t>[Sources]</a:t>
-            </a:r>
-          </a:p>
-          <a:p xmlns:a="http://schemas.openxmlformats.org/drawingml/2006/main">
-            <a:r>
-              <a:t/>
-            </a:r>
-          </a:p>
-          <a:p xmlns:a="http://schemas.openxmlformats.org/drawingml/2006/main">
-            <a:r>
-              <a:t>- 本课 handout.md 与 slides.md</a:t>
-            </a:r>
-          </a:p>
-          <a:p xmlns:a="http://schemas.openxmlformats.org/drawingml/2006/main">
-            <a:r>
-              <a:t/>
-            </a:r>
-          </a:p>
-          <a:p xmlns:a="http://schemas.openxmlformats.org/drawingml/2006/main">
-            <a:r>
-              <a:t>- ../../course/reading-card-case.md</a:t>
-            </a:r>
-          </a:p>
-          <a:p xmlns:a="http://schemas.openxmlformats.org/drawingml/2006/main">
-            <a:r>
-              <a:t/>
+              <a:t>本课 handout.md、judgment-task.md；../../course/judgment-path.md。</a:t>
             </a:r>
           </a:p>
           <a:p xmlns:a="http://schemas.openxmlformats.org/drawingml/2006/main">
@@ -1974,7 +1399,12 @@
           </a:p>
           <a:p xmlns:a="http://schemas.openxmlformats.org/drawingml/2006/main">
             <a:r>
-              <a:t>讲义位置：handout.md §三、可证伪命题；五、问题门提交清单</a:t>
+              <a:t>讲述与校准：</a:t>
+            </a:r>
+          </a:p>
+          <a:p xmlns:a="http://schemas.openxmlformats.org/drawingml/2006/main">
+            <a:r>
+              <a:t>回收本课的个人问题定义。若学生只完成教师示例，记录“方法已练习、本人项目证据未补”。不要把某篇文献没有测量的能力直接说成被反驳。</a:t>
             </a:r>
           </a:p>
           <a:p xmlns:a="http://schemas.openxmlformats.org/drawingml/2006/main">
@@ -1984,17 +1414,12 @@
           </a:p>
           <a:p xmlns:a="http://schemas.openxmlformats.org/drawingml/2006/main">
             <a:r>
-              <a:t>屏显核对：</a:t>
-            </a:r>
-          </a:p>
-          <a:p xmlns:a="http://schemas.openxmlformats.org/drawingml/2006/main">
-            <a:r>
-              <a:t>课堂构造案例：练习问题、证据与反证的对应。</a:t>
-            </a:r>
-          </a:p>
-          <a:p xmlns:a="http://schemas.openxmlformats.org/drawingml/2006/main">
-            <a:r>
-              <a:t>本人项目：仍须说明来源、可行性、约束与失败预案。</a:t>
+              <a:t>学生动作：</a:t>
+            </a:r>
+          </a:p>
+          <a:p xmlns:a="http://schemas.openxmlformats.org/drawingml/2006/main">
+            <a:r>
+              <a:t>写下本人问题门最缺的一项材料及补齐位置。</a:t>
             </a:r>
           </a:p>
           <a:p xmlns:a="http://schemas.openxmlformats.org/drawingml/2006/main">
@@ -2004,7 +1429,7 @@
           </a:p>
           <a:p xmlns:a="http://schemas.openxmlformats.org/drawingml/2006/main">
             <a:r>
-              <a:t>一项局限记录可以帮助修订问题，不能替代完整问题门材料。</a:t>
+              <a:t>课堂安排：按本稿下方 90 分钟教学路由安排；此页不另占独立时段。</a:t>
             </a:r>
           </a:p>
           <a:p xmlns:a="http://schemas.openxmlformats.org/drawingml/2006/main">
@@ -2014,12 +1439,12 @@
           </a:p>
           <a:p xmlns:a="http://schemas.openxmlformats.org/drawingml/2006/main">
             <a:r>
-              <a:t>教师讲述：</a:t>
-            </a:r>
-          </a:p>
-          <a:p xmlns:a="http://schemas.openxmlformats.org/drawingml/2006/main">
-            <a:r>
-              <a:t>回收本课的个人问题定义。若学生只完成教师示例，记录“方法已练习、本人项目证据未补”。不要把某篇文献没有测量的能力直接说成被反驳。</a:t>
+              <a:t>[Sources]</a:t>
+            </a:r>
+          </a:p>
+          <a:p xmlns:a="http://schemas.openxmlformats.org/drawingml/2006/main">
+            <a:r>
+              <a:t>./handout.md；课堂示例与构造数据见 ../../course/reading-card-case.md</a:t>
             </a:r>
           </a:p>
           <a:p xmlns:a="http://schemas.openxmlformats.org/drawingml/2006/main">
@@ -2029,62 +1454,7 @@
           </a:p>
           <a:p xmlns:a="http://schemas.openxmlformats.org/drawingml/2006/main">
             <a:r>
-              <a:t>学生动作：</a:t>
-            </a:r>
-          </a:p>
-          <a:p xmlns:a="http://schemas.openxmlformats.org/drawingml/2006/main">
-            <a:r>
-              <a:t>写下本人问题门最缺的一项材料及补齐位置。</a:t>
-            </a:r>
-          </a:p>
-          <a:p xmlns:a="http://schemas.openxmlformats.org/drawingml/2006/main">
-            <a:r>
-              <a:t/>
-            </a:r>
-          </a:p>
-          <a:p xmlns:a="http://schemas.openxmlformats.org/drawingml/2006/main">
-            <a:r>
-              <a:t>来源与边界：</a:t>
-            </a:r>
-          </a:p>
-          <a:p xmlns:a="http://schemas.openxmlformats.org/drawingml/2006/main">
-            <a:r>
-              <a:t>./handout.md；课堂示例与构造数据见 ../../course/reading-card-case.md</a:t>
-            </a:r>
-          </a:p>
-          <a:p xmlns:a="http://schemas.openxmlformats.org/drawingml/2006/main">
-            <a:r>
-              <a:t/>
-            </a:r>
-          </a:p>
-          <a:p xmlns:a="http://schemas.openxmlformats.org/drawingml/2006/main">
-            <a:r>
-              <a:t>[Sources]</a:t>
-            </a:r>
-          </a:p>
-          <a:p xmlns:a="http://schemas.openxmlformats.org/drawingml/2006/main">
-            <a:r>
-              <a:t/>
-            </a:r>
-          </a:p>
-          <a:p xmlns:a="http://schemas.openxmlformats.org/drawingml/2006/main">
-            <a:r>
-              <a:t>- 本课 handout.md 与 slides.md</a:t>
-            </a:r>
-          </a:p>
-          <a:p xmlns:a="http://schemas.openxmlformats.org/drawingml/2006/main">
-            <a:r>
-              <a:t/>
-            </a:r>
-          </a:p>
-          <a:p xmlns:a="http://schemas.openxmlformats.org/drawingml/2006/main">
-            <a:r>
-              <a:t>- ../../course/reading-card-case.md</a:t>
-            </a:r>
-          </a:p>
-          <a:p xmlns:a="http://schemas.openxmlformats.org/drawingml/2006/main">
-            <a:r>
-              <a:t/>
+              <a:t>本课 handout.md、judgment-task.md；../../course/judgment-path.md。</a:t>
             </a:r>
           </a:p>
           <a:p xmlns:a="http://schemas.openxmlformats.org/drawingml/2006/main">
@@ -2159,7 +1529,7 @@
           <a:lstStyle xmlns:a="http://schemas.openxmlformats.org/drawingml/2006/main"/>
           <a:p xmlns:a="http://schemas.openxmlformats.org/drawingml/2006/main">
             <a:r>
-              <a:t>页面：P17 个人实践：选题、边界与一个待验证前提</a:t>
+              <a:t>页面：P17 本人项目：决定、核验与回写</a:t>
             </a:r>
           </a:p>
           <a:p xmlns:a="http://schemas.openxmlformats.org/drawingml/2006/main">
@@ -2169,7 +1539,12 @@
           </a:p>
           <a:p xmlns:a="http://schemas.openxmlformats.org/drawingml/2006/main">
             <a:r>
-              <a:t>讲义位置：本课讲义；见逐页母稿映射表</a:t>
+              <a:t>讲述与校准：</a:t>
+            </a:r>
+          </a:p>
+          <a:p xmlns:a="http://schemas.openxmlformats.org/drawingml/2006/main">
+            <a:r>
+              <a:t>第一段作决定并查证据；中点处理共性卡点；第二段实际回写并验证。B 为默认低成本工程问题，能与 L9–13 连续实施。C 也可达标，但需有实际评价工作流修改并把结论限定到审计。A 原范围不可行，可以收窄成当前文本上的描述性问题。仅说“B 简单”不足，须解释坏记录影响何种研究决定。放弃真实备选即可形成死路记录，无需人为失败。</a:t>
             </a:r>
           </a:p>
           <a:p xmlns:a="http://schemas.openxmlformats.org/drawingml/2006/main">
@@ -2179,12 +1554,12 @@
           </a:p>
           <a:p xmlns:a="http://schemas.openxmlformats.org/drawingml/2006/main">
             <a:r>
-              <a:t>屏显核对：</a:t>
-            </a:r>
-          </a:p>
-          <a:p xmlns:a="http://schemas.openxmlformats.org/drawingml/2006/main">
-            <a:r>
-              <a:t>本轮完成课堂最低闭环：</a:t>
+              <a:t>学生动作：</a:t>
+            </a:r>
+          </a:p>
+          <a:p xmlns:a="http://schemas.openxmlformats.org/drawingml/2006/main">
+            <a:r>
+              <a:t>完成第三张关键来源精读卡；用四维选择理由确定微型问题，给出非例、可证伪命题及一个必要前提，课堂逐项检查问题门。</a:t>
             </a:r>
           </a:p>
           <a:p xmlns:a="http://schemas.openxmlformats.org/drawingml/2006/main">
@@ -2194,32 +1569,7 @@
           </a:p>
           <a:p xmlns:a="http://schemas.openxmlformats.org/drawingml/2006/main">
             <a:r>
-              <a:t>1. 候选题池比较：对 ≥3 候选题做来源交叉检查与四维比较，记录选定理由（沿用第 5 课题池；不足 3 个先补一个异常/痛点候选）</a:t>
-            </a:r>
-          </a:p>
-          <a:p xmlns:a="http://schemas.openxmlformats.org/drawingml/2006/main">
-            <a:r>
-              <a:t>2. 把选定的研究空白候选改写为结构性问题（补充条件、对象、干预、结果、比较）</a:t>
-            </a:r>
-          </a:p>
-          <a:p xmlns:a="http://schemas.openxmlformats.org/drawingml/2006/main">
-            <a:r>
-              <a:t>3. 写出至少一个非例（说明为什么不算）</a:t>
-            </a:r>
-          </a:p>
-          <a:p xmlns:a="http://schemas.openxmlformats.org/drawingml/2006/main">
-            <a:r>
-              <a:t>4. 写出至少一个可证伪命题（含五要素和推翻条件）</a:t>
-            </a:r>
-          </a:p>
-          <a:p xmlns:a="http://schemas.openxmlformats.org/drawingml/2006/main">
-            <a:r>
-              <a:t>5. 从第一性原理推导中收敛一个待验证前提，并写一个替代解释标记</a:t>
-            </a:r>
-          </a:p>
-          <a:p xmlns:a="http://schemas.openxmlformats.org/drawingml/2006/main">
-            <a:r>
-              <a:t>6. 对照 9 项门条件标注已满足、待补全和未满足</a:t>
+              <a:t>课堂安排：按本稿下方 90 分钟教学路由安排；此页不另占独立时段。</a:t>
             </a:r>
           </a:p>
           <a:p xmlns:a="http://schemas.openxmlformats.org/drawingml/2006/main">
@@ -2229,7 +1579,12 @@
           </a:p>
           <a:p xmlns:a="http://schemas.openxmlformats.org/drawingml/2006/main">
             <a:r>
-              <a:t>选择顺序：本人真实问题 → 导师组公开问题 → 课程贯穿案例 G1</a:t>
+              <a:t>[Sources]</a:t>
+            </a:r>
+          </a:p>
+          <a:p xmlns:a="http://schemas.openxmlformats.org/drawingml/2006/main">
+            <a:r>
+              <a:t>[starter-template.md](../../course/starter-template.md) §3 问题定义字段模板；第 3-5 课项目工件。</a:t>
             </a:r>
           </a:p>
           <a:p xmlns:a="http://schemas.openxmlformats.org/drawingml/2006/main">
@@ -2239,97 +1594,7 @@
           </a:p>
           <a:p xmlns:a="http://schemas.openxmlformats.org/drawingml/2006/main">
             <a:r>
-              <a:t>写入位置：`problem-definition.md`</a:t>
-            </a:r>
-          </a:p>
-          <a:p xmlns:a="http://schemas.openxmlformats.org/drawingml/2006/main">
-            <a:r>
-              <a:t/>
-            </a:r>
-          </a:p>
-          <a:p xmlns:a="http://schemas.openxmlformats.org/drawingml/2006/main">
-            <a:r>
-              <a:t>教师讲述：</a:t>
-            </a:r>
-          </a:p>
-          <a:p xmlns:a="http://schemas.openxmlformats.org/drawingml/2006/main">
-            <a:r>
-              <a:t>没有真实课题的学生沿用贯穿案例 G1（含虚构题池 G1/C2/C3），但不得把样例状态写成真实证据。课堂只要求选题、正负边界、一个可证伪命题、一个待验证前提和一个替代解释标记；完整竞争假设设计留给第 7 课。教师巡视只处理共同卡点，不逐台排障。</a:t>
-            </a:r>
-          </a:p>
-          <a:p xmlns:a="http://schemas.openxmlformats.org/drawingml/2006/main">
-            <a:r>
-              <a:t/>
-            </a:r>
-          </a:p>
-          <a:p xmlns:a="http://schemas.openxmlformats.org/drawingml/2006/main">
-            <a:r>
-              <a:t>学生动作：</a:t>
-            </a:r>
-          </a:p>
-          <a:p xmlns:a="http://schemas.openxmlformats.org/drawingml/2006/main">
-            <a:r>
-              <a:t>听清写入位置，打开个人项目并开始第一段实践。</a:t>
-            </a:r>
-          </a:p>
-          <a:p xmlns:a="http://schemas.openxmlformats.org/drawingml/2006/main">
-            <a:r>
-              <a:t/>
-            </a:r>
-          </a:p>
-          <a:p xmlns:a="http://schemas.openxmlformats.org/drawingml/2006/main">
-            <a:r>
-              <a:t>来源与边界：</a:t>
-            </a:r>
-          </a:p>
-          <a:p xmlns:a="http://schemas.openxmlformats.org/drawingml/2006/main">
-            <a:r>
-              <a:t>[starter-template.md](../../course/starter-template.md) §3 问题定义字段模板；第 3-5 课项目工件。</a:t>
-            </a:r>
-          </a:p>
-          <a:p xmlns:a="http://schemas.openxmlformats.org/drawingml/2006/main">
-            <a:r>
-              <a:t/>
-            </a:r>
-          </a:p>
-          <a:p xmlns:a="http://schemas.openxmlformats.org/drawingml/2006/main">
-            <a:r>
-              <a:t>---</a:t>
-            </a:r>
-          </a:p>
-          <a:p xmlns:a="http://schemas.openxmlformats.org/drawingml/2006/main">
-            <a:r>
-              <a:t/>
-            </a:r>
-          </a:p>
-          <a:p xmlns:a="http://schemas.openxmlformats.org/drawingml/2006/main">
-            <a:r>
-              <a:t>[Sources]</a:t>
-            </a:r>
-          </a:p>
-          <a:p xmlns:a="http://schemas.openxmlformats.org/drawingml/2006/main">
-            <a:r>
-              <a:t/>
-            </a:r>
-          </a:p>
-          <a:p xmlns:a="http://schemas.openxmlformats.org/drawingml/2006/main">
-            <a:r>
-              <a:t>- 本课 handout.md 与 slides.md</a:t>
-            </a:r>
-          </a:p>
-          <a:p xmlns:a="http://schemas.openxmlformats.org/drawingml/2006/main">
-            <a:r>
-              <a:t/>
-            </a:r>
-          </a:p>
-          <a:p xmlns:a="http://schemas.openxmlformats.org/drawingml/2006/main">
-            <a:r>
-              <a:t>- ../../course/reading-card-case.md</a:t>
-            </a:r>
-          </a:p>
-          <a:p xmlns:a="http://schemas.openxmlformats.org/drawingml/2006/main">
-            <a:r>
-              <a:t/>
+              <a:t>本课 handout.md、judgment-task.md；../../course/judgment-path.md。教学构造仅用于方法判断；本人结果以实际记录为准。</a:t>
             </a:r>
           </a:p>
           <a:p xmlns:a="http://schemas.openxmlformats.org/drawingml/2006/main">
@@ -2414,7 +1679,12 @@
           </a:p>
           <a:p xmlns:a="http://schemas.openxmlformats.org/drawingml/2006/main">
             <a:r>
-              <a:t>讲义位置：本课讲义；见逐页母稿映射表</a:t>
+              <a:t>讲述与校准：</a:t>
+            </a:r>
+          </a:p>
+          <a:p xmlns:a="http://schemas.openxmlformats.org/drawingml/2006/main">
+            <a:r>
+              <a:t>模板投屏。第一段个人实践先完成候选题取舍、边界和可证伪命题；教师中点点评全班最常见的一处边界或推翻条件问题；第二段再写一个待验证前提和替代解释标记。九项门条件只标状态，课后按缺口补全并提交问题门材料包。</a:t>
             </a:r>
           </a:p>
           <a:p xmlns:a="http://schemas.openxmlformats.org/drawingml/2006/main">
@@ -2424,12 +1694,12 @@
           </a:p>
           <a:p xmlns:a="http://schemas.openxmlformats.org/drawingml/2006/main">
             <a:r>
-              <a:t>屏显核对：</a:t>
-            </a:r>
-          </a:p>
-          <a:p xmlns:a="http://schemas.openxmlformats.org/drawingml/2006/main">
-            <a:r>
-              <a:t>`problem-definition.md` 模板：</a:t>
+              <a:t>学生动作：</a:t>
+            </a:r>
+          </a:p>
+          <a:p xmlns:a="http://schemas.openxmlformats.org/drawingml/2006/main">
+            <a:r>
+              <a:t>个人实践 12 分钟 → 教师中点点评 5 分钟 → 个人实践 8 分钟。</a:t>
             </a:r>
           </a:p>
           <a:p xmlns:a="http://schemas.openxmlformats.org/drawingml/2006/main">
@@ -2439,17 +1709,7 @@
           </a:p>
           <a:p xmlns:a="http://schemas.openxmlformats.org/drawingml/2006/main">
             <a:r>
-              <a:t>```text</a:t>
-            </a:r>
-          </a:p>
-          <a:p xmlns:a="http://schemas.openxmlformats.org/drawingml/2006/main">
-            <a:r>
-              <a:t>一句话研究问题：</a:t>
-            </a:r>
-          </a:p>
-          <a:p xmlns:a="http://schemas.openxmlformats.org/drawingml/2006/main">
-            <a:r>
-              <a:t>&gt; 我们研究在 ______ 条件下，______ 方法/机制是否能改善/解释 ______。</a:t>
+              <a:t>课堂安排：按本稿下方 90 分钟教学路由安排；此页不另占独立时段。</a:t>
             </a:r>
           </a:p>
           <a:p xmlns:a="http://schemas.openxmlformats.org/drawingml/2006/main">
@@ -2459,27 +1719,12 @@
           </a:p>
           <a:p xmlns:a="http://schemas.openxmlformats.org/drawingml/2006/main">
             <a:r>
-              <a:t>研究范围：</a:t>
-            </a:r>
-          </a:p>
-          <a:p xmlns:a="http://schemas.openxmlformats.org/drawingml/2006/main">
-            <a:r>
-              <a:t>- 包含什么：</a:t>
-            </a:r>
-          </a:p>
-          <a:p xmlns:a="http://schemas.openxmlformats.org/drawingml/2006/main">
-            <a:r>
-              <a:t>- 暂不包含什么：</a:t>
-            </a:r>
-          </a:p>
-          <a:p xmlns:a="http://schemas.openxmlformats.org/drawingml/2006/main">
-            <a:r>
-              <a:t>- 一个明确非例：</a:t>
-            </a:r>
-          </a:p>
-          <a:p xmlns:a="http://schemas.openxmlformats.org/drawingml/2006/main">
-            <a:r>
-              <a:t>- 一个可证伪命题：</a:t>
+              <a:t>[Sources]</a:t>
+            </a:r>
+          </a:p>
+          <a:p xmlns:a="http://schemas.openxmlformats.org/drawingml/2006/main">
+            <a:r>
+              <a:t>讲义 §五·3 问题定义文件字段；[starter-template.md](../../course/starter-template.md) §3；[assignments.md](../../course/assignments.md) Checkpoint 1。</a:t>
             </a:r>
           </a:p>
           <a:p xmlns:a="http://schemas.openxmlformats.org/drawingml/2006/main">
@@ -2489,212 +1734,7 @@
           </a:p>
           <a:p xmlns:a="http://schemas.openxmlformats.org/drawingml/2006/main">
             <a:r>
-              <a:t>第一性原理推导：</a:t>
-            </a:r>
-          </a:p>
-          <a:p xmlns:a="http://schemas.openxmlformats.org/drawingml/2006/main">
-            <a:r>
-              <a:t>- 基本约束：</a:t>
-            </a:r>
-          </a:p>
-          <a:p xmlns:a="http://schemas.openxmlformats.org/drawingml/2006/main">
-            <a:r>
-              <a:t>- 作用机制：</a:t>
-            </a:r>
-          </a:p>
-          <a:p xmlns:a="http://schemas.openxmlformats.org/drawingml/2006/main">
-            <a:r>
-              <a:t>- 不可违背条件：</a:t>
-            </a:r>
-          </a:p>
-          <a:p xmlns:a="http://schemas.openxmlformats.org/drawingml/2006/main">
-            <a:r>
-              <a:t>- 待验证前提：</a:t>
-            </a:r>
-          </a:p>
-          <a:p xmlns:a="http://schemas.openxmlformats.org/drawingml/2006/main">
-            <a:r>
-              <a:t/>
-            </a:r>
-          </a:p>
-          <a:p xmlns:a="http://schemas.openxmlformats.org/drawingml/2006/main">
-            <a:r>
-              <a:t>问题重要性：</a:t>
-            </a:r>
-          </a:p>
-          <a:p xmlns:a="http://schemas.openxmlformats.org/drawingml/2006/main">
-            <a:r>
-              <a:t>- 知识后果（So what?）：</a:t>
-            </a:r>
-          </a:p>
-          <a:p xmlns:a="http://schemas.openxmlformats.org/drawingml/2006/main">
-            <a:r>
-              <a:t>- 实际后果（Who cares?）：</a:t>
-            </a:r>
-          </a:p>
-          <a:p xmlns:a="http://schemas.openxmlformats.org/drawingml/2006/main">
-            <a:r>
-              <a:t>- 课程周期可行性：</a:t>
-            </a:r>
-          </a:p>
-          <a:p xmlns:a="http://schemas.openxmlformats.org/drawingml/2006/main">
-            <a:r>
-              <a:t/>
-            </a:r>
-          </a:p>
-          <a:p xmlns:a="http://schemas.openxmlformats.org/drawingml/2006/main">
-            <a:r>
-              <a:t>候选题池与选题理由（课程扩展）：</a:t>
-            </a:r>
-          </a:p>
-          <a:p xmlns:a="http://schemas.openxmlformats.org/drawingml/2006/main">
-            <a:r>
-              <a:t>- 候选题 ≥3 个：表述 + 生成路径标签 + 当前证据</a:t>
-            </a:r>
-          </a:p>
-          <a:p xmlns:a="http://schemas.openxmlformats.org/drawingml/2006/main">
-            <a:r>
-              <a:t>- 四维比较（意义/新颖性/可行性/兴趣）与选定理由</a:t>
-            </a:r>
-          </a:p>
-          <a:p xmlns:a="http://schemas.openxmlformats.org/drawingml/2006/main">
-            <a:r>
-              <a:t>- 新颖性线索（如有依据）：问题新 / 视角新 / 方法新 + 待核验状态</a:t>
-            </a:r>
-          </a:p>
-          <a:p xmlns:a="http://schemas.openxmlformats.org/drawingml/2006/main">
-            <a:r>
-              <a:t>- 来源交叉检查：纯文献空白来源时回答"没有这个空白还值得回答吗"</a:t>
-            </a:r>
-          </a:p>
-          <a:p xmlns:a="http://schemas.openxmlformats.org/drawingml/2006/main">
-            <a:r>
-              <a:t/>
-            </a:r>
-          </a:p>
-          <a:p xmlns:a="http://schemas.openxmlformats.org/drawingml/2006/main">
-            <a:r>
-              <a:t>第 7 课接口：</a:t>
-            </a:r>
-          </a:p>
-          <a:p xmlns:a="http://schemas.openxmlformats.org/drawingml/2006/main">
-            <a:r>
-              <a:t>- 一个会削弱当前主张的替代解释：</a:t>
-            </a:r>
-          </a:p>
-          <a:p xmlns:a="http://schemas.openxmlformats.org/drawingml/2006/main">
-            <a:r>
-              <a:t>```</a:t>
-            </a:r>
-          </a:p>
-          <a:p xmlns:a="http://schemas.openxmlformats.org/drawingml/2006/main">
-            <a:r>
-              <a:t/>
-            </a:r>
-          </a:p>
-          <a:p xmlns:a="http://schemas.openxmlformats.org/drawingml/2006/main">
-            <a:r>
-              <a:t>门条件自查（9 项，见 P15）</a:t>
-            </a:r>
-          </a:p>
-          <a:p xmlns:a="http://schemas.openxmlformats.org/drawingml/2006/main">
-            <a:r>
-              <a:t/>
-            </a:r>
-          </a:p>
-          <a:p xmlns:a="http://schemas.openxmlformats.org/drawingml/2006/main">
-            <a:r>
-              <a:t>AI 使用记录最小字段：工具/模型｜用途｜Context｜输出用途｜人工核验方式｜问题</a:t>
-            </a:r>
-          </a:p>
-          <a:p xmlns:a="http://schemas.openxmlformats.org/drawingml/2006/main">
-            <a:r>
-              <a:t/>
-            </a:r>
-          </a:p>
-          <a:p xmlns:a="http://schemas.openxmlformats.org/drawingml/2006/main">
-            <a:r>
-              <a:t>教师讲述：</a:t>
-            </a:r>
-          </a:p>
-          <a:p xmlns:a="http://schemas.openxmlformats.org/drawingml/2006/main">
-            <a:r>
-              <a:t>模板投屏。第一段个人实践先完成候选题取舍、边界和可证伪命题；教师中点点评全班最常见的一处边界或推翻条件问题；第二段再写一个待验证前提和替代解释标记。九项门条件只标状态，课后按缺口补全并提交问题门材料包。</a:t>
-            </a:r>
-          </a:p>
-          <a:p xmlns:a="http://schemas.openxmlformats.org/drawingml/2006/main">
-            <a:r>
-              <a:t/>
-            </a:r>
-          </a:p>
-          <a:p xmlns:a="http://schemas.openxmlformats.org/drawingml/2006/main">
-            <a:r>
-              <a:t>学生动作：</a:t>
-            </a:r>
-          </a:p>
-          <a:p xmlns:a="http://schemas.openxmlformats.org/drawingml/2006/main">
-            <a:r>
-              <a:t>个人实践 12 分钟 → 教师中点点评 5 分钟 → 个人实践 8 分钟。</a:t>
-            </a:r>
-          </a:p>
-          <a:p xmlns:a="http://schemas.openxmlformats.org/drawingml/2006/main">
-            <a:r>
-              <a:t/>
-            </a:r>
-          </a:p>
-          <a:p xmlns:a="http://schemas.openxmlformats.org/drawingml/2006/main">
-            <a:r>
-              <a:t>来源与边界：</a:t>
-            </a:r>
-          </a:p>
-          <a:p xmlns:a="http://schemas.openxmlformats.org/drawingml/2006/main">
-            <a:r>
-              <a:t>讲义 §五·3 问题定义文件字段；[starter-template.md](../../course/starter-template.md) §3；[assignments.md](../../course/assignments.md) Checkpoint 1。</a:t>
-            </a:r>
-          </a:p>
-          <a:p xmlns:a="http://schemas.openxmlformats.org/drawingml/2006/main">
-            <a:r>
-              <a:t/>
-            </a:r>
-          </a:p>
-          <a:p xmlns:a="http://schemas.openxmlformats.org/drawingml/2006/main">
-            <a:r>
-              <a:t>---</a:t>
-            </a:r>
-          </a:p>
-          <a:p xmlns:a="http://schemas.openxmlformats.org/drawingml/2006/main">
-            <a:r>
-              <a:t/>
-            </a:r>
-          </a:p>
-          <a:p xmlns:a="http://schemas.openxmlformats.org/drawingml/2006/main">
-            <a:r>
-              <a:t>[Sources]</a:t>
-            </a:r>
-          </a:p>
-          <a:p xmlns:a="http://schemas.openxmlformats.org/drawingml/2006/main">
-            <a:r>
-              <a:t/>
-            </a:r>
-          </a:p>
-          <a:p xmlns:a="http://schemas.openxmlformats.org/drawingml/2006/main">
-            <a:r>
-              <a:t>- 本课 handout.md 与 slides.md</a:t>
-            </a:r>
-          </a:p>
-          <a:p xmlns:a="http://schemas.openxmlformats.org/drawingml/2006/main">
-            <a:r>
-              <a:t/>
-            </a:r>
-          </a:p>
-          <a:p xmlns:a="http://schemas.openxmlformats.org/drawingml/2006/main">
-            <a:r>
-              <a:t>- ../../course/reading-card-case.md</a:t>
-            </a:r>
-          </a:p>
-          <a:p xmlns:a="http://schemas.openxmlformats.org/drawingml/2006/main">
-            <a:r>
-              <a:t/>
+              <a:t>本课 handout.md、judgment-task.md；../../course/judgment-path.md。</a:t>
             </a:r>
           </a:p>
           <a:p xmlns:a="http://schemas.openxmlformats.org/drawingml/2006/main">
@@ -2779,7 +1819,12 @@
           </a:p>
           <a:p xmlns:a="http://schemas.openxmlformats.org/drawingml/2006/main">
             <a:r>
-              <a:t>讲义位置：本课讲义；见逐页母稿映射表</a:t>
+              <a:t>讲述与校准：</a:t>
+            </a:r>
+          </a:p>
+          <a:p xmlns:a="http://schemas.openxmlformats.org/drawingml/2006/main">
+            <a:r>
+              <a:t>每人约 3-5 分钟：一人用 45 秒说明问题、非例和可证伪命题；同伴按门条件逐项检查。反馈不要求立即改写。反馈者不替代作者修改，不形成共同提交。人数为奇数时组成三人组，每人缩短说明时间。重点检查第 5-7 项（本课产出），第 1-4 项只确认已存在。</a:t>
             </a:r>
           </a:p>
           <a:p xmlns:a="http://schemas.openxmlformats.org/drawingml/2006/main">
@@ -2789,12 +1834,12 @@
           </a:p>
           <a:p xmlns:a="http://schemas.openxmlformats.org/drawingml/2006/main">
             <a:r>
-              <a:t>屏显核对：</a:t>
-            </a:r>
-          </a:p>
-          <a:p xmlns:a="http://schemas.openxmlformats.org/drawingml/2006/main">
-            <a:r>
-              <a:t>2-3 人互查，按 9 项门条件逐项检查：</a:t>
+              <a:t>学生动作：</a:t>
+            </a:r>
+          </a:p>
+          <a:p xmlns:a="http://schemas.openxmlformats.org/drawingml/2006/main">
+            <a:r>
+              <a:t>每人说明一个问题边界与推翻条件；同伴只提问题，作者记录处理方式。</a:t>
             </a:r>
           </a:p>
           <a:p xmlns:a="http://schemas.openxmlformats.org/drawingml/2006/main">
@@ -2804,32 +1849,7 @@
           </a:p>
           <a:p xmlns:a="http://schemas.openxmlformats.org/drawingml/2006/main">
             <a:r>
-              <a:t>1. 研究问题是结构性问题还是主题词？</a:t>
-            </a:r>
-          </a:p>
-          <a:p xmlns:a="http://schemas.openxmlformats.org/drawingml/2006/main">
-            <a:r>
-              <a:t>2. 非例有实质约束吗？是否过宽或过窄？</a:t>
-            </a:r>
-          </a:p>
-          <a:p xmlns:a="http://schemas.openxmlformats.org/drawingml/2006/main">
-            <a:r>
-              <a:t>3. 可证伪命题能被推翻吗？有没有对照和推翻条件？</a:t>
-            </a:r>
-          </a:p>
-          <a:p xmlns:a="http://schemas.openxmlformats.org/drawingml/2006/main">
-            <a:r>
-              <a:t>4. 第一性原理推导基于证据地图吗？还是凭空构造？</a:t>
-            </a:r>
-          </a:p>
-          <a:p xmlns:a="http://schemas.openxmlformats.org/drawingml/2006/main">
-            <a:r>
-              <a:t>5. 重要性经过"So what?"检查了吗？</a:t>
-            </a:r>
-          </a:p>
-          <a:p xmlns:a="http://schemas.openxmlformats.org/drawingml/2006/main">
-            <a:r>
-              <a:t>6. 课程周期内能完成最小验证吗？</a:t>
+              <a:t>课堂安排：按本稿下方 90 分钟教学路由安排；此页不另占独立时段。</a:t>
             </a:r>
           </a:p>
           <a:p xmlns:a="http://schemas.openxmlformats.org/drawingml/2006/main">
@@ -2839,7 +1859,12 @@
           </a:p>
           <a:p xmlns:a="http://schemas.openxmlformats.org/drawingml/2006/main">
             <a:r>
-              <a:t>作者记录：采纳／暂不采纳／待核验</a:t>
+              <a:t>[Sources]</a:t>
+            </a:r>
+          </a:p>
+          <a:p xmlns:a="http://schemas.openxmlformats.org/drawingml/2006/main">
+            <a:r>
+              <a:t>同伴反馈为形成性活动，不单独计分，不共同提交（[assignments.md](../../course/assignments.md)）。</a:t>
             </a:r>
           </a:p>
           <a:p xmlns:a="http://schemas.openxmlformats.org/drawingml/2006/main">
@@ -2849,97 +1874,7 @@
           </a:p>
           <a:p xmlns:a="http://schemas.openxmlformats.org/drawingml/2006/main">
             <a:r>
-              <a:t>&gt; 同伴只提问题，不替作者决定。</a:t>
-            </a:r>
-          </a:p>
-          <a:p xmlns:a="http://schemas.openxmlformats.org/drawingml/2006/main">
-            <a:r>
-              <a:t/>
-            </a:r>
-          </a:p>
-          <a:p xmlns:a="http://schemas.openxmlformats.org/drawingml/2006/main">
-            <a:r>
-              <a:t>教师讲述：</a:t>
-            </a:r>
-          </a:p>
-          <a:p xmlns:a="http://schemas.openxmlformats.org/drawingml/2006/main">
-            <a:r>
-              <a:t>每人约 3-5 分钟：一人用 45 秒说明问题、非例和可证伪命题；同伴按门条件逐项检查。反馈不要求立即改写。反馈者不替代作者修改，不形成共同提交。人数为奇数时组成三人组，每人缩短说明时间。重点检查第 5-7 项（本课产出），第 1-4 项只确认已存在。</a:t>
-            </a:r>
-          </a:p>
-          <a:p xmlns:a="http://schemas.openxmlformats.org/drawingml/2006/main">
-            <a:r>
-              <a:t/>
-            </a:r>
-          </a:p>
-          <a:p xmlns:a="http://schemas.openxmlformats.org/drawingml/2006/main">
-            <a:r>
-              <a:t>学生动作：</a:t>
-            </a:r>
-          </a:p>
-          <a:p xmlns:a="http://schemas.openxmlformats.org/drawingml/2006/main">
-            <a:r>
-              <a:t>每人说明一个问题边界与推翻条件；同伴只提问题，作者记录处理方式。</a:t>
-            </a:r>
-          </a:p>
-          <a:p xmlns:a="http://schemas.openxmlformats.org/drawingml/2006/main">
-            <a:r>
-              <a:t/>
-            </a:r>
-          </a:p>
-          <a:p xmlns:a="http://schemas.openxmlformats.org/drawingml/2006/main">
-            <a:r>
-              <a:t>来源与边界：</a:t>
-            </a:r>
-          </a:p>
-          <a:p xmlns:a="http://schemas.openxmlformats.org/drawingml/2006/main">
-            <a:r>
-              <a:t>同伴反馈为形成性活动，不单独计分，不共同提交（[assignments.md](../../course/assignments.md)）。</a:t>
-            </a:r>
-          </a:p>
-          <a:p xmlns:a="http://schemas.openxmlformats.org/drawingml/2006/main">
-            <a:r>
-              <a:t/>
-            </a:r>
-          </a:p>
-          <a:p xmlns:a="http://schemas.openxmlformats.org/drawingml/2006/main">
-            <a:r>
-              <a:t>---</a:t>
-            </a:r>
-          </a:p>
-          <a:p xmlns:a="http://schemas.openxmlformats.org/drawingml/2006/main">
-            <a:r>
-              <a:t/>
-            </a:r>
-          </a:p>
-          <a:p xmlns:a="http://schemas.openxmlformats.org/drawingml/2006/main">
-            <a:r>
-              <a:t>[Sources]</a:t>
-            </a:r>
-          </a:p>
-          <a:p xmlns:a="http://schemas.openxmlformats.org/drawingml/2006/main">
-            <a:r>
-              <a:t/>
-            </a:r>
-          </a:p>
-          <a:p xmlns:a="http://schemas.openxmlformats.org/drawingml/2006/main">
-            <a:r>
-              <a:t>- 本课 handout.md 与 slides.md</a:t>
-            </a:r>
-          </a:p>
-          <a:p xmlns:a="http://schemas.openxmlformats.org/drawingml/2006/main">
-            <a:r>
-              <a:t/>
-            </a:r>
-          </a:p>
-          <a:p xmlns:a="http://schemas.openxmlformats.org/drawingml/2006/main">
-            <a:r>
-              <a:t>- ../../course/reading-card-case.md</a:t>
-            </a:r>
-          </a:p>
-          <a:p xmlns:a="http://schemas.openxmlformats.org/drawingml/2006/main">
-            <a:r>
-              <a:t/>
+              <a:t>本课 handout.md、judgment-task.md；../../course/judgment-path.md。</a:t>
             </a:r>
           </a:p>
           <a:p xmlns:a="http://schemas.openxmlformats.org/drawingml/2006/main">
@@ -3024,7 +1959,12 @@
           </a:p>
           <a:p xmlns:a="http://schemas.openxmlformats.org/drawingml/2006/main">
             <a:r>
-              <a:t>讲义位置：本课讲义；见逐页母稿映射表</a:t>
+              <a:t>讲述与校准：</a:t>
+            </a:r>
+          </a:p>
+          <a:p xmlns:a="http://schemas.openxmlformats.org/drawingml/2006/main">
+            <a:r>
+              <a:t>回扣第 5 课：证据地图和研究空白候选让"缺什么"变得可见，但没有回答"问什么"。本课进入阶段一和阶段二，把空白收敛为可检验问题。</a:t>
             </a:r>
           </a:p>
           <a:p xmlns:a="http://schemas.openxmlformats.org/drawingml/2006/main">
@@ -3034,22 +1974,12 @@
           </a:p>
           <a:p xmlns:a="http://schemas.openxmlformats.org/drawingml/2006/main">
             <a:r>
-              <a:t>屏显核对：</a:t>
-            </a:r>
-          </a:p>
-          <a:p xmlns:a="http://schemas.openxmlformats.org/drawingml/2006/main">
-            <a:r>
-              <a:t>第 5 课已建立：</a:t>
-            </a:r>
-          </a:p>
-          <a:p xmlns:a="http://schemas.openxmlformats.org/drawingml/2006/main">
-            <a:r>
-              <a:t>- 证据地图初版（直接证据/补充证据/冲突/空白）</a:t>
-            </a:r>
-          </a:p>
-          <a:p xmlns:a="http://schemas.openxmlformats.org/drawingml/2006/main">
-            <a:r>
-              <a:t>- 研究空白候选（经三步检验：真实性、重要性、可行性）</a:t>
+              <a:t>学生动作：</a:t>
+            </a:r>
+          </a:p>
+          <a:p xmlns:a="http://schemas.openxmlformats.org/drawingml/2006/main">
+            <a:r>
+              <a:t>快问：你目前的研究空白候选是什么？它是一个空格描述，还是一个包含条件和机制的问题？只听回答，不评价。</a:t>
             </a:r>
           </a:p>
           <a:p xmlns:a="http://schemas.openxmlformats.org/drawingml/2006/main">
@@ -3059,27 +1989,7 @@
           </a:p>
           <a:p xmlns:a="http://schemas.openxmlformats.org/drawingml/2006/main">
             <a:r>
-              <a:t>仍未解决：</a:t>
-            </a:r>
-          </a:p>
-          <a:p xmlns:a="http://schemas.openxmlformats.org/drawingml/2006/main">
-            <a:r>
-              <a:t>- 空白如何改写为包含条件、对象、干预、结果的问题？</a:t>
-            </a:r>
-          </a:p>
-          <a:p xmlns:a="http://schemas.openxmlformats.org/drawingml/2006/main">
-            <a:r>
-              <a:t>- 什么不算本问题（非例）？</a:t>
-            </a:r>
-          </a:p>
-          <a:p xmlns:a="http://schemas.openxmlformats.org/drawingml/2006/main">
-            <a:r>
-              <a:t>- 什么观察会推翻当前主张（可证伪命题）？</a:t>
-            </a:r>
-          </a:p>
-          <a:p xmlns:a="http://schemas.openxmlformats.org/drawingml/2006/main">
-            <a:r>
-              <a:t>- 从基本约束能推出什么待验证前提？</a:t>
+              <a:t>课堂安排：按本稿下方 90 分钟教学路由安排；此页不另占独立时段。</a:t>
             </a:r>
           </a:p>
           <a:p xmlns:a="http://schemas.openxmlformats.org/drawingml/2006/main">
@@ -3089,7 +1999,12 @@
           </a:p>
           <a:p xmlns:a="http://schemas.openxmlformats.org/drawingml/2006/main">
             <a:r>
-              <a:t>&gt; 研究空白描述"缺什么"，本课回答"问什么"。</a:t>
+              <a:t>[Sources]</a:t>
+            </a:r>
+          </a:p>
+          <a:p xmlns:a="http://schemas.openxmlformats.org/drawingml/2006/main">
+            <a:r>
+              <a:t>回扣第 5 课讲义与 [AGENTS.md](../../AGENTS.md) 证据标准。</a:t>
             </a:r>
           </a:p>
           <a:p xmlns:a="http://schemas.openxmlformats.org/drawingml/2006/main">
@@ -3099,142 +2014,7 @@
           </a:p>
           <a:p xmlns:a="http://schemas.openxmlformats.org/drawingml/2006/main">
             <a:r>
-              <a:t>教师讲述：</a:t>
-            </a:r>
-          </a:p>
-          <a:p xmlns:a="http://schemas.openxmlformats.org/drawingml/2006/main">
-            <a:r>
-              <a:t>回扣第 5 课：证据地图和研究空白候选让"缺什么"变得可见，但没有回答"问什么"。本课进入阶段一和阶段二，把空白收敛为可检验问题。</a:t>
-            </a:r>
-          </a:p>
-          <a:p xmlns:a="http://schemas.openxmlformats.org/drawingml/2006/main">
-            <a:r>
-              <a:t/>
-            </a:r>
-          </a:p>
-          <a:p xmlns:a="http://schemas.openxmlformats.org/drawingml/2006/main">
-            <a:r>
-              <a:t>学生动作：</a:t>
-            </a:r>
-          </a:p>
-          <a:p xmlns:a="http://schemas.openxmlformats.org/drawingml/2006/main">
-            <a:r>
-              <a:t>快问：你目前的研究空白候选是什么？它是一个空格描述，还是一个包含条件和机制的问题？只听回答，不评价。</a:t>
-            </a:r>
-          </a:p>
-          <a:p xmlns:a="http://schemas.openxmlformats.org/drawingml/2006/main">
-            <a:r>
-              <a:t/>
-            </a:r>
-          </a:p>
-          <a:p xmlns:a="http://schemas.openxmlformats.org/drawingml/2006/main">
-            <a:r>
-              <a:t>本课板书、诊断与串词：</a:t>
-            </a:r>
-          </a:p>
-          <a:p xmlns:a="http://schemas.openxmlformats.org/drawingml/2006/main">
-            <a:r>
-              <a:t>本节替换同类口头提示，不增加既有时段。开场诊断嵌入现有开场/回顾，后续再沿原实践时段操作。</a:t>
-            </a:r>
-          </a:p>
-          <a:p xmlns:a="http://schemas.openxmlformats.org/drawingml/2006/main">
-            <a:r>
-              <a:t/>
-            </a:r>
-          </a:p>
-          <a:p xmlns:a="http://schemas.openxmlformats.org/drawingml/2006/main">
-            <a:r>
-              <a:t>- **板书主线**：问题谓词 → 反证观察；效果 / 成本 / 采用分开。</a:t>
-            </a:r>
-          </a:p>
-          <a:p xmlns:a="http://schemas.openxmlformats.org/drawingml/2006/main">
-            <a:r>
-              <a:t>- **诊断问题**：效果较好但成本高，究竟推翻了哪条命题？</a:t>
-            </a:r>
-          </a:p>
-          <a:p xmlns:a="http://schemas.openxmlformats.org/drawingml/2006/main">
-            <a:r>
-              <a:t>- **预期回答**：可能影响采用决定，不能直接推翻效果命题。</a:t>
-            </a:r>
-          </a:p>
-          <a:p xmlns:a="http://schemas.openxmlformats.org/drawingml/2006/main">
-            <a:r>
-              <a:t>- **常见误答后的追问**：要求对准命题的范围、结果谓词和不确定性。</a:t>
-            </a:r>
-          </a:p>
-          <a:p xmlns:a="http://schemas.openxmlformats.org/drawingml/2006/main">
-            <a:r>
-              <a:t>- **过渡串词**：“下一课为这个结果命题补机制，并找能区分的观察。”</a:t>
-            </a:r>
-          </a:p>
-          <a:p xmlns:a="http://schemas.openxmlformats.org/drawingml/2006/main">
-            <a:r>
-              <a:t>- **当堂最小产出**：一条可检验问题及一项本人问题门缺口。</a:t>
-            </a:r>
-          </a:p>
-          <a:p xmlns:a="http://schemas.openxmlformats.org/drawingml/2006/main">
-            <a:r>
-              <a:t>- **退出记录**：写“已完成的动作、本人项目仍缺的证据/工件、下次补齐位置”。使用教师包时标明课堂方法练习，不能据此宣称本人研究门通过；正式提交课次仍为第 6、9、13、16 课。</a:t>
-            </a:r>
-          </a:p>
-          <a:p xmlns:a="http://schemas.openxmlformats.org/drawingml/2006/main">
-            <a:r>
-              <a:t/>
-            </a:r>
-          </a:p>
-          <a:p xmlns:a="http://schemas.openxmlformats.org/drawingml/2006/main">
-            <a:r>
-              <a:t>来源与边界：</a:t>
-            </a:r>
-          </a:p>
-          <a:p xmlns:a="http://schemas.openxmlformats.org/drawingml/2006/main">
-            <a:r>
-              <a:t>回扣第 5 课讲义与 [AGENTS.md](../../AGENTS.md) 证据标准。</a:t>
-            </a:r>
-          </a:p>
-          <a:p xmlns:a="http://schemas.openxmlformats.org/drawingml/2006/main">
-            <a:r>
-              <a:t/>
-            </a:r>
-          </a:p>
-          <a:p xmlns:a="http://schemas.openxmlformats.org/drawingml/2006/main">
-            <a:r>
-              <a:t>---</a:t>
-            </a:r>
-          </a:p>
-          <a:p xmlns:a="http://schemas.openxmlformats.org/drawingml/2006/main">
-            <a:r>
-              <a:t/>
-            </a:r>
-          </a:p>
-          <a:p xmlns:a="http://schemas.openxmlformats.org/drawingml/2006/main">
-            <a:r>
-              <a:t>[Sources]</a:t>
-            </a:r>
-          </a:p>
-          <a:p xmlns:a="http://schemas.openxmlformats.org/drawingml/2006/main">
-            <a:r>
-              <a:t/>
-            </a:r>
-          </a:p>
-          <a:p xmlns:a="http://schemas.openxmlformats.org/drawingml/2006/main">
-            <a:r>
-              <a:t>- 本课 handout.md 与 slides.md</a:t>
-            </a:r>
-          </a:p>
-          <a:p xmlns:a="http://schemas.openxmlformats.org/drawingml/2006/main">
-            <a:r>
-              <a:t/>
-            </a:r>
-          </a:p>
-          <a:p xmlns:a="http://schemas.openxmlformats.org/drawingml/2006/main">
-            <a:r>
-              <a:t>- ../../course/reading-card-case.md</a:t>
-            </a:r>
-          </a:p>
-          <a:p xmlns:a="http://schemas.openxmlformats.org/drawingml/2006/main">
-            <a:r>
-              <a:t/>
+              <a:t>本课 handout.md、judgment-task.md；../../course/judgment-path.md。</a:t>
             </a:r>
           </a:p>
           <a:p xmlns:a="http://schemas.openxmlformats.org/drawingml/2006/main">
@@ -3319,7 +2099,12 @@
           </a:p>
           <a:p xmlns:a="http://schemas.openxmlformats.org/drawingml/2006/main">
             <a:r>
-              <a:t>讲义位置：本课讲义；见逐页母稿映射表</a:t>
+              <a:t>讲述与校准：</a:t>
+            </a:r>
+          </a:p>
+          <a:p xmlns:a="http://schemas.openxmlformats.org/drawingml/2006/main">
+            <a:r>
+              <a:t>回收本讲主链：从结构性问题出发，写出可证伪命题，再用基本约束推导待验证前提，最后按九项问题门条件核对。总结不替代下一页的提交说明。</a:t>
             </a:r>
           </a:p>
           <a:p xmlns:a="http://schemas.openxmlformats.org/drawingml/2006/main">
@@ -3329,12 +2114,12 @@
           </a:p>
           <a:p xmlns:a="http://schemas.openxmlformats.org/drawingml/2006/main">
             <a:r>
-              <a:t>屏显核对：</a:t>
-            </a:r>
-          </a:p>
-          <a:p xmlns:a="http://schemas.openxmlformats.org/drawingml/2006/main">
-            <a:r>
-              <a:t>结构性问题 → 可证伪命题 → 第一性原理推导 → 问题门自查</a:t>
+              <a:t>学生动作：</a:t>
+            </a:r>
+          </a:p>
+          <a:p xmlns:a="http://schemas.openxmlformats.org/drawingml/2006/main">
+            <a:r>
+              <a:t>学生用一句话说出自己当前最需要补的是问题表述、推翻条件、推导依据还是门条件记录。</a:t>
             </a:r>
           </a:p>
           <a:p xmlns:a="http://schemas.openxmlformats.org/drawingml/2006/main">
@@ -3344,22 +2129,7 @@
           </a:p>
           <a:p xmlns:a="http://schemas.openxmlformats.org/drawingml/2006/main">
             <a:r>
-              <a:t>1. **结构性问题**：写清条件、对象、干预和结果，不停在主题词或空白描述。</a:t>
-            </a:r>
-          </a:p>
-          <a:p xmlns:a="http://schemas.openxmlformats.org/drawingml/2006/main">
-            <a:r>
-              <a:t>2. **可证伪命题**：明确对照、指标与推翻条件。</a:t>
-            </a:r>
-          </a:p>
-          <a:p xmlns:a="http://schemas.openxmlformats.org/drawingml/2006/main">
-            <a:r>
-              <a:t>3. **第一性原理推导**：由基本约束推导待验证前提，并继续接受外部证据检验。</a:t>
-            </a:r>
-          </a:p>
-          <a:p xmlns:a="http://schemas.openxmlformats.org/drawingml/2006/main">
-            <a:r>
-              <a:t>4. **问题门自查**：核对九项条件以及一条已回写的真实失败或死路记录。</a:t>
+              <a:t>课堂安排：按本稿下方 90 分钟教学路由安排；此页不另占独立时段。</a:t>
             </a:r>
           </a:p>
           <a:p xmlns:a="http://schemas.openxmlformats.org/drawingml/2006/main">
@@ -3369,7 +2139,12 @@
           </a:p>
           <a:p xmlns:a="http://schemas.openxmlformats.org/drawingml/2006/main">
             <a:r>
-              <a:t>&gt; 关键边界：第一性原理推导得到的是待验证前提，不是结论；问题门检查当前项目是否具备继续研究的条件。</a:t>
+              <a:t>[Sources]</a:t>
+            </a:r>
+          </a:p>
+          <a:p xmlns:a="http://schemas.openxmlformats.org/drawingml/2006/main">
+            <a:r>
+              <a:t>讲义 §一-§五；[assignments.md](../../course/assignments.md) Checkpoint 1。</a:t>
             </a:r>
           </a:p>
           <a:p xmlns:a="http://schemas.openxmlformats.org/drawingml/2006/main">
@@ -3379,87 +2154,7 @@
           </a:p>
           <a:p xmlns:a="http://schemas.openxmlformats.org/drawingml/2006/main">
             <a:r>
-              <a:t>教师讲述：</a:t>
-            </a:r>
-          </a:p>
-          <a:p xmlns:a="http://schemas.openxmlformats.org/drawingml/2006/main">
-            <a:r>
-              <a:t>回收本讲主链：从结构性问题出发，写出可证伪命题，再用基本约束推导待验证前提，最后按九项问题门条件核对。总结不替代下一页的提交说明。</a:t>
-            </a:r>
-          </a:p>
-          <a:p xmlns:a="http://schemas.openxmlformats.org/drawingml/2006/main">
-            <a:r>
-              <a:t/>
-            </a:r>
-          </a:p>
-          <a:p xmlns:a="http://schemas.openxmlformats.org/drawingml/2006/main">
-            <a:r>
-              <a:t>学生动作：</a:t>
-            </a:r>
-          </a:p>
-          <a:p xmlns:a="http://schemas.openxmlformats.org/drawingml/2006/main">
-            <a:r>
-              <a:t>学生用一句话说出自己当前最需要补的是问题表述、推翻条件、推导依据还是门条件记录。</a:t>
-            </a:r>
-          </a:p>
-          <a:p xmlns:a="http://schemas.openxmlformats.org/drawingml/2006/main">
-            <a:r>
-              <a:t/>
-            </a:r>
-          </a:p>
-          <a:p xmlns:a="http://schemas.openxmlformats.org/drawingml/2006/main">
-            <a:r>
-              <a:t>来源与边界：</a:t>
-            </a:r>
-          </a:p>
-          <a:p xmlns:a="http://schemas.openxmlformats.org/drawingml/2006/main">
-            <a:r>
-              <a:t>讲义 §一-§五；[assignments.md](../../course/assignments.md) Checkpoint 1。</a:t>
-            </a:r>
-          </a:p>
-          <a:p xmlns:a="http://schemas.openxmlformats.org/drawingml/2006/main">
-            <a:r>
-              <a:t/>
-            </a:r>
-          </a:p>
-          <a:p xmlns:a="http://schemas.openxmlformats.org/drawingml/2006/main">
-            <a:r>
-              <a:t>---</a:t>
-            </a:r>
-          </a:p>
-          <a:p xmlns:a="http://schemas.openxmlformats.org/drawingml/2006/main">
-            <a:r>
-              <a:t/>
-            </a:r>
-          </a:p>
-          <a:p xmlns:a="http://schemas.openxmlformats.org/drawingml/2006/main">
-            <a:r>
-              <a:t>[Sources]</a:t>
-            </a:r>
-          </a:p>
-          <a:p xmlns:a="http://schemas.openxmlformats.org/drawingml/2006/main">
-            <a:r>
-              <a:t/>
-            </a:r>
-          </a:p>
-          <a:p xmlns:a="http://schemas.openxmlformats.org/drawingml/2006/main">
-            <a:r>
-              <a:t>- 本课 handout.md 与 slides.md</a:t>
-            </a:r>
-          </a:p>
-          <a:p xmlns:a="http://schemas.openxmlformats.org/drawingml/2006/main">
-            <a:r>
-              <a:t/>
-            </a:r>
-          </a:p>
-          <a:p xmlns:a="http://schemas.openxmlformats.org/drawingml/2006/main">
-            <a:r>
-              <a:t>- ../../course/reading-card-case.md</a:t>
-            </a:r>
-          </a:p>
-          <a:p xmlns:a="http://schemas.openxmlformats.org/drawingml/2006/main">
-            <a:r>
-              <a:t/>
+              <a:t>本课 handout.md、judgment-task.md；../../course/judgment-path.md。</a:t>
             </a:r>
           </a:p>
           <a:p xmlns:a="http://schemas.openxmlformats.org/drawingml/2006/main">
@@ -3544,7 +2239,12 @@
           </a:p>
           <a:p xmlns:a="http://schemas.openxmlformats.org/drawingml/2006/main">
             <a:r>
-              <a:t>讲义位置：本课讲义；见逐页母稿映射表</a:t>
+              <a:t>讲述与校准：</a:t>
+            </a:r>
+          </a:p>
+          <a:p xmlns:a="http://schemas.openxmlformats.org/drawingml/2006/main">
+            <a:r>
+              <a:t>问题门允许低成本试探，保留探索痕迹和待核验项；可用主文档章节定位，原始记录和阶段版本保留，文件数量不计分。</a:t>
             </a:r>
           </a:p>
           <a:p xmlns:a="http://schemas.openxmlformats.org/drawingml/2006/main">
@@ -3554,17 +2254,7 @@
           </a:p>
           <a:p xmlns:a="http://schemas.openxmlformats.org/drawingml/2006/main">
             <a:r>
-              <a:t>屏显核对：</a:t>
-            </a:r>
-          </a:p>
-          <a:p xmlns:a="http://schemas.openxmlformats.org/drawingml/2006/main">
-            <a:r>
-              <a:t>**提交方式**：</a:t>
-            </a:r>
-          </a:p>
-          <a:p xmlns:a="http://schemas.openxmlformats.org/drawingml/2006/main">
-            <a:r>
-              <a:t>提交指向当前个人项目版本的链接、tag 或压缩包。不重复制作与项目仓库分离的汇报文档。</a:t>
+              <a:t>明确提交方式和回退路径。问题门检查当前项目版本，不重新制作材料。未通过时回到根因所在环节修复，不是重新写一份报告。第一次未通过不扣重分，但需在一周内修订。根因定位帮助学生知道不通过时回到哪个环节。</a:t>
             </a:r>
           </a:p>
           <a:p xmlns:a="http://schemas.openxmlformats.org/drawingml/2006/main">
@@ -3574,12 +2264,12 @@
           </a:p>
           <a:p xmlns:a="http://schemas.openxmlformats.org/drawingml/2006/main">
             <a:r>
-              <a:t>**未通过时**：</a:t>
-            </a:r>
-          </a:p>
-          <a:p xmlns:a="http://schemas.openxmlformats.org/drawingml/2006/main">
-            <a:r>
-              <a:t>回到文献、证据或问题定义环节修改，一周内重新检查。第一次未通过不直接扣重分，但未按期修订影响评分维度。</a:t>
+              <a:t>学生动作：</a:t>
+            </a:r>
+          </a:p>
+          <a:p xmlns:a="http://schemas.openxmlformats.org/drawingml/2006/main">
+            <a:r>
+              <a:t>让学生检查：如果当前提交，9 项中哪一项最可能不通过？</a:t>
             </a:r>
           </a:p>
           <a:p xmlns:a="http://schemas.openxmlformats.org/drawingml/2006/main">
@@ -3589,37 +2279,7 @@
           </a:p>
           <a:p xmlns:a="http://schemas.openxmlformats.org/drawingml/2006/main">
             <a:r>
-              <a:t>**根因定位**：</a:t>
-            </a:r>
-          </a:p>
-          <a:p xmlns:a="http://schemas.openxmlformats.org/drawingml/2006/main">
-            <a:r>
-              <a:t>- 缺少直接证据 → 回到第 3-4 课检索和精读</a:t>
-            </a:r>
-          </a:p>
-          <a:p xmlns:a="http://schemas.openxmlformats.org/drawingml/2006/main">
-            <a:r>
-              <a:t>- 问题过大 → 回到本课问题重写和非例</a:t>
-            </a:r>
-          </a:p>
-          <a:p xmlns:a="http://schemas.openxmlformats.org/drawingml/2006/main">
-            <a:r>
-              <a:t>- 非例与可证伪命题矛盾 → 回到本课非例写法检查</a:t>
-            </a:r>
-          </a:p>
-          <a:p xmlns:a="http://schemas.openxmlformats.org/drawingml/2006/main">
-            <a:r>
-              <a:t>- 第一性原理脱离文献 → 回到第 5 课证据地图</a:t>
-            </a:r>
-          </a:p>
-          <a:p xmlns:a="http://schemas.openxmlformats.org/drawingml/2006/main">
-            <a:r>
-              <a:t>- 选题理由缺失 → 回到本课候选题池四维比较（P07）</a:t>
-            </a:r>
-          </a:p>
-          <a:p xmlns:a="http://schemas.openxmlformats.org/drawingml/2006/main">
-            <a:r>
-              <a:t>- 失败记录只有预案 → 回到真实检索/阅读/问题迭代，补原因、处理和回写位置</a:t>
+              <a:t>课堂安排：按本稿下方 90 分钟教学路由安排；此页不另占独立时段。</a:t>
             </a:r>
           </a:p>
           <a:p xmlns:a="http://schemas.openxmlformats.org/drawingml/2006/main">
@@ -3629,7 +2289,12 @@
           </a:p>
           <a:p xmlns:a="http://schemas.openxmlformats.org/drawingml/2006/main">
             <a:r>
-              <a:t>提交核对：problem-definition.md、failure-log.md 与回写工件是否一致</a:t>
+              <a:t>[Sources]</a:t>
+            </a:r>
+          </a:p>
+          <a:p xmlns:a="http://schemas.openxmlformats.org/drawingml/2006/main">
+            <a:r>
+              <a:t>[assignments.md](../../course/assignments.md) Checkpoint 1 提交方式与未通过处理；[assessment.md](../../course/assessment.md) "文献与问题定位"维度（25%）。</a:t>
             </a:r>
           </a:p>
           <a:p xmlns:a="http://schemas.openxmlformats.org/drawingml/2006/main">
@@ -3639,97 +2304,7 @@
           </a:p>
           <a:p xmlns:a="http://schemas.openxmlformats.org/drawingml/2006/main">
             <a:r>
-              <a:t>&gt; 门未通过时聚焦修复缺失条件，无关材料不必重复提交。</a:t>
-            </a:r>
-          </a:p>
-          <a:p xmlns:a="http://schemas.openxmlformats.org/drawingml/2006/main">
-            <a:r>
-              <a:t/>
-            </a:r>
-          </a:p>
-          <a:p xmlns:a="http://schemas.openxmlformats.org/drawingml/2006/main">
-            <a:r>
-              <a:t>教师讲述：</a:t>
-            </a:r>
-          </a:p>
-          <a:p xmlns:a="http://schemas.openxmlformats.org/drawingml/2006/main">
-            <a:r>
-              <a:t>明确提交方式和回退路径。问题门检查当前项目版本，不重新制作材料。未通过时回到根因所在环节修复，不是重新写一份报告。第一次未通过不扣重分，但需在一周内修订。根因定位帮助学生知道不通过时回到哪个环节。</a:t>
-            </a:r>
-          </a:p>
-          <a:p xmlns:a="http://schemas.openxmlformats.org/drawingml/2006/main">
-            <a:r>
-              <a:t/>
-            </a:r>
-          </a:p>
-          <a:p xmlns:a="http://schemas.openxmlformats.org/drawingml/2006/main">
-            <a:r>
-              <a:t>学生动作：</a:t>
-            </a:r>
-          </a:p>
-          <a:p xmlns:a="http://schemas.openxmlformats.org/drawingml/2006/main">
-            <a:r>
-              <a:t>让学生检查：如果当前提交，9 项中哪一项最可能不通过？</a:t>
-            </a:r>
-          </a:p>
-          <a:p xmlns:a="http://schemas.openxmlformats.org/drawingml/2006/main">
-            <a:r>
-              <a:t/>
-            </a:r>
-          </a:p>
-          <a:p xmlns:a="http://schemas.openxmlformats.org/drawingml/2006/main">
-            <a:r>
-              <a:t>来源与边界：</a:t>
-            </a:r>
-          </a:p>
-          <a:p xmlns:a="http://schemas.openxmlformats.org/drawingml/2006/main">
-            <a:r>
-              <a:t>[assignments.md](../../course/assignments.md) Checkpoint 1 提交方式与未通过处理；[assessment.md](../../course/assessment.md) "文献与问题定位"维度（25%）。</a:t>
-            </a:r>
-          </a:p>
-          <a:p xmlns:a="http://schemas.openxmlformats.org/drawingml/2006/main">
-            <a:r>
-              <a:t/>
-            </a:r>
-          </a:p>
-          <a:p xmlns:a="http://schemas.openxmlformats.org/drawingml/2006/main">
-            <a:r>
-              <a:t>---</a:t>
-            </a:r>
-          </a:p>
-          <a:p xmlns:a="http://schemas.openxmlformats.org/drawingml/2006/main">
-            <a:r>
-              <a:t/>
-            </a:r>
-          </a:p>
-          <a:p xmlns:a="http://schemas.openxmlformats.org/drawingml/2006/main">
-            <a:r>
-              <a:t>[Sources]</a:t>
-            </a:r>
-          </a:p>
-          <a:p xmlns:a="http://schemas.openxmlformats.org/drawingml/2006/main">
-            <a:r>
-              <a:t/>
-            </a:r>
-          </a:p>
-          <a:p xmlns:a="http://schemas.openxmlformats.org/drawingml/2006/main">
-            <a:r>
-              <a:t>- 本课 handout.md 与 slides.md</a:t>
-            </a:r>
-          </a:p>
-          <a:p xmlns:a="http://schemas.openxmlformats.org/drawingml/2006/main">
-            <a:r>
-              <a:t/>
-            </a:r>
-          </a:p>
-          <a:p xmlns:a="http://schemas.openxmlformats.org/drawingml/2006/main">
-            <a:r>
-              <a:t>- ../../course/reading-card-case.md</a:t>
-            </a:r>
-          </a:p>
-          <a:p xmlns:a="http://schemas.openxmlformats.org/drawingml/2006/main">
-            <a:r>
-              <a:t/>
+              <a:t>本课 handout.md、judgment-task.md；../../course/judgment-path.md。</a:t>
             </a:r>
           </a:p>
           <a:p xmlns:a="http://schemas.openxmlformats.org/drawingml/2006/main">
@@ -3804,7 +2379,7 @@
           <a:lstStyle xmlns:a="http://schemas.openxmlformats.org/drawingml/2006/main"/>
           <a:p xmlns:a="http://schemas.openxmlformats.org/drawingml/2006/main">
             <a:r>
-              <a:t>页面：P22 退出卡与第 7 课预告</a:t>
+              <a:t>页面：P22 保留本课决定，准备下一课输入</a:t>
             </a:r>
           </a:p>
           <a:p xmlns:a="http://schemas.openxmlformats.org/drawingml/2006/main">
@@ -3814,7 +2389,12 @@
           </a:p>
           <a:p xmlns:a="http://schemas.openxmlformats.org/drawingml/2006/main">
             <a:r>
-              <a:t>讲义位置：本课讲义；见逐页母稿映射表</a:t>
+              <a:t>讲述与校准：</a:t>
+            </a:r>
+          </a:p>
+          <a:p xmlns:a="http://schemas.openxmlformats.org/drawingml/2006/main">
+            <a:r>
+              <a:t>15 分钟整理；45 分钟只修课堂发现的缺口并提交问题门。 每课课外最多60分钟；详见讲义。</a:t>
             </a:r>
           </a:p>
           <a:p xmlns:a="http://schemas.openxmlformats.org/drawingml/2006/main">
@@ -3824,12 +2404,12 @@
           </a:p>
           <a:p xmlns:a="http://schemas.openxmlformats.org/drawingml/2006/main">
             <a:r>
-              <a:t>屏显核对：</a:t>
-            </a:r>
-          </a:p>
-          <a:p xmlns:a="http://schemas.openxmlformats.org/drawingml/2006/main">
-            <a:r>
-              <a:t>退出卡：</a:t>
+              <a:t>学生动作：</a:t>
+            </a:r>
+          </a:p>
+          <a:p xmlns:a="http://schemas.openxmlformats.org/drawingml/2006/main">
+            <a:r>
+              <a:t>定位实际工件与下一项动作；按既定预算收口。</a:t>
             </a:r>
           </a:p>
           <a:p xmlns:a="http://schemas.openxmlformats.org/drawingml/2006/main">
@@ -3839,17 +2419,7 @@
           </a:p>
           <a:p xmlns:a="http://schemas.openxmlformats.org/drawingml/2006/main">
             <a:r>
-              <a:t>1. 当前问题属于主题、问题，还是待验证主张？</a:t>
-            </a:r>
-          </a:p>
-          <a:p xmlns:a="http://schemas.openxmlformats.org/drawingml/2006/main">
-            <a:r>
-              <a:t>2. 哪项观察可能推翻主张？</a:t>
-            </a:r>
-          </a:p>
-          <a:p xmlns:a="http://schemas.openxmlformats.org/drawingml/2006/main">
-            <a:r>
-              <a:t>3. 九项问题门条件中，最需要补哪一项？</a:t>
+              <a:t>课堂安排：按本稿下方 90 分钟教学路由安排；此页不另占独立时段。</a:t>
             </a:r>
           </a:p>
           <a:p xmlns:a="http://schemas.openxmlformats.org/drawingml/2006/main">
@@ -3859,12 +2429,27 @@
           </a:p>
           <a:p xmlns:a="http://schemas.openxmlformats.org/drawingml/2006/main">
             <a:r>
-              <a:t>课后提交问题门材料包，包含至少 3 张相关完整精读卡。</a:t>
-            </a:r>
-          </a:p>
-          <a:p xmlns:a="http://schemas.openxmlformats.org/drawingml/2006/main">
-            <a:r>
-              <a:t>第 7 课：机制假设、研究判断与实验设计。</a:t>
+              <a:t>[Sources]</a:t>
+            </a:r>
+          </a:p>
+          <a:p xmlns:a="http://schemas.openxmlformats.org/drawingml/2006/main">
+            <a:r>
+              <a:t>- Booth, W. C. et al. *The Craft of Research*, 5th ed. [出版社页面](https://press.uchicago.edu/ucp/books/book/chicago/C/bo215874008)。</a:t>
+            </a:r>
+          </a:p>
+          <a:p xmlns:a="http://schemas.openxmlformats.org/drawingml/2006/main">
+            <a:r>
+              <a:t>- Platt, J. R. *Science* 146(3642), 347-353 (1964). DOI: [10.1126/science.146.3642.347](https://pubmed.ncbi.nlm.nih.gov/17739513/)。</a:t>
+            </a:r>
+          </a:p>
+          <a:p xmlns:a="http://schemas.openxmlformats.org/drawingml/2006/main">
+            <a:r>
+              <a:t>- Hamming, R. W. *The Art of Doing Science and Engineering*. [出版社页面](https://press.stripe.com/the-art-of-doing-science-and-engineering)。</a:t>
+            </a:r>
+          </a:p>
+          <a:p xmlns:a="http://schemas.openxmlformats.org/drawingml/2006/main">
+            <a:r>
+              <a:t>- 阅读规则见 [reading-list.md](../../course/reading-list.md)。</a:t>
             </a:r>
           </a:p>
           <a:p xmlns:a="http://schemas.openxmlformats.org/drawingml/2006/main">
@@ -3874,157 +2459,7 @@
           </a:p>
           <a:p xmlns:a="http://schemas.openxmlformats.org/drawingml/2006/main">
             <a:r>
-              <a:t>教师讲述：</a:t>
-            </a:r>
-          </a:p>
-          <a:p xmlns:a="http://schemas.openxmlformats.org/drawingml/2006/main">
-            <a:r>
-              <a:t>课后阅读提示保留在此处；屏显只收束三个核心自检问题。</a:t>
-            </a:r>
-          </a:p>
-          <a:p xmlns:a="http://schemas.openxmlformats.org/drawingml/2006/main">
-            <a:r>
-              <a:t/>
-            </a:r>
-          </a:p>
-          <a:p xmlns:a="http://schemas.openxmlformats.org/drawingml/2006/main">
-            <a:r>
-              <a:t>课后引导阅读（采用 AI 导航→原文核验→AI 质疑→偏差审计→人工定稿流程）：</a:t>
-            </a:r>
-          </a:p>
-          <a:p xmlns:a="http://schemas.openxmlformats.org/drawingml/2006/main">
-            <a:r>
-              <a:t>- Booth et al. *The Craft of Research*, 5th ed., Chapter 1-2，核心阅读；</a:t>
-            </a:r>
-          </a:p>
-          <a:p xmlns:a="http://schemas.openxmlformats.org/drawingml/2006/main">
-            <a:r>
-              <a:t>- Platt, "Strong Inference."，任选；</a:t>
-            </a:r>
-          </a:p>
-          <a:p xmlns:a="http://schemas.openxmlformats.org/drawingml/2006/main">
-            <a:r>
-              <a:t>- Hamming, "You and Your Research."，任选；</a:t>
-            </a:r>
-          </a:p>
-          <a:p xmlns:a="http://schemas.openxmlformats.org/drawingml/2006/main">
-            <a:r>
-              <a:t>- 霍强《创新研究到底怎么做？》，任选。</a:t>
-            </a:r>
-          </a:p>
-          <a:p xmlns:a="http://schemas.openxmlformats.org/drawingml/2006/main">
-            <a:r>
-              <a:t/>
-            </a:r>
-          </a:p>
-          <a:p xmlns:a="http://schemas.openxmlformats.org/drawingml/2006/main">
-            <a:r>
-              <a:t>精读卡持续保存在个人项目 `notes/`，不逐周正式提交。问题门统一检查至少 3 张与个人项目直接相关的完整精读卡。</a:t>
-            </a:r>
-          </a:p>
-          <a:p xmlns:a="http://schemas.openxmlformats.org/drawingml/2006/main">
-            <a:r>
-              <a:t/>
-            </a:r>
-          </a:p>
-          <a:p xmlns:a="http://schemas.openxmlformats.org/drawingml/2006/main">
-            <a:r>
-              <a:t/>
-            </a:r>
-          </a:p>
-          <a:p xmlns:a="http://schemas.openxmlformats.org/drawingml/2006/main">
-            <a:r>
-              <a:t/>
-            </a:r>
-          </a:p>
-          <a:p xmlns:a="http://schemas.openxmlformats.org/drawingml/2006/main">
-            <a:r>
-              <a:t/>
-            </a:r>
-          </a:p>
-          <a:p xmlns:a="http://schemas.openxmlformats.org/drawingml/2006/main">
-            <a:r>
-              <a:t>回扣本课目标：学生不需要在 90 分钟内完成全部门条件自查，只要 problem-definition.md 更新版包含研究问题、非例、可证伪命题、重要性说明和候选题池与选题理由，第一性原理推导完成四步，就已经形成可提交的起点。课后完成自查和补全后提交问题门材料包。第 7 课将在这些问题上建立机制假设和实验设计——第一性原理推导的待验证前提将成为第 7 课机制假设的直接输入。</a:t>
-            </a:r>
-          </a:p>
-          <a:p xmlns:a="http://schemas.openxmlformats.org/drawingml/2006/main">
-            <a:r>
-              <a:t/>
-            </a:r>
-          </a:p>
-          <a:p xmlns:a="http://schemas.openxmlformats.org/drawingml/2006/main">
-            <a:r>
-              <a:t>学生动作：</a:t>
-            </a:r>
-          </a:p>
-          <a:p xmlns:a="http://schemas.openxmlformats.org/drawingml/2006/main">
-            <a:r>
-              <a:t>学生提交退出卡或保存在个人项目。教师收集共性问题，用于第 7 课前调整。</a:t>
-            </a:r>
-          </a:p>
-          <a:p xmlns:a="http://schemas.openxmlformats.org/drawingml/2006/main">
-            <a:r>
-              <a:t/>
-            </a:r>
-          </a:p>
-          <a:p xmlns:a="http://schemas.openxmlformats.org/drawingml/2006/main">
-            <a:r>
-              <a:t>来源与边界：</a:t>
-            </a:r>
-          </a:p>
-          <a:p xmlns:a="http://schemas.openxmlformats.org/drawingml/2006/main">
-            <a:r>
-              <a:t>- Booth, W. C. et al. *The Craft of Research*, 5th ed. [出版社页面](https://press.uchicago.edu/ucp/books/book/chicago/C/bo215874008)。</a:t>
-            </a:r>
-          </a:p>
-          <a:p xmlns:a="http://schemas.openxmlformats.org/drawingml/2006/main">
-            <a:r>
-              <a:t>- Platt, J. R. *Science* 146(3642), 347-353 (1964). DOI: [10.1126/science.146.3642.347](https://pubmed.ncbi.nlm.nih.gov/17739513/)。</a:t>
-            </a:r>
-          </a:p>
-          <a:p xmlns:a="http://schemas.openxmlformats.org/drawingml/2006/main">
-            <a:r>
-              <a:t>- Hamming, R. W. *The Art of Doing Science and Engineering*. [出版社页面](https://press.stripe.com/the-art-of-doing-science-and-engineering)。</a:t>
-            </a:r>
-          </a:p>
-          <a:p xmlns:a="http://schemas.openxmlformats.org/drawingml/2006/main">
-            <a:r>
-              <a:t>- 阅读规则见 [reading-list.md](../../course/reading-list.md)。</a:t>
-            </a:r>
-          </a:p>
-          <a:p xmlns:a="http://schemas.openxmlformats.org/drawingml/2006/main">
-            <a:r>
-              <a:t/>
-            </a:r>
-          </a:p>
-          <a:p xmlns:a="http://schemas.openxmlformats.org/drawingml/2006/main">
-            <a:r>
-              <a:t>[Sources]</a:t>
-            </a:r>
-          </a:p>
-          <a:p xmlns:a="http://schemas.openxmlformats.org/drawingml/2006/main">
-            <a:r>
-              <a:t/>
-            </a:r>
-          </a:p>
-          <a:p xmlns:a="http://schemas.openxmlformats.org/drawingml/2006/main">
-            <a:r>
-              <a:t>- 本课 handout.md 与 slides.md</a:t>
-            </a:r>
-          </a:p>
-          <a:p xmlns:a="http://schemas.openxmlformats.org/drawingml/2006/main">
-            <a:r>
-              <a:t/>
-            </a:r>
-          </a:p>
-          <a:p xmlns:a="http://schemas.openxmlformats.org/drawingml/2006/main">
-            <a:r>
-              <a:t>- ../../course/reading-card-case.md</a:t>
-            </a:r>
-          </a:p>
-          <a:p xmlns:a="http://schemas.openxmlformats.org/drawingml/2006/main">
-            <a:r>
-              <a:t/>
+              <a:t>本课 handout.md、judgment-task.md；../../course/judgment-path.md。教学构造仅用于方法判断；本人结果以实际记录为准。</a:t>
             </a:r>
           </a:p>
           <a:p xmlns:a="http://schemas.openxmlformats.org/drawingml/2006/main">
@@ -4099,7 +2534,7 @@
           <a:lstStyle xmlns:a="http://schemas.openxmlformats.org/drawingml/2006/main"/>
           <a:p xmlns:a="http://schemas.openxmlformats.org/drawingml/2006/main">
             <a:r>
-              <a:t>页面：P03 本课目标与课堂产出</a:t>
+              <a:t>页面：P03 选择一个能完成的问题</a:t>
             </a:r>
           </a:p>
           <a:p xmlns:a="http://schemas.openxmlformats.org/drawingml/2006/main">
@@ -4109,7 +2544,12 @@
           </a:p>
           <a:p xmlns:a="http://schemas.openxmlformats.org/drawingml/2006/main">
             <a:r>
-              <a:t>讲义位置：本课讲义；见逐页母稿映射表</a:t>
+              <a:t>讲述与校准：</a:t>
+            </a:r>
+          </a:p>
+          <a:p xmlns:a="http://schemas.openxmlformats.org/drawingml/2006/main">
+            <a:r>
+              <a:t>先独立作答，再同伴比较；以下依据只在校准时揭示。</a:t>
             </a:r>
           </a:p>
           <a:p xmlns:a="http://schemas.openxmlformats.org/drawingml/2006/main">
@@ -4119,12 +2559,7 @@
           </a:p>
           <a:p xmlns:a="http://schemas.openxmlformats.org/drawingml/2006/main">
             <a:r>
-              <a:t>屏显核对：</a:t>
-            </a:r>
-          </a:p>
-          <a:p xmlns:a="http://schemas.openxmlformats.org/drawingml/2006/main">
-            <a:r>
-              <a:t>完成本课后，你能：</a:t>
+              <a:t>B 为默认低成本工程问题，能与 L9–13 连续实施。C 也可达标，但需有实际评价工作流修改并把结论限定到审计。A 原范围不可行，可以收窄成当前文本上的描述性问题。仅说“B 简单”不足，须解释坏记录影响何种研究决定。放弃真实备选即可形成死路记录，无需人为失败。</a:t>
             </a:r>
           </a:p>
           <a:p xmlns:a="http://schemas.openxmlformats.org/drawingml/2006/main">
@@ -4134,32 +2569,12 @@
           </a:p>
           <a:p xmlns:a="http://schemas.openxmlformats.org/drawingml/2006/main">
             <a:r>
-              <a:t>1. 把宽泛兴趣改写为范围清楚、可证伪、周期可完成的研究问题；</a:t>
-            </a:r>
-          </a:p>
-          <a:p xmlns:a="http://schemas.openxmlformats.org/drawingml/2006/main">
-            <a:r>
-              <a:t>2. 用非例界定问题边界；</a:t>
-            </a:r>
-          </a:p>
-          <a:p xmlns:a="http://schemas.openxmlformats.org/drawingml/2006/main">
-            <a:r>
-              <a:t>3. 写出至少一个可证伪命题；</a:t>
-            </a:r>
-          </a:p>
-          <a:p xmlns:a="http://schemas.openxmlformats.org/drawingml/2006/main">
-            <a:r>
-              <a:t>4. 从基本约束推导待验证前提，并说明适用边界；</a:t>
-            </a:r>
-          </a:p>
-          <a:p xmlns:a="http://schemas.openxmlformats.org/drawingml/2006/main">
-            <a:r>
-              <a:t>5. 用"So what?"和"Who cares?"检查重要性；</a:t>
-            </a:r>
-          </a:p>
-          <a:p xmlns:a="http://schemas.openxmlformats.org/drawingml/2006/main">
-            <a:r>
-              <a:t>6. 对照问题门条件完成提交前自查。</a:t>
+              <a:t>学生动作：</a:t>
+            </a:r>
+          </a:p>
+          <a:p xmlns:a="http://schemas.openxmlformats.org/drawingml/2006/main">
+            <a:r>
+              <a:t>先独立写决定和证据，后同伴比较；校准后再回写。</a:t>
             </a:r>
           </a:p>
           <a:p xmlns:a="http://schemas.openxmlformats.org/drawingml/2006/main">
@@ -4169,7 +2584,7 @@
           </a:p>
           <a:p xmlns:a="http://schemas.openxmlformats.org/drawingml/2006/main">
             <a:r>
-              <a:t>课堂产出：问题门材料初版（problem-definition.md + 第一性原理推导）</a:t>
+              <a:t>课堂安排：按本稿下方 90 分钟教学路由安排；此页不另占独立时段。</a:t>
             </a:r>
           </a:p>
           <a:p xmlns:a="http://schemas.openxmlformats.org/drawingml/2006/main">
@@ -4179,7 +2594,12 @@
           </a:p>
           <a:p xmlns:a="http://schemas.openxmlformats.org/drawingml/2006/main">
             <a:r>
-              <a:t>&gt; 课后提交问题门材料包，具体条件以 assignments.md 为准。</a:t>
+              <a:t>[Sources]</a:t>
+            </a:r>
+          </a:p>
+          <a:p xmlns:a="http://schemas.openxmlformats.org/drawingml/2006/main">
+            <a:r>
+              <a:t>[备课规划.md](../备课规划.md) 第 6 课目标段；[assignments.md](../../course/assignments.md) Checkpoint 1 问题门条件。</a:t>
             </a:r>
           </a:p>
           <a:p xmlns:a="http://schemas.openxmlformats.org/drawingml/2006/main">
@@ -4189,87 +2609,7 @@
           </a:p>
           <a:p xmlns:a="http://schemas.openxmlformats.org/drawingml/2006/main">
             <a:r>
-              <a:t>教师讲述：</a:t>
-            </a:r>
-          </a:p>
-          <a:p xmlns:a="http://schemas.openxmlformats.org/drawingml/2006/main">
-            <a:r>
-              <a:t>明确边界：本课目标是完成问题门材料的初版，不要求课堂内全部自查通过。问题门条件以 [assignments.md](../../course/assignments.md) Checkpoint 1 为权威来源，本课自查清单与之一一对应。第 1-5 课的文献、精读卡和证据地图已是项目的一部分，本课只补充研究问题、非例、可证伪命题和第一性原理推导。</a:t>
-            </a:r>
-          </a:p>
-          <a:p xmlns:a="http://schemas.openxmlformats.org/drawingml/2006/main">
-            <a:r>
-              <a:t/>
-            </a:r>
-          </a:p>
-          <a:p xmlns:a="http://schemas.openxmlformats.org/drawingml/2006/main">
-            <a:r>
-              <a:t>学生动作：</a:t>
-            </a:r>
-          </a:p>
-          <a:p xmlns:a="http://schemas.openxmlformats.org/drawingml/2006/main">
-            <a:r>
-              <a:t>无。</a:t>
-            </a:r>
-          </a:p>
-          <a:p xmlns:a="http://schemas.openxmlformats.org/drawingml/2006/main">
-            <a:r>
-              <a:t/>
-            </a:r>
-          </a:p>
-          <a:p xmlns:a="http://schemas.openxmlformats.org/drawingml/2006/main">
-            <a:r>
-              <a:t>来源与边界：</a:t>
-            </a:r>
-          </a:p>
-          <a:p xmlns:a="http://schemas.openxmlformats.org/drawingml/2006/main">
-            <a:r>
-              <a:t>[备课规划.md](../备课规划.md) 第 6 课目标段；[assignments.md](../../course/assignments.md) Checkpoint 1 问题门条件。</a:t>
-            </a:r>
-          </a:p>
-          <a:p xmlns:a="http://schemas.openxmlformats.org/drawingml/2006/main">
-            <a:r>
-              <a:t/>
-            </a:r>
-          </a:p>
-          <a:p xmlns:a="http://schemas.openxmlformats.org/drawingml/2006/main">
-            <a:r>
-              <a:t>---</a:t>
-            </a:r>
-          </a:p>
-          <a:p xmlns:a="http://schemas.openxmlformats.org/drawingml/2006/main">
-            <a:r>
-              <a:t/>
-            </a:r>
-          </a:p>
-          <a:p xmlns:a="http://schemas.openxmlformats.org/drawingml/2006/main">
-            <a:r>
-              <a:t>[Sources]</a:t>
-            </a:r>
-          </a:p>
-          <a:p xmlns:a="http://schemas.openxmlformats.org/drawingml/2006/main">
-            <a:r>
-              <a:t/>
-            </a:r>
-          </a:p>
-          <a:p xmlns:a="http://schemas.openxmlformats.org/drawingml/2006/main">
-            <a:r>
-              <a:t>- 本课 handout.md 与 slides.md</a:t>
-            </a:r>
-          </a:p>
-          <a:p xmlns:a="http://schemas.openxmlformats.org/drawingml/2006/main">
-            <a:r>
-              <a:t/>
-            </a:r>
-          </a:p>
-          <a:p xmlns:a="http://schemas.openxmlformats.org/drawingml/2006/main">
-            <a:r>
-              <a:t>- ../../course/reading-card-case.md</a:t>
-            </a:r>
-          </a:p>
-          <a:p xmlns:a="http://schemas.openxmlformats.org/drawingml/2006/main">
-            <a:r>
-              <a:t/>
+              <a:t>本课 handout.md、judgment-task.md；../../course/judgment-path.md。教学构造仅用于方法判断；本人结果以实际记录为准。</a:t>
             </a:r>
           </a:p>
           <a:p xmlns:a="http://schemas.openxmlformats.org/drawingml/2006/main">
@@ -4354,7 +2694,12 @@
           </a:p>
           <a:p xmlns:a="http://schemas.openxmlformats.org/drawingml/2006/main">
             <a:r>
-              <a:t>讲义位置：本课讲义；见逐页母稿映射表</a:t>
+              <a:t>讲述与校准：</a:t>
+            </a:r>
+          </a:p>
+          <a:p xmlns:a="http://schemas.openxmlformats.org/drawingml/2006/main">
+            <a:r>
+              <a:t>让学生先判断自己当前的问题表述属于哪一层。常见错误是停在主题层，缺少条件、对象和比较。研究问题需要指明在什么条件下、对什么对象、什么干预、什么结果、与什么比较。缺少任何一项，综述和实验都无法定位。</a:t>
             </a:r>
           </a:p>
           <a:p xmlns:a="http://schemas.openxmlformats.org/drawingml/2006/main">
@@ -4364,32 +2709,12 @@
           </a:p>
           <a:p xmlns:a="http://schemas.openxmlformats.org/drawingml/2006/main">
             <a:r>
-              <a:t>屏显核对：</a:t>
-            </a:r>
-          </a:p>
-          <a:p xmlns:a="http://schemas.openxmlformats.org/drawingml/2006/main">
-            <a:r>
-              <a:t>| 层次 | 典型表述 | 还需回答 |</a:t>
-            </a:r>
-          </a:p>
-          <a:p xmlns:a="http://schemas.openxmlformats.org/drawingml/2006/main">
-            <a:r>
-              <a:t>| --- | --- | --- |</a:t>
-            </a:r>
-          </a:p>
-          <a:p xmlns:a="http://schemas.openxmlformats.org/drawingml/2006/main">
-            <a:r>
-              <a:t>| 主题 | AI 辅助论文阅读 | 对象、任务与比较 |</a:t>
-            </a:r>
-          </a:p>
-          <a:p xmlns:a="http://schemas.openxmlformats.org/drawingml/2006/main">
-            <a:r>
-              <a:t>| 问题 | 在限定材料中，阅读卡是否比自由摘要少遗漏条件？ | 可检验的候选答案 |</a:t>
-            </a:r>
-          </a:p>
-          <a:p xmlns:a="http://schemas.openxmlformats.org/drawingml/2006/main">
-            <a:r>
-              <a:t>| 待验证主张 | 阅读卡组的限定条件遗漏率更低。 | 同口径结果与适用边界 |</a:t>
+              <a:t>学生动作：</a:t>
+            </a:r>
+          </a:p>
+          <a:p xmlns:a="http://schemas.openxmlformats.org/drawingml/2006/main">
+            <a:r>
+              <a:t>请学生举手：你当前的 problem-definition.md 里的问题表述属于哪一层？只统计，不点名。</a:t>
             </a:r>
           </a:p>
           <a:p xmlns:a="http://schemas.openxmlformats.org/drawingml/2006/main">
@@ -4399,7 +2724,7 @@
           </a:p>
           <a:p xmlns:a="http://schemas.openxmlformats.org/drawingml/2006/main">
             <a:r>
-              <a:t>结果命题可检验，机制解释另需区分观察。</a:t>
+              <a:t>课堂安排：按本稿下方 90 分钟教学路由安排；此页不另占独立时段。</a:t>
             </a:r>
           </a:p>
           <a:p xmlns:a="http://schemas.openxmlformats.org/drawingml/2006/main">
@@ -4409,12 +2734,12 @@
           </a:p>
           <a:p xmlns:a="http://schemas.openxmlformats.org/drawingml/2006/main">
             <a:r>
-              <a:t>教师讲述：</a:t>
-            </a:r>
-          </a:p>
-          <a:p xmlns:a="http://schemas.openxmlformats.org/drawingml/2006/main">
-            <a:r>
-              <a:t>让学生先判断自己当前的问题表述属于哪一层。常见错误是停在主题层，缺少条件、对象和比较。研究问题需要指明在什么条件下、对什么对象、什么干预、什么结果、与什么比较。缺少任何一项，综述和实验都无法定位。</a:t>
+              <a:t>[Sources]</a:t>
+            </a:r>
+          </a:p>
+          <a:p xmlns:a="http://schemas.openxmlformats.org/drawingml/2006/main">
+            <a:r>
+              <a:t>讲义 §一·1 主题、问题与主张；Booth et al. *The Craft of Research*, 5th ed., Chapter 1 "From Topics to Questions"（[reading-list.md](../../course/reading-list.md) 第 6 课）。</a:t>
             </a:r>
           </a:p>
           <a:p xmlns:a="http://schemas.openxmlformats.org/drawingml/2006/main">
@@ -4424,72 +2749,7 @@
           </a:p>
           <a:p xmlns:a="http://schemas.openxmlformats.org/drawingml/2006/main">
             <a:r>
-              <a:t>学生动作：</a:t>
-            </a:r>
-          </a:p>
-          <a:p xmlns:a="http://schemas.openxmlformats.org/drawingml/2006/main">
-            <a:r>
-              <a:t>请学生举手：你当前的 problem-definition.md 里的问题表述属于哪一层？只统计，不点名。</a:t>
-            </a:r>
-          </a:p>
-          <a:p xmlns:a="http://schemas.openxmlformats.org/drawingml/2006/main">
-            <a:r>
-              <a:t/>
-            </a:r>
-          </a:p>
-          <a:p xmlns:a="http://schemas.openxmlformats.org/drawingml/2006/main">
-            <a:r>
-              <a:t>来源与边界：</a:t>
-            </a:r>
-          </a:p>
-          <a:p xmlns:a="http://schemas.openxmlformats.org/drawingml/2006/main">
-            <a:r>
-              <a:t>讲义 §一·1 主题、问题与主张；Booth et al. *The Craft of Research*, 5th ed., Chapter 1 "From Topics to Questions"（[reading-list.md](../../course/reading-list.md) 第 6 课）。</a:t>
-            </a:r>
-          </a:p>
-          <a:p xmlns:a="http://schemas.openxmlformats.org/drawingml/2006/main">
-            <a:r>
-              <a:t/>
-            </a:r>
-          </a:p>
-          <a:p xmlns:a="http://schemas.openxmlformats.org/drawingml/2006/main">
-            <a:r>
-              <a:t>---</a:t>
-            </a:r>
-          </a:p>
-          <a:p xmlns:a="http://schemas.openxmlformats.org/drawingml/2006/main">
-            <a:r>
-              <a:t/>
-            </a:r>
-          </a:p>
-          <a:p xmlns:a="http://schemas.openxmlformats.org/drawingml/2006/main">
-            <a:r>
-              <a:t>[Sources]</a:t>
-            </a:r>
-          </a:p>
-          <a:p xmlns:a="http://schemas.openxmlformats.org/drawingml/2006/main">
-            <a:r>
-              <a:t/>
-            </a:r>
-          </a:p>
-          <a:p xmlns:a="http://schemas.openxmlformats.org/drawingml/2006/main">
-            <a:r>
-              <a:t>- 本课 handout.md 与 slides.md</a:t>
-            </a:r>
-          </a:p>
-          <a:p xmlns:a="http://schemas.openxmlformats.org/drawingml/2006/main">
-            <a:r>
-              <a:t/>
-            </a:r>
-          </a:p>
-          <a:p xmlns:a="http://schemas.openxmlformats.org/drawingml/2006/main">
-            <a:r>
-              <a:t>- ../../course/reading-card-case.md</a:t>
-            </a:r>
-          </a:p>
-          <a:p xmlns:a="http://schemas.openxmlformats.org/drawingml/2006/main">
-            <a:r>
-              <a:t/>
+              <a:t>本课 handout.md、judgment-task.md；../../course/judgment-path.md。</a:t>
             </a:r>
           </a:p>
           <a:p xmlns:a="http://schemas.openxmlformats.org/drawingml/2006/main">
@@ -4574,7 +2834,12 @@
           </a:p>
           <a:p xmlns:a="http://schemas.openxmlformats.org/drawingml/2006/main">
             <a:r>
-              <a:t>讲义位置：本课讲义；见逐页母稿映射表</a:t>
+              <a:t>讲述与校准：</a:t>
+            </a:r>
+          </a:p>
+          <a:p xmlns:a="http://schemas.openxmlformats.org/drawingml/2006/main">
+            <a:r>
+              <a:t>以虚构教学样例 G1 展示从空白到问题的转换。改写的关键是补充条件、对象、干预、结果和比较对象。空白候选只是一个空格描述，问题是一个可操作的结构；样例真实性仍待真实窄检索，不作为实证结论。让学生用自己的空白候选尝试同样的改写。</a:t>
             </a:r>
           </a:p>
           <a:p xmlns:a="http://schemas.openxmlformats.org/drawingml/2006/main">
@@ -4584,12 +2849,12 @@
           </a:p>
           <a:p xmlns:a="http://schemas.openxmlformats.org/drawingml/2006/main">
             <a:r>
-              <a:t>屏显核对：</a:t>
-            </a:r>
-          </a:p>
-          <a:p xmlns:a="http://schemas.openxmlformats.org/drawingml/2006/main">
-            <a:r>
-              <a:t>虚构教学样例｜非真实论文、检索或实证证据</a:t>
+              <a:t>学生动作：</a:t>
+            </a:r>
+          </a:p>
+          <a:p xmlns:a="http://schemas.openxmlformats.org/drawingml/2006/main">
+            <a:r>
+              <a:t>让学生用自己的研究空白候选，口头尝试补充条件、对象、干预和结果。</a:t>
             </a:r>
           </a:p>
           <a:p xmlns:a="http://schemas.openxmlformats.org/drawingml/2006/main">
@@ -4599,12 +2864,7 @@
           </a:p>
           <a:p xmlns:a="http://schemas.openxmlformats.org/drawingml/2006/main">
             <a:r>
-              <a:t>第 5 课空白候选 G1（缺角空白）：</a:t>
-            </a:r>
-          </a:p>
-          <a:p xmlns:a="http://schemas.openxmlformats.org/drawingml/2006/main">
-            <a:r>
-              <a:t>&gt; 阅读卡是否强制定位原文→降低遗漏</a:t>
+              <a:t>课堂安排：按本稿下方 90 分钟教学路由安排；此页不另占独立时段。</a:t>
             </a:r>
           </a:p>
           <a:p xmlns:a="http://schemas.openxmlformats.org/drawingml/2006/main">
@@ -4614,12 +2874,12 @@
           </a:p>
           <a:p xmlns:a="http://schemas.openxmlformats.org/drawingml/2006/main">
             <a:r>
-              <a:t>本课改写为结构性问题：</a:t>
-            </a:r>
-          </a:p>
-          <a:p xmlns:a="http://schemas.openxmlformats.org/drawingml/2006/main">
-            <a:r>
-              <a:t>&gt; 在需要逐条核验引用的计算机论文阅读任务中，结构化阅读卡是否降低 AI 摘要的限定条件遗漏率？</a:t>
+              <a:t>[Sources]</a:t>
+            </a:r>
+          </a:p>
+          <a:p xmlns:a="http://schemas.openxmlformats.org/drawingml/2006/main">
+            <a:r>
+              <a:t>讲义 §一·2 从研究空白到问题的转换；贯穿案例承接第 5 课 G1。</a:t>
             </a:r>
           </a:p>
           <a:p xmlns:a="http://schemas.openxmlformats.org/drawingml/2006/main">
@@ -4629,132 +2889,7 @@
           </a:p>
           <a:p xmlns:a="http://schemas.openxmlformats.org/drawingml/2006/main">
             <a:r>
-              <a:t>改写中明确了：</a:t>
-            </a:r>
-          </a:p>
-          <a:p xmlns:a="http://schemas.openxmlformats.org/drawingml/2006/main">
-            <a:r>
-              <a:t>- 条件：需要逐条核验引用的 CS 论文阅读任务</a:t>
-            </a:r>
-          </a:p>
-          <a:p xmlns:a="http://schemas.openxmlformats.org/drawingml/2006/main">
-            <a:r>
-              <a:t>- 对象：AI 生成摘要</a:t>
-            </a:r>
-          </a:p>
-          <a:p xmlns:a="http://schemas.openxmlformats.org/drawingml/2006/main">
-            <a:r>
-              <a:t>- 干预：结构化阅读卡</a:t>
-            </a:r>
-          </a:p>
-          <a:p xmlns:a="http://schemas.openxmlformats.org/drawingml/2006/main">
-            <a:r>
-              <a:t>- 结果：限定条件遗漏率</a:t>
-            </a:r>
-          </a:p>
-          <a:p xmlns:a="http://schemas.openxmlformats.org/drawingml/2006/main">
-            <a:r>
-              <a:t>- 比较对象：与自由摘要对照</a:t>
-            </a:r>
-          </a:p>
-          <a:p xmlns:a="http://schemas.openxmlformats.org/drawingml/2006/main">
-            <a:r>
-              <a:t/>
-            </a:r>
-          </a:p>
-          <a:p xmlns:a="http://schemas.openxmlformats.org/drawingml/2006/main">
-            <a:r>
-              <a:t>&gt; 从空格描述到可操作的结构，需要补全条件、对象、干预、结果和比较。</a:t>
-            </a:r>
-          </a:p>
-          <a:p xmlns:a="http://schemas.openxmlformats.org/drawingml/2006/main">
-            <a:r>
-              <a:t/>
-            </a:r>
-          </a:p>
-          <a:p xmlns:a="http://schemas.openxmlformats.org/drawingml/2006/main">
-            <a:r>
-              <a:t>教师讲述：</a:t>
-            </a:r>
-          </a:p>
-          <a:p xmlns:a="http://schemas.openxmlformats.org/drawingml/2006/main">
-            <a:r>
-              <a:t>以虚构教学样例 G1 展示从空白到问题的转换。改写的关键是补充条件、对象、干预、结果和比较对象。空白候选只是一个空格描述，问题是一个可操作的结构；样例真实性仍待真实窄检索，不作为实证结论。让学生用自己的空白候选尝试同样的改写。</a:t>
-            </a:r>
-          </a:p>
-          <a:p xmlns:a="http://schemas.openxmlformats.org/drawingml/2006/main">
-            <a:r>
-              <a:t/>
-            </a:r>
-          </a:p>
-          <a:p xmlns:a="http://schemas.openxmlformats.org/drawingml/2006/main">
-            <a:r>
-              <a:t>学生动作：</a:t>
-            </a:r>
-          </a:p>
-          <a:p xmlns:a="http://schemas.openxmlformats.org/drawingml/2006/main">
-            <a:r>
-              <a:t>让学生用自己的研究空白候选，口头尝试补充条件、对象、干预和结果。</a:t>
-            </a:r>
-          </a:p>
-          <a:p xmlns:a="http://schemas.openxmlformats.org/drawingml/2006/main">
-            <a:r>
-              <a:t/>
-            </a:r>
-          </a:p>
-          <a:p xmlns:a="http://schemas.openxmlformats.org/drawingml/2006/main">
-            <a:r>
-              <a:t>来源与边界：</a:t>
-            </a:r>
-          </a:p>
-          <a:p xmlns:a="http://schemas.openxmlformats.org/drawingml/2006/main">
-            <a:r>
-              <a:t>讲义 §一·2 从研究空白到问题的转换；贯穿案例承接第 5 课 G1。</a:t>
-            </a:r>
-          </a:p>
-          <a:p xmlns:a="http://schemas.openxmlformats.org/drawingml/2006/main">
-            <a:r>
-              <a:t/>
-            </a:r>
-          </a:p>
-          <a:p xmlns:a="http://schemas.openxmlformats.org/drawingml/2006/main">
-            <a:r>
-              <a:t>---</a:t>
-            </a:r>
-          </a:p>
-          <a:p xmlns:a="http://schemas.openxmlformats.org/drawingml/2006/main">
-            <a:r>
-              <a:t/>
-            </a:r>
-          </a:p>
-          <a:p xmlns:a="http://schemas.openxmlformats.org/drawingml/2006/main">
-            <a:r>
-              <a:t>[Sources]</a:t>
-            </a:r>
-          </a:p>
-          <a:p xmlns:a="http://schemas.openxmlformats.org/drawingml/2006/main">
-            <a:r>
-              <a:t/>
-            </a:r>
-          </a:p>
-          <a:p xmlns:a="http://schemas.openxmlformats.org/drawingml/2006/main">
-            <a:r>
-              <a:t>- 本课 handout.md 与 slides.md</a:t>
-            </a:r>
-          </a:p>
-          <a:p xmlns:a="http://schemas.openxmlformats.org/drawingml/2006/main">
-            <a:r>
-              <a:t/>
-            </a:r>
-          </a:p>
-          <a:p xmlns:a="http://schemas.openxmlformats.org/drawingml/2006/main">
-            <a:r>
-              <a:t>- ../../course/reading-card-case.md</a:t>
-            </a:r>
-          </a:p>
-          <a:p xmlns:a="http://schemas.openxmlformats.org/drawingml/2006/main">
-            <a:r>
-              <a:t/>
+              <a:t>本课 handout.md、judgment-task.md；../../course/judgment-path.md。</a:t>
             </a:r>
           </a:p>
           <a:p xmlns:a="http://schemas.openxmlformats.org/drawingml/2006/main">
@@ -4839,7 +2974,12 @@
           </a:p>
           <a:p xmlns:a="http://schemas.openxmlformats.org/drawingml/2006/main">
             <a:r>
-              <a:t>讲义位置：本课讲义；见逐页母稿映射表</a:t>
+              <a:t>讲述与校准：</a:t>
+            </a:r>
+          </a:p>
+          <a:p xmlns:a="http://schemas.openxmlformats.org/drawingml/2006/main">
+            <a:r>
+              <a:t>第 5 课三步检验已经做过一次重要性检查，这里从空白候选升级为问题后需要再确认一次。重要性看问题在论证链上的位置——如果不回答它，哪些后续判断无法成立？</a:t>
             </a:r>
           </a:p>
           <a:p xmlns:a="http://schemas.openxmlformats.org/drawingml/2006/main">
@@ -4849,12 +2989,12 @@
           </a:p>
           <a:p xmlns:a="http://schemas.openxmlformats.org/drawingml/2006/main">
             <a:r>
-              <a:t>屏显核对：</a:t>
-            </a:r>
-          </a:p>
-          <a:p xmlns:a="http://schemas.openxmlformats.org/drawingml/2006/main">
-            <a:r>
-              <a:t>问题不止要清楚，还要重要。</a:t>
+              <a:t>学生动作：</a:t>
+            </a:r>
+          </a:p>
+          <a:p xmlns:a="http://schemas.openxmlformats.org/drawingml/2006/main">
+            <a:r>
+              <a:t>让学生对自己的问题口头回答"So what?"：如果不回答它，哪条论证链断掉？</a:t>
             </a:r>
           </a:p>
           <a:p xmlns:a="http://schemas.openxmlformats.org/drawingml/2006/main">
@@ -4864,12 +3004,7 @@
           </a:p>
           <a:p xmlns:a="http://schemas.openxmlformats.org/drawingml/2006/main">
             <a:r>
-              <a:t>**So what?（知识后果）**</a:t>
-            </a:r>
-          </a:p>
-          <a:p xmlns:a="http://schemas.openxmlformats.org/drawingml/2006/main">
-            <a:r>
-              <a:t>如果不回答这个问题，当前证据地图的哪条主张无法成立？哪个机制假设无法被检验？</a:t>
+              <a:t>课堂安排：按本稿下方 90 分钟教学路由安排；此页不另占独立时段。</a:t>
             </a:r>
           </a:p>
           <a:p xmlns:a="http://schemas.openxmlformats.org/drawingml/2006/main">
@@ -4879,12 +3014,12 @@
           </a:p>
           <a:p xmlns:a="http://schemas.openxmlformats.org/drawingml/2006/main">
             <a:r>
-              <a:t>**Who cares?（实际后果）**</a:t>
-            </a:r>
-          </a:p>
-          <a:p xmlns:a="http://schemas.openxmlformats.org/drawingml/2006/main">
-            <a:r>
-              <a:t>谁会从答案中受益？是研究者、实践者还是决策者？受益的形式是什么？</a:t>
+              <a:t>[Sources]</a:t>
+            </a:r>
+          </a:p>
+          <a:p xmlns:a="http://schemas.openxmlformats.org/drawingml/2006/main">
+            <a:r>
+              <a:t>讲义 §一·3 "So what?" 和 "Who cares?"；Booth et al. *The Craft of Research*, 5th ed., Chapter 2 "From Questions to a Problem"；Hamming, "You and Your Research"（[reading-list.md](../../course/reading-list.md) 第 6 课）。</a:t>
             </a:r>
           </a:p>
           <a:p xmlns:a="http://schemas.openxmlformats.org/drawingml/2006/main">
@@ -4894,117 +3029,7 @@
           </a:p>
           <a:p xmlns:a="http://schemas.openxmlformats.org/drawingml/2006/main">
             <a:r>
-              <a:t>贯穿案例：</a:t>
-            </a:r>
-          </a:p>
-          <a:p xmlns:a="http://schemas.openxmlformats.org/drawingml/2006/main">
-            <a:r>
-              <a:t>- So what?：缺角空白 G1 位于"阅读卡强制定位→降低遗漏"论证链的关键位置，不回答则机制假设无法直接检验</a:t>
-            </a:r>
-          </a:p>
-          <a:p xmlns:a="http://schemas.openxmlformats.org/drawingml/2006/main">
-            <a:r>
-              <a:t>- Who cares?：需要用 AI 辅助文献综述的研究者可判断是否引入阅读卡结构</a:t>
-            </a:r>
-          </a:p>
-          <a:p xmlns:a="http://schemas.openxmlformats.org/drawingml/2006/main">
-            <a:r>
-              <a:t/>
-            </a:r>
-          </a:p>
-          <a:p xmlns:a="http://schemas.openxmlformats.org/drawingml/2006/main">
-            <a:r>
-              <a:t>&gt; 重要性来自问题在论证链上的位置。</a:t>
-            </a:r>
-          </a:p>
-          <a:p xmlns:a="http://schemas.openxmlformats.org/drawingml/2006/main">
-            <a:r>
-              <a:t/>
-            </a:r>
-          </a:p>
-          <a:p xmlns:a="http://schemas.openxmlformats.org/drawingml/2006/main">
-            <a:r>
-              <a:t>教师讲述：</a:t>
-            </a:r>
-          </a:p>
-          <a:p xmlns:a="http://schemas.openxmlformats.org/drawingml/2006/main">
-            <a:r>
-              <a:t>第 5 课三步检验已经做过一次重要性检查，这里从空白候选升级为问题后需要再确认一次。重要性看问题在论证链上的位置——如果不回答它，哪些后续判断无法成立？</a:t>
-            </a:r>
-          </a:p>
-          <a:p xmlns:a="http://schemas.openxmlformats.org/drawingml/2006/main">
-            <a:r>
-              <a:t/>
-            </a:r>
-          </a:p>
-          <a:p xmlns:a="http://schemas.openxmlformats.org/drawingml/2006/main">
-            <a:r>
-              <a:t>学生动作：</a:t>
-            </a:r>
-          </a:p>
-          <a:p xmlns:a="http://schemas.openxmlformats.org/drawingml/2006/main">
-            <a:r>
-              <a:t>让学生对自己的问题口头回答"So what?"：如果不回答它，哪条论证链断掉？</a:t>
-            </a:r>
-          </a:p>
-          <a:p xmlns:a="http://schemas.openxmlformats.org/drawingml/2006/main">
-            <a:r>
-              <a:t/>
-            </a:r>
-          </a:p>
-          <a:p xmlns:a="http://schemas.openxmlformats.org/drawingml/2006/main">
-            <a:r>
-              <a:t>来源与边界：</a:t>
-            </a:r>
-          </a:p>
-          <a:p xmlns:a="http://schemas.openxmlformats.org/drawingml/2006/main">
-            <a:r>
-              <a:t>讲义 §一·3 "So what?" 和 "Who cares?"；Booth et al. *The Craft of Research*, 5th ed., Chapter 2 "From Questions to a Problem"；Hamming, "You and Your Research"（[reading-list.md](../../course/reading-list.md) 第 6 课）。</a:t>
-            </a:r>
-          </a:p>
-          <a:p xmlns:a="http://schemas.openxmlformats.org/drawingml/2006/main">
-            <a:r>
-              <a:t/>
-            </a:r>
-          </a:p>
-          <a:p xmlns:a="http://schemas.openxmlformats.org/drawingml/2006/main">
-            <a:r>
-              <a:t>---</a:t>
-            </a:r>
-          </a:p>
-          <a:p xmlns:a="http://schemas.openxmlformats.org/drawingml/2006/main">
-            <a:r>
-              <a:t/>
-            </a:r>
-          </a:p>
-          <a:p xmlns:a="http://schemas.openxmlformats.org/drawingml/2006/main">
-            <a:r>
-              <a:t>[Sources]</a:t>
-            </a:r>
-          </a:p>
-          <a:p xmlns:a="http://schemas.openxmlformats.org/drawingml/2006/main">
-            <a:r>
-              <a:t/>
-            </a:r>
-          </a:p>
-          <a:p xmlns:a="http://schemas.openxmlformats.org/drawingml/2006/main">
-            <a:r>
-              <a:t>- 本课 handout.md 与 slides.md</a:t>
-            </a:r>
-          </a:p>
-          <a:p xmlns:a="http://schemas.openxmlformats.org/drawingml/2006/main">
-            <a:r>
-              <a:t/>
-            </a:r>
-          </a:p>
-          <a:p xmlns:a="http://schemas.openxmlformats.org/drawingml/2006/main">
-            <a:r>
-              <a:t>- ../../course/reading-card-case.md</a:t>
-            </a:r>
-          </a:p>
-          <a:p xmlns:a="http://schemas.openxmlformats.org/drawingml/2006/main">
-            <a:r>
-              <a:t/>
+              <a:t>本课 handout.md、judgment-task.md；../../course/judgment-path.md。</a:t>
             </a:r>
           </a:p>
           <a:p xmlns:a="http://schemas.openxmlformats.org/drawingml/2006/main">
@@ -5089,7 +3114,12 @@
           </a:p>
           <a:p xmlns:a="http://schemas.openxmlformats.org/drawingml/2006/main">
             <a:r>
-              <a:t>讲义位置：本课讲义；见逐页母稿映射表</a:t>
+              <a:t>讲述与校准：</a:t>
+            </a:r>
+          </a:p>
+          <a:p xmlns:a="http://schemas.openxmlformats.org/drawingml/2006/main">
+            <a:r>
+              <a:t>这是防止"关键词 → 论文 → 空白"单线选题的收束页：候选题池里的候选先交叉检查来源，纯文献空白来源的候选要回答"没有这个空白还值得回答吗"。然后用四维标准卡比较 ≥3 个候选题，以意义和可行性完成取舍；新颖性只在有依据时记录类别和待核验状态，不作为淘汰硬门。比较示范用贯穿案例的虚构题池（G1 + C2 + C3，见讲义 §七第一步）。</a:t>
             </a:r>
           </a:p>
           <a:p xmlns:a="http://schemas.openxmlformats.org/drawingml/2006/main">
@@ -5099,12 +3129,12 @@
           </a:p>
           <a:p xmlns:a="http://schemas.openxmlformats.org/drawingml/2006/main">
             <a:r>
-              <a:t>屏显核对：</a:t>
-            </a:r>
-          </a:p>
-          <a:p xmlns:a="http://schemas.openxmlformats.org/drawingml/2006/main">
-            <a:r>
-              <a:t>先问来源：你的候选题从哪条生成路径来？（第 5 课六条路径）</a:t>
+              <a:t>学生动作：</a:t>
+            </a:r>
+          </a:p>
+          <a:p xmlns:a="http://schemas.openxmlformats.org/drawingml/2006/main">
+            <a:r>
+              <a:t>让学生对自己的候选题回答来源交叉检查问句；答不出的记下"待重推或明示重要性边界"。</a:t>
             </a:r>
           </a:p>
           <a:p xmlns:a="http://schemas.openxmlformats.org/drawingml/2006/main">
@@ -5114,12 +3144,7 @@
           </a:p>
           <a:p xmlns:a="http://schemas.openxmlformats.org/drawingml/2006/main">
             <a:r>
-              <a:t>若只来自文献空白，必须回答：</a:t>
-            </a:r>
-          </a:p>
-          <a:p xmlns:a="http://schemas.openxmlformats.org/drawingml/2006/main">
-            <a:r>
-              <a:t>&gt; 如果文献里没有这个空白，这个问题还值得回答吗？</a:t>
+              <a:t>课堂安排：按本稿下方 90 分钟教学路由安排；此页不另占独立时段。</a:t>
             </a:r>
           </a:p>
           <a:p xmlns:a="http://schemas.openxmlformats.org/drawingml/2006/main">
@@ -5129,12 +3154,12 @@
           </a:p>
           <a:p xmlns:a="http://schemas.openxmlformats.org/drawingml/2006/main">
             <a:r>
-              <a:t>- 答得出 → 背后有更基本的观察或约束，空白只是入口</a:t>
-            </a:r>
-          </a:p>
-          <a:p xmlns:a="http://schemas.openxmlformats.org/drawingml/2006/main">
-            <a:r>
-              <a:t>- 答不出 → 可能只是填格子：重推问题，或明示重要性只在论证链内</a:t>
+              <a:t>[Sources]</a:t>
+            </a:r>
+          </a:p>
+          <a:p xmlns:a="http://schemas.openxmlformats.org/drawingml/2006/main">
+            <a:r>
+              <a:t>讲义 §一·4；Booth et al. *The Craft of Research*（意义维度）；Hamming, "You and Your Research"（重要问题与品味）；霍强《创新研究到底怎么做？》Passion/Excellence/Impact（兴趣与意义参照，课堂案例）；第 5 课 §四·1 生成路径。</a:t>
             </a:r>
           </a:p>
           <a:p xmlns:a="http://schemas.openxmlformats.org/drawingml/2006/main">
@@ -5144,142 +3169,7 @@
           </a:p>
           <a:p xmlns:a="http://schemas.openxmlformats.org/drawingml/2006/main">
             <a:r>
-              <a:t>四维选题标准卡（候选题池 ≥3 个逐一比较）：</a:t>
-            </a:r>
-          </a:p>
-          <a:p xmlns:a="http://schemas.openxmlformats.org/drawingml/2006/main">
-            <a:r>
-              <a:t/>
-            </a:r>
-          </a:p>
-          <a:p xmlns:a="http://schemas.openxmlformats.org/drawingml/2006/main">
-            <a:r>
-              <a:t>| 维度 | 检查问题 |</a:t>
-            </a:r>
-          </a:p>
-          <a:p xmlns:a="http://schemas.openxmlformats.org/drawingml/2006/main">
-            <a:r>
-              <a:t>| --- | --- |</a:t>
-            </a:r>
-          </a:p>
-          <a:p xmlns:a="http://schemas.openxmlformats.org/drawingml/2006/main">
-            <a:r>
-              <a:t>| 意义 | 不回答它，哪条论证链断掉？谁受益？ |</a:t>
-            </a:r>
-          </a:p>
-          <a:p xmlns:a="http://schemas.openxmlformats.org/drawingml/2006/main">
-            <a:r>
-              <a:t>| 新颖性 | 问题新 / 视角新 / 方法新，新在哪一类？ |</a:t>
-            </a:r>
-          </a:p>
-          <a:p xmlns:a="http://schemas.openxmlformats.org/drawingml/2006/main">
-            <a:r>
-              <a:t>| 可行性 | 课程周期内能否最小验证？ |</a:t>
-            </a:r>
-          </a:p>
-          <a:p xmlns:a="http://schemas.openxmlformats.org/drawingml/2006/main">
-            <a:r>
-              <a:t>| 兴趣 | 课程之外还愿意投入吗？判据是什么？ |</a:t>
-            </a:r>
-          </a:p>
-          <a:p xmlns:a="http://schemas.openxmlformats.org/drawingml/2006/main">
-            <a:r>
-              <a:t/>
-            </a:r>
-          </a:p>
-          <a:p xmlns:a="http://schemas.openxmlformats.org/drawingml/2006/main">
-            <a:r>
-              <a:t>&gt; “新”不等于“没人做过”；意义优先于新颖性。</a:t>
-            </a:r>
-          </a:p>
-          <a:p xmlns:a="http://schemas.openxmlformats.org/drawingml/2006/main">
-            <a:r>
-              <a:t/>
-            </a:r>
-          </a:p>
-          <a:p xmlns:a="http://schemas.openxmlformats.org/drawingml/2006/main">
-            <a:r>
-              <a:t>教师讲述：</a:t>
-            </a:r>
-          </a:p>
-          <a:p xmlns:a="http://schemas.openxmlformats.org/drawingml/2006/main">
-            <a:r>
-              <a:t>这是防止"关键词 → 论文 → 空白"单线选题的收束页：候选题池里的候选先交叉检查来源，纯文献空白来源的候选要回答"没有这个空白还值得回答吗"。然后用四维标准卡比较 ≥3 个候选题，以意义和可行性完成取舍；新颖性只在有依据时记录类别和待核验状态，不作为淘汰硬门。比较示范用贯穿案例的虚构题池（G1 + C2 + C3，见讲义 §七第一步）。</a:t>
-            </a:r>
-          </a:p>
-          <a:p xmlns:a="http://schemas.openxmlformats.org/drawingml/2006/main">
-            <a:r>
-              <a:t/>
-            </a:r>
-          </a:p>
-          <a:p xmlns:a="http://schemas.openxmlformats.org/drawingml/2006/main">
-            <a:r>
-              <a:t>学生动作：</a:t>
-            </a:r>
-          </a:p>
-          <a:p xmlns:a="http://schemas.openxmlformats.org/drawingml/2006/main">
-            <a:r>
-              <a:t>让学生对自己的候选题回答来源交叉检查问句；答不出的记下"待重推或明示重要性边界"。</a:t>
-            </a:r>
-          </a:p>
-          <a:p xmlns:a="http://schemas.openxmlformats.org/drawingml/2006/main">
-            <a:r>
-              <a:t/>
-            </a:r>
-          </a:p>
-          <a:p xmlns:a="http://schemas.openxmlformats.org/drawingml/2006/main">
-            <a:r>
-              <a:t>来源与边界：</a:t>
-            </a:r>
-          </a:p>
-          <a:p xmlns:a="http://schemas.openxmlformats.org/drawingml/2006/main">
-            <a:r>
-              <a:t>讲义 §一·4；Booth et al. *The Craft of Research*（意义维度）；Hamming, "You and Your Research"（重要问题与品味）；霍强《创新研究到底怎么做？》Passion/Excellence/Impact（兴趣与意义参照，课堂案例）；第 5 课 §四·1 生成路径。</a:t>
-            </a:r>
-          </a:p>
-          <a:p xmlns:a="http://schemas.openxmlformats.org/drawingml/2006/main">
-            <a:r>
-              <a:t/>
-            </a:r>
-          </a:p>
-          <a:p xmlns:a="http://schemas.openxmlformats.org/drawingml/2006/main">
-            <a:r>
-              <a:t>---</a:t>
-            </a:r>
-          </a:p>
-          <a:p xmlns:a="http://schemas.openxmlformats.org/drawingml/2006/main">
-            <a:r>
-              <a:t/>
-            </a:r>
-          </a:p>
-          <a:p xmlns:a="http://schemas.openxmlformats.org/drawingml/2006/main">
-            <a:r>
-              <a:t>[Sources]</a:t>
-            </a:r>
-          </a:p>
-          <a:p xmlns:a="http://schemas.openxmlformats.org/drawingml/2006/main">
-            <a:r>
-              <a:t/>
-            </a:r>
-          </a:p>
-          <a:p xmlns:a="http://schemas.openxmlformats.org/drawingml/2006/main">
-            <a:r>
-              <a:t>- 本课 handout.md 与 slides.md</a:t>
-            </a:r>
-          </a:p>
-          <a:p xmlns:a="http://schemas.openxmlformats.org/drawingml/2006/main">
-            <a:r>
-              <a:t/>
-            </a:r>
-          </a:p>
-          <a:p xmlns:a="http://schemas.openxmlformats.org/drawingml/2006/main">
-            <a:r>
-              <a:t>- ../../course/reading-card-case.md</a:t>
-            </a:r>
-          </a:p>
-          <a:p xmlns:a="http://schemas.openxmlformats.org/drawingml/2006/main">
-            <a:r>
-              <a:t/>
+              <a:t>本课 handout.md、judgment-task.md；../../course/judgment-path.md。</a:t>
             </a:r>
           </a:p>
           <a:p xmlns:a="http://schemas.openxmlformats.org/drawingml/2006/main">
@@ -5364,7 +3254,12 @@
           </a:p>
           <a:p xmlns:a="http://schemas.openxmlformats.org/drawingml/2006/main">
             <a:r>
-              <a:t>讲义位置：本课讲义；见逐页母稿映射表</a:t>
+              <a:t>讲述与校准：</a:t>
+            </a:r>
+          </a:p>
+          <a:p xmlns:a="http://schemas.openxmlformats.org/drawingml/2006/main">
+            <a:r>
+              <a:t>非例的价值在于防止项目随检索膨胀。当你在搜索中看到一篇"似乎相关"的论文时，非例帮你判断它到底在不在范围内。第 1 课已经给出基本概念，本课把它系统化为三种类型。非例不只是"不做 X"，还要说明为什么不算。</a:t>
             </a:r>
           </a:p>
           <a:p xmlns:a="http://schemas.openxmlformats.org/drawingml/2006/main">
@@ -5374,12 +3269,12 @@
           </a:p>
           <a:p xmlns:a="http://schemas.openxmlformats.org/drawingml/2006/main">
             <a:r>
-              <a:t>屏显核对：</a:t>
-            </a:r>
-          </a:p>
-          <a:p xmlns:a="http://schemas.openxmlformats.org/drawingml/2006/main">
-            <a:r>
-              <a:t>非例说明"什么不算本问题"。</a:t>
+              <a:t>学生动作：</a:t>
+            </a:r>
+          </a:p>
+          <a:p xmlns:a="http://schemas.openxmlformats.org/drawingml/2006/main">
+            <a:r>
+              <a:t>让学生为自己的问题写一个非例，并说明为什么不算。</a:t>
             </a:r>
           </a:p>
           <a:p xmlns:a="http://schemas.openxmlformats.org/drawingml/2006/main">
@@ -5389,7 +3284,7 @@
           </a:p>
           <a:p xmlns:a="http://schemas.openxmlformats.org/drawingml/2006/main">
             <a:r>
-              <a:t>它和包含范围一起构成正负边界。</a:t>
+              <a:t>课堂安排：按本稿下方 90 分钟教学路由安排；此页不另占独立时段。</a:t>
             </a:r>
           </a:p>
           <a:p xmlns:a="http://schemas.openxmlformats.org/drawingml/2006/main">
@@ -5399,22 +3294,12 @@
           </a:p>
           <a:p xmlns:a="http://schemas.openxmlformats.org/drawingml/2006/main">
             <a:r>
-              <a:t>**非例的三种类型**：</a:t>
-            </a:r>
-          </a:p>
-          <a:p xmlns:a="http://schemas.openxmlformats.org/drawingml/2006/main">
-            <a:r>
-              <a:t>- 不可比的例子（不同任务设置）</a:t>
-            </a:r>
-          </a:p>
-          <a:p xmlns:a="http://schemas.openxmlformats.org/drawingml/2006/main">
-            <a:r>
-              <a:t>- 不同层面的例子（通用写作质量 vs. 限定条件准确性）</a:t>
-            </a:r>
-          </a:p>
-          <a:p xmlns:a="http://schemas.openxmlformats.org/drawingml/2006/main">
-            <a:r>
-              <a:t>- 超出周期的例子（需要专业实验设备）</a:t>
+              <a:t>[Sources]</a:t>
+            </a:r>
+          </a:p>
+          <a:p xmlns:a="http://schemas.openxmlformats.org/drawingml/2006/main">
+            <a:r>
+              <a:t>讲义 §二·1 什么是非例；§二·2 非例的写法。</a:t>
             </a:r>
           </a:p>
           <a:p xmlns:a="http://schemas.openxmlformats.org/drawingml/2006/main">
@@ -5424,122 +3309,7 @@
           </a:p>
           <a:p xmlns:a="http://schemas.openxmlformats.org/drawingml/2006/main">
             <a:r>
-              <a:t>贯穿案例非例：</a:t>
-            </a:r>
-          </a:p>
-          <a:p xmlns:a="http://schemas.openxmlformats.org/drawingml/2006/main">
-            <a:r>
-              <a:t>&gt; - 不比较不同大模型的通用写作质量（不同层面）</a:t>
-            </a:r>
-          </a:p>
-          <a:p xmlns:a="http://schemas.openxmlformats.org/drawingml/2006/main">
-            <a:r>
-              <a:t>&gt; - 不评价综述是否具有语言美感（不同指标）</a:t>
-            </a:r>
-          </a:p>
-          <a:p xmlns:a="http://schemas.openxmlformats.org/drawingml/2006/main">
-            <a:r>
-              <a:t>&gt; - 不处理需要专业实验设备的学科（超出周期与范围）</a:t>
-            </a:r>
-          </a:p>
-          <a:p xmlns:a="http://schemas.openxmlformats.org/drawingml/2006/main">
-            <a:r>
-              <a:t/>
-            </a:r>
-          </a:p>
-          <a:p xmlns:a="http://schemas.openxmlformats.org/drawingml/2006/main">
-            <a:r>
-              <a:t>&gt; 如果无法写出非例，通常说明问题仍然过宽。</a:t>
-            </a:r>
-          </a:p>
-          <a:p xmlns:a="http://schemas.openxmlformats.org/drawingml/2006/main">
-            <a:r>
-              <a:t/>
-            </a:r>
-          </a:p>
-          <a:p xmlns:a="http://schemas.openxmlformats.org/drawingml/2006/main">
-            <a:r>
-              <a:t>教师讲述：</a:t>
-            </a:r>
-          </a:p>
-          <a:p xmlns:a="http://schemas.openxmlformats.org/drawingml/2006/main">
-            <a:r>
-              <a:t>非例的价值在于防止项目随检索膨胀。当你在搜索中看到一篇"似乎相关"的论文时，非例帮你判断它到底在不在范围内。第 1 课已经给出基本概念，本课把它系统化为三种类型。非例不只是"不做 X"，还要说明为什么不算。</a:t>
-            </a:r>
-          </a:p>
-          <a:p xmlns:a="http://schemas.openxmlformats.org/drawingml/2006/main">
-            <a:r>
-              <a:t/>
-            </a:r>
-          </a:p>
-          <a:p xmlns:a="http://schemas.openxmlformats.org/drawingml/2006/main">
-            <a:r>
-              <a:t>学生动作：</a:t>
-            </a:r>
-          </a:p>
-          <a:p xmlns:a="http://schemas.openxmlformats.org/drawingml/2006/main">
-            <a:r>
-              <a:t>让学生为自己的问题写一个非例，并说明为什么不算。</a:t>
-            </a:r>
-          </a:p>
-          <a:p xmlns:a="http://schemas.openxmlformats.org/drawingml/2006/main">
-            <a:r>
-              <a:t/>
-            </a:r>
-          </a:p>
-          <a:p xmlns:a="http://schemas.openxmlformats.org/drawingml/2006/main">
-            <a:r>
-              <a:t>来源与边界：</a:t>
-            </a:r>
-          </a:p>
-          <a:p xmlns:a="http://schemas.openxmlformats.org/drawingml/2006/main">
-            <a:r>
-              <a:t>讲义 §二·1 什么是非例；§二·2 非例的写法。</a:t>
-            </a:r>
-          </a:p>
-          <a:p xmlns:a="http://schemas.openxmlformats.org/drawingml/2006/main">
-            <a:r>
-              <a:t/>
-            </a:r>
-          </a:p>
-          <a:p xmlns:a="http://schemas.openxmlformats.org/drawingml/2006/main">
-            <a:r>
-              <a:t>---</a:t>
-            </a:r>
-          </a:p>
-          <a:p xmlns:a="http://schemas.openxmlformats.org/drawingml/2006/main">
-            <a:r>
-              <a:t/>
-            </a:r>
-          </a:p>
-          <a:p xmlns:a="http://schemas.openxmlformats.org/drawingml/2006/main">
-            <a:r>
-              <a:t>[Sources]</a:t>
-            </a:r>
-          </a:p>
-          <a:p xmlns:a="http://schemas.openxmlformats.org/drawingml/2006/main">
-            <a:r>
-              <a:t/>
-            </a:r>
-          </a:p>
-          <a:p xmlns:a="http://schemas.openxmlformats.org/drawingml/2006/main">
-            <a:r>
-              <a:t>- 本课 handout.md 与 slides.md</a:t>
-            </a:r>
-          </a:p>
-          <a:p xmlns:a="http://schemas.openxmlformats.org/drawingml/2006/main">
-            <a:r>
-              <a:t/>
-            </a:r>
-          </a:p>
-          <a:p xmlns:a="http://schemas.openxmlformats.org/drawingml/2006/main">
-            <a:r>
-              <a:t>- ../../course/reading-card-case.md</a:t>
-            </a:r>
-          </a:p>
-          <a:p xmlns:a="http://schemas.openxmlformats.org/drawingml/2006/main">
-            <a:r>
-              <a:t/>
+              <a:t>本课 handout.md、judgment-task.md；../../course/judgment-path.md。</a:t>
             </a:r>
           </a:p>
           <a:p xmlns:a="http://schemas.openxmlformats.org/drawingml/2006/main">
@@ -5624,7 +3394,12 @@
           </a:p>
           <a:p xmlns:a="http://schemas.openxmlformats.org/drawingml/2006/main">
             <a:r>
-              <a:t>讲义位置：本课讲义；见逐页母稿映射表</a:t>
+              <a:t>讲述与校准：</a:t>
+            </a:r>
+          </a:p>
+          <a:p xmlns:a="http://schemas.openxmlformats.org/drawingml/2006/main">
+            <a:r>
+              <a:t>胡晓峰在《浅谈科研课题中的"科学问题"》中指出一种常见错误：把背景、意义或"怎么做"误写成科学问题。非例的作用之一就是把这些"看起来是问题但实际不是"的表述挡在问题定义之外。非例过宽等于没有约束，过窄等于排除数据集而非界定边界。</a:t>
             </a:r>
           </a:p>
           <a:p xmlns:a="http://schemas.openxmlformats.org/drawingml/2006/main">
@@ -5634,37 +3409,12 @@
           </a:p>
           <a:p xmlns:a="http://schemas.openxmlformats.org/drawingml/2006/main">
             <a:r>
-              <a:t>屏显核对：</a:t>
-            </a:r>
-          </a:p>
-          <a:p xmlns:a="http://schemas.openxmlformats.org/drawingml/2006/main">
-            <a:r>
-              <a:t>| 错误类型 | 表现 | 后果 |</a:t>
-            </a:r>
-          </a:p>
-          <a:p xmlns:a="http://schemas.openxmlformats.org/drawingml/2006/main">
-            <a:r>
-              <a:t>| --- | --- | --- |</a:t>
-            </a:r>
-          </a:p>
-          <a:p xmlns:a="http://schemas.openxmlformats.org/drawingml/2006/main">
-            <a:r>
-              <a:t>| 非例过宽 | "不做与本课题无关的研究" | 没有实质约束 |</a:t>
-            </a:r>
-          </a:p>
-          <a:p xmlns:a="http://schemas.openxmlformats.org/drawingml/2006/main">
-            <a:r>
-              <a:t>| 非例过窄 | "不使用数据集 X" | 等同排除某个数据集 |</a:t>
-            </a:r>
-          </a:p>
-          <a:p xmlns:a="http://schemas.openxmlformats.org/drawingml/2006/main">
-            <a:r>
-              <a:t>| 非例与可证伪命题矛盾 | 非例排除了检验条件 | 命题无法成立 |</a:t>
-            </a:r>
-          </a:p>
-          <a:p xmlns:a="http://schemas.openxmlformats.org/drawingml/2006/main">
-            <a:r>
-              <a:t>| 非例只是否定清单 | "不评价文风、不比较模型" | 否定了但没说清为什么 |</a:t>
+              <a:t>学生动作：</a:t>
+            </a:r>
+          </a:p>
+          <a:p xmlns:a="http://schemas.openxmlformats.org/drawingml/2006/main">
+            <a:r>
+              <a:t>让学生检查自己的非例属于哪种类型，或是否避免了这四种错误。</a:t>
             </a:r>
           </a:p>
           <a:p xmlns:a="http://schemas.openxmlformats.org/drawingml/2006/main">
@@ -5674,7 +3424,7 @@
           </a:p>
           <a:p xmlns:a="http://schemas.openxmlformats.org/drawingml/2006/main">
             <a:r>
-              <a:t>&gt; 胡晓峰：把背景、意义或"怎么做"误写成科学问题——非例的作用之一就是挡住这些。</a:t>
+              <a:t>课堂安排：按本稿下方 90 分钟教学路由安排；此页不另占独立时段。</a:t>
             </a:r>
           </a:p>
           <a:p xmlns:a="http://schemas.openxmlformats.org/drawingml/2006/main">
@@ -5684,12 +3434,12 @@
           </a:p>
           <a:p xmlns:a="http://schemas.openxmlformats.org/drawingml/2006/main">
             <a:r>
-              <a:t>教师讲述：</a:t>
-            </a:r>
-          </a:p>
-          <a:p xmlns:a="http://schemas.openxmlformats.org/drawingml/2006/main">
-            <a:r>
-              <a:t>胡晓峰在《浅谈科研课题中的"科学问题"》中指出一种常见错误：把背景、意义或"怎么做"误写成科学问题。非例的作用之一就是把这些"看起来是问题但实际不是"的表述挡在问题定义之外。非例过宽等于没有约束，过窄等于排除数据集而非界定边界。</a:t>
+              <a:t>[Sources]</a:t>
+            </a:r>
+          </a:p>
+          <a:p xmlns:a="http://schemas.openxmlformats.org/drawingml/2006/main">
+            <a:r>
+              <a:t>讲义 §二·3 非例的常见错误；胡晓峰《浅谈科研课题中的"科学问题"》（[reading-list.md](../../course/reading-list.md) 第 6 课课堂案例）。</a:t>
             </a:r>
           </a:p>
           <a:p xmlns:a="http://schemas.openxmlformats.org/drawingml/2006/main">
@@ -5699,72 +3449,7 @@
           </a:p>
           <a:p xmlns:a="http://schemas.openxmlformats.org/drawingml/2006/main">
             <a:r>
-              <a:t>学生动作：</a:t>
-            </a:r>
-          </a:p>
-          <a:p xmlns:a="http://schemas.openxmlformats.org/drawingml/2006/main">
-            <a:r>
-              <a:t>让学生检查自己的非例属于哪种类型，或是否避免了这四种错误。</a:t>
-            </a:r>
-          </a:p>
-          <a:p xmlns:a="http://schemas.openxmlformats.org/drawingml/2006/main">
-            <a:r>
-              <a:t/>
-            </a:r>
-          </a:p>
-          <a:p xmlns:a="http://schemas.openxmlformats.org/drawingml/2006/main">
-            <a:r>
-              <a:t>来源与边界：</a:t>
-            </a:r>
-          </a:p>
-          <a:p xmlns:a="http://schemas.openxmlformats.org/drawingml/2006/main">
-            <a:r>
-              <a:t>讲义 §二·3 非例的常见错误；胡晓峰《浅谈科研课题中的"科学问题"》（[reading-list.md](../../course/reading-list.md) 第 6 课课堂案例）。</a:t>
-            </a:r>
-          </a:p>
-          <a:p xmlns:a="http://schemas.openxmlformats.org/drawingml/2006/main">
-            <a:r>
-              <a:t/>
-            </a:r>
-          </a:p>
-          <a:p xmlns:a="http://schemas.openxmlformats.org/drawingml/2006/main">
-            <a:r>
-              <a:t>---</a:t>
-            </a:r>
-          </a:p>
-          <a:p xmlns:a="http://schemas.openxmlformats.org/drawingml/2006/main">
-            <a:r>
-              <a:t/>
-            </a:r>
-          </a:p>
-          <a:p xmlns:a="http://schemas.openxmlformats.org/drawingml/2006/main">
-            <a:r>
-              <a:t>[Sources]</a:t>
-            </a:r>
-          </a:p>
-          <a:p xmlns:a="http://schemas.openxmlformats.org/drawingml/2006/main">
-            <a:r>
-              <a:t/>
-            </a:r>
-          </a:p>
-          <a:p xmlns:a="http://schemas.openxmlformats.org/drawingml/2006/main">
-            <a:r>
-              <a:t>- 本课 handout.md 与 slides.md</a:t>
-            </a:r>
-          </a:p>
-          <a:p xmlns:a="http://schemas.openxmlformats.org/drawingml/2006/main">
-            <a:r>
-              <a:t/>
-            </a:r>
-          </a:p>
-          <a:p xmlns:a="http://schemas.openxmlformats.org/drawingml/2006/main">
-            <a:r>
-              <a:t>- ../../course/reading-card-case.md</a:t>
-            </a:r>
-          </a:p>
-          <a:p xmlns:a="http://schemas.openxmlformats.org/drawingml/2006/main">
-            <a:r>
-              <a:t/>
+              <a:t>本课 handout.md、judgment-task.md；../../course/judgment-path.md。</a:t>
             </a:r>
           </a:p>
           <a:p xmlns:a="http://schemas.openxmlformats.org/drawingml/2006/main">
@@ -12184,96 +9869,22 @@
       </p:grpSpPr>
       <p:sp>
         <p:nvSpPr>
-          <p:cNvPr id="4" name="Text Placeholder 3">
-            <a:extLst xmlns:a="http://schemas.openxmlformats.org/drawingml/2006/main">
-              <a:ext uri="{FF2B5EF4-FFF2-40B4-BE49-F238E27FC236}">
-                <a16:creationId xmlns:a16="http://schemas.microsoft.com/office/drawing/2014/main" id="{4D941B40-7A0A-534E-3563-CA11753C8E3F}"/>
-              </a:ext>
-            </a:extLst>
-          </p:cNvPr>
-          <p:cNvSpPr>
-            <a:spLocks xmlns:a="http://schemas.openxmlformats.org/drawingml/2006/main" noGrp="1"/>
-          </p:cNvSpPr>
-          <p:nvPr>
-            <p:ph type="body" idx="14"/>
-          </p:nvPr>
-        </p:nvSpPr>
-        <p:spPr>
-          <a:xfrm xmlns:a="http://schemas.openxmlformats.org/drawingml/2006/main">
-            <a:off x="1028700" y="28575"/>
-            <a:ext cx="10668000" cy="628650"/>
-          </a:xfrm>
-        </p:spPr>
-        <p:txBody>
-          <a:bodyPr xmlns:a="http://schemas.openxmlformats.org/drawingml/2006/main" lIns="0" tIns="0" rIns="0" bIns="0" anchor="ctr">
-            <a:noAutofit/>
-          </a:bodyPr>
-          <a:lstStyle xmlns:a="http://schemas.openxmlformats.org/drawingml/2006/main"/>
-          <a:p xmlns:a="http://schemas.openxmlformats.org/drawingml/2006/main">
-            <a:pPr algn="l">
-              <a:buNone/>
-            </a:pPr>
-            <a:r>
-              <a:rPr sz="3000" b="1">
-                <a:solidFill>
-                  <a:srgbClr val="FFFFFF"/>
-                </a:solidFill>
-                <a:latin typeface="微软雅黑"/>
-                <a:ea typeface="微软雅黑"/>
-                <a:cs typeface="微软雅黑"/>
-              </a:rPr>
-              <a:t>个人实践：选题、边界与一个待验证前提</a:t>
-            </a:r>
-            <a:endParaRPr/>
-          </a:p>
-        </p:txBody>
-      </p:sp>
-      <p:sp>
-        <p:nvSpPr>
-          <p:cNvPr id="5" name="Slide Number Placeholder 4">
-            <a:extLst xmlns:a="http://schemas.openxmlformats.org/drawingml/2006/main">
-              <a:ext uri="{FF2B5EF4-FFF2-40B4-BE49-F238E27FC236}">
-                <a16:creationId xmlns:a16="http://schemas.microsoft.com/office/drawing/2014/main" id="{EBA5909F-738E-F60C-BE8C-B3F1D94548E5}"/>
-              </a:ext>
-            </a:extLst>
-          </p:cNvPr>
-          <p:cNvSpPr>
-            <a:spLocks xmlns:a="http://schemas.openxmlformats.org/drawingml/2006/main" noGrp="1"/>
-          </p:cNvSpPr>
-          <p:nvPr>
-            <p:ph type="sldNum" idx="10"/>
-          </p:nvPr>
-        </p:nvSpPr>
-        <p:spPr/>
-        <p:txBody>
-          <a:bodyPr xmlns:a="http://schemas.openxmlformats.org/drawingml/2006/main"/>
-          <a:lstStyle xmlns:a="http://schemas.openxmlformats.org/drawingml/2006/main"/>
-          <a:p xmlns:a="http://schemas.openxmlformats.org/drawingml/2006/main">
-            <a:fld id="{90F7333B-44AC-F7E9-D49D-FE92F45E0477}" type="slidenum">
-              <a:t>17</a:t>
-            </a:fld>
-            <a:endParaRPr/>
-          </a:p>
-        </p:txBody>
-      </p:sp>
-      <p:sp>
-        <p:nvSpPr>
-          <p:cNvPr id="6" name="visual-17-0-minimum">
-            <a:extLst xmlns:a="http://schemas.openxmlformats.org/drawingml/2006/main">
-              <a:ext uri="{FF2B5EF4-FFF2-40B4-BE49-F238E27FC236}">
-                <a16:creationId xmlns:a16="http://schemas.microsoft.com/office/drawing/2014/main" id="{E7DECA77-9BB2-4B37-B7E9-79021C560894}"/>
-              </a:ext>
-            </a:extLst>
-          </p:cNvPr>
-          <p:cNvSpPr>
-            <a:spLocks xmlns:a="http://schemas.openxmlformats.org/drawingml/2006/main" noGrp="1"/>
-          </p:cNvSpPr>
-          <p:nvPr/>
-        </p:nvSpPr>
-        <p:spPr>
-          <a:xfrm xmlns:a="http://schemas.openxmlformats.org/drawingml/2006/main">
-            <a:off x="647700" y="876300"/>
-            <a:ext cx="2095500" cy="400050"/>
+          <p:cNvPr id="7" name="judgment-title">
+            <a:extLst xmlns:a="http://schemas.openxmlformats.org/drawingml/2006/main">
+              <a:ext uri="{FF2B5EF4-FFF2-40B4-BE49-F238E27FC236}">
+                <a16:creationId xmlns:a16="http://schemas.microsoft.com/office/drawing/2014/main" id="{94EC9493-B5C3-4E40-8862-949DF3A4F84F}"/>
+              </a:ext>
+            </a:extLst>
+          </p:cNvPr>
+          <p:cNvSpPr>
+            <a:spLocks xmlns:a="http://schemas.openxmlformats.org/drawingml/2006/main" noGrp="1"/>
+          </p:cNvSpPr>
+          <p:nvPr/>
+        </p:nvSpPr>
+        <p:spPr>
+          <a:xfrm xmlns:a="http://schemas.openxmlformats.org/drawingml/2006/main">
+            <a:off x="1028700" y="76200"/>
+            <a:ext cx="10687050" cy="514350"/>
           </a:xfrm>
           <a:prstGeom xmlns:a="http://schemas.openxmlformats.org/drawingml/2006/main" prst="rect">
             <a:avLst/>
@@ -12284,57 +9895,62 @@
           </a:ln>
         </p:spPr>
         <p:txBody>
-          <a:bodyPr xmlns:a="http://schemas.openxmlformats.org/drawingml/2006/main" lIns="0" tIns="0" rIns="0" bIns="0" anchor="ctr">
-            <a:noAutofit/>
-          </a:bodyPr>
-          <a:lstStyle xmlns:a="http://schemas.openxmlformats.org/drawingml/2006/main"/>
+          <a:bodyPr xmlns:a="http://schemas.openxmlformats.org/drawingml/2006/main" lIns="0" tIns="0" rIns="0" bIns="0" anchor="t"/>
+          <a:lstStyle xmlns:a="http://schemas.openxmlformats.org/drawingml/2006/main">
+            <a:defPPr algn="l">
+              <a:defRPr sz="3000" b="1">
+                <a:solidFill>
+                  <a:srgbClr val="FFFFFF"/>
+                </a:solidFill>
+                <a:latin typeface="微软雅黑"/>
+                <a:ea typeface="微软雅黑"/>
+                <a:cs typeface="微软雅黑"/>
+              </a:defRPr>
+            </a:defPPr>
+          </a:lstStyle>
           <a:p xmlns:a="http://schemas.openxmlformats.org/drawingml/2006/main">
             <a:pPr algn="l">
-              <a:lnSpc>
-                <a:spcPct val="114000"/>
-              </a:lnSpc>
-              <a:buNone/>
-              <a:defRPr sz="2200" b="1">
-                <a:solidFill>
-                  <a:srgbClr val="1F4D78"/>
-                </a:solidFill>
-                <a:latin typeface="微软雅黑"/>
-                <a:ea typeface="微软雅黑"/>
-                <a:cs typeface="微软雅黑"/>
-              </a:defRPr>
-            </a:pPr>
-            <a:r>
-              <a:rPr sz="2200" b="1">
-                <a:solidFill>
-                  <a:srgbClr val="1F4D78"/>
-                </a:solidFill>
-                <a:latin typeface="微软雅黑"/>
-                <a:ea typeface="微软雅黑"/>
-                <a:cs typeface="微软雅黑"/>
-              </a:rPr>
-              <a:t>课堂最低闭环</a:t>
-            </a:r>
-          </a:p>
-        </p:txBody>
-      </p:sp>
-      <p:sp>
-        <p:nvSpPr>
-          <p:cNvPr id="7" name="visual-17-1-task-0">
-            <a:extLst xmlns:a="http://schemas.openxmlformats.org/drawingml/2006/main">
-              <a:ext uri="{FF2B5EF4-FFF2-40B4-BE49-F238E27FC236}">
-                <a16:creationId xmlns:a16="http://schemas.microsoft.com/office/drawing/2014/main" id="{FC359E81-9BA8-40EF-A8AF-E149E5156D30}"/>
-              </a:ext>
-            </a:extLst>
-          </p:cNvPr>
-          <p:cNvSpPr>
-            <a:spLocks xmlns:a="http://schemas.openxmlformats.org/drawingml/2006/main" noGrp="1"/>
-          </p:cNvSpPr>
-          <p:nvPr/>
-        </p:nvSpPr>
-        <p:spPr>
-          <a:xfrm xmlns:a="http://schemas.openxmlformats.org/drawingml/2006/main">
-            <a:off x="571500" y="1571625"/>
-            <a:ext cx="457200" cy="457200"/>
+              <a:defRPr sz="3000" b="1">
+                <a:solidFill>
+                  <a:srgbClr val="FFFFFF"/>
+                </a:solidFill>
+                <a:latin typeface="微软雅黑"/>
+                <a:ea typeface="微软雅黑"/>
+                <a:cs typeface="微软雅黑"/>
+              </a:defRPr>
+            </a:pPr>
+            <a:r>
+              <a:rPr sz="3000" b="1">
+                <a:solidFill>
+                  <a:srgbClr val="FFFFFF"/>
+                </a:solidFill>
+                <a:latin typeface="微软雅黑"/>
+                <a:ea typeface="微软雅黑"/>
+                <a:cs typeface="微软雅黑"/>
+              </a:rPr>
+              <a:t>本人项目：决定、核验与回写</a:t>
+            </a:r>
+          </a:p>
+        </p:txBody>
+      </p:sp>
+      <p:sp>
+        <p:nvSpPr>
+          <p:cNvPr id="2" name="judgment-body-0">
+            <a:extLst xmlns:a="http://schemas.openxmlformats.org/drawingml/2006/main">
+              <a:ext uri="{FF2B5EF4-FFF2-40B4-BE49-F238E27FC236}">
+                <a16:creationId xmlns:a16="http://schemas.microsoft.com/office/drawing/2014/main" id="{DD105586-F3B6-4642-906E-A2BDE82DB6A3}"/>
+              </a:ext>
+            </a:extLst>
+          </p:cNvPr>
+          <p:cNvSpPr>
+            <a:spLocks xmlns:a="http://schemas.openxmlformats.org/drawingml/2006/main" noGrp="1"/>
+          </p:cNvSpPr>
+          <p:nvPr/>
+        </p:nvSpPr>
+        <p:spPr>
+          <a:xfrm xmlns:a="http://schemas.openxmlformats.org/drawingml/2006/main">
+            <a:off x="666750" y="1066800"/>
+            <a:ext cx="10858500" cy="1476375"/>
           </a:xfrm>
           <a:prstGeom xmlns:a="http://schemas.openxmlformats.org/drawingml/2006/main" prst="rect">
             <a:avLst/>
@@ -12345,57 +9961,62 @@
           </a:ln>
         </p:spPr>
         <p:txBody>
-          <a:bodyPr xmlns:a="http://schemas.openxmlformats.org/drawingml/2006/main" lIns="0" tIns="0" rIns="0" bIns="0" anchor="ctr">
-            <a:noAutofit/>
-          </a:bodyPr>
-          <a:lstStyle xmlns:a="http://schemas.openxmlformats.org/drawingml/2006/main"/>
-          <a:p xmlns:a="http://schemas.openxmlformats.org/drawingml/2006/main">
-            <a:pPr algn="ctr">
-              <a:lnSpc>
-                <a:spcPct val="114000"/>
-              </a:lnSpc>
-              <a:buNone/>
-              <a:defRPr sz="1800" b="1">
-                <a:solidFill>
-                  <a:srgbClr val="C8161E"/>
-                </a:solidFill>
-                <a:latin typeface="微软雅黑"/>
-                <a:ea typeface="微软雅黑"/>
-                <a:cs typeface="微软雅黑"/>
-              </a:defRPr>
-            </a:pPr>
-            <a:r>
-              <a:rPr sz="1800" b="1">
-                <a:solidFill>
-                  <a:srgbClr val="C8161E"/>
-                </a:solidFill>
-                <a:latin typeface="微软雅黑"/>
-                <a:ea typeface="微软雅黑"/>
-                <a:cs typeface="微软雅黑"/>
-              </a:rPr>
-              <a:t>1</a:t>
-            </a:r>
-          </a:p>
-        </p:txBody>
-      </p:sp>
-      <p:sp>
-        <p:nvSpPr>
-          <p:cNvPr id="8" name="visual-17-2-task-text-0">
-            <a:extLst xmlns:a="http://schemas.openxmlformats.org/drawingml/2006/main">
-              <a:ext uri="{FF2B5EF4-FFF2-40B4-BE49-F238E27FC236}">
-                <a16:creationId xmlns:a16="http://schemas.microsoft.com/office/drawing/2014/main" id="{EC48C337-A5F1-408D-9E47-9C256BB58F50}"/>
-              </a:ext>
-            </a:extLst>
-          </p:cNvPr>
-          <p:cNvSpPr>
-            <a:spLocks xmlns:a="http://schemas.openxmlformats.org/drawingml/2006/main" noGrp="1"/>
-          </p:cNvSpPr>
-          <p:nvPr/>
-        </p:nvSpPr>
-        <p:spPr>
-          <a:xfrm xmlns:a="http://schemas.openxmlformats.org/drawingml/2006/main">
-            <a:off x="1162050" y="1476375"/>
-            <a:ext cx="4953000" cy="647700"/>
+          <a:bodyPr xmlns:a="http://schemas.openxmlformats.org/drawingml/2006/main" lIns="0" tIns="0" rIns="0" bIns="0" anchor="t"/>
+          <a:lstStyle xmlns:a="http://schemas.openxmlformats.org/drawingml/2006/main">
+            <a:defPPr algn="l">
+              <a:defRPr sz="2400" b="0">
+                <a:solidFill>
+                  <a:srgbClr val="263746"/>
+                </a:solidFill>
+                <a:latin typeface="微软雅黑"/>
+                <a:ea typeface="微软雅黑"/>
+                <a:cs typeface="微软雅黑"/>
+              </a:defRPr>
+            </a:defPPr>
+          </a:lstStyle>
+          <a:p xmlns:a="http://schemas.openxmlformats.org/drawingml/2006/main">
+            <a:pPr algn="l">
+              <a:defRPr sz="2400" b="0">
+                <a:solidFill>
+                  <a:srgbClr val="263746"/>
+                </a:solidFill>
+                <a:latin typeface="微软雅黑"/>
+                <a:ea typeface="微软雅黑"/>
+                <a:cs typeface="微软雅黑"/>
+              </a:defRPr>
+            </a:pPr>
+            <a:r>
+              <a:rPr sz="2400" b="0">
+                <a:solidFill>
+                  <a:srgbClr val="263746"/>
+                </a:solidFill>
+                <a:latin typeface="微软雅黑"/>
+                <a:ea typeface="微软雅黑"/>
+                <a:cs typeface="微软雅黑"/>
+              </a:rPr>
+              <a:t>完成第三张关键来源精读卡；用四维选择理由确定微型问题，给出非例、可证伪命题及一个必要前提，课堂逐项检查问题门。</a:t>
+            </a:r>
+          </a:p>
+        </p:txBody>
+      </p:sp>
+      <p:sp>
+        <p:nvSpPr>
+          <p:cNvPr id="3" name="judgment-body-1">
+            <a:extLst xmlns:a="http://schemas.openxmlformats.org/drawingml/2006/main">
+              <a:ext uri="{FF2B5EF4-FFF2-40B4-BE49-F238E27FC236}">
+                <a16:creationId xmlns:a16="http://schemas.microsoft.com/office/drawing/2014/main" id="{34C81237-6A47-495F-8651-FF8F9743F26E}"/>
+              </a:ext>
+            </a:extLst>
+          </p:cNvPr>
+          <p:cNvSpPr>
+            <a:spLocks xmlns:a="http://schemas.openxmlformats.org/drawingml/2006/main" noGrp="1"/>
+          </p:cNvSpPr>
+          <p:nvPr/>
+        </p:nvSpPr>
+        <p:spPr>
+          <a:xfrm xmlns:a="http://schemas.openxmlformats.org/drawingml/2006/main">
+            <a:off x="666750" y="2724150"/>
+            <a:ext cx="10858500" cy="1524000"/>
           </a:xfrm>
           <a:prstGeom xmlns:a="http://schemas.openxmlformats.org/drawingml/2006/main" prst="rect">
             <a:avLst/>
@@ -12406,19 +10027,24 @@
           </a:ln>
         </p:spPr>
         <p:txBody>
-          <a:bodyPr xmlns:a="http://schemas.openxmlformats.org/drawingml/2006/main" lIns="0" tIns="0" rIns="0" bIns="0" anchor="t">
-            <a:noAutofit/>
-          </a:bodyPr>
-          <a:lstStyle xmlns:a="http://schemas.openxmlformats.org/drawingml/2006/main"/>
+          <a:bodyPr xmlns:a="http://schemas.openxmlformats.org/drawingml/2006/main" lIns="0" tIns="0" rIns="0" bIns="0" anchor="t"/>
+          <a:lstStyle xmlns:a="http://schemas.openxmlformats.org/drawingml/2006/main">
+            <a:defPPr algn="l">
+              <a:defRPr sz="2400" b="0">
+                <a:solidFill>
+                  <a:srgbClr val="263746"/>
+                </a:solidFill>
+                <a:latin typeface="微软雅黑"/>
+                <a:ea typeface="微软雅黑"/>
+                <a:cs typeface="微软雅黑"/>
+              </a:defRPr>
+            </a:defPPr>
+          </a:lstStyle>
           <a:p xmlns:a="http://schemas.openxmlformats.org/drawingml/2006/main">
             <a:pPr algn="l">
-              <a:lnSpc>
-                <a:spcPct val="114000"/>
-              </a:lnSpc>
-              <a:buNone/>
               <a:defRPr sz="2400" b="0">
                 <a:solidFill>
-                  <a:srgbClr val="27333D"/>
+                  <a:srgbClr val="263746"/>
                 </a:solidFill>
                 <a:latin typeface="微软雅黑"/>
                 <a:ea typeface="微软雅黑"/>
@@ -12428,35 +10054,35 @@
             <a:r>
               <a:rPr sz="2400" b="0">
                 <a:solidFill>
-                  <a:srgbClr val="27333D"/>
-                </a:solidFill>
-                <a:latin typeface="微软雅黑"/>
-                <a:ea typeface="微软雅黑"/>
-                <a:cs typeface="微软雅黑"/>
-              </a:rPr>
-              <a:t>候选题池比较：≥3 个候选，记录来源与选定理由</a:t>
-            </a:r>
-          </a:p>
-        </p:txBody>
-      </p:sp>
-      <p:sp>
-        <p:nvSpPr>
-          <p:cNvPr id="9" name="visual-17-3-task-1">
-            <a:extLst xmlns:a="http://schemas.openxmlformats.org/drawingml/2006/main">
-              <a:ext uri="{FF2B5EF4-FFF2-40B4-BE49-F238E27FC236}">
-                <a16:creationId xmlns:a16="http://schemas.microsoft.com/office/drawing/2014/main" id="{27B0C544-CDD0-4FD2-9634-7A67D4B30EAE}"/>
-              </a:ext>
-            </a:extLst>
-          </p:cNvPr>
-          <p:cNvSpPr>
-            <a:spLocks xmlns:a="http://schemas.openxmlformats.org/drawingml/2006/main" noGrp="1"/>
-          </p:cNvSpPr>
-          <p:nvPr/>
-        </p:nvSpPr>
-        <p:spPr>
-          <a:xfrm xmlns:a="http://schemas.openxmlformats.org/drawingml/2006/main">
-            <a:off x="6429375" y="1571625"/>
-            <a:ext cx="457200" cy="457200"/>
+                  <a:srgbClr val="263746"/>
+                </a:solidFill>
+                <a:latin typeface="微软雅黑"/>
+                <a:ea typeface="微软雅黑"/>
+                <a:cs typeface="微软雅黑"/>
+              </a:rPr>
+              <a:t>检查至少 10 条候选或等价外部材料及 3 张完整卡是否累计就绪；数量沿用门条件，角色据实，不强凑四类。缺项先收窄范围。</a:t>
+            </a:r>
+          </a:p>
+        </p:txBody>
+      </p:sp>
+      <p:sp>
+        <p:nvSpPr>
+          <p:cNvPr id="4" name="judgment-body-2">
+            <a:extLst xmlns:a="http://schemas.openxmlformats.org/drawingml/2006/main">
+              <a:ext uri="{FF2B5EF4-FFF2-40B4-BE49-F238E27FC236}">
+                <a16:creationId xmlns:a16="http://schemas.microsoft.com/office/drawing/2014/main" id="{879CB8EC-E0D8-4AD0-918F-879221D60386}"/>
+              </a:ext>
+            </a:extLst>
+          </p:cNvPr>
+          <p:cNvSpPr>
+            <a:spLocks xmlns:a="http://schemas.openxmlformats.org/drawingml/2006/main" noGrp="1"/>
+          </p:cNvSpPr>
+          <p:nvPr/>
+        </p:nvSpPr>
+        <p:spPr>
+          <a:xfrm xmlns:a="http://schemas.openxmlformats.org/drawingml/2006/main">
+            <a:off x="666750" y="4457700"/>
+            <a:ext cx="10858500" cy="1466850"/>
           </a:xfrm>
           <a:prstGeom xmlns:a="http://schemas.openxmlformats.org/drawingml/2006/main" prst="rect">
             <a:avLst/>
@@ -12467,57 +10093,62 @@
           </a:ln>
         </p:spPr>
         <p:txBody>
-          <a:bodyPr xmlns:a="http://schemas.openxmlformats.org/drawingml/2006/main" lIns="0" tIns="0" rIns="0" bIns="0" anchor="ctr">
-            <a:noAutofit/>
-          </a:bodyPr>
-          <a:lstStyle xmlns:a="http://schemas.openxmlformats.org/drawingml/2006/main"/>
-          <a:p xmlns:a="http://schemas.openxmlformats.org/drawingml/2006/main">
-            <a:pPr algn="ctr">
-              <a:lnSpc>
-                <a:spcPct val="114000"/>
-              </a:lnSpc>
-              <a:buNone/>
-              <a:defRPr sz="1800" b="1">
-                <a:solidFill>
-                  <a:srgbClr val="C8161E"/>
-                </a:solidFill>
-                <a:latin typeface="微软雅黑"/>
-                <a:ea typeface="微软雅黑"/>
-                <a:cs typeface="微软雅黑"/>
-              </a:defRPr>
-            </a:pPr>
-            <a:r>
-              <a:rPr sz="1800" b="1">
-                <a:solidFill>
-                  <a:srgbClr val="C8161E"/>
-                </a:solidFill>
-                <a:latin typeface="微软雅黑"/>
-                <a:ea typeface="微软雅黑"/>
-                <a:cs typeface="微软雅黑"/>
-              </a:rPr>
-              <a:t>2</a:t>
-            </a:r>
-          </a:p>
-        </p:txBody>
-      </p:sp>
-      <p:sp>
-        <p:nvSpPr>
-          <p:cNvPr id="10" name="visual-17-4-task-text-1">
-            <a:extLst xmlns:a="http://schemas.openxmlformats.org/drawingml/2006/main">
-              <a:ext uri="{FF2B5EF4-FFF2-40B4-BE49-F238E27FC236}">
-                <a16:creationId xmlns:a16="http://schemas.microsoft.com/office/drawing/2014/main" id="{237A022E-F1DA-41EC-8B38-E57BD18690DE}"/>
-              </a:ext>
-            </a:extLst>
-          </p:cNvPr>
-          <p:cNvSpPr>
-            <a:spLocks xmlns:a="http://schemas.openxmlformats.org/drawingml/2006/main" noGrp="1"/>
-          </p:cNvSpPr>
-          <p:nvPr/>
-        </p:nvSpPr>
-        <p:spPr>
-          <a:xfrm xmlns:a="http://schemas.openxmlformats.org/drawingml/2006/main">
-            <a:off x="7019925" y="1476375"/>
-            <a:ext cx="4953000" cy="647700"/>
+          <a:bodyPr xmlns:a="http://schemas.openxmlformats.org/drawingml/2006/main" lIns="0" tIns="0" rIns="0" bIns="0" anchor="t"/>
+          <a:lstStyle xmlns:a="http://schemas.openxmlformats.org/drawingml/2006/main">
+            <a:defPPr algn="l">
+              <a:defRPr sz="2200" b="0">
+                <a:solidFill>
+                  <a:srgbClr val="1F4D78"/>
+                </a:solidFill>
+                <a:latin typeface="微软雅黑"/>
+                <a:ea typeface="微软雅黑"/>
+                <a:cs typeface="微软雅黑"/>
+              </a:defRPr>
+            </a:defPPr>
+          </a:lstStyle>
+          <a:p xmlns:a="http://schemas.openxmlformats.org/drawingml/2006/main">
+            <a:pPr algn="l">
+              <a:defRPr sz="2200" b="0">
+                <a:solidFill>
+                  <a:srgbClr val="1F4D78"/>
+                </a:solidFill>
+                <a:latin typeface="微软雅黑"/>
+                <a:ea typeface="微软雅黑"/>
+                <a:cs typeface="微软雅黑"/>
+              </a:defRPr>
+            </a:pPr>
+            <a:r>
+              <a:rPr sz="2200" b="0">
+                <a:solidFill>
+                  <a:srgbClr val="1F4D78"/>
+                </a:solidFill>
+                <a:latin typeface="微软雅黑"/>
+                <a:ea typeface="微软雅黑"/>
+                <a:cs typeface="微软雅黑"/>
+              </a:rPr>
+              <a:t>保存：问题门当前项目版本：选题决定、3 张卡、候选池、地图及前提</a:t>
+            </a:r>
+          </a:p>
+        </p:txBody>
+      </p:sp>
+      <p:sp>
+        <p:nvSpPr>
+          <p:cNvPr id="5" name="judgment-source">
+            <a:extLst xmlns:a="http://schemas.openxmlformats.org/drawingml/2006/main">
+              <a:ext uri="{FF2B5EF4-FFF2-40B4-BE49-F238E27FC236}">
+                <a16:creationId xmlns:a16="http://schemas.microsoft.com/office/drawing/2014/main" id="{9935B5A6-7081-4D6F-A8A0-1EA2DA124907}"/>
+              </a:ext>
+            </a:extLst>
+          </p:cNvPr>
+          <p:cNvSpPr>
+            <a:spLocks xmlns:a="http://schemas.openxmlformats.org/drawingml/2006/main" noGrp="1"/>
+          </p:cNvSpPr>
+          <p:nvPr/>
+        </p:nvSpPr>
+        <p:spPr>
+          <a:xfrm xmlns:a="http://schemas.openxmlformats.org/drawingml/2006/main">
+            <a:off x="666750" y="6276975"/>
+            <a:ext cx="10572750" cy="209550"/>
           </a:xfrm>
           <a:prstGeom xmlns:a="http://schemas.openxmlformats.org/drawingml/2006/main" prst="rect">
             <a:avLst/>
@@ -12528,57 +10159,62 @@
           </a:ln>
         </p:spPr>
         <p:txBody>
-          <a:bodyPr xmlns:a="http://schemas.openxmlformats.org/drawingml/2006/main" lIns="0" tIns="0" rIns="0" bIns="0" anchor="t">
-            <a:noAutofit/>
-          </a:bodyPr>
-          <a:lstStyle xmlns:a="http://schemas.openxmlformats.org/drawingml/2006/main"/>
+          <a:bodyPr xmlns:a="http://schemas.openxmlformats.org/drawingml/2006/main" lIns="0" tIns="0" rIns="0" bIns="0" anchor="t"/>
+          <a:lstStyle xmlns:a="http://schemas.openxmlformats.org/drawingml/2006/main">
+            <a:defPPr algn="l">
+              <a:defRPr sz="1100" b="0">
+                <a:solidFill>
+                  <a:srgbClr val="667684"/>
+                </a:solidFill>
+                <a:latin typeface="微软雅黑"/>
+                <a:ea typeface="微软雅黑"/>
+                <a:cs typeface="微软雅黑"/>
+              </a:defRPr>
+            </a:defPPr>
+          </a:lstStyle>
           <a:p xmlns:a="http://schemas.openxmlformats.org/drawingml/2006/main">
             <a:pPr algn="l">
-              <a:lnSpc>
-                <a:spcPct val="114000"/>
-              </a:lnSpc>
-              <a:buNone/>
-              <a:defRPr sz="2400" b="0">
-                <a:solidFill>
-                  <a:srgbClr val="27333D"/>
-                </a:solidFill>
-                <a:latin typeface="微软雅黑"/>
-                <a:ea typeface="微软雅黑"/>
-                <a:cs typeface="微软雅黑"/>
-              </a:defRPr>
-            </a:pPr>
-            <a:r>
-              <a:rPr sz="2400" b="0">
-                <a:solidFill>
-                  <a:srgbClr val="27333D"/>
-                </a:solidFill>
-                <a:latin typeface="微软雅黑"/>
-                <a:ea typeface="微软雅黑"/>
-                <a:cs typeface="微软雅黑"/>
-              </a:rPr>
-              <a:t>把选定候选改写为结构性问题</a:t>
-            </a:r>
-          </a:p>
-        </p:txBody>
-      </p:sp>
-      <p:sp>
-        <p:nvSpPr>
-          <p:cNvPr id="11" name="visual-17-5-task-2">
-            <a:extLst xmlns:a="http://schemas.openxmlformats.org/drawingml/2006/main">
-              <a:ext uri="{FF2B5EF4-FFF2-40B4-BE49-F238E27FC236}">
-                <a16:creationId xmlns:a16="http://schemas.microsoft.com/office/drawing/2014/main" id="{DA40B499-4E60-43A1-A7D3-F54FA4D515F4}"/>
-              </a:ext>
-            </a:extLst>
-          </p:cNvPr>
-          <p:cNvSpPr>
-            <a:spLocks xmlns:a="http://schemas.openxmlformats.org/drawingml/2006/main" noGrp="1"/>
-          </p:cNvSpPr>
-          <p:nvPr/>
-        </p:nvSpPr>
-        <p:spPr>
-          <a:xfrm xmlns:a="http://schemas.openxmlformats.org/drawingml/2006/main">
-            <a:off x="571500" y="2543175"/>
-            <a:ext cx="457200" cy="457200"/>
+              <a:defRPr sz="1100" b="0">
+                <a:solidFill>
+                  <a:srgbClr val="667684"/>
+                </a:solidFill>
+                <a:latin typeface="微软雅黑"/>
+                <a:ea typeface="微软雅黑"/>
+                <a:cs typeface="微软雅黑"/>
+              </a:defRPr>
+            </a:pPr>
+            <a:r>
+              <a:rPr sz="1100" b="0">
+                <a:solidFill>
+                  <a:srgbClr val="667684"/>
+                </a:solidFill>
+                <a:latin typeface="微软雅黑"/>
+                <a:ea typeface="微软雅黑"/>
+                <a:cs typeface="微软雅黑"/>
+              </a:rPr>
+              <a:t>来源：本课判断任务与讲义；构造材料及真实来源按材料包标识</a:t>
+            </a:r>
+          </a:p>
+        </p:txBody>
+      </p:sp>
+      <p:sp>
+        <p:nvSpPr>
+          <p:cNvPr id="6" name="judgment-page">
+            <a:extLst xmlns:a="http://schemas.openxmlformats.org/drawingml/2006/main">
+              <a:ext uri="{FF2B5EF4-FFF2-40B4-BE49-F238E27FC236}">
+                <a16:creationId xmlns:a16="http://schemas.microsoft.com/office/drawing/2014/main" id="{8BEF8303-3962-46FD-8C7F-191A49B6FCD9}"/>
+              </a:ext>
+            </a:extLst>
+          </p:cNvPr>
+          <p:cNvSpPr>
+            <a:spLocks xmlns:a="http://schemas.openxmlformats.org/drawingml/2006/main" noGrp="1"/>
+          </p:cNvSpPr>
+          <p:nvPr/>
+        </p:nvSpPr>
+        <p:spPr>
+          <a:xfrm xmlns:a="http://schemas.openxmlformats.org/drawingml/2006/main">
+            <a:off x="11715750" y="6562725"/>
+            <a:ext cx="238125" cy="171450"/>
           </a:xfrm>
           <a:prstGeom xmlns:a="http://schemas.openxmlformats.org/drawingml/2006/main" prst="rect">
             <a:avLst/>
@@ -12589,584 +10225,40 @@
           </a:ln>
         </p:spPr>
         <p:txBody>
-          <a:bodyPr xmlns:a="http://schemas.openxmlformats.org/drawingml/2006/main" lIns="0" tIns="0" rIns="0" bIns="0" anchor="ctr">
-            <a:noAutofit/>
-          </a:bodyPr>
-          <a:lstStyle xmlns:a="http://schemas.openxmlformats.org/drawingml/2006/main"/>
-          <a:p xmlns:a="http://schemas.openxmlformats.org/drawingml/2006/main">
-            <a:pPr algn="ctr">
-              <a:lnSpc>
-                <a:spcPct val="114000"/>
-              </a:lnSpc>
-              <a:buNone/>
-              <a:defRPr sz="1800" b="1">
-                <a:solidFill>
-                  <a:srgbClr val="C8161E"/>
-                </a:solidFill>
-                <a:latin typeface="微软雅黑"/>
-                <a:ea typeface="微软雅黑"/>
-                <a:cs typeface="微软雅黑"/>
-              </a:defRPr>
-            </a:pPr>
-            <a:r>
-              <a:rPr sz="1800" b="1">
-                <a:solidFill>
-                  <a:srgbClr val="C8161E"/>
-                </a:solidFill>
-                <a:latin typeface="微软雅黑"/>
-                <a:ea typeface="微软雅黑"/>
-                <a:cs typeface="微软雅黑"/>
-              </a:rPr>
-              <a:t>3</a:t>
-            </a:r>
-          </a:p>
-        </p:txBody>
-      </p:sp>
-      <p:sp>
-        <p:nvSpPr>
-          <p:cNvPr id="12" name="visual-17-6-task-text-2">
-            <a:extLst xmlns:a="http://schemas.openxmlformats.org/drawingml/2006/main">
-              <a:ext uri="{FF2B5EF4-FFF2-40B4-BE49-F238E27FC236}">
-                <a16:creationId xmlns:a16="http://schemas.microsoft.com/office/drawing/2014/main" id="{9D6F3014-CE41-40A3-BBB6-33D8C5B3CB8D}"/>
-              </a:ext>
-            </a:extLst>
-          </p:cNvPr>
-          <p:cNvSpPr>
-            <a:spLocks xmlns:a="http://schemas.openxmlformats.org/drawingml/2006/main" noGrp="1"/>
-          </p:cNvSpPr>
-          <p:nvPr/>
-        </p:nvSpPr>
-        <p:spPr>
-          <a:xfrm xmlns:a="http://schemas.openxmlformats.org/drawingml/2006/main">
-            <a:off x="1162050" y="2447925"/>
-            <a:ext cx="4953000" cy="647700"/>
-          </a:xfrm>
-          <a:prstGeom xmlns:a="http://schemas.openxmlformats.org/drawingml/2006/main" prst="rect">
-            <a:avLst/>
-          </a:prstGeom>
-          <a:noFill xmlns:a="http://schemas.openxmlformats.org/drawingml/2006/main"/>
-          <a:ln xmlns:a="http://schemas.openxmlformats.org/drawingml/2006/main" w="0">
-            <a:noFill/>
-          </a:ln>
-        </p:spPr>
-        <p:txBody>
-          <a:bodyPr xmlns:a="http://schemas.openxmlformats.org/drawingml/2006/main" lIns="0" tIns="0" rIns="0" bIns="0" anchor="t">
-            <a:noAutofit/>
-          </a:bodyPr>
-          <a:lstStyle xmlns:a="http://schemas.openxmlformats.org/drawingml/2006/main"/>
+          <a:bodyPr xmlns:a="http://schemas.openxmlformats.org/drawingml/2006/main" lIns="0" tIns="0" rIns="0" bIns="0" anchor="t"/>
+          <a:lstStyle xmlns:a="http://schemas.openxmlformats.org/drawingml/2006/main">
+            <a:defPPr algn="l">
+              <a:defRPr sz="900" b="0">
+                <a:solidFill>
+                  <a:srgbClr val="A5A5A5"/>
+                </a:solidFill>
+                <a:latin typeface="微软雅黑"/>
+                <a:ea typeface="微软雅黑"/>
+                <a:cs typeface="微软雅黑"/>
+              </a:defRPr>
+            </a:defPPr>
+          </a:lstStyle>
           <a:p xmlns:a="http://schemas.openxmlformats.org/drawingml/2006/main">
             <a:pPr algn="l">
-              <a:lnSpc>
-                <a:spcPct val="114000"/>
-              </a:lnSpc>
-              <a:buNone/>
-              <a:defRPr sz="2400" b="0">
-                <a:solidFill>
-                  <a:srgbClr val="27333D"/>
-                </a:solidFill>
-                <a:latin typeface="微软雅黑"/>
-                <a:ea typeface="微软雅黑"/>
-                <a:cs typeface="微软雅黑"/>
-              </a:defRPr>
-            </a:pPr>
-            <a:r>
-              <a:rPr sz="2400" b="0">
-                <a:solidFill>
-                  <a:srgbClr val="27333D"/>
-                </a:solidFill>
-                <a:latin typeface="微软雅黑"/>
-                <a:ea typeface="微软雅黑"/>
-                <a:cs typeface="微软雅黑"/>
-              </a:rPr>
-              <a:t>写一个非例，并说明为什么不算</a:t>
-            </a:r>
-          </a:p>
-        </p:txBody>
-      </p:sp>
-      <p:sp>
-        <p:nvSpPr>
-          <p:cNvPr id="13" name="visual-17-7-task-3">
-            <a:extLst xmlns:a="http://schemas.openxmlformats.org/drawingml/2006/main">
-              <a:ext uri="{FF2B5EF4-FFF2-40B4-BE49-F238E27FC236}">
-                <a16:creationId xmlns:a16="http://schemas.microsoft.com/office/drawing/2014/main" id="{141EEE30-4612-4B80-8139-EDFFE985DE2E}"/>
-              </a:ext>
-            </a:extLst>
-          </p:cNvPr>
-          <p:cNvSpPr>
-            <a:spLocks xmlns:a="http://schemas.openxmlformats.org/drawingml/2006/main" noGrp="1"/>
-          </p:cNvSpPr>
-          <p:nvPr/>
-        </p:nvSpPr>
-        <p:spPr>
-          <a:xfrm xmlns:a="http://schemas.openxmlformats.org/drawingml/2006/main">
-            <a:off x="6429375" y="2543175"/>
-            <a:ext cx="457200" cy="457200"/>
-          </a:xfrm>
-          <a:prstGeom xmlns:a="http://schemas.openxmlformats.org/drawingml/2006/main" prst="rect">
-            <a:avLst/>
-          </a:prstGeom>
-          <a:noFill xmlns:a="http://schemas.openxmlformats.org/drawingml/2006/main"/>
-          <a:ln xmlns:a="http://schemas.openxmlformats.org/drawingml/2006/main" w="0">
-            <a:noFill/>
-          </a:ln>
-        </p:spPr>
-        <p:txBody>
-          <a:bodyPr xmlns:a="http://schemas.openxmlformats.org/drawingml/2006/main" lIns="0" tIns="0" rIns="0" bIns="0" anchor="ctr">
-            <a:noAutofit/>
-          </a:bodyPr>
-          <a:lstStyle xmlns:a="http://schemas.openxmlformats.org/drawingml/2006/main"/>
-          <a:p xmlns:a="http://schemas.openxmlformats.org/drawingml/2006/main">
-            <a:pPr algn="ctr">
-              <a:lnSpc>
-                <a:spcPct val="114000"/>
-              </a:lnSpc>
-              <a:buNone/>
-              <a:defRPr sz="1800" b="1">
-                <a:solidFill>
-                  <a:srgbClr val="C8161E"/>
-                </a:solidFill>
-                <a:latin typeface="微软雅黑"/>
-                <a:ea typeface="微软雅黑"/>
-                <a:cs typeface="微软雅黑"/>
-              </a:defRPr>
-            </a:pPr>
-            <a:r>
-              <a:rPr sz="1800" b="1">
-                <a:solidFill>
-                  <a:srgbClr val="C8161E"/>
-                </a:solidFill>
-                <a:latin typeface="微软雅黑"/>
-                <a:ea typeface="微软雅黑"/>
-                <a:cs typeface="微软雅黑"/>
-              </a:rPr>
-              <a:t>4</a:t>
-            </a:r>
-          </a:p>
-        </p:txBody>
-      </p:sp>
-      <p:sp>
-        <p:nvSpPr>
-          <p:cNvPr id="14" name="visual-17-8-task-text-3">
-            <a:extLst xmlns:a="http://schemas.openxmlformats.org/drawingml/2006/main">
-              <a:ext uri="{FF2B5EF4-FFF2-40B4-BE49-F238E27FC236}">
-                <a16:creationId xmlns:a16="http://schemas.microsoft.com/office/drawing/2014/main" id="{3116BF01-EEF4-4BD0-B5B5-005FE5321018}"/>
-              </a:ext>
-            </a:extLst>
-          </p:cNvPr>
-          <p:cNvSpPr>
-            <a:spLocks xmlns:a="http://schemas.openxmlformats.org/drawingml/2006/main" noGrp="1"/>
-          </p:cNvSpPr>
-          <p:nvPr/>
-        </p:nvSpPr>
-        <p:spPr>
-          <a:xfrm xmlns:a="http://schemas.openxmlformats.org/drawingml/2006/main">
-            <a:off x="7019925" y="2447925"/>
-            <a:ext cx="4953000" cy="647700"/>
-          </a:xfrm>
-          <a:prstGeom xmlns:a="http://schemas.openxmlformats.org/drawingml/2006/main" prst="rect">
-            <a:avLst/>
-          </a:prstGeom>
-          <a:noFill xmlns:a="http://schemas.openxmlformats.org/drawingml/2006/main"/>
-          <a:ln xmlns:a="http://schemas.openxmlformats.org/drawingml/2006/main" w="0">
-            <a:noFill/>
-          </a:ln>
-        </p:spPr>
-        <p:txBody>
-          <a:bodyPr xmlns:a="http://schemas.openxmlformats.org/drawingml/2006/main" lIns="0" tIns="0" rIns="0" bIns="0" anchor="t">
-            <a:noAutofit/>
-          </a:bodyPr>
-          <a:lstStyle xmlns:a="http://schemas.openxmlformats.org/drawingml/2006/main"/>
-          <a:p xmlns:a="http://schemas.openxmlformats.org/drawingml/2006/main">
-            <a:pPr algn="l">
-              <a:lnSpc>
-                <a:spcPct val="114000"/>
-              </a:lnSpc>
-              <a:buNone/>
-              <a:defRPr sz="2400" b="0">
-                <a:solidFill>
-                  <a:srgbClr val="27333D"/>
-                </a:solidFill>
-                <a:latin typeface="微软雅黑"/>
-                <a:ea typeface="微软雅黑"/>
-                <a:cs typeface="微软雅黑"/>
-              </a:defRPr>
-            </a:pPr>
-            <a:r>
-              <a:rPr sz="2400" b="0">
-                <a:solidFill>
-                  <a:srgbClr val="27333D"/>
-                </a:solidFill>
-                <a:latin typeface="微软雅黑"/>
-                <a:ea typeface="微软雅黑"/>
-                <a:cs typeface="微软雅黑"/>
-              </a:rPr>
-              <a:t>写一个含推翻条件的可证伪命题</a:t>
-            </a:r>
-          </a:p>
-        </p:txBody>
-      </p:sp>
-      <p:sp>
-        <p:nvSpPr>
-          <p:cNvPr id="15" name="visual-17-9-task-4">
-            <a:extLst xmlns:a="http://schemas.openxmlformats.org/drawingml/2006/main">
-              <a:ext uri="{FF2B5EF4-FFF2-40B4-BE49-F238E27FC236}">
-                <a16:creationId xmlns:a16="http://schemas.microsoft.com/office/drawing/2014/main" id="{1C43F183-084A-4D36-A8E7-252688ED9597}"/>
-              </a:ext>
-            </a:extLst>
-          </p:cNvPr>
-          <p:cNvSpPr>
-            <a:spLocks xmlns:a="http://schemas.openxmlformats.org/drawingml/2006/main" noGrp="1"/>
-          </p:cNvSpPr>
-          <p:nvPr/>
-        </p:nvSpPr>
-        <p:spPr>
-          <a:xfrm xmlns:a="http://schemas.openxmlformats.org/drawingml/2006/main">
-            <a:off x="571500" y="3514725"/>
-            <a:ext cx="457200" cy="457200"/>
-          </a:xfrm>
-          <a:prstGeom xmlns:a="http://schemas.openxmlformats.org/drawingml/2006/main" prst="rect">
-            <a:avLst/>
-          </a:prstGeom>
-          <a:noFill xmlns:a="http://schemas.openxmlformats.org/drawingml/2006/main"/>
-          <a:ln xmlns:a="http://schemas.openxmlformats.org/drawingml/2006/main" w="0">
-            <a:noFill/>
-          </a:ln>
-        </p:spPr>
-        <p:txBody>
-          <a:bodyPr xmlns:a="http://schemas.openxmlformats.org/drawingml/2006/main" lIns="0" tIns="0" rIns="0" bIns="0" anchor="ctr">
-            <a:noAutofit/>
-          </a:bodyPr>
-          <a:lstStyle xmlns:a="http://schemas.openxmlformats.org/drawingml/2006/main"/>
-          <a:p xmlns:a="http://schemas.openxmlformats.org/drawingml/2006/main">
-            <a:pPr algn="ctr">
-              <a:lnSpc>
-                <a:spcPct val="114000"/>
-              </a:lnSpc>
-              <a:buNone/>
-              <a:defRPr sz="1800" b="1">
-                <a:solidFill>
-                  <a:srgbClr val="C8161E"/>
-                </a:solidFill>
-                <a:latin typeface="微软雅黑"/>
-                <a:ea typeface="微软雅黑"/>
-                <a:cs typeface="微软雅黑"/>
-              </a:defRPr>
-            </a:pPr>
-            <a:r>
-              <a:rPr sz="1800" b="1">
-                <a:solidFill>
-                  <a:srgbClr val="C8161E"/>
-                </a:solidFill>
-                <a:latin typeface="微软雅黑"/>
-                <a:ea typeface="微软雅黑"/>
-                <a:cs typeface="微软雅黑"/>
-              </a:rPr>
-              <a:t>5</a:t>
-            </a:r>
-          </a:p>
-        </p:txBody>
-      </p:sp>
-      <p:sp>
-        <p:nvSpPr>
-          <p:cNvPr id="16" name="visual-17-10-task-text-4">
-            <a:extLst xmlns:a="http://schemas.openxmlformats.org/drawingml/2006/main">
-              <a:ext uri="{FF2B5EF4-FFF2-40B4-BE49-F238E27FC236}">
-                <a16:creationId xmlns:a16="http://schemas.microsoft.com/office/drawing/2014/main" id="{450BB303-D2F3-489F-A590-275B614600F3}"/>
-              </a:ext>
-            </a:extLst>
-          </p:cNvPr>
-          <p:cNvSpPr>
-            <a:spLocks xmlns:a="http://schemas.openxmlformats.org/drawingml/2006/main" noGrp="1"/>
-          </p:cNvSpPr>
-          <p:nvPr/>
-        </p:nvSpPr>
-        <p:spPr>
-          <a:xfrm xmlns:a="http://schemas.openxmlformats.org/drawingml/2006/main">
-            <a:off x="1162050" y="3419475"/>
-            <a:ext cx="4953000" cy="647700"/>
-          </a:xfrm>
-          <a:prstGeom xmlns:a="http://schemas.openxmlformats.org/drawingml/2006/main" prst="rect">
-            <a:avLst/>
-          </a:prstGeom>
-          <a:noFill xmlns:a="http://schemas.openxmlformats.org/drawingml/2006/main"/>
-          <a:ln xmlns:a="http://schemas.openxmlformats.org/drawingml/2006/main" w="0">
-            <a:noFill/>
-          </a:ln>
-        </p:spPr>
-        <p:txBody>
-          <a:bodyPr xmlns:a="http://schemas.openxmlformats.org/drawingml/2006/main" lIns="0" tIns="0" rIns="0" bIns="0" anchor="t">
-            <a:noAutofit/>
-          </a:bodyPr>
-          <a:lstStyle xmlns:a="http://schemas.openxmlformats.org/drawingml/2006/main"/>
-          <a:p xmlns:a="http://schemas.openxmlformats.org/drawingml/2006/main">
-            <a:pPr algn="l">
-              <a:lnSpc>
-                <a:spcPct val="114000"/>
-              </a:lnSpc>
-              <a:buNone/>
-              <a:defRPr sz="2400" b="0">
-                <a:solidFill>
-                  <a:srgbClr val="27333D"/>
-                </a:solidFill>
-                <a:latin typeface="微软雅黑"/>
-                <a:ea typeface="微软雅黑"/>
-                <a:cs typeface="微软雅黑"/>
-              </a:defRPr>
-            </a:pPr>
-            <a:r>
-              <a:rPr sz="2400" b="0">
-                <a:solidFill>
-                  <a:srgbClr val="27333D"/>
-                </a:solidFill>
-                <a:latin typeface="微软雅黑"/>
-                <a:ea typeface="微软雅黑"/>
-                <a:cs typeface="微软雅黑"/>
-              </a:rPr>
-              <a:t>收敛一个待验证前提，并写替代解释标记</a:t>
-            </a:r>
-          </a:p>
-        </p:txBody>
-      </p:sp>
-      <p:sp>
-        <p:nvSpPr>
-          <p:cNvPr id="17" name="visual-17-11-task-5">
-            <a:extLst xmlns:a="http://schemas.openxmlformats.org/drawingml/2006/main">
-              <a:ext uri="{FF2B5EF4-FFF2-40B4-BE49-F238E27FC236}">
-                <a16:creationId xmlns:a16="http://schemas.microsoft.com/office/drawing/2014/main" id="{149B7812-9599-4739-BA61-D9369270DBE3}"/>
-              </a:ext>
-            </a:extLst>
-          </p:cNvPr>
-          <p:cNvSpPr>
-            <a:spLocks xmlns:a="http://schemas.openxmlformats.org/drawingml/2006/main" noGrp="1"/>
-          </p:cNvSpPr>
-          <p:nvPr/>
-        </p:nvSpPr>
-        <p:spPr>
-          <a:xfrm xmlns:a="http://schemas.openxmlformats.org/drawingml/2006/main">
-            <a:off x="6429375" y="3514725"/>
-            <a:ext cx="457200" cy="457200"/>
-          </a:xfrm>
-          <a:prstGeom xmlns:a="http://schemas.openxmlformats.org/drawingml/2006/main" prst="rect">
-            <a:avLst/>
-          </a:prstGeom>
-          <a:noFill xmlns:a="http://schemas.openxmlformats.org/drawingml/2006/main"/>
-          <a:ln xmlns:a="http://schemas.openxmlformats.org/drawingml/2006/main" w="0">
-            <a:noFill/>
-          </a:ln>
-        </p:spPr>
-        <p:txBody>
-          <a:bodyPr xmlns:a="http://schemas.openxmlformats.org/drawingml/2006/main" lIns="0" tIns="0" rIns="0" bIns="0" anchor="ctr">
-            <a:noAutofit/>
-          </a:bodyPr>
-          <a:lstStyle xmlns:a="http://schemas.openxmlformats.org/drawingml/2006/main"/>
-          <a:p xmlns:a="http://schemas.openxmlformats.org/drawingml/2006/main">
-            <a:pPr algn="ctr">
-              <a:lnSpc>
-                <a:spcPct val="114000"/>
-              </a:lnSpc>
-              <a:buNone/>
-              <a:defRPr sz="1800" b="1">
-                <a:solidFill>
-                  <a:srgbClr val="C8161E"/>
-                </a:solidFill>
-                <a:latin typeface="微软雅黑"/>
-                <a:ea typeface="微软雅黑"/>
-                <a:cs typeface="微软雅黑"/>
-              </a:defRPr>
-            </a:pPr>
-            <a:r>
-              <a:rPr sz="1800" b="1">
-                <a:solidFill>
-                  <a:srgbClr val="C8161E"/>
-                </a:solidFill>
-                <a:latin typeface="微软雅黑"/>
-                <a:ea typeface="微软雅黑"/>
-                <a:cs typeface="微软雅黑"/>
-              </a:rPr>
-              <a:t>6</a:t>
-            </a:r>
-          </a:p>
-        </p:txBody>
-      </p:sp>
-      <p:sp>
-        <p:nvSpPr>
-          <p:cNvPr id="18" name="visual-17-12-task-text-5">
-            <a:extLst xmlns:a="http://schemas.openxmlformats.org/drawingml/2006/main">
-              <a:ext uri="{FF2B5EF4-FFF2-40B4-BE49-F238E27FC236}">
-                <a16:creationId xmlns:a16="http://schemas.microsoft.com/office/drawing/2014/main" id="{E88C361B-023E-45A6-9CAA-66BC0DEC0E1E}"/>
-              </a:ext>
-            </a:extLst>
-          </p:cNvPr>
-          <p:cNvSpPr>
-            <a:spLocks xmlns:a="http://schemas.openxmlformats.org/drawingml/2006/main" noGrp="1"/>
-          </p:cNvSpPr>
-          <p:nvPr/>
-        </p:nvSpPr>
-        <p:spPr>
-          <a:xfrm xmlns:a="http://schemas.openxmlformats.org/drawingml/2006/main">
-            <a:off x="7019925" y="3419475"/>
-            <a:ext cx="4953000" cy="647700"/>
-          </a:xfrm>
-          <a:prstGeom xmlns:a="http://schemas.openxmlformats.org/drawingml/2006/main" prst="rect">
-            <a:avLst/>
-          </a:prstGeom>
-          <a:noFill xmlns:a="http://schemas.openxmlformats.org/drawingml/2006/main"/>
-          <a:ln xmlns:a="http://schemas.openxmlformats.org/drawingml/2006/main" w="0">
-            <a:noFill/>
-          </a:ln>
-        </p:spPr>
-        <p:txBody>
-          <a:bodyPr xmlns:a="http://schemas.openxmlformats.org/drawingml/2006/main" lIns="0" tIns="0" rIns="0" bIns="0" anchor="t">
-            <a:noAutofit/>
-          </a:bodyPr>
-          <a:lstStyle xmlns:a="http://schemas.openxmlformats.org/drawingml/2006/main"/>
-          <a:p xmlns:a="http://schemas.openxmlformats.org/drawingml/2006/main">
-            <a:pPr algn="l">
-              <a:lnSpc>
-                <a:spcPct val="114000"/>
-              </a:lnSpc>
-              <a:buNone/>
-              <a:defRPr sz="2400" b="0">
-                <a:solidFill>
-                  <a:srgbClr val="27333D"/>
-                </a:solidFill>
-                <a:latin typeface="微软雅黑"/>
-                <a:ea typeface="微软雅黑"/>
-                <a:cs typeface="微软雅黑"/>
-              </a:defRPr>
-            </a:pPr>
-            <a:r>
-              <a:rPr sz="2400" b="0">
-                <a:solidFill>
-                  <a:srgbClr val="27333D"/>
-                </a:solidFill>
-                <a:latin typeface="微软雅黑"/>
-                <a:ea typeface="微软雅黑"/>
-                <a:cs typeface="微软雅黑"/>
-              </a:rPr>
-              <a:t>九项门条件标注：已满足／待补全／未满足</a:t>
-            </a:r>
-          </a:p>
-        </p:txBody>
-      </p:sp>
-      <p:sp>
-        <p:nvSpPr>
-          <p:cNvPr id="19" name="visual-17-13-order">
-            <a:extLst xmlns:a="http://schemas.openxmlformats.org/drawingml/2006/main">
-              <a:ext uri="{FF2B5EF4-FFF2-40B4-BE49-F238E27FC236}">
-                <a16:creationId xmlns:a16="http://schemas.microsoft.com/office/drawing/2014/main" id="{7A83AB2F-D4BB-4C8A-A5C9-6067930A6C18}"/>
-              </a:ext>
-            </a:extLst>
-          </p:cNvPr>
-          <p:cNvSpPr>
-            <a:spLocks xmlns:a="http://schemas.openxmlformats.org/drawingml/2006/main" noGrp="1"/>
-          </p:cNvSpPr>
-          <p:nvPr/>
-        </p:nvSpPr>
-        <p:spPr>
-          <a:xfrm xmlns:a="http://schemas.openxmlformats.org/drawingml/2006/main">
-            <a:off x="1333500" y="4524375"/>
-            <a:ext cx="9525000" cy="514350"/>
-          </a:xfrm>
-          <a:prstGeom xmlns:a="http://schemas.openxmlformats.org/drawingml/2006/main" prst="rect">
-            <a:avLst/>
-          </a:prstGeom>
-          <a:noFill xmlns:a="http://schemas.openxmlformats.org/drawingml/2006/main"/>
-          <a:ln xmlns:a="http://schemas.openxmlformats.org/drawingml/2006/main" w="0">
-            <a:noFill/>
-          </a:ln>
-        </p:spPr>
-        <p:txBody>
-          <a:bodyPr xmlns:a="http://schemas.openxmlformats.org/drawingml/2006/main" lIns="0" tIns="0" rIns="0" bIns="0" anchor="ctr">
-            <a:noAutofit/>
-          </a:bodyPr>
-          <a:lstStyle xmlns:a="http://schemas.openxmlformats.org/drawingml/2006/main"/>
-          <a:p xmlns:a="http://schemas.openxmlformats.org/drawingml/2006/main">
-            <a:pPr algn="l">
-              <a:lnSpc>
-                <a:spcPct val="114000"/>
-              </a:lnSpc>
-              <a:buNone/>
-              <a:defRPr sz="1800" b="0">
-                <a:solidFill>
-                  <a:srgbClr val="A96510"/>
-                </a:solidFill>
-                <a:latin typeface="微软雅黑"/>
-                <a:ea typeface="微软雅黑"/>
-                <a:cs typeface="微软雅黑"/>
-              </a:defRPr>
-            </a:pPr>
-            <a:r>
-              <a:rPr sz="1800" b="0">
-                <a:solidFill>
-                  <a:srgbClr val="A96510"/>
-                </a:solidFill>
-                <a:latin typeface="微软雅黑"/>
-                <a:ea typeface="微软雅黑"/>
-                <a:cs typeface="微软雅黑"/>
-              </a:rPr>
-              <a:t>选择顺序：本人真实问题　→　导师组公开问题　→　课程虚构样例 G1</a:t>
-            </a:r>
-          </a:p>
-        </p:txBody>
-      </p:sp>
-      <p:sp>
-        <p:nvSpPr>
-          <p:cNvPr id="20" name="visual-17-14-write">
-            <a:extLst xmlns:a="http://schemas.openxmlformats.org/drawingml/2006/main">
-              <a:ext uri="{FF2B5EF4-FFF2-40B4-BE49-F238E27FC236}">
-                <a16:creationId xmlns:a16="http://schemas.microsoft.com/office/drawing/2014/main" id="{656F99FE-FEEB-4939-BCE4-60E33C102280}"/>
-              </a:ext>
-            </a:extLst>
-          </p:cNvPr>
-          <p:cNvSpPr>
-            <a:spLocks xmlns:a="http://schemas.openxmlformats.org/drawingml/2006/main" noGrp="1"/>
-          </p:cNvSpPr>
-          <p:nvPr/>
-        </p:nvSpPr>
-        <p:spPr>
-          <a:xfrm xmlns:a="http://schemas.openxmlformats.org/drawingml/2006/main">
-            <a:off x="1619250" y="5219700"/>
-            <a:ext cx="8953500" cy="457200"/>
-          </a:xfrm>
-          <a:prstGeom xmlns:a="http://schemas.openxmlformats.org/drawingml/2006/main" prst="rect">
-            <a:avLst/>
-          </a:prstGeom>
-          <a:noFill xmlns:a="http://schemas.openxmlformats.org/drawingml/2006/main"/>
-          <a:ln xmlns:a="http://schemas.openxmlformats.org/drawingml/2006/main" w="0">
-            <a:noFill/>
-          </a:ln>
-        </p:spPr>
-        <p:txBody>
-          <a:bodyPr xmlns:a="http://schemas.openxmlformats.org/drawingml/2006/main" lIns="0" tIns="0" rIns="0" bIns="0" anchor="ctr">
-            <a:noAutofit/>
-          </a:bodyPr>
-          <a:lstStyle xmlns:a="http://schemas.openxmlformats.org/drawingml/2006/main"/>
-          <a:p xmlns:a="http://schemas.openxmlformats.org/drawingml/2006/main">
-            <a:pPr algn="l">
-              <a:lnSpc>
-                <a:spcPct val="105000"/>
-              </a:lnSpc>
-              <a:buNone/>
-              <a:defRPr sz="1800" b="0">
-                <a:solidFill>
-                  <a:srgbClr val="27333D"/>
-                </a:solidFill>
-                <a:latin typeface="Consolas"/>
-                <a:ea typeface="Consolas"/>
-                <a:cs typeface="Consolas"/>
-              </a:defRPr>
-            </a:pPr>
-            <a:r>
-              <a:rPr sz="1800" b="0">
-                <a:solidFill>
-                  <a:srgbClr val="27333D"/>
-                </a:solidFill>
-                <a:latin typeface="Consolas"/>
-                <a:ea typeface="Consolas"/>
-                <a:cs typeface="Consolas"/>
-              </a:rPr>
-              <a:t>写入：problem-definition.md｜完整竞争假设设计留给第 7 课</a:t>
+              <a:defRPr sz="900" b="0">
+                <a:solidFill>
+                  <a:srgbClr val="A5A5A5"/>
+                </a:solidFill>
+                <a:latin typeface="微软雅黑"/>
+                <a:ea typeface="微软雅黑"/>
+                <a:cs typeface="微软雅黑"/>
+              </a:defRPr>
+            </a:pPr>
+            <a:r>
+              <a:rPr sz="900" b="0">
+                <a:solidFill>
+                  <a:srgbClr val="A5A5A5"/>
+                </a:solidFill>
+                <a:latin typeface="微软雅黑"/>
+                <a:ea typeface="微软雅黑"/>
+                <a:cs typeface="微软雅黑"/>
+              </a:rPr>
+              <a:t>17</a:t>
             </a:r>
           </a:p>
         </p:txBody>
@@ -18107,99 +15199,22 @@
       </p:grpSpPr>
       <p:sp>
         <p:nvSpPr>
-          <p:cNvPr id="4" name="Text Placeholder 3">
-            <a:extLst xmlns:a="http://schemas.openxmlformats.org/drawingml/2006/main">
-              <a:ext uri="{FF2B5EF4-FFF2-40B4-BE49-F238E27FC236}">
-                <a16:creationId xmlns:a16="http://schemas.microsoft.com/office/drawing/2014/main" id="{4D941B40-7A0A-534E-3563-CA11753C8E3F}"/>
-              </a:ext>
-            </a:extLst>
-          </p:cNvPr>
-          <p:cNvSpPr>
-            <a:spLocks xmlns:a="http://schemas.openxmlformats.org/drawingml/2006/main" noGrp="1"/>
-          </p:cNvSpPr>
-          <p:nvPr>
-            <p:ph type="body" idx="14"/>
-          </p:nvPr>
-        </p:nvSpPr>
-        <p:spPr>
-          <a:xfrm xmlns:a="http://schemas.openxmlformats.org/drawingml/2006/main">
-            <a:off x="1028700" y="57150"/>
-            <a:ext cx="10668000" cy="571500"/>
-          </a:xfrm>
-        </p:spPr>
-        <p:txBody>
-          <a:bodyPr xmlns:a="http://schemas.openxmlformats.org/drawingml/2006/main" lIns="0" tIns="0" rIns="0" bIns="0" anchor="ctr">
-            <a:noAutofit/>
-          </a:bodyPr>
-          <a:lstStyle xmlns:a="http://schemas.openxmlformats.org/drawingml/2006/main"/>
-          <a:p xmlns:a="http://schemas.openxmlformats.org/drawingml/2006/main">
-            <a:pPr algn="l">
-              <a:lnSpc>
-                <a:spcPct val="118000"/>
-              </a:lnSpc>
-              <a:buNone/>
-            </a:pPr>
-            <a:r>
-              <a:rPr sz="3000" b="1">
-                <a:solidFill>
-                  <a:srgbClr val="FFFFFF"/>
-                </a:solidFill>
-                <a:latin typeface="微软雅黑"/>
-                <a:ea typeface="微软雅黑"/>
-                <a:cs typeface="微软雅黑"/>
-              </a:rPr>
-              <a:t>退出卡与第 7 课预告</a:t>
-            </a:r>
-            <a:endParaRPr/>
-          </a:p>
-        </p:txBody>
-      </p:sp>
-      <p:sp>
-        <p:nvSpPr>
-          <p:cNvPr id="5" name="Slide Number Placeholder 4">
-            <a:extLst xmlns:a="http://schemas.openxmlformats.org/drawingml/2006/main">
-              <a:ext uri="{FF2B5EF4-FFF2-40B4-BE49-F238E27FC236}">
-                <a16:creationId xmlns:a16="http://schemas.microsoft.com/office/drawing/2014/main" id="{EBA5909F-738E-F60C-BE8C-B3F1D94548E5}"/>
-              </a:ext>
-            </a:extLst>
-          </p:cNvPr>
-          <p:cNvSpPr>
-            <a:spLocks xmlns:a="http://schemas.openxmlformats.org/drawingml/2006/main" noGrp="1"/>
-          </p:cNvSpPr>
-          <p:nvPr>
-            <p:ph type="sldNum" idx="10"/>
-          </p:nvPr>
-        </p:nvSpPr>
-        <p:spPr/>
-        <p:txBody>
-          <a:bodyPr xmlns:a="http://schemas.openxmlformats.org/drawingml/2006/main"/>
-          <a:lstStyle xmlns:a="http://schemas.openxmlformats.org/drawingml/2006/main"/>
-          <a:p xmlns:a="http://schemas.openxmlformats.org/drawingml/2006/main">
-            <a:fld id="{0BB18BA8-60F4-C50D-CD9B-1BB87D3E8506}" type="slidenum">
-              <a:t>22</a:t>
-            </a:fld>
-            <a:endParaRPr/>
-          </a:p>
-        </p:txBody>
-      </p:sp>
-      <p:sp>
-        <p:nvSpPr>
-          <p:cNvPr id="6" name="content-46">
-            <a:extLst xmlns:a="http://schemas.openxmlformats.org/drawingml/2006/main">
-              <a:ext uri="{FF2B5EF4-FFF2-40B4-BE49-F238E27FC236}">
-                <a16:creationId xmlns:a16="http://schemas.microsoft.com/office/drawing/2014/main" id="{FA4F28BA-3ECE-4A16-BFB1-BFE69B724028}"/>
-              </a:ext>
-            </a:extLst>
-          </p:cNvPr>
-          <p:cNvSpPr>
-            <a:spLocks xmlns:a="http://schemas.openxmlformats.org/drawingml/2006/main" noGrp="1"/>
-          </p:cNvSpPr>
-          <p:nvPr/>
-        </p:nvSpPr>
-        <p:spPr>
-          <a:xfrm xmlns:a="http://schemas.openxmlformats.org/drawingml/2006/main">
-            <a:off x="609600" y="1571625"/>
-            <a:ext cx="10972800" cy="432435"/>
+          <p:cNvPr id="7" name="judgment-title">
+            <a:extLst xmlns:a="http://schemas.openxmlformats.org/drawingml/2006/main">
+              <a:ext uri="{FF2B5EF4-FFF2-40B4-BE49-F238E27FC236}">
+                <a16:creationId xmlns:a16="http://schemas.microsoft.com/office/drawing/2014/main" id="{4AD7E3D5-065E-4C32-915E-AFA526A735E4}"/>
+              </a:ext>
+            </a:extLst>
+          </p:cNvPr>
+          <p:cNvSpPr>
+            <a:spLocks xmlns:a="http://schemas.openxmlformats.org/drawingml/2006/main" noGrp="1"/>
+          </p:cNvSpPr>
+          <p:nvPr/>
+        </p:nvSpPr>
+        <p:spPr>
+          <a:xfrm xmlns:a="http://schemas.openxmlformats.org/drawingml/2006/main">
+            <a:off x="1028700" y="76200"/>
+            <a:ext cx="10687050" cy="514350"/>
           </a:xfrm>
           <a:prstGeom xmlns:a="http://schemas.openxmlformats.org/drawingml/2006/main" prst="rect">
             <a:avLst/>
@@ -18211,54 +15226,61 @@
         </p:spPr>
         <p:txBody>
           <a:bodyPr xmlns:a="http://schemas.openxmlformats.org/drawingml/2006/main" lIns="0" tIns="0" rIns="0" bIns="0" anchor="t"/>
-          <a:lstStyle xmlns:a="http://schemas.openxmlformats.org/drawingml/2006/main"/>
+          <a:lstStyle xmlns:a="http://schemas.openxmlformats.org/drawingml/2006/main">
+            <a:defPPr algn="l">
+              <a:defRPr sz="3000" b="1">
+                <a:solidFill>
+                  <a:srgbClr val="FFFFFF"/>
+                </a:solidFill>
+                <a:latin typeface="微软雅黑"/>
+                <a:ea typeface="微软雅黑"/>
+                <a:cs typeface="微软雅黑"/>
+              </a:defRPr>
+            </a:defPPr>
+          </a:lstStyle>
           <a:p xmlns:a="http://schemas.openxmlformats.org/drawingml/2006/main">
             <a:pPr algn="l">
-              <a:lnSpc>
-                <a:spcPct val="118000"/>
-              </a:lnSpc>
-              <a:buNone/>
-              <a:defRPr sz="2400" b="0">
-                <a:solidFill>
-                  <a:srgbClr val="27333D"/>
-                </a:solidFill>
-                <a:latin typeface="微软雅黑"/>
-                <a:ea typeface="微软雅黑"/>
-                <a:cs typeface="微软雅黑"/>
-              </a:defRPr>
-            </a:pPr>
-            <a:r>
-              <a:rPr sz="2400" b="0">
-                <a:solidFill>
-                  <a:srgbClr val="27333D"/>
-                </a:solidFill>
-                <a:latin typeface="微软雅黑"/>
-                <a:ea typeface="微软雅黑"/>
-                <a:cs typeface="微软雅黑"/>
-              </a:rPr>
-              <a:t>退出卡：</a:t>
-            </a:r>
-          </a:p>
-        </p:txBody>
-      </p:sp>
-      <p:sp>
-        <p:nvSpPr>
-          <p:cNvPr id="7" name="content-47">
-            <a:extLst xmlns:a="http://schemas.openxmlformats.org/drawingml/2006/main">
-              <a:ext uri="{FF2B5EF4-FFF2-40B4-BE49-F238E27FC236}">
-                <a16:creationId xmlns:a16="http://schemas.microsoft.com/office/drawing/2014/main" id="{B34BC4CC-1DC7-458B-8E7C-EE304E3CE33C}"/>
-              </a:ext>
-            </a:extLst>
-          </p:cNvPr>
-          <p:cNvSpPr>
-            <a:spLocks xmlns:a="http://schemas.openxmlformats.org/drawingml/2006/main" noGrp="1"/>
-          </p:cNvSpPr>
-          <p:nvPr/>
-        </p:nvSpPr>
-        <p:spPr>
-          <a:xfrm xmlns:a="http://schemas.openxmlformats.org/drawingml/2006/main">
-            <a:off x="609600" y="2261235"/>
-            <a:ext cx="10972800" cy="432435"/>
+              <a:defRPr sz="3000" b="1">
+                <a:solidFill>
+                  <a:srgbClr val="FFFFFF"/>
+                </a:solidFill>
+                <a:latin typeface="微软雅黑"/>
+                <a:ea typeface="微软雅黑"/>
+                <a:cs typeface="微软雅黑"/>
+              </a:defRPr>
+            </a:pPr>
+            <a:r>
+              <a:rPr sz="3000" b="1">
+                <a:solidFill>
+                  <a:srgbClr val="FFFFFF"/>
+                </a:solidFill>
+                <a:latin typeface="微软雅黑"/>
+                <a:ea typeface="微软雅黑"/>
+                <a:cs typeface="微软雅黑"/>
+              </a:rPr>
+              <a:t>保留本课决定，准备下一课输入</a:t>
+            </a:r>
+          </a:p>
+        </p:txBody>
+      </p:sp>
+      <p:sp>
+        <p:nvSpPr>
+          <p:cNvPr id="2" name="judgment-body-0">
+            <a:extLst xmlns:a="http://schemas.openxmlformats.org/drawingml/2006/main">
+              <a:ext uri="{FF2B5EF4-FFF2-40B4-BE49-F238E27FC236}">
+                <a16:creationId xmlns:a16="http://schemas.microsoft.com/office/drawing/2014/main" id="{A09158D8-75B5-4059-8974-098D8E3A7729}"/>
+              </a:ext>
+            </a:extLst>
+          </p:cNvPr>
+          <p:cNvSpPr>
+            <a:spLocks xmlns:a="http://schemas.openxmlformats.org/drawingml/2006/main" noGrp="1"/>
+          </p:cNvSpPr>
+          <p:nvPr/>
+        </p:nvSpPr>
+        <p:spPr>
+          <a:xfrm xmlns:a="http://schemas.openxmlformats.org/drawingml/2006/main">
+            <a:off x="666750" y="1066800"/>
+            <a:ext cx="10858500" cy="1009650"/>
           </a:xfrm>
           <a:prstGeom xmlns:a="http://schemas.openxmlformats.org/drawingml/2006/main" prst="rect">
             <a:avLst/>
@@ -18270,16 +15292,23 @@
         </p:spPr>
         <p:txBody>
           <a:bodyPr xmlns:a="http://schemas.openxmlformats.org/drawingml/2006/main" lIns="0" tIns="0" rIns="0" bIns="0" anchor="t"/>
-          <a:lstStyle xmlns:a="http://schemas.openxmlformats.org/drawingml/2006/main"/>
+          <a:lstStyle xmlns:a="http://schemas.openxmlformats.org/drawingml/2006/main">
+            <a:defPPr algn="l">
+              <a:defRPr sz="2400" b="0">
+                <a:solidFill>
+                  <a:srgbClr val="263746"/>
+                </a:solidFill>
+                <a:latin typeface="微软雅黑"/>
+                <a:ea typeface="微软雅黑"/>
+                <a:cs typeface="微软雅黑"/>
+              </a:defRPr>
+            </a:defPPr>
+          </a:lstStyle>
           <a:p xmlns:a="http://schemas.openxmlformats.org/drawingml/2006/main">
             <a:pPr algn="l">
-              <a:lnSpc>
-                <a:spcPct val="118000"/>
-              </a:lnSpc>
-              <a:buNone/>
               <a:defRPr sz="2400" b="0">
                 <a:solidFill>
-                  <a:srgbClr val="27333D"/>
+                  <a:srgbClr val="263746"/>
                 </a:solidFill>
                 <a:latin typeface="微软雅黑"/>
                 <a:ea typeface="微软雅黑"/>
@@ -18289,35 +15318,35 @@
             <a:r>
               <a:rPr sz="2400" b="0">
                 <a:solidFill>
-                  <a:srgbClr val="27333D"/>
-                </a:solidFill>
-                <a:latin typeface="微软雅黑"/>
-                <a:ea typeface="微软雅黑"/>
-                <a:cs typeface="微软雅黑"/>
-              </a:rPr>
-              <a:t>当前问题属于主题、问题，还是待验证主张？</a:t>
-            </a:r>
-          </a:p>
-        </p:txBody>
-      </p:sp>
-      <p:sp>
-        <p:nvSpPr>
-          <p:cNvPr id="8" name="content-48">
-            <a:extLst xmlns:a="http://schemas.openxmlformats.org/drawingml/2006/main">
-              <a:ext uri="{FF2B5EF4-FFF2-40B4-BE49-F238E27FC236}">
-                <a16:creationId xmlns:a16="http://schemas.microsoft.com/office/drawing/2014/main" id="{5A90122F-75D3-402C-A718-50C5A20BD99B}"/>
-              </a:ext>
-            </a:extLst>
-          </p:cNvPr>
-          <p:cNvSpPr>
-            <a:spLocks xmlns:a="http://schemas.openxmlformats.org/drawingml/2006/main" noGrp="1"/>
-          </p:cNvSpPr>
-          <p:nvPr/>
-        </p:nvSpPr>
-        <p:spPr>
-          <a:xfrm xmlns:a="http://schemas.openxmlformats.org/drawingml/2006/main">
-            <a:off x="609600" y="2950845"/>
-            <a:ext cx="10972800" cy="432435"/>
+                  <a:srgbClr val="263746"/>
+                </a:solidFill>
+                <a:latin typeface="微软雅黑"/>
+                <a:ea typeface="微软雅黑"/>
+                <a:cs typeface="微软雅黑"/>
+              </a:rPr>
+              <a:t>L7 从当前命题提出可区分的替代解释。</a:t>
+            </a:r>
+          </a:p>
+        </p:txBody>
+      </p:sp>
+      <p:sp>
+        <p:nvSpPr>
+          <p:cNvPr id="3" name="judgment-body-1">
+            <a:extLst xmlns:a="http://schemas.openxmlformats.org/drawingml/2006/main">
+              <a:ext uri="{FF2B5EF4-FFF2-40B4-BE49-F238E27FC236}">
+                <a16:creationId xmlns:a16="http://schemas.microsoft.com/office/drawing/2014/main" id="{3904B01E-B385-4520-8CFA-E347D861E8D9}"/>
+              </a:ext>
+            </a:extLst>
+          </p:cNvPr>
+          <p:cNvSpPr>
+            <a:spLocks xmlns:a="http://schemas.openxmlformats.org/drawingml/2006/main" noGrp="1"/>
+          </p:cNvSpPr>
+          <p:nvPr/>
+        </p:nvSpPr>
+        <p:spPr>
+          <a:xfrm xmlns:a="http://schemas.openxmlformats.org/drawingml/2006/main">
+            <a:off x="666750" y="2238375"/>
+            <a:ext cx="10858500" cy="2076450"/>
           </a:xfrm>
           <a:prstGeom xmlns:a="http://schemas.openxmlformats.org/drawingml/2006/main" prst="rect">
             <a:avLst/>
@@ -18329,16 +15358,23 @@
         </p:spPr>
         <p:txBody>
           <a:bodyPr xmlns:a="http://schemas.openxmlformats.org/drawingml/2006/main" lIns="0" tIns="0" rIns="0" bIns="0" anchor="t"/>
-          <a:lstStyle xmlns:a="http://schemas.openxmlformats.org/drawingml/2006/main"/>
+          <a:lstStyle xmlns:a="http://schemas.openxmlformats.org/drawingml/2006/main">
+            <a:defPPr algn="l">
+              <a:defRPr sz="2400" b="0">
+                <a:solidFill>
+                  <a:srgbClr val="263746"/>
+                </a:solidFill>
+                <a:latin typeface="微软雅黑"/>
+                <a:ea typeface="微软雅黑"/>
+                <a:cs typeface="微软雅黑"/>
+              </a:defRPr>
+            </a:defPPr>
+          </a:lstStyle>
           <a:p xmlns:a="http://schemas.openxmlformats.org/drawingml/2006/main">
             <a:pPr algn="l">
-              <a:lnSpc>
-                <a:spcPct val="118000"/>
-              </a:lnSpc>
-              <a:buNone/>
               <a:defRPr sz="2400" b="0">
                 <a:solidFill>
-                  <a:srgbClr val="27333D"/>
+                  <a:srgbClr val="263746"/>
                 </a:solidFill>
                 <a:latin typeface="微软雅黑"/>
                 <a:ea typeface="微软雅黑"/>
@@ -18348,35 +15384,35 @@
             <a:r>
               <a:rPr sz="2400" b="0">
                 <a:solidFill>
-                  <a:srgbClr val="27333D"/>
-                </a:solidFill>
-                <a:latin typeface="微软雅黑"/>
-                <a:ea typeface="微软雅黑"/>
-                <a:cs typeface="微软雅黑"/>
-              </a:rPr>
-              <a:t>哪项观察可能推翻主张？</a:t>
-            </a:r>
-          </a:p>
-        </p:txBody>
-      </p:sp>
-      <p:sp>
-        <p:nvSpPr>
-          <p:cNvPr id="9" name="content-49">
-            <a:extLst xmlns:a="http://schemas.openxmlformats.org/drawingml/2006/main">
-              <a:ext uri="{FF2B5EF4-FFF2-40B4-BE49-F238E27FC236}">
-                <a16:creationId xmlns:a16="http://schemas.microsoft.com/office/drawing/2014/main" id="{6216A49C-F99C-4D1C-B0D0-B9DFDAE69014}"/>
-              </a:ext>
-            </a:extLst>
-          </p:cNvPr>
-          <p:cNvSpPr>
-            <a:spLocks xmlns:a="http://schemas.openxmlformats.org/drawingml/2006/main" noGrp="1"/>
-          </p:cNvSpPr>
-          <p:nvPr/>
-        </p:nvSpPr>
-        <p:spPr>
-          <a:xfrm xmlns:a="http://schemas.openxmlformats.org/drawingml/2006/main">
-            <a:off x="609600" y="3640455"/>
-            <a:ext cx="10972800" cy="432435"/>
+                  <a:srgbClr val="263746"/>
+                </a:solidFill>
+                <a:latin typeface="微软雅黑"/>
+                <a:ea typeface="微软雅黑"/>
+                <a:cs typeface="微软雅黑"/>
+              </a:rPr>
+              <a:t>回写已有项目：问题门当前项目版本：选题决定、3 张卡、候选池、地图及前提</a:t>
+            </a:r>
+          </a:p>
+        </p:txBody>
+      </p:sp>
+      <p:sp>
+        <p:nvSpPr>
+          <p:cNvPr id="4" name="judgment-body-2">
+            <a:extLst xmlns:a="http://schemas.openxmlformats.org/drawingml/2006/main">
+              <a:ext uri="{FF2B5EF4-FFF2-40B4-BE49-F238E27FC236}">
+                <a16:creationId xmlns:a16="http://schemas.microsoft.com/office/drawing/2014/main" id="{A318EA00-C3DD-4A61-A425-74D9F45FF2EE}"/>
+              </a:ext>
+            </a:extLst>
+          </p:cNvPr>
+          <p:cNvSpPr>
+            <a:spLocks xmlns:a="http://schemas.openxmlformats.org/drawingml/2006/main" noGrp="1"/>
+          </p:cNvSpPr>
+          <p:nvPr/>
+        </p:nvSpPr>
+        <p:spPr>
+          <a:xfrm xmlns:a="http://schemas.openxmlformats.org/drawingml/2006/main">
+            <a:off x="666750" y="4495800"/>
+            <a:ext cx="10858500" cy="1409700"/>
           </a:xfrm>
           <a:prstGeom xmlns:a="http://schemas.openxmlformats.org/drawingml/2006/main" prst="rect">
             <a:avLst/>
@@ -18388,54 +15424,61 @@
         </p:spPr>
         <p:txBody>
           <a:bodyPr xmlns:a="http://schemas.openxmlformats.org/drawingml/2006/main" lIns="0" tIns="0" rIns="0" bIns="0" anchor="t"/>
-          <a:lstStyle xmlns:a="http://schemas.openxmlformats.org/drawingml/2006/main"/>
+          <a:lstStyle xmlns:a="http://schemas.openxmlformats.org/drawingml/2006/main">
+            <a:defPPr algn="l">
+              <a:defRPr sz="2200" b="0">
+                <a:solidFill>
+                  <a:srgbClr val="1F4D78"/>
+                </a:solidFill>
+                <a:latin typeface="微软雅黑"/>
+                <a:ea typeface="微软雅黑"/>
+                <a:cs typeface="微软雅黑"/>
+              </a:defRPr>
+            </a:defPPr>
+          </a:lstStyle>
           <a:p xmlns:a="http://schemas.openxmlformats.org/drawingml/2006/main">
             <a:pPr algn="l">
-              <a:lnSpc>
-                <a:spcPct val="118000"/>
-              </a:lnSpc>
-              <a:buNone/>
-              <a:defRPr sz="2400" b="0">
-                <a:solidFill>
-                  <a:srgbClr val="27333D"/>
-                </a:solidFill>
-                <a:latin typeface="微软雅黑"/>
-                <a:ea typeface="微软雅黑"/>
-                <a:cs typeface="微软雅黑"/>
-              </a:defRPr>
-            </a:pPr>
-            <a:r>
-              <a:rPr sz="2400" b="0">
-                <a:solidFill>
-                  <a:srgbClr val="27333D"/>
-                </a:solidFill>
-                <a:latin typeface="微软雅黑"/>
-                <a:ea typeface="微软雅黑"/>
-                <a:cs typeface="微软雅黑"/>
-              </a:rPr>
-              <a:t>九项问题门条件中，最需要补哪一项？</a:t>
-            </a:r>
-          </a:p>
-        </p:txBody>
-      </p:sp>
-      <p:sp>
-        <p:nvSpPr>
-          <p:cNvPr id="10" name="content-50">
-            <a:extLst xmlns:a="http://schemas.openxmlformats.org/drawingml/2006/main">
-              <a:ext uri="{FF2B5EF4-FFF2-40B4-BE49-F238E27FC236}">
-                <a16:creationId xmlns:a16="http://schemas.microsoft.com/office/drawing/2014/main" id="{6F2AE119-F49E-4448-BFC8-94D452117F3C}"/>
-              </a:ext>
-            </a:extLst>
-          </p:cNvPr>
-          <p:cNvSpPr>
-            <a:spLocks xmlns:a="http://schemas.openxmlformats.org/drawingml/2006/main" noGrp="1"/>
-          </p:cNvSpPr>
-          <p:nvPr/>
-        </p:nvSpPr>
-        <p:spPr>
-          <a:xfrm xmlns:a="http://schemas.openxmlformats.org/drawingml/2006/main">
-            <a:off x="609600" y="4330065"/>
-            <a:ext cx="10972800" cy="432435"/>
+              <a:defRPr sz="2200" b="0">
+                <a:solidFill>
+                  <a:srgbClr val="1F4D78"/>
+                </a:solidFill>
+                <a:latin typeface="微软雅黑"/>
+                <a:ea typeface="微软雅黑"/>
+                <a:cs typeface="微软雅黑"/>
+              </a:defRPr>
+            </a:pPr>
+            <a:r>
+              <a:rPr sz="2200" b="0">
+                <a:solidFill>
+                  <a:srgbClr val="1F4D78"/>
+                </a:solidFill>
+                <a:latin typeface="微软雅黑"/>
+                <a:ea typeface="微软雅黑"/>
+                <a:cs typeface="微软雅黑"/>
+              </a:rPr>
+              <a:t>研究门材料按既定预算整理提交；不叠加新必读。</a:t>
+            </a:r>
+          </a:p>
+        </p:txBody>
+      </p:sp>
+      <p:sp>
+        <p:nvSpPr>
+          <p:cNvPr id="5" name="judgment-source">
+            <a:extLst xmlns:a="http://schemas.openxmlformats.org/drawingml/2006/main">
+              <a:ext uri="{FF2B5EF4-FFF2-40B4-BE49-F238E27FC236}">
+                <a16:creationId xmlns:a16="http://schemas.microsoft.com/office/drawing/2014/main" id="{F84F15D6-7B29-41AB-B3DE-8BC55EA12B69}"/>
+              </a:ext>
+            </a:extLst>
+          </p:cNvPr>
+          <p:cNvSpPr>
+            <a:spLocks xmlns:a="http://schemas.openxmlformats.org/drawingml/2006/main" noGrp="1"/>
+          </p:cNvSpPr>
+          <p:nvPr/>
+        </p:nvSpPr>
+        <p:spPr>
+          <a:xfrm xmlns:a="http://schemas.openxmlformats.org/drawingml/2006/main">
+            <a:off x="666750" y="6276975"/>
+            <a:ext cx="10572750" cy="209550"/>
           </a:xfrm>
           <a:prstGeom xmlns:a="http://schemas.openxmlformats.org/drawingml/2006/main" prst="rect">
             <a:avLst/>
@@ -18447,54 +15490,61 @@
         </p:spPr>
         <p:txBody>
           <a:bodyPr xmlns:a="http://schemas.openxmlformats.org/drawingml/2006/main" lIns="0" tIns="0" rIns="0" bIns="0" anchor="t"/>
-          <a:lstStyle xmlns:a="http://schemas.openxmlformats.org/drawingml/2006/main"/>
+          <a:lstStyle xmlns:a="http://schemas.openxmlformats.org/drawingml/2006/main">
+            <a:defPPr algn="l">
+              <a:defRPr sz="1100" b="0">
+                <a:solidFill>
+                  <a:srgbClr val="667684"/>
+                </a:solidFill>
+                <a:latin typeface="微软雅黑"/>
+                <a:ea typeface="微软雅黑"/>
+                <a:cs typeface="微软雅黑"/>
+              </a:defRPr>
+            </a:defPPr>
+          </a:lstStyle>
           <a:p xmlns:a="http://schemas.openxmlformats.org/drawingml/2006/main">
             <a:pPr algn="l">
-              <a:lnSpc>
-                <a:spcPct val="118000"/>
-              </a:lnSpc>
-              <a:buNone/>
-              <a:defRPr sz="2400" b="0">
-                <a:solidFill>
-                  <a:srgbClr val="27333D"/>
-                </a:solidFill>
-                <a:latin typeface="微软雅黑"/>
-                <a:ea typeface="微软雅黑"/>
-                <a:cs typeface="微软雅黑"/>
-              </a:defRPr>
-            </a:pPr>
-            <a:r>
-              <a:rPr sz="2400" b="0">
-                <a:solidFill>
-                  <a:srgbClr val="27333D"/>
-                </a:solidFill>
-                <a:latin typeface="微软雅黑"/>
-                <a:ea typeface="微软雅黑"/>
-                <a:cs typeface="微软雅黑"/>
-              </a:rPr>
-              <a:t>课后提交问题门材料包，包含至少 3 张相关完整精读卡。</a:t>
-            </a:r>
-          </a:p>
-        </p:txBody>
-      </p:sp>
-      <p:sp>
-        <p:nvSpPr>
-          <p:cNvPr id="11" name="content-51">
-            <a:extLst xmlns:a="http://schemas.openxmlformats.org/drawingml/2006/main">
-              <a:ext uri="{FF2B5EF4-FFF2-40B4-BE49-F238E27FC236}">
-                <a16:creationId xmlns:a16="http://schemas.microsoft.com/office/drawing/2014/main" id="{7B25087A-5C5C-45FA-A72D-87E9C61AF013}"/>
-              </a:ext>
-            </a:extLst>
-          </p:cNvPr>
-          <p:cNvSpPr>
-            <a:spLocks xmlns:a="http://schemas.openxmlformats.org/drawingml/2006/main" noGrp="1"/>
-          </p:cNvSpPr>
-          <p:nvPr/>
-        </p:nvSpPr>
-        <p:spPr>
-          <a:xfrm xmlns:a="http://schemas.openxmlformats.org/drawingml/2006/main">
-            <a:off x="609600" y="5019675"/>
-            <a:ext cx="10972800" cy="432435"/>
+              <a:defRPr sz="1100" b="0">
+                <a:solidFill>
+                  <a:srgbClr val="667684"/>
+                </a:solidFill>
+                <a:latin typeface="微软雅黑"/>
+                <a:ea typeface="微软雅黑"/>
+                <a:cs typeface="微软雅黑"/>
+              </a:defRPr>
+            </a:pPr>
+            <a:r>
+              <a:rPr sz="1100" b="0">
+                <a:solidFill>
+                  <a:srgbClr val="667684"/>
+                </a:solidFill>
+                <a:latin typeface="微软雅黑"/>
+                <a:ea typeface="微软雅黑"/>
+                <a:cs typeface="微软雅黑"/>
+              </a:rPr>
+              <a:t>来源：本课判断任务与讲义；构造材料及真实来源按材料包标识</a:t>
+            </a:r>
+          </a:p>
+        </p:txBody>
+      </p:sp>
+      <p:sp>
+        <p:nvSpPr>
+          <p:cNvPr id="6" name="judgment-page">
+            <a:extLst xmlns:a="http://schemas.openxmlformats.org/drawingml/2006/main">
+              <a:ext uri="{FF2B5EF4-FFF2-40B4-BE49-F238E27FC236}">
+                <a16:creationId xmlns:a16="http://schemas.microsoft.com/office/drawing/2014/main" id="{0B58738D-17D3-4793-8BA4-86ED4CE1CCA9}"/>
+              </a:ext>
+            </a:extLst>
+          </p:cNvPr>
+          <p:cNvSpPr>
+            <a:spLocks xmlns:a="http://schemas.openxmlformats.org/drawingml/2006/main" noGrp="1"/>
+          </p:cNvSpPr>
+          <p:nvPr/>
+        </p:nvSpPr>
+        <p:spPr>
+          <a:xfrm xmlns:a="http://schemas.openxmlformats.org/drawingml/2006/main">
+            <a:off x="11715750" y="6562725"/>
+            <a:ext cx="238125" cy="171450"/>
           </a:xfrm>
           <a:prstGeom xmlns:a="http://schemas.openxmlformats.org/drawingml/2006/main" prst="rect">
             <a:avLst/>
@@ -18506,32 +15556,39 @@
         </p:spPr>
         <p:txBody>
           <a:bodyPr xmlns:a="http://schemas.openxmlformats.org/drawingml/2006/main" lIns="0" tIns="0" rIns="0" bIns="0" anchor="t"/>
-          <a:lstStyle xmlns:a="http://schemas.openxmlformats.org/drawingml/2006/main"/>
+          <a:lstStyle xmlns:a="http://schemas.openxmlformats.org/drawingml/2006/main">
+            <a:defPPr algn="l">
+              <a:defRPr sz="900" b="0">
+                <a:solidFill>
+                  <a:srgbClr val="A5A5A5"/>
+                </a:solidFill>
+                <a:latin typeface="微软雅黑"/>
+                <a:ea typeface="微软雅黑"/>
+                <a:cs typeface="微软雅黑"/>
+              </a:defRPr>
+            </a:defPPr>
+          </a:lstStyle>
           <a:p xmlns:a="http://schemas.openxmlformats.org/drawingml/2006/main">
             <a:pPr algn="l">
-              <a:lnSpc>
-                <a:spcPct val="118000"/>
-              </a:lnSpc>
-              <a:buNone/>
-              <a:defRPr sz="2400" b="0">
-                <a:solidFill>
-                  <a:srgbClr val="1F4D78"/>
-                </a:solidFill>
-                <a:latin typeface="微软雅黑"/>
-                <a:ea typeface="微软雅黑"/>
-                <a:cs typeface="微软雅黑"/>
-              </a:defRPr>
-            </a:pPr>
-            <a:r>
-              <a:rPr sz="2400" b="0">
-                <a:solidFill>
-                  <a:srgbClr val="1F4D78"/>
-                </a:solidFill>
-                <a:latin typeface="微软雅黑"/>
-                <a:ea typeface="微软雅黑"/>
-                <a:cs typeface="微软雅黑"/>
-              </a:rPr>
-              <a:t>第 7 课：机制假设、研究判断与实验设计。</a:t>
+              <a:defRPr sz="900" b="0">
+                <a:solidFill>
+                  <a:srgbClr val="A5A5A5"/>
+                </a:solidFill>
+                <a:latin typeface="微软雅黑"/>
+                <a:ea typeface="微软雅黑"/>
+                <a:cs typeface="微软雅黑"/>
+              </a:defRPr>
+            </a:pPr>
+            <a:r>
+              <a:rPr sz="900" b="0">
+                <a:solidFill>
+                  <a:srgbClr val="A5A5A5"/>
+                </a:solidFill>
+                <a:latin typeface="微软雅黑"/>
+                <a:ea typeface="微软雅黑"/>
+                <a:cs typeface="微软雅黑"/>
+              </a:rPr>
+              <a:t>22</a:t>
             </a:r>
           </a:p>
         </p:txBody>
@@ -18560,96 +15617,22 @@
       </p:grpSpPr>
       <p:sp>
         <p:nvSpPr>
-          <p:cNvPr id="4" name="Text Placeholder 3">
-            <a:extLst xmlns:a="http://schemas.openxmlformats.org/drawingml/2006/main">
-              <a:ext uri="{FF2B5EF4-FFF2-40B4-BE49-F238E27FC236}">
-                <a16:creationId xmlns:a16="http://schemas.microsoft.com/office/drawing/2014/main" id="{4D941B40-7A0A-534E-3563-CA11753C8E3F}"/>
-              </a:ext>
-            </a:extLst>
-          </p:cNvPr>
-          <p:cNvSpPr>
-            <a:spLocks xmlns:a="http://schemas.openxmlformats.org/drawingml/2006/main" noGrp="1"/>
-          </p:cNvSpPr>
-          <p:nvPr>
-            <p:ph type="body" idx="14"/>
-          </p:nvPr>
-        </p:nvSpPr>
-        <p:spPr>
-          <a:xfrm xmlns:a="http://schemas.openxmlformats.org/drawingml/2006/main">
-            <a:off x="1028700" y="28575"/>
-            <a:ext cx="10668000" cy="628650"/>
-          </a:xfrm>
-        </p:spPr>
-        <p:txBody>
-          <a:bodyPr xmlns:a="http://schemas.openxmlformats.org/drawingml/2006/main" lIns="0" tIns="0" rIns="0" bIns="0" anchor="ctr">
-            <a:noAutofit/>
-          </a:bodyPr>
-          <a:lstStyle xmlns:a="http://schemas.openxmlformats.org/drawingml/2006/main"/>
-          <a:p xmlns:a="http://schemas.openxmlformats.org/drawingml/2006/main">
-            <a:pPr algn="l">
-              <a:buNone/>
-            </a:pPr>
-            <a:r>
-              <a:rPr sz="3000" b="1">
-                <a:solidFill>
-                  <a:srgbClr val="FFFFFF"/>
-                </a:solidFill>
-                <a:latin typeface="微软雅黑"/>
-                <a:ea typeface="微软雅黑"/>
-                <a:cs typeface="微软雅黑"/>
-              </a:rPr>
-              <a:t>本课目标与课堂产出</a:t>
-            </a:r>
-            <a:endParaRPr/>
-          </a:p>
-        </p:txBody>
-      </p:sp>
-      <p:sp>
-        <p:nvSpPr>
-          <p:cNvPr id="5" name="Slide Number Placeholder 4">
-            <a:extLst xmlns:a="http://schemas.openxmlformats.org/drawingml/2006/main">
-              <a:ext uri="{FF2B5EF4-FFF2-40B4-BE49-F238E27FC236}">
-                <a16:creationId xmlns:a16="http://schemas.microsoft.com/office/drawing/2014/main" id="{EBA5909F-738E-F60C-BE8C-B3F1D94548E5}"/>
-              </a:ext>
-            </a:extLst>
-          </p:cNvPr>
-          <p:cNvSpPr>
-            <a:spLocks xmlns:a="http://schemas.openxmlformats.org/drawingml/2006/main" noGrp="1"/>
-          </p:cNvSpPr>
-          <p:nvPr>
-            <p:ph type="sldNum" idx="10"/>
-          </p:nvPr>
-        </p:nvSpPr>
-        <p:spPr/>
-        <p:txBody>
-          <a:bodyPr xmlns:a="http://schemas.openxmlformats.org/drawingml/2006/main"/>
-          <a:lstStyle xmlns:a="http://schemas.openxmlformats.org/drawingml/2006/main"/>
-          <a:p xmlns:a="http://schemas.openxmlformats.org/drawingml/2006/main">
-            <a:fld id="{202359C0-8A7A-196E-DD58-8E6569619F09}" type="slidenum">
-              <a:t>3</a:t>
-            </a:fld>
-            <a:endParaRPr/>
-          </a:p>
-        </p:txBody>
-      </p:sp>
-      <p:sp>
-        <p:nvSpPr>
-          <p:cNvPr id="6" name="visual-3-0-p03-n0">
-            <a:extLst xmlns:a="http://schemas.openxmlformats.org/drawingml/2006/main">
-              <a:ext uri="{FF2B5EF4-FFF2-40B4-BE49-F238E27FC236}">
-                <a16:creationId xmlns:a16="http://schemas.microsoft.com/office/drawing/2014/main" id="{7957C2A0-EACE-4A4F-8069-781082DA39FE}"/>
-              </a:ext>
-            </a:extLst>
-          </p:cNvPr>
-          <p:cNvSpPr>
-            <a:spLocks xmlns:a="http://schemas.openxmlformats.org/drawingml/2006/main" noGrp="1"/>
-          </p:cNvSpPr>
-          <p:nvPr/>
-        </p:nvSpPr>
-        <p:spPr>
-          <a:xfrm xmlns:a="http://schemas.openxmlformats.org/drawingml/2006/main">
-            <a:off x="571500" y="1200150"/>
-            <a:ext cx="419100" cy="419100"/>
+          <p:cNvPr id="7" name="judgment-title">
+            <a:extLst xmlns:a="http://schemas.openxmlformats.org/drawingml/2006/main">
+              <a:ext uri="{FF2B5EF4-FFF2-40B4-BE49-F238E27FC236}">
+                <a16:creationId xmlns:a16="http://schemas.microsoft.com/office/drawing/2014/main" id="{B0551987-215A-4F47-A02C-8EFF476F0F03}"/>
+              </a:ext>
+            </a:extLst>
+          </p:cNvPr>
+          <p:cNvSpPr>
+            <a:spLocks xmlns:a="http://schemas.openxmlformats.org/drawingml/2006/main" noGrp="1"/>
+          </p:cNvSpPr>
+          <p:nvPr/>
+        </p:nvSpPr>
+        <p:spPr>
+          <a:xfrm xmlns:a="http://schemas.openxmlformats.org/drawingml/2006/main">
+            <a:off x="1028700" y="76200"/>
+            <a:ext cx="10687050" cy="514350"/>
           </a:xfrm>
           <a:prstGeom xmlns:a="http://schemas.openxmlformats.org/drawingml/2006/main" prst="rect">
             <a:avLst/>
@@ -18660,57 +15643,62 @@
           </a:ln>
         </p:spPr>
         <p:txBody>
-          <a:bodyPr xmlns:a="http://schemas.openxmlformats.org/drawingml/2006/main" lIns="0" tIns="0" rIns="0" bIns="0" anchor="ctr">
-            <a:noAutofit/>
-          </a:bodyPr>
-          <a:lstStyle xmlns:a="http://schemas.openxmlformats.org/drawingml/2006/main"/>
-          <a:p xmlns:a="http://schemas.openxmlformats.org/drawingml/2006/main">
-            <a:pPr algn="ctr">
-              <a:lnSpc>
-                <a:spcPct val="114000"/>
-              </a:lnSpc>
-              <a:buNone/>
-              <a:defRPr sz="1800" b="1">
-                <a:solidFill>
-                  <a:srgbClr val="C8161E"/>
-                </a:solidFill>
-                <a:latin typeface="微软雅黑"/>
-                <a:ea typeface="微软雅黑"/>
-                <a:cs typeface="微软雅黑"/>
-              </a:defRPr>
-            </a:pPr>
-            <a:r>
-              <a:rPr sz="1800" b="1">
-                <a:solidFill>
-                  <a:srgbClr val="C8161E"/>
-                </a:solidFill>
-                <a:latin typeface="微软雅黑"/>
-                <a:ea typeface="微软雅黑"/>
-                <a:cs typeface="微软雅黑"/>
-              </a:rPr>
-              <a:t>1</a:t>
-            </a:r>
-          </a:p>
-        </p:txBody>
-      </p:sp>
-      <p:sp>
-        <p:nvSpPr>
-          <p:cNvPr id="7" name="visual-3-1-p03-g0">
-            <a:extLst xmlns:a="http://schemas.openxmlformats.org/drawingml/2006/main">
-              <a:ext uri="{FF2B5EF4-FFF2-40B4-BE49-F238E27FC236}">
-                <a16:creationId xmlns:a16="http://schemas.microsoft.com/office/drawing/2014/main" id="{4D172074-C1AA-46F1-A01D-2674BAC46253}"/>
-              </a:ext>
-            </a:extLst>
-          </p:cNvPr>
-          <p:cNvSpPr>
-            <a:spLocks xmlns:a="http://schemas.openxmlformats.org/drawingml/2006/main" noGrp="1"/>
-          </p:cNvSpPr>
-          <p:nvPr/>
-        </p:nvSpPr>
-        <p:spPr>
-          <a:xfrm xmlns:a="http://schemas.openxmlformats.org/drawingml/2006/main">
-            <a:off x="1095375" y="1123950"/>
-            <a:ext cx="2143125" cy="571500"/>
+          <a:bodyPr xmlns:a="http://schemas.openxmlformats.org/drawingml/2006/main" lIns="0" tIns="0" rIns="0" bIns="0" anchor="t"/>
+          <a:lstStyle xmlns:a="http://schemas.openxmlformats.org/drawingml/2006/main">
+            <a:defPPr algn="l">
+              <a:defRPr sz="3000" b="1">
+                <a:solidFill>
+                  <a:srgbClr val="FFFFFF"/>
+                </a:solidFill>
+                <a:latin typeface="微软雅黑"/>
+                <a:ea typeface="微软雅黑"/>
+                <a:cs typeface="微软雅黑"/>
+              </a:defRPr>
+            </a:defPPr>
+          </a:lstStyle>
+          <a:p xmlns:a="http://schemas.openxmlformats.org/drawingml/2006/main">
+            <a:pPr algn="l">
+              <a:defRPr sz="3000" b="1">
+                <a:solidFill>
+                  <a:srgbClr val="FFFFFF"/>
+                </a:solidFill>
+                <a:latin typeface="微软雅黑"/>
+                <a:ea typeface="微软雅黑"/>
+                <a:cs typeface="微软雅黑"/>
+              </a:defRPr>
+            </a:pPr>
+            <a:r>
+              <a:rPr sz="3000" b="1">
+                <a:solidFill>
+                  <a:srgbClr val="FFFFFF"/>
+                </a:solidFill>
+                <a:latin typeface="微软雅黑"/>
+                <a:ea typeface="微软雅黑"/>
+                <a:cs typeface="微软雅黑"/>
+              </a:rPr>
+              <a:t>选择一个能完成的问题</a:t>
+            </a:r>
+          </a:p>
+        </p:txBody>
+      </p:sp>
+      <p:sp>
+        <p:nvSpPr>
+          <p:cNvPr id="2" name="judgment-body-0">
+            <a:extLst xmlns:a="http://schemas.openxmlformats.org/drawingml/2006/main">
+              <a:ext uri="{FF2B5EF4-FFF2-40B4-BE49-F238E27FC236}">
+                <a16:creationId xmlns:a16="http://schemas.microsoft.com/office/drawing/2014/main" id="{4E8A9435-E6FA-4368-B263-DC03C4E5BE63}"/>
+              </a:ext>
+            </a:extLst>
+          </p:cNvPr>
+          <p:cNvSpPr>
+            <a:spLocks xmlns:a="http://schemas.openxmlformats.org/drawingml/2006/main" noGrp="1"/>
+          </p:cNvSpPr>
+          <p:nvPr/>
+        </p:nvSpPr>
+        <p:spPr>
+          <a:xfrm xmlns:a="http://schemas.openxmlformats.org/drawingml/2006/main">
+            <a:off x="666750" y="1066800"/>
+            <a:ext cx="10858500" cy="1009650"/>
           </a:xfrm>
           <a:prstGeom xmlns:a="http://schemas.openxmlformats.org/drawingml/2006/main" prst="rect">
             <a:avLst/>
@@ -18721,57 +15709,108 @@
           </a:ln>
         </p:spPr>
         <p:txBody>
-          <a:bodyPr xmlns:a="http://schemas.openxmlformats.org/drawingml/2006/main" lIns="0" tIns="0" rIns="0" bIns="0" anchor="ctr">
-            <a:noAutofit/>
-          </a:bodyPr>
-          <a:lstStyle xmlns:a="http://schemas.openxmlformats.org/drawingml/2006/main"/>
+          <a:bodyPr xmlns:a="http://schemas.openxmlformats.org/drawingml/2006/main" lIns="0" tIns="0" rIns="0" bIns="0" anchor="t"/>
+          <a:lstStyle xmlns:a="http://schemas.openxmlformats.org/drawingml/2006/main">
+            <a:defPPr algn="l">
+              <a:defRPr sz="2400" b="0">
+                <a:solidFill>
+                  <a:srgbClr val="263746"/>
+                </a:solidFill>
+                <a:latin typeface="微软雅黑"/>
+                <a:ea typeface="微软雅黑"/>
+                <a:cs typeface="微软雅黑"/>
+              </a:defRPr>
+            </a:defPPr>
+          </a:lstStyle>
           <a:p xmlns:a="http://schemas.openxmlformats.org/drawingml/2006/main">
             <a:pPr algn="l">
-              <a:lnSpc>
-                <a:spcPct val="114000"/>
-              </a:lnSpc>
-              <a:buNone/>
-              <a:defRPr sz="2200" b="1">
-                <a:solidFill>
-                  <a:srgbClr val="1F4D78"/>
-                </a:solidFill>
-                <a:latin typeface="微软雅黑"/>
-                <a:ea typeface="微软雅黑"/>
-                <a:cs typeface="微软雅黑"/>
-              </a:defRPr>
-            </a:pPr>
-            <a:r>
-              <a:rPr sz="2200" b="1">
-                <a:solidFill>
-                  <a:srgbClr val="1F4D78"/>
-                </a:solidFill>
-                <a:latin typeface="微软雅黑"/>
-                <a:ea typeface="微软雅黑"/>
-                <a:cs typeface="微软雅黑"/>
-              </a:rPr>
-              <a:t>结构性问题</a:t>
-            </a:r>
-          </a:p>
-        </p:txBody>
-      </p:sp>
-      <p:sp>
-        <p:nvSpPr>
-          <p:cNvPr id="8" name="visual-3-2-p03-n1">
-            <a:extLst xmlns:a="http://schemas.openxmlformats.org/drawingml/2006/main">
-              <a:ext uri="{FF2B5EF4-FFF2-40B4-BE49-F238E27FC236}">
-                <a16:creationId xmlns:a16="http://schemas.microsoft.com/office/drawing/2014/main" id="{8865A8EC-60AE-4132-B8E1-C6C2157BAB7E}"/>
-              </a:ext>
-            </a:extLst>
-          </p:cNvPr>
-          <p:cNvSpPr>
-            <a:spLocks xmlns:a="http://schemas.openxmlformats.org/drawingml/2006/main" noGrp="1"/>
-          </p:cNvSpPr>
-          <p:nvPr/>
-        </p:nvSpPr>
-        <p:spPr>
-          <a:xfrm xmlns:a="http://schemas.openxmlformats.org/drawingml/2006/main">
-            <a:off x="3429000" y="1200150"/>
-            <a:ext cx="419100" cy="419100"/>
+              <a:defRPr sz="2400" b="0">
+                <a:solidFill>
+                  <a:srgbClr val="263746"/>
+                </a:solidFill>
+                <a:latin typeface="微软雅黑"/>
+                <a:ea typeface="微软雅黑"/>
+                <a:cs typeface="微软雅黑"/>
+              </a:defRPr>
+            </a:pPr>
+            <a:r>
+              <a:rPr sz="2400" b="0">
+                <a:solidFill>
+                  <a:srgbClr val="263746"/>
+                </a:solidFill>
+                <a:latin typeface="微软雅黑"/>
+                <a:ea typeface="微软雅黑"/>
+                <a:cs typeface="微软雅黑"/>
+              </a:rPr>
+              <a:t>Q-A｜跨学科理解效果；缺真实数据与测量</a:t>
+            </a:r>
+          </a:p>
+          <a:p xmlns:a="http://schemas.openxmlformats.org/drawingml/2006/main">
+            <a:pPr algn="l">
+              <a:defRPr sz="2400" b="0">
+                <a:solidFill>
+                  <a:srgbClr val="263746"/>
+                </a:solidFill>
+                <a:latin typeface="微软雅黑"/>
+                <a:ea typeface="微软雅黑"/>
+                <a:cs typeface="微软雅黑"/>
+              </a:defRPr>
+            </a:pPr>
+            <a:r>
+              <a:rPr sz="2400" b="0">
+                <a:solidFill>
+                  <a:srgbClr val="263746"/>
+                </a:solidFill>
+                <a:latin typeface="微软雅黑"/>
+                <a:ea typeface="微软雅黑"/>
+                <a:cs typeface="微软雅黑"/>
+              </a:rPr>
+              <a:t>Q-B｜坏记录拦截；有小型输入集，可 CPU 验证</a:t>
+            </a:r>
+          </a:p>
+          <a:p xmlns:a="http://schemas.openxmlformats.org/drawingml/2006/main">
+            <a:pPr algn="l">
+              <a:defRPr sz="2400" b="0">
+                <a:solidFill>
+                  <a:srgbClr val="263746"/>
+                </a:solidFill>
+                <a:latin typeface="微软雅黑"/>
+                <a:ea typeface="微软雅黑"/>
+                <a:cs typeface="微软雅黑"/>
+              </a:defRPr>
+            </a:pPr>
+            <a:r>
+              <a:rPr sz="2400" b="0">
+                <a:solidFill>
+                  <a:srgbClr val="263746"/>
+                </a:solidFill>
+                <a:latin typeface="微软雅黑"/>
+                <a:ea typeface="微软雅黑"/>
+                <a:cs typeface="微软雅黑"/>
+              </a:rPr>
+              <a:t>Q-C｜公开输出重标注；需说明评价独立性</a:t>
+            </a:r>
+          </a:p>
+        </p:txBody>
+      </p:sp>
+      <p:sp>
+        <p:nvSpPr>
+          <p:cNvPr id="3" name="judgment-body-1">
+            <a:extLst xmlns:a="http://schemas.openxmlformats.org/drawingml/2006/main">
+              <a:ext uri="{FF2B5EF4-FFF2-40B4-BE49-F238E27FC236}">
+                <a16:creationId xmlns:a16="http://schemas.microsoft.com/office/drawing/2014/main" id="{AA1E3526-19AD-4511-9ED7-4950F3B5B8DC}"/>
+              </a:ext>
+            </a:extLst>
+          </p:cNvPr>
+          <p:cNvSpPr>
+            <a:spLocks xmlns:a="http://schemas.openxmlformats.org/drawingml/2006/main" noGrp="1"/>
+          </p:cNvSpPr>
+          <p:nvPr/>
+        </p:nvSpPr>
+        <p:spPr>
+          <a:xfrm xmlns:a="http://schemas.openxmlformats.org/drawingml/2006/main">
+            <a:off x="666750" y="2238375"/>
+            <a:ext cx="10858500" cy="2076450"/>
           </a:xfrm>
           <a:prstGeom xmlns:a="http://schemas.openxmlformats.org/drawingml/2006/main" prst="rect">
             <a:avLst/>
@@ -18782,57 +15821,62 @@
           </a:ln>
         </p:spPr>
         <p:txBody>
-          <a:bodyPr xmlns:a="http://schemas.openxmlformats.org/drawingml/2006/main" lIns="0" tIns="0" rIns="0" bIns="0" anchor="ctr">
-            <a:noAutofit/>
-          </a:bodyPr>
-          <a:lstStyle xmlns:a="http://schemas.openxmlformats.org/drawingml/2006/main"/>
-          <a:p xmlns:a="http://schemas.openxmlformats.org/drawingml/2006/main">
-            <a:pPr algn="ctr">
-              <a:lnSpc>
-                <a:spcPct val="114000"/>
-              </a:lnSpc>
-              <a:buNone/>
-              <a:defRPr sz="1800" b="1">
-                <a:solidFill>
-                  <a:srgbClr val="C8161E"/>
-                </a:solidFill>
-                <a:latin typeface="微软雅黑"/>
-                <a:ea typeface="微软雅黑"/>
-                <a:cs typeface="微软雅黑"/>
-              </a:defRPr>
-            </a:pPr>
-            <a:r>
-              <a:rPr sz="1800" b="1">
-                <a:solidFill>
-                  <a:srgbClr val="C8161E"/>
-                </a:solidFill>
-                <a:latin typeface="微软雅黑"/>
-                <a:ea typeface="微软雅黑"/>
-                <a:cs typeface="微软雅黑"/>
-              </a:rPr>
-              <a:t>2</a:t>
-            </a:r>
-          </a:p>
-        </p:txBody>
-      </p:sp>
-      <p:sp>
-        <p:nvSpPr>
-          <p:cNvPr id="9" name="visual-3-3-p03-g1">
-            <a:extLst xmlns:a="http://schemas.openxmlformats.org/drawingml/2006/main">
-              <a:ext uri="{FF2B5EF4-FFF2-40B4-BE49-F238E27FC236}">
-                <a16:creationId xmlns:a16="http://schemas.microsoft.com/office/drawing/2014/main" id="{BEC6E2C8-76AE-4CC7-866B-E1A22D8BB899}"/>
-              </a:ext>
-            </a:extLst>
-          </p:cNvPr>
-          <p:cNvSpPr>
-            <a:spLocks xmlns:a="http://schemas.openxmlformats.org/drawingml/2006/main" noGrp="1"/>
-          </p:cNvSpPr>
-          <p:nvPr/>
-        </p:nvSpPr>
-        <p:spPr>
-          <a:xfrm xmlns:a="http://schemas.openxmlformats.org/drawingml/2006/main">
-            <a:off x="3952875" y="1123950"/>
-            <a:ext cx="2143125" cy="571500"/>
+          <a:bodyPr xmlns:a="http://schemas.openxmlformats.org/drawingml/2006/main" lIns="0" tIns="0" rIns="0" bIns="0" anchor="t"/>
+          <a:lstStyle xmlns:a="http://schemas.openxmlformats.org/drawingml/2006/main">
+            <a:defPPr algn="l">
+              <a:defRPr sz="2400" b="0">
+                <a:solidFill>
+                  <a:srgbClr val="263746"/>
+                </a:solidFill>
+                <a:latin typeface="微软雅黑"/>
+                <a:ea typeface="微软雅黑"/>
+                <a:cs typeface="微软雅黑"/>
+              </a:defRPr>
+            </a:defPPr>
+          </a:lstStyle>
+          <a:p xmlns:a="http://schemas.openxmlformats.org/drawingml/2006/main">
+            <a:pPr algn="l">
+              <a:defRPr sz="2400" b="0">
+                <a:solidFill>
+                  <a:srgbClr val="263746"/>
+                </a:solidFill>
+                <a:latin typeface="微软雅黑"/>
+                <a:ea typeface="微软雅黑"/>
+                <a:cs typeface="微软雅黑"/>
+              </a:defRPr>
+            </a:pPr>
+            <a:r>
+              <a:rPr sz="2400" b="0">
+                <a:solidFill>
+                  <a:srgbClr val="263746"/>
+                </a:solidFill>
+                <a:latin typeface="微软雅黑"/>
+                <a:ea typeface="微软雅黑"/>
+                <a:cs typeface="微软雅黑"/>
+              </a:rPr>
+              <a:t>比较：重要性、可检验性、成本、已有证据</a:t>
+            </a:r>
+          </a:p>
+        </p:txBody>
+      </p:sp>
+      <p:sp>
+        <p:nvSpPr>
+          <p:cNvPr id="4" name="judgment-body-2">
+            <a:extLst xmlns:a="http://schemas.openxmlformats.org/drawingml/2006/main">
+              <a:ext uri="{FF2B5EF4-FFF2-40B4-BE49-F238E27FC236}">
+                <a16:creationId xmlns:a16="http://schemas.microsoft.com/office/drawing/2014/main" id="{B1493831-6238-4A08-9EB3-1D860E7FD0AD}"/>
+              </a:ext>
+            </a:extLst>
+          </p:cNvPr>
+          <p:cNvSpPr>
+            <a:spLocks xmlns:a="http://schemas.openxmlformats.org/drawingml/2006/main" noGrp="1"/>
+          </p:cNvSpPr>
+          <p:nvPr/>
+        </p:nvSpPr>
+        <p:spPr>
+          <a:xfrm xmlns:a="http://schemas.openxmlformats.org/drawingml/2006/main">
+            <a:off x="666750" y="4495800"/>
+            <a:ext cx="10858500" cy="1409700"/>
           </a:xfrm>
           <a:prstGeom xmlns:a="http://schemas.openxmlformats.org/drawingml/2006/main" prst="rect">
             <a:avLst/>
@@ -18843,17 +15887,22 @@
           </a:ln>
         </p:spPr>
         <p:txBody>
-          <a:bodyPr xmlns:a="http://schemas.openxmlformats.org/drawingml/2006/main" lIns="0" tIns="0" rIns="0" bIns="0" anchor="ctr">
-            <a:noAutofit/>
-          </a:bodyPr>
-          <a:lstStyle xmlns:a="http://schemas.openxmlformats.org/drawingml/2006/main"/>
+          <a:bodyPr xmlns:a="http://schemas.openxmlformats.org/drawingml/2006/main" lIns="0" tIns="0" rIns="0" bIns="0" anchor="t"/>
+          <a:lstStyle xmlns:a="http://schemas.openxmlformats.org/drawingml/2006/main">
+            <a:defPPr algn="l">
+              <a:defRPr sz="2200" b="0">
+                <a:solidFill>
+                  <a:srgbClr val="1F4D78"/>
+                </a:solidFill>
+                <a:latin typeface="微软雅黑"/>
+                <a:ea typeface="微软雅黑"/>
+                <a:cs typeface="微软雅黑"/>
+              </a:defRPr>
+            </a:defPPr>
+          </a:lstStyle>
           <a:p xmlns:a="http://schemas.openxmlformats.org/drawingml/2006/main">
             <a:pPr algn="l">
-              <a:lnSpc>
-                <a:spcPct val="114000"/>
-              </a:lnSpc>
-              <a:buNone/>
-              <a:defRPr sz="2200" b="1">
+              <a:defRPr sz="2200" b="0">
                 <a:solidFill>
                   <a:srgbClr val="1F4D78"/>
                 </a:solidFill>
@@ -18863,7 +15912,7 @@
               </a:defRPr>
             </a:pPr>
             <a:r>
-              <a:rPr sz="2200" b="1">
+              <a:rPr sz="2200" b="0">
                 <a:solidFill>
                   <a:srgbClr val="1F4D78"/>
                 </a:solidFill>
@@ -18871,29 +15920,29 @@
                 <a:ea typeface="微软雅黑"/>
                 <a:cs typeface="微软雅黑"/>
               </a:rPr>
-              <a:t>非例边界</a:t>
-            </a:r>
-          </a:p>
-        </p:txBody>
-      </p:sp>
-      <p:sp>
-        <p:nvSpPr>
-          <p:cNvPr id="10" name="visual-3-4-p03-n2">
-            <a:extLst xmlns:a="http://schemas.openxmlformats.org/drawingml/2006/main">
-              <a:ext uri="{FF2B5EF4-FFF2-40B4-BE49-F238E27FC236}">
-                <a16:creationId xmlns:a16="http://schemas.microsoft.com/office/drawing/2014/main" id="{130C26C6-A922-42CF-A2A6-811DAB4D4194}"/>
-              </a:ext>
-            </a:extLst>
-          </p:cNvPr>
-          <p:cNvSpPr>
-            <a:spLocks xmlns:a="http://schemas.openxmlformats.org/drawingml/2006/main" noGrp="1"/>
-          </p:cNvSpPr>
-          <p:nvPr/>
-        </p:nvSpPr>
-        <p:spPr>
-          <a:xfrm xmlns:a="http://schemas.openxmlformats.org/drawingml/2006/main">
-            <a:off x="6286500" y="1200150"/>
-            <a:ext cx="419100" cy="419100"/>
+              <a:t>选题后写一个非例与可证伪命题；说明为何放弃另一题。</a:t>
+            </a:r>
+          </a:p>
+        </p:txBody>
+      </p:sp>
+      <p:sp>
+        <p:nvSpPr>
+          <p:cNvPr id="5" name="judgment-source">
+            <a:extLst xmlns:a="http://schemas.openxmlformats.org/drawingml/2006/main">
+              <a:ext uri="{FF2B5EF4-FFF2-40B4-BE49-F238E27FC236}">
+                <a16:creationId xmlns:a16="http://schemas.microsoft.com/office/drawing/2014/main" id="{751D660D-6250-4763-B469-BD67E99F5D81}"/>
+              </a:ext>
+            </a:extLst>
+          </p:cNvPr>
+          <p:cNvSpPr>
+            <a:spLocks xmlns:a="http://schemas.openxmlformats.org/drawingml/2006/main" noGrp="1"/>
+          </p:cNvSpPr>
+          <p:nvPr/>
+        </p:nvSpPr>
+        <p:spPr>
+          <a:xfrm xmlns:a="http://schemas.openxmlformats.org/drawingml/2006/main">
+            <a:off x="666750" y="6276975"/>
+            <a:ext cx="10572750" cy="209550"/>
           </a:xfrm>
           <a:prstGeom xmlns:a="http://schemas.openxmlformats.org/drawingml/2006/main" prst="rect">
             <a:avLst/>
@@ -18904,57 +15953,62 @@
           </a:ln>
         </p:spPr>
         <p:txBody>
-          <a:bodyPr xmlns:a="http://schemas.openxmlformats.org/drawingml/2006/main" lIns="0" tIns="0" rIns="0" bIns="0" anchor="ctr">
-            <a:noAutofit/>
-          </a:bodyPr>
-          <a:lstStyle xmlns:a="http://schemas.openxmlformats.org/drawingml/2006/main"/>
-          <a:p xmlns:a="http://schemas.openxmlformats.org/drawingml/2006/main">
-            <a:pPr algn="ctr">
-              <a:lnSpc>
-                <a:spcPct val="114000"/>
-              </a:lnSpc>
-              <a:buNone/>
-              <a:defRPr sz="1800" b="1">
-                <a:solidFill>
-                  <a:srgbClr val="C8161E"/>
-                </a:solidFill>
-                <a:latin typeface="微软雅黑"/>
-                <a:ea typeface="微软雅黑"/>
-                <a:cs typeface="微软雅黑"/>
-              </a:defRPr>
-            </a:pPr>
-            <a:r>
-              <a:rPr sz="1800" b="1">
-                <a:solidFill>
-                  <a:srgbClr val="C8161E"/>
-                </a:solidFill>
-                <a:latin typeface="微软雅黑"/>
-                <a:ea typeface="微软雅黑"/>
-                <a:cs typeface="微软雅黑"/>
-              </a:rPr>
-              <a:t>3</a:t>
-            </a:r>
-          </a:p>
-        </p:txBody>
-      </p:sp>
-      <p:sp>
-        <p:nvSpPr>
-          <p:cNvPr id="11" name="visual-3-5-p03-g2">
-            <a:extLst xmlns:a="http://schemas.openxmlformats.org/drawingml/2006/main">
-              <a:ext uri="{FF2B5EF4-FFF2-40B4-BE49-F238E27FC236}">
-                <a16:creationId xmlns:a16="http://schemas.microsoft.com/office/drawing/2014/main" id="{553DD785-660D-467B-85AA-AA924794AF35}"/>
-              </a:ext>
-            </a:extLst>
-          </p:cNvPr>
-          <p:cNvSpPr>
-            <a:spLocks xmlns:a="http://schemas.openxmlformats.org/drawingml/2006/main" noGrp="1"/>
-          </p:cNvSpPr>
-          <p:nvPr/>
-        </p:nvSpPr>
-        <p:spPr>
-          <a:xfrm xmlns:a="http://schemas.openxmlformats.org/drawingml/2006/main">
-            <a:off x="6810375" y="1123950"/>
-            <a:ext cx="2143125" cy="571500"/>
+          <a:bodyPr xmlns:a="http://schemas.openxmlformats.org/drawingml/2006/main" lIns="0" tIns="0" rIns="0" bIns="0" anchor="t"/>
+          <a:lstStyle xmlns:a="http://schemas.openxmlformats.org/drawingml/2006/main">
+            <a:defPPr algn="l">
+              <a:defRPr sz="1100" b="0">
+                <a:solidFill>
+                  <a:srgbClr val="667684"/>
+                </a:solidFill>
+                <a:latin typeface="微软雅黑"/>
+                <a:ea typeface="微软雅黑"/>
+                <a:cs typeface="微软雅黑"/>
+              </a:defRPr>
+            </a:defPPr>
+          </a:lstStyle>
+          <a:p xmlns:a="http://schemas.openxmlformats.org/drawingml/2006/main">
+            <a:pPr algn="l">
+              <a:defRPr sz="1100" b="0">
+                <a:solidFill>
+                  <a:srgbClr val="667684"/>
+                </a:solidFill>
+                <a:latin typeface="微软雅黑"/>
+                <a:ea typeface="微软雅黑"/>
+                <a:cs typeface="微软雅黑"/>
+              </a:defRPr>
+            </a:pPr>
+            <a:r>
+              <a:rPr sz="1100" b="0">
+                <a:solidFill>
+                  <a:srgbClr val="667684"/>
+                </a:solidFill>
+                <a:latin typeface="微软雅黑"/>
+                <a:ea typeface="微软雅黑"/>
+                <a:cs typeface="微软雅黑"/>
+              </a:rPr>
+              <a:t>来源：本课判断任务与讲义；构造材料及真实来源按材料包标识</a:t>
+            </a:r>
+          </a:p>
+        </p:txBody>
+      </p:sp>
+      <p:sp>
+        <p:nvSpPr>
+          <p:cNvPr id="6" name="judgment-page">
+            <a:extLst xmlns:a="http://schemas.openxmlformats.org/drawingml/2006/main">
+              <a:ext uri="{FF2B5EF4-FFF2-40B4-BE49-F238E27FC236}">
+                <a16:creationId xmlns:a16="http://schemas.microsoft.com/office/drawing/2014/main" id="{CE101E65-EE0E-4460-B012-3DE82D8C7653}"/>
+              </a:ext>
+            </a:extLst>
+          </p:cNvPr>
+          <p:cNvSpPr>
+            <a:spLocks xmlns:a="http://schemas.openxmlformats.org/drawingml/2006/main" noGrp="1"/>
+          </p:cNvSpPr>
+          <p:nvPr/>
+        </p:nvSpPr>
+        <p:spPr>
+          <a:xfrm xmlns:a="http://schemas.openxmlformats.org/drawingml/2006/main">
+            <a:off x="11715750" y="6562725"/>
+            <a:ext cx="238125" cy="171450"/>
           </a:xfrm>
           <a:prstGeom xmlns:a="http://schemas.openxmlformats.org/drawingml/2006/main" prst="rect">
             <a:avLst/>
@@ -18965,604 +16019,40 @@
           </a:ln>
         </p:spPr>
         <p:txBody>
-          <a:bodyPr xmlns:a="http://schemas.openxmlformats.org/drawingml/2006/main" lIns="0" tIns="0" rIns="0" bIns="0" anchor="ctr">
-            <a:noAutofit/>
-          </a:bodyPr>
-          <a:lstStyle xmlns:a="http://schemas.openxmlformats.org/drawingml/2006/main"/>
+          <a:bodyPr xmlns:a="http://schemas.openxmlformats.org/drawingml/2006/main" lIns="0" tIns="0" rIns="0" bIns="0" anchor="t"/>
+          <a:lstStyle xmlns:a="http://schemas.openxmlformats.org/drawingml/2006/main">
+            <a:defPPr algn="l">
+              <a:defRPr sz="900" b="0">
+                <a:solidFill>
+                  <a:srgbClr val="A5A5A5"/>
+                </a:solidFill>
+                <a:latin typeface="微软雅黑"/>
+                <a:ea typeface="微软雅黑"/>
+                <a:cs typeface="微软雅黑"/>
+              </a:defRPr>
+            </a:defPPr>
+          </a:lstStyle>
           <a:p xmlns:a="http://schemas.openxmlformats.org/drawingml/2006/main">
             <a:pPr algn="l">
-              <a:lnSpc>
-                <a:spcPct val="114000"/>
-              </a:lnSpc>
-              <a:buNone/>
-              <a:defRPr sz="2200" b="1">
-                <a:solidFill>
-                  <a:srgbClr val="1F4D78"/>
-                </a:solidFill>
-                <a:latin typeface="微软雅黑"/>
-                <a:ea typeface="微软雅黑"/>
-                <a:cs typeface="微软雅黑"/>
-              </a:defRPr>
-            </a:pPr>
-            <a:r>
-              <a:rPr sz="2200" b="1">
-                <a:solidFill>
-                  <a:srgbClr val="1F4D78"/>
-                </a:solidFill>
-                <a:latin typeface="微软雅黑"/>
-                <a:ea typeface="微软雅黑"/>
-                <a:cs typeface="微软雅黑"/>
-              </a:rPr>
-              <a:t>可证伪命题</a:t>
-            </a:r>
-          </a:p>
-        </p:txBody>
-      </p:sp>
-      <p:sp>
-        <p:nvSpPr>
-          <p:cNvPr id="12" name="visual-3-6-p03-n3">
-            <a:extLst xmlns:a="http://schemas.openxmlformats.org/drawingml/2006/main">
-              <a:ext uri="{FF2B5EF4-FFF2-40B4-BE49-F238E27FC236}">
-                <a16:creationId xmlns:a16="http://schemas.microsoft.com/office/drawing/2014/main" id="{5B0FF6F5-0BE8-4ED3-A63B-39272049B566}"/>
-              </a:ext>
-            </a:extLst>
-          </p:cNvPr>
-          <p:cNvSpPr>
-            <a:spLocks xmlns:a="http://schemas.openxmlformats.org/drawingml/2006/main" noGrp="1"/>
-          </p:cNvSpPr>
-          <p:nvPr/>
-        </p:nvSpPr>
-        <p:spPr>
-          <a:xfrm xmlns:a="http://schemas.openxmlformats.org/drawingml/2006/main">
-            <a:off x="571500" y="2152650"/>
-            <a:ext cx="419100" cy="419100"/>
-          </a:xfrm>
-          <a:prstGeom xmlns:a="http://schemas.openxmlformats.org/drawingml/2006/main" prst="rect">
-            <a:avLst/>
-          </a:prstGeom>
-          <a:noFill xmlns:a="http://schemas.openxmlformats.org/drawingml/2006/main"/>
-          <a:ln xmlns:a="http://schemas.openxmlformats.org/drawingml/2006/main" w="0">
-            <a:noFill/>
-          </a:ln>
-        </p:spPr>
-        <p:txBody>
-          <a:bodyPr xmlns:a="http://schemas.openxmlformats.org/drawingml/2006/main" lIns="0" tIns="0" rIns="0" bIns="0" anchor="ctr">
-            <a:noAutofit/>
-          </a:bodyPr>
-          <a:lstStyle xmlns:a="http://schemas.openxmlformats.org/drawingml/2006/main"/>
-          <a:p xmlns:a="http://schemas.openxmlformats.org/drawingml/2006/main">
-            <a:pPr algn="ctr">
-              <a:lnSpc>
-                <a:spcPct val="114000"/>
-              </a:lnSpc>
-              <a:buNone/>
-              <a:defRPr sz="1800" b="1">
-                <a:solidFill>
-                  <a:srgbClr val="C8161E"/>
-                </a:solidFill>
-                <a:latin typeface="微软雅黑"/>
-                <a:ea typeface="微软雅黑"/>
-                <a:cs typeface="微软雅黑"/>
-              </a:defRPr>
-            </a:pPr>
-            <a:r>
-              <a:rPr sz="1800" b="1">
-                <a:solidFill>
-                  <a:srgbClr val="C8161E"/>
-                </a:solidFill>
-                <a:latin typeface="微软雅黑"/>
-                <a:ea typeface="微软雅黑"/>
-                <a:cs typeface="微软雅黑"/>
-              </a:rPr>
-              <a:t>4</a:t>
-            </a:r>
-          </a:p>
-        </p:txBody>
-      </p:sp>
-      <p:sp>
-        <p:nvSpPr>
-          <p:cNvPr id="13" name="visual-3-7-p03-g3">
-            <a:extLst xmlns:a="http://schemas.openxmlformats.org/drawingml/2006/main">
-              <a:ext uri="{FF2B5EF4-FFF2-40B4-BE49-F238E27FC236}">
-                <a16:creationId xmlns:a16="http://schemas.microsoft.com/office/drawing/2014/main" id="{F82F08B3-FE89-49FD-8A8C-F23EAA064205}"/>
-              </a:ext>
-            </a:extLst>
-          </p:cNvPr>
-          <p:cNvSpPr>
-            <a:spLocks xmlns:a="http://schemas.openxmlformats.org/drawingml/2006/main" noGrp="1"/>
-          </p:cNvSpPr>
-          <p:nvPr/>
-        </p:nvSpPr>
-        <p:spPr>
-          <a:xfrm xmlns:a="http://schemas.openxmlformats.org/drawingml/2006/main">
-            <a:off x="1095375" y="2076450"/>
-            <a:ext cx="2143125" cy="571500"/>
-          </a:xfrm>
-          <a:prstGeom xmlns:a="http://schemas.openxmlformats.org/drawingml/2006/main" prst="rect">
-            <a:avLst/>
-          </a:prstGeom>
-          <a:noFill xmlns:a="http://schemas.openxmlformats.org/drawingml/2006/main"/>
-          <a:ln xmlns:a="http://schemas.openxmlformats.org/drawingml/2006/main" w="0">
-            <a:noFill/>
-          </a:ln>
-        </p:spPr>
-        <p:txBody>
-          <a:bodyPr xmlns:a="http://schemas.openxmlformats.org/drawingml/2006/main" lIns="0" tIns="0" rIns="0" bIns="0" anchor="ctr">
-            <a:noAutofit/>
-          </a:bodyPr>
-          <a:lstStyle xmlns:a="http://schemas.openxmlformats.org/drawingml/2006/main"/>
-          <a:p xmlns:a="http://schemas.openxmlformats.org/drawingml/2006/main">
-            <a:pPr algn="l">
-              <a:lnSpc>
-                <a:spcPct val="114000"/>
-              </a:lnSpc>
-              <a:buNone/>
-              <a:defRPr sz="2200" b="1">
-                <a:solidFill>
-                  <a:srgbClr val="1F4D78"/>
-                </a:solidFill>
-                <a:latin typeface="微软雅黑"/>
-                <a:ea typeface="微软雅黑"/>
-                <a:cs typeface="微软雅黑"/>
-              </a:defRPr>
-            </a:pPr>
-            <a:r>
-              <a:rPr sz="2200" b="1">
-                <a:solidFill>
-                  <a:srgbClr val="1F4D78"/>
-                </a:solidFill>
-                <a:latin typeface="微软雅黑"/>
-                <a:ea typeface="微软雅黑"/>
-                <a:cs typeface="微软雅黑"/>
-              </a:rPr>
-              <a:t>第一性原理推导</a:t>
-            </a:r>
-          </a:p>
-        </p:txBody>
-      </p:sp>
-      <p:sp>
-        <p:nvSpPr>
-          <p:cNvPr id="14" name="visual-3-8-p03-n4">
-            <a:extLst xmlns:a="http://schemas.openxmlformats.org/drawingml/2006/main">
-              <a:ext uri="{FF2B5EF4-FFF2-40B4-BE49-F238E27FC236}">
-                <a16:creationId xmlns:a16="http://schemas.microsoft.com/office/drawing/2014/main" id="{E2E326AA-81C0-4AE3-ABCF-E527FFBD960A}"/>
-              </a:ext>
-            </a:extLst>
-          </p:cNvPr>
-          <p:cNvSpPr>
-            <a:spLocks xmlns:a="http://schemas.openxmlformats.org/drawingml/2006/main" noGrp="1"/>
-          </p:cNvSpPr>
-          <p:nvPr/>
-        </p:nvSpPr>
-        <p:spPr>
-          <a:xfrm xmlns:a="http://schemas.openxmlformats.org/drawingml/2006/main">
-            <a:off x="3429000" y="2152650"/>
-            <a:ext cx="419100" cy="419100"/>
-          </a:xfrm>
-          <a:prstGeom xmlns:a="http://schemas.openxmlformats.org/drawingml/2006/main" prst="rect">
-            <a:avLst/>
-          </a:prstGeom>
-          <a:noFill xmlns:a="http://schemas.openxmlformats.org/drawingml/2006/main"/>
-          <a:ln xmlns:a="http://schemas.openxmlformats.org/drawingml/2006/main" w="0">
-            <a:noFill/>
-          </a:ln>
-        </p:spPr>
-        <p:txBody>
-          <a:bodyPr xmlns:a="http://schemas.openxmlformats.org/drawingml/2006/main" lIns="0" tIns="0" rIns="0" bIns="0" anchor="ctr">
-            <a:noAutofit/>
-          </a:bodyPr>
-          <a:lstStyle xmlns:a="http://schemas.openxmlformats.org/drawingml/2006/main"/>
-          <a:p xmlns:a="http://schemas.openxmlformats.org/drawingml/2006/main">
-            <a:pPr algn="ctr">
-              <a:lnSpc>
-                <a:spcPct val="114000"/>
-              </a:lnSpc>
-              <a:buNone/>
-              <a:defRPr sz="1800" b="1">
-                <a:solidFill>
-                  <a:srgbClr val="C8161E"/>
-                </a:solidFill>
-                <a:latin typeface="微软雅黑"/>
-                <a:ea typeface="微软雅黑"/>
-                <a:cs typeface="微软雅黑"/>
-              </a:defRPr>
-            </a:pPr>
-            <a:r>
-              <a:rPr sz="1800" b="1">
-                <a:solidFill>
-                  <a:srgbClr val="C8161E"/>
-                </a:solidFill>
-                <a:latin typeface="微软雅黑"/>
-                <a:ea typeface="微软雅黑"/>
-                <a:cs typeface="微软雅黑"/>
-              </a:rPr>
-              <a:t>5</a:t>
-            </a:r>
-          </a:p>
-        </p:txBody>
-      </p:sp>
-      <p:sp>
-        <p:nvSpPr>
-          <p:cNvPr id="15" name="visual-3-9-p03-g4">
-            <a:extLst xmlns:a="http://schemas.openxmlformats.org/drawingml/2006/main">
-              <a:ext uri="{FF2B5EF4-FFF2-40B4-BE49-F238E27FC236}">
-                <a16:creationId xmlns:a16="http://schemas.microsoft.com/office/drawing/2014/main" id="{5883A3BE-68F1-4C9F-8E9B-F0D04CE86EBC}"/>
-              </a:ext>
-            </a:extLst>
-          </p:cNvPr>
-          <p:cNvSpPr>
-            <a:spLocks xmlns:a="http://schemas.openxmlformats.org/drawingml/2006/main" noGrp="1"/>
-          </p:cNvSpPr>
-          <p:nvPr/>
-        </p:nvSpPr>
-        <p:spPr>
-          <a:xfrm xmlns:a="http://schemas.openxmlformats.org/drawingml/2006/main">
-            <a:off x="3952875" y="2076450"/>
-            <a:ext cx="2143125" cy="571500"/>
-          </a:xfrm>
-          <a:prstGeom xmlns:a="http://schemas.openxmlformats.org/drawingml/2006/main" prst="rect">
-            <a:avLst/>
-          </a:prstGeom>
-          <a:noFill xmlns:a="http://schemas.openxmlformats.org/drawingml/2006/main"/>
-          <a:ln xmlns:a="http://schemas.openxmlformats.org/drawingml/2006/main" w="0">
-            <a:noFill/>
-          </a:ln>
-        </p:spPr>
-        <p:txBody>
-          <a:bodyPr xmlns:a="http://schemas.openxmlformats.org/drawingml/2006/main" lIns="0" tIns="0" rIns="0" bIns="0" anchor="ctr">
-            <a:noAutofit/>
-          </a:bodyPr>
-          <a:lstStyle xmlns:a="http://schemas.openxmlformats.org/drawingml/2006/main"/>
-          <a:p xmlns:a="http://schemas.openxmlformats.org/drawingml/2006/main">
-            <a:pPr algn="l">
-              <a:lnSpc>
-                <a:spcPct val="114000"/>
-              </a:lnSpc>
-              <a:buNone/>
-              <a:defRPr sz="2000" b="0">
-                <a:solidFill>
-                  <a:srgbClr val="1F4D78"/>
-                </a:solidFill>
-                <a:latin typeface="微软雅黑"/>
-                <a:ea typeface="微软雅黑"/>
-                <a:cs typeface="微软雅黑"/>
-              </a:defRPr>
-            </a:pPr>
-            <a:r>
-              <a:rPr sz="2000" b="0">
-                <a:solidFill>
-                  <a:srgbClr val="1F4D78"/>
-                </a:solidFill>
-                <a:latin typeface="微软雅黑"/>
-                <a:ea typeface="微软雅黑"/>
-                <a:cs typeface="微软雅黑"/>
-              </a:rPr>
-              <a:t>来源交叉检查 + 重要性</a:t>
-            </a:r>
-          </a:p>
-        </p:txBody>
-      </p:sp>
-      <p:sp>
-        <p:nvSpPr>
-          <p:cNvPr id="16" name="visual-3-10-p03-n5">
-            <a:extLst xmlns:a="http://schemas.openxmlformats.org/drawingml/2006/main">
-              <a:ext uri="{FF2B5EF4-FFF2-40B4-BE49-F238E27FC236}">
-                <a16:creationId xmlns:a16="http://schemas.microsoft.com/office/drawing/2014/main" id="{95CEDE7D-4B84-457C-A253-C98C744C3E15}"/>
-              </a:ext>
-            </a:extLst>
-          </p:cNvPr>
-          <p:cNvSpPr>
-            <a:spLocks xmlns:a="http://schemas.openxmlformats.org/drawingml/2006/main" noGrp="1"/>
-          </p:cNvSpPr>
-          <p:nvPr/>
-        </p:nvSpPr>
-        <p:spPr>
-          <a:xfrm xmlns:a="http://schemas.openxmlformats.org/drawingml/2006/main">
-            <a:off x="6286500" y="2152650"/>
-            <a:ext cx="419100" cy="419100"/>
-          </a:xfrm>
-          <a:prstGeom xmlns:a="http://schemas.openxmlformats.org/drawingml/2006/main" prst="rect">
-            <a:avLst/>
-          </a:prstGeom>
-          <a:noFill xmlns:a="http://schemas.openxmlformats.org/drawingml/2006/main"/>
-          <a:ln xmlns:a="http://schemas.openxmlformats.org/drawingml/2006/main" w="0">
-            <a:noFill/>
-          </a:ln>
-        </p:spPr>
-        <p:txBody>
-          <a:bodyPr xmlns:a="http://schemas.openxmlformats.org/drawingml/2006/main" lIns="0" tIns="0" rIns="0" bIns="0" anchor="ctr">
-            <a:noAutofit/>
-          </a:bodyPr>
-          <a:lstStyle xmlns:a="http://schemas.openxmlformats.org/drawingml/2006/main"/>
-          <a:p xmlns:a="http://schemas.openxmlformats.org/drawingml/2006/main">
-            <a:pPr algn="ctr">
-              <a:lnSpc>
-                <a:spcPct val="114000"/>
-              </a:lnSpc>
-              <a:buNone/>
-              <a:defRPr sz="1800" b="1">
-                <a:solidFill>
-                  <a:srgbClr val="C8161E"/>
-                </a:solidFill>
-                <a:latin typeface="微软雅黑"/>
-                <a:ea typeface="微软雅黑"/>
-                <a:cs typeface="微软雅黑"/>
-              </a:defRPr>
-            </a:pPr>
-            <a:r>
-              <a:rPr sz="1800" b="1">
-                <a:solidFill>
-                  <a:srgbClr val="C8161E"/>
-                </a:solidFill>
-                <a:latin typeface="微软雅黑"/>
-                <a:ea typeface="微软雅黑"/>
-                <a:cs typeface="微软雅黑"/>
-              </a:rPr>
-              <a:t>6</a:t>
-            </a:r>
-          </a:p>
-        </p:txBody>
-      </p:sp>
-      <p:sp>
-        <p:nvSpPr>
-          <p:cNvPr id="17" name="visual-3-11-p03-g5">
-            <a:extLst xmlns:a="http://schemas.openxmlformats.org/drawingml/2006/main">
-              <a:ext uri="{FF2B5EF4-FFF2-40B4-BE49-F238E27FC236}">
-                <a16:creationId xmlns:a16="http://schemas.microsoft.com/office/drawing/2014/main" id="{6202C148-8A79-4F71-8062-6BECBBF6CAF8}"/>
-              </a:ext>
-            </a:extLst>
-          </p:cNvPr>
-          <p:cNvSpPr>
-            <a:spLocks xmlns:a="http://schemas.openxmlformats.org/drawingml/2006/main" noGrp="1"/>
-          </p:cNvSpPr>
-          <p:nvPr/>
-        </p:nvSpPr>
-        <p:spPr>
-          <a:xfrm xmlns:a="http://schemas.openxmlformats.org/drawingml/2006/main">
-            <a:off x="6810375" y="2076450"/>
-            <a:ext cx="2143125" cy="571500"/>
-          </a:xfrm>
-          <a:prstGeom xmlns:a="http://schemas.openxmlformats.org/drawingml/2006/main" prst="rect">
-            <a:avLst/>
-          </a:prstGeom>
-          <a:noFill xmlns:a="http://schemas.openxmlformats.org/drawingml/2006/main"/>
-          <a:ln xmlns:a="http://schemas.openxmlformats.org/drawingml/2006/main" w="0">
-            <a:noFill/>
-          </a:ln>
-        </p:spPr>
-        <p:txBody>
-          <a:bodyPr xmlns:a="http://schemas.openxmlformats.org/drawingml/2006/main" lIns="0" tIns="0" rIns="0" bIns="0" anchor="ctr">
-            <a:noAutofit/>
-          </a:bodyPr>
-          <a:lstStyle xmlns:a="http://schemas.openxmlformats.org/drawingml/2006/main"/>
-          <a:p xmlns:a="http://schemas.openxmlformats.org/drawingml/2006/main">
-            <a:pPr algn="l">
-              <a:lnSpc>
-                <a:spcPct val="114000"/>
-              </a:lnSpc>
-              <a:buNone/>
-              <a:defRPr sz="2000" b="0">
-                <a:solidFill>
-                  <a:srgbClr val="1F4D78"/>
-                </a:solidFill>
-                <a:latin typeface="微软雅黑"/>
-                <a:ea typeface="微软雅黑"/>
-                <a:cs typeface="微软雅黑"/>
-              </a:defRPr>
-            </a:pPr>
-            <a:r>
-              <a:rPr sz="2000" b="0">
-                <a:solidFill>
-                  <a:srgbClr val="1F4D78"/>
-                </a:solidFill>
-                <a:latin typeface="微软雅黑"/>
-                <a:ea typeface="微软雅黑"/>
-                <a:cs typeface="微软雅黑"/>
-              </a:rPr>
-              <a:t>候选题比较与门自查</a:t>
-            </a:r>
-          </a:p>
-        </p:txBody>
-      </p:sp>
-      <p:sp>
-        <p:nvSpPr>
-          <p:cNvPr id="18" name="visual-3-12-p03-output">
-            <a:extLst xmlns:a="http://schemas.openxmlformats.org/drawingml/2006/main">
-              <a:ext uri="{FF2B5EF4-FFF2-40B4-BE49-F238E27FC236}">
-                <a16:creationId xmlns:a16="http://schemas.microsoft.com/office/drawing/2014/main" id="{12DE893E-32EB-4BC8-8760-EBE0EAC0B48D}"/>
-              </a:ext>
-            </a:extLst>
-          </p:cNvPr>
-          <p:cNvSpPr>
-            <a:spLocks xmlns:a="http://schemas.openxmlformats.org/drawingml/2006/main" noGrp="1"/>
-          </p:cNvSpPr>
-          <p:nvPr/>
-        </p:nvSpPr>
-        <p:spPr>
-          <a:xfrm xmlns:a="http://schemas.openxmlformats.org/drawingml/2006/main">
-            <a:off x="9048750" y="1143000"/>
-            <a:ext cx="2476500" cy="2095500"/>
-          </a:xfrm>
-          <a:prstGeom xmlns:a="http://schemas.openxmlformats.org/drawingml/2006/main" prst="rect">
-            <a:avLst/>
-          </a:prstGeom>
-          <a:noFill xmlns:a="http://schemas.openxmlformats.org/drawingml/2006/main"/>
-          <a:ln xmlns:a="http://schemas.openxmlformats.org/drawingml/2006/main" w="0">
-            <a:noFill/>
-          </a:ln>
-        </p:spPr>
-        <p:txBody>
-          <a:bodyPr xmlns:a="http://schemas.openxmlformats.org/drawingml/2006/main" lIns="0" tIns="0" rIns="0" bIns="0" anchor="t">
-            <a:noAutofit/>
-          </a:bodyPr>
-          <a:lstStyle xmlns:a="http://schemas.openxmlformats.org/drawingml/2006/main"/>
-          <a:p xmlns:a="http://schemas.openxmlformats.org/drawingml/2006/main">
-            <a:pPr algn="l">
-              <a:lnSpc>
-                <a:spcPct val="105000"/>
-              </a:lnSpc>
-              <a:buNone/>
-              <a:defRPr sz="1800" b="0">
-                <a:solidFill>
-                  <a:srgbClr val="27333D"/>
-                </a:solidFill>
-                <a:latin typeface="Consolas"/>
-                <a:ea typeface="Consolas"/>
-                <a:cs typeface="Consolas"/>
-              </a:defRPr>
-            </a:pPr>
-            <a:r>
-              <a:rPr sz="1800" b="0">
-                <a:solidFill>
-                  <a:srgbClr val="27333D"/>
-                </a:solidFill>
-                <a:latin typeface="Consolas"/>
-                <a:ea typeface="Consolas"/>
-                <a:cs typeface="Consolas"/>
-              </a:rPr>
-              <a:t>课堂最小产出</a:t>
-            </a:r>
-          </a:p>
-          <a:p xmlns:a="http://schemas.openxmlformats.org/drawingml/2006/main">
-            <a:pPr algn="l">
-              <a:lnSpc>
-                <a:spcPct val="105000"/>
-              </a:lnSpc>
-              <a:buNone/>
-              <a:defRPr sz="1800" b="0">
-                <a:solidFill>
-                  <a:srgbClr val="27333D"/>
-                </a:solidFill>
-                <a:latin typeface="Consolas"/>
-                <a:ea typeface="Consolas"/>
-                <a:cs typeface="Consolas"/>
-              </a:defRPr>
-            </a:pPr>
-            <a:r>
-              <a:rPr sz="1800" b="0">
-                <a:solidFill>
-                  <a:srgbClr val="27333D"/>
-                </a:solidFill>
-                <a:latin typeface="Consolas"/>
-                <a:ea typeface="Consolas"/>
-                <a:cs typeface="Consolas"/>
-              </a:rPr>
-              <a:t>problem-definition.md</a:t>
-            </a:r>
-          </a:p>
-          <a:p xmlns:a="http://schemas.openxmlformats.org/drawingml/2006/main">
-            <a:pPr algn="l">
-              <a:lnSpc>
-                <a:spcPct val="105000"/>
-              </a:lnSpc>
-              <a:buNone/>
-              <a:defRPr sz="1800" b="0">
-                <a:solidFill>
-                  <a:srgbClr val="27333D"/>
-                </a:solidFill>
-                <a:latin typeface="Consolas"/>
-                <a:ea typeface="Consolas"/>
-                <a:cs typeface="Consolas"/>
-              </a:defRPr>
-            </a:pPr>
-            <a:r>
-              <a:rPr sz="1800" b="0">
-                <a:solidFill>
-                  <a:srgbClr val="27333D"/>
-                </a:solidFill>
-                <a:latin typeface="Consolas"/>
-                <a:ea typeface="Consolas"/>
-                <a:cs typeface="Consolas"/>
-              </a:rPr>
-              <a:t>更新版 +</a:t>
-            </a:r>
-          </a:p>
-          <a:p xmlns:a="http://schemas.openxmlformats.org/drawingml/2006/main">
-            <a:pPr algn="l">
-              <a:lnSpc>
-                <a:spcPct val="105000"/>
-              </a:lnSpc>
-              <a:buNone/>
-              <a:defRPr sz="1800" b="0">
-                <a:solidFill>
-                  <a:srgbClr val="27333D"/>
-                </a:solidFill>
-                <a:latin typeface="Consolas"/>
-                <a:ea typeface="Consolas"/>
-                <a:cs typeface="Consolas"/>
-              </a:defRPr>
-            </a:pPr>
-            <a:r>
-              <a:rPr sz="1800" b="0">
-                <a:solidFill>
-                  <a:srgbClr val="27333D"/>
-                </a:solidFill>
-                <a:latin typeface="Consolas"/>
-                <a:ea typeface="Consolas"/>
-                <a:cs typeface="Consolas"/>
-              </a:rPr>
-              <a:t>第一性原理推导初版</a:t>
-            </a:r>
-          </a:p>
-        </p:txBody>
-      </p:sp>
-      <p:sp>
-        <p:nvSpPr>
-          <p:cNvPr id="19" name="visual-3-13-p03-gate">
-            <a:extLst xmlns:a="http://schemas.openxmlformats.org/drawingml/2006/main">
-              <a:ext uri="{FF2B5EF4-FFF2-40B4-BE49-F238E27FC236}">
-                <a16:creationId xmlns:a16="http://schemas.microsoft.com/office/drawing/2014/main" id="{BE3D09C9-AF76-453D-91BF-25A6DC5CD6D4}"/>
-              </a:ext>
-            </a:extLst>
-          </p:cNvPr>
-          <p:cNvSpPr>
-            <a:spLocks xmlns:a="http://schemas.openxmlformats.org/drawingml/2006/main" noGrp="1"/>
-          </p:cNvSpPr>
-          <p:nvPr/>
-        </p:nvSpPr>
-        <p:spPr>
-          <a:xfrm xmlns:a="http://schemas.openxmlformats.org/drawingml/2006/main">
-            <a:off x="1666875" y="3905250"/>
-            <a:ext cx="8858250" cy="742950"/>
-          </a:xfrm>
-          <a:prstGeom xmlns:a="http://schemas.openxmlformats.org/drawingml/2006/main" prst="rect">
-            <a:avLst/>
-          </a:prstGeom>
-          <a:noFill xmlns:a="http://schemas.openxmlformats.org/drawingml/2006/main"/>
-          <a:ln xmlns:a="http://schemas.openxmlformats.org/drawingml/2006/main" w="0">
-            <a:noFill/>
-          </a:ln>
-        </p:spPr>
-        <p:txBody>
-          <a:bodyPr xmlns:a="http://schemas.openxmlformats.org/drawingml/2006/main" lIns="0" tIns="0" rIns="0" bIns="0" anchor="t">
-            <a:noAutofit/>
-          </a:bodyPr>
-          <a:lstStyle xmlns:a="http://schemas.openxmlformats.org/drawingml/2006/main"/>
-          <a:p xmlns:a="http://schemas.openxmlformats.org/drawingml/2006/main">
-            <a:pPr algn="l">
-              <a:lnSpc>
-                <a:spcPct val="114000"/>
-              </a:lnSpc>
-              <a:buNone/>
-              <a:defRPr sz="2400" b="0">
-                <a:solidFill>
-                  <a:srgbClr val="27333D"/>
-                </a:solidFill>
-                <a:latin typeface="微软雅黑"/>
-                <a:ea typeface="微软雅黑"/>
-                <a:cs typeface="微软雅黑"/>
-              </a:defRPr>
-            </a:pPr>
-            <a:r>
-              <a:rPr sz="2400" b="0">
-                <a:solidFill>
-                  <a:srgbClr val="27333D"/>
-                </a:solidFill>
-                <a:latin typeface="微软雅黑"/>
-                <a:ea typeface="微软雅黑"/>
-                <a:cs typeface="微软雅黑"/>
-              </a:rPr>
-              <a:t>课后只提交一次问题门材料包；不重做已通过的累计工件。</a:t>
+              <a:defRPr sz="900" b="0">
+                <a:solidFill>
+                  <a:srgbClr val="A5A5A5"/>
+                </a:solidFill>
+                <a:latin typeface="微软雅黑"/>
+                <a:ea typeface="微软雅黑"/>
+                <a:cs typeface="微软雅黑"/>
+              </a:defRPr>
+            </a:pPr>
+            <a:r>
+              <a:rPr sz="900" b="0">
+                <a:solidFill>
+                  <a:srgbClr val="A5A5A5"/>
+                </a:solidFill>
+                <a:latin typeface="微软雅黑"/>
+                <a:ea typeface="微软雅黑"/>
+                <a:cs typeface="微软雅黑"/>
+              </a:rPr>
+              <a:t>3</a:t>
             </a:r>
           </a:p>
         </p:txBody>
